--- a/docs/NeuFlow_v3_status.pptx
+++ b/docs/NeuFlow_v3_status.pptx
@@ -13,6 +13,9 @@
     <p:sldId id="261" r:id="rId12"/>
     <p:sldId id="262" r:id="rId13"/>
     <p:sldId id="263" r:id="rId14"/>
+    <p:sldId id="264" r:id="rId15"/>
+    <p:sldId id="265" r:id="rId16"/>
+    <p:sldId id="266" r:id="rId17"/>
   </p:sldIdLst>
   <p:sldSz cx="12191695" cy="6858000" type="screen4x3"/>
   <p:notesSz cx="6858000" cy="9144000"/>
@@ -3216,6 +3219,637 @@
 </p:sld>
 </file>
 
+<file path=ppt/slides/slide10.xml><?xml version="1.0" encoding="utf-8"?>
+<p:sld xmlns:a="http://schemas.openxmlformats.org/drawingml/2006/main" xmlns:p="http://schemas.openxmlformats.org/presentationml/2006/main" xmlns:r="http://schemas.openxmlformats.org/officeDocument/2006/relationships">
+  <p:cSld>
+    <p:spTree>
+      <p:nvGrpSpPr>
+        <p:cNvPr id="1" name=""/>
+        <p:cNvGrpSpPr/>
+        <p:nvPr/>
+      </p:nvGrpSpPr>
+      <p:grpSpPr/>
+      <p:sp>
+        <p:nvSpPr>
+          <p:cNvPr id="2" name="TextBox 1"/>
+          <p:cNvSpPr txBox="1"/>
+          <p:nvPr/>
+        </p:nvSpPr>
+        <p:spPr>
+          <a:xfrm>
+            <a:off x="685800" y="384048"/>
+            <a:ext cx="10058400" cy="274320"/>
+          </a:xfrm>
+          <a:prstGeom prst="rect">
+            <a:avLst/>
+          </a:prstGeom>
+          <a:noFill/>
+        </p:spPr>
+        <p:txBody>
+          <a:bodyPr wrap="square">
+            <a:spAutoFit/>
+          </a:bodyPr>
+          <a:lstStyle/>
+          <a:p>
+            <a:r>
+              <a:rPr sz="1050" b="1">
+                <a:solidFill>
+                  <a:srgbClr val="1F4E79"/>
+                </a:solidFill>
+                <a:latin typeface="Calibri"/>
+              </a:rPr>
+              <a:t>ANTICIPATED QUESTIONS</a:t>
+            </a:r>
+          </a:p>
+        </p:txBody>
+      </p:sp>
+      <p:sp>
+        <p:nvSpPr>
+          <p:cNvPr id="3" name="TextBox 2"/>
+          <p:cNvSpPr txBox="1"/>
+          <p:nvPr/>
+        </p:nvSpPr>
+        <p:spPr>
+          <a:xfrm>
+            <a:off x="667512" y="658368"/>
+            <a:ext cx="10789920" cy="731520"/>
+          </a:xfrm>
+          <a:prstGeom prst="rect">
+            <a:avLst/>
+          </a:prstGeom>
+          <a:noFill/>
+        </p:spPr>
+        <p:txBody>
+          <a:bodyPr wrap="square">
+            <a:spAutoFit/>
+          </a:bodyPr>
+          <a:lstStyle/>
+          <a:p>
+            <a:r>
+              <a:rPr sz="2400" b="1">
+                <a:solidFill>
+                  <a:srgbClr val="20242B"/>
+                </a:solidFill>
+                <a:latin typeface="Calibri"/>
+              </a:rPr>
+              <a:t>First-principles FAQ</a:t>
+            </a:r>
+          </a:p>
+        </p:txBody>
+      </p:sp>
+      <p:sp>
+        <p:nvSpPr>
+          <p:cNvPr id="4" name="TextBox 3"/>
+          <p:cNvSpPr txBox="1"/>
+          <p:nvPr/>
+        </p:nvSpPr>
+        <p:spPr>
+          <a:xfrm>
+            <a:off x="685800" y="1554480"/>
+            <a:ext cx="10789920" cy="4023360"/>
+          </a:xfrm>
+          <a:prstGeom prst="rect">
+            <a:avLst/>
+          </a:prstGeom>
+          <a:noFill/>
+        </p:spPr>
+        <p:txBody>
+          <a:bodyPr wrap="square">
+            <a:spAutoFit/>
+          </a:bodyPr>
+          <a:lstStyle/>
+          <a:p>
+            <a:r>
+              <a:rPr sz="1250" b="0">
+                <a:solidFill>
+                  <a:srgbClr val="20242B"/>
+                </a:solidFill>
+                <a:latin typeface="Calibri"/>
+              </a:rPr>
+              <a:t>Why is flow queryable at continuous coords?  Bilinear feature interpolation + an MLP = a function defined at every real (x, y).</a:t>
+            </a:r>
+          </a:p>
+          <a:p>
+            <a:r>
+              <a:rPr sz="1250" b="0">
+                <a:solidFill>
+                  <a:srgbClr val="20242B"/>
+                </a:solidFill>
+                <a:latin typeface="Calibri"/>
+              </a:rPr>
+              <a:t/>
+            </a:r>
+          </a:p>
+          <a:p>
+            <a:r>
+              <a:rPr sz="1250" b="0">
+                <a:solidFill>
+                  <a:srgbClr val="20242B"/>
+                </a:solidFill>
+                <a:latin typeface="Calibri"/>
+              </a:rPr>
+              <a:t>Why freeze the backbone?  Joint training needs ~800K steps (InfiniDepth); at 30K the decoder chases moving features and diverges.</a:t>
+            </a:r>
+          </a:p>
+          <a:p>
+            <a:r>
+              <a:rPr sz="1250" b="0">
+                <a:solidFill>
+                  <a:srgbClr val="20242B"/>
+                </a:solidFill>
+                <a:latin typeface="Calibri"/>
+              </a:rPr>
+              <a:t/>
+            </a:r>
+          </a:p>
+          <a:p>
+            <a:r>
+              <a:rPr sz="1250" b="0">
+                <a:solidFill>
+                  <a:srgbClr val="20242B"/>
+                </a:solidFill>
+                <a:latin typeface="Calibri"/>
+              </a:rPr>
+              <a:t>Is sparse an approximation?  No — the identical function at fewer points; matches dense to 0.00 px at the same coordinates.</a:t>
+            </a:r>
+          </a:p>
+          <a:p>
+            <a:r>
+              <a:rPr sz="1250" b="0">
+                <a:solidFill>
+                  <a:srgbClr val="20242B"/>
+                </a:solidFill>
+                <a:latin typeface="Calibri"/>
+              </a:rPr>
+              <a:t/>
+            </a:r>
+          </a:p>
+          <a:p>
+            <a:r>
+              <a:rPr sz="1250" b="0">
+                <a:solidFill>
+                  <a:srgbClr val="20242B"/>
+                </a:solidFill>
+                <a:latin typeface="Calibri"/>
+              </a:rPr>
+              <a:t>Why does chairs training beat driving-data training on driving data?  Diverse large motions fix the error tail; 5 scenes teach memorization.</a:t>
+            </a:r>
+          </a:p>
+          <a:p>
+            <a:r>
+              <a:rPr sz="1250" b="0">
+                <a:solidFill>
+                  <a:srgbClr val="20242B"/>
+                </a:solidFill>
+                <a:latin typeface="Calibri"/>
+              </a:rPr>
+              <a:t/>
+            </a:r>
+          </a:p>
+          <a:p>
+            <a:r>
+              <a:rPr sz="1250" b="0">
+                <a:solidFill>
+                  <a:srgbClr val="20242B"/>
+                </a:solidFill>
+                <a:latin typeface="Calibri"/>
+              </a:rPr>
+              <a:t>If sparse is fast, why is dense slow?  Dense = 479k MLP calls (~293 ms); v2 upsampling is one fused conv. Dense is not the use case.</a:t>
+            </a:r>
+          </a:p>
+          <a:p>
+            <a:r>
+              <a:rPr sz="1250" b="0">
+                <a:solidFill>
+                  <a:srgbClr val="20242B"/>
+                </a:solidFill>
+                <a:latin typeface="Calibri"/>
+              </a:rPr>
+              <a:t/>
+            </a:r>
+          </a:p>
+          <a:p>
+            <a:r>
+              <a:rPr sz="1250" b="0">
+                <a:solidFill>
+                  <a:srgbClr val="20242B"/>
+                </a:solidFill>
+                <a:latin typeface="Calibri"/>
+              </a:rPr>
+              <a:t>What limits 1px accuracy?  The head could not see the sub-cell position — exactly what the Fourier PE ablation injects.</a:t>
+            </a:r>
+          </a:p>
+        </p:txBody>
+      </p:sp>
+      <p:sp>
+        <p:nvSpPr>
+          <p:cNvPr id="5" name="TextBox 4"/>
+          <p:cNvSpPr txBox="1"/>
+          <p:nvPr/>
+        </p:nvSpPr>
+        <p:spPr>
+          <a:xfrm>
+            <a:off x="960120" y="5760720"/>
+            <a:ext cx="10332720" cy="548640"/>
+          </a:xfrm>
+          <a:prstGeom prst="rect">
+            <a:avLst/>
+          </a:prstGeom>
+          <a:noFill/>
+        </p:spPr>
+        <p:txBody>
+          <a:bodyPr wrap="square">
+            <a:spAutoFit/>
+          </a:bodyPr>
+          <a:lstStyle/>
+          <a:p>
+            <a:r>
+              <a:rPr sz="1150" b="1">
+                <a:solidFill>
+                  <a:srgbClr val="1F4E79"/>
+                </a:solidFill>
+                <a:latin typeface="Calibri"/>
+              </a:rPr>
+              <a:t>Takeaway   Full FAQ + derivations: docs/NeuFlow_v3_Report.md sections 5-6.</a:t>
+            </a:r>
+          </a:p>
+        </p:txBody>
+      </p:sp>
+      <p:sp>
+        <p:nvSpPr>
+          <p:cNvPr id="6" name="TextBox 5"/>
+          <p:cNvSpPr txBox="1"/>
+          <p:nvPr/>
+        </p:nvSpPr>
+        <p:spPr>
+          <a:xfrm>
+            <a:off x="685800" y="6419088"/>
+            <a:ext cx="7315200" cy="274320"/>
+          </a:xfrm>
+          <a:prstGeom prst="rect">
+            <a:avLst/>
+          </a:prstGeom>
+          <a:noFill/>
+        </p:spPr>
+        <p:txBody>
+          <a:bodyPr wrap="square">
+            <a:spAutoFit/>
+          </a:bodyPr>
+          <a:lstStyle/>
+          <a:p>
+            <a:r>
+              <a:rPr sz="900" b="0">
+                <a:solidFill>
+                  <a:srgbClr val="7B838F"/>
+                </a:solidFill>
+                <a:latin typeface="Calibri"/>
+              </a:rPr>
+              <a:t>NeuFlow v3  ·  status</a:t>
+            </a:r>
+          </a:p>
+        </p:txBody>
+      </p:sp>
+      <p:sp>
+        <p:nvSpPr>
+          <p:cNvPr id="7" name="TextBox 6"/>
+          <p:cNvSpPr txBox="1"/>
+          <p:nvPr/>
+        </p:nvSpPr>
+        <p:spPr>
+          <a:xfrm>
+            <a:off x="10607040" y="6419088"/>
+            <a:ext cx="1097280" cy="274320"/>
+          </a:xfrm>
+          <a:prstGeom prst="rect">
+            <a:avLst/>
+          </a:prstGeom>
+          <a:noFill/>
+        </p:spPr>
+        <p:txBody>
+          <a:bodyPr wrap="square">
+            <a:spAutoFit/>
+          </a:bodyPr>
+          <a:lstStyle/>
+          <a:p>
+            <a:r>
+              <a:rPr sz="900" b="0">
+                <a:solidFill>
+                  <a:srgbClr val="7B838F"/>
+                </a:solidFill>
+                <a:latin typeface="Calibri"/>
+              </a:rPr>
+              <a:t>10</a:t>
+            </a:r>
+          </a:p>
+        </p:txBody>
+      </p:sp>
+    </p:spTree>
+  </p:cSld>
+  <p:clrMapOvr>
+    <a:masterClrMapping/>
+  </p:clrMapOvr>
+</p:sld>
+</file>
+
+<file path=ppt/slides/slide11.xml><?xml version="1.0" encoding="utf-8"?>
+<p:sld xmlns:a="http://schemas.openxmlformats.org/drawingml/2006/main" xmlns:p="http://schemas.openxmlformats.org/presentationml/2006/main" xmlns:r="http://schemas.openxmlformats.org/officeDocument/2006/relationships">
+  <p:cSld>
+    <p:spTree>
+      <p:nvGrpSpPr>
+        <p:cNvPr id="1" name=""/>
+        <p:cNvGrpSpPr/>
+        <p:nvPr/>
+      </p:nvGrpSpPr>
+      <p:grpSpPr/>
+      <p:sp>
+        <p:nvSpPr>
+          <p:cNvPr id="2" name="TextBox 1"/>
+          <p:cNvSpPr txBox="1"/>
+          <p:nvPr/>
+        </p:nvSpPr>
+        <p:spPr>
+          <a:xfrm>
+            <a:off x="685800" y="384048"/>
+            <a:ext cx="10058400" cy="274320"/>
+          </a:xfrm>
+          <a:prstGeom prst="rect">
+            <a:avLst/>
+          </a:prstGeom>
+          <a:noFill/>
+        </p:spPr>
+        <p:txBody>
+          <a:bodyPr wrap="square">
+            <a:spAutoFit/>
+          </a:bodyPr>
+          <a:lstStyle/>
+          <a:p>
+            <a:r>
+              <a:rPr sz="1050" b="1">
+                <a:solidFill>
+                  <a:srgbClr val="1F4E79"/>
+                </a:solidFill>
+                <a:latin typeface="Calibri"/>
+              </a:rPr>
+              <a:t>NEXT</a:t>
+            </a:r>
+          </a:p>
+        </p:txBody>
+      </p:sp>
+      <p:sp>
+        <p:nvSpPr>
+          <p:cNvPr id="3" name="TextBox 2"/>
+          <p:cNvSpPr txBox="1"/>
+          <p:nvPr/>
+        </p:nvSpPr>
+        <p:spPr>
+          <a:xfrm>
+            <a:off x="667512" y="658368"/>
+            <a:ext cx="10789920" cy="731520"/>
+          </a:xfrm>
+          <a:prstGeom prst="rect">
+            <a:avLst/>
+          </a:prstGeom>
+          <a:noFill/>
+        </p:spPr>
+        <p:txBody>
+          <a:bodyPr wrap="square">
+            <a:spAutoFit/>
+          </a:bodyPr>
+          <a:lstStyle/>
+          <a:p>
+            <a:r>
+              <a:rPr sz="2400" b="1">
+                <a:solidFill>
+                  <a:srgbClr val="20242B"/>
+                </a:solidFill>
+                <a:latin typeface="Calibri"/>
+              </a:rPr>
+              <a:t>Next steps</a:t>
+            </a:r>
+          </a:p>
+        </p:txBody>
+      </p:sp>
+      <p:sp>
+        <p:nvSpPr>
+          <p:cNvPr id="4" name="TextBox 3"/>
+          <p:cNvSpPr txBox="1"/>
+          <p:nvPr/>
+        </p:nvSpPr>
+        <p:spPr>
+          <a:xfrm>
+            <a:off x="685800" y="1737360"/>
+            <a:ext cx="10515600" cy="3474720"/>
+          </a:xfrm>
+          <a:prstGeom prst="rect">
+            <a:avLst/>
+          </a:prstGeom>
+          <a:noFill/>
+        </p:spPr>
+        <p:txBody>
+          <a:bodyPr wrap="square">
+            <a:spAutoFit/>
+          </a:bodyPr>
+          <a:lstStyle/>
+          <a:p>
+            <a:r>
+              <a:rPr sz="1400" b="0">
+                <a:solidFill>
+                  <a:srgbClr val="20242B"/>
+                </a:solidFill>
+                <a:latin typeface="Calibri"/>
+              </a:rPr>
+              <a:t>1. Fourier PE ablation — same chairs recipe, +sub-cell encoding; targets 1px accuracy directly.</a:t>
+            </a:r>
+          </a:p>
+          <a:p>
+            <a:r>
+              <a:rPr sz="1400" b="0">
+                <a:solidFill>
+                  <a:srgbClr val="20242B"/>
+                </a:solidFill>
+                <a:latin typeface="Calibri"/>
+              </a:rPr>
+              <a:t/>
+            </a:r>
+          </a:p>
+          <a:p>
+            <a:r>
+              <a:rPr sz="1400" b="0">
+                <a:solidFill>
+                  <a:srgbClr val="20242B"/>
+                </a:solidFill>
+                <a:latin typeface="Calibri"/>
+              </a:rPr>
+              <a:t>2. Mixed chairs + vkitti2_all training — one dataloader change; expected to hold 2.27 EPE while recovering precision.</a:t>
+            </a:r>
+          </a:p>
+          <a:p>
+            <a:r>
+              <a:rPr sz="1400" b="0">
+                <a:solidFill>
+                  <a:srgbClr val="20242B"/>
+                </a:solidFill>
+                <a:latin typeface="Calibri"/>
+              </a:rPr>
+              <a:t/>
+            </a:r>
+          </a:p>
+          <a:p>
+            <a:r>
+              <a:rPr sz="1400" b="0">
+                <a:solidFill>
+                  <a:srgbClr val="20242B"/>
+                </a:solidFill>
+                <a:latin typeface="Calibri"/>
+              </a:rPr>
+              <a:t>3. Jetson Orin benchmark — the O(N) story is strongest where dense flow cannot run at all.</a:t>
+            </a:r>
+          </a:p>
+          <a:p>
+            <a:r>
+              <a:rPr sz="1400" b="0">
+                <a:solidFill>
+                  <a:srgbClr val="20242B"/>
+                </a:solidFill>
+                <a:latin typeface="Calibri"/>
+              </a:rPr>
+              <a:t/>
+            </a:r>
+          </a:p>
+          <a:p>
+            <a:r>
+              <a:rPr sz="1400" b="0">
+                <a:solidFill>
+                  <a:srgbClr val="20242B"/>
+                </a:solidFill>
+                <a:latin typeface="Calibri"/>
+              </a:rPr>
+              <a:t>4. Thesis experiments — registration/mapping demo on advisor-provided survey imagery; Spring dataset for</a:t>
+            </a:r>
+          </a:p>
+          <a:p>
+            <a:r>
+              <a:rPr sz="1400" b="0">
+                <a:solidFill>
+                  <a:srgbClr val="20242B"/>
+                </a:solidFill>
+                <a:latin typeface="Calibri"/>
+              </a:rPr>
+              <a:t>    above-input-resolution querying (GT at 2x input resolution — a test only queryable decoders can take natively).</a:t>
+            </a:r>
+          </a:p>
+        </p:txBody>
+      </p:sp>
+      <p:sp>
+        <p:nvSpPr>
+          <p:cNvPr id="5" name="TextBox 4"/>
+          <p:cNvSpPr txBox="1"/>
+          <p:nvPr/>
+        </p:nvSpPr>
+        <p:spPr>
+          <a:xfrm>
+            <a:off x="960120" y="5760720"/>
+            <a:ext cx="10332720" cy="548640"/>
+          </a:xfrm>
+          <a:prstGeom prst="rect">
+            <a:avLst/>
+          </a:prstGeom>
+          <a:noFill/>
+        </p:spPr>
+        <p:txBody>
+          <a:bodyPr wrap="square">
+            <a:spAutoFit/>
+          </a:bodyPr>
+          <a:lstStyle/>
+          <a:p>
+            <a:r>
+              <a:rPr sz="1150" b="1">
+                <a:solidFill>
+                  <a:srgbClr val="1F4E79"/>
+                </a:solidFill>
+                <a:latin typeface="Calibri"/>
+              </a:rPr>
+              <a:t>Takeaway   The architecture is validated; remaining work is training composition and edge deployment.</a:t>
+            </a:r>
+          </a:p>
+        </p:txBody>
+      </p:sp>
+      <p:sp>
+        <p:nvSpPr>
+          <p:cNvPr id="6" name="TextBox 5"/>
+          <p:cNvSpPr txBox="1"/>
+          <p:nvPr/>
+        </p:nvSpPr>
+        <p:spPr>
+          <a:xfrm>
+            <a:off x="685800" y="6419088"/>
+            <a:ext cx="7315200" cy="274320"/>
+          </a:xfrm>
+          <a:prstGeom prst="rect">
+            <a:avLst/>
+          </a:prstGeom>
+          <a:noFill/>
+        </p:spPr>
+        <p:txBody>
+          <a:bodyPr wrap="square">
+            <a:spAutoFit/>
+          </a:bodyPr>
+          <a:lstStyle/>
+          <a:p>
+            <a:r>
+              <a:rPr sz="900" b="0">
+                <a:solidFill>
+                  <a:srgbClr val="7B838F"/>
+                </a:solidFill>
+                <a:latin typeface="Calibri"/>
+              </a:rPr>
+              <a:t>NeuFlow v3  ·  status</a:t>
+            </a:r>
+          </a:p>
+        </p:txBody>
+      </p:sp>
+      <p:sp>
+        <p:nvSpPr>
+          <p:cNvPr id="7" name="TextBox 6"/>
+          <p:cNvSpPr txBox="1"/>
+          <p:nvPr/>
+        </p:nvSpPr>
+        <p:spPr>
+          <a:xfrm>
+            <a:off x="10607040" y="6419088"/>
+            <a:ext cx="1097280" cy="274320"/>
+          </a:xfrm>
+          <a:prstGeom prst="rect">
+            <a:avLst/>
+          </a:prstGeom>
+          <a:noFill/>
+        </p:spPr>
+        <p:txBody>
+          <a:bodyPr wrap="square">
+            <a:spAutoFit/>
+          </a:bodyPr>
+          <a:lstStyle/>
+          <a:p>
+            <a:r>
+              <a:rPr sz="900" b="0">
+                <a:solidFill>
+                  <a:srgbClr val="7B838F"/>
+                </a:solidFill>
+                <a:latin typeface="Calibri"/>
+              </a:rPr>
+              <a:t>11</a:t>
+            </a:r>
+          </a:p>
+        </p:txBody>
+      </p:sp>
+    </p:spTree>
+  </p:cSld>
+  <p:clrMapOvr>
+    <a:masterClrMapping/>
+  </p:clrMapOvr>
+</p:sld>
+</file>
+
 <file path=ppt/slides/slide2.xml><?xml version="1.0" encoding="utf-8"?>
 <p:sld xmlns:a="http://schemas.openxmlformats.org/drawingml/2006/main" xmlns:p="http://schemas.openxmlformats.org/presentationml/2006/main" xmlns:r="http://schemas.openxmlformats.org/officeDocument/2006/relationships">
   <p:cSld>
@@ -5082,7 +5716,7 @@
                 </a:solidFill>
                 <a:latin typeface="Calibri"/>
               </a:rPr>
-              <a:t>RESULT 3 OF 3  ·  RTX 4060 LAPTOP 8GB, FP16, 384x1248</a:t>
+              <a:t>VISUAL RESULTS  ·  VKITTI2 SCENE18</a:t>
             </a:r>
           </a:p>
         </p:txBody>
@@ -5116,14 +5750,14 @@
                 </a:solidFill>
                 <a:latin typeface="Calibri"/>
               </a:rPr>
-              <a:t>Compute: v2 vs v3</a:t>
+              <a:t>Seeing the output: dense fields and sparse queries</a:t>
             </a:r>
           </a:p>
         </p:txBody>
       </p:sp>
       <p:pic>
         <p:nvPicPr>
-          <p:cNvPr id="4" name="Picture 3" descr="latency_v2_v3.png"/>
+          <p:cNvPr id="4" name="Picture 3" descr="sparse_queries.png"/>
           <p:cNvPicPr>
             <a:picLocks noChangeAspect="1"/>
           </p:cNvPicPr>
@@ -5137,8 +5771,8 @@
         </p:blipFill>
         <p:spPr>
           <a:xfrm>
-            <a:off x="685800" y="1600200"/>
-            <a:ext cx="7863840" cy="3214910"/>
+            <a:off x="685800" y="1508760"/>
+            <a:ext cx="7498079" cy="2499360"/>
           </a:xfrm>
           <a:prstGeom prst="rect">
             <a:avLst/>
@@ -5153,8 +5787,8 @@
         </p:nvSpPr>
         <p:spPr>
           <a:xfrm>
-            <a:off x="8778240" y="1691640"/>
-            <a:ext cx="2743200" cy="3931920"/>
+            <a:off x="8412480" y="1600200"/>
+            <a:ext cx="3200400" cy="2926080"/>
           </a:xfrm>
           <a:prstGeom prst="rect">
             <a:avLst/>
@@ -5174,7 +5808,7 @@
                 </a:solidFill>
                 <a:latin typeface="Calibri"/>
               </a:rPr>
-              <a:t>Params:</a:t>
+              <a:t>300 corner-detected queries,</a:t>
             </a:r>
           </a:p>
           <a:p>
@@ -5185,7 +5819,7 @@
                 </a:solidFill>
                 <a:latin typeface="Calibri"/>
               </a:rPr>
-              <a:t>9.03M (v2)</a:t>
+              <a:t>decoded in ONE 1.6 ms call</a:t>
             </a:r>
           </a:p>
           <a:p>
@@ -5196,7 +5830,7 @@
                 </a:solidFill>
                 <a:latin typeface="Calibri"/>
               </a:rPr>
-              <a:t>7.83M (v3)</a:t>
+              <a:t>(0.05% of a dense field).</a:t>
             </a:r>
           </a:p>
           <a:p>
@@ -5218,7 +5852,7 @@
                 </a:solidFill>
                 <a:latin typeface="Calibri"/>
               </a:rPr>
-              <a:t>Sparse v3 costs the</a:t>
+              <a:t>Arrow color = flow magnitude.</a:t>
             </a:r>
           </a:p>
           <a:p>
@@ -5229,7 +5863,7 @@
                 </a:solidFill>
                 <a:latin typeface="Calibri"/>
               </a:rPr>
-              <a:t>same as v2 dense —</a:t>
+              <a:t>Left roadside streams left,</a:t>
             </a:r>
           </a:p>
           <a:p>
@@ -5240,7 +5874,7 @@
                 </a:solidFill>
                 <a:latin typeface="Calibri"/>
               </a:rPr>
-              <a:t>but extra queries on</a:t>
+              <a:t>right side streams right —</a:t>
             </a:r>
           </a:p>
           <a:p>
@@ -5251,7 +5885,7 @@
                 </a:solidFill>
                 <a:latin typeface="Calibri"/>
               </a:rPr>
-              <a:t>a processed pair are</a:t>
+              <a:t>forward ego-motion, correctly</a:t>
             </a:r>
           </a:p>
           <a:p>
@@ -5262,51 +5896,7 @@
                 </a:solidFill>
                 <a:latin typeface="Calibri"/>
               </a:rPr>
-              <a:t>~20x cheaper than</a:t>
-            </a:r>
-          </a:p>
-          <a:p>
-            <a:r>
-              <a:rPr sz="1200" b="0">
-                <a:solidFill>
-                  <a:srgbClr val="20242B"/>
-                </a:solidFill>
-                <a:latin typeface="Calibri"/>
-              </a:rPr>
-              <a:t>v2 recomputing.</a:t>
-            </a:r>
-          </a:p>
-          <a:p>
-            <a:r>
-              <a:rPr sz="1200" b="0">
-                <a:solidFill>
-                  <a:srgbClr val="20242B"/>
-                </a:solidFill>
-                <a:latin typeface="Calibri"/>
-              </a:rPr>
-              <a:t/>
-            </a:r>
-          </a:p>
-          <a:p>
-            <a:r>
-              <a:rPr sz="1200" b="0">
-                <a:solidFill>
-                  <a:srgbClr val="20242B"/>
-                </a:solidFill>
-                <a:latin typeface="Calibri"/>
-              </a:rPr>
-              <a:t>v3 dense (327 ms) is</a:t>
-            </a:r>
-          </a:p>
-          <a:p>
-            <a:r>
-              <a:rPr sz="1200" b="0">
-                <a:solidFill>
-                  <a:srgbClr val="20242B"/>
-                </a:solidFill>
-                <a:latin typeface="Calibri"/>
-              </a:rPr>
-              <a:t>not the use case.</a:t>
+              <a:t>recovered per point.</a:t>
             </a:r>
           </a:p>
         </p:txBody>
@@ -5319,8 +5909,8 @@
         </p:nvSpPr>
         <p:spPr>
           <a:xfrm>
-            <a:off x="960120" y="5806440"/>
-            <a:ext cx="10332720" cy="548640"/>
+            <a:off x="685800" y="4206240"/>
+            <a:ext cx="10789920" cy="365760"/>
           </a:xfrm>
           <a:prstGeom prst="rect">
             <a:avLst/>
@@ -5334,13 +5924,13 @@
           <a:lstStyle/>
           <a:p>
             <a:r>
-              <a:rPr sz="1150" b="1">
-                <a:solidFill>
-                  <a:srgbClr val="1F4E79"/>
-                </a:solidFill>
-                <a:latin typeface="Calibri"/>
-              </a:rPr>
-              <a:t>Takeaway   For sparse workloads (registration, tracking, mapping) v3 is strictly cheaper; parity latency, fewer params, O(N) scaling.</a:t>
+              <a:rPr sz="1100" b="0">
+                <a:solidFill>
+                  <a:srgbClr val="7B838F"/>
+                </a:solidFill>
+                <a:latin typeface="Calibri"/>
+              </a:rPr>
+              <a:t>Full-field comparisons (input / GT / v2 / v3 / error maps): results/visuals/compare_0.png, compare_1.png</a:t>
             </a:r>
           </a:p>
         </p:txBody>
@@ -5353,8 +5943,8 @@
         </p:nvSpPr>
         <p:spPr>
           <a:xfrm>
-            <a:off x="685800" y="6419088"/>
-            <a:ext cx="7315200" cy="274320"/>
+            <a:off x="960120" y="5760720"/>
+            <a:ext cx="10332720" cy="548640"/>
           </a:xfrm>
           <a:prstGeom prst="rect">
             <a:avLst/>
@@ -5368,6 +5958,40 @@
           <a:lstStyle/>
           <a:p>
             <a:r>
+              <a:rPr sz="1150" b="1">
+                <a:solidFill>
+                  <a:srgbClr val="1F4E79"/>
+                </a:solidFill>
+                <a:latin typeface="Calibri"/>
+              </a:rPr>
+              <a:t>Takeaway   v3 flow fields are structurally clean; both models fail in the same hard regions (dense foliage).</a:t>
+            </a:r>
+          </a:p>
+        </p:txBody>
+      </p:sp>
+      <p:sp>
+        <p:nvSpPr>
+          <p:cNvPr id="8" name="TextBox 7"/>
+          <p:cNvSpPr txBox="1"/>
+          <p:nvPr/>
+        </p:nvSpPr>
+        <p:spPr>
+          <a:xfrm>
+            <a:off x="685800" y="6419088"/>
+            <a:ext cx="7315200" cy="274320"/>
+          </a:xfrm>
+          <a:prstGeom prst="rect">
+            <a:avLst/>
+          </a:prstGeom>
+          <a:noFill/>
+        </p:spPr>
+        <p:txBody>
+          <a:bodyPr wrap="square">
+            <a:spAutoFit/>
+          </a:bodyPr>
+          <a:lstStyle/>
+          <a:p>
+            <a:r>
               <a:rPr sz="900" b="0">
                 <a:solidFill>
                   <a:srgbClr val="7B838F"/>
@@ -5381,7 +6005,7 @@
       </p:sp>
       <p:sp>
         <p:nvSpPr>
-          <p:cNvPr id="8" name="TextBox 7"/>
+          <p:cNvPr id="9" name="TextBox 8"/>
           <p:cNvSpPr txBox="1"/>
           <p:nvPr/>
         </p:nvSpPr>
@@ -5460,7 +6084,7 @@
                 </a:solidFill>
                 <a:latin typeface="Calibri"/>
               </a:rPr>
-              <a:t>OBJECTIVES</a:t>
+              <a:t>RESULT 3 OF 3  ·  RTX 4060 LAPTOP 8GB, FP16, 384x1248</a:t>
             </a:r>
           </a:p>
         </p:txBody>
@@ -5494,21 +6118,45 @@
                 </a:solidFill>
                 <a:latin typeface="Calibri"/>
               </a:rPr>
-              <a:t>Better EPE at less compute, edge-capable — where we stand</a:t>
-            </a:r>
-          </a:p>
-        </p:txBody>
-      </p:sp>
-      <p:sp>
-        <p:nvSpPr>
-          <p:cNvPr id="4" name="TextBox 3"/>
+              <a:t>Compute: v2 vs v3</a:t>
+            </a:r>
+          </a:p>
+        </p:txBody>
+      </p:sp>
+      <p:pic>
+        <p:nvPicPr>
+          <p:cNvPr id="4" name="Picture 3" descr="latency_v2_v3.png"/>
+          <p:cNvPicPr>
+            <a:picLocks noChangeAspect="1"/>
+          </p:cNvPicPr>
+          <p:nvPr/>
+        </p:nvPicPr>
+        <p:blipFill>
+          <a:blip r:embed="rId2"/>
+          <a:stretch>
+            <a:fillRect/>
+          </a:stretch>
+        </p:blipFill>
+        <p:spPr>
+          <a:xfrm>
+            <a:off x="685800" y="1600200"/>
+            <a:ext cx="7863840" cy="3214910"/>
+          </a:xfrm>
+          <a:prstGeom prst="rect">
+            <a:avLst/>
+          </a:prstGeom>
+        </p:spPr>
+      </p:pic>
+      <p:sp>
+        <p:nvSpPr>
+          <p:cNvPr id="5" name="TextBox 4"/>
           <p:cNvSpPr txBox="1"/>
           <p:nvPr/>
         </p:nvSpPr>
         <p:spPr>
           <a:xfrm>
-            <a:off x="685800" y="1737360"/>
-            <a:ext cx="10515600" cy="3566160"/>
+            <a:off x="8778240" y="1691640"/>
+            <a:ext cx="2743200" cy="3931920"/>
           </a:xfrm>
           <a:prstGeom prst="rect">
             <a:avLst/>
@@ -5522,18 +6170,40 @@
           <a:lstStyle/>
           <a:p>
             <a:r>
-              <a:rPr sz="1400" b="0">
-                <a:solidFill>
-                  <a:srgbClr val="20242B"/>
-                </a:solidFill>
-                <a:latin typeface="Calibri"/>
-              </a:rPr>
-              <a:t>Beat v2 mean EPE                        DONE — 2.275 vs 2.324 (chairs-only training)</a:t>
-            </a:r>
-          </a:p>
-          <a:p>
-            <a:r>
-              <a:rPr sz="1400" b="0">
+              <a:rPr sz="1200" b="0">
+                <a:solidFill>
+                  <a:srgbClr val="20242B"/>
+                </a:solidFill>
+                <a:latin typeface="Calibri"/>
+              </a:rPr>
+              <a:t>Params:</a:t>
+            </a:r>
+          </a:p>
+          <a:p>
+            <a:r>
+              <a:rPr sz="1200" b="0">
+                <a:solidFill>
+                  <a:srgbClr val="20242B"/>
+                </a:solidFill>
+                <a:latin typeface="Calibri"/>
+              </a:rPr>
+              <a:t>9.03M (v2)</a:t>
+            </a:r>
+          </a:p>
+          <a:p>
+            <a:r>
+              <a:rPr sz="1200" b="0">
+                <a:solidFill>
+                  <a:srgbClr val="20242B"/>
+                </a:solidFill>
+                <a:latin typeface="Calibri"/>
+              </a:rPr>
+              <a:t>7.83M (v3)</a:t>
+            </a:r>
+          </a:p>
+          <a:p>
+            <a:r>
+              <a:rPr sz="1200" b="0">
                 <a:solidFill>
                   <a:srgbClr val="20242B"/>
                 </a:solidFill>
@@ -5544,18 +6214,73 @@
           </a:p>
           <a:p>
             <a:r>
-              <a:rPr sz="1400" b="0">
-                <a:solidFill>
-                  <a:srgbClr val="20242B"/>
-                </a:solidFill>
-                <a:latin typeface="Calibri"/>
-              </a:rPr>
-              <a:t>Less compute (sparse use case)          DONE — ~35 ms total, O(N) queries, 13% fewer params, 2.2 GB VRAM</a:t>
-            </a:r>
-          </a:p>
-          <a:p>
-            <a:r>
-              <a:rPr sz="1400" b="0">
+              <a:rPr sz="1200" b="0">
+                <a:solidFill>
+                  <a:srgbClr val="20242B"/>
+                </a:solidFill>
+                <a:latin typeface="Calibri"/>
+              </a:rPr>
+              <a:t>Sparse v3 costs the</a:t>
+            </a:r>
+          </a:p>
+          <a:p>
+            <a:r>
+              <a:rPr sz="1200" b="0">
+                <a:solidFill>
+                  <a:srgbClr val="20242B"/>
+                </a:solidFill>
+                <a:latin typeface="Calibri"/>
+              </a:rPr>
+              <a:t>same as v2 dense —</a:t>
+            </a:r>
+          </a:p>
+          <a:p>
+            <a:r>
+              <a:rPr sz="1200" b="0">
+                <a:solidFill>
+                  <a:srgbClr val="20242B"/>
+                </a:solidFill>
+                <a:latin typeface="Calibri"/>
+              </a:rPr>
+              <a:t>but extra queries on</a:t>
+            </a:r>
+          </a:p>
+          <a:p>
+            <a:r>
+              <a:rPr sz="1200" b="0">
+                <a:solidFill>
+                  <a:srgbClr val="20242B"/>
+                </a:solidFill>
+                <a:latin typeface="Calibri"/>
+              </a:rPr>
+              <a:t>a processed pair are</a:t>
+            </a:r>
+          </a:p>
+          <a:p>
+            <a:r>
+              <a:rPr sz="1200" b="0">
+                <a:solidFill>
+                  <a:srgbClr val="20242B"/>
+                </a:solidFill>
+                <a:latin typeface="Calibri"/>
+              </a:rPr>
+              <a:t>~20x cheaper than</a:t>
+            </a:r>
+          </a:p>
+          <a:p>
+            <a:r>
+              <a:rPr sz="1200" b="0">
+                <a:solidFill>
+                  <a:srgbClr val="20242B"/>
+                </a:solidFill>
+                <a:latin typeface="Calibri"/>
+              </a:rPr>
+              <a:t>v2 recomputing.</a:t>
+            </a:r>
+          </a:p>
+          <a:p>
+            <a:r>
+              <a:rPr sz="1200" b="0">
                 <a:solidFill>
                   <a:srgbClr val="20242B"/>
                 </a:solidFill>
@@ -5566,70 +6291,37 @@
           </a:p>
           <a:p>
             <a:r>
-              <a:rPr sz="1400" b="0">
-                <a:solidFill>
-                  <a:srgbClr val="20242B"/>
-                </a:solidFill>
-                <a:latin typeface="Calibri"/>
-              </a:rPr>
-              <a:t>Sub-pixel precision parity (1px acc)    IN PROGRESS — Fourier PE ablation (training in progress)</a:t>
-            </a:r>
-          </a:p>
-          <a:p>
-            <a:r>
-              <a:rPr sz="1400" b="0">
-                <a:solidFill>
-                  <a:srgbClr val="20242B"/>
-                </a:solidFill>
-                <a:latin typeface="Calibri"/>
-              </a:rPr>
-              <a:t/>
-            </a:r>
-          </a:p>
-          <a:p>
-            <a:r>
-              <a:rPr sz="1400" b="0">
-                <a:solidFill>
-                  <a:srgbClr val="20242B"/>
-                </a:solidFill>
-                <a:latin typeface="Calibri"/>
-              </a:rPr>
-              <a:t>Combine chairs + vkitti2 strengths      NEXT — mixed-dataset training (forgetting measured and understood)</a:t>
-            </a:r>
-          </a:p>
-          <a:p>
-            <a:r>
-              <a:rPr sz="1400" b="0">
-                <a:solidFill>
-                  <a:srgbClr val="20242B"/>
-                </a:solidFill>
-                <a:latin typeface="Calibri"/>
-              </a:rPr>
-              <a:t/>
-            </a:r>
-          </a:p>
-          <a:p>
-            <a:r>
-              <a:rPr sz="1400" b="0">
-                <a:solidFill>
-                  <a:srgbClr val="20242B"/>
-                </a:solidFill>
-                <a:latin typeface="Calibri"/>
-              </a:rPr>
-              <a:t>Edge-device validation                  NEXT — Jetson Orin benchmark of the two-pass API</a:t>
-            </a:r>
-          </a:p>
-        </p:txBody>
-      </p:sp>
-      <p:sp>
-        <p:nvSpPr>
-          <p:cNvPr id="5" name="TextBox 4"/>
+              <a:rPr sz="1200" b="0">
+                <a:solidFill>
+                  <a:srgbClr val="20242B"/>
+                </a:solidFill>
+                <a:latin typeface="Calibri"/>
+              </a:rPr>
+              <a:t>v3 dense (327 ms) is</a:t>
+            </a:r>
+          </a:p>
+          <a:p>
+            <a:r>
+              <a:rPr sz="1200" b="0">
+                <a:solidFill>
+                  <a:srgbClr val="20242B"/>
+                </a:solidFill>
+                <a:latin typeface="Calibri"/>
+              </a:rPr>
+              <a:t>not the use case.</a:t>
+            </a:r>
+          </a:p>
+        </p:txBody>
+      </p:sp>
+      <p:sp>
+        <p:nvSpPr>
+          <p:cNvPr id="6" name="TextBox 5"/>
           <p:cNvSpPr txBox="1"/>
           <p:nvPr/>
         </p:nvSpPr>
         <p:spPr>
           <a:xfrm>
-            <a:off x="960120" y="5760720"/>
+            <a:off x="960120" y="5806440"/>
             <a:ext cx="10332720" cy="548640"/>
           </a:xfrm>
           <a:prstGeom prst="rect">
@@ -5650,14 +6342,14 @@
                 </a:solidFill>
                 <a:latin typeface="Calibri"/>
               </a:rPr>
-              <a:t>Takeaway   Two of three headline objectives are met; the remaining gap is quantified and has a targeted fix in flight.</a:t>
-            </a:r>
-          </a:p>
-        </p:txBody>
-      </p:sp>
-      <p:sp>
-        <p:nvSpPr>
-          <p:cNvPr id="6" name="TextBox 5"/>
+              <a:t>Takeaway   For sparse workloads (registration, tracking, mapping) v3 is strictly cheaper; parity latency, fewer params, O(N) scaling.</a:t>
+            </a:r>
+          </a:p>
+        </p:txBody>
+      </p:sp>
+      <p:sp>
+        <p:nvSpPr>
+          <p:cNvPr id="7" name="TextBox 6"/>
           <p:cNvSpPr txBox="1"/>
           <p:nvPr/>
         </p:nvSpPr>
@@ -5691,7 +6383,7 @@
       </p:sp>
       <p:sp>
         <p:nvSpPr>
-          <p:cNvPr id="7" name="TextBox 6"/>
+          <p:cNvPr id="8" name="TextBox 7"/>
           <p:cNvSpPr txBox="1"/>
           <p:nvPr/>
         </p:nvSpPr>
@@ -5718,7 +6410,7 @@
                 </a:solidFill>
                 <a:latin typeface="Calibri"/>
               </a:rPr>
-              <a:t>7</a:t>
+              <a:t>6</a:t>
             </a:r>
           </a:p>
         </p:txBody>
@@ -5770,7 +6462,7 @@
                 </a:solidFill>
                 <a:latin typeface="Calibri"/>
               </a:rPr>
-              <a:t>NEXT</a:t>
+              <a:t>INTERFACE</a:t>
             </a:r>
           </a:p>
         </p:txBody>
@@ -5804,7 +6496,7 @@
                 </a:solidFill>
                 <a:latin typeface="Calibri"/>
               </a:rPr>
-              <a:t>Next steps</a:t>
+              <a:t>How querying works — sizes, API, interactivity</a:t>
             </a:r>
           </a:p>
         </p:txBody>
@@ -5817,8 +6509,8 @@
         </p:nvSpPr>
         <p:spPr>
           <a:xfrm>
-            <a:off x="685800" y="1737360"/>
-            <a:ext cx="10515600" cy="3474720"/>
+            <a:off x="685800" y="1554480"/>
+            <a:ext cx="5760720" cy="2194560"/>
           </a:xfrm>
           <a:prstGeom prst="rect">
             <a:avLst/>
@@ -5832,18 +6524,29 @@
           <a:lstStyle/>
           <a:p>
             <a:r>
-              <a:rPr sz="1400" b="0">
-                <a:solidFill>
-                  <a:srgbClr val="20242B"/>
-                </a:solidFill>
-                <a:latin typeface="Calibri"/>
-              </a:rPr>
-              <a:t>1. Fourier PE ablation — same chairs recipe, +sub-cell encoding; targets 1px accuracy directly.</a:t>
-            </a:r>
-          </a:p>
-          <a:p>
-            <a:r>
-              <a:rPr sz="1400" b="0">
+              <a:rPr sz="1200" b="0">
+                <a:solidFill>
+                  <a:srgbClr val="20242B"/>
+                </a:solidFill>
+                <a:latin typeface="Calibri"/>
+              </a:rPr>
+              <a:t>Query = one continuous (x, y). N is free: 1 click to 479,232</a:t>
+            </a:r>
+          </a:p>
+          <a:p>
+            <a:r>
+              <a:rPr sz="1200" b="0">
+                <a:solidFill>
+                  <a:srgbClr val="20242B"/>
+                </a:solidFill>
+                <a:latin typeface="Calibri"/>
+              </a:rPr>
+              <a:t>(= dense at 384x1248). Sub-pixel coords are first-class.</a:t>
+            </a:r>
+          </a:p>
+          <a:p>
+            <a:r>
+              <a:rPr sz="1200" b="0">
                 <a:solidFill>
                   <a:srgbClr val="20242B"/>
                 </a:solidFill>
@@ -5854,68 +6557,46 @@
           </a:p>
           <a:p>
             <a:r>
-              <a:rPr sz="1400" b="0">
-                <a:solidFill>
-                  <a:srgbClr val="20242B"/>
-                </a:solidFill>
-                <a:latin typeface="Calibri"/>
-              </a:rPr>
-              <a:t>2. Mixed chairs + vkitti2_all training — one dataloader change; expected to hold 2.27 EPE while recovering precision.</a:t>
-            </a:r>
-          </a:p>
-          <a:p>
-            <a:r>
-              <a:rPr sz="1400" b="0">
-                <a:solidFill>
-                  <a:srgbClr val="20242B"/>
-                </a:solidFill>
-                <a:latin typeface="Calibri"/>
-              </a:rPr>
-              <a:t/>
-            </a:r>
-          </a:p>
-          <a:p>
-            <a:r>
-              <a:rPr sz="1400" b="0">
-                <a:solidFill>
-                  <a:srgbClr val="20242B"/>
-                </a:solidFill>
-                <a:latin typeface="Calibri"/>
-              </a:rPr>
-              <a:t>3. Jetson Orin benchmark — the O(N) story is strongest where dense flow cannot run at all.</a:t>
-            </a:r>
-          </a:p>
-          <a:p>
-            <a:r>
-              <a:rPr sz="1400" b="0">
-                <a:solidFill>
-                  <a:srgbClr val="20242B"/>
-                </a:solidFill>
-                <a:latin typeface="Calibri"/>
-              </a:rPr>
-              <a:t/>
-            </a:r>
-          </a:p>
-          <a:p>
-            <a:r>
-              <a:rPr sz="1400" b="0">
-                <a:solidFill>
-                  <a:srgbClr val="20242B"/>
-                </a:solidFill>
-                <a:latin typeface="Calibri"/>
-              </a:rPr>
-              <a:t>4. Thesis experiments — registration/mapping demo on advisor-provided survey imagery; Spring dataset for</a:t>
-            </a:r>
-          </a:p>
-          <a:p>
-            <a:r>
-              <a:rPr sz="1400" b="0">
-                <a:solidFill>
-                  <a:srgbClr val="20242B"/>
-                </a:solidFill>
-                <a:latin typeface="Calibri"/>
-              </a:rPr>
-              <a:t>    above-input-resolution querying (GT at 2x input resolution — a test only queryable decoders can take natively).</a:t>
+              <a:rPr sz="1200" b="0">
+                <a:solidFill>
+                  <a:srgbClr val="20242B"/>
+                </a:solidFill>
+                <a:latin typeface="Calibri"/>
+              </a:rPr>
+              <a:t>state = model.infer_coarse_state(img0, img1)   # 33 ms, once</a:t>
+            </a:r>
+          </a:p>
+          <a:p>
+            <a:r>
+              <a:rPr sz="1200" b="0">
+                <a:solidFill>
+                  <a:srgbClr val="20242B"/>
+                </a:solidFill>
+                <a:latin typeface="Calibri"/>
+              </a:rPr>
+              <a:t>flow  = model.decode_queries(state, query_coords=q)</a:t>
+            </a:r>
+          </a:p>
+          <a:p>
+            <a:r>
+              <a:rPr sz="1200" b="0">
+                <a:solidFill>
+                  <a:srgbClr val="20242B"/>
+                </a:solidFill>
+                <a:latin typeface="Calibri"/>
+              </a:rPr>
+              <a:t>        # q: [B, N, 2] pixels -&gt; [B, N, 2] flow, 1.6 ms</a:t>
+            </a:r>
+          </a:p>
+          <a:p>
+            <a:r>
+              <a:rPr sz="1200" b="0">
+                <a:solidFill>
+                  <a:srgbClr val="20242B"/>
+                </a:solidFill>
+                <a:latin typeface="Calibri"/>
+              </a:rPr>
+              <a:t>        # or target_h/w (any resolution), or adaptive_n</a:t>
             </a:r>
           </a:p>
         </p:txBody>
@@ -5928,8 +6609,8 @@
         </p:nvSpPr>
         <p:spPr>
           <a:xfrm>
-            <a:off x="960120" y="5760720"/>
-            <a:ext cx="10332720" cy="548640"/>
+            <a:off x="685800" y="3794760"/>
+            <a:ext cx="5760720" cy="1828800"/>
           </a:xfrm>
           <a:prstGeom prst="rect">
             <a:avLst/>
@@ -5943,13 +6624,481 @@
           <a:lstStyle/>
           <a:p>
             <a:r>
+              <a:rPr sz="1200" b="0">
+                <a:solidFill>
+                  <a:srgbClr val="20242B"/>
+                </a:solidFill>
+                <a:latin typeface="Calibri"/>
+              </a:rPr>
+              <a:t>Training setup: batch 4 (8 GB VRAM) · 4,096 queries/image</a:t>
+            </a:r>
+          </a:p>
+          <a:p>
+            <a:r>
+              <a:rPr sz="1200" b="0">
+                <a:solidFill>
+                  <a:srgbClr val="20242B"/>
+                </a:solidFill>
+                <a:latin typeface="Calibri"/>
+              </a:rPr>
+              <a:t>(3.1% of crop, half at motion boundaries) · datasets:</a:t>
+            </a:r>
+          </a:p>
+          <a:p>
+            <a:r>
+              <a:rPr sz="1200" b="0">
+                <a:solidFill>
+                  <a:srgbClr val="20242B"/>
+                </a:solidFill>
+                <a:latin typeface="Calibri"/>
+              </a:rPr>
+              <a:t>VKITTI2 6-variant (12,726 pairs) + FlyingChairs (22,232)</a:t>
+            </a:r>
+          </a:p>
+          <a:p>
+            <a:r>
+              <a:rPr sz="1200" b="0">
+                <a:solidFill>
+                  <a:srgbClr val="20242B"/>
+                </a:solidFill>
+                <a:latin typeface="Calibri"/>
+              </a:rPr>
+              <a:t>· AdamW OneCycle 2e-4 · backbone frozen</a:t>
+            </a:r>
+          </a:p>
+        </p:txBody>
+      </p:sp>
+      <p:pic>
+        <p:nvPicPr>
+          <p:cNvPr id="6" name="Picture 5" descr="query_gui_selftest.png"/>
+          <p:cNvPicPr>
+            <a:picLocks noChangeAspect="1"/>
+          </p:cNvPicPr>
+          <p:nvPr/>
+        </p:nvPicPr>
+        <p:blipFill>
+          <a:blip r:embed="rId2"/>
+          <a:stretch>
+            <a:fillRect/>
+          </a:stretch>
+        </p:blipFill>
+        <p:spPr>
+          <a:xfrm>
+            <a:off x="6675120" y="1554480"/>
+            <a:ext cx="4846320" cy="1463261"/>
+          </a:xfrm>
+          <a:prstGeom prst="rect">
+            <a:avLst/>
+          </a:prstGeom>
+        </p:spPr>
+      </p:pic>
+      <p:sp>
+        <p:nvSpPr>
+          <p:cNvPr id="7" name="TextBox 6"/>
+          <p:cNvSpPr txBox="1"/>
+          <p:nvPr/>
+        </p:nvSpPr>
+        <p:spPr>
+          <a:xfrm>
+            <a:off x="6675120" y="3291840"/>
+            <a:ext cx="4846320" cy="1463040"/>
+          </a:xfrm>
+          <a:prstGeom prst="rect">
+            <a:avLst/>
+          </a:prstGeom>
+          <a:noFill/>
+        </p:spPr>
+        <p:txBody>
+          <a:bodyPr wrap="square">
+            <a:spAutoFit/>
+          </a:bodyPr>
+          <a:lstStyle/>
+          <a:p>
+            <a:r>
+              <a:rPr sz="1100" b="0">
+                <a:solidFill>
+                  <a:srgbClr val="20242B"/>
+                </a:solidFill>
+                <a:latin typeface="Calibri"/>
+              </a:rPr>
+              <a:t>Interactive query selector (PyQt5, working):</a:t>
+            </a:r>
+          </a:p>
+          <a:p>
+            <a:r>
+              <a:rPr sz="1100" b="0">
+                <a:solidFill>
+                  <a:srgbClr val="20242B"/>
+                </a:solidFill>
+                <a:latin typeface="Calibri"/>
+              </a:rPr>
+              <a:t>click = flow at that pixel in ~1.6 ms; G = 32x32 grid.</a:t>
+            </a:r>
+          </a:p>
+          <a:p>
+            <a:r>
+              <a:rPr sz="1100" b="0">
+                <a:solidFill>
+                  <a:srgbClr val="20242B"/>
+                </a:solidFill>
+                <a:latin typeface="Calibri"/>
+              </a:rPr>
+              <a:t>Viable precisely because of the two-pass API —</a:t>
+            </a:r>
+          </a:p>
+          <a:p>
+            <a:r>
+              <a:rPr sz="1100" b="0">
+                <a:solidFill>
+                  <a:srgbClr val="20242B"/>
+                </a:solidFill>
+                <a:latin typeface="Calibri"/>
+              </a:rPr>
+              <a:t>v2 would recompute the full frame per click.</a:t>
+            </a:r>
+          </a:p>
+        </p:txBody>
+      </p:sp>
+      <p:sp>
+        <p:nvSpPr>
+          <p:cNvPr id="8" name="TextBox 7"/>
+          <p:cNvSpPr txBox="1"/>
+          <p:nvPr/>
+        </p:nvSpPr>
+        <p:spPr>
+          <a:xfrm>
+            <a:off x="960120" y="5760720"/>
+            <a:ext cx="10332720" cy="548640"/>
+          </a:xfrm>
+          <a:prstGeom prst="rect">
+            <a:avLst/>
+          </a:prstGeom>
+          <a:noFill/>
+        </p:spPr>
+        <p:txBody>
+          <a:bodyPr wrap="square">
+            <a:spAutoFit/>
+          </a:bodyPr>
+          <a:lstStyle/>
+          <a:p>
+            <a:r>
               <a:rPr sz="1150" b="1">
                 <a:solidFill>
                   <a:srgbClr val="1F4E79"/>
                 </a:solidFill>
                 <a:latin typeface="Calibri"/>
               </a:rPr>
-              <a:t>Takeaway   The architecture is validated; remaining work is training composition and edge deployment.</a:t>
+              <a:t>Takeaway   scripts/query_gui.py demonstrates flow-on-demand; the same API serves robots and humans.</a:t>
+            </a:r>
+          </a:p>
+        </p:txBody>
+      </p:sp>
+      <p:sp>
+        <p:nvSpPr>
+          <p:cNvPr id="9" name="TextBox 8"/>
+          <p:cNvSpPr txBox="1"/>
+          <p:nvPr/>
+        </p:nvSpPr>
+        <p:spPr>
+          <a:xfrm>
+            <a:off x="685800" y="6419088"/>
+            <a:ext cx="7315200" cy="274320"/>
+          </a:xfrm>
+          <a:prstGeom prst="rect">
+            <a:avLst/>
+          </a:prstGeom>
+          <a:noFill/>
+        </p:spPr>
+        <p:txBody>
+          <a:bodyPr wrap="square">
+            <a:spAutoFit/>
+          </a:bodyPr>
+          <a:lstStyle/>
+          <a:p>
+            <a:r>
+              <a:rPr sz="900" b="0">
+                <a:solidFill>
+                  <a:srgbClr val="7B838F"/>
+                </a:solidFill>
+                <a:latin typeface="Calibri"/>
+              </a:rPr>
+              <a:t>NeuFlow v3  ·  status</a:t>
+            </a:r>
+          </a:p>
+        </p:txBody>
+      </p:sp>
+      <p:sp>
+        <p:nvSpPr>
+          <p:cNvPr id="10" name="TextBox 9"/>
+          <p:cNvSpPr txBox="1"/>
+          <p:nvPr/>
+        </p:nvSpPr>
+        <p:spPr>
+          <a:xfrm>
+            <a:off x="10607040" y="6419088"/>
+            <a:ext cx="1097280" cy="274320"/>
+          </a:xfrm>
+          <a:prstGeom prst="rect">
+            <a:avLst/>
+          </a:prstGeom>
+          <a:noFill/>
+        </p:spPr>
+        <p:txBody>
+          <a:bodyPr wrap="square">
+            <a:spAutoFit/>
+          </a:bodyPr>
+          <a:lstStyle/>
+          <a:p>
+            <a:r>
+              <a:rPr sz="900" b="0">
+                <a:solidFill>
+                  <a:srgbClr val="7B838F"/>
+                </a:solidFill>
+                <a:latin typeface="Calibri"/>
+              </a:rPr>
+              <a:t>8</a:t>
+            </a:r>
+          </a:p>
+        </p:txBody>
+      </p:sp>
+    </p:spTree>
+  </p:cSld>
+  <p:clrMapOvr>
+    <a:masterClrMapping/>
+  </p:clrMapOvr>
+</p:sld>
+</file>
+
+<file path=ppt/slides/slide9.xml><?xml version="1.0" encoding="utf-8"?>
+<p:sld xmlns:a="http://schemas.openxmlformats.org/drawingml/2006/main" xmlns:p="http://schemas.openxmlformats.org/presentationml/2006/main" xmlns:r="http://schemas.openxmlformats.org/officeDocument/2006/relationships">
+  <p:cSld>
+    <p:spTree>
+      <p:nvGrpSpPr>
+        <p:cNvPr id="1" name=""/>
+        <p:cNvGrpSpPr/>
+        <p:nvPr/>
+      </p:nvGrpSpPr>
+      <p:grpSpPr/>
+      <p:sp>
+        <p:nvSpPr>
+          <p:cNvPr id="2" name="TextBox 1"/>
+          <p:cNvSpPr txBox="1"/>
+          <p:nvPr/>
+        </p:nvSpPr>
+        <p:spPr>
+          <a:xfrm>
+            <a:off x="685800" y="384048"/>
+            <a:ext cx="10058400" cy="274320"/>
+          </a:xfrm>
+          <a:prstGeom prst="rect">
+            <a:avLst/>
+          </a:prstGeom>
+          <a:noFill/>
+        </p:spPr>
+        <p:txBody>
+          <a:bodyPr wrap="square">
+            <a:spAutoFit/>
+          </a:bodyPr>
+          <a:lstStyle/>
+          <a:p>
+            <a:r>
+              <a:rPr sz="1050" b="1">
+                <a:solidFill>
+                  <a:srgbClr val="1F4E79"/>
+                </a:solidFill>
+                <a:latin typeface="Calibri"/>
+              </a:rPr>
+              <a:t>OBJECTIVES</a:t>
+            </a:r>
+          </a:p>
+        </p:txBody>
+      </p:sp>
+      <p:sp>
+        <p:nvSpPr>
+          <p:cNvPr id="3" name="TextBox 2"/>
+          <p:cNvSpPr txBox="1"/>
+          <p:nvPr/>
+        </p:nvSpPr>
+        <p:spPr>
+          <a:xfrm>
+            <a:off x="667512" y="658368"/>
+            <a:ext cx="10789920" cy="731520"/>
+          </a:xfrm>
+          <a:prstGeom prst="rect">
+            <a:avLst/>
+          </a:prstGeom>
+          <a:noFill/>
+        </p:spPr>
+        <p:txBody>
+          <a:bodyPr wrap="square">
+            <a:spAutoFit/>
+          </a:bodyPr>
+          <a:lstStyle/>
+          <a:p>
+            <a:r>
+              <a:rPr sz="2400" b="1">
+                <a:solidFill>
+                  <a:srgbClr val="20242B"/>
+                </a:solidFill>
+                <a:latin typeface="Calibri"/>
+              </a:rPr>
+              <a:t>Better EPE at less compute, edge-capable — where we stand</a:t>
+            </a:r>
+          </a:p>
+        </p:txBody>
+      </p:sp>
+      <p:sp>
+        <p:nvSpPr>
+          <p:cNvPr id="4" name="TextBox 3"/>
+          <p:cNvSpPr txBox="1"/>
+          <p:nvPr/>
+        </p:nvSpPr>
+        <p:spPr>
+          <a:xfrm>
+            <a:off x="685800" y="1737360"/>
+            <a:ext cx="10515600" cy="3566160"/>
+          </a:xfrm>
+          <a:prstGeom prst="rect">
+            <a:avLst/>
+          </a:prstGeom>
+          <a:noFill/>
+        </p:spPr>
+        <p:txBody>
+          <a:bodyPr wrap="square">
+            <a:spAutoFit/>
+          </a:bodyPr>
+          <a:lstStyle/>
+          <a:p>
+            <a:r>
+              <a:rPr sz="1400" b="0">
+                <a:solidFill>
+                  <a:srgbClr val="20242B"/>
+                </a:solidFill>
+                <a:latin typeface="Calibri"/>
+              </a:rPr>
+              <a:t>Beat v2 mean EPE                        DONE — 2.275 vs 2.324 (chairs-only training)</a:t>
+            </a:r>
+          </a:p>
+          <a:p>
+            <a:r>
+              <a:rPr sz="1400" b="0">
+                <a:solidFill>
+                  <a:srgbClr val="20242B"/>
+                </a:solidFill>
+                <a:latin typeface="Calibri"/>
+              </a:rPr>
+              <a:t/>
+            </a:r>
+          </a:p>
+          <a:p>
+            <a:r>
+              <a:rPr sz="1400" b="0">
+                <a:solidFill>
+                  <a:srgbClr val="20242B"/>
+                </a:solidFill>
+                <a:latin typeface="Calibri"/>
+              </a:rPr>
+              <a:t>Less compute (sparse use case)          DONE — ~35 ms total, O(N) queries, 13% fewer params, 2.2 GB VRAM</a:t>
+            </a:r>
+          </a:p>
+          <a:p>
+            <a:r>
+              <a:rPr sz="1400" b="0">
+                <a:solidFill>
+                  <a:srgbClr val="20242B"/>
+                </a:solidFill>
+                <a:latin typeface="Calibri"/>
+              </a:rPr>
+              <a:t/>
+            </a:r>
+          </a:p>
+          <a:p>
+            <a:r>
+              <a:rPr sz="1400" b="0">
+                <a:solidFill>
+                  <a:srgbClr val="20242B"/>
+                </a:solidFill>
+                <a:latin typeface="Calibri"/>
+              </a:rPr>
+              <a:t>Sub-pixel precision parity (1px acc)    IN PROGRESS — Fourier PE ablation (training in progress)</a:t>
+            </a:r>
+          </a:p>
+          <a:p>
+            <a:r>
+              <a:rPr sz="1400" b="0">
+                <a:solidFill>
+                  <a:srgbClr val="20242B"/>
+                </a:solidFill>
+                <a:latin typeface="Calibri"/>
+              </a:rPr>
+              <a:t/>
+            </a:r>
+          </a:p>
+          <a:p>
+            <a:r>
+              <a:rPr sz="1400" b="0">
+                <a:solidFill>
+                  <a:srgbClr val="20242B"/>
+                </a:solidFill>
+                <a:latin typeface="Calibri"/>
+              </a:rPr>
+              <a:t>Combine chairs + vkitti2 strengths      NEXT — mixed-dataset training (forgetting measured and understood)</a:t>
+            </a:r>
+          </a:p>
+          <a:p>
+            <a:r>
+              <a:rPr sz="1400" b="0">
+                <a:solidFill>
+                  <a:srgbClr val="20242B"/>
+                </a:solidFill>
+                <a:latin typeface="Calibri"/>
+              </a:rPr>
+              <a:t/>
+            </a:r>
+          </a:p>
+          <a:p>
+            <a:r>
+              <a:rPr sz="1400" b="0">
+                <a:solidFill>
+                  <a:srgbClr val="20242B"/>
+                </a:solidFill>
+                <a:latin typeface="Calibri"/>
+              </a:rPr>
+              <a:t>Edge-device validation                  NEXT — Jetson Orin benchmark of the two-pass API</a:t>
+            </a:r>
+          </a:p>
+        </p:txBody>
+      </p:sp>
+      <p:sp>
+        <p:nvSpPr>
+          <p:cNvPr id="5" name="TextBox 4"/>
+          <p:cNvSpPr txBox="1"/>
+          <p:nvPr/>
+        </p:nvSpPr>
+        <p:spPr>
+          <a:xfrm>
+            <a:off x="960120" y="5760720"/>
+            <a:ext cx="10332720" cy="548640"/>
+          </a:xfrm>
+          <a:prstGeom prst="rect">
+            <a:avLst/>
+          </a:prstGeom>
+          <a:noFill/>
+        </p:spPr>
+        <p:txBody>
+          <a:bodyPr wrap="square">
+            <a:spAutoFit/>
+          </a:bodyPr>
+          <a:lstStyle/>
+          <a:p>
+            <a:r>
+              <a:rPr sz="1150" b="1">
+                <a:solidFill>
+                  <a:srgbClr val="1F4E79"/>
+                </a:solidFill>
+                <a:latin typeface="Calibri"/>
+              </a:rPr>
+              <a:t>Takeaway   Two of three headline objectives are met; the remaining gap is quantified and has a targeted fix in flight.</a:t>
             </a:r>
           </a:p>
         </p:txBody>
@@ -6017,7 +7166,7 @@
                 </a:solidFill>
                 <a:latin typeface="Calibri"/>
               </a:rPr>
-              <a:t>8</a:t>
+              <a:t>7</a:t>
             </a:r>
           </a:p>
         </p:txBody>

--- a/docs/NeuFlow_v3_status.pptx
+++ b/docs/NeuFlow_v3_status.pptx
@@ -4587,7 +4587,7 @@
                 </a:solidFill>
                 <a:latin typeface="Calibri"/>
               </a:rPr>
-              <a:t>awareness) — training in progress.</a:t>
+              <a:t>awareness) — measured: no effect (2.29 EPE, 69.7% 1px = no-PE run); sub-cell position is NOT the 1px bottleneck.</a:t>
             </a:r>
           </a:p>
         </p:txBody>
@@ -5596,7 +5596,7 @@
                 </a:solidFill>
                 <a:latin typeface="Calibri"/>
               </a:rPr>
-              <a:t>(training in progress).</a:t>
+              <a:t>(measured: no effect (2.29 EPE, 69.7% 1px = no-PE run); sub-cell position is NOT the 1px bottleneck).</a:t>
             </a:r>
           </a:p>
         </p:txBody>
@@ -7020,7 +7020,18 @@
                 </a:solidFill>
                 <a:latin typeface="Calibri"/>
               </a:rPr>
-              <a:t>Sub-pixel precision parity (1px acc)    IN PROGRESS — Fourier PE ablation (training in progress)</a:t>
+              <a:t>Sub-pixel precision parity (1px acc)    OPEN — PE ablation was null: gap is not positional signal.</a:t>
+            </a:r>
+          </a:p>
+          <a:p>
+            <a:r>
+              <a:rPr sz="1400" b="0">
+                <a:solidFill>
+                  <a:srgbClr val="20242B"/>
+                </a:solidFill>
+                <a:latin typeface="Calibri"/>
+              </a:rPr>
+              <a:t>                                        Next hypothesis: 1/8 coarse-flow resolution bound; test via vkitti2+PE or finer scale</a:t>
             </a:r>
           </a:p>
           <a:p>

--- a/docs/NeuFlow_v3_status.pptx
+++ b/docs/NeuFlow_v3_status.pptx
@@ -16,6 +16,8 @@
     <p:sldId id="264" r:id="rId15"/>
     <p:sldId id="265" r:id="rId16"/>
     <p:sldId id="266" r:id="rId17"/>
+    <p:sldId id="267" r:id="rId18"/>
+    <p:sldId id="268" r:id="rId19"/>
   </p:sldIdLst>
   <p:sldSz cx="12191695" cy="6858000" type="screen4x3"/>
   <p:notesSz cx="6858000" cy="9144000"/>
@@ -3106,7 +3108,7 @@
         </p:nvSpPr>
         <p:spPr>
           <a:xfrm>
-            <a:off x="685800" y="2377440"/>
+            <a:off x="685800" y="2286000"/>
             <a:ext cx="10789920" cy="914400"/>
           </a:xfrm>
           <a:prstGeom prst="rect">
@@ -3120,6 +3122,11 @@
           </a:bodyPr>
           <a:lstStyle/>
           <a:p>
+            <a:pPr>
+              <a:lnSpc>
+                <a:spcPct val="100000"/>
+              </a:lnSpc>
+            </a:pPr>
             <a:r>
               <a:rPr sz="4000" b="1">
                 <a:solidFill>
@@ -3140,7 +3147,7 @@
         </p:nvSpPr>
         <p:spPr>
           <a:xfrm>
-            <a:off x="685800" y="3200400"/>
+            <a:off x="685800" y="3154680"/>
             <a:ext cx="10789920" cy="548640"/>
           </a:xfrm>
           <a:prstGeom prst="rect">
@@ -3154,6 +3161,11 @@
           </a:bodyPr>
           <a:lstStyle/>
           <a:p>
+            <a:pPr>
+              <a:lnSpc>
+                <a:spcPct val="100000"/>
+              </a:lnSpc>
+            </a:pPr>
             <a:r>
               <a:rPr sz="1800" b="0">
                 <a:solidFill>
@@ -3174,8 +3186,8 @@
         </p:nvSpPr>
         <p:spPr>
           <a:xfrm>
-            <a:off x="685800" y="4023360"/>
-            <a:ext cx="10789920" cy="822960"/>
+            <a:off x="685800" y="3977639"/>
+            <a:ext cx="10789920" cy="914400"/>
           </a:xfrm>
           <a:prstGeom prst="rect">
             <a:avLst/>
@@ -3188,6 +3200,11 @@
           </a:bodyPr>
           <a:lstStyle/>
           <a:p>
+            <a:pPr>
+              <a:lnSpc>
+                <a:spcPct val="100000"/>
+              </a:lnSpc>
+            </a:pPr>
             <a:r>
               <a:rPr sz="1300" b="0">
                 <a:solidFill>
@@ -3195,10 +3212,15 @@
                 </a:solidFill>
                 <a:latin typeface="Calibri"/>
               </a:rPr>
-              <a:t>Frozen NeuFlow v2 pipeline + implicit convex-weight decoder</a:t>
-            </a:r>
-          </a:p>
-          <a:p>
+              <a:t>A frozen NeuFlow v2 pipeline extended with an implicit decoder that answers</a:t>
+            </a:r>
+          </a:p>
+          <a:p>
+            <a:pPr>
+              <a:lnSpc>
+                <a:spcPct val="100000"/>
+              </a:lnSpc>
+            </a:pPr>
             <a:r>
               <a:rPr sz="1300" b="0">
                 <a:solidFill>
@@ -3206,7 +3228,39 @@
                 </a:solidFill>
                 <a:latin typeface="Calibri"/>
               </a:rPr>
-              <a:t>Shriman Raghav Srinivasan · MS Robotics, Northeastern University</a:t>
+              <a:t>flow queries at arbitrary continuous coordinates in O(N) time.</a:t>
+            </a:r>
+          </a:p>
+          <a:p>
+            <a:pPr>
+              <a:lnSpc>
+                <a:spcPct val="100000"/>
+              </a:lnSpc>
+            </a:pPr>
+            <a:r>
+              <a:rPr sz="1300" b="0">
+                <a:solidFill>
+                  <a:srgbClr val="7B838F"/>
+                </a:solidFill>
+                <a:latin typeface="Calibri"/>
+              </a:rPr>
+              <a:t/>
+            </a:r>
+          </a:p>
+          <a:p>
+            <a:pPr>
+              <a:lnSpc>
+                <a:spcPct val="100000"/>
+              </a:lnSpc>
+            </a:pPr>
+            <a:r>
+              <a:rPr sz="1300" b="0">
+                <a:solidFill>
+                  <a:srgbClr val="7B838F"/>
+                </a:solidFill>
+                <a:latin typeface="Calibri"/>
+              </a:rPr>
+              <a:t>Shriman Raghav Srinivasan · MS Robotics, Northeastern University · Field Robotics Lab</a:t>
             </a:r>
           </a:p>
         </p:txBody>
@@ -3238,7 +3292,7 @@
         <p:spPr>
           <a:xfrm>
             <a:off x="685800" y="384048"/>
-            <a:ext cx="10058400" cy="274320"/>
+            <a:ext cx="10515600" cy="274320"/>
           </a:xfrm>
           <a:prstGeom prst="rect">
             <a:avLst/>
@@ -3251,6 +3305,11 @@
           </a:bodyPr>
           <a:lstStyle/>
           <a:p>
+            <a:pPr>
+              <a:lnSpc>
+                <a:spcPct val="100000"/>
+              </a:lnSpc>
+            </a:pPr>
             <a:r>
               <a:rPr sz="1050" b="1">
                 <a:solidFill>
@@ -3258,7 +3317,7 @@
                 </a:solidFill>
                 <a:latin typeface="Calibri"/>
               </a:rPr>
-              <a:t>ANTICIPATED QUESTIONS</a:t>
+              <a:t>INTERFACE</a:t>
             </a:r>
           </a:p>
         </p:txBody>
@@ -3272,7 +3331,7 @@
         <p:spPr>
           <a:xfrm>
             <a:off x="667512" y="658368"/>
-            <a:ext cx="10789920" cy="731520"/>
+            <a:ext cx="10881360" cy="731520"/>
           </a:xfrm>
           <a:prstGeom prst="rect">
             <a:avLst/>
@@ -3285,6 +3344,11 @@
           </a:bodyPr>
           <a:lstStyle/>
           <a:p>
+            <a:pPr>
+              <a:lnSpc>
+                <a:spcPct val="100000"/>
+              </a:lnSpc>
+            </a:pPr>
             <a:r>
               <a:rPr sz="2400" b="1">
                 <a:solidFill>
@@ -3292,7 +3356,7 @@
                 </a:solidFill>
                 <a:latin typeface="Calibri"/>
               </a:rPr>
-              <a:t>First-principles FAQ</a:t>
+              <a:t>Querying in practice: sizes, API, and interactive demonstration</a:t>
             </a:r>
           </a:p>
         </p:txBody>
@@ -3306,7 +3370,7 @@
         <p:spPr>
           <a:xfrm>
             <a:off x="685800" y="1554480"/>
-            <a:ext cx="10789920" cy="4023360"/>
+            <a:ext cx="5669280" cy="2286000"/>
           </a:xfrm>
           <a:prstGeom prst="rect">
             <a:avLst/>
@@ -3319,19 +3383,77 @@
           </a:bodyPr>
           <a:lstStyle/>
           <a:p>
-            <a:r>
-              <a:rPr sz="1250" b="0">
-                <a:solidFill>
-                  <a:srgbClr val="20242B"/>
-                </a:solidFill>
-                <a:latin typeface="Calibri"/>
-              </a:rPr>
-              <a:t>Why is flow queryable at continuous coords?  Bilinear feature interpolation + an MLP = a function defined at every real (x, y).</a:t>
-            </a:r>
-          </a:p>
-          <a:p>
-            <a:r>
-              <a:rPr sz="1250" b="0">
+            <a:pPr>
+              <a:lnSpc>
+                <a:spcPct val="100000"/>
+              </a:lnSpc>
+            </a:pPr>
+            <a:r>
+              <a:rPr sz="1200" b="0">
+                <a:solidFill>
+                  <a:srgbClr val="20242B"/>
+                </a:solidFill>
+                <a:latin typeface="Calibri"/>
+              </a:rPr>
+              <a:t>A query is one continuous (x, y) coordinate; sub-pixel</a:t>
+            </a:r>
+          </a:p>
+          <a:p>
+            <a:pPr>
+              <a:lnSpc>
+                <a:spcPct val="100000"/>
+              </a:lnSpc>
+            </a:pPr>
+            <a:r>
+              <a:rPr sz="1200" b="0">
+                <a:solidFill>
+                  <a:srgbClr val="20242B"/>
+                </a:solidFill>
+                <a:latin typeface="Calibri"/>
+              </a:rPr>
+              <a:t>positions are valid inputs. N ranges from 1 to the full</a:t>
+            </a:r>
+          </a:p>
+          <a:p>
+            <a:pPr>
+              <a:lnSpc>
+                <a:spcPct val="100000"/>
+              </a:lnSpc>
+            </a:pPr>
+            <a:r>
+              <a:rPr sz="1200" b="0">
+                <a:solidFill>
+                  <a:srgbClr val="20242B"/>
+                </a:solidFill>
+                <a:latin typeface="Calibri"/>
+              </a:rPr>
+              <a:t>frame (479,232 at 384×1248). Decode cost is flat at</a:t>
+            </a:r>
+          </a:p>
+          <a:p>
+            <a:pPr>
+              <a:lnSpc>
+                <a:spcPct val="100000"/>
+              </a:lnSpc>
+            </a:pPr>
+            <a:r>
+              <a:rPr sz="1200" b="0">
+                <a:solidFill>
+                  <a:srgbClr val="20242B"/>
+                </a:solidFill>
+                <a:latin typeface="Calibri"/>
+              </a:rPr>
+              <a:t>1.6 ms up to roughly 2,000 queries per call.</a:t>
+            </a:r>
+          </a:p>
+          <a:p>
+            <a:pPr>
+              <a:lnSpc>
+                <a:spcPct val="100000"/>
+              </a:lnSpc>
+            </a:pPr>
+            <a:r>
+              <a:rPr sz="1200" b="0">
                 <a:solidFill>
                   <a:srgbClr val="20242B"/>
                 </a:solidFill>
@@ -3341,102 +3463,51 @@
             </a:r>
           </a:p>
           <a:p>
-            <a:r>
-              <a:rPr sz="1250" b="0">
-                <a:solidFill>
-                  <a:srgbClr val="20242B"/>
-                </a:solidFill>
-                <a:latin typeface="Calibri"/>
-              </a:rPr>
-              <a:t>Why freeze the backbone?  Joint training needs ~800K steps (InfiniDepth); at 30K the decoder chases moving features and diverges.</a:t>
-            </a:r>
-          </a:p>
-          <a:p>
-            <a:r>
-              <a:rPr sz="1250" b="0">
-                <a:solidFill>
-                  <a:srgbClr val="20242B"/>
-                </a:solidFill>
-                <a:latin typeface="Calibri"/>
-              </a:rPr>
-              <a:t/>
-            </a:r>
-          </a:p>
-          <a:p>
-            <a:r>
-              <a:rPr sz="1250" b="0">
-                <a:solidFill>
-                  <a:srgbClr val="20242B"/>
-                </a:solidFill>
-                <a:latin typeface="Calibri"/>
-              </a:rPr>
-              <a:t>Is sparse an approximation?  No — the identical function at fewer points; matches dense to 0.00 px at the same coordinates.</a:t>
-            </a:r>
-          </a:p>
-          <a:p>
-            <a:r>
-              <a:rPr sz="1250" b="0">
-                <a:solidFill>
-                  <a:srgbClr val="20242B"/>
-                </a:solidFill>
-                <a:latin typeface="Calibri"/>
-              </a:rPr>
-              <a:t/>
-            </a:r>
-          </a:p>
-          <a:p>
-            <a:r>
-              <a:rPr sz="1250" b="0">
-                <a:solidFill>
-                  <a:srgbClr val="20242B"/>
-                </a:solidFill>
-                <a:latin typeface="Calibri"/>
-              </a:rPr>
-              <a:t>Why does chairs training beat driving-data training on driving data?  Diverse large motions fix the error tail; 5 scenes teach memorization.</a:t>
-            </a:r>
-          </a:p>
-          <a:p>
-            <a:r>
-              <a:rPr sz="1250" b="0">
-                <a:solidFill>
-                  <a:srgbClr val="20242B"/>
-                </a:solidFill>
-                <a:latin typeface="Calibri"/>
-              </a:rPr>
-              <a:t/>
-            </a:r>
-          </a:p>
-          <a:p>
-            <a:r>
-              <a:rPr sz="1250" b="0">
-                <a:solidFill>
-                  <a:srgbClr val="20242B"/>
-                </a:solidFill>
-                <a:latin typeface="Calibri"/>
-              </a:rPr>
-              <a:t>If sparse is fast, why is dense slow?  Dense = 479k MLP calls (~293 ms); v2 upsampling is one fused conv. Dense is not the use case.</a:t>
-            </a:r>
-          </a:p>
-          <a:p>
-            <a:r>
-              <a:rPr sz="1250" b="0">
-                <a:solidFill>
-                  <a:srgbClr val="20242B"/>
-                </a:solidFill>
-                <a:latin typeface="Calibri"/>
-              </a:rPr>
-              <a:t/>
-            </a:r>
-          </a:p>
-          <a:p>
-            <a:r>
-              <a:rPr sz="1250" b="0">
-                <a:solidFill>
-                  <a:srgbClr val="20242B"/>
-                </a:solidFill>
-                <a:latin typeface="Calibri"/>
-              </a:rPr>
-              <a:t>What limits 1px accuracy?  The head could not see the sub-cell position — exactly what the Fourier PE ablation injects.</a:t>
+            <a:pPr>
+              <a:lnSpc>
+                <a:spcPct val="100000"/>
+              </a:lnSpc>
+            </a:pPr>
+            <a:r>
+              <a:rPr sz="1200" b="0">
+                <a:solidFill>
+                  <a:srgbClr val="20242B"/>
+                </a:solidFill>
+                <a:latin typeface="Calibri"/>
+              </a:rPr>
+              <a:t>state = model.infer_coarse_state(img0, img1)   # once, 33 ms</a:t>
+            </a:r>
+          </a:p>
+          <a:p>
+            <a:pPr>
+              <a:lnSpc>
+                <a:spcPct val="100000"/>
+              </a:lnSpc>
+            </a:pPr>
+            <a:r>
+              <a:rPr sz="1200" b="0">
+                <a:solidFill>
+                  <a:srgbClr val="20242B"/>
+                </a:solidFill>
+                <a:latin typeface="Calibri"/>
+              </a:rPr>
+              <a:t>flow  = model.decode_queries(state, query_coords=q)</a:t>
+            </a:r>
+          </a:p>
+          <a:p>
+            <a:pPr>
+              <a:lnSpc>
+                <a:spcPct val="100000"/>
+              </a:lnSpc>
+            </a:pPr>
+            <a:r>
+              <a:rPr sz="1200" b="0">
+                <a:solidFill>
+                  <a:srgbClr val="20242B"/>
+                </a:solidFill>
+                <a:latin typeface="Calibri"/>
+              </a:rPr>
+              <a:t>        # q: [B, N, 2] pixel coords → [B, N, 2] flow</a:t>
             </a:r>
           </a:p>
         </p:txBody>
@@ -3449,8 +3520,8 @@
         </p:nvSpPr>
         <p:spPr>
           <a:xfrm>
-            <a:off x="960120" y="5760720"/>
-            <a:ext cx="10332720" cy="548640"/>
+            <a:off x="685800" y="3931920"/>
+            <a:ext cx="5669280" cy="1737360"/>
           </a:xfrm>
           <a:prstGeom prst="rect">
             <a:avLst/>
@@ -3463,28 +3534,105 @@
           </a:bodyPr>
           <a:lstStyle/>
           <a:p>
-            <a:r>
-              <a:rPr sz="1150" b="1">
-                <a:solidFill>
-                  <a:srgbClr val="1F4E79"/>
-                </a:solidFill>
-                <a:latin typeface="Calibri"/>
-              </a:rPr>
-              <a:t>Takeaway   Full FAQ + derivations: docs/NeuFlow_v3_Report.md sections 5-6.</a:t>
-            </a:r>
-          </a:p>
-        </p:txBody>
-      </p:sp>
-      <p:sp>
-        <p:nvSpPr>
-          <p:cNvPr id="6" name="TextBox 5"/>
+            <a:pPr>
+              <a:lnSpc>
+                <a:spcPct val="100000"/>
+              </a:lnSpc>
+            </a:pPr>
+            <a:r>
+              <a:rPr sz="1200" b="0">
+                <a:solidFill>
+                  <a:srgbClr val="20242B"/>
+                </a:solidFill>
+                <a:latin typeface="Calibri"/>
+              </a:rPr>
+              <a:t>Training configuration: batch size 4 (8 GB VRAM budget);</a:t>
+            </a:r>
+          </a:p>
+          <a:p>
+            <a:pPr>
+              <a:lnSpc>
+                <a:spcPct val="100000"/>
+              </a:lnSpc>
+            </a:pPr>
+            <a:r>
+              <a:rPr sz="1200" b="0">
+                <a:solidFill>
+                  <a:srgbClr val="20242B"/>
+                </a:solidFill>
+                <a:latin typeface="Calibri"/>
+              </a:rPr>
+              <a:t>4,096 supervision queries per image, half placed at motion</a:t>
+            </a:r>
+          </a:p>
+          <a:p>
+            <a:pPr>
+              <a:lnSpc>
+                <a:spcPct val="100000"/>
+              </a:lnSpc>
+            </a:pPr>
+            <a:r>
+              <a:rPr sz="1200" b="0">
+                <a:solidFill>
+                  <a:srgbClr val="20242B"/>
+                </a:solidFill>
+                <a:latin typeface="Calibri"/>
+              </a:rPr>
+              <a:t>boundaries; AdamW with a one-cycle schedule peaking at</a:t>
+            </a:r>
+          </a:p>
+          <a:p>
+            <a:pPr>
+              <a:lnSpc>
+                <a:spcPct val="100000"/>
+              </a:lnSpc>
+            </a:pPr>
+            <a:r>
+              <a:rPr sz="1200" b="0">
+                <a:solidFill>
+                  <a:srgbClr val="20242B"/>
+                </a:solidFill>
+                <a:latin typeface="Calibri"/>
+              </a:rPr>
+              <a:t>2e-4; backbone frozen throughout.</a:t>
+            </a:r>
+          </a:p>
+        </p:txBody>
+      </p:sp>
+      <p:pic>
+        <p:nvPicPr>
+          <p:cNvPr id="6" name="Picture 5" descr="query_gui_selftest.png"/>
+          <p:cNvPicPr>
+            <a:picLocks noChangeAspect="1"/>
+          </p:cNvPicPr>
+          <p:nvPr/>
+        </p:nvPicPr>
+        <p:blipFill>
+          <a:blip r:embed="rId2"/>
+          <a:stretch>
+            <a:fillRect/>
+          </a:stretch>
+        </p:blipFill>
+        <p:spPr>
+          <a:xfrm>
+            <a:off x="6675120" y="1554480"/>
+            <a:ext cx="4937760" cy="1490870"/>
+          </a:xfrm>
+          <a:prstGeom prst="rect">
+            <a:avLst/>
+          </a:prstGeom>
+        </p:spPr>
+      </p:pic>
+      <p:sp>
+        <p:nvSpPr>
+          <p:cNvPr id="7" name="TextBox 6"/>
           <p:cNvSpPr txBox="1"/>
           <p:nvPr/>
         </p:nvSpPr>
         <p:spPr>
           <a:xfrm>
-            <a:off x="685800" y="6419088"/>
-            <a:ext cx="7315200" cy="274320"/>
+            <a:off x="6675120" y="3246120"/>
+            <a:ext cx="4937760" cy="1554480"/>
           </a:xfrm>
           <a:prstGeom prst="rect">
             <a:avLst/>
@@ -3497,28 +3645,81 @@
           </a:bodyPr>
           <a:lstStyle/>
           <a:p>
-            <a:r>
-              <a:rPr sz="900" b="0">
-                <a:solidFill>
-                  <a:srgbClr val="7B838F"/>
-                </a:solidFill>
-                <a:latin typeface="Calibri"/>
-              </a:rPr>
-              <a:t>NeuFlow v3  ·  status</a:t>
-            </a:r>
-          </a:p>
-        </p:txBody>
-      </p:sp>
-      <p:sp>
-        <p:nvSpPr>
-          <p:cNvPr id="7" name="TextBox 6"/>
+            <a:pPr>
+              <a:lnSpc>
+                <a:spcPct val="100000"/>
+              </a:lnSpc>
+            </a:pPr>
+            <a:r>
+              <a:rPr sz="1100" b="0">
+                <a:solidFill>
+                  <a:srgbClr val="20242B"/>
+                </a:solidFill>
+                <a:latin typeface="Calibri"/>
+              </a:rPr>
+              <a:t>Interactive tool (PyQt5, in the repository): click any pixel</a:t>
+            </a:r>
+          </a:p>
+          <a:p>
+            <a:pPr>
+              <a:lnSpc>
+                <a:spcPct val="100000"/>
+              </a:lnSpc>
+            </a:pPr>
+            <a:r>
+              <a:rPr sz="1100" b="0">
+                <a:solidFill>
+                  <a:srgbClr val="20242B"/>
+                </a:solidFill>
+                <a:latin typeface="Calibri"/>
+              </a:rPr>
+              <a:t>for its flow; grid, boundary-adaptive, and dense-overlay</a:t>
+            </a:r>
+          </a:p>
+          <a:p>
+            <a:pPr>
+              <a:lnSpc>
+                <a:spcPct val="100000"/>
+              </a:lnSpc>
+            </a:pPr>
+            <a:r>
+              <a:rPr sz="1100" b="0">
+                <a:solidFill>
+                  <a:srgbClr val="20242B"/>
+                </a:solidFill>
+                <a:latin typeface="Calibri"/>
+              </a:rPr>
+              <a:t>modes; CSV export. Feasible only because of the two-pass</a:t>
+            </a:r>
+          </a:p>
+          <a:p>
+            <a:pPr>
+              <a:lnSpc>
+                <a:spcPct val="100000"/>
+              </a:lnSpc>
+            </a:pPr>
+            <a:r>
+              <a:rPr sz="1100" b="0">
+                <a:solidFill>
+                  <a:srgbClr val="20242B"/>
+                </a:solidFill>
+                <a:latin typeface="Calibri"/>
+              </a:rPr>
+              <a:t>design — every interaction reuses the cached backbone state.</a:t>
+            </a:r>
+          </a:p>
+        </p:txBody>
+      </p:sp>
+      <p:sp>
+        <p:nvSpPr>
+          <p:cNvPr id="8" name="TextBox 7"/>
           <p:cNvSpPr txBox="1"/>
           <p:nvPr/>
         </p:nvSpPr>
         <p:spPr>
           <a:xfrm>
-            <a:off x="10607040" y="6419088"/>
-            <a:ext cx="1097280" cy="274320"/>
+            <a:off x="960120" y="5779008"/>
+            <a:ext cx="10332720" cy="548640"/>
           </a:xfrm>
           <a:prstGeom prst="rect">
             <a:avLst/>
@@ -3531,6 +3732,89 @@
           </a:bodyPr>
           <a:lstStyle/>
           <a:p>
+            <a:pPr>
+              <a:lnSpc>
+                <a:spcPct val="100000"/>
+              </a:lnSpc>
+            </a:pPr>
+            <a:r>
+              <a:rPr sz="1150" b="1">
+                <a:solidFill>
+                  <a:srgbClr val="1F4E79"/>
+                </a:solidFill>
+                <a:latin typeface="Calibri"/>
+              </a:rPr>
+              <a:t>Takeaway   The same API serves a robot asking for 800 correspondences and a human inspecting one pixel — that is the point of the design.</a:t>
+            </a:r>
+          </a:p>
+        </p:txBody>
+      </p:sp>
+      <p:sp>
+        <p:nvSpPr>
+          <p:cNvPr id="9" name="TextBox 8"/>
+          <p:cNvSpPr txBox="1"/>
+          <p:nvPr/>
+        </p:nvSpPr>
+        <p:spPr>
+          <a:xfrm>
+            <a:off x="685800" y="6419088"/>
+            <a:ext cx="7315200" cy="274320"/>
+          </a:xfrm>
+          <a:prstGeom prst="rect">
+            <a:avLst/>
+          </a:prstGeom>
+          <a:noFill/>
+        </p:spPr>
+        <p:txBody>
+          <a:bodyPr wrap="square">
+            <a:spAutoFit/>
+          </a:bodyPr>
+          <a:lstStyle/>
+          <a:p>
+            <a:pPr>
+              <a:lnSpc>
+                <a:spcPct val="100000"/>
+              </a:lnSpc>
+            </a:pPr>
+            <a:r>
+              <a:rPr sz="900" b="0">
+                <a:solidFill>
+                  <a:srgbClr val="7B838F"/>
+                </a:solidFill>
+                <a:latin typeface="Calibri"/>
+              </a:rPr>
+              <a:t>NeuFlow v3 · status report</a:t>
+            </a:r>
+          </a:p>
+        </p:txBody>
+      </p:sp>
+      <p:sp>
+        <p:nvSpPr>
+          <p:cNvPr id="10" name="TextBox 9"/>
+          <p:cNvSpPr txBox="1"/>
+          <p:nvPr/>
+        </p:nvSpPr>
+        <p:spPr>
+          <a:xfrm>
+            <a:off x="10607040" y="6419088"/>
+            <a:ext cx="1097280" cy="274320"/>
+          </a:xfrm>
+          <a:prstGeom prst="rect">
+            <a:avLst/>
+          </a:prstGeom>
+          <a:noFill/>
+        </p:spPr>
+        <p:txBody>
+          <a:bodyPr wrap="square">
+            <a:spAutoFit/>
+          </a:bodyPr>
+          <a:lstStyle/>
+          <a:p>
+            <a:pPr>
+              <a:lnSpc>
+                <a:spcPct val="100000"/>
+              </a:lnSpc>
+            </a:pPr>
             <a:r>
               <a:rPr sz="900" b="0">
                 <a:solidFill>
@@ -3570,7 +3854,7 @@
         <p:spPr>
           <a:xfrm>
             <a:off x="685800" y="384048"/>
-            <a:ext cx="10058400" cy="274320"/>
+            <a:ext cx="10515600" cy="274320"/>
           </a:xfrm>
           <a:prstGeom prst="rect">
             <a:avLst/>
@@ -3583,6 +3867,11 @@
           </a:bodyPr>
           <a:lstStyle/>
           <a:p>
+            <a:pPr>
+              <a:lnSpc>
+                <a:spcPct val="100000"/>
+              </a:lnSpc>
+            </a:pPr>
             <a:r>
               <a:rPr sz="1050" b="1">
                 <a:solidFill>
@@ -3590,7 +3879,7 @@
                 </a:solidFill>
                 <a:latin typeface="Calibri"/>
               </a:rPr>
-              <a:t>NEXT</a:t>
+              <a:t>OBJECTIVES</a:t>
             </a:r>
           </a:p>
         </p:txBody>
@@ -3604,7 +3893,7 @@
         <p:spPr>
           <a:xfrm>
             <a:off x="667512" y="658368"/>
-            <a:ext cx="10789920" cy="731520"/>
+            <a:ext cx="10881360" cy="731520"/>
           </a:xfrm>
           <a:prstGeom prst="rect">
             <a:avLst/>
@@ -3617,6 +3906,11 @@
           </a:bodyPr>
           <a:lstStyle/>
           <a:p>
+            <a:pPr>
+              <a:lnSpc>
+                <a:spcPct val="100000"/>
+              </a:lnSpc>
+            </a:pPr>
             <a:r>
               <a:rPr sz="2400" b="1">
                 <a:solidFill>
@@ -3624,7 +3918,7 @@
                 </a:solidFill>
                 <a:latin typeface="Calibri"/>
               </a:rPr>
-              <a:t>Next steps</a:t>
+              <a:t>Standing of the three stated objectives</a:t>
             </a:r>
           </a:p>
         </p:txBody>
@@ -3637,8 +3931,8 @@
         </p:nvSpPr>
         <p:spPr>
           <a:xfrm>
-            <a:off x="685800" y="1737360"/>
-            <a:ext cx="10515600" cy="3474720"/>
+            <a:off x="685800" y="1691640"/>
+            <a:ext cx="10789920" cy="3840480"/>
           </a:xfrm>
           <a:prstGeom prst="rect">
             <a:avLst/>
@@ -3651,19 +3945,77 @@
           </a:bodyPr>
           <a:lstStyle/>
           <a:p>
-            <a:r>
-              <a:rPr sz="1400" b="0">
-                <a:solidFill>
-                  <a:srgbClr val="20242B"/>
-                </a:solidFill>
-                <a:latin typeface="Calibri"/>
-              </a:rPr>
-              <a:t>1. Fourier PE ablation — same chairs recipe, +sub-cell encoding; targets 1px accuracy directly.</a:t>
-            </a:r>
-          </a:p>
-          <a:p>
-            <a:r>
-              <a:rPr sz="1400" b="0">
+            <a:pPr>
+              <a:lnSpc>
+                <a:spcPct val="100000"/>
+              </a:lnSpc>
+            </a:pPr>
+            <a:r>
+              <a:rPr sz="1300" b="0">
+                <a:solidFill>
+                  <a:srgbClr val="20242B"/>
+                </a:solidFill>
+                <a:latin typeface="Calibri"/>
+              </a:rPr>
+              <a:t>Objective 1 — exceed NeuFlow v2’s accuracy.  Met on mean EPE: 2.28 vs 2.32 px, achieved by the</a:t>
+            </a:r>
+          </a:p>
+          <a:p>
+            <a:pPr>
+              <a:lnSpc>
+                <a:spcPct val="100000"/>
+              </a:lnSpc>
+            </a:pPr>
+            <a:r>
+              <a:rPr sz="1300" b="0">
+                <a:solidFill>
+                  <a:srgbClr val="20242B"/>
+                </a:solidFill>
+                <a:latin typeface="Calibri"/>
+              </a:rPr>
+              <a:t>FlyingChairs-trained decoder. Sub-pixel precision (1 px accuracy) remains 5–8 points behind and is the</a:t>
+            </a:r>
+          </a:p>
+          <a:p>
+            <a:pPr>
+              <a:lnSpc>
+                <a:spcPct val="100000"/>
+              </a:lnSpc>
+            </a:pPr>
+            <a:r>
+              <a:rPr sz="1300" b="0">
+                <a:solidFill>
+                  <a:srgbClr val="20242B"/>
+                </a:solidFill>
+                <a:latin typeface="Calibri"/>
+              </a:rPr>
+              <a:t>active workstream; position encoding has been ruled out as the cause, focusing attention on coarse-flow</a:t>
+            </a:r>
+          </a:p>
+          <a:p>
+            <a:pPr>
+              <a:lnSpc>
+                <a:spcPct val="100000"/>
+              </a:lnSpc>
+            </a:pPr>
+            <a:r>
+              <a:rPr sz="1300" b="0">
+                <a:solidFill>
+                  <a:srgbClr val="20242B"/>
+                </a:solidFill>
+                <a:latin typeface="Calibri"/>
+              </a:rPr>
+              <a:t>resolution and training-motion statistics.</a:t>
+            </a:r>
+          </a:p>
+          <a:p>
+            <a:pPr>
+              <a:lnSpc>
+                <a:spcPct val="100000"/>
+              </a:lnSpc>
+            </a:pPr>
+            <a:r>
+              <a:rPr sz="1300" b="0">
                 <a:solidFill>
                   <a:srgbClr val="20242B"/>
                 </a:solidFill>
@@ -3673,19 +4025,61 @@
             </a:r>
           </a:p>
           <a:p>
-            <a:r>
-              <a:rPr sz="1400" b="0">
-                <a:solidFill>
-                  <a:srgbClr val="20242B"/>
-                </a:solidFill>
-                <a:latin typeface="Calibri"/>
-              </a:rPr>
-              <a:t>2. Mixed chairs + vkitti2_all training — one dataloader change; expected to hold 2.27 EPE while recovering precision.</a:t>
-            </a:r>
-          </a:p>
-          <a:p>
-            <a:r>
-              <a:rPr sz="1400" b="0">
+            <a:pPr>
+              <a:lnSpc>
+                <a:spcPct val="100000"/>
+              </a:lnSpc>
+            </a:pPr>
+            <a:r>
+              <a:rPr sz="1300" b="0">
+                <a:solidFill>
+                  <a:srgbClr val="20242B"/>
+                </a:solidFill>
+                <a:latin typeface="Calibri"/>
+              </a:rPr>
+              <a:t>Objective 2 — lower compute, edge-viable.  Met for the intended workload: sparse answers arrive at v2’s</a:t>
+            </a:r>
+          </a:p>
+          <a:p>
+            <a:pPr>
+              <a:lnSpc>
+                <a:spcPct val="100000"/>
+              </a:lnSpc>
+            </a:pPr>
+            <a:r>
+              <a:rPr sz="1300" b="0">
+                <a:solidFill>
+                  <a:srgbClr val="20242B"/>
+                </a:solidFill>
+                <a:latin typeface="Calibri"/>
+              </a:rPr>
+              <a:t>full-frame latency with 13% fewer parameters and ~2.2 GB inference VRAM; repeated queries are ~20×</a:t>
+            </a:r>
+          </a:p>
+          <a:p>
+            <a:pPr>
+              <a:lnSpc>
+                <a:spcPct val="100000"/>
+              </a:lnSpc>
+            </a:pPr>
+            <a:r>
+              <a:rPr sz="1300" b="0">
+                <a:solidFill>
+                  <a:srgbClr val="20242B"/>
+                </a:solidFill>
+                <a:latin typeface="Calibri"/>
+              </a:rPr>
+              <a:t>cheaper than v2 recomputation. Dense-output mode remains slower and is explicitly out of scope.</a:t>
+            </a:r>
+          </a:p>
+          <a:p>
+            <a:pPr>
+              <a:lnSpc>
+                <a:spcPct val="100000"/>
+              </a:lnSpc>
+            </a:pPr>
+            <a:r>
+              <a:rPr sz="1300" b="0">
                 <a:solidFill>
                   <a:srgbClr val="20242B"/>
                 </a:solidFill>
@@ -3695,47 +4089,35 @@
             </a:r>
           </a:p>
           <a:p>
-            <a:r>
-              <a:rPr sz="1400" b="0">
-                <a:solidFill>
-                  <a:srgbClr val="20242B"/>
-                </a:solidFill>
-                <a:latin typeface="Calibri"/>
-              </a:rPr>
-              <a:t>3. Jetson Orin benchmark — the O(N) story is strongest where dense flow cannot run at all.</a:t>
-            </a:r>
-          </a:p>
-          <a:p>
-            <a:r>
-              <a:rPr sz="1400" b="0">
-                <a:solidFill>
-                  <a:srgbClr val="20242B"/>
-                </a:solidFill>
-                <a:latin typeface="Calibri"/>
-              </a:rPr>
-              <a:t/>
-            </a:r>
-          </a:p>
-          <a:p>
-            <a:r>
-              <a:rPr sz="1400" b="0">
-                <a:solidFill>
-                  <a:srgbClr val="20242B"/>
-                </a:solidFill>
-                <a:latin typeface="Calibri"/>
-              </a:rPr>
-              <a:t>4. Thesis experiments — registration/mapping demo on advisor-provided survey imagery; Spring dataset for</a:t>
-            </a:r>
-          </a:p>
-          <a:p>
-            <a:r>
-              <a:rPr sz="1400" b="0">
-                <a:solidFill>
-                  <a:srgbClr val="20242B"/>
-                </a:solidFill>
-                <a:latin typeface="Calibri"/>
-              </a:rPr>
-              <a:t>    above-input-resolution querying (GT at 2x input resolution — a test only queryable decoders can take natively).</a:t>
+            <a:pPr>
+              <a:lnSpc>
+                <a:spcPct val="100000"/>
+              </a:lnSpc>
+            </a:pPr>
+            <a:r>
+              <a:rPr sz="1300" b="0">
+                <a:solidFill>
+                  <a:srgbClr val="20242B"/>
+                </a:solidFill>
+                <a:latin typeface="Calibri"/>
+              </a:rPr>
+              <a:t>Objective 3 — capability that v2 cannot express.  Delivered: continuous-coordinate queries, resolution-</a:t>
+            </a:r>
+          </a:p>
+          <a:p>
+            <a:pPr>
+              <a:lnSpc>
+                <a:spcPct val="100000"/>
+              </a:lnSpc>
+            </a:pPr>
+            <a:r>
+              <a:rPr sz="1300" b="0">
+                <a:solidFill>
+                  <a:srgbClr val="20242B"/>
+                </a:solidFill>
+                <a:latin typeface="Calibri"/>
+              </a:rPr>
+              <a:t>independent output, exact sparse/dense agreement (0.00 px), and an interactive demonstration tool.</a:t>
             </a:r>
           </a:p>
         </p:txBody>
@@ -3748,7 +4130,7 @@
         </p:nvSpPr>
         <p:spPr>
           <a:xfrm>
-            <a:off x="960120" y="5760720"/>
+            <a:off x="960120" y="5779008"/>
             <a:ext cx="10332720" cy="548640"/>
           </a:xfrm>
           <a:prstGeom prst="rect">
@@ -3762,6 +4144,11 @@
           </a:bodyPr>
           <a:lstStyle/>
           <a:p>
+            <a:pPr>
+              <a:lnSpc>
+                <a:spcPct val="100000"/>
+              </a:lnSpc>
+            </a:pPr>
             <a:r>
               <a:rPr sz="1150" b="1">
                 <a:solidFill>
@@ -3769,7 +4156,7 @@
                 </a:solidFill>
                 <a:latin typeface="Calibri"/>
               </a:rPr>
-              <a:t>Takeaway   The architecture is validated; remaining work is training composition and edge deployment.</a:t>
+              <a:t>Takeaway   Two objectives met and measured; the third is scoped to a specific, testable gap with named hypotheses.</a:t>
             </a:r>
           </a:p>
         </p:txBody>
@@ -3796,6 +4183,11 @@
           </a:bodyPr>
           <a:lstStyle/>
           <a:p>
+            <a:pPr>
+              <a:lnSpc>
+                <a:spcPct val="100000"/>
+              </a:lnSpc>
+            </a:pPr>
             <a:r>
               <a:rPr sz="900" b="0">
                 <a:solidFill>
@@ -3803,7 +4195,7 @@
                 </a:solidFill>
                 <a:latin typeface="Calibri"/>
               </a:rPr>
-              <a:t>NeuFlow v3  ·  status</a:t>
+              <a:t>NeuFlow v3 · status report</a:t>
             </a:r>
           </a:p>
         </p:txBody>
@@ -3830,6 +4222,11 @@
           </a:bodyPr>
           <a:lstStyle/>
           <a:p>
+            <a:pPr>
+              <a:lnSpc>
+                <a:spcPct val="100000"/>
+              </a:lnSpc>
+            </a:pPr>
             <a:r>
               <a:rPr sz="900" b="0">
                 <a:solidFill>
@@ -3838,6 +4235,1285 @@
                 <a:latin typeface="Calibri"/>
               </a:rPr>
               <a:t>11</a:t>
+            </a:r>
+          </a:p>
+        </p:txBody>
+      </p:sp>
+    </p:spTree>
+  </p:cSld>
+  <p:clrMapOvr>
+    <a:masterClrMapping/>
+  </p:clrMapOvr>
+</p:sld>
+</file>
+
+<file path=ppt/slides/slide12.xml><?xml version="1.0" encoding="utf-8"?>
+<p:sld xmlns:a="http://schemas.openxmlformats.org/drawingml/2006/main" xmlns:p="http://schemas.openxmlformats.org/presentationml/2006/main" xmlns:r="http://schemas.openxmlformats.org/officeDocument/2006/relationships">
+  <p:cSld>
+    <p:spTree>
+      <p:nvGrpSpPr>
+        <p:cNvPr id="1" name=""/>
+        <p:cNvGrpSpPr/>
+        <p:nvPr/>
+      </p:nvGrpSpPr>
+      <p:grpSpPr/>
+      <p:sp>
+        <p:nvSpPr>
+          <p:cNvPr id="2" name="TextBox 1"/>
+          <p:cNvSpPr txBox="1"/>
+          <p:nvPr/>
+        </p:nvSpPr>
+        <p:spPr>
+          <a:xfrm>
+            <a:off x="685800" y="384048"/>
+            <a:ext cx="10515600" cy="274320"/>
+          </a:xfrm>
+          <a:prstGeom prst="rect">
+            <a:avLst/>
+          </a:prstGeom>
+          <a:noFill/>
+        </p:spPr>
+        <p:txBody>
+          <a:bodyPr wrap="square">
+            <a:spAutoFit/>
+          </a:bodyPr>
+          <a:lstStyle/>
+          <a:p>
+            <a:pPr>
+              <a:lnSpc>
+                <a:spcPct val="100000"/>
+              </a:lnSpc>
+            </a:pPr>
+            <a:r>
+              <a:rPr sz="1050" b="1">
+                <a:solidFill>
+                  <a:srgbClr val="1F4E79"/>
+                </a:solidFill>
+                <a:latin typeface="Calibri"/>
+              </a:rPr>
+              <a:t>NEXT STEPS</a:t>
+            </a:r>
+          </a:p>
+        </p:txBody>
+      </p:sp>
+      <p:sp>
+        <p:nvSpPr>
+          <p:cNvPr id="3" name="TextBox 2"/>
+          <p:cNvSpPr txBox="1"/>
+          <p:nvPr/>
+        </p:nvSpPr>
+        <p:spPr>
+          <a:xfrm>
+            <a:off x="667512" y="658368"/>
+            <a:ext cx="10881360" cy="731520"/>
+          </a:xfrm>
+          <a:prstGeom prst="rect">
+            <a:avLst/>
+          </a:prstGeom>
+          <a:noFill/>
+        </p:spPr>
+        <p:txBody>
+          <a:bodyPr wrap="square">
+            <a:spAutoFit/>
+          </a:bodyPr>
+          <a:lstStyle/>
+          <a:p>
+            <a:pPr>
+              <a:lnSpc>
+                <a:spcPct val="100000"/>
+              </a:lnSpc>
+            </a:pPr>
+            <a:r>
+              <a:rPr sz="2400" b="1">
+                <a:solidFill>
+                  <a:srgbClr val="20242B"/>
+                </a:solidFill>
+                <a:latin typeface="Calibri"/>
+              </a:rPr>
+              <a:t>The running experiment, and the dataset conversation for the lab</a:t>
+            </a:r>
+          </a:p>
+        </p:txBody>
+      </p:sp>
+      <p:sp>
+        <p:nvSpPr>
+          <p:cNvPr id="4" name="TextBox 3"/>
+          <p:cNvSpPr txBox="1"/>
+          <p:nvPr/>
+        </p:nvSpPr>
+        <p:spPr>
+          <a:xfrm>
+            <a:off x="685800" y="1554480"/>
+            <a:ext cx="5577840" cy="4114800"/>
+          </a:xfrm>
+          <a:prstGeom prst="rect">
+            <a:avLst/>
+          </a:prstGeom>
+          <a:noFill/>
+        </p:spPr>
+        <p:txBody>
+          <a:bodyPr wrap="square">
+            <a:spAutoFit/>
+          </a:bodyPr>
+          <a:lstStyle/>
+          <a:p>
+            <a:pPr>
+              <a:lnSpc>
+                <a:spcPct val="100000"/>
+              </a:lnSpc>
+            </a:pPr>
+            <a:r>
+              <a:rPr sz="1250" b="0">
+                <a:solidFill>
+                  <a:srgbClr val="20242B"/>
+                </a:solidFill>
+                <a:latin typeface="Calibri"/>
+              </a:rPr>
+              <a:t>Running now: mixed-dataset training</a:t>
+            </a:r>
+          </a:p>
+          <a:p>
+            <a:pPr>
+              <a:lnSpc>
+                <a:spcPct val="100000"/>
+              </a:lnSpc>
+            </a:pPr>
+            <a:r>
+              <a:rPr sz="1250" b="0">
+                <a:solidFill>
+                  <a:srgbClr val="20242B"/>
+                </a:solidFill>
+                <a:latin typeface="Calibri"/>
+              </a:rPr>
+              <a:t/>
+            </a:r>
+          </a:p>
+          <a:p>
+            <a:pPr>
+              <a:lnSpc>
+                <a:spcPct val="100000"/>
+              </a:lnSpc>
+            </a:pPr>
+            <a:r>
+              <a:rPr sz="1250" b="0">
+                <a:solidFill>
+                  <a:srgbClr val="20242B"/>
+                </a:solidFill>
+                <a:latin typeface="Calibri"/>
+              </a:rPr>
+              <a:t>Joint sampling of FlyingChairs and all VKITTI2 variants</a:t>
+            </a:r>
+          </a:p>
+          <a:p>
+            <a:pPr>
+              <a:lnSpc>
+                <a:spcPct val="100000"/>
+              </a:lnSpc>
+            </a:pPr>
+            <a:r>
+              <a:rPr sz="1250" b="0">
+                <a:solidFill>
+                  <a:srgbClr val="20242B"/>
+                </a:solidFill>
+                <a:latin typeface="Calibri"/>
+              </a:rPr>
+              <a:t>(34,958 pairs, single 320×512 crop) under the standard</a:t>
+            </a:r>
+          </a:p>
+          <a:p>
+            <a:pPr>
+              <a:lnSpc>
+                <a:spcPct val="100000"/>
+              </a:lnSpc>
+            </a:pPr>
+            <a:r>
+              <a:rPr sz="1250" b="0">
+                <a:solidFill>
+                  <a:srgbClr val="20242B"/>
+                </a:solidFill>
+                <a:latin typeface="Calibri"/>
+              </a:rPr>
+              <a:t>recipe. Hypothesis: joint exposure preserves the chairs</a:t>
+            </a:r>
+          </a:p>
+          <a:p>
+            <a:pPr>
+              <a:lnSpc>
+                <a:spcPct val="100000"/>
+              </a:lnSpc>
+            </a:pPr>
+            <a:r>
+              <a:rPr sz="1250" b="0">
+                <a:solidFill>
+                  <a:srgbClr val="20242B"/>
+                </a:solidFill>
+                <a:latin typeface="Calibri"/>
+              </a:rPr>
+              <a:t>error-tail robustness while the driving data restores</a:t>
+            </a:r>
+          </a:p>
+          <a:p>
+            <a:pPr>
+              <a:lnSpc>
+                <a:spcPct val="100000"/>
+              </a:lnSpc>
+            </a:pPr>
+            <a:r>
+              <a:rPr sz="1250" b="0">
+                <a:solidFill>
+                  <a:srgbClr val="20242B"/>
+                </a:solidFill>
+                <a:latin typeface="Calibri"/>
+              </a:rPr>
+              <a:t>sub-pixel precision — the combination that sequential</a:t>
+            </a:r>
+          </a:p>
+          <a:p>
+            <a:pPr>
+              <a:lnSpc>
+                <a:spcPct val="100000"/>
+              </a:lnSpc>
+            </a:pPr>
+            <a:r>
+              <a:rPr sz="1250" b="0">
+                <a:solidFill>
+                  <a:srgbClr val="20242B"/>
+                </a:solidFill>
+                <a:latin typeface="Calibri"/>
+              </a:rPr>
+              <a:t>finetuning provably forgot.</a:t>
+            </a:r>
+          </a:p>
+          <a:p>
+            <a:pPr>
+              <a:lnSpc>
+                <a:spcPct val="100000"/>
+              </a:lnSpc>
+            </a:pPr>
+            <a:r>
+              <a:rPr sz="1250" b="0">
+                <a:solidFill>
+                  <a:srgbClr val="20242B"/>
+                </a:solidFill>
+                <a:latin typeface="Calibri"/>
+              </a:rPr>
+              <a:t/>
+            </a:r>
+          </a:p>
+          <a:p>
+            <a:pPr>
+              <a:lnSpc>
+                <a:spcPct val="100000"/>
+              </a:lnSpc>
+            </a:pPr>
+            <a:r>
+              <a:rPr sz="1250" b="0">
+                <a:solidFill>
+                  <a:srgbClr val="20242B"/>
+                </a:solidFill>
+                <a:latin typeface="Calibri"/>
+              </a:rPr>
+              <a:t>After that, in order:</a:t>
+            </a:r>
+          </a:p>
+          <a:p>
+            <a:pPr>
+              <a:lnSpc>
+                <a:spcPct val="100000"/>
+              </a:lnSpc>
+            </a:pPr>
+            <a:r>
+              <a:rPr sz="1250" b="0">
+                <a:solidFill>
+                  <a:srgbClr val="20242B"/>
+                </a:solidFill>
+                <a:latin typeface="Calibri"/>
+              </a:rPr>
+              <a:t>•  Jetson Orin benchmark of the two-pass API</a:t>
+            </a:r>
+          </a:p>
+          <a:p>
+            <a:pPr>
+              <a:lnSpc>
+                <a:spcPct val="100000"/>
+              </a:lnSpc>
+            </a:pPr>
+            <a:r>
+              <a:rPr sz="1250" b="0">
+                <a:solidFill>
+                  <a:srgbClr val="20242B"/>
+                </a:solidFill>
+                <a:latin typeface="Calibri"/>
+              </a:rPr>
+              <a:t>•  Spring dataset evaluation — ground truth at 2× input</a:t>
+            </a:r>
+          </a:p>
+          <a:p>
+            <a:pPr>
+              <a:lnSpc>
+                <a:spcPct val="100000"/>
+              </a:lnSpc>
+            </a:pPr>
+            <a:r>
+              <a:rPr sz="1250" b="0">
+                <a:solidFill>
+                  <a:srgbClr val="20242B"/>
+                </a:solidFill>
+                <a:latin typeface="Calibri"/>
+              </a:rPr>
+              <a:t>    resolution tests above-input-resolution querying,</a:t>
+            </a:r>
+          </a:p>
+          <a:p>
+            <a:pPr>
+              <a:lnSpc>
+                <a:spcPct val="100000"/>
+              </a:lnSpc>
+            </a:pPr>
+            <a:r>
+              <a:rPr sz="1250" b="0">
+                <a:solidFill>
+                  <a:srgbClr val="20242B"/>
+                </a:solidFill>
+                <a:latin typeface="Calibri"/>
+              </a:rPr>
+              <a:t>    a capability only queryable decoders can express</a:t>
+            </a:r>
+          </a:p>
+          <a:p>
+            <a:pPr>
+              <a:lnSpc>
+                <a:spcPct val="100000"/>
+              </a:lnSpc>
+            </a:pPr>
+            <a:r>
+              <a:rPr sz="1250" b="0">
+                <a:solidFill>
+                  <a:srgbClr val="20242B"/>
+                </a:solidFill>
+                <a:latin typeface="Calibri"/>
+              </a:rPr>
+              <a:t>•  Position encoding revisited on fine-motion data,</a:t>
+            </a:r>
+          </a:p>
+          <a:p>
+            <a:pPr>
+              <a:lnSpc>
+                <a:spcPct val="100000"/>
+              </a:lnSpc>
+            </a:pPr>
+            <a:r>
+              <a:rPr sz="1250" b="0">
+                <a:solidFill>
+                  <a:srgbClr val="20242B"/>
+                </a:solidFill>
+                <a:latin typeface="Calibri"/>
+              </a:rPr>
+              <a:t>    separating the two remaining sub-pixel hypotheses</a:t>
+            </a:r>
+          </a:p>
+        </p:txBody>
+      </p:sp>
+      <p:sp>
+        <p:nvSpPr>
+          <p:cNvPr id="5" name="TextBox 4"/>
+          <p:cNvSpPr txBox="1"/>
+          <p:nvPr/>
+        </p:nvSpPr>
+        <p:spPr>
+          <a:xfrm>
+            <a:off x="6583680" y="1554480"/>
+            <a:ext cx="5029200" cy="4114800"/>
+          </a:xfrm>
+          <a:prstGeom prst="rect">
+            <a:avLst/>
+          </a:prstGeom>
+          <a:noFill/>
+        </p:spPr>
+        <p:txBody>
+          <a:bodyPr wrap="square">
+            <a:spAutoFit/>
+          </a:bodyPr>
+          <a:lstStyle/>
+          <a:p>
+            <a:pPr>
+              <a:lnSpc>
+                <a:spcPct val="100000"/>
+              </a:lnSpc>
+            </a:pPr>
+            <a:r>
+              <a:rPr sz="1200" b="0">
+                <a:solidFill>
+                  <a:srgbClr val="20242B"/>
+                </a:solidFill>
+                <a:latin typeface="Calibri"/>
+              </a:rPr>
+              <a:t>What to request from the Field Robotics Lab</a:t>
+            </a:r>
+          </a:p>
+          <a:p>
+            <a:pPr>
+              <a:lnSpc>
+                <a:spcPct val="100000"/>
+              </a:lnSpc>
+            </a:pPr>
+            <a:r>
+              <a:rPr sz="1200" b="0">
+                <a:solidFill>
+                  <a:srgbClr val="20242B"/>
+                </a:solidFill>
+                <a:latin typeface="Calibri"/>
+              </a:rPr>
+              <a:t/>
+            </a:r>
+          </a:p>
+          <a:p>
+            <a:pPr>
+              <a:lnSpc>
+                <a:spcPct val="100000"/>
+              </a:lnSpc>
+            </a:pPr>
+            <a:r>
+              <a:rPr sz="1200" b="0">
+                <a:solidFill>
+                  <a:srgbClr val="20242B"/>
+                </a:solidFill>
+                <a:latin typeface="Calibri"/>
+              </a:rPr>
+              <a:t>The lab’s SeaBED AUV and UAV survey programs produce</a:t>
+            </a:r>
+          </a:p>
+          <a:p>
+            <a:pPr>
+              <a:lnSpc>
+                <a:spcPct val="100000"/>
+              </a:lnSpc>
+            </a:pPr>
+            <a:r>
+              <a:rPr sz="1200" b="0">
+                <a:solidFill>
+                  <a:srgbClr val="20242B"/>
+                </a:solidFill>
+                <a:latin typeface="Calibri"/>
+              </a:rPr>
+              <a:t>exactly the data this method serves:</a:t>
+            </a:r>
+          </a:p>
+          <a:p>
+            <a:pPr>
+              <a:lnSpc>
+                <a:spcPct val="100000"/>
+              </a:lnSpc>
+            </a:pPr>
+            <a:r>
+              <a:rPr sz="1200" b="0">
+                <a:solidFill>
+                  <a:srgbClr val="20242B"/>
+                </a:solidFill>
+                <a:latin typeface="Calibri"/>
+              </a:rPr>
+              <a:t/>
+            </a:r>
+          </a:p>
+          <a:p>
+            <a:pPr>
+              <a:lnSpc>
+                <a:spcPct val="100000"/>
+              </a:lnSpc>
+            </a:pPr>
+            <a:r>
+              <a:rPr sz="1200" b="0">
+                <a:solidFill>
+                  <a:srgbClr val="20242B"/>
+                </a:solidFill>
+                <a:latin typeface="Calibri"/>
+              </a:rPr>
+              <a:t>•  Sequential seafloor transect imagery (50–75% overlap,</a:t>
+            </a:r>
+          </a:p>
+          <a:p>
+            <a:pPr>
+              <a:lnSpc>
+                <a:spcPct val="100000"/>
+              </a:lnSpc>
+            </a:pPr>
+            <a:r>
+              <a:rPr sz="1200" b="0">
+                <a:solidFill>
+                  <a:srgbClr val="20242B"/>
+                </a:solidFill>
+                <a:latin typeface="Calibri"/>
+              </a:rPr>
+              <a:t>    slow motion, fine texture) — registration and</a:t>
+            </a:r>
+          </a:p>
+          <a:p>
+            <a:pPr>
+              <a:lnSpc>
+                <a:spcPct val="100000"/>
+              </a:lnSpc>
+            </a:pPr>
+            <a:r>
+              <a:rPr sz="1200" b="0">
+                <a:solidFill>
+                  <a:srgbClr val="20242B"/>
+                </a:solidFill>
+                <a:latin typeface="Calibri"/>
+              </a:rPr>
+              <a:t>    photomosaicking with sparse on-demand queries; the</a:t>
+            </a:r>
+          </a:p>
+          <a:p>
+            <a:pPr>
+              <a:lnSpc>
+                <a:spcPct val="100000"/>
+              </a:lnSpc>
+            </a:pPr>
+            <a:r>
+              <a:rPr sz="1200" b="0">
+                <a:solidFill>
+                  <a:srgbClr val="20242B"/>
+                </a:solidFill>
+                <a:latin typeface="Calibri"/>
+              </a:rPr>
+              <a:t>    fine-motion regime also stresses sub-pixel accuracy.</a:t>
+            </a:r>
+          </a:p>
+          <a:p>
+            <a:pPr>
+              <a:lnSpc>
+                <a:spcPct val="100000"/>
+              </a:lnSpc>
+            </a:pPr>
+            <a:r>
+              <a:rPr sz="1200" b="0">
+                <a:solidFill>
+                  <a:srgbClr val="20242B"/>
+                </a:solidFill>
+                <a:latin typeface="Calibri"/>
+              </a:rPr>
+              <a:t>•  Nadir UAV survey sequences (polar or coastal) with</a:t>
+            </a:r>
+          </a:p>
+          <a:p>
+            <a:pPr>
+              <a:lnSpc>
+                <a:spcPct val="100000"/>
+              </a:lnSpc>
+            </a:pPr>
+            <a:r>
+              <a:rPr sz="1200" b="0">
+                <a:solidFill>
+                  <a:srgbClr val="20242B"/>
+                </a:solidFill>
+                <a:latin typeface="Calibri"/>
+              </a:rPr>
+              <a:t>    GPS/IMU tags — georegistration provides pseudo</a:t>
+            </a:r>
+          </a:p>
+          <a:p>
+            <a:pPr>
+              <a:lnSpc>
+                <a:spcPct val="100000"/>
+              </a:lnSpc>
+            </a:pPr>
+            <a:r>
+              <a:rPr sz="1200" b="0">
+                <a:solidFill>
+                  <a:srgbClr val="20242B"/>
+                </a:solidFill>
+                <a:latin typeface="Calibri"/>
+              </a:rPr>
+              <a:t>    ground truth for quantitative evaluation.</a:t>
+            </a:r>
+          </a:p>
+          <a:p>
+            <a:pPr>
+              <a:lnSpc>
+                <a:spcPct val="100000"/>
+              </a:lnSpc>
+            </a:pPr>
+            <a:r>
+              <a:rPr sz="1200" b="0">
+                <a:solidFill>
+                  <a:srgbClr val="20242B"/>
+                </a:solidFill>
+                <a:latin typeface="Calibri"/>
+              </a:rPr>
+              <a:t>•  Vehicle navigation data (DVL/INS poses) and camera</a:t>
+            </a:r>
+          </a:p>
+          <a:p>
+            <a:pPr>
+              <a:lnSpc>
+                <a:spcPct val="100000"/>
+              </a:lnSpc>
+            </a:pPr>
+            <a:r>
+              <a:rPr sz="1200" b="0">
+                <a:solidFill>
+                  <a:srgbClr val="20242B"/>
+                </a:solidFill>
+                <a:latin typeface="Calibri"/>
+              </a:rPr>
+              <a:t>    calibration — enables reprojection-based flow ground</a:t>
+            </a:r>
+          </a:p>
+          <a:p>
+            <a:pPr>
+              <a:lnSpc>
+                <a:spcPct val="100000"/>
+              </a:lnSpc>
+            </a:pPr>
+            <a:r>
+              <a:rPr sz="1200" b="0">
+                <a:solidFill>
+                  <a:srgbClr val="20242B"/>
+                </a:solidFill>
+                <a:latin typeface="Calibri"/>
+              </a:rPr>
+              <a:t>    truth on static scenes without manual labels.</a:t>
+            </a:r>
+          </a:p>
+          <a:p>
+            <a:pPr>
+              <a:lnSpc>
+                <a:spcPct val="100000"/>
+              </a:lnSpc>
+            </a:pPr>
+            <a:r>
+              <a:rPr sz="1200" b="0">
+                <a:solidFill>
+                  <a:srgbClr val="20242B"/>
+                </a:solidFill>
+                <a:latin typeface="Calibri"/>
+              </a:rPr>
+              <a:t/>
+            </a:r>
+          </a:p>
+          <a:p>
+            <a:pPr>
+              <a:lnSpc>
+                <a:spcPct val="100000"/>
+              </a:lnSpc>
+            </a:pPr>
+            <a:r>
+              <a:rPr sz="1200" b="0">
+                <a:solidFill>
+                  <a:srgbClr val="20242B"/>
+                </a:solidFill>
+                <a:latin typeface="Calibri"/>
+              </a:rPr>
+              <a:t>The ask is consecutive frames plus navigation data,</a:t>
+            </a:r>
+          </a:p>
+          <a:p>
+            <a:pPr>
+              <a:lnSpc>
+                <a:spcPct val="100000"/>
+              </a:lnSpc>
+            </a:pPr>
+            <a:r>
+              <a:rPr sz="1200" b="0">
+                <a:solidFill>
+                  <a:srgbClr val="20242B"/>
+                </a:solidFill>
+                <a:latin typeface="Calibri"/>
+              </a:rPr>
+              <a:t>not finished mosaics.</a:t>
+            </a:r>
+          </a:p>
+        </p:txBody>
+      </p:sp>
+      <p:sp>
+        <p:nvSpPr>
+          <p:cNvPr id="6" name="TextBox 5"/>
+          <p:cNvSpPr txBox="1"/>
+          <p:nvPr/>
+        </p:nvSpPr>
+        <p:spPr>
+          <a:xfrm>
+            <a:off x="960120" y="5779008"/>
+            <a:ext cx="10332720" cy="548640"/>
+          </a:xfrm>
+          <a:prstGeom prst="rect">
+            <a:avLst/>
+          </a:prstGeom>
+          <a:noFill/>
+        </p:spPr>
+        <p:txBody>
+          <a:bodyPr wrap="square">
+            <a:spAutoFit/>
+          </a:bodyPr>
+          <a:lstStyle/>
+          <a:p>
+            <a:pPr>
+              <a:lnSpc>
+                <a:spcPct val="100000"/>
+              </a:lnSpc>
+            </a:pPr>
+            <a:r>
+              <a:rPr sz="1150" b="1">
+                <a:solidFill>
+                  <a:srgbClr val="1F4E79"/>
+                </a:solidFill>
+                <a:latin typeface="Calibri"/>
+              </a:rPr>
+              <a:t>Takeaway   The method is validated on public benchmarks; lab survey data is where its operating point becomes an application.</a:t>
+            </a:r>
+          </a:p>
+        </p:txBody>
+      </p:sp>
+      <p:sp>
+        <p:nvSpPr>
+          <p:cNvPr id="7" name="TextBox 6"/>
+          <p:cNvSpPr txBox="1"/>
+          <p:nvPr/>
+        </p:nvSpPr>
+        <p:spPr>
+          <a:xfrm>
+            <a:off x="685800" y="6419088"/>
+            <a:ext cx="7315200" cy="274320"/>
+          </a:xfrm>
+          <a:prstGeom prst="rect">
+            <a:avLst/>
+          </a:prstGeom>
+          <a:noFill/>
+        </p:spPr>
+        <p:txBody>
+          <a:bodyPr wrap="square">
+            <a:spAutoFit/>
+          </a:bodyPr>
+          <a:lstStyle/>
+          <a:p>
+            <a:pPr>
+              <a:lnSpc>
+                <a:spcPct val="100000"/>
+              </a:lnSpc>
+            </a:pPr>
+            <a:r>
+              <a:rPr sz="900" b="0">
+                <a:solidFill>
+                  <a:srgbClr val="7B838F"/>
+                </a:solidFill>
+                <a:latin typeface="Calibri"/>
+              </a:rPr>
+              <a:t>NeuFlow v3 · status report</a:t>
+            </a:r>
+          </a:p>
+        </p:txBody>
+      </p:sp>
+      <p:sp>
+        <p:nvSpPr>
+          <p:cNvPr id="8" name="TextBox 7"/>
+          <p:cNvSpPr txBox="1"/>
+          <p:nvPr/>
+        </p:nvSpPr>
+        <p:spPr>
+          <a:xfrm>
+            <a:off x="10607040" y="6419088"/>
+            <a:ext cx="1097280" cy="274320"/>
+          </a:xfrm>
+          <a:prstGeom prst="rect">
+            <a:avLst/>
+          </a:prstGeom>
+          <a:noFill/>
+        </p:spPr>
+        <p:txBody>
+          <a:bodyPr wrap="square">
+            <a:spAutoFit/>
+          </a:bodyPr>
+          <a:lstStyle/>
+          <a:p>
+            <a:pPr>
+              <a:lnSpc>
+                <a:spcPct val="100000"/>
+              </a:lnSpc>
+            </a:pPr>
+            <a:r>
+              <a:rPr sz="900" b="0">
+                <a:solidFill>
+                  <a:srgbClr val="7B838F"/>
+                </a:solidFill>
+                <a:latin typeface="Calibri"/>
+              </a:rPr>
+              <a:t>12</a:t>
+            </a:r>
+          </a:p>
+        </p:txBody>
+      </p:sp>
+    </p:spTree>
+  </p:cSld>
+  <p:clrMapOvr>
+    <a:masterClrMapping/>
+  </p:clrMapOvr>
+</p:sld>
+</file>
+
+<file path=ppt/slides/slide13.xml><?xml version="1.0" encoding="utf-8"?>
+<p:sld xmlns:a="http://schemas.openxmlformats.org/drawingml/2006/main" xmlns:p="http://schemas.openxmlformats.org/presentationml/2006/main" xmlns:r="http://schemas.openxmlformats.org/officeDocument/2006/relationships">
+  <p:cSld>
+    <p:spTree>
+      <p:nvGrpSpPr>
+        <p:cNvPr id="1" name=""/>
+        <p:cNvGrpSpPr/>
+        <p:nvPr/>
+      </p:nvGrpSpPr>
+      <p:grpSpPr/>
+      <p:sp>
+        <p:nvSpPr>
+          <p:cNvPr id="2" name="TextBox 1"/>
+          <p:cNvSpPr txBox="1"/>
+          <p:nvPr/>
+        </p:nvSpPr>
+        <p:spPr>
+          <a:xfrm>
+            <a:off x="685800" y="384048"/>
+            <a:ext cx="10515600" cy="274320"/>
+          </a:xfrm>
+          <a:prstGeom prst="rect">
+            <a:avLst/>
+          </a:prstGeom>
+          <a:noFill/>
+        </p:spPr>
+        <p:txBody>
+          <a:bodyPr wrap="square">
+            <a:spAutoFit/>
+          </a:bodyPr>
+          <a:lstStyle/>
+          <a:p>
+            <a:pPr>
+              <a:lnSpc>
+                <a:spcPct val="100000"/>
+              </a:lnSpc>
+            </a:pPr>
+            <a:r>
+              <a:rPr sz="1050" b="1">
+                <a:solidFill>
+                  <a:srgbClr val="1F4E79"/>
+                </a:solidFill>
+                <a:latin typeface="Calibri"/>
+              </a:rPr>
+              <a:t>ANTICIPATED QUESTIONS</a:t>
+            </a:r>
+          </a:p>
+        </p:txBody>
+      </p:sp>
+      <p:sp>
+        <p:nvSpPr>
+          <p:cNvPr id="3" name="TextBox 2"/>
+          <p:cNvSpPr txBox="1"/>
+          <p:nvPr/>
+        </p:nvSpPr>
+        <p:spPr>
+          <a:xfrm>
+            <a:off x="667512" y="658368"/>
+            <a:ext cx="10881360" cy="731520"/>
+          </a:xfrm>
+          <a:prstGeom prst="rect">
+            <a:avLst/>
+          </a:prstGeom>
+          <a:noFill/>
+        </p:spPr>
+        <p:txBody>
+          <a:bodyPr wrap="square">
+            <a:spAutoFit/>
+          </a:bodyPr>
+          <a:lstStyle/>
+          <a:p>
+            <a:pPr>
+              <a:lnSpc>
+                <a:spcPct val="100000"/>
+              </a:lnSpc>
+            </a:pPr>
+            <a:r>
+              <a:rPr sz="2400" b="1">
+                <a:solidFill>
+                  <a:srgbClr val="20242B"/>
+                </a:solidFill>
+                <a:latin typeface="Calibri"/>
+              </a:rPr>
+              <a:t>First-principles answers</a:t>
+            </a:r>
+          </a:p>
+        </p:txBody>
+      </p:sp>
+      <p:sp>
+        <p:nvSpPr>
+          <p:cNvPr id="4" name="TextBox 3"/>
+          <p:cNvSpPr txBox="1"/>
+          <p:nvPr/>
+        </p:nvSpPr>
+        <p:spPr>
+          <a:xfrm>
+            <a:off x="685800" y="1508760"/>
+            <a:ext cx="10881360" cy="4114800"/>
+          </a:xfrm>
+          <a:prstGeom prst="rect">
+            <a:avLst/>
+          </a:prstGeom>
+          <a:noFill/>
+        </p:spPr>
+        <p:txBody>
+          <a:bodyPr wrap="square">
+            <a:spAutoFit/>
+          </a:bodyPr>
+          <a:lstStyle/>
+          <a:p>
+            <a:pPr>
+              <a:lnSpc>
+                <a:spcPct val="102000"/>
+              </a:lnSpc>
+            </a:pPr>
+            <a:r>
+              <a:rPr sz="1150" b="0">
+                <a:solidFill>
+                  <a:srgbClr val="20242B"/>
+                </a:solidFill>
+                <a:latin typeface="Calibri"/>
+              </a:rPr>
+              <a:t>Why is flow defined at non-integer coordinates?  Bilinear interpolation makes feature maps continuous functions of position;</a:t>
+            </a:r>
+          </a:p>
+          <a:p>
+            <a:pPr>
+              <a:lnSpc>
+                <a:spcPct val="102000"/>
+              </a:lnSpc>
+            </a:pPr>
+            <a:r>
+              <a:rPr sz="1150" b="0">
+                <a:solidFill>
+                  <a:srgbClr val="20242B"/>
+                </a:solidFill>
+                <a:latin typeface="Calibri"/>
+              </a:rPr>
+              <a:t>an MLP composed with them is defined at every real (x, y). Integer pixels are the special case dense maps hard-code.</a:t>
+            </a:r>
+          </a:p>
+          <a:p>
+            <a:pPr>
+              <a:lnSpc>
+                <a:spcPct val="102000"/>
+              </a:lnSpc>
+            </a:pPr>
+            <a:r>
+              <a:rPr sz="1150" b="0">
+                <a:solidFill>
+                  <a:srgbClr val="20242B"/>
+                </a:solidFill>
+                <a:latin typeface="Calibri"/>
+              </a:rPr>
+              <a:t/>
+            </a:r>
+          </a:p>
+          <a:p>
+            <a:pPr>
+              <a:lnSpc>
+                <a:spcPct val="102000"/>
+              </a:lnSpc>
+            </a:pPr>
+            <a:r>
+              <a:rPr sz="1150" b="0">
+                <a:solidFill>
+                  <a:srgbClr val="20242B"/>
+                </a:solidFill>
+                <a:latin typeface="Calibri"/>
+              </a:rPr>
+              <a:t>Why freeze the backbone?  Joint training is a moving-target problem requiring ~800K steps at InfiniDepth’s scale; at a 30K budget</a:t>
+            </a:r>
+          </a:p>
+          <a:p>
+            <a:pPr>
+              <a:lnSpc>
+                <a:spcPct val="102000"/>
+              </a:lnSpc>
+            </a:pPr>
+            <a:r>
+              <a:rPr sz="1150" b="0">
+                <a:solidFill>
+                  <a:srgbClr val="20242B"/>
+                </a:solidFill>
+                <a:latin typeface="Calibri"/>
+              </a:rPr>
+              <a:t>the decoder diverges chasing shifting features (observed directly). Freezing also guarantees v2’s matching quality is inherited.</a:t>
+            </a:r>
+          </a:p>
+          <a:p>
+            <a:pPr>
+              <a:lnSpc>
+                <a:spcPct val="102000"/>
+              </a:lnSpc>
+            </a:pPr>
+            <a:r>
+              <a:rPr sz="1150" b="0">
+                <a:solidFill>
+                  <a:srgbClr val="20242B"/>
+                </a:solidFill>
+                <a:latin typeface="Calibri"/>
+              </a:rPr>
+              <a:t/>
+            </a:r>
+          </a:p>
+          <a:p>
+            <a:pPr>
+              <a:lnSpc>
+                <a:spcPct val="102000"/>
+              </a:lnSpc>
+            </a:pPr>
+            <a:r>
+              <a:rPr sz="1150" b="0">
+                <a:solidFill>
+                  <a:srgbClr val="20242B"/>
+                </a:solidFill>
+                <a:latin typeface="Calibri"/>
+              </a:rPr>
+              <a:t>Is sparse output an approximation?  No. It is the same function evaluated at fewer points; agreement with dense output is exact.</a:t>
+            </a:r>
+          </a:p>
+          <a:p>
+            <a:pPr>
+              <a:lnSpc>
+                <a:spcPct val="102000"/>
+              </a:lnSpc>
+            </a:pPr>
+            <a:r>
+              <a:rPr sz="1150" b="0">
+                <a:solidFill>
+                  <a:srgbClr val="20242B"/>
+                </a:solidFill>
+                <a:latin typeface="Calibri"/>
+              </a:rPr>
+              <a:t/>
+            </a:r>
+          </a:p>
+          <a:p>
+            <a:pPr>
+              <a:lnSpc>
+                <a:spcPct val="102000"/>
+              </a:lnSpc>
+            </a:pPr>
+            <a:r>
+              <a:rPr sz="1150" b="0">
+                <a:solidFill>
+                  <a:srgbClr val="20242B"/>
+                </a:solidFill>
+                <a:latin typeface="Calibri"/>
+              </a:rPr>
+              <a:t>Why does out-of-domain training win?  Mean EPE is dominated by the error tail. Diverse large motions train tail robustness;</a:t>
+            </a:r>
+          </a:p>
+          <a:p>
+            <a:pPr>
+              <a:lnSpc>
+                <a:spcPct val="102000"/>
+              </a:lnSpc>
+            </a:pPr>
+            <a:r>
+              <a:rPr sz="1150" b="0">
+                <a:solidFill>
+                  <a:srgbClr val="20242B"/>
+                </a:solidFill>
+                <a:latin typeface="Calibri"/>
+              </a:rPr>
+              <a:t>five driving scenes train memorization. Both effects were measured, in both directions.</a:t>
+            </a:r>
+          </a:p>
+          <a:p>
+            <a:pPr>
+              <a:lnSpc>
+                <a:spcPct val="102000"/>
+              </a:lnSpc>
+            </a:pPr>
+            <a:r>
+              <a:rPr sz="1150" b="0">
+                <a:solidFill>
+                  <a:srgbClr val="20242B"/>
+                </a:solidFill>
+                <a:latin typeface="Calibri"/>
+              </a:rPr>
+              <a:t/>
+            </a:r>
+          </a:p>
+          <a:p>
+            <a:pPr>
+              <a:lnSpc>
+                <a:spcPct val="102000"/>
+              </a:lnSpc>
+            </a:pPr>
+            <a:r>
+              <a:rPr sz="1150" b="0">
+                <a:solidFill>
+                  <a:srgbClr val="20242B"/>
+                </a:solidFill>
+                <a:latin typeface="Calibri"/>
+              </a:rPr>
+              <a:t>What limits sub-pixel accuracy?  Not positional information — measured (PE ablation, null result). Remaining candidates: the</a:t>
+            </a:r>
+          </a:p>
+          <a:p>
+            <a:pPr>
+              <a:lnSpc>
+                <a:spcPct val="102000"/>
+              </a:lnSpc>
+            </a:pPr>
+            <a:r>
+              <a:rPr sz="1150" b="0">
+                <a:solidFill>
+                  <a:srgbClr val="20242B"/>
+                </a:solidFill>
+                <a:latin typeface="Calibri"/>
+              </a:rPr>
+              <a:t>1/8-scale coarse flow bounds recoverable detail, and chairs-scale motions never supervise sub-pixel discrimination.</a:t>
+            </a:r>
+          </a:p>
+          <a:p>
+            <a:pPr>
+              <a:lnSpc>
+                <a:spcPct val="102000"/>
+              </a:lnSpc>
+            </a:pPr>
+            <a:r>
+              <a:rPr sz="1150" b="0">
+                <a:solidFill>
+                  <a:srgbClr val="20242B"/>
+                </a:solidFill>
+                <a:latin typeface="Calibri"/>
+              </a:rPr>
+              <a:t/>
+            </a:r>
+          </a:p>
+          <a:p>
+            <a:pPr>
+              <a:lnSpc>
+                <a:spcPct val="102000"/>
+              </a:lnSpc>
+            </a:pPr>
+            <a:r>
+              <a:rPr sz="1150" b="0">
+                <a:solidFill>
+                  <a:srgbClr val="20242B"/>
+                </a:solidFill>
+                <a:latin typeface="Calibri"/>
+              </a:rPr>
+              <a:t>Why batch size 4?  An 8 GB VRAM budget; the recipe is otherwise RAFT-standard and scales directly on larger GPUs.</a:t>
+            </a:r>
+          </a:p>
+        </p:txBody>
+      </p:sp>
+      <p:sp>
+        <p:nvSpPr>
+          <p:cNvPr id="5" name="TextBox 4"/>
+          <p:cNvSpPr txBox="1"/>
+          <p:nvPr/>
+        </p:nvSpPr>
+        <p:spPr>
+          <a:xfrm>
+            <a:off x="960120" y="5779008"/>
+            <a:ext cx="10332720" cy="548640"/>
+          </a:xfrm>
+          <a:prstGeom prst="rect">
+            <a:avLst/>
+          </a:prstGeom>
+          <a:noFill/>
+        </p:spPr>
+        <p:txBody>
+          <a:bodyPr wrap="square">
+            <a:spAutoFit/>
+          </a:bodyPr>
+          <a:lstStyle/>
+          <a:p>
+            <a:pPr>
+              <a:lnSpc>
+                <a:spcPct val="100000"/>
+              </a:lnSpc>
+            </a:pPr>
+            <a:r>
+              <a:rPr sz="1150" b="1">
+                <a:solidFill>
+                  <a:srgbClr val="1F4E79"/>
+                </a:solidFill>
+                <a:latin typeface="Calibri"/>
+              </a:rPr>
+              <a:t>Takeaway   Full derivations and the complete question list: docs/NeuFlow_v3_Report.md, sections 5–6.</a:t>
+            </a:r>
+          </a:p>
+        </p:txBody>
+      </p:sp>
+      <p:sp>
+        <p:nvSpPr>
+          <p:cNvPr id="6" name="TextBox 5"/>
+          <p:cNvSpPr txBox="1"/>
+          <p:nvPr/>
+        </p:nvSpPr>
+        <p:spPr>
+          <a:xfrm>
+            <a:off x="685800" y="6419088"/>
+            <a:ext cx="7315200" cy="274320"/>
+          </a:xfrm>
+          <a:prstGeom prst="rect">
+            <a:avLst/>
+          </a:prstGeom>
+          <a:noFill/>
+        </p:spPr>
+        <p:txBody>
+          <a:bodyPr wrap="square">
+            <a:spAutoFit/>
+          </a:bodyPr>
+          <a:lstStyle/>
+          <a:p>
+            <a:pPr>
+              <a:lnSpc>
+                <a:spcPct val="100000"/>
+              </a:lnSpc>
+            </a:pPr>
+            <a:r>
+              <a:rPr sz="900" b="0">
+                <a:solidFill>
+                  <a:srgbClr val="7B838F"/>
+                </a:solidFill>
+                <a:latin typeface="Calibri"/>
+              </a:rPr>
+              <a:t>NeuFlow v3 · status report</a:t>
+            </a:r>
+          </a:p>
+        </p:txBody>
+      </p:sp>
+      <p:sp>
+        <p:nvSpPr>
+          <p:cNvPr id="7" name="TextBox 6"/>
+          <p:cNvSpPr txBox="1"/>
+          <p:nvPr/>
+        </p:nvSpPr>
+        <p:spPr>
+          <a:xfrm>
+            <a:off x="10607040" y="6419088"/>
+            <a:ext cx="1097280" cy="274320"/>
+          </a:xfrm>
+          <a:prstGeom prst="rect">
+            <a:avLst/>
+          </a:prstGeom>
+          <a:noFill/>
+        </p:spPr>
+        <p:txBody>
+          <a:bodyPr wrap="square">
+            <a:spAutoFit/>
+          </a:bodyPr>
+          <a:lstStyle/>
+          <a:p>
+            <a:pPr>
+              <a:lnSpc>
+                <a:spcPct val="100000"/>
+              </a:lnSpc>
+            </a:pPr>
+            <a:r>
+              <a:rPr sz="900" b="0">
+                <a:solidFill>
+                  <a:srgbClr val="7B838F"/>
+                </a:solidFill>
+                <a:latin typeface="Calibri"/>
+              </a:rPr>
+              <a:t>13</a:t>
             </a:r>
           </a:p>
         </p:txBody>
@@ -3869,7 +5545,7 @@
         <p:spPr>
           <a:xfrm>
             <a:off x="685800" y="384048"/>
-            <a:ext cx="10058400" cy="274320"/>
+            <a:ext cx="10515600" cy="274320"/>
           </a:xfrm>
           <a:prstGeom prst="rect">
             <a:avLst/>
@@ -3882,6 +5558,11 @@
           </a:bodyPr>
           <a:lstStyle/>
           <a:p>
+            <a:pPr>
+              <a:lnSpc>
+                <a:spcPct val="100000"/>
+              </a:lnSpc>
+            </a:pPr>
             <a:r>
               <a:rPr sz="1050" b="1">
                 <a:solidFill>
@@ -3889,7 +5570,7 @@
                 </a:solidFill>
                 <a:latin typeface="Calibri"/>
               </a:rPr>
-              <a:t>BACKGROUND</a:t>
+              <a:t>MOTIVATION</a:t>
             </a:r>
           </a:p>
         </p:txBody>
@@ -3903,7 +5584,7 @@
         <p:spPr>
           <a:xfrm>
             <a:off x="667512" y="658368"/>
-            <a:ext cx="10789920" cy="731520"/>
+            <a:ext cx="10881360" cy="731520"/>
           </a:xfrm>
           <a:prstGeom prst="rect">
             <a:avLst/>
@@ -3916,6 +5597,11 @@
           </a:bodyPr>
           <a:lstStyle/>
           <a:p>
+            <a:pPr>
+              <a:lnSpc>
+                <a:spcPct val="100000"/>
+              </a:lnSpc>
+            </a:pPr>
             <a:r>
               <a:rPr sz="2400" b="1">
                 <a:solidFill>
@@ -3923,7 +5609,7 @@
                 </a:solidFill>
                 <a:latin typeface="Calibri"/>
               </a:rPr>
-              <a:t>What NeuFlow v2 does</a:t>
+              <a:t>The problem, from first principles</a:t>
             </a:r>
           </a:p>
         </p:txBody>
@@ -3936,8 +5622,8 @@
         </p:nvSpPr>
         <p:spPr>
           <a:xfrm>
-            <a:off x="685800" y="1600200"/>
-            <a:ext cx="5669280" cy="4023360"/>
+            <a:off x="685800" y="1554480"/>
+            <a:ext cx="5577840" cy="4023360"/>
           </a:xfrm>
           <a:prstGeom prst="rect">
             <a:avLst/>
@@ -3950,6 +5636,11 @@
           </a:bodyPr>
           <a:lstStyle/>
           <a:p>
+            <a:pPr>
+              <a:lnSpc>
+                <a:spcPct val="100000"/>
+              </a:lnSpc>
+            </a:pPr>
             <a:r>
               <a:rPr sz="1300" b="0">
                 <a:solidFill>
@@ -3957,10 +5648,15 @@
                 </a:solidFill>
                 <a:latin typeface="Calibri"/>
               </a:rPr>
-              <a:t>Real-time optical flow for edge devices (Zhang, Gupta, Jiang, Singh).</a:t>
-            </a:r>
-          </a:p>
-          <a:p>
+              <a:t>Optical flow answers one question: for a pixel in frame t,</a:t>
+            </a:r>
+          </a:p>
+          <a:p>
+            <a:pPr>
+              <a:lnSpc>
+                <a:spcPct val="100000"/>
+              </a:lnSpc>
+            </a:pPr>
             <a:r>
               <a:rPr sz="1300" b="0">
                 <a:solidFill>
@@ -3968,10 +5664,31 @@
                 </a:solidFill>
                 <a:latin typeface="Calibri"/>
               </a:rPr>
+              <a:t>where is it in frame t+1?</a:t>
+            </a:r>
+          </a:p>
+          <a:p>
+            <a:pPr>
+              <a:lnSpc>
+                <a:spcPct val="100000"/>
+              </a:lnSpc>
+            </a:pPr>
+            <a:r>
+              <a:rPr sz="1300" b="0">
+                <a:solidFill>
+                  <a:srgbClr val="20242B"/>
+                </a:solidFill>
+                <a:latin typeface="Calibri"/>
+              </a:rPr>
               <a:t/>
             </a:r>
           </a:p>
           <a:p>
+            <a:pPr>
+              <a:lnSpc>
+                <a:spcPct val="100000"/>
+              </a:lnSpc>
+            </a:pPr>
             <a:r>
               <a:rPr sz="1300" b="0">
                 <a:solidFill>
@@ -3979,10 +5696,15 @@
                 </a:solidFill>
                 <a:latin typeface="Calibri"/>
               </a:rPr>
-              <a:t>1. Shallow CNN backbone: features at 1/8 and 1/16 scale</a:t>
-            </a:r>
-          </a:p>
-          <a:p>
+              <a:t>Every modern network answers it for all pixels at once,</a:t>
+            </a:r>
+          </a:p>
+          <a:p>
+            <a:pPr>
+              <a:lnSpc>
+                <a:spcPct val="100000"/>
+              </a:lnSpc>
+            </a:pPr>
             <a:r>
               <a:rPr sz="1300" b="0">
                 <a:solidFill>
@@ -3990,10 +5712,15 @@
                 </a:solidFill>
                 <a:latin typeface="Calibri"/>
               </a:rPr>
-              <a:t>2. Cross-attention + global matching at 1/16: initial flow</a:t>
-            </a:r>
-          </a:p>
-          <a:p>
+              <a:t>as a dense, fixed-resolution map. That design assumes the</a:t>
+            </a:r>
+          </a:p>
+          <a:p>
+            <a:pPr>
+              <a:lnSpc>
+                <a:spcPct val="100000"/>
+              </a:lnSpc>
+            </a:pPr>
             <a:r>
               <a:rPr sz="1300" b="0">
                 <a:solidFill>
@@ -4001,10 +5728,15 @@
                 </a:solidFill>
                 <a:latin typeface="Calibri"/>
               </a:rPr>
-              <a:t>3. Lightweight recurrent refinement (1 + 8 iterations)</a:t>
-            </a:r>
-          </a:p>
-          <a:p>
+              <a:t>consumer wants every pixel. Many downstream tasks do not:</a:t>
+            </a:r>
+          </a:p>
+          <a:p>
+            <a:pPr>
+              <a:lnSpc>
+                <a:spcPct val="100000"/>
+              </a:lnSpc>
+            </a:pPr>
             <a:r>
               <a:rPr sz="1300" b="0">
                 <a:solidFill>
@@ -4012,10 +5744,15 @@
                 </a:solidFill>
                 <a:latin typeface="Calibri"/>
               </a:rPr>
-              <a:t>4. Convex upsampler: learned 3x3 blending on a fixed 8x grid</a:t>
-            </a:r>
-          </a:p>
-          <a:p>
+              <a:t/>
+            </a:r>
+          </a:p>
+          <a:p>
+            <a:pPr>
+              <a:lnSpc>
+                <a:spcPct val="100000"/>
+              </a:lnSpc>
+            </a:pPr>
             <a:r>
               <a:rPr sz="1300" b="0">
                 <a:solidFill>
@@ -4023,10 +5760,95 @@
                 </a:solidFill>
                 <a:latin typeface="Calibri"/>
               </a:rPr>
+              <a:t>•  Image registration needs hundreds of correspondences,</a:t>
+            </a:r>
+          </a:p>
+          <a:p>
+            <a:pPr>
+              <a:lnSpc>
+                <a:spcPct val="100000"/>
+              </a:lnSpc>
+            </a:pPr>
+            <a:r>
+              <a:rPr sz="1300" b="0">
+                <a:solidFill>
+                  <a:srgbClr val="20242B"/>
+                </a:solidFill>
+                <a:latin typeface="Calibri"/>
+              </a:rPr>
+              <a:t>    at well-textured locations of its own choosing.</a:t>
+            </a:r>
+          </a:p>
+          <a:p>
+            <a:pPr>
+              <a:lnSpc>
+                <a:spcPct val="100000"/>
+              </a:lnSpc>
+            </a:pPr>
+            <a:r>
+              <a:rPr sz="1300" b="0">
+                <a:solidFill>
+                  <a:srgbClr val="20242B"/>
+                </a:solidFill>
+                <a:latin typeface="Calibri"/>
+              </a:rPr>
+              <a:t>•  Sparse tracking needs flow at feature points only.</a:t>
+            </a:r>
+          </a:p>
+          <a:p>
+            <a:pPr>
+              <a:lnSpc>
+                <a:spcPct val="100000"/>
+              </a:lnSpc>
+            </a:pPr>
+            <a:r>
+              <a:rPr sz="1300" b="0">
+                <a:solidFill>
+                  <a:srgbClr val="20242B"/>
+                </a:solidFill>
+                <a:latin typeface="Calibri"/>
+              </a:rPr>
+              <a:t>•  Mapping pipelines need correspondences at survey</a:t>
+            </a:r>
+          </a:p>
+          <a:p>
+            <a:pPr>
+              <a:lnSpc>
+                <a:spcPct val="100000"/>
+              </a:lnSpc>
+            </a:pPr>
+            <a:r>
+              <a:rPr sz="1300" b="0">
+                <a:solidFill>
+                  <a:srgbClr val="20242B"/>
+                </a:solidFill>
+                <a:latin typeface="Calibri"/>
+              </a:rPr>
+              <a:t>    overlap regions, often at sub-pixel positions.</a:t>
+            </a:r>
+          </a:p>
+          <a:p>
+            <a:pPr>
+              <a:lnSpc>
+                <a:spcPct val="100000"/>
+              </a:lnSpc>
+            </a:pPr>
+            <a:r>
+              <a:rPr sz="1300" b="0">
+                <a:solidFill>
+                  <a:srgbClr val="20242B"/>
+                </a:solidFill>
+                <a:latin typeface="Calibri"/>
+              </a:rPr>
               <a:t/>
             </a:r>
           </a:p>
           <a:p>
+            <a:pPr>
+              <a:lnSpc>
+                <a:spcPct val="100000"/>
+              </a:lnSpc>
+            </a:pPr>
             <a:r>
               <a:rPr sz="1300" b="0">
                 <a:solidFill>
@@ -4034,10 +5856,15 @@
                 </a:solidFill>
                 <a:latin typeface="Calibri"/>
               </a:rPr>
-              <a:t>10-70x faster than SOTA at comparable accuracy;</a:t>
-            </a:r>
-          </a:p>
-          <a:p>
+              <a:t>On edge hardware, computing 479,000 answers to serve 800</a:t>
+            </a:r>
+          </a:p>
+          <a:p>
+            <a:pPr>
+              <a:lnSpc>
+                <a:spcPct val="100000"/>
+              </a:lnSpc>
+            </a:pPr>
             <a:r>
               <a:rPr sz="1300" b="0">
                 <a:solidFill>
@@ -4045,40 +5872,7 @@
                 </a:solidFill>
                 <a:latin typeface="Calibri"/>
               </a:rPr>
-              <a:t>&gt;20 FPS at 512x384 on Jetson Orin Nano.</a:t>
-            </a:r>
-          </a:p>
-          <a:p>
-            <a:r>
-              <a:rPr sz="1300" b="0">
-                <a:solidFill>
-                  <a:srgbClr val="20242B"/>
-                </a:solidFill>
-                <a:latin typeface="Calibri"/>
-              </a:rPr>
-              <a:t/>
-            </a:r>
-          </a:p>
-          <a:p>
-            <a:r>
-              <a:rPr sz="1300" b="0">
-                <a:solidFill>
-                  <a:srgbClr val="20242B"/>
-                </a:solidFill>
-                <a:latin typeface="Calibri"/>
-              </a:rPr>
-              <a:t>Measured on our setup (RTX 4060, 384x1248, fp16):</a:t>
-            </a:r>
-          </a:p>
-          <a:p>
-            <a:r>
-              <a:rPr sz="1300" b="0">
-                <a:solidFill>
-                  <a:srgbClr val="20242B"/>
-                </a:solidFill>
-                <a:latin typeface="Calibri"/>
-              </a:rPr>
-              <a:t>37 ms per frame pair · 9.03M params · 2.32 px EPE on VKITTI2</a:t>
+              <a:t>questions is the difference between real time and not.</a:t>
             </a:r>
           </a:p>
         </p:txBody>
@@ -4091,8 +5885,8 @@
         </p:nvSpPr>
         <p:spPr>
           <a:xfrm>
-            <a:off x="6675120" y="1600200"/>
-            <a:ext cx="4754880" cy="3657600"/>
+            <a:off x="6583680" y="1554480"/>
+            <a:ext cx="4937760" cy="4023360"/>
           </a:xfrm>
           <a:prstGeom prst="rect">
             <a:avLst/>
@@ -4105,6 +5899,11 @@
           </a:bodyPr>
           <a:lstStyle/>
           <a:p>
+            <a:pPr>
+              <a:lnSpc>
+                <a:spcPct val="100000"/>
+              </a:lnSpc>
+            </a:pPr>
             <a:r>
               <a:rPr sz="1300" b="0">
                 <a:solidFill>
@@ -4112,10 +5911,15 @@
                 </a:solidFill>
                 <a:latin typeface="Calibri"/>
               </a:rPr>
-              <a:t>The structural limit</a:t>
-            </a:r>
-          </a:p>
-          <a:p>
+              <a:t>The proposition</a:t>
+            </a:r>
+          </a:p>
+          <a:p>
+            <a:pPr>
+              <a:lnSpc>
+                <a:spcPct val="100000"/>
+              </a:lnSpc>
+            </a:pPr>
             <a:r>
               <a:rPr sz="1300" b="0">
                 <a:solidFill>
@@ -4127,6 +5931,11 @@
             </a:r>
           </a:p>
           <a:p>
+            <a:pPr>
+              <a:lnSpc>
+                <a:spcPct val="100000"/>
+              </a:lnSpc>
+            </a:pPr>
             <a:r>
               <a:rPr sz="1300" b="0">
                 <a:solidFill>
@@ -4134,10 +5943,15 @@
                 </a:solidFill>
                 <a:latin typeface="Calibri"/>
               </a:rPr>
-              <a:t>Output is a dense, fixed-resolution map.</a:t>
-            </a:r>
-          </a:p>
-          <a:p>
+              <a:t>Keep the part of NeuFlow v2 that understands motion</a:t>
+            </a:r>
+          </a:p>
+          <a:p>
+            <a:pPr>
+              <a:lnSpc>
+                <a:spcPct val="100000"/>
+              </a:lnSpc>
+            </a:pPr>
             <a:r>
               <a:rPr sz="1300" b="0">
                 <a:solidFill>
@@ -4145,10 +5959,15 @@
                 </a:solidFill>
                 <a:latin typeface="Calibri"/>
               </a:rPr>
-              <a:t>Every pixel is always computed, whether</a:t>
-            </a:r>
-          </a:p>
-          <a:p>
+              <a:t>(backbone, matching, refinement — frozen, unchanged).</a:t>
+            </a:r>
+          </a:p>
+          <a:p>
+            <a:pPr>
+              <a:lnSpc>
+                <a:spcPct val="100000"/>
+              </a:lnSpc>
+            </a:pPr>
             <a:r>
               <a:rPr sz="1300" b="0">
                 <a:solidFill>
@@ -4156,10 +5975,15 @@
                 </a:solidFill>
                 <a:latin typeface="Calibri"/>
               </a:rPr>
-              <a:t>needed or not, and only at input resolution.</a:t>
-            </a:r>
-          </a:p>
-          <a:p>
+              <a:t/>
+            </a:r>
+          </a:p>
+          <a:p>
+            <a:pPr>
+              <a:lnSpc>
+                <a:spcPct val="100000"/>
+              </a:lnSpc>
+            </a:pPr>
             <a:r>
               <a:rPr sz="1300" b="0">
                 <a:solidFill>
@@ -4167,10 +5991,63 @@
                 </a:solidFill>
                 <a:latin typeface="Calibri"/>
               </a:rPr>
+              <a:t>Replace only its final stage: instead of a fixed 8×</a:t>
+            </a:r>
+          </a:p>
+          <a:p>
+            <a:pPr>
+              <a:lnSpc>
+                <a:spcPct val="100000"/>
+              </a:lnSpc>
+            </a:pPr>
+            <a:r>
+              <a:rPr sz="1300" b="0">
+                <a:solidFill>
+                  <a:srgbClr val="20242B"/>
+                </a:solidFill>
+                <a:latin typeface="Calibri"/>
+              </a:rPr>
+              <a:t>upsampler that always produces a full map, attach a</a:t>
+            </a:r>
+          </a:p>
+          <a:p>
+            <a:pPr>
+              <a:lnSpc>
+                <a:spcPct val="100000"/>
+              </a:lnSpc>
+            </a:pPr>
+            <a:r>
+              <a:rPr sz="1300" b="0">
+                <a:solidFill>
+                  <a:srgbClr val="20242B"/>
+                </a:solidFill>
+                <a:latin typeface="Calibri"/>
+              </a:rPr>
+              <a:t>decoder that evaluates flow at requested coordinates.</a:t>
+            </a:r>
+          </a:p>
+          <a:p>
+            <a:pPr>
+              <a:lnSpc>
+                <a:spcPct val="100000"/>
+              </a:lnSpc>
+            </a:pPr>
+            <a:r>
+              <a:rPr sz="1300" b="0">
+                <a:solidFill>
+                  <a:srgbClr val="20242B"/>
+                </a:solidFill>
+                <a:latin typeface="Calibri"/>
+              </a:rPr>
               <a:t/>
             </a:r>
           </a:p>
           <a:p>
+            <a:pPr>
+              <a:lnSpc>
+                <a:spcPct val="100000"/>
+              </a:lnSpc>
+            </a:pPr>
             <a:r>
               <a:rPr sz="1300" b="0">
                 <a:solidFill>
@@ -4178,10 +6055,15 @@
                 </a:solidFill>
                 <a:latin typeface="Calibri"/>
               </a:rPr>
-              <a:t>Registration, sparse tracking, and mapping</a:t>
-            </a:r>
-          </a:p>
-          <a:p>
+              <a:t>Cost then scales with the number of questions asked,</a:t>
+            </a:r>
+          </a:p>
+          <a:p>
+            <a:pPr>
+              <a:lnSpc>
+                <a:spcPct val="100000"/>
+              </a:lnSpc>
+            </a:pPr>
             <a:r>
               <a:rPr sz="1300" b="0">
                 <a:solidFill>
@@ -4189,18 +6071,7 @@
                 </a:solidFill>
                 <a:latin typeface="Calibri"/>
               </a:rPr>
-              <a:t>often need flow at a few hundred chosen</a:t>
-            </a:r>
-          </a:p>
-          <a:p>
-            <a:r>
-              <a:rPr sz="1300" b="0">
-                <a:solidFill>
-                  <a:srgbClr val="20242B"/>
-                </a:solidFill>
-                <a:latin typeface="Calibri"/>
-              </a:rPr>
-              <a:t>points — not 479,000 pixels.</a:t>
+              <a:t>O(N), rather than with image area, O(H×W).</a:t>
             </a:r>
           </a:p>
         </p:txBody>
@@ -4213,7 +6084,7 @@
         </p:nvSpPr>
         <p:spPr>
           <a:xfrm>
-            <a:off x="960120" y="5760720"/>
+            <a:off x="960120" y="5779008"/>
             <a:ext cx="10332720" cy="548640"/>
           </a:xfrm>
           <a:prstGeom prst="rect">
@@ -4227,6 +6098,11 @@
           </a:bodyPr>
           <a:lstStyle/>
           <a:p>
+            <a:pPr>
+              <a:lnSpc>
+                <a:spcPct val="100000"/>
+              </a:lnSpc>
+            </a:pPr>
             <a:r>
               <a:rPr sz="1150" b="1">
                 <a:solidFill>
@@ -4234,7 +6110,7 @@
                 </a:solidFill>
                 <a:latin typeface="Calibri"/>
               </a:rPr>
-              <a:t>Takeaway   v2 is the right backbone for edge flow; the upsampler is the part worth replacing.</a:t>
+              <a:t>Takeaway   The contribution is a new operating point — accuracy, compute, and resolution decoupled — not a leaderboard entry.</a:t>
             </a:r>
           </a:p>
         </p:txBody>
@@ -4261,6 +6137,11 @@
           </a:bodyPr>
           <a:lstStyle/>
           <a:p>
+            <a:pPr>
+              <a:lnSpc>
+                <a:spcPct val="100000"/>
+              </a:lnSpc>
+            </a:pPr>
             <a:r>
               <a:rPr sz="900" b="0">
                 <a:solidFill>
@@ -4268,7 +6149,7 @@
                 </a:solidFill>
                 <a:latin typeface="Calibri"/>
               </a:rPr>
-              <a:t>NeuFlow v3  ·  status</a:t>
+              <a:t>NeuFlow v3 · status report</a:t>
             </a:r>
           </a:p>
         </p:txBody>
@@ -4295,6 +6176,11 @@
           </a:bodyPr>
           <a:lstStyle/>
           <a:p>
+            <a:pPr>
+              <a:lnSpc>
+                <a:spcPct val="100000"/>
+              </a:lnSpc>
+            </a:pPr>
             <a:r>
               <a:rPr sz="900" b="0">
                 <a:solidFill>
@@ -4334,7 +6220,7 @@
         <p:spPr>
           <a:xfrm>
             <a:off x="685800" y="384048"/>
-            <a:ext cx="10058400" cy="274320"/>
+            <a:ext cx="10515600" cy="274320"/>
           </a:xfrm>
           <a:prstGeom prst="rect">
             <a:avLst/>
@@ -4347,6 +6233,11 @@
           </a:bodyPr>
           <a:lstStyle/>
           <a:p>
+            <a:pPr>
+              <a:lnSpc>
+                <a:spcPct val="100000"/>
+              </a:lnSpc>
+            </a:pPr>
             <a:r>
               <a:rPr sz="1050" b="1">
                 <a:solidFill>
@@ -4354,7 +6245,7 @@
                 </a:solidFill>
                 <a:latin typeface="Calibri"/>
               </a:rPr>
-              <a:t>APPROACH</a:t>
+              <a:t>BACKGROUND</a:t>
             </a:r>
           </a:p>
         </p:txBody>
@@ -4368,7 +6259,7 @@
         <p:spPr>
           <a:xfrm>
             <a:off x="667512" y="658368"/>
-            <a:ext cx="10789920" cy="731520"/>
+            <a:ext cx="10881360" cy="731520"/>
           </a:xfrm>
           <a:prstGeom prst="rect">
             <a:avLst/>
@@ -4381,6 +6272,11 @@
           </a:bodyPr>
           <a:lstStyle/>
           <a:p>
+            <a:pPr>
+              <a:lnSpc>
+                <a:spcPct val="100000"/>
+              </a:lnSpc>
+            </a:pPr>
             <a:r>
               <a:rPr sz="2400" b="1">
                 <a:solidFill>
@@ -4388,7 +6284,7 @@
                 </a:solidFill>
                 <a:latin typeface="Calibri"/>
               </a:rPr>
-              <a:t>v3: replace the upsampler with a queryable implicit decoder</a:t>
+              <a:t>NeuFlow v2: the foundation this work builds on</a:t>
             </a:r>
           </a:p>
         </p:txBody>
@@ -4401,8 +6297,8 @@
         </p:nvSpPr>
         <p:spPr>
           <a:xfrm>
-            <a:off x="685800" y="1600200"/>
-            <a:ext cx="5669280" cy="4023360"/>
+            <a:off x="685800" y="1554480"/>
+            <a:ext cx="5577840" cy="4114800"/>
           </a:xfrm>
           <a:prstGeom prst="rect">
             <a:avLst/>
@@ -4415,30 +6311,45 @@
           </a:bodyPr>
           <a:lstStyle/>
           <a:p>
-            <a:r>
-              <a:rPr sz="1250" b="0">
-                <a:solidFill>
-                  <a:srgbClr val="20242B"/>
-                </a:solidFill>
-                <a:latin typeface="Calibri"/>
-              </a:rPr>
-              <a:t>Kept (frozen, untouched): backbone, attention, matching,</a:t>
-            </a:r>
-          </a:p>
-          <a:p>
-            <a:r>
-              <a:rPr sz="1250" b="0">
-                <a:solidFill>
-                  <a:srgbClr val="20242B"/>
-                </a:solidFill>
-                <a:latin typeface="Calibri"/>
-              </a:rPr>
-              <a:t>refinement — everything through the 1/8 coarse flow.</a:t>
-            </a:r>
-          </a:p>
-          <a:p>
-            <a:r>
-              <a:rPr sz="1250" b="0">
+            <a:pPr>
+              <a:lnSpc>
+                <a:spcPct val="100000"/>
+              </a:lnSpc>
+            </a:pPr>
+            <a:r>
+              <a:rPr sz="1300" b="0">
+                <a:solidFill>
+                  <a:srgbClr val="20242B"/>
+                </a:solidFill>
+                <a:latin typeface="Calibri"/>
+              </a:rPr>
+              <a:t>NeuFlow v2 (Zhang, Gupta, Jiang, Singh; arXiv:2408.10161)</a:t>
+            </a:r>
+          </a:p>
+          <a:p>
+            <a:pPr>
+              <a:lnSpc>
+                <a:spcPct val="100000"/>
+              </a:lnSpc>
+            </a:pPr>
+            <a:r>
+              <a:rPr sz="1300" b="0">
+                <a:solidFill>
+                  <a:srgbClr val="20242B"/>
+                </a:solidFill>
+                <a:latin typeface="Calibri"/>
+              </a:rPr>
+              <a:t>is a real-time optical flow network for edge deployment.</a:t>
+            </a:r>
+          </a:p>
+          <a:p>
+            <a:pPr>
+              <a:lnSpc>
+                <a:spcPct val="100000"/>
+              </a:lnSpc>
+            </a:pPr>
+            <a:r>
+              <a:rPr sz="1300" b="0">
                 <a:solidFill>
                   <a:srgbClr val="20242B"/>
                 </a:solidFill>
@@ -4448,30 +6359,125 @@
             </a:r>
           </a:p>
           <a:p>
-            <a:r>
-              <a:rPr sz="1250" b="0">
-                <a:solidFill>
-                  <a:srgbClr val="20242B"/>
-                </a:solidFill>
-                <a:latin typeface="Calibri"/>
-              </a:rPr>
-              <a:t>Replaced: the convex upsampler becomes an MLP decoder</a:t>
-            </a:r>
-          </a:p>
-          <a:p>
-            <a:r>
-              <a:rPr sz="1250" b="0">
-                <a:solidFill>
-                  <a:srgbClr val="20242B"/>
-                </a:solidFill>
-                <a:latin typeface="Calibri"/>
-              </a:rPr>
-              <a:t>answering "what is the flow at this exact (x, y)?"</a:t>
-            </a:r>
-          </a:p>
-          <a:p>
-            <a:r>
-              <a:rPr sz="1250" b="0">
+            <a:pPr>
+              <a:lnSpc>
+                <a:spcPct val="100000"/>
+              </a:lnSpc>
+            </a:pPr>
+            <a:r>
+              <a:rPr sz="1300" b="0">
+                <a:solidFill>
+                  <a:srgbClr val="20242B"/>
+                </a:solidFill>
+                <a:latin typeface="Calibri"/>
+              </a:rPr>
+              <a:t>1.  A shallow CNN extracts features at 1/8 and 1/16 scale.</a:t>
+            </a:r>
+          </a:p>
+          <a:p>
+            <a:pPr>
+              <a:lnSpc>
+                <a:spcPct val="100000"/>
+              </a:lnSpc>
+            </a:pPr>
+            <a:r>
+              <a:rPr sz="1300" b="0">
+                <a:solidFill>
+                  <a:srgbClr val="20242B"/>
+                </a:solidFill>
+                <a:latin typeface="Calibri"/>
+              </a:rPr>
+              <a:t>2.  Cross-attention and global matching at 1/16 scale</a:t>
+            </a:r>
+          </a:p>
+          <a:p>
+            <a:pPr>
+              <a:lnSpc>
+                <a:spcPct val="100000"/>
+              </a:lnSpc>
+            </a:pPr>
+            <a:r>
+              <a:rPr sz="1300" b="0">
+                <a:solidFill>
+                  <a:srgbClr val="20242B"/>
+                </a:solidFill>
+                <a:latin typeface="Calibri"/>
+              </a:rPr>
+              <a:t>     produce an initial flow estimate.</a:t>
+            </a:r>
+          </a:p>
+          <a:p>
+            <a:pPr>
+              <a:lnSpc>
+                <a:spcPct val="100000"/>
+              </a:lnSpc>
+            </a:pPr>
+            <a:r>
+              <a:rPr sz="1300" b="0">
+                <a:solidFill>
+                  <a:srgbClr val="20242B"/>
+                </a:solidFill>
+                <a:latin typeface="Calibri"/>
+              </a:rPr>
+              <a:t>3.  A lightweight recurrent module refines it:</a:t>
+            </a:r>
+          </a:p>
+          <a:p>
+            <a:pPr>
+              <a:lnSpc>
+                <a:spcPct val="100000"/>
+              </a:lnSpc>
+            </a:pPr>
+            <a:r>
+              <a:rPr sz="1300" b="0">
+                <a:solidFill>
+                  <a:srgbClr val="20242B"/>
+                </a:solidFill>
+                <a:latin typeface="Calibri"/>
+              </a:rPr>
+              <a:t>     one iteration at 1/16, eight at 1/8.</a:t>
+            </a:r>
+          </a:p>
+          <a:p>
+            <a:pPr>
+              <a:lnSpc>
+                <a:spcPct val="100000"/>
+              </a:lnSpc>
+            </a:pPr>
+            <a:r>
+              <a:rPr sz="1300" b="0">
+                <a:solidFill>
+                  <a:srgbClr val="20242B"/>
+                </a:solidFill>
+                <a:latin typeface="Calibri"/>
+              </a:rPr>
+              <a:t>4.  A learned convex upsampler blends each output pixel</a:t>
+            </a:r>
+          </a:p>
+          <a:p>
+            <a:pPr>
+              <a:lnSpc>
+                <a:spcPct val="100000"/>
+              </a:lnSpc>
+            </a:pPr>
+            <a:r>
+              <a:rPr sz="1300" b="0">
+                <a:solidFill>
+                  <a:srgbClr val="20242B"/>
+                </a:solidFill>
+                <a:latin typeface="Calibri"/>
+              </a:rPr>
+              <a:t>     from a 3×3 neighborhood of the 1/8 flow.</a:t>
+            </a:r>
+          </a:p>
+          <a:p>
+            <a:pPr>
+              <a:lnSpc>
+                <a:spcPct val="100000"/>
+              </a:lnSpc>
+            </a:pPr>
+            <a:r>
+              <a:rPr sz="1300" b="0">
                 <a:solidFill>
                   <a:srgbClr val="20242B"/>
                 </a:solidFill>
@@ -4481,113 +6487,35 @@
             </a:r>
           </a:p>
           <a:p>
-            <a:r>
-              <a:rPr sz="1250" b="0">
-                <a:solidFill>
-                  <a:srgbClr val="20242B"/>
-                </a:solidFill>
-                <a:latin typeface="Calibri"/>
-              </a:rPr>
-              <a:t>Decoder inputs per query: 3x3 local windows of 4 feature</a:t>
-            </a:r>
-          </a:p>
-          <a:p>
-            <a:r>
-              <a:rPr sz="1250" b="0">
-                <a:solidFill>
-                  <a:srgbClr val="20242B"/>
-                </a:solidFill>
-                <a:latin typeface="Calibri"/>
-              </a:rPr>
-              <a:t>sources (context, 1/8, 1/16, flow-warped frame-1 features),</a:t>
-            </a:r>
-          </a:p>
-          <a:p>
-            <a:r>
-              <a:rPr sz="1250" b="0">
-                <a:solidFill>
-                  <a:srgbClr val="20242B"/>
-                </a:solidFill>
-                <a:latin typeface="Calibri"/>
-              </a:rPr>
-              <a:t>gated hierarchical fusion (InfiniDepth).</a:t>
-            </a:r>
-          </a:p>
-          <a:p>
-            <a:r>
-              <a:rPr sz="1250" b="0">
-                <a:solidFill>
-                  <a:srgbClr val="20242B"/>
-                </a:solidFill>
-                <a:latin typeface="Calibri"/>
-              </a:rPr>
-              <a:t/>
-            </a:r>
-          </a:p>
-          <a:p>
-            <a:r>
-              <a:rPr sz="1250" b="0">
-                <a:solidFill>
-                  <a:srgbClr val="20242B"/>
-                </a:solidFill>
-                <a:latin typeface="Calibri"/>
-              </a:rPr>
-              <a:t>Head (AnyFlow-style): softmax weights over the 3x3 coarse-</a:t>
-            </a:r>
-          </a:p>
-          <a:p>
-            <a:r>
-              <a:rPr sz="1250" b="0">
-                <a:solidFill>
-                  <a:srgbClr val="20242B"/>
-                </a:solidFill>
-                <a:latin typeface="Calibri"/>
-              </a:rPr>
-              <a:t>flow neighborhood + bilinear candidate. Bounded output —</a:t>
-            </a:r>
-          </a:p>
-          <a:p>
-            <a:r>
-              <a:rPr sz="1250" b="0">
-                <a:solidFill>
-                  <a:srgbClr val="20242B"/>
-                </a:solidFill>
-                <a:latin typeface="Calibri"/>
-              </a:rPr>
-              <a:t>cannot hallucinate flow. Init reproduces bilinear exactly.</a:t>
-            </a:r>
-          </a:p>
-          <a:p>
-            <a:r>
-              <a:rPr sz="1250" b="0">
-                <a:solidFill>
-                  <a:srgbClr val="20242B"/>
-                </a:solidFill>
-                <a:latin typeface="Calibri"/>
-              </a:rPr>
-              <a:t/>
-            </a:r>
-          </a:p>
-          <a:p>
-            <a:r>
-              <a:rPr sz="1250" b="0">
-                <a:solidFill>
-                  <a:srgbClr val="20242B"/>
-                </a:solidFill>
-                <a:latin typeface="Calibri"/>
-              </a:rPr>
-              <a:t>New: Fourier encoding of the sub-cell offset (sub-pixel</a:t>
-            </a:r>
-          </a:p>
-          <a:p>
-            <a:r>
-              <a:rPr sz="1250" b="0">
-                <a:solidFill>
-                  <a:srgbClr val="20242B"/>
-                </a:solidFill>
-                <a:latin typeface="Calibri"/>
-              </a:rPr>
-              <a:t>awareness) — measured: no effect (2.29 EPE, 69.7% 1px = no-PE run); sub-cell position is NOT the 1px bottleneck.</a:t>
+            <a:pPr>
+              <a:lnSpc>
+                <a:spcPct val="100000"/>
+              </a:lnSpc>
+            </a:pPr>
+            <a:r>
+              <a:rPr sz="1300" b="0">
+                <a:solidFill>
+                  <a:srgbClr val="20242B"/>
+                </a:solidFill>
+                <a:latin typeface="Calibri"/>
+              </a:rPr>
+              <a:t>It matches methods 10–70× more expensive and sustains</a:t>
+            </a:r>
+          </a:p>
+          <a:p>
+            <a:pPr>
+              <a:lnSpc>
+                <a:spcPct val="100000"/>
+              </a:lnSpc>
+            </a:pPr>
+            <a:r>
+              <a:rPr sz="1300" b="0">
+                <a:solidFill>
+                  <a:srgbClr val="20242B"/>
+                </a:solidFill>
+                <a:latin typeface="Calibri"/>
+              </a:rPr>
+              <a:t>over 20 FPS at 512×384 on a Jetson Orin Nano.</a:t>
             </a:r>
           </a:p>
         </p:txBody>
@@ -4600,8 +6528,8 @@
         </p:nvSpPr>
         <p:spPr>
           <a:xfrm>
-            <a:off x="6675120" y="1600200"/>
-            <a:ext cx="4754880" cy="3840480"/>
+            <a:off x="6583680" y="1554480"/>
+            <a:ext cx="4937760" cy="4114800"/>
           </a:xfrm>
           <a:prstGeom prst="rect">
             <a:avLst/>
@@ -4614,6 +6542,11 @@
           </a:bodyPr>
           <a:lstStyle/>
           <a:p>
+            <a:pPr>
+              <a:lnSpc>
+                <a:spcPct val="100000"/>
+              </a:lnSpc>
+            </a:pPr>
             <a:r>
               <a:rPr sz="1300" b="0">
                 <a:solidFill>
@@ -4621,10 +6554,15 @@
                 </a:solidFill>
                 <a:latin typeface="Calibri"/>
               </a:rPr>
-              <a:t>Why it fits edge devices</a:t>
-            </a:r>
-          </a:p>
-          <a:p>
+              <a:t>Measured on our hardware</a:t>
+            </a:r>
+          </a:p>
+          <a:p>
+            <a:pPr>
+              <a:lnSpc>
+                <a:spcPct val="100000"/>
+              </a:lnSpc>
+            </a:pPr>
             <a:r>
               <a:rPr sz="1300" b="0">
                 <a:solidFill>
@@ -4632,10 +6570,31 @@
                 </a:solidFill>
                 <a:latin typeface="Calibri"/>
               </a:rPr>
+              <a:t>(RTX 4060 Laptop, fp16, 384×1248)</a:t>
+            </a:r>
+          </a:p>
+          <a:p>
+            <a:pPr>
+              <a:lnSpc>
+                <a:spcPct val="100000"/>
+              </a:lnSpc>
+            </a:pPr>
+            <a:r>
+              <a:rPr sz="1300" b="0">
+                <a:solidFill>
+                  <a:srgbClr val="20242B"/>
+                </a:solidFill>
+                <a:latin typeface="Calibri"/>
+              </a:rPr>
               <a:t/>
             </a:r>
           </a:p>
           <a:p>
+            <a:pPr>
+              <a:lnSpc>
+                <a:spcPct val="100000"/>
+              </a:lnSpc>
+            </a:pPr>
             <a:r>
               <a:rPr sz="1300" b="0">
                 <a:solidFill>
@@ -4643,10 +6602,15 @@
                 </a:solidFill>
                 <a:latin typeface="Calibri"/>
               </a:rPr>
-              <a:t>Cost is O(N queries), not O(H x W).</a:t>
-            </a:r>
-          </a:p>
-          <a:p>
+              <a:t>37 ms per frame pair (27 FPS)</a:t>
+            </a:r>
+          </a:p>
+          <a:p>
+            <a:pPr>
+              <a:lnSpc>
+                <a:spcPct val="100000"/>
+              </a:lnSpc>
+            </a:pPr>
             <a:r>
               <a:rPr sz="1300" b="0">
                 <a:solidFill>
@@ -4654,10 +6618,63 @@
                 </a:solidFill>
                 <a:latin typeface="Calibri"/>
               </a:rPr>
+              <a:t>9.03 M parameters</a:t>
+            </a:r>
+          </a:p>
+          <a:p>
+            <a:pPr>
+              <a:lnSpc>
+                <a:spcPct val="100000"/>
+              </a:lnSpc>
+            </a:pPr>
+            <a:r>
+              <a:rPr sz="1300" b="0">
+                <a:solidFill>
+                  <a:srgbClr val="20242B"/>
+                </a:solidFill>
+                <a:latin typeface="Calibri"/>
+              </a:rPr>
+              <a:t>2.32 px mean EPE on VKITTI2 Scene18+20</a:t>
+            </a:r>
+          </a:p>
+          <a:p>
+            <a:pPr>
+              <a:lnSpc>
+                <a:spcPct val="100000"/>
+              </a:lnSpc>
+            </a:pPr>
+            <a:r>
+              <a:rPr sz="1300" b="0">
+                <a:solidFill>
+                  <a:srgbClr val="20242B"/>
+                </a:solidFill>
+                <a:latin typeface="Calibri"/>
+              </a:rPr>
+              <a:t>77.6% of pixels within 1 px of ground truth</a:t>
+            </a:r>
+          </a:p>
+          <a:p>
+            <a:pPr>
+              <a:lnSpc>
+                <a:spcPct val="100000"/>
+              </a:lnSpc>
+            </a:pPr>
+            <a:r>
+              <a:rPr sz="1300" b="0">
+                <a:solidFill>
+                  <a:srgbClr val="20242B"/>
+                </a:solidFill>
+                <a:latin typeface="Calibri"/>
+              </a:rPr>
               <a:t/>
             </a:r>
           </a:p>
           <a:p>
+            <a:pPr>
+              <a:lnSpc>
+                <a:spcPct val="100000"/>
+              </a:lnSpc>
+            </a:pPr>
             <a:r>
               <a:rPr sz="1300" b="0">
                 <a:solidFill>
@@ -4665,10 +6682,15 @@
                 </a:solidFill>
                 <a:latin typeface="Calibri"/>
               </a:rPr>
-              <a:t>Two-pass API:</a:t>
-            </a:r>
-          </a:p>
-          <a:p>
+              <a:t>The structural constraint</a:t>
+            </a:r>
+          </a:p>
+          <a:p>
+            <a:pPr>
+              <a:lnSpc>
+                <a:spcPct val="100000"/>
+              </a:lnSpc>
+            </a:pPr>
             <a:r>
               <a:rPr sz="1300" b="0">
                 <a:solidFill>
@@ -4676,10 +6698,15 @@
                 </a:solidFill>
                 <a:latin typeface="Calibri"/>
               </a:rPr>
-              <a:t>infer_coarse_state(): 33 ms, once per pair</a:t>
-            </a:r>
-          </a:p>
-          <a:p>
+              <a:t/>
+            </a:r>
+          </a:p>
+          <a:p>
+            <a:pPr>
+              <a:lnSpc>
+                <a:spcPct val="100000"/>
+              </a:lnSpc>
+            </a:pPr>
             <a:r>
               <a:rPr sz="1300" b="0">
                 <a:solidFill>
@@ -4687,10 +6714,15 @@
                 </a:solidFill>
                 <a:latin typeface="Calibri"/>
               </a:rPr>
-              <a:t>decode_queries(): 1.6 ms per &lt;=2k points,</a:t>
-            </a:r>
-          </a:p>
-          <a:p>
+              <a:t>Output resolution and cost are fixed at design time.</a:t>
+            </a:r>
+          </a:p>
+          <a:p>
+            <a:pPr>
+              <a:lnSpc>
+                <a:spcPct val="100000"/>
+              </a:lnSpc>
+            </a:pPr>
             <a:r>
               <a:rPr sz="1300" b="0">
                 <a:solidFill>
@@ -4698,10 +6730,15 @@
                 </a:solidFill>
                 <a:latin typeface="Calibri"/>
               </a:rPr>
-              <a:t>repeatable without re-running the backbone</a:t>
-            </a:r>
-          </a:p>
-          <a:p>
+              <a:t>The network cannot answer a smaller question cheaply,</a:t>
+            </a:r>
+          </a:p>
+          <a:p>
+            <a:pPr>
+              <a:lnSpc>
+                <a:spcPct val="100000"/>
+              </a:lnSpc>
+            </a:pPr>
             <a:r>
               <a:rPr sz="1300" b="0">
                 <a:solidFill>
@@ -4709,29 +6746,7 @@
                 </a:solidFill>
                 <a:latin typeface="Calibri"/>
               </a:rPr>
-              <a:t/>
-            </a:r>
-          </a:p>
-          <a:p>
-            <a:r>
-              <a:rPr sz="1300" b="0">
-                <a:solidFill>
-                  <a:srgbClr val="20242B"/>
-                </a:solidFill>
-                <a:latin typeface="Calibri"/>
-              </a:rPr>
-              <a:t>7.83M params — smaller than v2 (9.03M).</a:t>
-            </a:r>
-          </a:p>
-          <a:p>
-            <a:r>
-              <a:rPr sz="1300" b="0">
-                <a:solidFill>
-                  <a:srgbClr val="20242B"/>
-                </a:solidFill>
-                <a:latin typeface="Calibri"/>
-              </a:rPr>
-              <a:t>~2.2 GB VRAM at inference.</a:t>
+              <a:t>nor a finer-resolution question at all.</a:t>
             </a:r>
           </a:p>
         </p:txBody>
@@ -4744,7 +6759,7 @@
         </p:nvSpPr>
         <p:spPr>
           <a:xfrm>
-            <a:off x="960120" y="5760720"/>
+            <a:off x="960120" y="5779008"/>
             <a:ext cx="10332720" cy="548640"/>
           </a:xfrm>
           <a:prstGeom prst="rect">
@@ -4758,6 +6773,11 @@
           </a:bodyPr>
           <a:lstStyle/>
           <a:p>
+            <a:pPr>
+              <a:lnSpc>
+                <a:spcPct val="100000"/>
+              </a:lnSpc>
+            </a:pPr>
             <a:r>
               <a:rPr sz="1150" b="1">
                 <a:solidFill>
@@ -4765,7 +6785,7 @@
                 </a:solidFill>
                 <a:latin typeface="Calibri"/>
               </a:rPr>
-              <a:t>Takeaway   Same trusted front-end; only the output stage changes — from fixed map to on-demand queries.</a:t>
+              <a:t>Takeaway   v2 supplies motion understanding worth preserving; its output stage is the only part that constrains how answers are delivered.</a:t>
             </a:r>
           </a:p>
         </p:txBody>
@@ -4792,6 +6812,11 @@
           </a:bodyPr>
           <a:lstStyle/>
           <a:p>
+            <a:pPr>
+              <a:lnSpc>
+                <a:spcPct val="100000"/>
+              </a:lnSpc>
+            </a:pPr>
             <a:r>
               <a:rPr sz="900" b="0">
                 <a:solidFill>
@@ -4799,7 +6824,7 @@
                 </a:solidFill>
                 <a:latin typeface="Calibri"/>
               </a:rPr>
-              <a:t>NeuFlow v3  ·  status</a:t>
+              <a:t>NeuFlow v3 · status report</a:t>
             </a:r>
           </a:p>
         </p:txBody>
@@ -4826,6 +6851,11 @@
           </a:bodyPr>
           <a:lstStyle/>
           <a:p>
+            <a:pPr>
+              <a:lnSpc>
+                <a:spcPct val="100000"/>
+              </a:lnSpc>
+            </a:pPr>
             <a:r>
               <a:rPr sz="900" b="0">
                 <a:solidFill>
@@ -4865,7 +6895,7 @@
         <p:spPr>
           <a:xfrm>
             <a:off x="685800" y="384048"/>
-            <a:ext cx="10058400" cy="274320"/>
+            <a:ext cx="10515600" cy="274320"/>
           </a:xfrm>
           <a:prstGeom prst="rect">
             <a:avLst/>
@@ -4878,6 +6908,11 @@
           </a:bodyPr>
           <a:lstStyle/>
           <a:p>
+            <a:pPr>
+              <a:lnSpc>
+                <a:spcPct val="100000"/>
+              </a:lnSpc>
+            </a:pPr>
             <a:r>
               <a:rPr sz="1050" b="1">
                 <a:solidFill>
@@ -4885,7 +6920,7 @@
                 </a:solidFill>
                 <a:latin typeface="Calibri"/>
               </a:rPr>
-              <a:t>RESULT 1 OF 3</a:t>
+              <a:t>APPROACH</a:t>
             </a:r>
           </a:p>
         </p:txBody>
@@ -4899,7 +6934,7 @@
         <p:spPr>
           <a:xfrm>
             <a:off x="667512" y="658368"/>
-            <a:ext cx="10789920" cy="731520"/>
+            <a:ext cx="10881360" cy="731520"/>
           </a:xfrm>
           <a:prstGeom prst="rect">
             <a:avLst/>
@@ -4912,6 +6947,11 @@
           </a:bodyPr>
           <a:lstStyle/>
           <a:p>
+            <a:pPr>
+              <a:lnSpc>
+                <a:spcPct val="100000"/>
+              </a:lnSpc>
+            </a:pPr>
             <a:r>
               <a:rPr sz="2400" b="1">
                 <a:solidFill>
@@ -4919,7 +6959,7 @@
                 </a:solidFill>
                 <a:latin typeface="Calibri"/>
               </a:rPr>
-              <a:t>What you get without training anything</a:t>
+              <a:t>NeuFlow v3: an implicit decoder in place of the upsampler</a:t>
             </a:r>
           </a:p>
         </p:txBody>
@@ -4932,8 +6972,8 @@
         </p:nvSpPr>
         <p:spPr>
           <a:xfrm>
-            <a:off x="685800" y="1645920"/>
-            <a:ext cx="5852160" cy="3657600"/>
+            <a:off x="685800" y="1554480"/>
+            <a:ext cx="5577840" cy="4114800"/>
           </a:xfrm>
           <a:prstGeom prst="rect">
             <a:avLst/>
@@ -4946,30 +6986,61 @@
           </a:bodyPr>
           <a:lstStyle/>
           <a:p>
-            <a:r>
-              <a:rPr sz="1350" b="0">
-                <a:solidFill>
-                  <a:srgbClr val="20242B"/>
-                </a:solidFill>
-                <a:latin typeface="Calibri"/>
-              </a:rPr>
-              <a:t>The decoder head is initialized so an untrained v3</a:t>
-            </a:r>
-          </a:p>
-          <a:p>
-            <a:r>
-              <a:rPr sz="1350" b="0">
-                <a:solidFill>
-                  <a:srgbClr val="20242B"/>
-                </a:solidFill>
-                <a:latin typeface="Calibri"/>
-              </a:rPr>
-              <a:t>exactly reproduces bilinear upsampling of the coarse flow.</a:t>
-            </a:r>
-          </a:p>
-          <a:p>
-            <a:r>
-              <a:rPr sz="1350" b="0">
+            <a:pPr>
+              <a:lnSpc>
+                <a:spcPct val="100000"/>
+              </a:lnSpc>
+            </a:pPr>
+            <a:r>
+              <a:rPr sz="1300" b="0">
+                <a:solidFill>
+                  <a:srgbClr val="20242B"/>
+                </a:solidFill>
+                <a:latin typeface="Calibri"/>
+              </a:rPr>
+              <a:t>Unchanged and frozen: every stage through the 1/8-scale</a:t>
+            </a:r>
+          </a:p>
+          <a:p>
+            <a:pPr>
+              <a:lnSpc>
+                <a:spcPct val="100000"/>
+              </a:lnSpc>
+            </a:pPr>
+            <a:r>
+              <a:rPr sz="1300" b="0">
+                <a:solidFill>
+                  <a:srgbClr val="20242B"/>
+                </a:solidFill>
+                <a:latin typeface="Calibri"/>
+              </a:rPr>
+              <a:t>coarse flow. v3 inherits v2’s matching quality by</a:t>
+            </a:r>
+          </a:p>
+          <a:p>
+            <a:pPr>
+              <a:lnSpc>
+                <a:spcPct val="100000"/>
+              </a:lnSpc>
+            </a:pPr>
+            <a:r>
+              <a:rPr sz="1300" b="0">
+                <a:solidFill>
+                  <a:srgbClr val="20242B"/>
+                </a:solidFill>
+                <a:latin typeface="Calibri"/>
+              </a:rPr>
+              <a:t>construction rather than by retraining.</a:t>
+            </a:r>
+          </a:p>
+          <a:p>
+            <a:pPr>
+              <a:lnSpc>
+                <a:spcPct val="100000"/>
+              </a:lnSpc>
+            </a:pPr>
+            <a:r>
+              <a:rPr sz="1300" b="0">
                 <a:solidFill>
                   <a:srgbClr val="20242B"/>
                 </a:solidFill>
@@ -4979,19 +7050,45 @@
             </a:r>
           </a:p>
           <a:p>
-            <a:r>
-              <a:rPr sz="1350" b="0">
-                <a:solidFill>
-                  <a:srgbClr val="20242B"/>
-                </a:solidFill>
-                <a:latin typeface="Calibri"/>
-              </a:rPr>
-              <a:t>Untrained v3, measured on VKITTI2 Scene18+20:</a:t>
-            </a:r>
-          </a:p>
-          <a:p>
-            <a:r>
-              <a:rPr sz="1350" b="0">
+            <a:pPr>
+              <a:lnSpc>
+                <a:spcPct val="100000"/>
+              </a:lnSpc>
+            </a:pPr>
+            <a:r>
+              <a:rPr sz="1300" b="0">
+                <a:solidFill>
+                  <a:srgbClr val="20242B"/>
+                </a:solidFill>
+                <a:latin typeface="Calibri"/>
+              </a:rPr>
+              <a:t>New: a decoder that, given any continuous coordinate,</a:t>
+            </a:r>
+          </a:p>
+          <a:p>
+            <a:pPr>
+              <a:lnSpc>
+                <a:spcPct val="100000"/>
+              </a:lnSpc>
+            </a:pPr>
+            <a:r>
+              <a:rPr sz="1300" b="0">
+                <a:solidFill>
+                  <a:srgbClr val="20242B"/>
+                </a:solidFill>
+                <a:latin typeface="Calibri"/>
+              </a:rPr>
+              <a:t>gathers evidence and produces the flow at that point:</a:t>
+            </a:r>
+          </a:p>
+          <a:p>
+            <a:pPr>
+              <a:lnSpc>
+                <a:spcPct val="100000"/>
+              </a:lnSpc>
+            </a:pPr>
+            <a:r>
+              <a:rPr sz="1300" b="0">
                 <a:solidFill>
                   <a:srgbClr val="20242B"/>
                 </a:solidFill>
@@ -5001,69 +7098,131 @@
             </a:r>
           </a:p>
           <a:p>
-            <a:r>
-              <a:rPr sz="1350" b="0">
-                <a:solidFill>
-                  <a:srgbClr val="20242B"/>
-                </a:solidFill>
-                <a:latin typeface="Calibri"/>
-              </a:rPr>
-              <a:t>     2.48 px EPE   (v2: 2.32 — only +0.15)</a:t>
-            </a:r>
-          </a:p>
-          <a:p>
-            <a:r>
-              <a:rPr sz="1350" b="0">
-                <a:solidFill>
-                  <a:srgbClr val="20242B"/>
-                </a:solidFill>
-                <a:latin typeface="Calibri"/>
-              </a:rPr>
-              <a:t>     74.7% of pixels within 1px  (v2: 77.6%)</a:t>
-            </a:r>
-          </a:p>
-          <a:p>
-            <a:r>
-              <a:rPr sz="1350" b="0">
-                <a:solidFill>
-                  <a:srgbClr val="20242B"/>
-                </a:solidFill>
-                <a:latin typeface="Calibri"/>
-              </a:rPr>
-              <a:t/>
-            </a:r>
-          </a:p>
-          <a:p>
-            <a:r>
-              <a:rPr sz="1350" b="0">
-                <a:solidFill>
-                  <a:srgbClr val="20242B"/>
-                </a:solidFill>
-                <a:latin typeface="Calibri"/>
-              </a:rPr>
-              <a:t>And the query mechanism is exact: decoding N sparse</a:t>
-            </a:r>
-          </a:p>
-          <a:p>
-            <a:r>
-              <a:rPr sz="1350" b="0">
-                <a:solidFill>
-                  <a:srgbClr val="20242B"/>
-                </a:solidFill>
-                <a:latin typeface="Calibri"/>
-              </a:rPr>
-              <a:t>points matches the dense output at those points to</a:t>
-            </a:r>
-          </a:p>
-          <a:p>
-            <a:r>
-              <a:rPr sz="1350" b="0">
-                <a:solidFill>
-                  <a:srgbClr val="20242B"/>
-                </a:solidFill>
-                <a:latin typeface="Calibri"/>
-              </a:rPr>
-              <a:t>0.00 px, at O(N) cost.</a:t>
+            <a:pPr>
+              <a:lnSpc>
+                <a:spcPct val="100000"/>
+              </a:lnSpc>
+            </a:pPr>
+            <a:r>
+              <a:rPr sz="1300" b="0">
+                <a:solidFill>
+                  <a:srgbClr val="20242B"/>
+                </a:solidFill>
+                <a:latin typeface="Calibri"/>
+              </a:rPr>
+              <a:t>•  3×3 local windows from four feature sources — context,</a:t>
+            </a:r>
+          </a:p>
+          <a:p>
+            <a:pPr>
+              <a:lnSpc>
+                <a:spcPct val="100000"/>
+              </a:lnSpc>
+            </a:pPr>
+            <a:r>
+              <a:rPr sz="1300" b="0">
+                <a:solidFill>
+                  <a:srgbClr val="20242B"/>
+                </a:solidFill>
+                <a:latin typeface="Calibri"/>
+              </a:rPr>
+              <a:t>    1/8 features, 1/16 features, and frame-1 features</a:t>
+            </a:r>
+          </a:p>
+          <a:p>
+            <a:pPr>
+              <a:lnSpc>
+                <a:spcPct val="100000"/>
+              </a:lnSpc>
+            </a:pPr>
+            <a:r>
+              <a:rPr sz="1300" b="0">
+                <a:solidFill>
+                  <a:srgbClr val="20242B"/>
+                </a:solidFill>
+                <a:latin typeface="Calibri"/>
+              </a:rPr>
+              <a:t>    warped by the coarse flow (correspondence evidence).</a:t>
+            </a:r>
+          </a:p>
+          <a:p>
+            <a:pPr>
+              <a:lnSpc>
+                <a:spcPct val="100000"/>
+              </a:lnSpc>
+            </a:pPr>
+            <a:r>
+              <a:rPr sz="1300" b="0">
+                <a:solidFill>
+                  <a:srgbClr val="20242B"/>
+                </a:solidFill>
+                <a:latin typeface="Calibri"/>
+              </a:rPr>
+              <a:t>•  Gated hierarchical fusion, following InfiniDepth.</a:t>
+            </a:r>
+          </a:p>
+          <a:p>
+            <a:pPr>
+              <a:lnSpc>
+                <a:spcPct val="100000"/>
+              </a:lnSpc>
+            </a:pPr>
+            <a:r>
+              <a:rPr sz="1300" b="0">
+                <a:solidFill>
+                  <a:srgbClr val="20242B"/>
+                </a:solidFill>
+                <a:latin typeface="Calibri"/>
+              </a:rPr>
+              <a:t>•  A convex-combination head, following AnyFlow: softmax</a:t>
+            </a:r>
+          </a:p>
+          <a:p>
+            <a:pPr>
+              <a:lnSpc>
+                <a:spcPct val="100000"/>
+              </a:lnSpc>
+            </a:pPr>
+            <a:r>
+              <a:rPr sz="1300" b="0">
+                <a:solidFill>
+                  <a:srgbClr val="20242B"/>
+                </a:solidFill>
+                <a:latin typeface="Calibri"/>
+              </a:rPr>
+              <a:t>    weights over the local coarse-flow values. The output</a:t>
+            </a:r>
+          </a:p>
+          <a:p>
+            <a:pPr>
+              <a:lnSpc>
+                <a:spcPct val="100000"/>
+              </a:lnSpc>
+            </a:pPr>
+            <a:r>
+              <a:rPr sz="1300" b="0">
+                <a:solidFill>
+                  <a:srgbClr val="20242B"/>
+                </a:solidFill>
+                <a:latin typeface="Calibri"/>
+              </a:rPr>
+              <a:t>    is a bounded blend — structurally unable to produce</a:t>
+            </a:r>
+          </a:p>
+          <a:p>
+            <a:pPr>
+              <a:lnSpc>
+                <a:spcPct val="100000"/>
+              </a:lnSpc>
+            </a:pPr>
+            <a:r>
+              <a:rPr sz="1300" b="0">
+                <a:solidFill>
+                  <a:srgbClr val="20242B"/>
+                </a:solidFill>
+                <a:latin typeface="Calibri"/>
+              </a:rPr>
+              <a:t>    arbitrarily wrong flow.</a:t>
             </a:r>
           </a:p>
         </p:txBody>
@@ -5076,8 +7235,8 @@
         </p:nvSpPr>
         <p:spPr>
           <a:xfrm>
-            <a:off x="6858000" y="1645920"/>
-            <a:ext cx="4572000" cy="3657600"/>
+            <a:off x="6583680" y="1554480"/>
+            <a:ext cx="4937760" cy="4114800"/>
           </a:xfrm>
           <a:prstGeom prst="rect">
             <a:avLst/>
@@ -5090,6 +7249,11 @@
           </a:bodyPr>
           <a:lstStyle/>
           <a:p>
+            <a:pPr>
+              <a:lnSpc>
+                <a:spcPct val="100000"/>
+              </a:lnSpc>
+            </a:pPr>
             <a:r>
               <a:rPr sz="1300" b="0">
                 <a:solidFill>
@@ -5097,10 +7261,15 @@
                 </a:solidFill>
                 <a:latin typeface="Calibri"/>
               </a:rPr>
-              <a:t>Why this matters</a:t>
-            </a:r>
-          </a:p>
-          <a:p>
+              <a:t>Two properties fall out of the head design</a:t>
+            </a:r>
+          </a:p>
+          <a:p>
+            <a:pPr>
+              <a:lnSpc>
+                <a:spcPct val="100000"/>
+              </a:lnSpc>
+            </a:pPr>
             <a:r>
               <a:rPr sz="1300" b="0">
                 <a:solidFill>
@@ -5112,6 +7281,11 @@
             </a:r>
           </a:p>
           <a:p>
+            <a:pPr>
+              <a:lnSpc>
+                <a:spcPct val="100000"/>
+              </a:lnSpc>
+            </a:pPr>
             <a:r>
               <a:rPr sz="1300" b="0">
                 <a:solidFill>
@@ -5119,10 +7293,15 @@
                 </a:solidFill>
                 <a:latin typeface="Calibri"/>
               </a:rPr>
-              <a:t>Queryability is nearly free before any</a:t>
-            </a:r>
-          </a:p>
-          <a:p>
+              <a:t>1.  Bilinear interpolation is one particular choice of</a:t>
+            </a:r>
+          </a:p>
+          <a:p>
+            <a:pPr>
+              <a:lnSpc>
+                <a:spcPct val="100000"/>
+              </a:lnSpc>
+            </a:pPr>
             <a:r>
               <a:rPr sz="1300" b="0">
                 <a:solidFill>
@@ -5130,10 +7309,15 @@
                 </a:solidFill>
                 <a:latin typeface="Calibri"/>
               </a:rPr>
-              <a:t>training: +0.15 px EPE buys sparse</a:t>
-            </a:r>
-          </a:p>
-          <a:p>
+              <a:t>     weights, so the decoder is initialized to reproduce</a:t>
+            </a:r>
+          </a:p>
+          <a:p>
+            <a:pPr>
+              <a:lnSpc>
+                <a:spcPct val="100000"/>
+              </a:lnSpc>
+            </a:pPr>
             <a:r>
               <a:rPr sz="1300" b="0">
                 <a:solidFill>
@@ -5141,10 +7325,15 @@
                 </a:solidFill>
                 <a:latin typeface="Calibri"/>
               </a:rPr>
-              <a:t>on-demand flow at ~35 ms total.</a:t>
-            </a:r>
-          </a:p>
-          <a:p>
+              <a:t>     it exactly. Training starts from a known-good state</a:t>
+            </a:r>
+          </a:p>
+          <a:p>
+            <a:pPr>
+              <a:lnSpc>
+                <a:spcPct val="100000"/>
+              </a:lnSpc>
+            </a:pPr>
             <a:r>
               <a:rPr sz="1300" b="0">
                 <a:solidFill>
@@ -5152,10 +7341,31 @@
                 </a:solidFill>
                 <a:latin typeface="Calibri"/>
               </a:rPr>
+              <a:t>     and can only be judged against it.</a:t>
+            </a:r>
+          </a:p>
+          <a:p>
+            <a:pPr>
+              <a:lnSpc>
+                <a:spcPct val="100000"/>
+              </a:lnSpc>
+            </a:pPr>
+            <a:r>
+              <a:rPr sz="1300" b="0">
+                <a:solidFill>
+                  <a:srgbClr val="20242B"/>
+                </a:solidFill>
+                <a:latin typeface="Calibri"/>
+              </a:rPr>
               <a:t/>
             </a:r>
           </a:p>
           <a:p>
+            <a:pPr>
+              <a:lnSpc>
+                <a:spcPct val="100000"/>
+              </a:lnSpc>
+            </a:pPr>
             <a:r>
               <a:rPr sz="1300" b="0">
                 <a:solidFill>
@@ -5163,10 +7373,15 @@
                 </a:solidFill>
                 <a:latin typeface="Calibri"/>
               </a:rPr>
-              <a:t>Every training experiment is measured</a:t>
-            </a:r>
-          </a:p>
-          <a:p>
+              <a:t>2.  v2’s convex upsampler is the fixed-grid special case</a:t>
+            </a:r>
+          </a:p>
+          <a:p>
+            <a:pPr>
+              <a:lnSpc>
+                <a:spcPct val="100000"/>
+              </a:lnSpc>
+            </a:pPr>
             <a:r>
               <a:rPr sz="1300" b="0">
                 <a:solidFill>
@@ -5174,10 +7389,15 @@
                 </a:solidFill>
                 <a:latin typeface="Calibri"/>
               </a:rPr>
-              <a:t>against this 2.48 baseline — training</a:t>
-            </a:r>
-          </a:p>
-          <a:p>
+              <a:t>     of the same mechanism — v2’s accuracy is reachable</a:t>
+            </a:r>
+          </a:p>
+          <a:p>
+            <a:pPr>
+              <a:lnSpc>
+                <a:spcPct val="100000"/>
+              </a:lnSpc>
+            </a:pPr>
             <a:r>
               <a:rPr sz="1300" b="0">
                 <a:solidFill>
@@ -5185,7 +7405,71 @@
                 </a:solidFill>
                 <a:latin typeface="Calibri"/>
               </a:rPr>
-              <a:t>must beat "doing nothing."</a:t>
+              <a:t>     within this hypothesis space by construction.</a:t>
+            </a:r>
+          </a:p>
+          <a:p>
+            <a:pPr>
+              <a:lnSpc>
+                <a:spcPct val="100000"/>
+              </a:lnSpc>
+            </a:pPr>
+            <a:r>
+              <a:rPr sz="1300" b="0">
+                <a:solidFill>
+                  <a:srgbClr val="20242B"/>
+                </a:solidFill>
+                <a:latin typeface="Calibri"/>
+              </a:rPr>
+              <a:t/>
+            </a:r>
+          </a:p>
+          <a:p>
+            <a:pPr>
+              <a:lnSpc>
+                <a:spcPct val="100000"/>
+              </a:lnSpc>
+            </a:pPr>
+            <a:r>
+              <a:rPr sz="1300" b="0">
+                <a:solidFill>
+                  <a:srgbClr val="20242B"/>
+                </a:solidFill>
+                <a:latin typeface="Calibri"/>
+              </a:rPr>
+              <a:t>Model size decreases: 7.83 M parameters vs 9.03 M,</a:t>
+            </a:r>
+          </a:p>
+          <a:p>
+            <a:pPr>
+              <a:lnSpc>
+                <a:spcPct val="100000"/>
+              </a:lnSpc>
+            </a:pPr>
+            <a:r>
+              <a:rPr sz="1300" b="0">
+                <a:solidFill>
+                  <a:srgbClr val="20242B"/>
+                </a:solidFill>
+                <a:latin typeface="Calibri"/>
+              </a:rPr>
+              <a:t>because a coordinate-conditioned MLP replaces the</a:t>
+            </a:r>
+          </a:p>
+          <a:p>
+            <a:pPr>
+              <a:lnSpc>
+                <a:spcPct val="100000"/>
+              </a:lnSpc>
+            </a:pPr>
+            <a:r>
+              <a:rPr sz="1300" b="0">
+                <a:solidFill>
+                  <a:srgbClr val="20242B"/>
+                </a:solidFill>
+                <a:latin typeface="Calibri"/>
+              </a:rPr>
+              <a:t>full-resolution convolutional stack.</a:t>
             </a:r>
           </a:p>
         </p:txBody>
@@ -5198,7 +7482,7 @@
         </p:nvSpPr>
         <p:spPr>
           <a:xfrm>
-            <a:off x="960120" y="5760720"/>
+            <a:off x="960120" y="5779008"/>
             <a:ext cx="10332720" cy="548640"/>
           </a:xfrm>
           <a:prstGeom prst="rect">
@@ -5212,6 +7496,11 @@
           </a:bodyPr>
           <a:lstStyle/>
           <a:p>
+            <a:pPr>
+              <a:lnSpc>
+                <a:spcPct val="100000"/>
+              </a:lnSpc>
+            </a:pPr>
             <a:r>
               <a:rPr sz="1150" b="1">
                 <a:solidFill>
@@ -5219,7 +7508,7 @@
                 </a:solidFill>
                 <a:latin typeface="Calibri"/>
               </a:rPr>
-              <a:t>Takeaway   The architecture change alone delivers the capability; training only has to buy accuracy.</a:t>
+              <a:t>Takeaway   Every design choice traces to a published mechanism (NeuFlow v2, InfiniDepth, AnyFlow) or to a measured failure it corrects.</a:t>
             </a:r>
           </a:p>
         </p:txBody>
@@ -5246,6 +7535,11 @@
           </a:bodyPr>
           <a:lstStyle/>
           <a:p>
+            <a:pPr>
+              <a:lnSpc>
+                <a:spcPct val="100000"/>
+              </a:lnSpc>
+            </a:pPr>
             <a:r>
               <a:rPr sz="900" b="0">
                 <a:solidFill>
@@ -5253,7 +7547,7 @@
                 </a:solidFill>
                 <a:latin typeface="Calibri"/>
               </a:rPr>
-              <a:t>NeuFlow v3  ·  status</a:t>
+              <a:t>NeuFlow v3 · status report</a:t>
             </a:r>
           </a:p>
         </p:txBody>
@@ -5280,6 +7574,11 @@
           </a:bodyPr>
           <a:lstStyle/>
           <a:p>
+            <a:pPr>
+              <a:lnSpc>
+                <a:spcPct val="100000"/>
+              </a:lnSpc>
+            </a:pPr>
             <a:r>
               <a:rPr sz="900" b="0">
                 <a:solidFill>
@@ -5319,7 +7618,7 @@
         <p:spPr>
           <a:xfrm>
             <a:off x="685800" y="384048"/>
-            <a:ext cx="10058400" cy="274320"/>
+            <a:ext cx="10515600" cy="274320"/>
           </a:xfrm>
           <a:prstGeom prst="rect">
             <a:avLst/>
@@ -5332,6 +7631,11 @@
           </a:bodyPr>
           <a:lstStyle/>
           <a:p>
+            <a:pPr>
+              <a:lnSpc>
+                <a:spcPct val="100000"/>
+              </a:lnSpc>
+            </a:pPr>
             <a:r>
               <a:rPr sz="1050" b="1">
                 <a:solidFill>
@@ -5339,7 +7643,7 @@
                 </a:solidFill>
                 <a:latin typeface="Calibri"/>
               </a:rPr>
-              <a:t>RESULT 2 OF 3  ·  VKITTI2 SCENE18+20, 1174 PAIRS</a:t>
+              <a:t>RESULTS · STAGE 0 OF 3</a:t>
             </a:r>
           </a:p>
         </p:txBody>
@@ -5353,7 +7657,7 @@
         <p:spPr>
           <a:xfrm>
             <a:off x="667512" y="658368"/>
-            <a:ext cx="10789920" cy="731520"/>
+            <a:ext cx="10881360" cy="731520"/>
           </a:xfrm>
           <a:prstGeom prst="rect">
             <a:avLst/>
@@ -5366,6 +7670,11 @@
           </a:bodyPr>
           <a:lstStyle/>
           <a:p>
+            <a:pPr>
+              <a:lnSpc>
+                <a:spcPct val="100000"/>
+              </a:lnSpc>
+            </a:pPr>
             <a:r>
               <a:rPr sz="2400" b="1">
                 <a:solidFill>
@@ -5373,14 +7682,14 @@
                 </a:solidFill>
                 <a:latin typeface="Calibri"/>
               </a:rPr>
-              <a:t>Training the decoder: what each dataset contributes</a:t>
+              <a:t>Before any training: the initialization is the first result</a:t>
             </a:r>
           </a:p>
         </p:txBody>
       </p:sp>
       <p:pic>
         <p:nvPicPr>
-          <p:cNvPr id="4" name="Picture 3" descr="epe_by_regime.png"/>
+          <p:cNvPr id="4" name="Picture 3" descr="stage_untrained.png"/>
           <p:cNvPicPr>
             <a:picLocks noChangeAspect="1"/>
           </p:cNvPicPr>
@@ -5394,8 +7703,8 @@
         </p:blipFill>
         <p:spPr>
           <a:xfrm>
-            <a:off x="685800" y="1554480"/>
-            <a:ext cx="6766560" cy="3425098"/>
+            <a:off x="685800" y="1463040"/>
+            <a:ext cx="7955279" cy="4978702"/>
           </a:xfrm>
           <a:prstGeom prst="rect">
             <a:avLst/>
@@ -5410,8 +7719,8 @@
         </p:nvSpPr>
         <p:spPr>
           <a:xfrm>
-            <a:off x="7772400" y="1691640"/>
-            <a:ext cx="3749039" cy="3931920"/>
+            <a:off x="8869680" y="1554480"/>
+            <a:ext cx="2743200" cy="4023360"/>
           </a:xfrm>
           <a:prstGeom prst="rect">
             <a:avLst/>
@@ -5424,39 +7733,123 @@
           </a:bodyPr>
           <a:lstStyle/>
           <a:p>
-            <a:r>
-              <a:rPr sz="1200" b="0">
-                <a:solidFill>
-                  <a:srgbClr val="20242B"/>
-                </a:solidFill>
-                <a:latin typeface="Calibri"/>
-              </a:rPr>
-              <a:t>VKITTI2 only (12.7k pairs, 6 weather</a:t>
-            </a:r>
-          </a:p>
-          <a:p>
-            <a:r>
-              <a:rPr sz="1200" b="0">
-                <a:solidFill>
-                  <a:srgbClr val="20242B"/>
-                </a:solidFill>
-                <a:latin typeface="Calibri"/>
-              </a:rPr>
-              <a:t>variants): 2.39 — first run to beat its</a:t>
-            </a:r>
-          </a:p>
-          <a:p>
-            <a:r>
-              <a:rPr sz="1200" b="0">
-                <a:solidFill>
-                  <a:srgbClr val="20242B"/>
-                </a:solidFill>
-                <a:latin typeface="Calibri"/>
-              </a:rPr>
-              <a:t>own initialization.</a:t>
-            </a:r>
-          </a:p>
-          <a:p>
+            <a:pPr>
+              <a:lnSpc>
+                <a:spcPct val="100000"/>
+              </a:lnSpc>
+            </a:pPr>
+            <a:r>
+              <a:rPr sz="1200" b="0">
+                <a:solidFill>
+                  <a:srgbClr val="20242B"/>
+                </a:solidFill>
+                <a:latin typeface="Calibri"/>
+              </a:rPr>
+              <a:t>With zero trained decoder</a:t>
+            </a:r>
+          </a:p>
+          <a:p>
+            <a:pPr>
+              <a:lnSpc>
+                <a:spcPct val="100000"/>
+              </a:lnSpc>
+            </a:pPr>
+            <a:r>
+              <a:rPr sz="1200" b="0">
+                <a:solidFill>
+                  <a:srgbClr val="20242B"/>
+                </a:solidFill>
+                <a:latin typeface="Calibri"/>
+              </a:rPr>
+              <a:t>weights, v3 reproduces</a:t>
+            </a:r>
+          </a:p>
+          <a:p>
+            <a:pPr>
+              <a:lnSpc>
+                <a:spcPct val="100000"/>
+              </a:lnSpc>
+            </a:pPr>
+            <a:r>
+              <a:rPr sz="1200" b="0">
+                <a:solidFill>
+                  <a:srgbClr val="20242B"/>
+                </a:solidFill>
+                <a:latin typeface="Calibri"/>
+              </a:rPr>
+              <a:t>bilinear upsampling of the</a:t>
+            </a:r>
+          </a:p>
+          <a:p>
+            <a:pPr>
+              <a:lnSpc>
+                <a:spcPct val="100000"/>
+              </a:lnSpc>
+            </a:pPr>
+            <a:r>
+              <a:rPr sz="1200" b="0">
+                <a:solidFill>
+                  <a:srgbClr val="20242B"/>
+                </a:solidFill>
+                <a:latin typeface="Calibri"/>
+              </a:rPr>
+              <a:t>coarse flow — measured at</a:t>
+            </a:r>
+          </a:p>
+          <a:p>
+            <a:pPr>
+              <a:lnSpc>
+                <a:spcPct val="100000"/>
+              </a:lnSpc>
+            </a:pPr>
+            <a:r>
+              <a:rPr sz="1200" b="0">
+                <a:solidFill>
+                  <a:srgbClr val="20242B"/>
+                </a:solidFill>
+                <a:latin typeface="Calibri"/>
+              </a:rPr>
+              <a:t>2.48 px EPE, 0.15 px behind</a:t>
+            </a:r>
+          </a:p>
+          <a:p>
+            <a:pPr>
+              <a:lnSpc>
+                <a:spcPct val="100000"/>
+              </a:lnSpc>
+            </a:pPr>
+            <a:r>
+              <a:rPr sz="1200" b="0">
+                <a:solidFill>
+                  <a:srgbClr val="20242B"/>
+                </a:solidFill>
+                <a:latin typeface="Calibri"/>
+              </a:rPr>
+              <a:t>v2, with querying already</a:t>
+            </a:r>
+          </a:p>
+          <a:p>
+            <a:pPr>
+              <a:lnSpc>
+                <a:spcPct val="100000"/>
+              </a:lnSpc>
+            </a:pPr>
+            <a:r>
+              <a:rPr sz="1200" b="0">
+                <a:solidFill>
+                  <a:srgbClr val="20242B"/>
+                </a:solidFill>
+                <a:latin typeface="Calibri"/>
+              </a:rPr>
+              <a:t>functional and exact.</a:t>
+            </a:r>
+          </a:p>
+          <a:p>
+            <a:pPr>
+              <a:lnSpc>
+                <a:spcPct val="100000"/>
+              </a:lnSpc>
+            </a:pPr>
             <a:r>
               <a:rPr sz="1200" b="0">
                 <a:solidFill>
@@ -5468,135 +7861,99 @@
             </a:r>
           </a:p>
           <a:p>
-            <a:r>
-              <a:rPr sz="1200" b="0">
-                <a:solidFill>
-                  <a:srgbClr val="20242B"/>
-                </a:solidFill>
-                <a:latin typeface="Calibri"/>
-              </a:rPr>
-              <a:t>FlyingChairs only (22.2k pairs): 2.27 —</a:t>
-            </a:r>
-          </a:p>
-          <a:p>
-            <a:r>
-              <a:rPr sz="1200" b="0">
-                <a:solidFill>
-                  <a:srgbClr val="20242B"/>
-                </a:solidFill>
-                <a:latin typeface="Calibri"/>
-              </a:rPr>
-              <a:t>beats v2 without seeing a single</a:t>
-            </a:r>
-          </a:p>
-          <a:p>
-            <a:r>
-              <a:rPr sz="1200" b="0">
-                <a:solidFill>
-                  <a:srgbClr val="20242B"/>
-                </a:solidFill>
-                <a:latin typeface="Calibri"/>
-              </a:rPr>
-              <a:t>driving frame. Large synthetic motion</a:t>
-            </a:r>
-          </a:p>
-          <a:p>
-            <a:r>
-              <a:rPr sz="1200" b="0">
-                <a:solidFill>
-                  <a:srgbClr val="20242B"/>
-                </a:solidFill>
-                <a:latin typeface="Calibri"/>
-              </a:rPr>
-              <a:t>crushes the error tail.</a:t>
-            </a:r>
-          </a:p>
-          <a:p>
-            <a:r>
-              <a:rPr sz="1200" b="0">
-                <a:solidFill>
-                  <a:srgbClr val="20242B"/>
-                </a:solidFill>
-                <a:latin typeface="Calibri"/>
-              </a:rPr>
-              <a:t/>
-            </a:r>
-          </a:p>
-          <a:p>
-            <a:r>
-              <a:rPr sz="1200" b="0">
-                <a:solidFill>
-                  <a:srgbClr val="20242B"/>
-                </a:solidFill>
-                <a:latin typeface="Calibri"/>
-              </a:rPr>
-              <a:t>Sequential finetune: 2.50 — forgets</a:t>
-            </a:r>
-          </a:p>
-          <a:p>
-            <a:r>
-              <a:rPr sz="1200" b="0">
-                <a:solidFill>
-                  <a:srgbClr val="20242B"/>
-                </a:solidFill>
-                <a:latin typeface="Calibri"/>
-              </a:rPr>
-              <a:t>chairs robustness. Fix: mixed-dataset</a:t>
-            </a:r>
-          </a:p>
-          <a:p>
-            <a:r>
-              <a:rPr sz="1200" b="0">
-                <a:solidFill>
-                  <a:srgbClr val="20242B"/>
-                </a:solidFill>
-                <a:latin typeface="Calibri"/>
-              </a:rPr>
-              <a:t>training (next).</a:t>
-            </a:r>
-          </a:p>
-          <a:p>
-            <a:r>
-              <a:rPr sz="1200" b="0">
-                <a:solidFill>
-                  <a:srgbClr val="20242B"/>
-                </a:solidFill>
-                <a:latin typeface="Calibri"/>
-              </a:rPr>
-              <a:t/>
-            </a:r>
-          </a:p>
-          <a:p>
-            <a:r>
-              <a:rPr sz="1200" b="0">
-                <a:solidFill>
-                  <a:srgbClr val="20242B"/>
-                </a:solidFill>
-                <a:latin typeface="Calibri"/>
-              </a:rPr>
-              <a:t>Open gap: 1px accuracy 69.7-74.7%</a:t>
-            </a:r>
-          </a:p>
-          <a:p>
-            <a:r>
-              <a:rPr sz="1200" b="0">
-                <a:solidFill>
-                  <a:srgbClr val="20242B"/>
-                </a:solidFill>
-                <a:latin typeface="Calibri"/>
-              </a:rPr>
-              <a:t>vs v2 77.6% -&gt; Fourier PE ablation</a:t>
-            </a:r>
-          </a:p>
-          <a:p>
-            <a:r>
-              <a:rPr sz="1200" b="0">
-                <a:solidFill>
-                  <a:srgbClr val="20242B"/>
-                </a:solidFill>
-                <a:latin typeface="Calibri"/>
-              </a:rPr>
-              <a:t>(measured: no effect (2.29 EPE, 69.7% 1px = no-PE run); sub-cell position is NOT the 1px bottleneck).</a:t>
+            <a:pPr>
+              <a:lnSpc>
+                <a:spcPct val="100000"/>
+              </a:lnSpc>
+            </a:pPr>
+            <a:r>
+              <a:rPr sz="1200" b="0">
+                <a:solidFill>
+                  <a:srgbClr val="20242B"/>
+                </a:solidFill>
+                <a:latin typeface="Calibri"/>
+              </a:rPr>
+              <a:t>Every subsequent training</a:t>
+            </a:r>
+          </a:p>
+          <a:p>
+            <a:pPr>
+              <a:lnSpc>
+                <a:spcPct val="100000"/>
+              </a:lnSpc>
+            </a:pPr>
+            <a:r>
+              <a:rPr sz="1200" b="0">
+                <a:solidFill>
+                  <a:srgbClr val="20242B"/>
+                </a:solidFill>
+                <a:latin typeface="Calibri"/>
+              </a:rPr>
+              <a:t>run is accepted only if it</a:t>
+            </a:r>
+          </a:p>
+          <a:p>
+            <a:pPr>
+              <a:lnSpc>
+                <a:spcPct val="100000"/>
+              </a:lnSpc>
+            </a:pPr>
+            <a:r>
+              <a:rPr sz="1200" b="0">
+                <a:solidFill>
+                  <a:srgbClr val="20242B"/>
+                </a:solidFill>
+                <a:latin typeface="Calibri"/>
+              </a:rPr>
+              <a:t>improves on this number.</a:t>
+            </a:r>
+          </a:p>
+          <a:p>
+            <a:pPr>
+              <a:lnSpc>
+                <a:spcPct val="100000"/>
+              </a:lnSpc>
+            </a:pPr>
+            <a:r>
+              <a:rPr sz="1200" b="0">
+                <a:solidFill>
+                  <a:srgbClr val="20242B"/>
+                </a:solidFill>
+                <a:latin typeface="Calibri"/>
+              </a:rPr>
+              <a:t>Two weeks of earlier training</a:t>
+            </a:r>
+          </a:p>
+          <a:p>
+            <a:pPr>
+              <a:lnSpc>
+                <a:spcPct val="100000"/>
+              </a:lnSpc>
+            </a:pPr>
+            <a:r>
+              <a:rPr sz="1200" b="0">
+                <a:solidFill>
+                  <a:srgbClr val="20242B"/>
+                </a:solidFill>
+                <a:latin typeface="Calibri"/>
+              </a:rPr>
+              <a:t>failed this test; the</a:t>
+            </a:r>
+          </a:p>
+          <a:p>
+            <a:pPr>
+              <a:lnSpc>
+                <a:spcPct val="100000"/>
+              </a:lnSpc>
+            </a:pPr>
+            <a:r>
+              <a:rPr sz="1200" b="0">
+                <a:solidFill>
+                  <a:srgbClr val="20242B"/>
+                </a:solidFill>
+                <a:latin typeface="Calibri"/>
+              </a:rPr>
+              <a:t>redesigned head passes it.</a:t>
             </a:r>
           </a:p>
         </p:txBody>
@@ -5609,8 +7966,8 @@
         </p:nvSpPr>
         <p:spPr>
           <a:xfrm>
-            <a:off x="685800" y="6419088"/>
-            <a:ext cx="7315200" cy="274320"/>
+            <a:off x="960120" y="5779008"/>
+            <a:ext cx="10332720" cy="548640"/>
           </a:xfrm>
           <a:prstGeom prst="rect">
             <a:avLst/>
@@ -5623,14 +7980,19 @@
           </a:bodyPr>
           <a:lstStyle/>
           <a:p>
-            <a:r>
-              <a:rPr sz="900" b="0">
-                <a:solidFill>
-                  <a:srgbClr val="7B838F"/>
-                </a:solidFill>
-                <a:latin typeface="Calibri"/>
-              </a:rPr>
-              <a:t>NeuFlow v3  ·  status</a:t>
+            <a:pPr>
+              <a:lnSpc>
+                <a:spcPct val="100000"/>
+              </a:lnSpc>
+            </a:pPr>
+            <a:r>
+              <a:rPr sz="1150" b="1">
+                <a:solidFill>
+                  <a:srgbClr val="1F4E79"/>
+                </a:solidFill>
+                <a:latin typeface="Calibri"/>
+              </a:rPr>
+              <a:t>Takeaway   Queryability costs +0.15 px EPE before a single gradient step. Training must earn its keep against this baseline.</a:t>
             </a:r>
           </a:p>
         </p:txBody>
@@ -5643,8 +8005,8 @@
         </p:nvSpPr>
         <p:spPr>
           <a:xfrm>
-            <a:off x="10607040" y="6419088"/>
-            <a:ext cx="1097280" cy="274320"/>
+            <a:off x="685800" y="6419088"/>
+            <a:ext cx="7315200" cy="274320"/>
           </a:xfrm>
           <a:prstGeom prst="rect">
             <a:avLst/>
@@ -5657,6 +8019,50 @@
           </a:bodyPr>
           <a:lstStyle/>
           <a:p>
+            <a:pPr>
+              <a:lnSpc>
+                <a:spcPct val="100000"/>
+              </a:lnSpc>
+            </a:pPr>
+            <a:r>
+              <a:rPr sz="900" b="0">
+                <a:solidFill>
+                  <a:srgbClr val="7B838F"/>
+                </a:solidFill>
+                <a:latin typeface="Calibri"/>
+              </a:rPr>
+              <a:t>NeuFlow v3 · status report</a:t>
+            </a:r>
+          </a:p>
+        </p:txBody>
+      </p:sp>
+      <p:sp>
+        <p:nvSpPr>
+          <p:cNvPr id="8" name="TextBox 7"/>
+          <p:cNvSpPr txBox="1"/>
+          <p:nvPr/>
+        </p:nvSpPr>
+        <p:spPr>
+          <a:xfrm>
+            <a:off x="10607040" y="6419088"/>
+            <a:ext cx="1097280" cy="274320"/>
+          </a:xfrm>
+          <a:prstGeom prst="rect">
+            <a:avLst/>
+          </a:prstGeom>
+          <a:noFill/>
+        </p:spPr>
+        <p:txBody>
+          <a:bodyPr wrap="square">
+            <a:spAutoFit/>
+          </a:bodyPr>
+          <a:lstStyle/>
+          <a:p>
+            <a:pPr>
+              <a:lnSpc>
+                <a:spcPct val="100000"/>
+              </a:lnSpc>
+            </a:pPr>
             <a:r>
               <a:rPr sz="900" b="0">
                 <a:solidFill>
@@ -5696,7 +8102,7 @@
         <p:spPr>
           <a:xfrm>
             <a:off x="685800" y="384048"/>
-            <a:ext cx="10058400" cy="274320"/>
+            <a:ext cx="10515600" cy="274320"/>
           </a:xfrm>
           <a:prstGeom prst="rect">
             <a:avLst/>
@@ -5709,6 +8115,11 @@
           </a:bodyPr>
           <a:lstStyle/>
           <a:p>
+            <a:pPr>
+              <a:lnSpc>
+                <a:spcPct val="100000"/>
+              </a:lnSpc>
+            </a:pPr>
             <a:r>
               <a:rPr sz="1050" b="1">
                 <a:solidFill>
@@ -5716,7 +8127,7 @@
                 </a:solidFill>
                 <a:latin typeface="Calibri"/>
               </a:rPr>
-              <a:t>VISUAL RESULTS  ·  VKITTI2 SCENE18</a:t>
+              <a:t>RESULTS · STAGE 1 OF 3</a:t>
             </a:r>
           </a:p>
         </p:txBody>
@@ -5730,7 +8141,7 @@
         <p:spPr>
           <a:xfrm>
             <a:off x="667512" y="658368"/>
-            <a:ext cx="10789920" cy="731520"/>
+            <a:ext cx="10881360" cy="731520"/>
           </a:xfrm>
           <a:prstGeom prst="rect">
             <a:avLst/>
@@ -5743,6 +8154,11 @@
           </a:bodyPr>
           <a:lstStyle/>
           <a:p>
+            <a:pPr>
+              <a:lnSpc>
+                <a:spcPct val="100000"/>
+              </a:lnSpc>
+            </a:pPr>
             <a:r>
               <a:rPr sz="2400" b="1">
                 <a:solidFill>
@@ -5750,14 +8166,14 @@
                 </a:solidFill>
                 <a:latin typeface="Calibri"/>
               </a:rPr>
-              <a:t>Seeing the output: dense fields and sparse queries</a:t>
+              <a:t>Training on the target domain: VKITTI2, six appearance variants</a:t>
             </a:r>
           </a:p>
         </p:txBody>
       </p:sp>
       <p:pic>
         <p:nvPicPr>
-          <p:cNvPr id="4" name="Picture 3" descr="sparse_queries.png"/>
+          <p:cNvPr id="4" name="Picture 3" descr="stage_vkitti2.png"/>
           <p:cNvPicPr>
             <a:picLocks noChangeAspect="1"/>
           </p:cNvPicPr>
@@ -5771,8 +8187,8 @@
         </p:blipFill>
         <p:spPr>
           <a:xfrm>
-            <a:off x="685800" y="1508760"/>
-            <a:ext cx="7498079" cy="2499360"/>
+            <a:off x="685800" y="1463040"/>
+            <a:ext cx="7955279" cy="4978702"/>
           </a:xfrm>
           <a:prstGeom prst="rect">
             <a:avLst/>
@@ -5787,8 +8203,8 @@
         </p:nvSpPr>
         <p:spPr>
           <a:xfrm>
-            <a:off x="8412480" y="1600200"/>
-            <a:ext cx="3200400" cy="2926080"/>
+            <a:off x="8869680" y="1554480"/>
+            <a:ext cx="2743200" cy="4023360"/>
           </a:xfrm>
           <a:prstGeom prst="rect">
             <a:avLst/>
@@ -5801,39 +8217,91 @@
           </a:bodyPr>
           <a:lstStyle/>
           <a:p>
-            <a:r>
-              <a:rPr sz="1200" b="0">
-                <a:solidFill>
-                  <a:srgbClr val="20242B"/>
-                </a:solidFill>
-                <a:latin typeface="Calibri"/>
-              </a:rPr>
-              <a:t>300 corner-detected queries,</a:t>
-            </a:r>
-          </a:p>
-          <a:p>
-            <a:r>
-              <a:rPr sz="1200" b="0">
-                <a:solidFill>
-                  <a:srgbClr val="20242B"/>
-                </a:solidFill>
-                <a:latin typeface="Calibri"/>
-              </a:rPr>
-              <a:t>decoded in ONE 1.6 ms call</a:t>
-            </a:r>
-          </a:p>
-          <a:p>
-            <a:r>
-              <a:rPr sz="1200" b="0">
-                <a:solidFill>
-                  <a:srgbClr val="20242B"/>
-                </a:solidFill>
-                <a:latin typeface="Calibri"/>
-              </a:rPr>
-              <a:t>(0.05% of a dense field).</a:t>
-            </a:r>
-          </a:p>
-          <a:p>
+            <a:pPr>
+              <a:lnSpc>
+                <a:spcPct val="100000"/>
+              </a:lnSpc>
+            </a:pPr>
+            <a:r>
+              <a:rPr sz="1200" b="0">
+                <a:solidFill>
+                  <a:srgbClr val="20242B"/>
+                </a:solidFill>
+                <a:latin typeface="Calibri"/>
+              </a:rPr>
+              <a:t>Six same-trajectory weather</a:t>
+            </a:r>
+          </a:p>
+          <a:p>
+            <a:pPr>
+              <a:lnSpc>
+                <a:spcPct val="100000"/>
+              </a:lnSpc>
+            </a:pPr>
+            <a:r>
+              <a:rPr sz="1200" b="0">
+                <a:solidFill>
+                  <a:srgbClr val="20242B"/>
+                </a:solidFill>
+                <a:latin typeface="Calibri"/>
+              </a:rPr>
+              <a:t>variants share identical flow</a:t>
+            </a:r>
+          </a:p>
+          <a:p>
+            <a:pPr>
+              <a:lnSpc>
+                <a:spcPct val="100000"/>
+              </a:lnSpc>
+            </a:pPr>
+            <a:r>
+              <a:rPr sz="1200" b="0">
+                <a:solidFill>
+                  <a:srgbClr val="20242B"/>
+                </a:solidFill>
+                <a:latin typeface="Calibri"/>
+              </a:rPr>
+              <a:t>ground truth — appearance</a:t>
+            </a:r>
+          </a:p>
+          <a:p>
+            <a:pPr>
+              <a:lnSpc>
+                <a:spcPct val="100000"/>
+              </a:lnSpc>
+            </a:pPr>
+            <a:r>
+              <a:rPr sz="1200" b="0">
+                <a:solidFill>
+                  <a:srgbClr val="20242B"/>
+                </a:solidFill>
+                <a:latin typeface="Calibri"/>
+              </a:rPr>
+              <a:t>augmentation at no labeling</a:t>
+            </a:r>
+          </a:p>
+          <a:p>
+            <a:pPr>
+              <a:lnSpc>
+                <a:spcPct val="100000"/>
+              </a:lnSpc>
+            </a:pPr>
+            <a:r>
+              <a:rPr sz="1200" b="0">
+                <a:solidFill>
+                  <a:srgbClr val="20242B"/>
+                </a:solidFill>
+                <a:latin typeface="Calibri"/>
+              </a:rPr>
+              <a:t>cost. 12,726 pairs.</a:t>
+            </a:r>
+          </a:p>
+          <a:p>
+            <a:pPr>
+              <a:lnSpc>
+                <a:spcPct val="100000"/>
+              </a:lnSpc>
+            </a:pPr>
             <a:r>
               <a:rPr sz="1200" b="0">
                 <a:solidFill>
@@ -5845,58 +8313,163 @@
             </a:r>
           </a:p>
           <a:p>
-            <a:r>
-              <a:rPr sz="1200" b="0">
-                <a:solidFill>
-                  <a:srgbClr val="20242B"/>
-                </a:solidFill>
-                <a:latin typeface="Calibri"/>
-              </a:rPr>
-              <a:t>Arrow color = flow magnitude.</a:t>
-            </a:r>
-          </a:p>
-          <a:p>
-            <a:r>
-              <a:rPr sz="1200" b="0">
-                <a:solidFill>
-                  <a:srgbClr val="20242B"/>
-                </a:solidFill>
-                <a:latin typeface="Calibri"/>
-              </a:rPr>
-              <a:t>Left roadside streams left,</a:t>
-            </a:r>
-          </a:p>
-          <a:p>
-            <a:r>
-              <a:rPr sz="1200" b="0">
-                <a:solidFill>
-                  <a:srgbClr val="20242B"/>
-                </a:solidFill>
-                <a:latin typeface="Calibri"/>
-              </a:rPr>
-              <a:t>right side streams right —</a:t>
-            </a:r>
-          </a:p>
-          <a:p>
-            <a:r>
-              <a:rPr sz="1200" b="0">
-                <a:solidFill>
-                  <a:srgbClr val="20242B"/>
-                </a:solidFill>
-                <a:latin typeface="Calibri"/>
-              </a:rPr>
-              <a:t>forward ego-motion, correctly</a:t>
-            </a:r>
-          </a:p>
-          <a:p>
-            <a:r>
-              <a:rPr sz="1200" b="0">
-                <a:solidFill>
-                  <a:srgbClr val="20242B"/>
-                </a:solidFill>
-                <a:latin typeface="Calibri"/>
-              </a:rPr>
-              <a:t>recovered per point.</a:t>
+            <a:pPr>
+              <a:lnSpc>
+                <a:spcPct val="100000"/>
+              </a:lnSpc>
+            </a:pPr>
+            <a:r>
+              <a:rPr sz="1200" b="0">
+                <a:solidFill>
+                  <a:srgbClr val="20242B"/>
+                </a:solidFill>
+                <a:latin typeface="Calibri"/>
+              </a:rPr>
+              <a:t>2.39 px EPE — the first</a:t>
+            </a:r>
+          </a:p>
+          <a:p>
+            <a:pPr>
+              <a:lnSpc>
+                <a:spcPct val="100000"/>
+              </a:lnSpc>
+            </a:pPr>
+            <a:r>
+              <a:rPr sz="1200" b="0">
+                <a:solidFill>
+                  <a:srgbClr val="20242B"/>
+                </a:solidFill>
+                <a:latin typeface="Calibri"/>
+              </a:rPr>
+              <a:t>checkpoint in this project to</a:t>
+            </a:r>
+          </a:p>
+          <a:p>
+            <a:pPr>
+              <a:lnSpc>
+                <a:spcPct val="100000"/>
+              </a:lnSpc>
+            </a:pPr>
+            <a:r>
+              <a:rPr sz="1200" b="0">
+                <a:solidFill>
+                  <a:srgbClr val="20242B"/>
+                </a:solidFill>
+                <a:latin typeface="Calibri"/>
+              </a:rPr>
+              <a:t>improve on its initialization.</a:t>
+            </a:r>
+          </a:p>
+          <a:p>
+            <a:pPr>
+              <a:lnSpc>
+                <a:spcPct val="100000"/>
+              </a:lnSpc>
+            </a:pPr>
+            <a:r>
+              <a:rPr sz="1200" b="0">
+                <a:solidFill>
+                  <a:srgbClr val="20242B"/>
+                </a:solidFill>
+                <a:latin typeface="Calibri"/>
+              </a:rPr>
+              <a:t>No late-training collapse:</a:t>
+            </a:r>
+          </a:p>
+          <a:p>
+            <a:pPr>
+              <a:lnSpc>
+                <a:spcPct val="100000"/>
+              </a:lnSpc>
+            </a:pPr>
+            <a:r>
+              <a:rPr sz="1200" b="0">
+                <a:solidFill>
+                  <a:srgbClr val="20242B"/>
+                </a:solidFill>
+                <a:latin typeface="Calibri"/>
+              </a:rPr>
+              <a:t>the final checkpoint is the</a:t>
+            </a:r>
+          </a:p>
+          <a:p>
+            <a:pPr>
+              <a:lnSpc>
+                <a:spcPct val="100000"/>
+              </a:lnSpc>
+            </a:pPr>
+            <a:r>
+              <a:rPr sz="1200" b="0">
+                <a:solidFill>
+                  <a:srgbClr val="20242B"/>
+                </a:solidFill>
+                <a:latin typeface="Calibri"/>
+              </a:rPr>
+              <a:t>best one.</a:t>
+            </a:r>
+          </a:p>
+          <a:p>
+            <a:pPr>
+              <a:lnSpc>
+                <a:spcPct val="100000"/>
+              </a:lnSpc>
+            </a:pPr>
+            <a:r>
+              <a:rPr sz="1200" b="0">
+                <a:solidFill>
+                  <a:srgbClr val="20242B"/>
+                </a:solidFill>
+                <a:latin typeface="Calibri"/>
+              </a:rPr>
+              <a:t/>
+            </a:r>
+          </a:p>
+          <a:p>
+            <a:pPr>
+              <a:lnSpc>
+                <a:spcPct val="100000"/>
+              </a:lnSpc>
+            </a:pPr>
+            <a:r>
+              <a:rPr sz="1200" b="0">
+                <a:solidFill>
+                  <a:srgbClr val="20242B"/>
+                </a:solidFill>
+                <a:latin typeface="Calibri"/>
+              </a:rPr>
+              <a:t>Limitation: five scenes teach</a:t>
+            </a:r>
+          </a:p>
+          <a:p>
+            <a:pPr>
+              <a:lnSpc>
+                <a:spcPct val="100000"/>
+              </a:lnSpc>
+            </a:pPr>
+            <a:r>
+              <a:rPr sz="1200" b="0">
+                <a:solidFill>
+                  <a:srgbClr val="20242B"/>
+                </a:solidFill>
+                <a:latin typeface="Calibri"/>
+              </a:rPr>
+              <a:t>scene-specific detail; the</a:t>
+            </a:r>
+          </a:p>
+          <a:p>
+            <a:pPr>
+              <a:lnSpc>
+                <a:spcPct val="100000"/>
+              </a:lnSpc>
+            </a:pPr>
+            <a:r>
+              <a:rPr sz="1200" b="0">
+                <a:solidFill>
+                  <a:srgbClr val="20242B"/>
+                </a:solidFill>
+                <a:latin typeface="Calibri"/>
+              </a:rPr>
+              <a:t>error tail barely moves.</a:t>
             </a:r>
           </a:p>
         </p:txBody>
@@ -5909,8 +8482,8 @@
         </p:nvSpPr>
         <p:spPr>
           <a:xfrm>
-            <a:off x="685800" y="4206240"/>
-            <a:ext cx="10789920" cy="365760"/>
+            <a:off x="960120" y="5779008"/>
+            <a:ext cx="10332720" cy="548640"/>
           </a:xfrm>
           <a:prstGeom prst="rect">
             <a:avLst/>
@@ -5923,14 +8496,19 @@
           </a:bodyPr>
           <a:lstStyle/>
           <a:p>
-            <a:r>
-              <a:rPr sz="1100" b="0">
-                <a:solidFill>
-                  <a:srgbClr val="7B838F"/>
-                </a:solidFill>
-                <a:latin typeface="Calibri"/>
-              </a:rPr>
-              <a:t>Full-field comparisons (input / GT / v2 / v3 / error maps): results/visuals/compare_0.png, compare_1.png</a:t>
+            <a:pPr>
+              <a:lnSpc>
+                <a:spcPct val="100000"/>
+              </a:lnSpc>
+            </a:pPr>
+            <a:r>
+              <a:rPr sz="1150" b="1">
+                <a:solidFill>
+                  <a:srgbClr val="1F4E79"/>
+                </a:solidFill>
+                <a:latin typeface="Calibri"/>
+              </a:rPr>
+              <a:t>Takeaway   Correct head plus sufficient data variety turned training from harmful to net-positive: 2.48 to 2.39 px.</a:t>
             </a:r>
           </a:p>
         </p:txBody>
@@ -5943,8 +8521,8 @@
         </p:nvSpPr>
         <p:spPr>
           <a:xfrm>
-            <a:off x="960120" y="5760720"/>
-            <a:ext cx="10332720" cy="548640"/>
+            <a:off x="685800" y="6419088"/>
+            <a:ext cx="7315200" cy="274320"/>
           </a:xfrm>
           <a:prstGeom prst="rect">
             <a:avLst/>
@@ -5957,14 +8535,19 @@
           </a:bodyPr>
           <a:lstStyle/>
           <a:p>
-            <a:r>
-              <a:rPr sz="1150" b="1">
-                <a:solidFill>
-                  <a:srgbClr val="1F4E79"/>
-                </a:solidFill>
-                <a:latin typeface="Calibri"/>
-              </a:rPr>
-              <a:t>Takeaway   v3 flow fields are structurally clean; both models fail in the same hard regions (dense foliage).</a:t>
+            <a:pPr>
+              <a:lnSpc>
+                <a:spcPct val="100000"/>
+              </a:lnSpc>
+            </a:pPr>
+            <a:r>
+              <a:rPr sz="900" b="0">
+                <a:solidFill>
+                  <a:srgbClr val="7B838F"/>
+                </a:solidFill>
+                <a:latin typeface="Calibri"/>
+              </a:rPr>
+              <a:t>NeuFlow v3 · status report</a:t>
             </a:r>
           </a:p>
         </p:txBody>
@@ -5977,8 +8560,8 @@
         </p:nvSpPr>
         <p:spPr>
           <a:xfrm>
-            <a:off x="685800" y="6419088"/>
-            <a:ext cx="7315200" cy="274320"/>
+            <a:off x="10607040" y="6419088"/>
+            <a:ext cx="1097280" cy="274320"/>
           </a:xfrm>
           <a:prstGeom prst="rect">
             <a:avLst/>
@@ -5991,40 +8574,11 @@
           </a:bodyPr>
           <a:lstStyle/>
           <a:p>
-            <a:r>
-              <a:rPr sz="900" b="0">
-                <a:solidFill>
-                  <a:srgbClr val="7B838F"/>
-                </a:solidFill>
-                <a:latin typeface="Calibri"/>
-              </a:rPr>
-              <a:t>NeuFlow v3  ·  status</a:t>
-            </a:r>
-          </a:p>
-        </p:txBody>
-      </p:sp>
-      <p:sp>
-        <p:nvSpPr>
-          <p:cNvPr id="9" name="TextBox 8"/>
-          <p:cNvSpPr txBox="1"/>
-          <p:nvPr/>
-        </p:nvSpPr>
-        <p:spPr>
-          <a:xfrm>
-            <a:off x="10607040" y="6419088"/>
-            <a:ext cx="1097280" cy="274320"/>
-          </a:xfrm>
-          <a:prstGeom prst="rect">
-            <a:avLst/>
-          </a:prstGeom>
-          <a:noFill/>
-        </p:spPr>
-        <p:txBody>
-          <a:bodyPr wrap="square">
-            <a:spAutoFit/>
-          </a:bodyPr>
-          <a:lstStyle/>
-          <a:p>
+            <a:pPr>
+              <a:lnSpc>
+                <a:spcPct val="100000"/>
+              </a:lnSpc>
+            </a:pPr>
             <a:r>
               <a:rPr sz="900" b="0">
                 <a:solidFill>
@@ -6064,7 +8618,7 @@
         <p:spPr>
           <a:xfrm>
             <a:off x="685800" y="384048"/>
-            <a:ext cx="10058400" cy="274320"/>
+            <a:ext cx="10515600" cy="274320"/>
           </a:xfrm>
           <a:prstGeom prst="rect">
             <a:avLst/>
@@ -6077,6 +8631,11 @@
           </a:bodyPr>
           <a:lstStyle/>
           <a:p>
+            <a:pPr>
+              <a:lnSpc>
+                <a:spcPct val="100000"/>
+              </a:lnSpc>
+            </a:pPr>
             <a:r>
               <a:rPr sz="1050" b="1">
                 <a:solidFill>
@@ -6084,7 +8643,7 @@
                 </a:solidFill>
                 <a:latin typeface="Calibri"/>
               </a:rPr>
-              <a:t>RESULT 3 OF 3  ·  RTX 4060 LAPTOP 8GB, FP16, 384x1248</a:t>
+              <a:t>RESULTS · STAGE 2 OF 3</a:t>
             </a:r>
           </a:p>
         </p:txBody>
@@ -6098,7 +8657,7 @@
         <p:spPr>
           <a:xfrm>
             <a:off x="667512" y="658368"/>
-            <a:ext cx="10789920" cy="731520"/>
+            <a:ext cx="10881360" cy="731520"/>
           </a:xfrm>
           <a:prstGeom prst="rect">
             <a:avLst/>
@@ -6111,6 +8670,11 @@
           </a:bodyPr>
           <a:lstStyle/>
           <a:p>
+            <a:pPr>
+              <a:lnSpc>
+                <a:spcPct val="100000"/>
+              </a:lnSpc>
+            </a:pPr>
             <a:r>
               <a:rPr sz="2400" b="1">
                 <a:solidFill>
@@ -6118,14 +8682,14 @@
                 </a:solidFill>
                 <a:latin typeface="Calibri"/>
               </a:rPr>
-              <a:t>Compute: v2 vs v3</a:t>
+              <a:t>Training out of domain: FlyingChairs only</a:t>
             </a:r>
           </a:p>
         </p:txBody>
       </p:sp>
       <p:pic>
         <p:nvPicPr>
-          <p:cNvPr id="4" name="Picture 3" descr="latency_v2_v3.png"/>
+          <p:cNvPr id="4" name="Picture 3" descr="stage_chairs.png"/>
           <p:cNvPicPr>
             <a:picLocks noChangeAspect="1"/>
           </p:cNvPicPr>
@@ -6139,8 +8703,8 @@
         </p:blipFill>
         <p:spPr>
           <a:xfrm>
-            <a:off x="685800" y="1600200"/>
-            <a:ext cx="7863840" cy="3214910"/>
+            <a:off x="685800" y="1463040"/>
+            <a:ext cx="7955279" cy="4978702"/>
           </a:xfrm>
           <a:prstGeom prst="rect">
             <a:avLst/>
@@ -6155,8 +8719,8 @@
         </p:nvSpPr>
         <p:spPr>
           <a:xfrm>
-            <a:off x="8778240" y="1691640"/>
-            <a:ext cx="2743200" cy="3931920"/>
+            <a:off x="8869680" y="1554480"/>
+            <a:ext cx="2743200" cy="4023360"/>
           </a:xfrm>
           <a:prstGeom prst="rect">
             <a:avLst/>
@@ -6169,39 +8733,91 @@
           </a:bodyPr>
           <a:lstStyle/>
           <a:p>
-            <a:r>
-              <a:rPr sz="1200" b="0">
-                <a:solidFill>
-                  <a:srgbClr val="20242B"/>
-                </a:solidFill>
-                <a:latin typeface="Calibri"/>
-              </a:rPr>
-              <a:t>Params:</a:t>
-            </a:r>
-          </a:p>
-          <a:p>
-            <a:r>
-              <a:rPr sz="1200" b="0">
-                <a:solidFill>
-                  <a:srgbClr val="20242B"/>
-                </a:solidFill>
-                <a:latin typeface="Calibri"/>
-              </a:rPr>
-              <a:t>9.03M (v2)</a:t>
-            </a:r>
-          </a:p>
-          <a:p>
-            <a:r>
-              <a:rPr sz="1200" b="0">
-                <a:solidFill>
-                  <a:srgbClr val="20242B"/>
-                </a:solidFill>
-                <a:latin typeface="Calibri"/>
-              </a:rPr>
-              <a:t>7.83M (v3)</a:t>
-            </a:r>
-          </a:p>
-          <a:p>
+            <a:pPr>
+              <a:lnSpc>
+                <a:spcPct val="100000"/>
+              </a:lnSpc>
+            </a:pPr>
+            <a:r>
+              <a:rPr sz="1200" b="0">
+                <a:solidFill>
+                  <a:srgbClr val="20242B"/>
+                </a:solidFill>
+                <a:latin typeface="Calibri"/>
+              </a:rPr>
+              <a:t>22,232 synthetic pairs of</a:t>
+            </a:r>
+          </a:p>
+          <a:p>
+            <a:pPr>
+              <a:lnSpc>
+                <a:spcPct val="100000"/>
+              </a:lnSpc>
+            </a:pPr>
+            <a:r>
+              <a:rPr sz="1200" b="0">
+                <a:solidFill>
+                  <a:srgbClr val="20242B"/>
+                </a:solidFill>
+                <a:latin typeface="Calibri"/>
+              </a:rPr>
+              <a:t>chairs over random imagery —</a:t>
+            </a:r>
+          </a:p>
+          <a:p>
+            <a:pPr>
+              <a:lnSpc>
+                <a:spcPct val="100000"/>
+              </a:lnSpc>
+            </a:pPr>
+            <a:r>
+              <a:rPr sz="1200" b="0">
+                <a:solidFill>
+                  <a:srgbClr val="20242B"/>
+                </a:solidFill>
+                <a:latin typeface="Calibri"/>
+              </a:rPr>
+              <a:t>no roads, no vehicles, no</a:t>
+            </a:r>
+          </a:p>
+          <a:p>
+            <a:pPr>
+              <a:lnSpc>
+                <a:spcPct val="100000"/>
+              </a:lnSpc>
+            </a:pPr>
+            <a:r>
+              <a:rPr sz="1200" b="0">
+                <a:solidFill>
+                  <a:srgbClr val="20242B"/>
+                </a:solidFill>
+                <a:latin typeface="Calibri"/>
+              </a:rPr>
+              <a:t>shared statistics with the</a:t>
+            </a:r>
+          </a:p>
+          <a:p>
+            <a:pPr>
+              <a:lnSpc>
+                <a:spcPct val="100000"/>
+              </a:lnSpc>
+            </a:pPr>
+            <a:r>
+              <a:rPr sz="1200" b="0">
+                <a:solidFill>
+                  <a:srgbClr val="20242B"/>
+                </a:solidFill>
+                <a:latin typeface="Calibri"/>
+              </a:rPr>
+              <a:t>evaluation domain.</a:t>
+            </a:r>
+          </a:p>
+          <a:p>
+            <a:pPr>
+              <a:lnSpc>
+                <a:spcPct val="100000"/>
+              </a:lnSpc>
+            </a:pPr>
             <a:r>
               <a:rPr sz="1200" b="0">
                 <a:solidFill>
@@ -6213,72 +8829,139 @@
             </a:r>
           </a:p>
           <a:p>
-            <a:r>
-              <a:rPr sz="1200" b="0">
-                <a:solidFill>
-                  <a:srgbClr val="20242B"/>
-                </a:solidFill>
-                <a:latin typeface="Calibri"/>
-              </a:rPr>
-              <a:t>Sparse v3 costs the</a:t>
-            </a:r>
-          </a:p>
-          <a:p>
-            <a:r>
-              <a:rPr sz="1200" b="0">
-                <a:solidFill>
-                  <a:srgbClr val="20242B"/>
-                </a:solidFill>
-                <a:latin typeface="Calibri"/>
-              </a:rPr>
-              <a:t>same as v2 dense —</a:t>
-            </a:r>
-          </a:p>
-          <a:p>
-            <a:r>
-              <a:rPr sz="1200" b="0">
-                <a:solidFill>
-                  <a:srgbClr val="20242B"/>
-                </a:solidFill>
-                <a:latin typeface="Calibri"/>
-              </a:rPr>
-              <a:t>but extra queries on</a:t>
-            </a:r>
-          </a:p>
-          <a:p>
-            <a:r>
-              <a:rPr sz="1200" b="0">
-                <a:solidFill>
-                  <a:srgbClr val="20242B"/>
-                </a:solidFill>
-                <a:latin typeface="Calibri"/>
-              </a:rPr>
-              <a:t>a processed pair are</a:t>
-            </a:r>
-          </a:p>
-          <a:p>
-            <a:r>
-              <a:rPr sz="1200" b="0">
-                <a:solidFill>
-                  <a:srgbClr val="20242B"/>
-                </a:solidFill>
-                <a:latin typeface="Calibri"/>
-              </a:rPr>
-              <a:t>~20x cheaper than</a:t>
-            </a:r>
-          </a:p>
-          <a:p>
-            <a:r>
-              <a:rPr sz="1200" b="0">
-                <a:solidFill>
-                  <a:srgbClr val="20242B"/>
-                </a:solidFill>
-                <a:latin typeface="Calibri"/>
-              </a:rPr>
-              <a:t>v2 recomputing.</a:t>
-            </a:r>
-          </a:p>
-          <a:p>
+            <a:pPr>
+              <a:lnSpc>
+                <a:spcPct val="100000"/>
+              </a:lnSpc>
+            </a:pPr>
+            <a:r>
+              <a:rPr sz="1200" b="0">
+                <a:solidFill>
+                  <a:srgbClr val="20242B"/>
+                </a:solidFill>
+                <a:latin typeface="Calibri"/>
+              </a:rPr>
+              <a:t>2.28 px EPE on VKITTI2 —</a:t>
+            </a:r>
+          </a:p>
+          <a:p>
+            <a:pPr>
+              <a:lnSpc>
+                <a:spcPct val="100000"/>
+              </a:lnSpc>
+            </a:pPr>
+            <a:r>
+              <a:rPr sz="1200" b="0">
+                <a:solidFill>
+                  <a:srgbClr val="20242B"/>
+                </a:solidFill>
+                <a:latin typeface="Calibri"/>
+              </a:rPr>
+              <a:t>below NeuFlow v2 (2.32).</a:t>
+            </a:r>
+          </a:p>
+          <a:p>
+            <a:pPr>
+              <a:lnSpc>
+                <a:spcPct val="100000"/>
+              </a:lnSpc>
+            </a:pPr>
+            <a:r>
+              <a:rPr sz="1200" b="0">
+                <a:solidFill>
+                  <a:srgbClr val="20242B"/>
+                </a:solidFill>
+                <a:latin typeface="Calibri"/>
+              </a:rPr>
+              <a:t>Motion diversity, not domain</a:t>
+            </a:r>
+          </a:p>
+          <a:p>
+            <a:pPr>
+              <a:lnSpc>
+                <a:spcPct val="100000"/>
+              </a:lnSpc>
+            </a:pPr>
+            <a:r>
+              <a:rPr sz="1200" b="0">
+                <a:solidFill>
+                  <a:srgbClr val="20242B"/>
+                </a:solidFill>
+                <a:latin typeface="Calibri"/>
+              </a:rPr>
+              <a:t>familiarity, is what the</a:t>
+            </a:r>
+          </a:p>
+          <a:p>
+            <a:pPr>
+              <a:lnSpc>
+                <a:spcPct val="100000"/>
+              </a:lnSpc>
+            </a:pPr>
+            <a:r>
+              <a:rPr sz="1200" b="0">
+                <a:solidFill>
+                  <a:srgbClr val="20242B"/>
+                </a:solidFill>
+                <a:latin typeface="Calibri"/>
+              </a:rPr>
+              <a:t>decoder needed: varied large</a:t>
+            </a:r>
+          </a:p>
+          <a:p>
+            <a:pPr>
+              <a:lnSpc>
+                <a:spcPct val="100000"/>
+              </a:lnSpc>
+            </a:pPr>
+            <a:r>
+              <a:rPr sz="1200" b="0">
+                <a:solidFill>
+                  <a:srgbClr val="20242B"/>
+                </a:solidFill>
+                <a:latin typeface="Calibri"/>
+              </a:rPr>
+              <a:t>displacements suppress the</a:t>
+            </a:r>
+          </a:p>
+          <a:p>
+            <a:pPr>
+              <a:lnSpc>
+                <a:spcPct val="100000"/>
+              </a:lnSpc>
+            </a:pPr>
+            <a:r>
+              <a:rPr sz="1200" b="0">
+                <a:solidFill>
+                  <a:srgbClr val="20242B"/>
+                </a:solidFill>
+                <a:latin typeface="Calibri"/>
+              </a:rPr>
+              <a:t>error tail that dominates</a:t>
+            </a:r>
+          </a:p>
+          <a:p>
+            <a:pPr>
+              <a:lnSpc>
+                <a:spcPct val="100000"/>
+              </a:lnSpc>
+            </a:pPr>
+            <a:r>
+              <a:rPr sz="1200" b="0">
+                <a:solidFill>
+                  <a:srgbClr val="20242B"/>
+                </a:solidFill>
+                <a:latin typeface="Calibri"/>
+              </a:rPr>
+              <a:t>mean EPE.</a:t>
+            </a:r>
+          </a:p>
+          <a:p>
+            <a:pPr>
+              <a:lnSpc>
+                <a:spcPct val="100000"/>
+              </a:lnSpc>
+            </a:pPr>
             <a:r>
               <a:rPr sz="1200" b="0">
                 <a:solidFill>
@@ -6290,25 +8973,35 @@
             </a:r>
           </a:p>
           <a:p>
-            <a:r>
-              <a:rPr sz="1200" b="0">
-                <a:solidFill>
-                  <a:srgbClr val="20242B"/>
-                </a:solidFill>
-                <a:latin typeface="Calibri"/>
-              </a:rPr>
-              <a:t>v3 dense (327 ms) is</a:t>
-            </a:r>
-          </a:p>
-          <a:p>
-            <a:r>
-              <a:rPr sz="1200" b="0">
-                <a:solidFill>
-                  <a:srgbClr val="20242B"/>
-                </a:solidFill>
-                <a:latin typeface="Calibri"/>
-              </a:rPr>
-              <a:t>not the use case.</a:t>
+            <a:pPr>
+              <a:lnSpc>
+                <a:spcPct val="100000"/>
+              </a:lnSpc>
+            </a:pPr>
+            <a:r>
+              <a:rPr sz="1200" b="0">
+                <a:solidFill>
+                  <a:srgbClr val="20242B"/>
+                </a:solidFill>
+                <a:latin typeface="Calibri"/>
+              </a:rPr>
+              <a:t>Cost: 1 px accuracy drops to</a:t>
+            </a:r>
+          </a:p>
+          <a:p>
+            <a:pPr>
+              <a:lnSpc>
+                <a:spcPct val="100000"/>
+              </a:lnSpc>
+            </a:pPr>
+            <a:r>
+              <a:rPr sz="1200" b="0">
+                <a:solidFill>
+                  <a:srgbClr val="20242B"/>
+                </a:solidFill>
+                <a:latin typeface="Calibri"/>
+              </a:rPr>
+              <a:t>69.7% (v2: 77.6%).</a:t>
             </a:r>
           </a:p>
         </p:txBody>
@@ -6321,7 +9014,7 @@
         </p:nvSpPr>
         <p:spPr>
           <a:xfrm>
-            <a:off x="960120" y="5806440"/>
+            <a:off x="960120" y="5779008"/>
             <a:ext cx="10332720" cy="548640"/>
           </a:xfrm>
           <a:prstGeom prst="rect">
@@ -6335,6 +9028,11 @@
           </a:bodyPr>
           <a:lstStyle/>
           <a:p>
+            <a:pPr>
+              <a:lnSpc>
+                <a:spcPct val="100000"/>
+              </a:lnSpc>
+            </a:pPr>
             <a:r>
               <a:rPr sz="1150" b="1">
                 <a:solidFill>
@@ -6342,7 +9040,7 @@
                 </a:solidFill>
                 <a:latin typeface="Calibri"/>
               </a:rPr>
-              <a:t>Takeaway   For sparse workloads (registration, tracking, mapping) v3 is strictly cheaper; parity latency, fewer params, O(N) scaling.</a:t>
+              <a:t>Takeaway   The decoder generalizes: trained without a single driving frame, it outperforms v2 on driving data.</a:t>
             </a:r>
           </a:p>
         </p:txBody>
@@ -6369,6 +9067,11 @@
           </a:bodyPr>
           <a:lstStyle/>
           <a:p>
+            <a:pPr>
+              <a:lnSpc>
+                <a:spcPct val="100000"/>
+              </a:lnSpc>
+            </a:pPr>
             <a:r>
               <a:rPr sz="900" b="0">
                 <a:solidFill>
@@ -6376,7 +9079,7 @@
                 </a:solidFill>
                 <a:latin typeface="Calibri"/>
               </a:rPr>
-              <a:t>NeuFlow v3  ·  status</a:t>
+              <a:t>NeuFlow v3 · status report</a:t>
             </a:r>
           </a:p>
         </p:txBody>
@@ -6403,6 +9106,11 @@
           </a:bodyPr>
           <a:lstStyle/>
           <a:p>
+            <a:pPr>
+              <a:lnSpc>
+                <a:spcPct val="100000"/>
+              </a:lnSpc>
+            </a:pPr>
             <a:r>
               <a:rPr sz="900" b="0">
                 <a:solidFill>
@@ -6410,7 +9118,7 @@
                 </a:solidFill>
                 <a:latin typeface="Calibri"/>
               </a:rPr>
-              <a:t>6</a:t>
+              <a:t>7</a:t>
             </a:r>
           </a:p>
         </p:txBody>
@@ -6442,7 +9150,7 @@
         <p:spPr>
           <a:xfrm>
             <a:off x="685800" y="384048"/>
-            <a:ext cx="10058400" cy="274320"/>
+            <a:ext cx="10515600" cy="274320"/>
           </a:xfrm>
           <a:prstGeom prst="rect">
             <a:avLst/>
@@ -6455,6 +9163,11 @@
           </a:bodyPr>
           <a:lstStyle/>
           <a:p>
+            <a:pPr>
+              <a:lnSpc>
+                <a:spcPct val="100000"/>
+              </a:lnSpc>
+            </a:pPr>
             <a:r>
               <a:rPr sz="1050" b="1">
                 <a:solidFill>
@@ -6462,7 +9175,7 @@
                 </a:solidFill>
                 <a:latin typeface="Calibri"/>
               </a:rPr>
-              <a:t>INTERFACE</a:t>
+              <a:t>RESULTS · SUMMARY</a:t>
             </a:r>
           </a:p>
         </p:txBody>
@@ -6476,7 +9189,7 @@
         <p:spPr>
           <a:xfrm>
             <a:off x="667512" y="658368"/>
-            <a:ext cx="10789920" cy="731520"/>
+            <a:ext cx="10881360" cy="731520"/>
           </a:xfrm>
           <a:prstGeom prst="rect">
             <a:avLst/>
@@ -6489,6 +9202,11 @@
           </a:bodyPr>
           <a:lstStyle/>
           <a:p>
+            <a:pPr>
+              <a:lnSpc>
+                <a:spcPct val="100000"/>
+              </a:lnSpc>
+            </a:pPr>
             <a:r>
               <a:rPr sz="2400" b="1">
                 <a:solidFill>
@@ -6496,181 +9214,14 @@
                 </a:solidFill>
                 <a:latin typeface="Calibri"/>
               </a:rPr>
-              <a:t>How querying works — sizes, API, interactivity</a:t>
-            </a:r>
-          </a:p>
-        </p:txBody>
-      </p:sp>
-      <p:sp>
-        <p:nvSpPr>
-          <p:cNvPr id="4" name="TextBox 3"/>
-          <p:cNvSpPr txBox="1"/>
-          <p:nvPr/>
-        </p:nvSpPr>
-        <p:spPr>
-          <a:xfrm>
-            <a:off x="685800" y="1554480"/>
-            <a:ext cx="5760720" cy="2194560"/>
-          </a:xfrm>
-          <a:prstGeom prst="rect">
-            <a:avLst/>
-          </a:prstGeom>
-          <a:noFill/>
-        </p:spPr>
-        <p:txBody>
-          <a:bodyPr wrap="square">
-            <a:spAutoFit/>
-          </a:bodyPr>
-          <a:lstStyle/>
-          <a:p>
-            <a:r>
-              <a:rPr sz="1200" b="0">
-                <a:solidFill>
-                  <a:srgbClr val="20242B"/>
-                </a:solidFill>
-                <a:latin typeface="Calibri"/>
-              </a:rPr>
-              <a:t>Query = one continuous (x, y). N is free: 1 click to 479,232</a:t>
-            </a:r>
-          </a:p>
-          <a:p>
-            <a:r>
-              <a:rPr sz="1200" b="0">
-                <a:solidFill>
-                  <a:srgbClr val="20242B"/>
-                </a:solidFill>
-                <a:latin typeface="Calibri"/>
-              </a:rPr>
-              <a:t>(= dense at 384x1248). Sub-pixel coords are first-class.</a:t>
-            </a:r>
-          </a:p>
-          <a:p>
-            <a:r>
-              <a:rPr sz="1200" b="0">
-                <a:solidFill>
-                  <a:srgbClr val="20242B"/>
-                </a:solidFill>
-                <a:latin typeface="Calibri"/>
-              </a:rPr>
-              <a:t/>
-            </a:r>
-          </a:p>
-          <a:p>
-            <a:r>
-              <a:rPr sz="1200" b="0">
-                <a:solidFill>
-                  <a:srgbClr val="20242B"/>
-                </a:solidFill>
-                <a:latin typeface="Calibri"/>
-              </a:rPr>
-              <a:t>state = model.infer_coarse_state(img0, img1)   # 33 ms, once</a:t>
-            </a:r>
-          </a:p>
-          <a:p>
-            <a:r>
-              <a:rPr sz="1200" b="0">
-                <a:solidFill>
-                  <a:srgbClr val="20242B"/>
-                </a:solidFill>
-                <a:latin typeface="Calibri"/>
-              </a:rPr>
-              <a:t>flow  = model.decode_queries(state, query_coords=q)</a:t>
-            </a:r>
-          </a:p>
-          <a:p>
-            <a:r>
-              <a:rPr sz="1200" b="0">
-                <a:solidFill>
-                  <a:srgbClr val="20242B"/>
-                </a:solidFill>
-                <a:latin typeface="Calibri"/>
-              </a:rPr>
-              <a:t>        # q: [B, N, 2] pixels -&gt; [B, N, 2] flow, 1.6 ms</a:t>
-            </a:r>
-          </a:p>
-          <a:p>
-            <a:r>
-              <a:rPr sz="1200" b="0">
-                <a:solidFill>
-                  <a:srgbClr val="20242B"/>
-                </a:solidFill>
-                <a:latin typeface="Calibri"/>
-              </a:rPr>
-              <a:t>        # or target_h/w (any resolution), or adaptive_n</a:t>
-            </a:r>
-          </a:p>
-        </p:txBody>
-      </p:sp>
-      <p:sp>
-        <p:nvSpPr>
-          <p:cNvPr id="5" name="TextBox 4"/>
-          <p:cNvSpPr txBox="1"/>
-          <p:nvPr/>
-        </p:nvSpPr>
-        <p:spPr>
-          <a:xfrm>
-            <a:off x="685800" y="3794760"/>
-            <a:ext cx="5760720" cy="1828800"/>
-          </a:xfrm>
-          <a:prstGeom prst="rect">
-            <a:avLst/>
-          </a:prstGeom>
-          <a:noFill/>
-        </p:spPr>
-        <p:txBody>
-          <a:bodyPr wrap="square">
-            <a:spAutoFit/>
-          </a:bodyPr>
-          <a:lstStyle/>
-          <a:p>
-            <a:r>
-              <a:rPr sz="1200" b="0">
-                <a:solidFill>
-                  <a:srgbClr val="20242B"/>
-                </a:solidFill>
-                <a:latin typeface="Calibri"/>
-              </a:rPr>
-              <a:t>Training setup: batch 4 (8 GB VRAM) · 4,096 queries/image</a:t>
-            </a:r>
-          </a:p>
-          <a:p>
-            <a:r>
-              <a:rPr sz="1200" b="0">
-                <a:solidFill>
-                  <a:srgbClr val="20242B"/>
-                </a:solidFill>
-                <a:latin typeface="Calibri"/>
-              </a:rPr>
-              <a:t>(3.1% of crop, half at motion boundaries) · datasets:</a:t>
-            </a:r>
-          </a:p>
-          <a:p>
-            <a:r>
-              <a:rPr sz="1200" b="0">
-                <a:solidFill>
-                  <a:srgbClr val="20242B"/>
-                </a:solidFill>
-                <a:latin typeface="Calibri"/>
-              </a:rPr>
-              <a:t>VKITTI2 6-variant (12,726 pairs) + FlyingChairs (22,232)</a:t>
-            </a:r>
-          </a:p>
-          <a:p>
-            <a:r>
-              <a:rPr sz="1200" b="0">
-                <a:solidFill>
-                  <a:srgbClr val="20242B"/>
-                </a:solidFill>
-                <a:latin typeface="Calibri"/>
-              </a:rPr>
-              <a:t>· AdamW OneCycle 2e-4 · backbone frozen</a:t>
+              <a:t>All training regimes against both references</a:t>
             </a:r>
           </a:p>
         </p:txBody>
       </p:sp>
       <p:pic>
         <p:nvPicPr>
-          <p:cNvPr id="6" name="Picture 5" descr="query_gui_selftest.png"/>
+          <p:cNvPr id="4" name="Picture 3" descr="epe_by_regime.png"/>
           <p:cNvPicPr>
             <a:picLocks noChangeAspect="1"/>
           </p:cNvPicPr>
@@ -6684,8 +9235,8 @@
         </p:blipFill>
         <p:spPr>
           <a:xfrm>
-            <a:off x="6675120" y="1554480"/>
-            <a:ext cx="4846320" cy="1463261"/>
+            <a:off x="685800" y="1554480"/>
+            <a:ext cx="6766560" cy="3425098"/>
           </a:xfrm>
           <a:prstGeom prst="rect">
             <a:avLst/>
@@ -6694,14 +9245,14 @@
       </p:pic>
       <p:sp>
         <p:nvSpPr>
-          <p:cNvPr id="7" name="TextBox 6"/>
+          <p:cNvPr id="5" name="TextBox 4"/>
           <p:cNvSpPr txBox="1"/>
           <p:nvPr/>
         </p:nvSpPr>
         <p:spPr>
           <a:xfrm>
-            <a:off x="6675120" y="3291840"/>
-            <a:ext cx="4846320" cy="1463040"/>
+            <a:off x="7772400" y="1645920"/>
+            <a:ext cx="3840480" cy="3931920"/>
           </a:xfrm>
           <a:prstGeom prst="rect">
             <a:avLst/>
@@ -6714,60 +9265,272 @@
           </a:bodyPr>
           <a:lstStyle/>
           <a:p>
-            <a:r>
-              <a:rPr sz="1100" b="0">
-                <a:solidFill>
-                  <a:srgbClr val="20242B"/>
-                </a:solidFill>
-                <a:latin typeface="Calibri"/>
-              </a:rPr>
-              <a:t>Interactive query selector (PyQt5, working):</a:t>
-            </a:r>
-          </a:p>
-          <a:p>
-            <a:r>
-              <a:rPr sz="1100" b="0">
-                <a:solidFill>
-                  <a:srgbClr val="20242B"/>
-                </a:solidFill>
-                <a:latin typeface="Calibri"/>
-              </a:rPr>
-              <a:t>click = flow at that pixel in ~1.6 ms; G = 32x32 grid.</a:t>
-            </a:r>
-          </a:p>
-          <a:p>
-            <a:r>
-              <a:rPr sz="1100" b="0">
-                <a:solidFill>
-                  <a:srgbClr val="20242B"/>
-                </a:solidFill>
-                <a:latin typeface="Calibri"/>
-              </a:rPr>
-              <a:t>Viable precisely because of the two-pass API —</a:t>
-            </a:r>
-          </a:p>
-          <a:p>
-            <a:r>
-              <a:rPr sz="1100" b="0">
-                <a:solidFill>
-                  <a:srgbClr val="20242B"/>
-                </a:solidFill>
-                <a:latin typeface="Calibri"/>
-              </a:rPr>
-              <a:t>v2 would recompute the full frame per click.</a:t>
-            </a:r>
-          </a:p>
-        </p:txBody>
-      </p:sp>
-      <p:sp>
-        <p:nvSpPr>
-          <p:cNvPr id="8" name="TextBox 7"/>
+            <a:pPr>
+              <a:lnSpc>
+                <a:spcPct val="100000"/>
+              </a:lnSpc>
+            </a:pPr>
+            <a:r>
+              <a:rPr sz="1200" b="0">
+                <a:solidFill>
+                  <a:srgbClr val="20242B"/>
+                </a:solidFill>
+                <a:latin typeface="Calibri"/>
+              </a:rPr>
+              <a:t>Two informative negative results</a:t>
+            </a:r>
+          </a:p>
+          <a:p>
+            <a:pPr>
+              <a:lnSpc>
+                <a:spcPct val="100000"/>
+              </a:lnSpc>
+            </a:pPr>
+            <a:r>
+              <a:rPr sz="1200" b="0">
+                <a:solidFill>
+                  <a:srgbClr val="20242B"/>
+                </a:solidFill>
+                <a:latin typeface="Calibri"/>
+              </a:rPr>
+              <a:t/>
+            </a:r>
+          </a:p>
+          <a:p>
+            <a:pPr>
+              <a:lnSpc>
+                <a:spcPct val="100000"/>
+              </a:lnSpc>
+            </a:pPr>
+            <a:r>
+              <a:rPr sz="1200" b="0">
+                <a:solidFill>
+                  <a:srgbClr val="20242B"/>
+                </a:solidFill>
+                <a:latin typeface="Calibri"/>
+              </a:rPr>
+              <a:t>Sequential finetuning (chairs, then VKITTI2)</a:t>
+            </a:r>
+          </a:p>
+          <a:p>
+            <a:pPr>
+              <a:lnSpc>
+                <a:spcPct val="100000"/>
+              </a:lnSpc>
+            </a:pPr>
+            <a:r>
+              <a:rPr sz="1200" b="0">
+                <a:solidFill>
+                  <a:srgbClr val="20242B"/>
+                </a:solidFill>
+                <a:latin typeface="Calibri"/>
+              </a:rPr>
+              <a:t>reached 2.50 px — worse than either parent.</a:t>
+            </a:r>
+          </a:p>
+          <a:p>
+            <a:pPr>
+              <a:lnSpc>
+                <a:spcPct val="100000"/>
+              </a:lnSpc>
+            </a:pPr>
+            <a:r>
+              <a:rPr sz="1200" b="0">
+                <a:solidFill>
+                  <a:srgbClr val="20242B"/>
+                </a:solidFill>
+                <a:latin typeface="Calibri"/>
+              </a:rPr>
+              <a:t>The second dataset overwrote what the first</a:t>
+            </a:r>
+          </a:p>
+          <a:p>
+            <a:pPr>
+              <a:lnSpc>
+                <a:spcPct val="100000"/>
+              </a:lnSpc>
+            </a:pPr>
+            <a:r>
+              <a:rPr sz="1200" b="0">
+                <a:solidFill>
+                  <a:srgbClr val="20242B"/>
+                </a:solidFill>
+                <a:latin typeface="Calibri"/>
+              </a:rPr>
+              <a:t>taught. Remedy under test: joint sampling</a:t>
+            </a:r>
+          </a:p>
+          <a:p>
+            <a:pPr>
+              <a:lnSpc>
+                <a:spcPct val="100000"/>
+              </a:lnSpc>
+            </a:pPr>
+            <a:r>
+              <a:rPr sz="1200" b="0">
+                <a:solidFill>
+                  <a:srgbClr val="20242B"/>
+                </a:solidFill>
+                <a:latin typeface="Calibri"/>
+              </a:rPr>
+              <a:t>from both datasets in every batch.</a:t>
+            </a:r>
+          </a:p>
+          <a:p>
+            <a:pPr>
+              <a:lnSpc>
+                <a:spcPct val="100000"/>
+              </a:lnSpc>
+            </a:pPr>
+            <a:r>
+              <a:rPr sz="1200" b="0">
+                <a:solidFill>
+                  <a:srgbClr val="20242B"/>
+                </a:solidFill>
+                <a:latin typeface="Calibri"/>
+              </a:rPr>
+              <a:t/>
+            </a:r>
+          </a:p>
+          <a:p>
+            <a:pPr>
+              <a:lnSpc>
+                <a:spcPct val="100000"/>
+              </a:lnSpc>
+            </a:pPr>
+            <a:r>
+              <a:rPr sz="1200" b="0">
+                <a:solidFill>
+                  <a:srgbClr val="20242B"/>
+                </a:solidFill>
+                <a:latin typeface="Calibri"/>
+              </a:rPr>
+              <a:t>Fourier position encoding changed nothing</a:t>
+            </a:r>
+          </a:p>
+          <a:p>
+            <a:pPr>
+              <a:lnSpc>
+                <a:spcPct val="100000"/>
+              </a:lnSpc>
+            </a:pPr>
+            <a:r>
+              <a:rPr sz="1200" b="0">
+                <a:solidFill>
+                  <a:srgbClr val="20242B"/>
+                </a:solidFill>
+                <a:latin typeface="Calibri"/>
+              </a:rPr>
+              <a:t>(2.288 vs 2.275 px; 1 px accuracy identical).</a:t>
+            </a:r>
+          </a:p>
+          <a:p>
+            <a:pPr>
+              <a:lnSpc>
+                <a:spcPct val="100000"/>
+              </a:lnSpc>
+            </a:pPr>
+            <a:r>
+              <a:rPr sz="1200" b="0">
+                <a:solidFill>
+                  <a:srgbClr val="20242B"/>
+                </a:solidFill>
+                <a:latin typeface="Calibri"/>
+              </a:rPr>
+              <a:t>The sub-pixel gap is therefore not caused by</a:t>
+            </a:r>
+          </a:p>
+          <a:p>
+            <a:pPr>
+              <a:lnSpc>
+                <a:spcPct val="100000"/>
+              </a:lnSpc>
+            </a:pPr>
+            <a:r>
+              <a:rPr sz="1200" b="0">
+                <a:solidFill>
+                  <a:srgbClr val="20242B"/>
+                </a:solidFill>
+                <a:latin typeface="Calibri"/>
+              </a:rPr>
+              <a:t>missing positional information — one of two</a:t>
+            </a:r>
+          </a:p>
+          <a:p>
+            <a:pPr>
+              <a:lnSpc>
+                <a:spcPct val="100000"/>
+              </a:lnSpc>
+            </a:pPr>
+            <a:r>
+              <a:rPr sz="1200" b="0">
+                <a:solidFill>
+                  <a:srgbClr val="20242B"/>
+                </a:solidFill>
+                <a:latin typeface="Calibri"/>
+              </a:rPr>
+              <a:t>candidate explanations eliminated by a</a:t>
+            </a:r>
+          </a:p>
+          <a:p>
+            <a:pPr>
+              <a:lnSpc>
+                <a:spcPct val="100000"/>
+              </a:lnSpc>
+            </a:pPr>
+            <a:r>
+              <a:rPr sz="1200" b="0">
+                <a:solidFill>
+                  <a:srgbClr val="20242B"/>
+                </a:solidFill>
+                <a:latin typeface="Calibri"/>
+              </a:rPr>
+              <a:t>single controlled run.</a:t>
+            </a:r>
+          </a:p>
+          <a:p>
+            <a:pPr>
+              <a:lnSpc>
+                <a:spcPct val="100000"/>
+              </a:lnSpc>
+            </a:pPr>
+            <a:r>
+              <a:rPr sz="1200" b="0">
+                <a:solidFill>
+                  <a:srgbClr val="20242B"/>
+                </a:solidFill>
+                <a:latin typeface="Calibri"/>
+              </a:rPr>
+              <a:t/>
+            </a:r>
+          </a:p>
+          <a:p>
+            <a:pPr>
+              <a:lnSpc>
+                <a:spcPct val="100000"/>
+              </a:lnSpc>
+            </a:pPr>
+            <a:r>
+              <a:rPr sz="1200" b="0">
+                <a:solidFill>
+                  <a:srgbClr val="20242B"/>
+                </a:solidFill>
+                <a:latin typeface="Calibri"/>
+              </a:rPr>
+              <a:t>Mixed-dataset training: training in progress.</a:t>
+            </a:r>
+          </a:p>
+        </p:txBody>
+      </p:sp>
+      <p:sp>
+        <p:nvSpPr>
+          <p:cNvPr id="6" name="TextBox 5"/>
           <p:cNvSpPr txBox="1"/>
           <p:nvPr/>
         </p:nvSpPr>
         <p:spPr>
           <a:xfrm>
-            <a:off x="960120" y="5760720"/>
+            <a:off x="960120" y="5779008"/>
             <a:ext cx="10332720" cy="548640"/>
           </a:xfrm>
           <a:prstGeom prst="rect">
@@ -6781,6 +9544,11 @@
           </a:bodyPr>
           <a:lstStyle/>
           <a:p>
+            <a:pPr>
+              <a:lnSpc>
+                <a:spcPct val="100000"/>
+              </a:lnSpc>
+            </a:pPr>
             <a:r>
               <a:rPr sz="1150" b="1">
                 <a:solidFill>
@@ -6788,14 +9556,14 @@
                 </a:solidFill>
                 <a:latin typeface="Calibri"/>
               </a:rPr>
-              <a:t>Takeaway   scripts/query_gui.py demonstrates flow-on-demand; the same API serves robots and humans.</a:t>
-            </a:r>
-          </a:p>
-        </p:txBody>
-      </p:sp>
-      <p:sp>
-        <p:nvSpPr>
-          <p:cNvPr id="9" name="TextBox 8"/>
+              <a:t>Takeaway   Each experiment either improved the model or eliminated a hypothesis; none was wasted compute.</a:t>
+            </a:r>
+          </a:p>
+        </p:txBody>
+      </p:sp>
+      <p:sp>
+        <p:nvSpPr>
+          <p:cNvPr id="7" name="TextBox 6"/>
           <p:cNvSpPr txBox="1"/>
           <p:nvPr/>
         </p:nvSpPr>
@@ -6815,6 +9583,11 @@
           </a:bodyPr>
           <a:lstStyle/>
           <a:p>
+            <a:pPr>
+              <a:lnSpc>
+                <a:spcPct val="100000"/>
+              </a:lnSpc>
+            </a:pPr>
             <a:r>
               <a:rPr sz="900" b="0">
                 <a:solidFill>
@@ -6822,14 +9595,14 @@
                 </a:solidFill>
                 <a:latin typeface="Calibri"/>
               </a:rPr>
-              <a:t>NeuFlow v3  ·  status</a:t>
-            </a:r>
-          </a:p>
-        </p:txBody>
-      </p:sp>
-      <p:sp>
-        <p:nvSpPr>
-          <p:cNvPr id="10" name="TextBox 9"/>
+              <a:t>NeuFlow v3 · status report</a:t>
+            </a:r>
+          </a:p>
+        </p:txBody>
+      </p:sp>
+      <p:sp>
+        <p:nvSpPr>
+          <p:cNvPr id="8" name="TextBox 7"/>
           <p:cNvSpPr txBox="1"/>
           <p:nvPr/>
         </p:nvSpPr>
@@ -6849,6 +9622,11 @@
           </a:bodyPr>
           <a:lstStyle/>
           <a:p>
+            <a:pPr>
+              <a:lnSpc>
+                <a:spcPct val="100000"/>
+              </a:lnSpc>
+            </a:pPr>
             <a:r>
               <a:rPr sz="900" b="0">
                 <a:solidFill>
@@ -6888,7 +9666,7 @@
         <p:spPr>
           <a:xfrm>
             <a:off x="685800" y="384048"/>
-            <a:ext cx="10058400" cy="274320"/>
+            <a:ext cx="10515600" cy="274320"/>
           </a:xfrm>
           <a:prstGeom prst="rect">
             <a:avLst/>
@@ -6901,6 +9679,11 @@
           </a:bodyPr>
           <a:lstStyle/>
           <a:p>
+            <a:pPr>
+              <a:lnSpc>
+                <a:spcPct val="100000"/>
+              </a:lnSpc>
+            </a:pPr>
             <a:r>
               <a:rPr sz="1050" b="1">
                 <a:solidFill>
@@ -6908,7 +9691,7 @@
                 </a:solidFill>
                 <a:latin typeface="Calibri"/>
               </a:rPr>
-              <a:t>OBJECTIVES</a:t>
+              <a:t>EFFICIENCY · RTX 4060 LAPTOP, FP16, 384×1248</a:t>
             </a:r>
           </a:p>
         </p:txBody>
@@ -6922,7 +9705,7 @@
         <p:spPr>
           <a:xfrm>
             <a:off x="667512" y="658368"/>
-            <a:ext cx="10789920" cy="731520"/>
+            <a:ext cx="10881360" cy="731520"/>
           </a:xfrm>
           <a:prstGeom prst="rect">
             <a:avLst/>
@@ -6935,6 +9718,11 @@
           </a:bodyPr>
           <a:lstStyle/>
           <a:p>
+            <a:pPr>
+              <a:lnSpc>
+                <a:spcPct val="100000"/>
+              </a:lnSpc>
+            </a:pPr>
             <a:r>
               <a:rPr sz="2400" b="1">
                 <a:solidFill>
@@ -6942,21 +9730,45 @@
                 </a:solidFill>
                 <a:latin typeface="Calibri"/>
               </a:rPr>
-              <a:t>Better EPE at less compute, edge-capable — where we stand</a:t>
-            </a:r>
-          </a:p>
-        </p:txBody>
-      </p:sp>
-      <p:sp>
-        <p:nvSpPr>
-          <p:cNvPr id="4" name="TextBox 3"/>
+              <a:t>Compute cost: v2 and v3 measured under identical conditions</a:t>
+            </a:r>
+          </a:p>
+        </p:txBody>
+      </p:sp>
+      <p:pic>
+        <p:nvPicPr>
+          <p:cNvPr id="4" name="Picture 3" descr="latency_v2_v3.png"/>
+          <p:cNvPicPr>
+            <a:picLocks noChangeAspect="1"/>
+          </p:cNvPicPr>
+          <p:nvPr/>
+        </p:nvPicPr>
+        <p:blipFill>
+          <a:blip r:embed="rId2"/>
+          <a:stretch>
+            <a:fillRect/>
+          </a:stretch>
+        </p:blipFill>
+        <p:spPr>
+          <a:xfrm>
+            <a:off x="685800" y="1600200"/>
+            <a:ext cx="7863840" cy="3214910"/>
+          </a:xfrm>
+          <a:prstGeom prst="rect">
+            <a:avLst/>
+          </a:prstGeom>
+        </p:spPr>
+      </p:pic>
+      <p:sp>
+        <p:nvSpPr>
+          <p:cNvPr id="5" name="TextBox 4"/>
           <p:cNvSpPr txBox="1"/>
           <p:nvPr/>
         </p:nvSpPr>
         <p:spPr>
           <a:xfrm>
-            <a:off x="685800" y="1737360"/>
-            <a:ext cx="10515600" cy="3566160"/>
+            <a:off x="8778240" y="1691640"/>
+            <a:ext cx="2834640" cy="3931920"/>
           </a:xfrm>
           <a:prstGeom prst="rect">
             <a:avLst/>
@@ -6969,19 +9781,45 @@
           </a:bodyPr>
           <a:lstStyle/>
           <a:p>
-            <a:r>
-              <a:rPr sz="1400" b="0">
-                <a:solidFill>
-                  <a:srgbClr val="20242B"/>
-                </a:solidFill>
-                <a:latin typeface="Calibri"/>
-              </a:rPr>
-              <a:t>Beat v2 mean EPE                        DONE — 2.275 vs 2.324 (chairs-only training)</a:t>
-            </a:r>
-          </a:p>
-          <a:p>
-            <a:r>
-              <a:rPr sz="1400" b="0">
+            <a:pPr>
+              <a:lnSpc>
+                <a:spcPct val="100000"/>
+              </a:lnSpc>
+            </a:pPr>
+            <a:r>
+              <a:rPr sz="1200" b="0">
+                <a:solidFill>
+                  <a:srgbClr val="20242B"/>
+                </a:solidFill>
+                <a:latin typeface="Calibri"/>
+              </a:rPr>
+              <a:t>Parameters</a:t>
+            </a:r>
+          </a:p>
+          <a:p>
+            <a:pPr>
+              <a:lnSpc>
+                <a:spcPct val="100000"/>
+              </a:lnSpc>
+            </a:pPr>
+            <a:r>
+              <a:rPr sz="1200" b="0">
+                <a:solidFill>
+                  <a:srgbClr val="20242B"/>
+                </a:solidFill>
+                <a:latin typeface="Calibri"/>
+              </a:rPr>
+              <a:t>9.03 M (v2) → 7.83 M (v3)</a:t>
+            </a:r>
+          </a:p>
+          <a:p>
+            <a:pPr>
+              <a:lnSpc>
+                <a:spcPct val="100000"/>
+              </a:lnSpc>
+            </a:pPr>
+            <a:r>
+              <a:rPr sz="1200" b="0">
                 <a:solidFill>
                   <a:srgbClr val="20242B"/>
                 </a:solidFill>
@@ -6991,19 +9829,77 @@
             </a:r>
           </a:p>
           <a:p>
-            <a:r>
-              <a:rPr sz="1400" b="0">
-                <a:solidFill>
-                  <a:srgbClr val="20242B"/>
-                </a:solidFill>
-                <a:latin typeface="Calibri"/>
-              </a:rPr>
-              <a:t>Less compute (sparse use case)          DONE — ~35 ms total, O(N) queries, 13% fewer params, 2.2 GB VRAM</a:t>
-            </a:r>
-          </a:p>
-          <a:p>
-            <a:r>
-              <a:rPr sz="1400" b="0">
+            <a:pPr>
+              <a:lnSpc>
+                <a:spcPct val="100000"/>
+              </a:lnSpc>
+            </a:pPr>
+            <a:r>
+              <a:rPr sz="1200" b="0">
+                <a:solidFill>
+                  <a:srgbClr val="20242B"/>
+                </a:solidFill>
+                <a:latin typeface="Calibri"/>
+              </a:rPr>
+              <a:t>Sparse total: ~35 ms —</a:t>
+            </a:r>
+          </a:p>
+          <a:p>
+            <a:pPr>
+              <a:lnSpc>
+                <a:spcPct val="100000"/>
+              </a:lnSpc>
+            </a:pPr>
+            <a:r>
+              <a:rPr sz="1200" b="0">
+                <a:solidFill>
+                  <a:srgbClr val="20242B"/>
+                </a:solidFill>
+                <a:latin typeface="Calibri"/>
+              </a:rPr>
+              <a:t>parity with v2’s full frame,</a:t>
+            </a:r>
+          </a:p>
+          <a:p>
+            <a:pPr>
+              <a:lnSpc>
+                <a:spcPct val="100000"/>
+              </a:lnSpc>
+            </a:pPr>
+            <a:r>
+              <a:rPr sz="1200" b="0">
+                <a:solidFill>
+                  <a:srgbClr val="20242B"/>
+                </a:solidFill>
+                <a:latin typeface="Calibri"/>
+              </a:rPr>
+              <a:t>while answering only what</a:t>
+            </a:r>
+          </a:p>
+          <a:p>
+            <a:pPr>
+              <a:lnSpc>
+                <a:spcPct val="100000"/>
+              </a:lnSpc>
+            </a:pPr>
+            <a:r>
+              <a:rPr sz="1200" b="0">
+                <a:solidFill>
+                  <a:srgbClr val="20242B"/>
+                </a:solidFill>
+                <a:latin typeface="Calibri"/>
+              </a:rPr>
+              <a:t>was asked.</a:t>
+            </a:r>
+          </a:p>
+          <a:p>
+            <a:pPr>
+              <a:lnSpc>
+                <a:spcPct val="100000"/>
+              </a:lnSpc>
+            </a:pPr>
+            <a:r>
+              <a:rPr sz="1200" b="0">
                 <a:solidFill>
                   <a:srgbClr val="20242B"/>
                 </a:solidFill>
@@ -7013,30 +9909,93 @@
             </a:r>
           </a:p>
           <a:p>
-            <a:r>
-              <a:rPr sz="1400" b="0">
-                <a:solidFill>
-                  <a:srgbClr val="20242B"/>
-                </a:solidFill>
-                <a:latin typeface="Calibri"/>
-              </a:rPr>
-              <a:t>Sub-pixel precision parity (1px acc)    OPEN — PE ablation was null: gap is not positional signal.</a:t>
-            </a:r>
-          </a:p>
-          <a:p>
-            <a:r>
-              <a:rPr sz="1400" b="0">
-                <a:solidFill>
-                  <a:srgbClr val="20242B"/>
-                </a:solidFill>
-                <a:latin typeface="Calibri"/>
-              </a:rPr>
-              <a:t>                                        Next hypothesis: 1/8 coarse-flow resolution bound; test via vkitti2+PE or finer scale</a:t>
-            </a:r>
-          </a:p>
-          <a:p>
-            <a:r>
-              <a:rPr sz="1400" b="0">
+            <a:pPr>
+              <a:lnSpc>
+                <a:spcPct val="100000"/>
+              </a:lnSpc>
+            </a:pPr>
+            <a:r>
+              <a:rPr sz="1200" b="0">
+                <a:solidFill>
+                  <a:srgbClr val="20242B"/>
+                </a:solidFill>
+                <a:latin typeface="Calibri"/>
+              </a:rPr>
+              <a:t>Each additional query batch</a:t>
+            </a:r>
+          </a:p>
+          <a:p>
+            <a:pPr>
+              <a:lnSpc>
+                <a:spcPct val="100000"/>
+              </a:lnSpc>
+            </a:pPr>
+            <a:r>
+              <a:rPr sz="1200" b="0">
+                <a:solidFill>
+                  <a:srgbClr val="20242B"/>
+                </a:solidFill>
+                <a:latin typeface="Calibri"/>
+              </a:rPr>
+              <a:t>on a processed pair costs</a:t>
+            </a:r>
+          </a:p>
+          <a:p>
+            <a:pPr>
+              <a:lnSpc>
+                <a:spcPct val="100000"/>
+              </a:lnSpc>
+            </a:pPr>
+            <a:r>
+              <a:rPr sz="1200" b="0">
+                <a:solidFill>
+                  <a:srgbClr val="20242B"/>
+                </a:solidFill>
+                <a:latin typeface="Calibri"/>
+              </a:rPr>
+              <a:t>1.6 ms; v2 must recompute</a:t>
+            </a:r>
+          </a:p>
+          <a:p>
+            <a:pPr>
+              <a:lnSpc>
+                <a:spcPct val="100000"/>
+              </a:lnSpc>
+            </a:pPr>
+            <a:r>
+              <a:rPr sz="1200" b="0">
+                <a:solidFill>
+                  <a:srgbClr val="20242B"/>
+                </a:solidFill>
+                <a:latin typeface="Calibri"/>
+              </a:rPr>
+              <a:t>everything (37 ms) to</a:t>
+            </a:r>
+          </a:p>
+          <a:p>
+            <a:pPr>
+              <a:lnSpc>
+                <a:spcPct val="100000"/>
+              </a:lnSpc>
+            </a:pPr>
+            <a:r>
+              <a:rPr sz="1200" b="0">
+                <a:solidFill>
+                  <a:srgbClr val="20242B"/>
+                </a:solidFill>
+                <a:latin typeface="Calibri"/>
+              </a:rPr>
+              <a:t>answer anything new.</a:t>
+            </a:r>
+          </a:p>
+          <a:p>
+            <a:pPr>
+              <a:lnSpc>
+                <a:spcPct val="100000"/>
+              </a:lnSpc>
+            </a:pPr>
+            <a:r>
+              <a:rPr sz="1200" b="0">
                 <a:solidFill>
                   <a:srgbClr val="20242B"/>
                 </a:solidFill>
@@ -7046,49 +10005,64 @@
             </a:r>
           </a:p>
           <a:p>
-            <a:r>
-              <a:rPr sz="1400" b="0">
-                <a:solidFill>
-                  <a:srgbClr val="20242B"/>
-                </a:solidFill>
-                <a:latin typeface="Calibri"/>
-              </a:rPr>
-              <a:t>Combine chairs + vkitti2 strengths      NEXT — mixed-dataset training (forgetting measured and understood)</a:t>
-            </a:r>
-          </a:p>
-          <a:p>
-            <a:r>
-              <a:rPr sz="1400" b="0">
-                <a:solidFill>
-                  <a:srgbClr val="20242B"/>
-                </a:solidFill>
-                <a:latin typeface="Calibri"/>
-              </a:rPr>
-              <a:t/>
-            </a:r>
-          </a:p>
-          <a:p>
-            <a:r>
-              <a:rPr sz="1400" b="0">
-                <a:solidFill>
-                  <a:srgbClr val="20242B"/>
-                </a:solidFill>
-                <a:latin typeface="Calibri"/>
-              </a:rPr>
-              <a:t>Edge-device validation                  NEXT — Jetson Orin benchmark of the two-pass API</a:t>
-            </a:r>
-          </a:p>
-        </p:txBody>
-      </p:sp>
-      <p:sp>
-        <p:nvSpPr>
-          <p:cNvPr id="5" name="TextBox 4"/>
+            <a:pPr>
+              <a:lnSpc>
+                <a:spcPct val="100000"/>
+              </a:lnSpc>
+            </a:pPr>
+            <a:r>
+              <a:rPr sz="1200" b="0">
+                <a:solidFill>
+                  <a:srgbClr val="20242B"/>
+                </a:solidFill>
+                <a:latin typeface="Calibri"/>
+              </a:rPr>
+              <a:t>Dense v3 (327 ms) exists</a:t>
+            </a:r>
+          </a:p>
+          <a:p>
+            <a:pPr>
+              <a:lnSpc>
+                <a:spcPct val="100000"/>
+              </a:lnSpc>
+            </a:pPr>
+            <a:r>
+              <a:rPr sz="1200" b="0">
+                <a:solidFill>
+                  <a:srgbClr val="20242B"/>
+                </a:solidFill>
+                <a:latin typeface="Calibri"/>
+              </a:rPr>
+              <a:t>for evaluation, not for</a:t>
+            </a:r>
+          </a:p>
+          <a:p>
+            <a:pPr>
+              <a:lnSpc>
+                <a:spcPct val="100000"/>
+              </a:lnSpc>
+            </a:pPr>
+            <a:r>
+              <a:rPr sz="1200" b="0">
+                <a:solidFill>
+                  <a:srgbClr val="20242B"/>
+                </a:solidFill>
+                <a:latin typeface="Calibri"/>
+              </a:rPr>
+              <a:t>deployment.</a:t>
+            </a:r>
+          </a:p>
+        </p:txBody>
+      </p:sp>
+      <p:sp>
+        <p:nvSpPr>
+          <p:cNvPr id="6" name="TextBox 5"/>
           <p:cNvSpPr txBox="1"/>
           <p:nvPr/>
         </p:nvSpPr>
         <p:spPr>
           <a:xfrm>
-            <a:off x="960120" y="5760720"/>
+            <a:off x="960120" y="5779008"/>
             <a:ext cx="10332720" cy="548640"/>
           </a:xfrm>
           <a:prstGeom prst="rect">
@@ -7102,6 +10076,11 @@
           </a:bodyPr>
           <a:lstStyle/>
           <a:p>
+            <a:pPr>
+              <a:lnSpc>
+                <a:spcPct val="100000"/>
+              </a:lnSpc>
+            </a:pPr>
             <a:r>
               <a:rPr sz="1150" b="1">
                 <a:solidFill>
@@ -7109,14 +10088,14 @@
                 </a:solidFill>
                 <a:latin typeface="Calibri"/>
               </a:rPr>
-              <a:t>Takeaway   Two of three headline objectives are met; the remaining gap is quantified and has a targeted fix in flight.</a:t>
-            </a:r>
-          </a:p>
-        </p:txBody>
-      </p:sp>
-      <p:sp>
-        <p:nvSpPr>
-          <p:cNvPr id="6" name="TextBox 5"/>
+              <a:t>Takeaway   For sparse workloads v3 is strictly cheaper than v2: equal latency on the first answer, ~20× cheaper on every answer after it.</a:t>
+            </a:r>
+          </a:p>
+        </p:txBody>
+      </p:sp>
+      <p:sp>
+        <p:nvSpPr>
+          <p:cNvPr id="7" name="TextBox 6"/>
           <p:cNvSpPr txBox="1"/>
           <p:nvPr/>
         </p:nvSpPr>
@@ -7136,6 +10115,11 @@
           </a:bodyPr>
           <a:lstStyle/>
           <a:p>
+            <a:pPr>
+              <a:lnSpc>
+                <a:spcPct val="100000"/>
+              </a:lnSpc>
+            </a:pPr>
             <a:r>
               <a:rPr sz="900" b="0">
                 <a:solidFill>
@@ -7143,14 +10127,14 @@
                 </a:solidFill>
                 <a:latin typeface="Calibri"/>
               </a:rPr>
-              <a:t>NeuFlow v3  ·  status</a:t>
-            </a:r>
-          </a:p>
-        </p:txBody>
-      </p:sp>
-      <p:sp>
-        <p:nvSpPr>
-          <p:cNvPr id="7" name="TextBox 6"/>
+              <a:t>NeuFlow v3 · status report</a:t>
+            </a:r>
+          </a:p>
+        </p:txBody>
+      </p:sp>
+      <p:sp>
+        <p:nvSpPr>
+          <p:cNvPr id="8" name="TextBox 7"/>
           <p:cNvSpPr txBox="1"/>
           <p:nvPr/>
         </p:nvSpPr>
@@ -7170,6 +10154,11 @@
           </a:bodyPr>
           <a:lstStyle/>
           <a:p>
+            <a:pPr>
+              <a:lnSpc>
+                <a:spcPct val="100000"/>
+              </a:lnSpc>
+            </a:pPr>
             <a:r>
               <a:rPr sz="900" b="0">
                 <a:solidFill>
@@ -7177,7 +10166,7 @@
                 </a:solidFill>
                 <a:latin typeface="Calibri"/>
               </a:rPr>
-              <a:t>7</a:t>
+              <a:t>9</a:t>
             </a:r>
           </a:p>
         </p:txBody>

--- a/docs/NeuFlow_v3_status.pptx
+++ b/docs/NeuFlow_v3_status.pptx
@@ -3957,7 +3957,7 @@
                 </a:solidFill>
                 <a:latin typeface="Calibri"/>
               </a:rPr>
-              <a:t>Objective 1 — exceed NeuFlow v2’s accuracy.  Met on mean EPE: 2.28 vs 2.32 px, achieved by the</a:t>
+              <a:t>Objective 1 — exceed NeuFlow v2’s accuracy.  Met: 2.18 vs 2.32 px mean EPE (6% better), achieved by</a:t>
             </a:r>
           </a:p>
           <a:p>
@@ -3973,7 +3973,7 @@
                 </a:solidFill>
                 <a:latin typeface="Calibri"/>
               </a:rPr>
-              <a:t>FlyingChairs-trained decoder. Sub-pixel precision (1 px accuracy) remains 5–8 points behind and is the</a:t>
+              <a:t>mixed chairs+VKITTI2 training. Sub-pixel precision is now within 1.2 points of v2 (76.4% vs 77.6%) and</a:t>
             </a:r>
           </a:p>
           <a:p>
@@ -3989,23 +3989,7 @@
                 </a:solidFill>
                 <a:latin typeface="Calibri"/>
               </a:rPr>
-              <a:t>active workstream; position encoding has been ruled out as the cause, focusing attention on coarse-flow</a:t>
-            </a:r>
-          </a:p>
-          <a:p>
-            <a:pPr>
-              <a:lnSpc>
-                <a:spcPct val="100000"/>
-              </a:lnSpc>
-            </a:pPr>
-            <a:r>
-              <a:rPr sz="1300" b="0">
-                <a:solidFill>
-                  <a:srgbClr val="20242B"/>
-                </a:solidFill>
-                <a:latin typeface="Calibri"/>
-              </a:rPr>
-              <a:t>resolution and training-motion statistics.</a:t>
+              <a:t>3 px accuracy is at parity (89.6% vs 89.8%).</a:t>
             </a:r>
           </a:p>
           <a:p>
@@ -4369,7 +4353,7 @@
                 </a:solidFill>
                 <a:latin typeface="Calibri"/>
               </a:rPr>
-              <a:t>Running now: mixed-dataset training</a:t>
+              <a:t>Completed: mixed-dataset training</a:t>
             </a:r>
           </a:p>
           <a:p>
@@ -4433,7 +4417,7 @@
                 </a:solidFill>
                 <a:latin typeface="Calibri"/>
               </a:rPr>
-              <a:t>recipe. Hypothesis: joint exposure preserves the chairs</a:t>
+              <a:t>recipe. Result: hypothesis confirmed — 2.18 px EPE with</a:t>
             </a:r>
           </a:p>
           <a:p>
@@ -4449,7 +4433,7 @@
                 </a:solidFill>
                 <a:latin typeface="Calibri"/>
               </a:rPr>
-              <a:t>error-tail robustness while the driving data restores</a:t>
+              <a:t>76.4% 1 px accuracy; the chairs robustness and the</a:t>
             </a:r>
           </a:p>
           <a:p>
@@ -4465,23 +4449,7 @@
                 </a:solidFill>
                 <a:latin typeface="Calibri"/>
               </a:rPr>
-              <a:t>sub-pixel precision — the combination that sequential</a:t>
-            </a:r>
-          </a:p>
-          <a:p>
-            <a:pPr>
-              <a:lnSpc>
-                <a:spcPct val="100000"/>
-              </a:lnSpc>
-            </a:pPr>
-            <a:r>
-              <a:rPr sz="1250" b="0">
-                <a:solidFill>
-                  <a:srgbClr val="20242B"/>
-                </a:solidFill>
-                <a:latin typeface="Calibri"/>
-              </a:rPr>
-              <a:t>finetuning provably forgot.</a:t>
+              <a:t>driving-data precision coexist under joint sampling.</a:t>
             </a:r>
           </a:p>
           <a:p>
@@ -9517,7 +9485,7 @@
                 </a:solidFill>
                 <a:latin typeface="Calibri"/>
               </a:rPr>
-              <a:t>Mixed-dataset training: training in progress.</a:t>
+              <a:t>Mixed-dataset training: 2.18 px EPE, 76.4% 1 px, 89.6% 3 px — best result to date; both parents’ strengths retained.</a:t>
             </a:r>
           </a:p>
         </p:txBody>

--- a/docs/NeuFlow_v3_status.pptx
+++ b/docs/NeuFlow_v3_status.pptx
@@ -4300,7 +4300,7 @@
         <p:spPr>
           <a:xfrm>
             <a:off x="6675120" y="3246120"/>
-            <a:ext cx="4937760" cy="1554480"/>
+            <a:ext cx="4937760" cy="2286000"/>
           </a:xfrm>
           <a:prstGeom prst="rect">
             <a:avLst/>
@@ -4319,61 +4319,157 @@
               </a:lnSpc>
             </a:pPr>
             <a:r>
-              <a:rPr sz="1100" b="0">
-                <a:solidFill>
-                  <a:srgbClr val="1A1A1A"/>
-                </a:solidFill>
-                <a:latin typeface="Calibri"/>
-              </a:rPr>
-              <a:t>Interactive tool (PyQt5, in the repository): click any pixel</a:t>
-            </a:r>
-          </a:p>
-          <a:p>
-            <a:pPr algn="l">
-              <a:lnSpc>
-                <a:spcPct val="100000"/>
-              </a:lnSpc>
-            </a:pPr>
-            <a:r>
-              <a:rPr sz="1100" b="0">
-                <a:solidFill>
-                  <a:srgbClr val="1A1A1A"/>
-                </a:solidFill>
-                <a:latin typeface="Calibri"/>
-              </a:rPr>
-              <a:t>for its flow; grid, boundary-adaptive, and dense-overlay</a:t>
-            </a:r>
-          </a:p>
-          <a:p>
-            <a:pPr algn="l">
-              <a:lnSpc>
-                <a:spcPct val="100000"/>
-              </a:lnSpc>
-            </a:pPr>
-            <a:r>
-              <a:rPr sz="1100" b="0">
-                <a:solidFill>
-                  <a:srgbClr val="1A1A1A"/>
-                </a:solidFill>
-                <a:latin typeface="Calibri"/>
-              </a:rPr>
-              <a:t>modes; CSV export. Feasible only because of the two-pass</a:t>
-            </a:r>
-          </a:p>
-          <a:p>
-            <a:pPr algn="l">
-              <a:lnSpc>
-                <a:spcPct val="100000"/>
-              </a:lnSpc>
-            </a:pPr>
-            <a:r>
-              <a:rPr sz="1100" b="0">
-                <a:solidFill>
-                  <a:srgbClr val="1A1A1A"/>
-                </a:solidFill>
-                <a:latin typeface="Calibri"/>
-              </a:rPr>
-              <a:t>design — every interaction reuses the cached backbone state.</a:t>
+              <a:rPr sz="1050" b="0">
+                <a:solidFill>
+                  <a:srgbClr val="1A1A1A"/>
+                </a:solidFill>
+                <a:latin typeface="Calibri"/>
+              </a:rPr>
+              <a:t>Interactive tool (PyQt5, in the repository):</a:t>
+            </a:r>
+          </a:p>
+          <a:p>
+            <a:pPr algn="l">
+              <a:lnSpc>
+                <a:spcPct val="100000"/>
+              </a:lnSpc>
+            </a:pPr>
+            <a:r>
+              <a:rPr sz="1050" b="0">
+                <a:solidFill>
+                  <a:srgbClr val="1A1A1A"/>
+                </a:solidFill>
+                <a:latin typeface="Calibri"/>
+              </a:rPr>
+              <a:t>•  Click any pixel for its flow; grid, boundary-adaptive,</a:t>
+            </a:r>
+          </a:p>
+          <a:p>
+            <a:pPr algn="l">
+              <a:lnSpc>
+                <a:spcPct val="100000"/>
+              </a:lnSpc>
+            </a:pPr>
+            <a:r>
+              <a:rPr sz="1050" b="0">
+                <a:solidFill>
+                  <a:srgbClr val="1A1A1A"/>
+                </a:solidFill>
+                <a:latin typeface="Calibri"/>
+              </a:rPr>
+              <a:t>    and dense-overlay modes; CSV export.</a:t>
+            </a:r>
+          </a:p>
+          <a:p>
+            <a:pPr algn="l">
+              <a:lnSpc>
+                <a:spcPct val="100000"/>
+              </a:lnSpc>
+            </a:pPr>
+            <a:r>
+              <a:rPr sz="1050" b="0">
+                <a:solidFill>
+                  <a:srgbClr val="1A1A1A"/>
+                </a:solidFill>
+                <a:latin typeface="Calibri"/>
+              </a:rPr>
+              <a:t>•  Region window: drag a rectangle — flow computed</a:t>
+            </a:r>
+          </a:p>
+          <a:p>
+            <a:pPr algn="l">
+              <a:lnSpc>
+                <a:spcPct val="100000"/>
+              </a:lnSpc>
+            </a:pPr>
+            <a:r>
+              <a:rPr sz="1050" b="0">
+                <a:solidFill>
+                  <a:srgbClr val="1A1A1A"/>
+                </a:solidFill>
+                <a:latin typeface="Calibri"/>
+              </a:rPr>
+              <a:t>    only inside the selection.</a:t>
+            </a:r>
+          </a:p>
+          <a:p>
+            <a:pPr algn="l">
+              <a:lnSpc>
+                <a:spcPct val="100000"/>
+              </a:lnSpc>
+            </a:pPr>
+            <a:r>
+              <a:rPr sz="1050" b="0">
+                <a:solidFill>
+                  <a:srgbClr val="1A1A1A"/>
+                </a:solidFill>
+                <a:latin typeface="Calibri"/>
+              </a:rPr>
+              <a:t>•  Video and YouTube sources with frame stepping and</a:t>
+            </a:r>
+          </a:p>
+          <a:p>
+            <a:pPr algn="l">
+              <a:lnSpc>
+                <a:spcPct val="100000"/>
+              </a:lnSpc>
+            </a:pPr>
+            <a:r>
+              <a:rPr sz="1050" b="0">
+                <a:solidFill>
+                  <a:srgbClr val="1A1A1A"/>
+                </a:solidFill>
+                <a:latin typeface="Calibri"/>
+              </a:rPr>
+              <a:t>    real-time playback: live flow-based motion boxes at</a:t>
+            </a:r>
+          </a:p>
+          <a:p>
+            <a:pPr algn="l">
+              <a:lnSpc>
+                <a:spcPct val="100000"/>
+              </a:lnSpc>
+            </a:pPr>
+            <a:r>
+              <a:rPr sz="1050" b="0">
+                <a:solidFill>
+                  <a:srgbClr val="1A1A1A"/>
+                </a:solidFill>
+                <a:latin typeface="Calibri"/>
+              </a:rPr>
+              <a:t>    47 FPS (640×360), ego-motion compensated.</a:t>
+            </a:r>
+          </a:p>
+          <a:p>
+            <a:pPr algn="l">
+              <a:lnSpc>
+                <a:spcPct val="100000"/>
+              </a:lnSpc>
+            </a:pPr>
+            <a:r>
+              <a:rPr sz="1050" b="0">
+                <a:solidFill>
+                  <a:srgbClr val="1A1A1A"/>
+                </a:solidFill>
+                <a:latin typeface="Calibri"/>
+              </a:rPr>
+              <a:t>•  System-resources tab: live FPS, latency, GPU, VRAM,</a:t>
+            </a:r>
+          </a:p>
+          <a:p>
+            <a:pPr algn="l">
+              <a:lnSpc>
+                <a:spcPct val="100000"/>
+              </a:lnSpc>
+            </a:pPr>
+            <a:r>
+              <a:rPr sz="1050" b="0">
+                <a:solidFill>
+                  <a:srgbClr val="1A1A1A"/>
+                </a:solidFill>
+                <a:latin typeface="Calibri"/>
+              </a:rPr>
+              <a:t>    CPU, RAM graphs — VRAM stays flat while interacting.</a:t>
             </a:r>
           </a:p>
         </p:txBody>

--- a/docs/NeuFlow_v3_status.pptx
+++ b/docs/NeuFlow_v3_status.pptx
@@ -121,6 +121,1546 @@
     </a:lvl9pPr>
   </p:defaultTextStyle>
 </p:presentation>
+</file>
+
+<file path=ppt/notesMasters/notesMaster1.xml><?xml version="1.0" encoding="utf-8"?>
+<p:notesMaster xmlns:a="http://schemas.openxmlformats.org/drawingml/2006/main" xmlns:p="http://schemas.openxmlformats.org/presentationml/2006/main" xmlns:r="http://schemas.openxmlformats.org/officeDocument/2006/relationships">
+  <p:cSld>
+    <p:bg>
+      <p:bgRef idx="1001">
+        <a:schemeClr val="bg1"/>
+      </p:bgRef>
+    </p:bg>
+    <p:spTree>
+      <p:nvGrpSpPr>
+        <p:cNvPr id="1" name=""/>
+        <p:cNvGrpSpPr/>
+        <p:nvPr/>
+      </p:nvGrpSpPr>
+      <p:grpSpPr>
+        <a:xfrm>
+          <a:off x="0" y="0"/>
+          <a:ext cx="0" cy="0"/>
+          <a:chOff x="0" y="0"/>
+          <a:chExt cx="0" cy="0"/>
+        </a:xfrm>
+      </p:grpSpPr>
+      <p:sp>
+        <p:nvSpPr>
+          <p:cNvPr id="2" name="Header Placeholder 1"/>
+          <p:cNvSpPr>
+            <a:spLocks noGrp="1"/>
+          </p:cNvSpPr>
+          <p:nvPr>
+            <p:ph type="hdr" sz="quarter"/>
+          </p:nvPr>
+        </p:nvSpPr>
+        <p:spPr>
+          <a:xfrm>
+            <a:off x="0" y="0"/>
+            <a:ext cx="2971800" cy="457200"/>
+          </a:xfrm>
+          <a:prstGeom prst="rect">
+            <a:avLst/>
+          </a:prstGeom>
+        </p:spPr>
+        <p:txBody>
+          <a:bodyPr vert="horz" lIns="91440" tIns="45720" rIns="91440" bIns="45720" rtlCol="0"/>
+          <a:lstStyle>
+            <a:lvl1pPr algn="l">
+              <a:defRPr sz="1200"/>
+            </a:lvl1pPr>
+          </a:lstStyle>
+          <a:p>
+            <a:endParaRPr lang="en-US"/>
+          </a:p>
+        </p:txBody>
+      </p:sp>
+      <p:sp>
+        <p:nvSpPr>
+          <p:cNvPr id="3" name="Date Placeholder 2"/>
+          <p:cNvSpPr>
+            <a:spLocks noGrp="1"/>
+          </p:cNvSpPr>
+          <p:nvPr>
+            <p:ph type="dt" idx="1"/>
+          </p:nvPr>
+        </p:nvSpPr>
+        <p:spPr>
+          <a:xfrm>
+            <a:off x="3884613" y="0"/>
+            <a:ext cx="2971800" cy="457200"/>
+          </a:xfrm>
+          <a:prstGeom prst="rect">
+            <a:avLst/>
+          </a:prstGeom>
+        </p:spPr>
+        <p:txBody>
+          <a:bodyPr vert="horz" lIns="91440" tIns="45720" rIns="91440" bIns="45720" rtlCol="0"/>
+          <a:lstStyle>
+            <a:lvl1pPr algn="r">
+              <a:defRPr sz="1200"/>
+            </a:lvl1pPr>
+          </a:lstStyle>
+          <a:p>
+            <a:fld id="{0F89C1C7-3DCD-1040-A9CF-14679D8B5DDD}" type="datetimeFigureOut">
+              <a:rPr lang="en-US" smtClean="0"/>
+              <a:t>10/17/16</a:t>
+            </a:fld>
+            <a:endParaRPr lang="en-US"/>
+          </a:p>
+        </p:txBody>
+      </p:sp>
+      <p:sp>
+        <p:nvSpPr>
+          <p:cNvPr id="4" name="Slide Image Placeholder 3"/>
+          <p:cNvSpPr>
+            <a:spLocks noGrp="1" noRot="1" noChangeAspect="1"/>
+          </p:cNvSpPr>
+          <p:nvPr>
+            <p:ph type="sldImg" idx="2"/>
+          </p:nvPr>
+        </p:nvSpPr>
+        <p:spPr>
+          <a:xfrm>
+            <a:off x="1143000" y="685800"/>
+            <a:ext cx="4572000" cy="3429000"/>
+          </a:xfrm>
+          <a:prstGeom prst="rect">
+            <a:avLst/>
+          </a:prstGeom>
+          <a:noFill/>
+          <a:ln w="12700">
+            <a:solidFill>
+              <a:prstClr val="black"/>
+            </a:solidFill>
+          </a:ln>
+        </p:spPr>
+        <p:txBody>
+          <a:bodyPr vert="horz" lIns="91440" tIns="45720" rIns="91440" bIns="45720" rtlCol="0" anchor="ctr"/>
+          <a:lstStyle/>
+          <a:p>
+            <a:endParaRPr lang="en-US"/>
+          </a:p>
+        </p:txBody>
+      </p:sp>
+      <p:sp>
+        <p:nvSpPr>
+          <p:cNvPr id="5" name="Notes Placeholder 4"/>
+          <p:cNvSpPr>
+            <a:spLocks noGrp="1"/>
+          </p:cNvSpPr>
+          <p:nvPr>
+            <p:ph type="body" sz="quarter" idx="3"/>
+          </p:nvPr>
+        </p:nvSpPr>
+        <p:spPr>
+          <a:xfrm>
+            <a:off x="685800" y="4343400"/>
+            <a:ext cx="5486400" cy="4114800"/>
+          </a:xfrm>
+          <a:prstGeom prst="rect">
+            <a:avLst/>
+          </a:prstGeom>
+        </p:spPr>
+        <p:txBody>
+          <a:bodyPr vert="horz" lIns="91440" tIns="45720" rIns="91440" bIns="45720" rtlCol="0"/>
+          <a:lstStyle/>
+          <a:p>
+            <a:pPr lvl="0"/>
+            <a:r>
+              <a:rPr lang="en-US" smtClean="0"/>
+              <a:t>Click to edit Master text styles</a:t>
+            </a:r>
+          </a:p>
+          <a:p>
+            <a:pPr lvl="1"/>
+            <a:r>
+              <a:rPr lang="en-US" smtClean="0"/>
+              <a:t>Second level</a:t>
+            </a:r>
+          </a:p>
+          <a:p>
+            <a:pPr lvl="2"/>
+            <a:r>
+              <a:rPr lang="en-US" smtClean="0"/>
+              <a:t>Third level</a:t>
+            </a:r>
+          </a:p>
+          <a:p>
+            <a:pPr lvl="3"/>
+            <a:r>
+              <a:rPr lang="en-US" smtClean="0"/>
+              <a:t>Fourth level</a:t>
+            </a:r>
+          </a:p>
+          <a:p>
+            <a:pPr lvl="4"/>
+            <a:r>
+              <a:rPr lang="en-US" smtClean="0"/>
+              <a:t>Fifth level</a:t>
+            </a:r>
+            <a:endParaRPr lang="en-US"/>
+          </a:p>
+        </p:txBody>
+      </p:sp>
+      <p:sp>
+        <p:nvSpPr>
+          <p:cNvPr id="6" name="Footer Placeholder 5"/>
+          <p:cNvSpPr>
+            <a:spLocks noGrp="1"/>
+          </p:cNvSpPr>
+          <p:nvPr>
+            <p:ph type="ftr" sz="quarter" idx="4"/>
+          </p:nvPr>
+        </p:nvSpPr>
+        <p:spPr>
+          <a:xfrm>
+            <a:off x="0" y="8685213"/>
+            <a:ext cx="2971800" cy="457200"/>
+          </a:xfrm>
+          <a:prstGeom prst="rect">
+            <a:avLst/>
+          </a:prstGeom>
+        </p:spPr>
+        <p:txBody>
+          <a:bodyPr vert="horz" lIns="91440" tIns="45720" rIns="91440" bIns="45720" rtlCol="0" anchor="b"/>
+          <a:lstStyle>
+            <a:lvl1pPr algn="l">
+              <a:defRPr sz="1200"/>
+            </a:lvl1pPr>
+          </a:lstStyle>
+          <a:p>
+            <a:endParaRPr lang="en-US"/>
+          </a:p>
+        </p:txBody>
+      </p:sp>
+      <p:sp>
+        <p:nvSpPr>
+          <p:cNvPr id="7" name="Slide Number Placeholder 6"/>
+          <p:cNvSpPr>
+            <a:spLocks noGrp="1"/>
+          </p:cNvSpPr>
+          <p:nvPr>
+            <p:ph type="sldNum" sz="quarter" idx="5"/>
+          </p:nvPr>
+        </p:nvSpPr>
+        <p:spPr>
+          <a:xfrm>
+            <a:off x="3884613" y="8685213"/>
+            <a:ext cx="2971800" cy="457200"/>
+          </a:xfrm>
+          <a:prstGeom prst="rect">
+            <a:avLst/>
+          </a:prstGeom>
+        </p:spPr>
+        <p:txBody>
+          <a:bodyPr vert="horz" lIns="91440" tIns="45720" rIns="91440" bIns="45720" rtlCol="0" anchor="b"/>
+          <a:lstStyle>
+            <a:lvl1pPr algn="r">
+              <a:defRPr sz="1200"/>
+            </a:lvl1pPr>
+          </a:lstStyle>
+          <a:p>
+            <a:fld id="{BB5E49A5-4136-284D-997B-48E1D791AD67}" type="slidenum">
+              <a:rPr lang="en-US" smtClean="0"/>
+              <a:t>‹#›</a:t>
+            </a:fld>
+            <a:endParaRPr lang="en-US"/>
+          </a:p>
+        </p:txBody>
+      </p:sp>
+    </p:spTree>
+    <p:extLst>
+      <p:ext uri="{BB962C8B-B14F-4D97-AF65-F5344CB8AC3E}">
+        <p14:creationId xmlns:p14="http://schemas.microsoft.com/office/powerpoint/2010/main" val="2623252185"/>
+      </p:ext>
+    </p:extLst>
+  </p:cSld>
+  <p:clrMap bg1="lt1" tx1="dk1" bg2="lt2" tx2="dk2" accent1="accent1" accent2="accent2" accent3="accent3" accent4="accent4" accent5="accent5" accent6="accent6" hlink="hlink" folHlink="folHlink"/>
+  <p:notesStyle>
+    <a:lvl1pPr marL="0" algn="l" defTabSz="457200" rtl="0" eaLnBrk="1" latinLnBrk="0" hangingPunct="1">
+      <a:defRPr sz="1200" kern="1200">
+        <a:solidFill>
+          <a:schemeClr val="tx1"/>
+        </a:solidFill>
+        <a:latin typeface="+mn-lt"/>
+        <a:ea typeface="+mn-ea"/>
+        <a:cs typeface="+mn-cs"/>
+      </a:defRPr>
+    </a:lvl1pPr>
+    <a:lvl2pPr marL="457200" algn="l" defTabSz="457200" rtl="0" eaLnBrk="1" latinLnBrk="0" hangingPunct="1">
+      <a:defRPr sz="1200" kern="1200">
+        <a:solidFill>
+          <a:schemeClr val="tx1"/>
+        </a:solidFill>
+        <a:latin typeface="+mn-lt"/>
+        <a:ea typeface="+mn-ea"/>
+        <a:cs typeface="+mn-cs"/>
+      </a:defRPr>
+    </a:lvl2pPr>
+    <a:lvl3pPr marL="914400" algn="l" defTabSz="457200" rtl="0" eaLnBrk="1" latinLnBrk="0" hangingPunct="1">
+      <a:defRPr sz="1200" kern="1200">
+        <a:solidFill>
+          <a:schemeClr val="tx1"/>
+        </a:solidFill>
+        <a:latin typeface="+mn-lt"/>
+        <a:ea typeface="+mn-ea"/>
+        <a:cs typeface="+mn-cs"/>
+      </a:defRPr>
+    </a:lvl3pPr>
+    <a:lvl4pPr marL="1371600" algn="l" defTabSz="457200" rtl="0" eaLnBrk="1" latinLnBrk="0" hangingPunct="1">
+      <a:defRPr sz="1200" kern="1200">
+        <a:solidFill>
+          <a:schemeClr val="tx1"/>
+        </a:solidFill>
+        <a:latin typeface="+mn-lt"/>
+        <a:ea typeface="+mn-ea"/>
+        <a:cs typeface="+mn-cs"/>
+      </a:defRPr>
+    </a:lvl4pPr>
+    <a:lvl5pPr marL="1828800" algn="l" defTabSz="457200" rtl="0" eaLnBrk="1" latinLnBrk="0" hangingPunct="1">
+      <a:defRPr sz="1200" kern="1200">
+        <a:solidFill>
+          <a:schemeClr val="tx1"/>
+        </a:solidFill>
+        <a:latin typeface="+mn-lt"/>
+        <a:ea typeface="+mn-ea"/>
+        <a:cs typeface="+mn-cs"/>
+      </a:defRPr>
+    </a:lvl5pPr>
+    <a:lvl6pPr marL="2286000" algn="l" defTabSz="457200" rtl="0" eaLnBrk="1" latinLnBrk="0" hangingPunct="1">
+      <a:defRPr sz="1200" kern="1200">
+        <a:solidFill>
+          <a:schemeClr val="tx1"/>
+        </a:solidFill>
+        <a:latin typeface="+mn-lt"/>
+        <a:ea typeface="+mn-ea"/>
+        <a:cs typeface="+mn-cs"/>
+      </a:defRPr>
+    </a:lvl6pPr>
+    <a:lvl7pPr marL="2743200" algn="l" defTabSz="457200" rtl="0" eaLnBrk="1" latinLnBrk="0" hangingPunct="1">
+      <a:defRPr sz="1200" kern="1200">
+        <a:solidFill>
+          <a:schemeClr val="tx1"/>
+        </a:solidFill>
+        <a:latin typeface="+mn-lt"/>
+        <a:ea typeface="+mn-ea"/>
+        <a:cs typeface="+mn-cs"/>
+      </a:defRPr>
+    </a:lvl7pPr>
+    <a:lvl8pPr marL="3200400" algn="l" defTabSz="457200" rtl="0" eaLnBrk="1" latinLnBrk="0" hangingPunct="1">
+      <a:defRPr sz="1200" kern="1200">
+        <a:solidFill>
+          <a:schemeClr val="tx1"/>
+        </a:solidFill>
+        <a:latin typeface="+mn-lt"/>
+        <a:ea typeface="+mn-ea"/>
+        <a:cs typeface="+mn-cs"/>
+      </a:defRPr>
+    </a:lvl8pPr>
+    <a:lvl9pPr marL="3657600" algn="l" defTabSz="457200" rtl="0" eaLnBrk="1" latinLnBrk="0" hangingPunct="1">
+      <a:defRPr sz="1200" kern="1200">
+        <a:solidFill>
+          <a:schemeClr val="tx1"/>
+        </a:solidFill>
+        <a:latin typeface="+mn-lt"/>
+        <a:ea typeface="+mn-ea"/>
+        <a:cs typeface="+mn-cs"/>
+      </a:defRPr>
+    </a:lvl9pPr>
+  </p:notesStyle>
+</p:notesMaster>
+</file>
+
+<file path=ppt/notesSlides/notesSlide1.xml><?xml version="1.0" encoding="utf-8"?>
+<p:notes xmlns:a="http://schemas.openxmlformats.org/drawingml/2006/main" xmlns:p="http://schemas.openxmlformats.org/presentationml/2006/main" xmlns:r="http://schemas.openxmlformats.org/officeDocument/2006/relationships">
+  <p:cSld>
+    <p:spTree>
+      <p:nvGrpSpPr>
+        <p:cNvPr id="1" name=""/>
+        <p:cNvGrpSpPr/>
+        <p:nvPr/>
+      </p:nvGrpSpPr>
+      <p:grpSpPr>
+        <a:xfrm>
+          <a:off x="0" y="0"/>
+          <a:ext cx="0" cy="0"/>
+          <a:chOff x="0" y="0"/>
+          <a:chExt cx="0" cy="0"/>
+        </a:xfrm>
+      </p:grpSpPr>
+      <p:sp>
+        <p:nvSpPr>
+          <p:cNvPr id="2" name="Slide Image Placeholder 1"/>
+          <p:cNvSpPr>
+            <a:spLocks noGrp="1"/>
+          </p:cNvSpPr>
+          <p:nvPr>
+            <p:ph type="sldImg" idx="2"/>
+          </p:nvPr>
+        </p:nvSpPr>
+        <p:spPr/>
+      </p:sp>
+      <p:sp>
+        <p:nvSpPr>
+          <p:cNvPr id="3" name="Notes Placeholder 2"/>
+          <p:cNvSpPr>
+            <a:spLocks noGrp="1"/>
+          </p:cNvSpPr>
+          <p:nvPr>
+            <p:ph type="body" idx="3" sz="quarter"/>
+          </p:nvPr>
+        </p:nvSpPr>
+        <p:spPr/>
+        <p:txBody>
+          <a:bodyPr/>
+          <a:lstStyle/>
+          <a:p>
+            <a:r>
+              <a:t>Opening line: NeuFlow v3 is the same v2 network everyone here already trusts, with one part swapped. Instead of always producing a full dense flow map, it answers flow queries at whatever points you ask for. I will show it is faster where it matters, at least as accurate, and does two things v2 structurally cannot. Everything I show is measured on the full validation set, not cherry-picked frames.</a:t>
+            </a:r>
+          </a:p>
+        </p:txBody>
+      </p:sp>
+      <p:sp>
+        <p:nvSpPr>
+          <p:cNvPr id="4" name="Slide Number Placeholder 3"/>
+          <p:cNvSpPr>
+            <a:spLocks noGrp="1"/>
+          </p:cNvSpPr>
+          <p:nvPr>
+            <p:ph type="sldNum" idx="5" sz="quarter"/>
+          </p:nvPr>
+        </p:nvSpPr>
+        <p:spPr/>
+      </p:sp>
+    </p:spTree>
+  </p:cSld>
+  <p:clrMapOvr>
+    <a:masterClrMapping/>
+  </p:clrMapOvr>
+</p:notes>
+</file>
+
+<file path=ppt/notesSlides/notesSlide10.xml><?xml version="1.0" encoding="utf-8"?>
+<p:notes xmlns:a="http://schemas.openxmlformats.org/drawingml/2006/main" xmlns:p="http://schemas.openxmlformats.org/presentationml/2006/main" xmlns:r="http://schemas.openxmlformats.org/officeDocument/2006/relationships">
+  <p:cSld>
+    <p:spTree>
+      <p:nvGrpSpPr>
+        <p:cNvPr id="1" name=""/>
+        <p:cNvGrpSpPr/>
+        <p:nvPr/>
+      </p:nvGrpSpPr>
+      <p:grpSpPr>
+        <a:xfrm>
+          <a:off x="0" y="0"/>
+          <a:ext cx="0" cy="0"/>
+          <a:chOff x="0" y="0"/>
+          <a:chExt cx="0" cy="0"/>
+        </a:xfrm>
+      </p:grpSpPr>
+      <p:sp>
+        <p:nvSpPr>
+          <p:cNvPr id="2" name="Slide Image Placeholder 1"/>
+          <p:cNvSpPr>
+            <a:spLocks noGrp="1"/>
+          </p:cNvSpPr>
+          <p:nvPr>
+            <p:ph type="sldImg" idx="2"/>
+          </p:nvPr>
+        </p:nvSpPr>
+        <p:spPr/>
+      </p:sp>
+      <p:sp>
+        <p:nvSpPr>
+          <p:cNvPr id="3" name="Notes Placeholder 2"/>
+          <p:cNvSpPr>
+            <a:spLocks noGrp="1"/>
+          </p:cNvSpPr>
+          <p:nvPr>
+            <p:ph type="body" idx="3" sz="quarter"/>
+          </p:nvPr>
+        </p:nvSpPr>
+        <p:spPr/>
+        <p:txBody>
+          <a:bodyPr/>
+          <a:lstStyle/>
+          <a:p>
+            <a:r>
+              <a:t>A separate efficiency result. The refinement loop runs 8 times and is 59 percent of the runtime, but iterations 5 through 8 barely change the answer. I retrained just that module, using the model teaching itself with no ground truth, so 3 iterations do most of what 8 did. Honest caveat, and it is on the record: this number is the coarse stage in isolation. The end-to-end merged version is measured separately; do not quote this as a full-pipeline result.</a:t>
+            </a:r>
+          </a:p>
+        </p:txBody>
+      </p:sp>
+      <p:sp>
+        <p:nvSpPr>
+          <p:cNvPr id="4" name="Slide Number Placeholder 3"/>
+          <p:cNvSpPr>
+            <a:spLocks noGrp="1"/>
+          </p:cNvSpPr>
+          <p:nvPr>
+            <p:ph type="sldNum" idx="5" sz="quarter"/>
+          </p:nvPr>
+        </p:nvSpPr>
+        <p:spPr/>
+      </p:sp>
+    </p:spTree>
+  </p:cSld>
+  <p:clrMapOvr>
+    <a:masterClrMapping/>
+  </p:clrMapOvr>
+</p:notes>
+</file>
+
+<file path=ppt/notesSlides/notesSlide11.xml><?xml version="1.0" encoding="utf-8"?>
+<p:notes xmlns:a="http://schemas.openxmlformats.org/drawingml/2006/main" xmlns:p="http://schemas.openxmlformats.org/presentationml/2006/main" xmlns:r="http://schemas.openxmlformats.org/officeDocument/2006/relationships">
+  <p:cSld>
+    <p:spTree>
+      <p:nvGrpSpPr>
+        <p:cNvPr id="1" name=""/>
+        <p:cNvGrpSpPr/>
+        <p:nvPr/>
+      </p:nvGrpSpPr>
+      <p:grpSpPr>
+        <a:xfrm>
+          <a:off x="0" y="0"/>
+          <a:ext cx="0" cy="0"/>
+          <a:chOff x="0" y="0"/>
+          <a:chExt cx="0" cy="0"/>
+        </a:xfrm>
+      </p:grpSpPr>
+      <p:sp>
+        <p:nvSpPr>
+          <p:cNvPr id="2" name="Slide Image Placeholder 1"/>
+          <p:cNvSpPr>
+            <a:spLocks noGrp="1"/>
+          </p:cNvSpPr>
+          <p:nvPr>
+            <p:ph type="sldImg" idx="2"/>
+          </p:nvPr>
+        </p:nvSpPr>
+        <p:spPr/>
+      </p:sp>
+      <p:sp>
+        <p:nvSpPr>
+          <p:cNvPr id="3" name="Notes Placeholder 2"/>
+          <p:cNvSpPr>
+            <a:spLocks noGrp="1"/>
+          </p:cNvSpPr>
+          <p:nvPr>
+            <p:ph type="body" idx="3" sz="quarter"/>
+          </p:nvPr>
+        </p:nvSpPr>
+        <p:spPr/>
+        <p:txBody>
+          <a:bodyPr/>
+          <a:lstStyle/>
+          <a:p>
+            <a:r>
+              <a:t>Quick and practical. A query is one continuous coordinate; sub-pixel positions are valid. The whole interface is two calls: infer state once, then decode queries as many times as you want. Training used 4,096 supervision points per image, half on motion boundaries, backbone frozen throughout everything except the distillation experiment.</a:t>
+            </a:r>
+          </a:p>
+        </p:txBody>
+      </p:sp>
+      <p:sp>
+        <p:nvSpPr>
+          <p:cNvPr id="4" name="Slide Number Placeholder 3"/>
+          <p:cNvSpPr>
+            <a:spLocks noGrp="1"/>
+          </p:cNvSpPr>
+          <p:nvPr>
+            <p:ph type="sldNum" idx="5" sz="quarter"/>
+          </p:nvPr>
+        </p:nvSpPr>
+        <p:spPr/>
+      </p:sp>
+    </p:spTree>
+  </p:cSld>
+  <p:clrMapOvr>
+    <a:masterClrMapping/>
+  </p:clrMapOvr>
+</p:notes>
+</file>
+
+<file path=ppt/notesSlides/notesSlide12.xml><?xml version="1.0" encoding="utf-8"?>
+<p:notes xmlns:a="http://schemas.openxmlformats.org/drawingml/2006/main" xmlns:p="http://schemas.openxmlformats.org/presentationml/2006/main" xmlns:r="http://schemas.openxmlformats.org/officeDocument/2006/relationships">
+  <p:cSld>
+    <p:spTree>
+      <p:nvGrpSpPr>
+        <p:cNvPr id="1" name=""/>
+        <p:cNvGrpSpPr/>
+        <p:nvPr/>
+      </p:nvGrpSpPr>
+      <p:grpSpPr>
+        <a:xfrm>
+          <a:off x="0" y="0"/>
+          <a:ext cx="0" cy="0"/>
+          <a:chOff x="0" y="0"/>
+          <a:chExt cx="0" cy="0"/>
+        </a:xfrm>
+      </p:grpSpPr>
+      <p:sp>
+        <p:nvSpPr>
+          <p:cNvPr id="2" name="Slide Image Placeholder 1"/>
+          <p:cNvSpPr>
+            <a:spLocks noGrp="1"/>
+          </p:cNvSpPr>
+          <p:nvPr>
+            <p:ph type="sldImg" idx="2"/>
+          </p:nvPr>
+        </p:nvSpPr>
+        <p:spPr/>
+      </p:sp>
+      <p:sp>
+        <p:nvSpPr>
+          <p:cNvPr id="3" name="Notes Placeholder 2"/>
+          <p:cNvSpPr>
+            <a:spLocks noGrp="1"/>
+          </p:cNvSpPr>
+          <p:nvPr>
+            <p:ph type="body" idx="3" sz="quarter"/>
+          </p:nvPr>
+        </p:nvSpPr>
+        <p:spPr/>
+        <p:txBody>
+          <a:bodyPr/>
+          <a:lstStyle/>
+          <a:p>
+            <a:r>
+              <a:t>Live demo backup if the tool cooperates. Left, click any pixel and it returns flow instantly. Right, motion detection pulled straight from the coarse flow at zero extra cost. The model selector flips between v2 and v3 in place, so you can feel the difference: v2 recomputes the whole frame on every interaction, v3 reuses the cached state.</a:t>
+            </a:r>
+          </a:p>
+        </p:txBody>
+      </p:sp>
+      <p:sp>
+        <p:nvSpPr>
+          <p:cNvPr id="4" name="Slide Number Placeholder 3"/>
+          <p:cNvSpPr>
+            <a:spLocks noGrp="1"/>
+          </p:cNvSpPr>
+          <p:nvPr>
+            <p:ph type="sldNum" idx="5" sz="quarter"/>
+          </p:nvPr>
+        </p:nvSpPr>
+        <p:spPr/>
+      </p:sp>
+    </p:spTree>
+  </p:cSld>
+  <p:clrMapOvr>
+    <a:masterClrMapping/>
+  </p:clrMapOvr>
+</p:notes>
+</file>
+
+<file path=ppt/notesSlides/notesSlide13.xml><?xml version="1.0" encoding="utf-8"?>
+<p:notes xmlns:a="http://schemas.openxmlformats.org/drawingml/2006/main" xmlns:p="http://schemas.openxmlformats.org/presentationml/2006/main" xmlns:r="http://schemas.openxmlformats.org/officeDocument/2006/relationships">
+  <p:cSld>
+    <p:spTree>
+      <p:nvGrpSpPr>
+        <p:cNvPr id="1" name=""/>
+        <p:cNvGrpSpPr/>
+        <p:nvPr/>
+      </p:nvGrpSpPr>
+      <p:grpSpPr>
+        <a:xfrm>
+          <a:off x="0" y="0"/>
+          <a:ext cx="0" cy="0"/>
+          <a:chOff x="0" y="0"/>
+          <a:chExt cx="0" cy="0"/>
+        </a:xfrm>
+      </p:grpSpPr>
+      <p:sp>
+        <p:nvSpPr>
+          <p:cNvPr id="2" name="Slide Image Placeholder 1"/>
+          <p:cNvSpPr>
+            <a:spLocks noGrp="1"/>
+          </p:cNvSpPr>
+          <p:nvPr>
+            <p:ph type="sldImg" idx="2"/>
+          </p:nvPr>
+        </p:nvSpPr>
+        <p:spPr/>
+      </p:sp>
+      <p:sp>
+        <p:nvSpPr>
+          <p:cNvPr id="3" name="Notes Placeholder 2"/>
+          <p:cNvSpPr>
+            <a:spLocks noGrp="1"/>
+          </p:cNvSpPr>
+          <p:nvPr>
+            <p:ph type="body" idx="3" sz="quarter"/>
+          </p:nvPr>
+        </p:nvSpPr>
+        <p:spPr/>
+        <p:txBody>
+          <a:bodyPr/>
+          <a:lstStyle/>
+          <a:p>
+            <a:r>
+              <a:t>Proof it runs on real, unseen footage, not just the benchmark. 40 frames of a public YouTube highway clip, 30 FPS end to end with motion boxes. The graphs on the right were sampled during that run; the flat GPU-memory line is the point, one cached state serves every interaction.</a:t>
+            </a:r>
+          </a:p>
+        </p:txBody>
+      </p:sp>
+      <p:sp>
+        <p:nvSpPr>
+          <p:cNvPr id="4" name="Slide Number Placeholder 3"/>
+          <p:cNvSpPr>
+            <a:spLocks noGrp="1"/>
+          </p:cNvSpPr>
+          <p:nvPr>
+            <p:ph type="sldNum" idx="5" sz="quarter"/>
+          </p:nvPr>
+        </p:nvSpPr>
+        <p:spPr/>
+      </p:sp>
+    </p:spTree>
+  </p:cSld>
+  <p:clrMapOvr>
+    <a:masterClrMapping/>
+  </p:clrMapOvr>
+</p:notes>
+</file>
+
+<file path=ppt/notesSlides/notesSlide14.xml><?xml version="1.0" encoding="utf-8"?>
+<p:notes xmlns:a="http://schemas.openxmlformats.org/drawingml/2006/main" xmlns:p="http://schemas.openxmlformats.org/presentationml/2006/main" xmlns:r="http://schemas.openxmlformats.org/officeDocument/2006/relationships">
+  <p:cSld>
+    <p:spTree>
+      <p:nvGrpSpPr>
+        <p:cNvPr id="1" name=""/>
+        <p:cNvGrpSpPr/>
+        <p:nvPr/>
+      </p:nvGrpSpPr>
+      <p:grpSpPr>
+        <a:xfrm>
+          <a:off x="0" y="0"/>
+          <a:ext cx="0" cy="0"/>
+          <a:chOff x="0" y="0"/>
+          <a:chExt cx="0" cy="0"/>
+        </a:xfrm>
+      </p:grpSpPr>
+      <p:sp>
+        <p:nvSpPr>
+          <p:cNvPr id="2" name="Slide Image Placeholder 1"/>
+          <p:cNvSpPr>
+            <a:spLocks noGrp="1"/>
+          </p:cNvSpPr>
+          <p:nvPr>
+            <p:ph type="sldImg" idx="2"/>
+          </p:nvPr>
+        </p:nvSpPr>
+        <p:spPr/>
+      </p:sp>
+      <p:sp>
+        <p:nvSpPr>
+          <p:cNvPr id="3" name="Notes Placeholder 2"/>
+          <p:cNvSpPr>
+            <a:spLocks noGrp="1"/>
+          </p:cNvSpPr>
+          <p:nvPr>
+            <p:ph type="body" idx="3" sz="quarter"/>
+          </p:nvPr>
+        </p:nvSpPr>
+        <p:spPr/>
+        <p:txBody>
+          <a:bodyPr/>
+          <a:lstStyle/>
+          <a:p>
+            <a:r>
+              <a:t>Scorecard against the three goals I set. Beat v2 accuracy: done, 11 percent, and 3px now beats v2. Less compute for the sparse case: done, verified same hardware. Do what v2 cannot: done, arbitrary-coordinate queries and a calibrated confidence signal. I will state plainly on the next slide what is not yet proven.</a:t>
+            </a:r>
+          </a:p>
+        </p:txBody>
+      </p:sp>
+      <p:sp>
+        <p:nvSpPr>
+          <p:cNvPr id="4" name="Slide Number Placeholder 3"/>
+          <p:cNvSpPr>
+            <a:spLocks noGrp="1"/>
+          </p:cNvSpPr>
+          <p:nvPr>
+            <p:ph type="sldNum" idx="5" sz="quarter"/>
+          </p:nvPr>
+        </p:nvSpPr>
+        <p:spPr/>
+      </p:sp>
+    </p:spTree>
+  </p:cSld>
+  <p:clrMapOvr>
+    <a:masterClrMapping/>
+  </p:clrMapOvr>
+</p:notes>
+</file>
+
+<file path=ppt/notesSlides/notesSlide15.xml><?xml version="1.0" encoding="utf-8"?>
+<p:notes xmlns:a="http://schemas.openxmlformats.org/drawingml/2006/main" xmlns:p="http://schemas.openxmlformats.org/presentationml/2006/main" xmlns:r="http://schemas.openxmlformats.org/officeDocument/2006/relationships">
+  <p:cSld>
+    <p:spTree>
+      <p:nvGrpSpPr>
+        <p:cNvPr id="1" name=""/>
+        <p:cNvGrpSpPr/>
+        <p:nvPr/>
+      </p:nvGrpSpPr>
+      <p:grpSpPr>
+        <a:xfrm>
+          <a:off x="0" y="0"/>
+          <a:ext cx="0" cy="0"/>
+          <a:chOff x="0" y="0"/>
+          <a:chExt cx="0" cy="0"/>
+        </a:xfrm>
+      </p:grpSpPr>
+      <p:sp>
+        <p:nvSpPr>
+          <p:cNvPr id="2" name="Slide Image Placeholder 1"/>
+          <p:cNvSpPr>
+            <a:spLocks noGrp="1"/>
+          </p:cNvSpPr>
+          <p:nvPr>
+            <p:ph type="sldImg" idx="2"/>
+          </p:nvPr>
+        </p:nvSpPr>
+        <p:spPr/>
+      </p:sp>
+      <p:sp>
+        <p:nvSpPr>
+          <p:cNvPr id="3" name="Notes Placeholder 2"/>
+          <p:cNvSpPr>
+            <a:spLocks noGrp="1"/>
+          </p:cNvSpPr>
+          <p:nvPr>
+            <p:ph type="body" idx="3" sz="quarter"/>
+          </p:nvPr>
+        </p:nvSpPr>
+        <p:spPr/>
+        <p:txBody>
+          <a:bodyPr/>
+          <a:lstStyle/>
+          <a:p>
+            <a:r>
+              <a:t>I want to be the one to raise these, not have them raised for me. The training-data confound is only partly closed: I have not retrained v2 on the exact same mixture. The uncertainty-head accuracy gain is a single run and could be seed noise. Every number is a 4060 or V100, never an actual Jetson. And Spring was cut off at 70 percent by the job time limit. None of these undo the main results, but they are the honest next things to nail down.</a:t>
+            </a:r>
+          </a:p>
+        </p:txBody>
+      </p:sp>
+      <p:sp>
+        <p:nvSpPr>
+          <p:cNvPr id="4" name="Slide Number Placeholder 3"/>
+          <p:cNvSpPr>
+            <a:spLocks noGrp="1"/>
+          </p:cNvSpPr>
+          <p:nvPr>
+            <p:ph type="sldNum" idx="5" sz="quarter"/>
+          </p:nvPr>
+        </p:nvSpPr>
+        <p:spPr/>
+      </p:sp>
+    </p:spTree>
+  </p:cSld>
+  <p:clrMapOvr>
+    <a:masterClrMapping/>
+  </p:clrMapOvr>
+</p:notes>
+</file>
+
+<file path=ppt/notesSlides/notesSlide16.xml><?xml version="1.0" encoding="utf-8"?>
+<p:notes xmlns:a="http://schemas.openxmlformats.org/drawingml/2006/main" xmlns:p="http://schemas.openxmlformats.org/presentationml/2006/main" xmlns:r="http://schemas.openxmlformats.org/officeDocument/2006/relationships">
+  <p:cSld>
+    <p:spTree>
+      <p:nvGrpSpPr>
+        <p:cNvPr id="1" name=""/>
+        <p:cNvGrpSpPr/>
+        <p:nvPr/>
+      </p:nvGrpSpPr>
+      <p:grpSpPr>
+        <a:xfrm>
+          <a:off x="0" y="0"/>
+          <a:ext cx="0" cy="0"/>
+          <a:chOff x="0" y="0"/>
+          <a:chExt cx="0" cy="0"/>
+        </a:xfrm>
+      </p:grpSpPr>
+      <p:sp>
+        <p:nvSpPr>
+          <p:cNvPr id="2" name="Slide Image Placeholder 1"/>
+          <p:cNvSpPr>
+            <a:spLocks noGrp="1"/>
+          </p:cNvSpPr>
+          <p:nvPr>
+            <p:ph type="sldImg" idx="2"/>
+          </p:nvPr>
+        </p:nvSpPr>
+        <p:spPr/>
+      </p:sp>
+      <p:sp>
+        <p:nvSpPr>
+          <p:cNvPr id="3" name="Notes Placeholder 2"/>
+          <p:cNvSpPr>
+            <a:spLocks noGrp="1"/>
+          </p:cNvSpPr>
+          <p:nvPr>
+            <p:ph type="body" idx="3" sz="quarter"/>
+          </p:nvPr>
+        </p:nvSpPr>
+        <p:spPr/>
+        <p:txBody>
+          <a:bodyPr/>
+          <a:lstStyle/>
+          <a:p>
+            <a:r>
+              <a:t>Concrete plan. Immediate and cheap: finish Spring, run the 4K query test that only a queryable model can even attempt, repeat the uncertainty run, retrain v2 on the mixed data to close the confound. Then the two asks: continued cluster access for these 6-to-8-hour jobs, and access to the lab's own AUV and UAV survey data, which is exactly the sparse, overlapping, slow-motion setting this method is built for.</a:t>
+            </a:r>
+          </a:p>
+        </p:txBody>
+      </p:sp>
+      <p:sp>
+        <p:nvSpPr>
+          <p:cNvPr id="4" name="Slide Number Placeholder 3"/>
+          <p:cNvSpPr>
+            <a:spLocks noGrp="1"/>
+          </p:cNvSpPr>
+          <p:nvPr>
+            <p:ph type="sldNum" idx="5" sz="quarter"/>
+          </p:nvPr>
+        </p:nvSpPr>
+        <p:spPr/>
+      </p:sp>
+    </p:spTree>
+  </p:cSld>
+  <p:clrMapOvr>
+    <a:masterClrMapping/>
+  </p:clrMapOvr>
+</p:notes>
+</file>
+
+<file path=ppt/notesSlides/notesSlide17.xml><?xml version="1.0" encoding="utf-8"?>
+<p:notes xmlns:a="http://schemas.openxmlformats.org/drawingml/2006/main" xmlns:p="http://schemas.openxmlformats.org/presentationml/2006/main" xmlns:r="http://schemas.openxmlformats.org/officeDocument/2006/relationships">
+  <p:cSld>
+    <p:spTree>
+      <p:nvGrpSpPr>
+        <p:cNvPr id="1" name=""/>
+        <p:cNvGrpSpPr/>
+        <p:nvPr/>
+      </p:nvGrpSpPr>
+      <p:grpSpPr>
+        <a:xfrm>
+          <a:off x="0" y="0"/>
+          <a:ext cx="0" cy="0"/>
+          <a:chOff x="0" y="0"/>
+          <a:chExt cx="0" cy="0"/>
+        </a:xfrm>
+      </p:grpSpPr>
+      <p:sp>
+        <p:nvSpPr>
+          <p:cNvPr id="2" name="Slide Image Placeholder 1"/>
+          <p:cNvSpPr>
+            <a:spLocks noGrp="1"/>
+          </p:cNvSpPr>
+          <p:nvPr>
+            <p:ph type="sldImg" idx="2"/>
+          </p:nvPr>
+        </p:nvSpPr>
+        <p:spPr/>
+      </p:sp>
+      <p:sp>
+        <p:nvSpPr>
+          <p:cNvPr id="3" name="Notes Placeholder 2"/>
+          <p:cNvSpPr>
+            <a:spLocks noGrp="1"/>
+          </p:cNvSpPr>
+          <p:nvPr>
+            <p:ph type="body" idx="3" sz="quarter"/>
+          </p:nvPr>
+        </p:nvSpPr>
+        <p:spPr/>
+        <p:txBody>
+          <a:bodyPr/>
+          <a:lstStyle/>
+          <a:p>
+            <a:r>
+              <a:t>Not shown; my own prep. Anticipated questions with honest one-line answers: why non-integer coordinates, whether the improvement is a data confound, why the uncertainty head helps accuracy, fast-motion handling, and edge-device status. If I do not know, I say I do not know and point to the limitations slide.</a:t>
+            </a:r>
+          </a:p>
+        </p:txBody>
+      </p:sp>
+      <p:sp>
+        <p:nvSpPr>
+          <p:cNvPr id="4" name="Slide Number Placeholder 3"/>
+          <p:cNvSpPr>
+            <a:spLocks noGrp="1"/>
+          </p:cNvSpPr>
+          <p:nvPr>
+            <p:ph type="sldNum" idx="5" sz="quarter"/>
+          </p:nvPr>
+        </p:nvSpPr>
+        <p:spPr/>
+      </p:sp>
+    </p:spTree>
+  </p:cSld>
+  <p:clrMapOvr>
+    <a:masterClrMapping/>
+  </p:clrMapOvr>
+</p:notes>
+</file>
+
+<file path=ppt/notesSlides/notesSlide2.xml><?xml version="1.0" encoding="utf-8"?>
+<p:notes xmlns:a="http://schemas.openxmlformats.org/drawingml/2006/main" xmlns:p="http://schemas.openxmlformats.org/presentationml/2006/main" xmlns:r="http://schemas.openxmlformats.org/officeDocument/2006/relationships">
+  <p:cSld>
+    <p:spTree>
+      <p:nvGrpSpPr>
+        <p:cNvPr id="1" name=""/>
+        <p:cNvGrpSpPr/>
+        <p:nvPr/>
+      </p:nvGrpSpPr>
+      <p:grpSpPr>
+        <a:xfrm>
+          <a:off x="0" y="0"/>
+          <a:ext cx="0" cy="0"/>
+          <a:chOff x="0" y="0"/>
+          <a:chExt cx="0" cy="0"/>
+        </a:xfrm>
+      </p:grpSpPr>
+      <p:sp>
+        <p:nvSpPr>
+          <p:cNvPr id="2" name="Slide Image Placeholder 1"/>
+          <p:cNvSpPr>
+            <a:spLocks noGrp="1"/>
+          </p:cNvSpPr>
+          <p:nvPr>
+            <p:ph type="sldImg" idx="2"/>
+          </p:nvPr>
+        </p:nvSpPr>
+        <p:spPr/>
+      </p:sp>
+      <p:sp>
+        <p:nvSpPr>
+          <p:cNvPr id="3" name="Notes Placeholder 2"/>
+          <p:cNvSpPr>
+            <a:spLocks noGrp="1"/>
+          </p:cNvSpPr>
+          <p:nvPr>
+            <p:ph type="body" idx="3" sz="quarter"/>
+          </p:nvPr>
+        </p:nvSpPr>
+        <p:spPr/>
+        <p:txBody>
+          <a:bodyPr/>
+          <a:lstStyle/>
+          <a:p>
+            <a:r>
+              <a:t>Set up the problem in one breath: flow tells you where each pixel goes. Every current network computes all of it, always. But registration, tracking, and mapping only ever use a few hundred points. On a small GPU, computing 479 thousand values to use 800 of them is the difference between real time and not. The idea is to keep everything in v2 that understands motion and only change how the answer is read out.</a:t>
+            </a:r>
+          </a:p>
+        </p:txBody>
+      </p:sp>
+      <p:sp>
+        <p:nvSpPr>
+          <p:cNvPr id="4" name="Slide Number Placeholder 3"/>
+          <p:cNvSpPr>
+            <a:spLocks noGrp="1"/>
+          </p:cNvSpPr>
+          <p:nvPr>
+            <p:ph type="sldNum" idx="5" sz="quarter"/>
+          </p:nvPr>
+        </p:nvSpPr>
+        <p:spPr/>
+      </p:sp>
+    </p:spTree>
+  </p:cSld>
+  <p:clrMapOvr>
+    <a:masterClrMapping/>
+  </p:clrMapOvr>
+</p:notes>
+</file>
+
+<file path=ppt/notesSlides/notesSlide3.xml><?xml version="1.0" encoding="utf-8"?>
+<p:notes xmlns:a="http://schemas.openxmlformats.org/drawingml/2006/main" xmlns:p="http://schemas.openxmlformats.org/presentationml/2006/main" xmlns:r="http://schemas.openxmlformats.org/officeDocument/2006/relationships">
+  <p:cSld>
+    <p:spTree>
+      <p:nvGrpSpPr>
+        <p:cNvPr id="1" name=""/>
+        <p:cNvGrpSpPr/>
+        <p:nvPr/>
+      </p:nvGrpSpPr>
+      <p:grpSpPr>
+        <a:xfrm>
+          <a:off x="0" y="0"/>
+          <a:ext cx="0" cy="0"/>
+          <a:chOff x="0" y="0"/>
+          <a:chExt cx="0" cy="0"/>
+        </a:xfrm>
+      </p:grpSpPr>
+      <p:sp>
+        <p:nvSpPr>
+          <p:cNvPr id="2" name="Slide Image Placeholder 1"/>
+          <p:cNvSpPr>
+            <a:spLocks noGrp="1"/>
+          </p:cNvSpPr>
+          <p:nvPr>
+            <p:ph type="sldImg" idx="2"/>
+          </p:nvPr>
+        </p:nvSpPr>
+        <p:spPr/>
+      </p:sp>
+      <p:sp>
+        <p:nvSpPr>
+          <p:cNvPr id="3" name="Notes Placeholder 2"/>
+          <p:cNvSpPr>
+            <a:spLocks noGrp="1"/>
+          </p:cNvSpPr>
+          <p:nvPr>
+            <p:ph type="body" idx="3" sz="quarter"/>
+          </p:nvPr>
+        </p:nvSpPr>
+        <p:spPr/>
+        <p:txBody>
+          <a:bodyPr/>
+          <a:lstStyle/>
+          <a:p>
+            <a:r>
+              <a:t>Walk the boxes left to right, then land on the bold line: every one of these blocks is frozen in v3, byte for byte identical to v2. I did not retrain the part that finds motion. The only thing I touched is the very last step, the upsampler. So any accuracy change comes from that one swap, not from disturbing what already works.</a:t>
+            </a:r>
+          </a:p>
+        </p:txBody>
+      </p:sp>
+      <p:sp>
+        <p:nvSpPr>
+          <p:cNvPr id="4" name="Slide Number Placeholder 3"/>
+          <p:cNvSpPr>
+            <a:spLocks noGrp="1"/>
+          </p:cNvSpPr>
+          <p:nvPr>
+            <p:ph type="sldNum" idx="5" sz="quarter"/>
+          </p:nvPr>
+        </p:nvSpPr>
+        <p:spPr/>
+      </p:sp>
+    </p:spTree>
+  </p:cSld>
+  <p:clrMapOvr>
+    <a:masterClrMapping/>
+  </p:clrMapOvr>
+</p:notes>
+</file>
+
+<file path=ppt/notesSlides/notesSlide4.xml><?xml version="1.0" encoding="utf-8"?>
+<p:notes xmlns:a="http://schemas.openxmlformats.org/drawingml/2006/main" xmlns:p="http://schemas.openxmlformats.org/presentationml/2006/main" xmlns:r="http://schemas.openxmlformats.org/officeDocument/2006/relationships">
+  <p:cSld>
+    <p:spTree>
+      <p:nvGrpSpPr>
+        <p:cNvPr id="1" name=""/>
+        <p:cNvGrpSpPr/>
+        <p:nvPr/>
+      </p:nvGrpSpPr>
+      <p:grpSpPr>
+        <a:xfrm>
+          <a:off x="0" y="0"/>
+          <a:ext cx="0" cy="0"/>
+          <a:chOff x="0" y="0"/>
+          <a:chExt cx="0" cy="0"/>
+        </a:xfrm>
+      </p:grpSpPr>
+      <p:sp>
+        <p:nvSpPr>
+          <p:cNvPr id="2" name="Slide Image Placeholder 1"/>
+          <p:cNvSpPr>
+            <a:spLocks noGrp="1"/>
+          </p:cNvSpPr>
+          <p:nvPr>
+            <p:ph type="sldImg" idx="2"/>
+          </p:nvPr>
+        </p:nvSpPr>
+        <p:spPr/>
+      </p:sp>
+      <p:sp>
+        <p:nvSpPr>
+          <p:cNvPr id="3" name="Notes Placeholder 2"/>
+          <p:cNvSpPr>
+            <a:spLocks noGrp="1"/>
+          </p:cNvSpPr>
+          <p:nvPr>
+            <p:ph type="body" idx="3" sz="quarter"/>
+          </p:nvPr>
+        </p:nvSpPr>
+        <p:spPr/>
+        <p:txBody>
+          <a:bodyPr/>
+          <a:lstStyle/>
+          <a:p>
+            <a:r>
+              <a:t>The key idea in plain terms: for any coordinate, sample features there, then output blend weights over a small 3x3 neighborhood of the coarse flow plus a bilinear value. Because it is a bounded blend, it cannot invent wild flow. And I zero-initialize it, so before any training it reproduces plain bilinear upsampling exactly. That means training can only improve on that starting point. Note it is one coarse pass per frame, then cheap per-query work. And v3 is actually smaller than v2, 7.8 vs 9 million parameters.</a:t>
+            </a:r>
+          </a:p>
+        </p:txBody>
+      </p:sp>
+      <p:sp>
+        <p:nvSpPr>
+          <p:cNvPr id="4" name="Slide Number Placeholder 3"/>
+          <p:cNvSpPr>
+            <a:spLocks noGrp="1"/>
+          </p:cNvSpPr>
+          <p:nvPr>
+            <p:ph type="sldNum" idx="5" sz="quarter"/>
+          </p:nvPr>
+        </p:nvSpPr>
+        <p:spPr/>
+      </p:sp>
+    </p:spTree>
+  </p:cSld>
+  <p:clrMapOvr>
+    <a:masterClrMapping/>
+  </p:clrMapOvr>
+</p:notes>
+</file>
+
+<file path=ppt/notesSlides/notesSlide5.xml><?xml version="1.0" encoding="utf-8"?>
+<p:notes xmlns:a="http://schemas.openxmlformats.org/drawingml/2006/main" xmlns:p="http://schemas.openxmlformats.org/presentationml/2006/main" xmlns:r="http://schemas.openxmlformats.org/officeDocument/2006/relationships">
+  <p:cSld>
+    <p:spTree>
+      <p:nvGrpSpPr>
+        <p:cNvPr id="1" name=""/>
+        <p:cNvGrpSpPr/>
+        <p:nvPr/>
+      </p:nvGrpSpPr>
+      <p:grpSpPr>
+        <a:xfrm>
+          <a:off x="0" y="0"/>
+          <a:ext cx="0" cy="0"/>
+          <a:chOff x="0" y="0"/>
+          <a:chExt cx="0" cy="0"/>
+        </a:xfrm>
+      </p:grpSpPr>
+      <p:sp>
+        <p:nvSpPr>
+          <p:cNvPr id="2" name="Slide Image Placeholder 1"/>
+          <p:cNvSpPr>
+            <a:spLocks noGrp="1"/>
+          </p:cNvSpPr>
+          <p:nvPr>
+            <p:ph type="sldImg" idx="2"/>
+          </p:nvPr>
+        </p:nvSpPr>
+        <p:spPr/>
+      </p:sp>
+      <p:sp>
+        <p:nvSpPr>
+          <p:cNvPr id="3" name="Notes Placeholder 2"/>
+          <p:cNvSpPr>
+            <a:spLocks noGrp="1"/>
+          </p:cNvSpPr>
+          <p:nvPr>
+            <p:ph type="body" idx="3" sz="quarter"/>
+          </p:nvPr>
+        </p:nvSpPr>
+        <p:spPr/>
+        <p:txBody>
+          <a:bodyPr/>
+          <a:lstStyle/>
+          <a:p>
+            <a:r>
+              <a:t>This is every configuration I tried, worst to best, left to right. Gray is my laptop, black is the cluster. Two honest lessons are on this chart. Sequential fine-tuning, the tall bar, made things worse: the model forgot. Mixing datasets in every batch is what worked. The best full run, big18, is 2.07 versus v2 at 2.32, about 11 percent better. The red line is v2. Everything from FlyingChairs onward is at or below it.</a:t>
+            </a:r>
+          </a:p>
+        </p:txBody>
+      </p:sp>
+      <p:sp>
+        <p:nvSpPr>
+          <p:cNvPr id="4" name="Slide Number Placeholder 3"/>
+          <p:cNvSpPr>
+            <a:spLocks noGrp="1"/>
+          </p:cNvSpPr>
+          <p:nvPr>
+            <p:ph type="sldNum" idx="5" sz="quarter"/>
+          </p:nvPr>
+        </p:nvSpPr>
+        <p:spPr/>
+      </p:sp>
+    </p:spTree>
+  </p:cSld>
+  <p:clrMapOvr>
+    <a:masterClrMapping/>
+  </p:clrMapOvr>
+</p:notes>
+</file>
+
+<file path=ppt/notesSlides/notesSlide6.xml><?xml version="1.0" encoding="utf-8"?>
+<p:notes xmlns:a="http://schemas.openxmlformats.org/drawingml/2006/main" xmlns:p="http://schemas.openxmlformats.org/presentationml/2006/main" xmlns:r="http://schemas.openxmlformats.org/officeDocument/2006/relationships">
+  <p:cSld>
+    <p:spTree>
+      <p:nvGrpSpPr>
+        <p:cNvPr id="1" name=""/>
+        <p:cNvGrpSpPr/>
+        <p:nvPr/>
+      </p:nvGrpSpPr>
+      <p:grpSpPr>
+        <a:xfrm>
+          <a:off x="0" y="0"/>
+          <a:ext cx="0" cy="0"/>
+          <a:chOff x="0" y="0"/>
+          <a:chExt cx="0" cy="0"/>
+        </a:xfrm>
+      </p:grpSpPr>
+      <p:sp>
+        <p:nvSpPr>
+          <p:cNvPr id="2" name="Slide Image Placeholder 1"/>
+          <p:cNvSpPr>
+            <a:spLocks noGrp="1"/>
+          </p:cNvSpPr>
+          <p:nvPr>
+            <p:ph type="sldImg" idx="2"/>
+          </p:nvPr>
+        </p:nvSpPr>
+        <p:spPr/>
+      </p:sp>
+      <p:sp>
+        <p:nvSpPr>
+          <p:cNvPr id="3" name="Notes Placeholder 2"/>
+          <p:cNvSpPr>
+            <a:spLocks noGrp="1"/>
+          </p:cNvSpPr>
+          <p:nvPr>
+            <p:ph type="body" idx="3" sz="quarter"/>
+          </p:nvPr>
+        </p:nvSpPr>
+        <p:spPr/>
+        <p:txBody>
+          <a:bodyPr/>
+          <a:lstStyle/>
+          <a:p>
+            <a:r>
+              <a:t>EPE is the average, but the lab cares about sharpness, so here is accuracy at 1 and 3 pixels. The honest story: uncG is the first version to actually beat v2 on 3-pixel accuracy, and it closes the 1-pixel gap to under a tenth of a point, which is noise. grandmix is the weak one here on 1px; I am not hiding that.</a:t>
+            </a:r>
+          </a:p>
+        </p:txBody>
+      </p:sp>
+      <p:sp>
+        <p:nvSpPr>
+          <p:cNvPr id="4" name="Slide Number Placeholder 3"/>
+          <p:cNvSpPr>
+            <a:spLocks noGrp="1"/>
+          </p:cNvSpPr>
+          <p:nvPr>
+            <p:ph type="sldNum" idx="5" sz="quarter"/>
+          </p:nvPr>
+        </p:nvSpPr>
+        <p:spPr/>
+      </p:sp>
+    </p:spTree>
+  </p:cSld>
+  <p:clrMapOvr>
+    <a:masterClrMapping/>
+  </p:clrMapOvr>
+</p:notes>
+</file>
+
+<file path=ppt/notesSlides/notesSlide7.xml><?xml version="1.0" encoding="utf-8"?>
+<p:notes xmlns:a="http://schemas.openxmlformats.org/drawingml/2006/main" xmlns:p="http://schemas.openxmlformats.org/presentationml/2006/main" xmlns:r="http://schemas.openxmlformats.org/officeDocument/2006/relationships">
+  <p:cSld>
+    <p:spTree>
+      <p:nvGrpSpPr>
+        <p:cNvPr id="1" name=""/>
+        <p:cNvGrpSpPr/>
+        <p:nvPr/>
+      </p:nvGrpSpPr>
+      <p:grpSpPr>
+        <a:xfrm>
+          <a:off x="0" y="0"/>
+          <a:ext cx="0" cy="0"/>
+          <a:chOff x="0" y="0"/>
+          <a:chExt cx="0" cy="0"/>
+        </a:xfrm>
+      </p:grpSpPr>
+      <p:sp>
+        <p:nvSpPr>
+          <p:cNvPr id="2" name="Slide Image Placeholder 1"/>
+          <p:cNvSpPr>
+            <a:spLocks noGrp="1"/>
+          </p:cNvSpPr>
+          <p:nvPr>
+            <p:ph type="sldImg" idx="2"/>
+          </p:nvPr>
+        </p:nvSpPr>
+        <p:spPr/>
+      </p:sp>
+      <p:sp>
+        <p:nvSpPr>
+          <p:cNvPr id="3" name="Notes Placeholder 2"/>
+          <p:cNvSpPr>
+            <a:spLocks noGrp="1"/>
+          </p:cNvSpPr>
+          <p:nvPr>
+            <p:ph type="body" idx="3" sz="quarter"/>
+          </p:nvPr>
+        </p:nvSpPr>
+        <p:spPr/>
+        <p:txBody>
+          <a:bodyPr/>
+          <a:lstStyle/>
+          <a:p>
+            <a:r>
+              <a:t>Same scene, same ground truth, four models. I show both the full-set EPE and this specific scene's number under each so you can see the single scene is representative, not cherry-picked. All three cluster checkpoints beat v2 on the full 1,174-pair set, not just here.</a:t>
+            </a:r>
+          </a:p>
+        </p:txBody>
+      </p:sp>
+      <p:sp>
+        <p:nvSpPr>
+          <p:cNvPr id="4" name="Slide Number Placeholder 3"/>
+          <p:cNvSpPr>
+            <a:spLocks noGrp="1"/>
+          </p:cNvSpPr>
+          <p:nvPr>
+            <p:ph type="sldNum" idx="5" sz="quarter"/>
+          </p:nvPr>
+        </p:nvSpPr>
+        <p:spPr/>
+      </p:sp>
+    </p:spTree>
+  </p:cSld>
+  <p:clrMapOvr>
+    <a:masterClrMapping/>
+  </p:clrMapOvr>
+</p:notes>
+</file>
+
+<file path=ppt/notesSlides/notesSlide8.xml><?xml version="1.0" encoding="utf-8"?>
+<p:notes xmlns:a="http://schemas.openxmlformats.org/drawingml/2006/main" xmlns:p="http://schemas.openxmlformats.org/presentationml/2006/main" xmlns:r="http://schemas.openxmlformats.org/officeDocument/2006/relationships">
+  <p:cSld>
+    <p:spTree>
+      <p:nvGrpSpPr>
+        <p:cNvPr id="1" name=""/>
+        <p:cNvGrpSpPr/>
+        <p:nvPr/>
+      </p:nvGrpSpPr>
+      <p:grpSpPr>
+        <a:xfrm>
+          <a:off x="0" y="0"/>
+          <a:ext cx="0" cy="0"/>
+          <a:chOff x="0" y="0"/>
+          <a:chExt cx="0" cy="0"/>
+        </a:xfrm>
+      </p:grpSpPr>
+      <p:sp>
+        <p:nvSpPr>
+          <p:cNvPr id="2" name="Slide Image Placeholder 1"/>
+          <p:cNvSpPr>
+            <a:spLocks noGrp="1"/>
+          </p:cNvSpPr>
+          <p:nvPr>
+            <p:ph type="sldImg" idx="2"/>
+          </p:nvPr>
+        </p:nvSpPr>
+        <p:spPr/>
+      </p:sp>
+      <p:sp>
+        <p:nvSpPr>
+          <p:cNvPr id="3" name="Notes Placeholder 2"/>
+          <p:cNvSpPr>
+            <a:spLocks noGrp="1"/>
+          </p:cNvSpPr>
+          <p:nvPr>
+            <p:ph type="body" idx="3" sz="quarter"/>
+          </p:nvPr>
+        </p:nvSpPr>
+        <p:spPr/>
+        <p:txBody>
+          <a:bodyPr/>
+          <a:lstStyle/>
+          <a:p>
+            <a:r>
+              <a:t>This is the slide that answers the earlier objection that 6 percent is not worth it. It is not really about the 6 percent. On identical hardware, v2 pays 19.6 milliseconds on every single call. v3 pays about the same once per frame, then answers every follow-up query on that frame for 2.6 milliseconds, because it caches the expensive part. v2 has no cached state, so it recomputes everything every time. For a planner or SLAM front-end re-querying the same frame, that is a 7x saving.</a:t>
+            </a:r>
+          </a:p>
+        </p:txBody>
+      </p:sp>
+      <p:sp>
+        <p:nvSpPr>
+          <p:cNvPr id="4" name="Slide Number Placeholder 3"/>
+          <p:cNvSpPr>
+            <a:spLocks noGrp="1"/>
+          </p:cNvSpPr>
+          <p:nvPr>
+            <p:ph type="sldNum" idx="5" sz="quarter"/>
+          </p:nvPr>
+        </p:nvSpPr>
+        <p:spPr/>
+      </p:sp>
+    </p:spTree>
+  </p:cSld>
+  <p:clrMapOvr>
+    <a:masterClrMapping/>
+  </p:clrMapOvr>
+</p:notes>
+</file>
+
+<file path=ppt/notesSlides/notesSlide9.xml><?xml version="1.0" encoding="utf-8"?>
+<p:notes xmlns:a="http://schemas.openxmlformats.org/drawingml/2006/main" xmlns:p="http://schemas.openxmlformats.org/presentationml/2006/main" xmlns:r="http://schemas.openxmlformats.org/officeDocument/2006/relationships">
+  <p:cSld>
+    <p:spTree>
+      <p:nvGrpSpPr>
+        <p:cNvPr id="1" name=""/>
+        <p:cNvGrpSpPr/>
+        <p:nvPr/>
+      </p:nvGrpSpPr>
+      <p:grpSpPr>
+        <a:xfrm>
+          <a:off x="0" y="0"/>
+          <a:ext cx="0" cy="0"/>
+          <a:chOff x="0" y="0"/>
+          <a:chExt cx="0" cy="0"/>
+        </a:xfrm>
+      </p:grpSpPr>
+      <p:sp>
+        <p:nvSpPr>
+          <p:cNvPr id="2" name="Slide Image Placeholder 1"/>
+          <p:cNvSpPr>
+            <a:spLocks noGrp="1"/>
+          </p:cNvSpPr>
+          <p:nvPr>
+            <p:ph type="sldImg" idx="2"/>
+          </p:nvPr>
+        </p:nvSpPr>
+        <p:spPr/>
+      </p:sp>
+      <p:sp>
+        <p:nvSpPr>
+          <p:cNvPr id="3" name="Notes Placeholder 2"/>
+          <p:cNvSpPr>
+            <a:spLocks noGrp="1"/>
+          </p:cNvSpPr>
+          <p:nvPr>
+            <p:ph type="body" idx="3" sz="quarter"/>
+          </p:nvPr>
+        </p:nvSpPr>
+        <p:spPr/>
+        <p:txBody>
+          <a:bodyPr/>
+          <a:lstStyle/>
+          <a:p>
+            <a:r>
+              <a:t>This is a capability v2 simply does not have. With one extra output and a self-calibrating loss, the model reports how much to trust each answer. This chart proves it is not noise: sort predictions by claimed confidence and the real error rises monotonically, 0.2 up to 7.4 pixels, correlation 0.38 over 2.35 million points. A robot can use this to reject bad correspondences before they poison a pose estimate.</a:t>
+            </a:r>
+          </a:p>
+        </p:txBody>
+      </p:sp>
+      <p:sp>
+        <p:nvSpPr>
+          <p:cNvPr id="4" name="Slide Number Placeholder 3"/>
+          <p:cNvSpPr>
+            <a:spLocks noGrp="1"/>
+          </p:cNvSpPr>
+          <p:nvPr>
+            <p:ph type="sldNum" idx="5" sz="quarter"/>
+          </p:nvPr>
+        </p:nvSpPr>
+        <p:spPr/>
+      </p:sp>
+    </p:spTree>
+  </p:cSld>
+  <p:clrMapOvr>
+    <a:masterClrMapping/>
+  </p:clrMapOvr>
+</p:notes>
 </file>
 
 <file path=ppt/slideLayouts/slideLayout1.xml><?xml version="1.0" encoding="utf-8"?>
@@ -10618,4 +12158,324 @@
   </a:objectDefaults>
   <a:extraClrSchemeLst/>
 </a:theme>
+</file>
+
+<file path=ppt/theme/theme2.xml><?xml version="1.0" encoding="utf-8"?>
+<a:theme xmlns:a="http://schemas.openxmlformats.org/drawingml/2006/main" name="Office Theme">
+  <a:themeElements>
+    <a:clrScheme name="Office">
+      <a:dk1>
+        <a:sysClr val="windowText" lastClr="000000"/>
+      </a:dk1>
+      <a:lt1>
+        <a:sysClr val="window" lastClr="FFFFFF"/>
+      </a:lt1>
+      <a:dk2>
+        <a:srgbClr val="1F497D"/>
+      </a:dk2>
+      <a:lt2>
+        <a:srgbClr val="EEECE1"/>
+      </a:lt2>
+      <a:accent1>
+        <a:srgbClr val="4F81BD"/>
+      </a:accent1>
+      <a:accent2>
+        <a:srgbClr val="C0504D"/>
+      </a:accent2>
+      <a:accent3>
+        <a:srgbClr val="9BBB59"/>
+      </a:accent3>
+      <a:accent4>
+        <a:srgbClr val="8064A2"/>
+      </a:accent4>
+      <a:accent5>
+        <a:srgbClr val="4BACC6"/>
+      </a:accent5>
+      <a:accent6>
+        <a:srgbClr val="F79646"/>
+      </a:accent6>
+      <a:hlink>
+        <a:srgbClr val="0000FF"/>
+      </a:hlink>
+      <a:folHlink>
+        <a:srgbClr val="800080"/>
+      </a:folHlink>
+    </a:clrScheme>
+    <a:fontScheme name="Office">
+      <a:majorFont>
+        <a:latin typeface="Calibri"/>
+        <a:ea typeface=""/>
+        <a:cs typeface=""/>
+        <a:font script="Jpan" typeface="ＭＳ Ｐゴシック"/>
+        <a:font script="Hang" typeface="맑은 고딕"/>
+        <a:font script="Hans" typeface="宋体"/>
+        <a:font script="Hant" typeface="新細明體"/>
+        <a:font script="Arab" typeface="Times New Roman"/>
+        <a:font script="Hebr" typeface="Times New Roman"/>
+        <a:font script="Thai" typeface="Angsana New"/>
+        <a:font script="Ethi" typeface="Nyala"/>
+        <a:font script="Beng" typeface="Vrinda"/>
+        <a:font script="Gujr" typeface="Shruti"/>
+        <a:font script="Khmr" typeface="MoolBoran"/>
+        <a:font script="Knda" typeface="Tunga"/>
+        <a:font script="Guru" typeface="Raavi"/>
+        <a:font script="Cans" typeface="Euphemia"/>
+        <a:font script="Cher" typeface="Plantagenet Cherokee"/>
+        <a:font script="Yiii" typeface="Microsoft Yi Baiti"/>
+        <a:font script="Tibt" typeface="Microsoft Himalaya"/>
+        <a:font script="Thaa" typeface="MV Boli"/>
+        <a:font script="Deva" typeface="Mangal"/>
+        <a:font script="Telu" typeface="Gautami"/>
+        <a:font script="Taml" typeface="Latha"/>
+        <a:font script="Syrc" typeface="Estrangelo Edessa"/>
+        <a:font script="Orya" typeface="Kalinga"/>
+        <a:font script="Mlym" typeface="Kartika"/>
+        <a:font script="Laoo" typeface="DokChampa"/>
+        <a:font script="Sinh" typeface="Iskoola Pota"/>
+        <a:font script="Mong" typeface="Mongolian Baiti"/>
+        <a:font script="Viet" typeface="Times New Roman"/>
+        <a:font script="Uigh" typeface="Microsoft Uighur"/>
+        <a:font script="Geor" typeface="Sylfaen"/>
+      </a:majorFont>
+      <a:minorFont>
+        <a:latin typeface="Calibri"/>
+        <a:ea typeface=""/>
+        <a:cs typeface=""/>
+        <a:font script="Jpan" typeface="ＭＳ Ｐゴシック"/>
+        <a:font script="Hang" typeface="맑은 고딕"/>
+        <a:font script="Hans" typeface="宋体"/>
+        <a:font script="Hant" typeface="新細明體"/>
+        <a:font script="Arab" typeface="Arial"/>
+        <a:font script="Hebr" typeface="Arial"/>
+        <a:font script="Thai" typeface="Cordia New"/>
+        <a:font script="Ethi" typeface="Nyala"/>
+        <a:font script="Beng" typeface="Vrinda"/>
+        <a:font script="Gujr" typeface="Shruti"/>
+        <a:font script="Khmr" typeface="DaunPenh"/>
+        <a:font script="Knda" typeface="Tunga"/>
+        <a:font script="Guru" typeface="Raavi"/>
+        <a:font script="Cans" typeface="Euphemia"/>
+        <a:font script="Cher" typeface="Plantagenet Cherokee"/>
+        <a:font script="Yiii" typeface="Microsoft Yi Baiti"/>
+        <a:font script="Tibt" typeface="Microsoft Himalaya"/>
+        <a:font script="Thaa" typeface="MV Boli"/>
+        <a:font script="Deva" typeface="Mangal"/>
+        <a:font script="Telu" typeface="Gautami"/>
+        <a:font script="Taml" typeface="Latha"/>
+        <a:font script="Syrc" typeface="Estrangelo Edessa"/>
+        <a:font script="Orya" typeface="Kalinga"/>
+        <a:font script="Mlym" typeface="Kartika"/>
+        <a:font script="Laoo" typeface="DokChampa"/>
+        <a:font script="Sinh" typeface="Iskoola Pota"/>
+        <a:font script="Mong" typeface="Mongolian Baiti"/>
+        <a:font script="Viet" typeface="Arial"/>
+        <a:font script="Uigh" typeface="Microsoft Uighur"/>
+        <a:font script="Geor" typeface="Sylfaen"/>
+      </a:minorFont>
+    </a:fontScheme>
+    <a:fmtScheme name="Office">
+      <a:fillStyleLst>
+        <a:solidFill>
+          <a:schemeClr val="phClr"/>
+        </a:solidFill>
+        <a:gradFill rotWithShape="1">
+          <a:gsLst>
+            <a:gs pos="0">
+              <a:schemeClr val="phClr">
+                <a:tint val="50000"/>
+                <a:satMod val="300000"/>
+              </a:schemeClr>
+            </a:gs>
+            <a:gs pos="35000">
+              <a:schemeClr val="phClr">
+                <a:tint val="37000"/>
+                <a:satMod val="300000"/>
+              </a:schemeClr>
+            </a:gs>
+            <a:gs pos="100000">
+              <a:schemeClr val="phClr">
+                <a:tint val="15000"/>
+                <a:satMod val="350000"/>
+              </a:schemeClr>
+            </a:gs>
+          </a:gsLst>
+          <a:lin ang="16200000" scaled="1"/>
+        </a:gradFill>
+        <a:gradFill rotWithShape="1">
+          <a:gsLst>
+            <a:gs pos="0">
+              <a:schemeClr val="phClr">
+                <a:tint val="100000"/>
+                <a:shade val="100000"/>
+                <a:satMod val="130000"/>
+              </a:schemeClr>
+            </a:gs>
+            <a:gs pos="100000">
+              <a:schemeClr val="phClr">
+                <a:tint val="50000"/>
+                <a:shade val="100000"/>
+                <a:satMod val="350000"/>
+              </a:schemeClr>
+            </a:gs>
+          </a:gsLst>
+          <a:lin ang="16200000" scaled="0"/>
+        </a:gradFill>
+      </a:fillStyleLst>
+      <a:lnStyleLst>
+        <a:ln w="9525" cap="flat" cmpd="sng" algn="ctr">
+          <a:solidFill>
+            <a:schemeClr val="phClr">
+              <a:shade val="95000"/>
+              <a:satMod val="105000"/>
+            </a:schemeClr>
+          </a:solidFill>
+          <a:prstDash val="solid"/>
+        </a:ln>
+        <a:ln w="25400" cap="flat" cmpd="sng" algn="ctr">
+          <a:solidFill>
+            <a:schemeClr val="phClr"/>
+          </a:solidFill>
+          <a:prstDash val="solid"/>
+        </a:ln>
+        <a:ln w="38100" cap="flat" cmpd="sng" algn="ctr">
+          <a:solidFill>
+            <a:schemeClr val="phClr"/>
+          </a:solidFill>
+          <a:prstDash val="solid"/>
+        </a:ln>
+      </a:lnStyleLst>
+      <a:effectStyleLst>
+        <a:effectStyle>
+          <a:effectLst>
+            <a:outerShdw blurRad="40000" dist="20000" dir="5400000" rotWithShape="0">
+              <a:srgbClr val="000000">
+                <a:alpha val="38000"/>
+              </a:srgbClr>
+            </a:outerShdw>
+          </a:effectLst>
+        </a:effectStyle>
+        <a:effectStyle>
+          <a:effectLst>
+            <a:outerShdw blurRad="40000" dist="23000" dir="5400000" rotWithShape="0">
+              <a:srgbClr val="000000">
+                <a:alpha val="35000"/>
+              </a:srgbClr>
+            </a:outerShdw>
+          </a:effectLst>
+        </a:effectStyle>
+        <a:effectStyle>
+          <a:effectLst>
+            <a:outerShdw blurRad="40000" dist="23000" dir="5400000" rotWithShape="0">
+              <a:srgbClr val="000000">
+                <a:alpha val="35000"/>
+              </a:srgbClr>
+            </a:outerShdw>
+          </a:effectLst>
+          <a:scene3d>
+            <a:camera prst="orthographicFront">
+              <a:rot lat="0" lon="0" rev="0"/>
+            </a:camera>
+            <a:lightRig rig="threePt" dir="t">
+              <a:rot lat="0" lon="0" rev="1200000"/>
+            </a:lightRig>
+          </a:scene3d>
+          <a:sp3d>
+            <a:bevelT w="63500" h="25400"/>
+          </a:sp3d>
+        </a:effectStyle>
+      </a:effectStyleLst>
+      <a:bgFillStyleLst>
+        <a:solidFill>
+          <a:schemeClr val="phClr"/>
+        </a:solidFill>
+        <a:gradFill rotWithShape="1">
+          <a:gsLst>
+            <a:gs pos="0">
+              <a:schemeClr val="phClr">
+                <a:tint val="40000"/>
+                <a:satMod val="350000"/>
+              </a:schemeClr>
+            </a:gs>
+            <a:gs pos="40000">
+              <a:schemeClr val="phClr">
+                <a:tint val="45000"/>
+                <a:shade val="99000"/>
+                <a:satMod val="350000"/>
+              </a:schemeClr>
+            </a:gs>
+            <a:gs pos="100000">
+              <a:schemeClr val="phClr">
+                <a:shade val="20000"/>
+                <a:satMod val="255000"/>
+              </a:schemeClr>
+            </a:gs>
+          </a:gsLst>
+          <a:path path="circle">
+            <a:fillToRect l="50000" t="-80000" r="50000" b="180000"/>
+          </a:path>
+        </a:gradFill>
+        <a:gradFill rotWithShape="1">
+          <a:gsLst>
+            <a:gs pos="0">
+              <a:schemeClr val="phClr">
+                <a:tint val="80000"/>
+                <a:satMod val="300000"/>
+              </a:schemeClr>
+            </a:gs>
+            <a:gs pos="100000">
+              <a:schemeClr val="phClr">
+                <a:shade val="30000"/>
+                <a:satMod val="200000"/>
+              </a:schemeClr>
+            </a:gs>
+          </a:gsLst>
+          <a:path path="circle">
+            <a:fillToRect l="50000" t="50000" r="50000" b="50000"/>
+          </a:path>
+        </a:gradFill>
+      </a:bgFillStyleLst>
+    </a:fmtScheme>
+  </a:themeElements>
+  <a:objectDefaults>
+    <a:spDef>
+      <a:spPr/>
+      <a:bodyPr/>
+      <a:lstStyle/>
+      <a:style>
+        <a:lnRef idx="1">
+          <a:schemeClr val="accent1"/>
+        </a:lnRef>
+        <a:fillRef idx="3">
+          <a:schemeClr val="accent1"/>
+        </a:fillRef>
+        <a:effectRef idx="2">
+          <a:schemeClr val="accent1"/>
+        </a:effectRef>
+        <a:fontRef idx="minor">
+          <a:schemeClr val="lt1"/>
+        </a:fontRef>
+      </a:style>
+    </a:spDef>
+    <a:lnDef>
+      <a:spPr/>
+      <a:bodyPr/>
+      <a:lstStyle/>
+      <a:style>
+        <a:lnRef idx="2">
+          <a:schemeClr val="accent1"/>
+        </a:lnRef>
+        <a:fillRef idx="0">
+          <a:schemeClr val="accent1"/>
+        </a:fillRef>
+        <a:effectRef idx="1">
+          <a:schemeClr val="accent1"/>
+        </a:effectRef>
+        <a:fontRef idx="minor">
+          <a:schemeClr val="tx1"/>
+        </a:fontRef>
+      </a:style>
+    </a:lnDef>
+  </a:objectDefaults>
+  <a:extraClrSchemeLst/>
+</a:theme>
 </file>
--- a/docs/NeuFlow_v3_status.pptx
+++ b/docs/NeuFlow_v3_status.pptx
@@ -588,7 +588,7 @@
           <a:lstStyle/>
           <a:p>
             <a:r>
-              <a:t>A separate efficiency result. The refinement loop runs 8 times and is 59 percent of the runtime, but iterations 5 through 8 barely change the answer. I retrained just that module, using the model teaching itself with no ground truth, so 3 iterations do most of what 8 did. Honest caveat, and it is on the record: this number is the coarse stage in isolation. The end-to-end merged version is measured separately; do not quote this as a full-pipeline result.</a:t>
+              <a:t>I am showing this because it is a negative result and I would rather present it than bury it. The refinement loop is 59 percent of runtime, so I retrained just that module to do in 3 iterations what it did in 8, the model teaching itself with no ground truth. Measured in isolation it looked great, 87.5 percent of the gap closed. But when I actually merged it into the full pipeline and measured end to end, only 27 percent held, and it lands below v2 at 2.40. The lesson: a component win measured in isolation is not a deployable win. It only becomes worth pursuing if the decoder is retrained at the reduced iteration count, which I have not done.</a:t>
             </a:r>
           </a:p>
         </p:txBody>
@@ -4907,7 +4907,7 @@
                 </a:solidFill>
                 <a:latin typeface="Georgia"/>
               </a:rPr>
-              <a:t>Option A: refinement self-distillation</a:t>
+              <a:t>Option A: refinement self-distillation (a negative result, reported)</a:t>
             </a:r>
           </a:p>
         </p:txBody>
@@ -4929,7 +4929,7 @@
         <p:spPr>
           <a:xfrm>
             <a:off x="2743200" y="1371600"/>
-            <a:ext cx="6675120" cy="4129523"/>
+            <a:ext cx="6675120" cy="3882739"/>
           </a:xfrm>
           <a:prstGeom prst="rect">
             <a:avLst/>
@@ -4970,7 +4970,7 @@
                 </a:solidFill>
                 <a:latin typeface="Georgia"/>
               </a:rPr>
-              <a:t>The 8-iteration refinement loop is 59% of pipeline runtime; iterations 5-8 barely change</a:t>
+              <a:t>Retrained only the refinement module (teacher = the model itself, no ground truth) so 3</a:t>
             </a:r>
           </a:p>
           <a:p>
@@ -4986,7 +4986,7 @@
                 </a:solidFill>
                 <a:latin typeface="Georgia"/>
               </a:rPr>
-              <a:t>the answer. Retrained ONLY the refinement module (teacher = the model itself, no ground</a:t>
+              <a:t>iterations approach 8. In isolation it closed 87.5% of the gap -- but end-to-end, through</a:t>
             </a:r>
           </a:p>
           <a:p>
@@ -5002,7 +5002,23 @@
                 </a:solidFill>
                 <a:latin typeface="Georgia"/>
               </a:rPr>
-              <a:t>truth) so 3 iterations approach 8-iteration quality at 3-iteration cost. Decoder untouched.</a:t>
+              <a:t>the real decoder, only 27%, and the result (2.398) lands below v2. Kept as a documented</a:t>
+            </a:r>
+          </a:p>
+          <a:p>
+            <a:pPr algn="l">
+              <a:lnSpc>
+                <a:spcPct val="100000"/>
+              </a:lnSpc>
+            </a:pPr>
+            <a:r>
+              <a:rPr sz="1150" b="0">
+                <a:solidFill>
+                  <a:srgbClr val="1A1A1A"/>
+                </a:solidFill>
+                <a:latin typeface="Georgia"/>
+              </a:rPr>
+              <a:t>negative: an isolated-component win does not imply a deployable one.</a:t>
             </a:r>
           </a:p>
         </p:txBody>

--- a/docs/NeuFlow_v3_status.pptx
+++ b/docs/NeuFlow_v3_status.pptx
@@ -587,7 +587,7 @@
           <a:lstStyle/>
           <a:p>
             <a:r>
-              <a:t>This is the capability I am most confident about. The head predicts an error scale for every query alongside the flow itself. When you bin queries by predicted uncertainty, the actual error rises monotonically from 0.22 pixels in the confident bin to 7.4 in the least confident. It is not perfectly correlated, r is 0.38, but it is clearly informative and it is directly usable: weight correspondences in RANSAC, drop unreliable ones, or send more queries where the model is unsure. v2 has no equivalent output, so there is nothing to compare it against.</a:t>
+              <a:t>This is the capability I am most confident about. The head predicts an error scale for every query alongside the flow itself. When you bin queries by predicted uncertainty, the actual error rises monotonically from 0.22 pixels in the confident bin to 6.7 in the least confident, a twenty-one fold span. It is not perfectly correlated, r is 0.345, but it is clearly informative and it is directly usable: weight correspondences in RANSAC, drop unreliable ones, or send more queries where the model is unsure. v2 has no equivalent output, so there is nothing to compare it against.</a:t>
             </a:r>
           </a:p>
         </p:txBody>
@@ -5101,7 +5101,7 @@
                 </a:solidFill>
                 <a:latin typeface="Georgia"/>
               </a:rPr>
-              <a:t>monotonically from 0.22 px to 7.38 px.</a:t>
+              <a:t>monotonically from 0.31 px to 6.72 px,</a:t>
             </a:r>
           </a:p>
           <a:p>
@@ -5117,7 +5117,23 @@
                 </a:solidFill>
                 <a:latin typeface="Georgia"/>
               </a:rPr>
-              <a:t>Pearson r = 0.38 over 2.35M samples.</a:t>
+              <a:t>a 21x span. Pearson r = 0.345 over</a:t>
+            </a:r>
+          </a:p>
+          <a:p>
+            <a:pPr algn="l">
+              <a:lnSpc>
+                <a:spcPct val="118000"/>
+              </a:lnSpc>
+            </a:pPr>
+            <a:r>
+              <a:rPr sz="1150" b="0">
+                <a:solidFill>
+                  <a:srgbClr val="1A1A1A"/>
+                </a:solidFill>
+                <a:latin typeface="Georgia"/>
+              </a:rPr>
+              <a:t>2,348,000 samples.</a:t>
             </a:r>
           </a:p>
           <a:p>

--- a/docs/NeuFlow_v3_status.pptx
+++ b/docs/NeuFlow_v3_status.pptx
@@ -1567,7 +1567,7 @@
           <a:lstStyle/>
           <a:p>
             <a:r>
-              <a:t>These two are the cleanest results in the project, because everything is held fixed except one thing. On the left, adding MPI-Sintel to the training mix made it slightly worse despite ten thousand extra pairs, so Sintel does not earn its place. On the right, adding the uncertainty head improved accuracy by two percent on identical data. That is a free gain from an auxiliary loss acting as a regulariser, and it also gives you a confidence signal, which is the next slide.</a:t>
+              <a:t>I want to show you a slide that removes two of my own results. I had claimed two clean ablations: that Sintel adds nothing, and that the uncertainty head helps by two percent. Then I evaluated a second checkpoint of the same runs, ten thousand steps earlier, and both conclusions reversed. Sintel helps at 90k and hurts at 100k. The uncertainty head hurts at 90k and helps at 100k. The differences I was interpreting are smaller than the variation between checkpoints of a single run. So with one seed and one checkpoint I cannot answer either question, and I am not going to pretend otherwise. What is robust is the coarse effect: adding driving data gains about 0.15 pixels at both checkpoints. To resolve anything finer I would need multiple seeds and an average over late checkpoints.</a:t>
             </a:r>
           </a:p>
         </p:txBody>
@@ -8305,7 +8305,7 @@
                 </a:solidFill>
                 <a:latin typeface="Georgia"/>
               </a:rPr>
-              <a:t>One seed per configuration</a:t>
+              <a:t>One seed, and checkpoint noise the size of the effects</a:t>
             </a:r>
           </a:p>
         </p:txBody>
@@ -8344,7 +8344,7 @@
                 </a:solidFill>
                 <a:latin typeface="Georgia"/>
               </a:rPr>
-              <a:t>Differences under about 0.05 px should not be over-read; I have not measured seed-to-seed variance.</a:t>
+              <a:t>Step 90k vs 100k of the same run moves EPE by up to 0.038 px, reversing two of the orderings. Nothing finer than about 0.05 px is resolvable here.</a:t>
             </a:r>
           </a:p>
         </p:txBody>
@@ -14386,7 +14386,7 @@
                 </a:solidFill>
                 <a:latin typeface="Georgia"/>
               </a:rPr>
-              <a:t>Best overall: 2.104 px</a:t>
+              <a:t>The three mixes land between 2.10 and 2.16 px</a:t>
             </a:r>
           </a:p>
           <a:p>
@@ -14398,7 +14398,7 @@
                 </a:solidFill>
                 <a:latin typeface="Georgia"/>
               </a:rPr>
-              <a:t>with uncertainty head,</a:t>
+              <a:t>and are not separable from one another.</a:t>
             </a:r>
           </a:p>
           <a:p>
@@ -14410,7 +14410,7 @@
                 </a:solidFill>
                 <a:latin typeface="Georgia"/>
               </a:rPr>
-              <a:t>trained on FlyingChairs + VKITTI2 + Sintel</a:t>
+              <a:t>See slide 9.</a:t>
             </a:r>
           </a:p>
         </p:txBody>
@@ -15557,14 +15557,14 @@
                 </a:solidFill>
                 <a:latin typeface="Georgia"/>
               </a:rPr>
-              <a:t>Two clean single-variable ablations</a:t>
+              <a:t>What this experiment can and cannot resolve</a:t>
             </a:r>
           </a:p>
         </p:txBody>
       </p:sp>
       <p:pic>
         <p:nvPicPr>
-          <p:cNvPr id="4" name="Picture 3" descr="ablations.png"/>
+          <p:cNvPr id="4" name="Picture 3" descr="checkpoint_noise.png"/>
           <p:cNvPicPr>
             <a:picLocks noChangeAspect="1"/>
           </p:cNvPicPr>
@@ -15578,8 +15578,8 @@
         </p:blipFill>
         <p:spPr>
           <a:xfrm>
-            <a:off x="1051560" y="1554480"/>
-            <a:ext cx="8778240" cy="3653588"/>
+            <a:off x="685800" y="1463040"/>
+            <a:ext cx="6858000" cy="3557255"/>
           </a:xfrm>
           <a:prstGeom prst="rect">
             <a:avLst/>
@@ -15594,72 +15594,331 @@
         </p:nvSpPr>
         <p:spPr>
           <a:xfrm>
-            <a:off x="685800" y="5257800"/>
-            <a:ext cx="10881360" cy="914400"/>
-          </a:xfrm>
-          <a:prstGeom prst="rect">
-            <a:avLst/>
-          </a:prstGeom>
-          <a:noFill/>
-        </p:spPr>
-        <p:txBody>
-          <a:bodyPr wrap="square">
-            <a:spAutoFit/>
-          </a:bodyPr>
-          <a:lstStyle/>
-          <a:p>
-            <a:pPr algn="l">
-              <a:lnSpc>
-                <a:spcPct val="120000"/>
-              </a:lnSpc>
-            </a:pPr>
-            <a:r>
-              <a:rPr sz="1200" b="0">
-                <a:solidFill>
-                  <a:srgbClr val="1A1A1A"/>
-                </a:solidFill>
-                <a:latin typeface="Georgia"/>
-              </a:rPr>
-              <a:t>Both pairs are identical in seed, schedule and every hyperparameter; one thing changes.</a:t>
-            </a:r>
-          </a:p>
-          <a:p>
-            <a:pPr algn="l">
-              <a:lnSpc>
-                <a:spcPct val="120000"/>
-              </a:lnSpc>
-            </a:pPr>
-            <a:r>
-              <a:rPr sz="1200" b="0">
-                <a:solidFill>
-                  <a:srgbClr val="1A1A1A"/>
-                </a:solidFill>
-                <a:latin typeface="Georgia"/>
-              </a:rPr>
-              <a:t>Adding MPI-Sintel to the mix costs 0.4% despite 10,410 extra pairs, so it does not earn its place.</a:t>
-            </a:r>
-          </a:p>
-          <a:p>
-            <a:pPr algn="l">
-              <a:lnSpc>
-                <a:spcPct val="120000"/>
-              </a:lnSpc>
-            </a:pPr>
-            <a:r>
-              <a:rPr sz="1200" b="0">
-                <a:solidFill>
-                  <a:srgbClr val="1A1A1A"/>
-                </a:solidFill>
-                <a:latin typeface="Georgia"/>
-              </a:rPr>
-              <a:t>The uncertainty head gains 2.0% while also producing a confidence value, so it is kept.</a:t>
-            </a:r>
-          </a:p>
-        </p:txBody>
-      </p:sp>
-      <p:sp>
-        <p:nvSpPr>
-          <p:cNvPr id="6" name="TextBox 5"/>
+            <a:off x="7818120" y="1600200"/>
+            <a:ext cx="3840480" cy="3566160"/>
+          </a:xfrm>
+          <a:prstGeom prst="rect">
+            <a:avLst/>
+          </a:prstGeom>
+          <a:noFill/>
+        </p:spPr>
+        <p:txBody>
+          <a:bodyPr wrap="square">
+            <a:spAutoFit/>
+          </a:bodyPr>
+          <a:lstStyle/>
+          <a:p>
+            <a:pPr algn="l">
+              <a:lnSpc>
+                <a:spcPct val="116000"/>
+              </a:lnSpc>
+            </a:pPr>
+            <a:r>
+              <a:rPr sz="1150" b="0">
+                <a:solidFill>
+                  <a:srgbClr val="1A1A1A"/>
+                </a:solidFill>
+                <a:latin typeface="Georgia"/>
+              </a:rPr>
+              <a:t>Evaluating step 90,000 and step 100,000</a:t>
+            </a:r>
+          </a:p>
+          <a:p>
+            <a:pPr algn="l">
+              <a:lnSpc>
+                <a:spcPct val="116000"/>
+              </a:lnSpc>
+            </a:pPr>
+            <a:r>
+              <a:rPr sz="1150" b="0">
+                <a:solidFill>
+                  <a:srgbClr val="1A1A1A"/>
+                </a:solidFill>
+                <a:latin typeface="Georgia"/>
+              </a:rPr>
+              <a:t>of the same four runs moves each result</a:t>
+            </a:r>
+          </a:p>
+          <a:p>
+            <a:pPr algn="l">
+              <a:lnSpc>
+                <a:spcPct val="116000"/>
+              </a:lnSpc>
+            </a:pPr>
+            <a:r>
+              <a:rPr sz="1150" b="0">
+                <a:solidFill>
+                  <a:srgbClr val="1A1A1A"/>
+                </a:solidFill>
+                <a:latin typeface="Georgia"/>
+              </a:rPr>
+              <a:t>by up to 0.038 px.</a:t>
+            </a:r>
+          </a:p>
+          <a:p>
+            <a:pPr algn="l">
+              <a:lnSpc>
+                <a:spcPct val="116000"/>
+              </a:lnSpc>
+            </a:pPr>
+            <a:r>
+              <a:rPr sz="1150" b="0">
+                <a:solidFill>
+                  <a:srgbClr val="1A1A1A"/>
+                </a:solidFill>
+                <a:latin typeface="Georgia"/>
+              </a:rPr>
+              <a:t/>
+            </a:r>
+          </a:p>
+          <a:p>
+            <a:pPr algn="l">
+              <a:lnSpc>
+                <a:spcPct val="116000"/>
+              </a:lnSpc>
+            </a:pPr>
+            <a:r>
+              <a:rPr sz="1150" b="0">
+                <a:solidFill>
+                  <a:srgbClr val="1A1A1A"/>
+                </a:solidFill>
+                <a:latin typeface="Georgia"/>
+              </a:rPr>
+              <a:t>The differences between the runs are the</a:t>
+            </a:r>
+          </a:p>
+          <a:p>
+            <a:pPr algn="l">
+              <a:lnSpc>
+                <a:spcPct val="116000"/>
+              </a:lnSpc>
+            </a:pPr>
+            <a:r>
+              <a:rPr sz="1150" b="0">
+                <a:solidFill>
+                  <a:srgbClr val="1A1A1A"/>
+                </a:solidFill>
+                <a:latin typeface="Georgia"/>
+              </a:rPr>
+              <a:t>same size. Two orderings reverse:</a:t>
+            </a:r>
+          </a:p>
+          <a:p>
+            <a:pPr algn="l">
+              <a:lnSpc>
+                <a:spcPct val="116000"/>
+              </a:lnSpc>
+            </a:pPr>
+            <a:r>
+              <a:rPr sz="1150" b="0">
+                <a:solidFill>
+                  <a:srgbClr val="1A1A1A"/>
+                </a:solidFill>
+                <a:latin typeface="Georgia"/>
+              </a:rPr>
+              <a:t/>
+            </a:r>
+          </a:p>
+          <a:p>
+            <a:pPr algn="l">
+              <a:lnSpc>
+                <a:spcPct val="116000"/>
+              </a:lnSpc>
+            </a:pPr>
+            <a:r>
+              <a:rPr sz="1150" b="0">
+                <a:solidFill>
+                  <a:srgbClr val="1A1A1A"/>
+                </a:solidFill>
+                <a:latin typeface="Georgia"/>
+              </a:rPr>
+              <a:t>  MPI-Sintel helps at 90k (-0.051),</a:t>
+            </a:r>
+          </a:p>
+          <a:p>
+            <a:pPr algn="l">
+              <a:lnSpc>
+                <a:spcPct val="116000"/>
+              </a:lnSpc>
+            </a:pPr>
+            <a:r>
+              <a:rPr sz="1150" b="0">
+                <a:solidFill>
+                  <a:srgbClr val="1A1A1A"/>
+                </a:solidFill>
+                <a:latin typeface="Georgia"/>
+              </a:rPr>
+              <a:t>  hurts at 100k (+0.009)</a:t>
+            </a:r>
+          </a:p>
+          <a:p>
+            <a:pPr algn="l">
+              <a:lnSpc>
+                <a:spcPct val="116000"/>
+              </a:lnSpc>
+            </a:pPr>
+            <a:r>
+              <a:rPr sz="1150" b="0">
+                <a:solidFill>
+                  <a:srgbClr val="1A1A1A"/>
+                </a:solidFill>
+                <a:latin typeface="Georgia"/>
+              </a:rPr>
+              <a:t/>
+            </a:r>
+          </a:p>
+          <a:p>
+            <a:pPr algn="l">
+              <a:lnSpc>
+                <a:spcPct val="116000"/>
+              </a:lnSpc>
+            </a:pPr>
+            <a:r>
+              <a:rPr sz="1150" b="0">
+                <a:solidFill>
+                  <a:srgbClr val="1A1A1A"/>
+                </a:solidFill>
+                <a:latin typeface="Georgia"/>
+              </a:rPr>
+              <a:t>  the uncertainty head hurts at 90k</a:t>
+            </a:r>
+          </a:p>
+          <a:p>
+            <a:pPr algn="l">
+              <a:lnSpc>
+                <a:spcPct val="116000"/>
+              </a:lnSpc>
+            </a:pPr>
+            <a:r>
+              <a:rPr sz="1150" b="0">
+                <a:solidFill>
+                  <a:srgbClr val="1A1A1A"/>
+                </a:solidFill>
+                <a:latin typeface="Georgia"/>
+              </a:rPr>
+              <a:t>  (+0.011), helps at 100k (-0.043)</a:t>
+            </a:r>
+          </a:p>
+          <a:p>
+            <a:pPr algn="l">
+              <a:lnSpc>
+                <a:spcPct val="116000"/>
+              </a:lnSpc>
+            </a:pPr>
+            <a:r>
+              <a:rPr sz="1150" b="0">
+                <a:solidFill>
+                  <a:srgbClr val="1A1A1A"/>
+                </a:solidFill>
+                <a:latin typeface="Georgia"/>
+              </a:rPr>
+              <a:t/>
+            </a:r>
+          </a:p>
+          <a:p>
+            <a:pPr algn="l">
+              <a:lnSpc>
+                <a:spcPct val="116000"/>
+              </a:lnSpc>
+            </a:pPr>
+            <a:r>
+              <a:rPr sz="1150" b="0">
+                <a:solidFill>
+                  <a:srgbClr val="1A1A1A"/>
+                </a:solidFill>
+                <a:latin typeface="Georgia"/>
+              </a:rPr>
+              <a:t>With one seed and one checkpoint,</a:t>
+            </a:r>
+          </a:p>
+          <a:p>
+            <a:pPr algn="l">
+              <a:lnSpc>
+                <a:spcPct val="116000"/>
+              </a:lnSpc>
+            </a:pPr>
+            <a:r>
+              <a:rPr sz="1150" b="0">
+                <a:solidFill>
+                  <a:srgbClr val="1A1A1A"/>
+                </a:solidFill>
+                <a:latin typeface="Georgia"/>
+              </a:rPr>
+              <a:t>neither question is answerable.</a:t>
+            </a:r>
+          </a:p>
+        </p:txBody>
+      </p:sp>
+      <p:sp>
+        <p:nvSpPr>
+          <p:cNvPr id="6" name="Rounded Rectangle 5"/>
+          <p:cNvSpPr/>
+          <p:nvPr/>
+        </p:nvSpPr>
+        <p:spPr>
+          <a:xfrm>
+            <a:off x="685800" y="5440680"/>
+            <a:ext cx="6858000" cy="777240"/>
+          </a:xfrm>
+          <a:prstGeom prst="roundRect">
+            <a:avLst/>
+          </a:prstGeom>
+          <a:solidFill>
+            <a:srgbClr val="EFEFEF"/>
+          </a:solidFill>
+          <a:ln w="9525">
+            <a:solidFill>
+              <a:srgbClr val="8A8A8A"/>
+            </a:solidFill>
+          </a:ln>
+          <a:effectLst/>
+        </p:spPr>
+        <p:style>
+          <a:lnRef idx="1">
+            <a:schemeClr val="accent1"/>
+          </a:lnRef>
+          <a:fillRef idx="3">
+            <a:schemeClr val="accent1"/>
+          </a:fillRef>
+          <a:effectRef idx="2">
+            <a:schemeClr val="accent1"/>
+          </a:effectRef>
+          <a:fontRef idx="minor">
+            <a:schemeClr val="lt1"/>
+          </a:fontRef>
+        </p:style>
+        <p:txBody>
+          <a:bodyPr rtlCol="0" anchor="ctr" wrap="square" lIns="73152" rIns="73152"/>
+          <a:lstStyle/>
+          <a:p>
+            <a:pPr algn="ctr"/>
+            <a:r>
+              <a:rPr sz="1100" b="0">
+                <a:solidFill>
+                  <a:srgbClr val="1A1A1A"/>
+                </a:solidFill>
+                <a:latin typeface="Georgia"/>
+              </a:rPr>
+              <a:t>What IS robust: adding driving data to FlyingChairs gains about 0.15 px and 5 points of 1-pixel</a:t>
+            </a:r>
+          </a:p>
+          <a:p>
+            <a:pPr algn="ctr"/>
+            <a:r>
+              <a:rPr sz="1100" b="0">
+                <a:solidFill>
+                  <a:srgbClr val="1A1A1A"/>
+                </a:solidFill>
+                <a:latin typeface="Georgia"/>
+              </a:rPr>
+              <a:t>accuracy at BOTH checkpoints. Everything finer than that is inside the noise.</a:t>
+            </a:r>
+          </a:p>
+        </p:txBody>
+      </p:sp>
+      <p:sp>
+        <p:nvSpPr>
+          <p:cNvPr id="7" name="TextBox 6"/>
           <p:cNvSpPr txBox="1"/>
           <p:nvPr/>
         </p:nvSpPr>
@@ -15698,7 +15957,7 @@
       </p:sp>
       <p:sp>
         <p:nvSpPr>
-          <p:cNvPr id="7" name="TextBox 6"/>
+          <p:cNvPr id="8" name="TextBox 7"/>
           <p:cNvSpPr txBox="1"/>
           <p:nvPr/>
         </p:nvSpPr>

--- a/docs/NeuFlow_v3_status.pptx
+++ b/docs/NeuFlow_v3_status.pptx
@@ -1147,7 +1147,7 @@
           <a:lstStyle/>
           <a:p>
             <a:r>
-              <a:t>NeuFlow v2 is the lab's real-time flow network. Backbone, matching, refinement, then a convex upsampler that turns 1/8 resolution flow into full resolution. I freeze everything up to the coarse flow and change only the last stage. On our V100 it runs a full frame in 19.6 milliseconds at 2.324 pixels of error. Its limitation is structural: the output is always the same size and always costs the same, whether you need one pixel or all of them.</a:t>
+              <a:t>NeuFlow v2 is the lab's real-time flow network. Backbone, matching, refinement, then a convex upsampler that turns 1/8 resolution flow into full resolution. I freeze everything up to the coarse flow and change only the last stage. On our V100 it runs a full frame in 19.3 milliseconds at 2.324 pixels of error. Its limitation is structural: the output is always the same size and always costs the same, whether you need one pixel or all of them.</a:t>
             </a:r>
           </a:p>
         </p:txBody>
@@ -1497,7 +1497,7 @@
           <a:lstStyle/>
           <a:p>
             <a:r>
-              <a:t>Speed. Three of these four bars are not wins. Dense v3 is twelve percent slower than v2, and I want to flag that an earlier version of this deck claimed v3 dense was faster. That measurement was taken before the BatchNorm fix and on a different GPU. It was wrong and I have withdrawn it. A first sparse query is level with v2, not faster, because the coarse pass dominates and you cannot avoid it. The real win is the fourth bar: asking a second question about a frame you have already processed costs 2.6 milliseconds against v2's 19.6, because v2 has no cached state and must redo everything. That is structural, not a margin.</a:t>
+              <a:t>Speed. Three of these four bars are not wins. Dense v3 is twelve percent slower than v2, and I want to flag that an earlier version of this deck claimed v3 dense was faster. That measurement was taken before the BatchNorm fix and on a different GPU. It was wrong and I have withdrawn it. A first sparse query is level with v2, not faster, because the coarse pass dominates and you cannot avoid it. The real win is the fourth bar: asking a second question about a frame you have already processed costs 2.6 milliseconds against v2's 19.3, because v2 has no cached state and must redo everything. That is structural, not a margin.</a:t>
             </a:r>
           </a:p>
         </p:txBody>
@@ -5101,7 +5101,7 @@
                 </a:solidFill>
                 <a:latin typeface="Georgia"/>
               </a:rPr>
-              <a:t>monotonically from 0.31 px to 6.72 px,</a:t>
+              <a:t>monotonically from 0.48 px to 7.10 px,</a:t>
             </a:r>
           </a:p>
           <a:p>
@@ -5117,7 +5117,7 @@
                 </a:solidFill>
                 <a:latin typeface="Georgia"/>
               </a:rPr>
-              <a:t>a 21x span. Pearson r = 0.345 over</a:t>
+              <a:t>a 15x span. Pearson r = 0.318 over</a:t>
             </a:r>
           </a:p>
           <a:p>
@@ -6685,7 +6685,7 @@
                 </a:solidFill>
                 <a:latin typeface="Georgia"/>
               </a:rPr>
-              <a:t>fair comparison is 2.286 vs 2.324, a tie</a:t>
+              <a:t>best v3 2.384 vs 2.324; every config above v2</a:t>
             </a:r>
           </a:p>
         </p:txBody>
@@ -6802,7 +6802,7 @@
                 </a:solidFill>
                 <a:latin typeface="Georgia"/>
               </a:rPr>
-              <a:t>better numbers require in-domain training data</a:t>
+              <a:t>like-for-like 2.500, i.e. 7.6% behind</a:t>
             </a:r>
           </a:p>
         </p:txBody>
@@ -7036,7 +7036,7 @@
                 </a:solidFill>
                 <a:latin typeface="Georgia"/>
               </a:rPr>
-              <a:t>dense 12% slower; first query level</a:t>
+              <a:t>dense 14% slower; first query level</a:t>
             </a:r>
           </a:p>
         </p:txBody>
@@ -7153,7 +7153,7 @@
                 </a:solidFill>
                 <a:latin typeface="Georgia"/>
               </a:rPr>
-              <a:t>repeat query 7.7x cheaper (2.6 vs 19.6 ms)</a:t>
+              <a:t>repeat query 7.7x cheaper (2.6 vs 19.3 ms)</a:t>
             </a:r>
           </a:p>
         </p:txBody>
@@ -11211,7 +11211,7 @@
                 </a:solidFill>
                 <a:latin typeface="Georgia"/>
               </a:rPr>
-              <a:t>19.6 ms</a:t>
+              <a:t>19.3 ms</a:t>
             </a:r>
           </a:p>
         </p:txBody>
@@ -14092,7 +14092,7 @@
                 </a:solidFill>
                 <a:latin typeface="Georgia"/>
               </a:rPr>
-              <a:t>Accuracy: the fair comparison is a tie</a:t>
+              <a:t>Accuracy: the decoder costs 2.6 percent</a:t>
             </a:r>
           </a:p>
         </p:txBody>
@@ -14155,7 +14155,7 @@
                 </a:solidFill>
                 <a:latin typeface="Georgia"/>
               </a:rPr>
-              <a:t>Only the FlyingChairs run is a like-for-like</a:t>
+              <a:t>Every v3 configuration sits above v2.</a:t>
             </a:r>
           </a:p>
           <a:p>
@@ -14171,7 +14171,7 @@
                 </a:solidFill>
                 <a:latin typeface="Georgia"/>
               </a:rPr>
-              <a:t>comparison with v2: it never saw driving</a:t>
+              <a:t/>
             </a:r>
           </a:p>
           <a:p>
@@ -14187,7 +14187,7 @@
                 </a:solidFill>
                 <a:latin typeface="Georgia"/>
               </a:rPr>
-              <a:t>imagery, exactly as v2 never did.</a:t>
+              <a:t>Best: 2.384 against v2 at 2.324, so 2.6%</a:t>
             </a:r>
           </a:p>
           <a:p>
@@ -14203,6 +14203,38 @@
                 </a:solidFill>
                 <a:latin typeface="Georgia"/>
               </a:rPr>
+              <a:t>worse on mean error and 1.5 points worse</a:t>
+            </a:r>
+          </a:p>
+          <a:p>
+            <a:pPr algn="l">
+              <a:lnSpc>
+                <a:spcPct val="118000"/>
+              </a:lnSpc>
+            </a:pPr>
+            <a:r>
+              <a:rPr sz="1150" b="0">
+                <a:solidFill>
+                  <a:srgbClr val="1A1A1A"/>
+                </a:solidFill>
+                <a:latin typeface="Georgia"/>
+              </a:rPr>
+              <a:t>on 1-pixel accuracy.</a:t>
+            </a:r>
+          </a:p>
+          <a:p>
+            <a:pPr algn="l">
+              <a:lnSpc>
+                <a:spcPct val="118000"/>
+              </a:lnSpc>
+            </a:pPr>
+            <a:r>
+              <a:rPr sz="1150" b="0">
+                <a:solidFill>
+                  <a:srgbClr val="1A1A1A"/>
+                </a:solidFill>
+                <a:latin typeface="Georgia"/>
+              </a:rPr>
               <a:t/>
             </a:r>
           </a:p>
@@ -14219,7 +14251,7 @@
                 </a:solidFill>
                 <a:latin typeface="Georgia"/>
               </a:rPr>
-              <a:t>It scores 2.286 against v2 at 2.324.</a:t>
+              <a:t>Like-for-like, trained on FlyingChairs only</a:t>
             </a:r>
           </a:p>
           <a:p>
@@ -14235,7 +14267,7 @@
                 </a:solidFill>
                 <a:latin typeface="Georgia"/>
               </a:rPr>
-              <a:t>A 1.6% difference is a tie, not a win.</a:t>
+              <a:t>as v2 was, it is 2.500, or 7.6% behind.</a:t>
             </a:r>
           </a:p>
           <a:p>
@@ -14267,7 +14299,7 @@
                 </a:solidFill>
                 <a:latin typeface="Georgia"/>
               </a:rPr>
-              <a:t>The other three train on VKITTI2 imagery</a:t>
+              <a:t>The implicit decoder is less accurate than</a:t>
             </a:r>
           </a:p>
           <a:p>
@@ -14283,7 +14315,7 @@
                 </a:solidFill>
                 <a:latin typeface="Georgia"/>
               </a:rPr>
-              <a:t>from the same simulator and camera as the</a:t>
+              <a:t>the convex upsampler it replaces. The cause</a:t>
             </a:r>
           </a:p>
           <a:p>
@@ -14299,7 +14331,7 @@
                 </a:solidFill>
                 <a:latin typeface="Georgia"/>
               </a:rPr>
-              <a:t>test scenes. Their better numbers measure</a:t>
+              <a:t>is known and is not a training artefact:</a:t>
             </a:r>
           </a:p>
           <a:p>
@@ -14315,23 +14347,7 @@
                 </a:solidFill>
                 <a:latin typeface="Georgia"/>
               </a:rPr>
-              <a:t>domain advantage, not a better method,</a:t>
-            </a:r>
-          </a:p>
-          <a:p>
-            <a:pPr algn="l">
-              <a:lnSpc>
-                <a:spcPct val="118000"/>
-              </a:lnSpc>
-            </a:pPr>
-            <a:r>
-              <a:rPr sz="1150" b="0">
-                <a:solidFill>
-                  <a:srgbClr val="1A1A1A"/>
-                </a:solidFill>
-                <a:latin typeface="Georgia"/>
-              </a:rPr>
-              <a:t>and I do not present them as beating v2.</a:t>
+              <a:t>see the precision slide.</a:t>
             </a:r>
           </a:p>
         </p:txBody>
@@ -14386,7 +14402,7 @@
                 </a:solidFill>
                 <a:latin typeface="Georgia"/>
               </a:rPr>
-              <a:t>The three mixes land between 2.10 and 2.16 px</a:t>
+              <a:t>These replace an earlier set showing 2.10-2.29 px,</a:t>
             </a:r>
           </a:p>
           <a:p>
@@ -14398,7 +14414,7 @@
                 </a:solidFill>
                 <a:latin typeface="Georgia"/>
               </a:rPr>
-              <a:t>and are not separable from one another.</a:t>
+              <a:t>produced by runs whose frozen backbone was</a:t>
             </a:r>
           </a:p>
           <a:p>
@@ -14410,7 +14426,7 @@
                 </a:solidFill>
                 <a:latin typeface="Georgia"/>
               </a:rPr>
-              <a:t>See slide 9.</a:t>
+              <a:t>silently drifting. See slide 9.</a:t>
             </a:r>
           </a:p>
         </p:txBody>
@@ -15124,7 +15140,7 @@
                 </a:solidFill>
                 <a:latin typeface="Georgia"/>
               </a:rPr>
-              <a:t>Dense: v3 is 12% slower</a:t>
+              <a:t>Dense: v3 is 14% slower</a:t>
             </a:r>
           </a:p>
           <a:p>
@@ -15371,7 +15387,7 @@
                 </a:solidFill>
                 <a:latin typeface="Georgia"/>
               </a:rPr>
-              <a:t>2.6 ms against 19.6 ms.</a:t>
+              <a:t>2.6 ms against 19.3 ms.</a:t>
             </a:r>
           </a:p>
           <a:p>
@@ -15557,14 +15573,14 @@
                 </a:solidFill>
                 <a:latin typeface="Georgia"/>
               </a:rPr>
-              <a:t>What this experiment can and cannot resolve</a:t>
+              <a:t>What the frozen-backbone fix was worth</a:t>
             </a:r>
           </a:p>
         </p:txBody>
       </p:sp>
       <p:pic>
         <p:nvPicPr>
-          <p:cNvPr id="4" name="Picture 3" descr="checkpoint_noise.png"/>
+          <p:cNvPr id="4" name="Picture 3" descr="freeze_effect.png"/>
           <p:cNvPicPr>
             <a:picLocks noChangeAspect="1"/>
           </p:cNvPicPr>
@@ -15579,7 +15595,7 @@
         <p:spPr>
           <a:xfrm>
             <a:off x="685800" y="1463040"/>
-            <a:ext cx="6858000" cy="3557255"/>
+            <a:ext cx="6858000" cy="3554746"/>
           </a:xfrm>
           <a:prstGeom prst="rect">
             <a:avLst/>
@@ -15620,7 +15636,7 @@
                 </a:solidFill>
                 <a:latin typeface="Georgia"/>
               </a:rPr>
-              <a:t>Evaluating step 90,000 and step 100,000</a:t>
+              <a:t>BatchNorm updates its running statistics</a:t>
             </a:r>
           </a:p>
           <a:p>
@@ -15636,7 +15652,7 @@
                 </a:solidFill>
                 <a:latin typeface="Georgia"/>
               </a:rPr>
-              <a:t>of the same four runs moves each result</a:t>
+              <a:t>on every forward pass in train mode,</a:t>
             </a:r>
           </a:p>
           <a:p>
@@ -15652,7 +15668,7 @@
                 </a:solidFill>
                 <a:latin typeface="Georgia"/>
               </a:rPr>
-              <a:t>by up to 0.038 px.</a:t>
+              <a:t>whatever requires_grad says.</a:t>
             </a:r>
           </a:p>
           <a:p>
@@ -15684,7 +15700,7 @@
                 </a:solidFill>
                 <a:latin typeface="Georgia"/>
               </a:rPr>
-              <a:t>The differences between the runs are the</a:t>
+              <a:t>My first fix held them in eval mode once</a:t>
             </a:r>
           </a:p>
           <a:p>
@@ -15700,7 +15716,7 @@
                 </a:solidFill>
                 <a:latin typeface="Georgia"/>
               </a:rPr>
-              <a:t>same size. Two orderings reverse:</a:t>
+              <a:t>per epoch. The validation block calls</a:t>
             </a:r>
           </a:p>
           <a:p>
@@ -15716,6 +15732,38 @@
                 </a:solidFill>
                 <a:latin typeface="Georgia"/>
               </a:rPr>
+              <a:t>model.train() again every 5,000 steps,</a:t>
+            </a:r>
+          </a:p>
+          <a:p>
+            <a:pPr algn="l">
+              <a:lnSpc>
+                <a:spcPct val="116000"/>
+              </a:lnSpc>
+            </a:pPr>
+            <a:r>
+              <a:rPr sz="1150" b="0">
+                <a:solidFill>
+                  <a:srgbClr val="1A1A1A"/>
+                </a:solidFill>
+                <a:latin typeface="Georgia"/>
+              </a:rPr>
+              <a:t>which silently re-enabled them.</a:t>
+            </a:r>
+          </a:p>
+          <a:p>
+            <a:pPr algn="l">
+              <a:lnSpc>
+                <a:spcPct val="116000"/>
+              </a:lnSpc>
+            </a:pPr>
+            <a:r>
+              <a:rPr sz="1150" b="0">
+                <a:solidFill>
+                  <a:srgbClr val="1A1A1A"/>
+                </a:solidFill>
+                <a:latin typeface="Georgia"/>
+              </a:rPr>
               <a:t/>
             </a:r>
           </a:p>
@@ -15732,7 +15780,7 @@
                 </a:solidFill>
                 <a:latin typeface="Georgia"/>
               </a:rPr>
-              <a:t>  MPI-Sintel helps at 90k (-0.051),</a:t>
+              <a:t>Result: 24,765 updates during a run that</a:t>
             </a:r>
           </a:p>
           <a:p>
@@ -15748,7 +15796,7 @@
                 </a:solidFill>
                 <a:latin typeface="Georgia"/>
               </a:rPr>
-              <a:t>  hurts at 100k (+0.009)</a:t>
+              <a:t>was supposed to be frozen, worth about</a:t>
             </a:r>
           </a:p>
           <a:p>
@@ -15764,6 +15812,38 @@
                 </a:solidFill>
                 <a:latin typeface="Georgia"/>
               </a:rPr>
+              <a:t>0.25 px, which is what made v3 look</a:t>
+            </a:r>
+          </a:p>
+          <a:p>
+            <a:pPr algn="l">
+              <a:lnSpc>
+                <a:spcPct val="116000"/>
+              </a:lnSpc>
+            </a:pPr>
+            <a:r>
+              <a:rPr sz="1150" b="0">
+                <a:solidFill>
+                  <a:srgbClr val="1A1A1A"/>
+                </a:solidFill>
+                <a:latin typeface="Georgia"/>
+              </a:rPr>
+              <a:t>equal to v2.</a:t>
+            </a:r>
+          </a:p>
+          <a:p>
+            <a:pPr algn="l">
+              <a:lnSpc>
+                <a:spcPct val="116000"/>
+              </a:lnSpc>
+            </a:pPr>
+            <a:r>
+              <a:rPr sz="1150" b="0">
+                <a:solidFill>
+                  <a:srgbClr val="1A1A1A"/>
+                </a:solidFill>
+                <a:latin typeface="Georgia"/>
+              </a:rPr>
               <a:t/>
             </a:r>
           </a:p>
@@ -15780,7 +15860,7 @@
                 </a:solidFill>
                 <a:latin typeface="Georgia"/>
               </a:rPr>
-              <a:t>  the uncertainty head hurts at 90k</a:t>
+              <a:t>Now verified per checkpoint: all 137</a:t>
             </a:r>
           </a:p>
           <a:p>
@@ -15796,55 +15876,7 @@
                 </a:solidFill>
                 <a:latin typeface="Georgia"/>
               </a:rPr>
-              <a:t>  (+0.011), helps at 100k (-0.043)</a:t>
-            </a:r>
-          </a:p>
-          <a:p>
-            <a:pPr algn="l">
-              <a:lnSpc>
-                <a:spcPct val="116000"/>
-              </a:lnSpc>
-            </a:pPr>
-            <a:r>
-              <a:rPr sz="1150" b="0">
-                <a:solidFill>
-                  <a:srgbClr val="1A1A1A"/>
-                </a:solidFill>
-                <a:latin typeface="Georgia"/>
-              </a:rPr>
-              <a:t/>
-            </a:r>
-          </a:p>
-          <a:p>
-            <a:pPr algn="l">
-              <a:lnSpc>
-                <a:spcPct val="116000"/>
-              </a:lnSpc>
-            </a:pPr>
-            <a:r>
-              <a:rPr sz="1150" b="0">
-                <a:solidFill>
-                  <a:srgbClr val="1A1A1A"/>
-                </a:solidFill>
-                <a:latin typeface="Georgia"/>
-              </a:rPr>
-              <a:t>With one seed and one checkpoint,</a:t>
-            </a:r>
-          </a:p>
-          <a:p>
-            <a:pPr algn="l">
-              <a:lnSpc>
-                <a:spcPct val="116000"/>
-              </a:lnSpc>
-            </a:pPr>
-            <a:r>
-              <a:rPr sz="1150" b="0">
-                <a:solidFill>
-                  <a:srgbClr val="1A1A1A"/>
-                </a:solidFill>
-                <a:latin typeface="Georgia"/>
-              </a:rPr>
-              <a:t>neither question is answerable.</a:t>
+              <a:t>shared tensors bit-identical to v2.</a:t>
             </a:r>
           </a:p>
         </p:txBody>
@@ -15899,7 +15931,7 @@
                 </a:solidFill>
                 <a:latin typeface="Georgia"/>
               </a:rPr>
-              <a:t>What IS robust: adding driving data to FlyingChairs gains about 0.15 px and 5 points of 1-pixel</a:t>
+              <a:t>Every accuracy number in this deck comes from the frozen runs. The drifted ones are shown here only</a:t>
             </a:r>
           </a:p>
           <a:p>
@@ -15911,7 +15943,7 @@
                 </a:solidFill>
                 <a:latin typeface="Georgia"/>
               </a:rPr>
-              <a:t>accuracy at BOTH checkpoints. Everything finer than that is inside the noise.</a:t>
+              <a:t>to record what the error was worth.</a:t>
             </a:r>
           </a:p>
         </p:txBody>

--- a/docs/NeuFlow_v3_status.pptx
+++ b/docs/NeuFlow_v3_status.pptx
@@ -20,7 +20,6 @@
     <p:sldId id="268" r:id="rId20"/>
     <p:sldId id="269" r:id="rId21"/>
     <p:sldId id="270" r:id="rId22"/>
-    <p:sldId id="271" r:id="rId23"/>
   </p:sldIdLst>
   <p:sldSz cx="12191695" cy="6858000" type="screen4x3"/>
   <p:notesSz cx="6858000" cy="9144000"/>
@@ -517,7 +516,7 @@
           <a:lstStyle/>
           <a:p>
             <a:r>
-              <a:t>This is a status report on my thesis project. I want to be upfront that the headline has changed since the last version of this deck. Earlier numbers were contaminated by a train-test leak and by a BatchNorm bug, and when I fixed both, two of my claims did not survive. I will show you what did survive and what did not, and I will be explicit about which comparisons are fair.</a:t>
+              <a:t>Short version of where the project is. I replaced NeuFlow v2's fixed upsampler with a decoder you can query at any coordinate. The headline result is that this buys three capabilities v2 does not have, and costs 2.6 percent of mean accuracy, and I will show you both sides. The most interesting result is the third slide of results, on selective accuracy, so I would like to get there.</a:t>
             </a:r>
           </a:p>
         </p:txBody>
@@ -587,7 +586,7 @@
           <a:lstStyle/>
           <a:p>
             <a:r>
-              <a:t>This is the capability I am most confident about. The head predicts an error scale for every query alongside the flow itself. When you bin queries by predicted uncertainty, the actual error rises monotonically from 0.22 pixels in the confident bin to 6.7 in the least confident, a twenty-one fold span. It is not perfectly correlated, r is 0.345, but it is clearly informative and it is directly usable: weight correspondences in RANSAC, drop unreliable ones, or send more queries where the model is unsure. v2 has no equivalent output, so there is nothing to compare it against.</a:t>
+              <a:t>The interface is two calls. One coarse pass per frame pair, then as many decode calls as you like against it. The plot shows decode cost is flat between 800 and 2,048 queries, which tells you it is dominated by kernel launch overhead, not arithmetic, so you get two thousand points for the price of eight hundred. Above about ten thousand points it becomes compute bound and you should just use dense mode.</a:t>
             </a:r>
           </a:p>
         </p:txBody>
@@ -657,7 +656,7 @@
           <a:lstStyle/>
           <a:p>
             <a:r>
-              <a:t>The interface is two calls. One coarse pass per frame pair, then as many decode calls as you like against it. The plot shows decode cost is flat between 800 and 2,048 queries, which tells you it is dominated by kernel launch overhead, not arithmetic, so you get two thousand points for the price of eight hundred. Above about ten thousand points it becomes compute bound and you should just use dense mode.</a:t>
+              <a:t>This is a working tool, not a mock-up. You load a video, step to a frame, drag a box, and it computes flow in that box. Two modes. Query mode runs the full coarse pass and decodes only inside the box, which is exact. Crop mode feeds just the box through the whole pipeline, so the cost scales with the area you asked for, but it loses the surrounding context that global matching uses. The panel shows the actual breakdown live, including the parts where v3 is not the faster option.</a:t>
             </a:r>
           </a:p>
         </p:txBody>
@@ -727,7 +726,7 @@
           <a:lstStyle/>
           <a:p>
             <a:r>
-              <a:t>This is a working tool, not a mock-up. You load a video, step to a frame, drag a box, and it computes flow in that box. Two modes. Query mode runs the full coarse pass and decodes only inside the box, which is exact. Crop mode feeds just the box through the whole pipeline, so the cost scales with the area you asked for, but it loses the surrounding context that global matching uses. The panel shows the actual breakdown live, including the parts where v3 is not the faster option.</a:t>
+              <a:t>Here is the scorecard against what I set out to do, and two of three are not met. Better accuracy: not met, the fair comparison is a tie. Less compute: partly, dense is slower, a first query is level, but repeat queries are nearly eight times cheaper. Edge capable: unproven, everything I have measured is on a V100 or a laptop 4060 and I have not touched a Jetson. What the project does deliver is the three things at the bottom: output you can query at any coordinate, cheap repeat access to a cached frame, and a calibrated confidence value. Those are real and they are measured.</a:t>
             </a:r>
           </a:p>
         </p:txBody>
@@ -797,7 +796,7 @@
           <a:lstStyle/>
           <a:p>
             <a:r>
-              <a:t>Here is the scorecard against what I set out to do, and two of three are not met. Better accuracy: not met, the fair comparison is a tie. Less compute: partly, dense is slower, a first query is level, but repeat queries are nearly eight times cheaper. Edge capable: unproven, everything I have measured is on a V100 or a laptop 4060 and I have not touched a Jetson. What the project does deliver is the three things at the bottom: output you can query at any coordinate, cheap repeat access to a cached frame, and a calibrated confidence value. Those are real and they are measured.</a:t>
+              <a:t>Limitations, stated plainly rather than buried. Precision is worse than v2 and I have diagnosed but not fixed it. There is no edge device measurement at all, so the word edge in my title is a design target and not a result. Everything is evaluated on one synthetic driving dataset, which says little about field imagery. The Spring run was cut off by the cluster wall clock. And I have one seed per configuration, so please do not read too much into differences below about five hundredths of a pixel.</a:t>
             </a:r>
           </a:p>
         </p:txBody>
@@ -867,7 +866,7 @@
           <a:lstStyle/>
           <a:p>
             <a:r>
-              <a:t>Limitations, stated plainly rather than buried. Precision is worse than v2 and I have diagnosed but not fixed it. There is no edge device measurement at all, so the word edge in my title is a design target and not a result. Everything is evaluated on one synthetic driving dataset, which says little about field imagery. The Spring run was cut off by the cluster wall clock. And I have one seed per configuration, so please do not read too much into differences below about five hundredths of a pixel.</a:t>
+              <a:t>Four next steps in priority order. First, give the decoder a full resolution feature map. That is the direct attack on the precision gap, and it also matters because right now querying between pixels returns something close to interpolation, so the arbitrary coordinate claim is thinner than it sounds. Second, the Spring dataset gives ground truth at twice the input resolution, which v3 can be queried at natively and v2 structurally cannot. That is the one test that shows a capability rather than a margin. Third, actually measure a Jetson. Fourth, try it on real survey imagery.</a:t>
             </a:r>
           </a:p>
         </p:txBody>
@@ -937,76 +936,6 @@
           <a:lstStyle/>
           <a:p>
             <a:r>
-              <a:t>Four next steps in priority order. First, give the decoder a full resolution feature map. That is the direct attack on the precision gap, and it also matters because right now querying between pixels returns something close to interpolation, so the arbitrary coordinate claim is thinner than it sounds. Second, the Spring dataset gives ground truth at twice the input resolution, which v3 can be queried at natively and v2 structurally cannot. That is the one test that shows a capability rather than a margin. Third, actually measure a Jetson. Fourth, try it on real survey imagery.</a:t>
-            </a:r>
-          </a:p>
-        </p:txBody>
-      </p:sp>
-      <p:sp>
-        <p:nvSpPr>
-          <p:cNvPr id="4" name="Slide Number Placeholder 3"/>
-          <p:cNvSpPr>
-            <a:spLocks noGrp="1"/>
-          </p:cNvSpPr>
-          <p:nvPr>
-            <p:ph type="sldNum" idx="5" sz="quarter"/>
-          </p:nvPr>
-        </p:nvSpPr>
-        <p:spPr/>
-      </p:sp>
-    </p:spTree>
-  </p:cSld>
-  <p:clrMapOvr>
-    <a:masterClrMapping/>
-  </p:clrMapOvr>
-</p:notes>
-</file>
-
-<file path=ppt/notesSlides/notesSlide16.xml><?xml version="1.0" encoding="utf-8"?>
-<p:notes xmlns:a="http://schemas.openxmlformats.org/drawingml/2006/main" xmlns:p="http://schemas.openxmlformats.org/presentationml/2006/main" xmlns:r="http://schemas.openxmlformats.org/officeDocument/2006/relationships">
-  <p:cSld>
-    <p:spTree>
-      <p:nvGrpSpPr>
-        <p:cNvPr id="1" name=""/>
-        <p:cNvGrpSpPr/>
-        <p:nvPr/>
-      </p:nvGrpSpPr>
-      <p:grpSpPr>
-        <a:xfrm>
-          <a:off x="0" y="0"/>
-          <a:ext cx="0" cy="0"/>
-          <a:chOff x="0" y="0"/>
-          <a:chExt cx="0" cy="0"/>
-        </a:xfrm>
-      </p:grpSpPr>
-      <p:sp>
-        <p:nvSpPr>
-          <p:cNvPr id="2" name="Slide Image Placeholder 1"/>
-          <p:cNvSpPr>
-            <a:spLocks noGrp="1"/>
-          </p:cNvSpPr>
-          <p:nvPr>
-            <p:ph type="sldImg" idx="2"/>
-          </p:nvPr>
-        </p:nvSpPr>
-        <p:spPr/>
-      </p:sp>
-      <p:sp>
-        <p:nvSpPr>
-          <p:cNvPr id="3" name="Notes Placeholder 2"/>
-          <p:cNvSpPr>
-            <a:spLocks noGrp="1"/>
-          </p:cNvSpPr>
-          <p:nvPr>
-            <p:ph type="body" idx="3" sz="quarter"/>
-          </p:nvPr>
-        </p:nvSpPr>
-        <p:spPr/>
-        <p:txBody>
-          <a:bodyPr/>
-          <a:lstStyle/>
-          <a:p>
-            <a:r>
               <a:t>A few questions I expect. Why flow between pixels: because motion is continuous and the grid is an artefact of sampling. Why freeze the backbone: to keep the decoder as the only variable, and because unfreezing diverged when I tried it. Why is dense slower: because v2's convolution shares work between neighbouring pixels and my decoder deliberately gives that up in exchange for answering only what is asked. And the hardest one, is a tie worth the complexity. On its own, no. If you want plain dense flow, use v2, and I will say that plainly. It is worth it if you need queryability, cheap repeat access, or a confidence signal.</a:t>
             </a:r>
           </a:p>
@@ -1077,7 +1006,7 @@
           <a:lstStyle/>
           <a:p>
             <a:r>
-              <a:t>The motivation is unchanged and I still believe it. Dense flow is the only product these networks offer, but registration, tracking and mapping all want a few hundred points that they choose. The question is whether you can make the output queryable without paying for it elsewhere. Some of the answer is no, and I will show you where.</a:t>
+              <a:t>The motivation is unchanged and I still believe it. Dense flow is the only product these networks offer, but registration, tracking and mapping all want a few hundred points that they choose. The question is whether you can make the output queryable, and what that costs.</a:t>
             </a:r>
           </a:p>
         </p:txBody>
@@ -1287,7 +1216,7 @@
           <a:lstStyle/>
           <a:p>
             <a:r>
-              <a:t>I want to spend a slide on this because it is the reason to believe anything that follows. Three defects. First, a train-test leak: two VKITTI2 scenes were in both the training set and the evaluation set, so models were being scored on frames they had trained on. Second, BatchNorm kept updating its running statistics even though the backbone was supposed to be frozen, which moved the coarse flow by 0.35 pixels, about seven times the effect I was trying to measure. Third, my runs differed in three things at once, so no comparison between them meant anything. All three are fixed, and there is now a pre-flight suite that checks all of it before a job starts.</a:t>
+              <a:t>Here is the accuracy picture. The teal bar is the only fair comparison, because that model trained on FlyingChairs alone and never saw a road, just as v2 never saw VKITTI2. It gets 2.286 against v2's 2.324. That is a tie. The grey bars are better, down to 2.104, but they trained on VKITTI2 scenes from the same simulator as the test set, so that is a domain advantage rather than a better method. I could have shown you only the 2.104 number and claimed a ten percent win. It would not have been honest.</a:t>
             </a:r>
           </a:p>
         </p:txBody>
@@ -1357,7 +1286,7 @@
           <a:lstStyle/>
           <a:p>
             <a:r>
-              <a:t>Here is the accuracy picture. The teal bar is the only fair comparison, because that model trained on FlyingChairs alone and never saw a road, just as v2 never saw VKITTI2. It gets 2.286 against v2's 2.324. That is a tie. The grey bars are better, down to 2.104, but they trained on VKITTI2 scenes from the same simulator as the test set, so that is a domain advantage rather than a better method. I could have shown you only the 2.104 number and claimed a ten percent win. It would not have been honest.</a:t>
+              <a:t>This is the honest cost. On one-pixel accuracy v3 is below v2 everywhere, by up to six points. Mean error hides it, because v3 makes fewer catastrophic errors, which drags the average down while it is actually less precise on most pixels. I know the cause: the decoder's finest input is at one-eighth resolution, so inside an eight by eight cell it is looking at almost the same evidence wherever you query. The v2 upsampler reads the full resolution image directly. I tested whether it was simply missing positional information by adding a Fourier encoding, and it changed nothing, which rules that explanation out.</a:t>
             </a:r>
           </a:p>
         </p:txBody>
@@ -1427,7 +1356,7 @@
           <a:lstStyle/>
           <a:p>
             <a:r>
-              <a:t>This is the honest cost. On one-pixel accuracy v3 is below v2 everywhere, by up to six points. Mean error hides it, because v3 makes fewer catastrophic errors, which drags the average down while it is actually less precise on most pixels. I know the cause: the decoder's finest input is at one-eighth resolution, so inside an eight by eight cell it is looking at almost the same evidence wherever you query. The v2 upsampler reads the full resolution image directly. I tested whether it was simply missing positional information by adding a Fourier encoding, and it changed nothing, which rules that explanation out.</a:t>
+              <a:t>On speed I want to be precise about which claim I am making. Dense output is fourteen percent slower, and that mode is not what the decoder is for. A first sparse query is level with v2, because eighty-seven percent of the cost is the coarse pass, which both share and which cannot be skipped since global matching needs the whole image. The win is the fourth bar. Asking a second question about a frame you have already processed costs 2.6 milliseconds against v2's 19.3, because v2 keeps no state and has to redo everything. Anything that revisits a frame gets that: iterative registration, RANSAC refinement, a user inspecting a scene. That is structural, not a margin.</a:t>
             </a:r>
           </a:p>
         </p:txBody>
@@ -1497,7 +1426,7 @@
           <a:lstStyle/>
           <a:p>
             <a:r>
-              <a:t>Speed. Three of these four bars are not wins. Dense v3 is twelve percent slower than v2, and I want to flag that an earlier version of this deck claimed v3 dense was faster. That measurement was taken before the BatchNorm fix and on a different GPU. It was wrong and I have withdrawn it. A first sparse query is level with v2, not faster, because the coarse pass dominates and you cannot avoid it. The real win is the fourth bar: asking a second question about a frame you have already processed costs 2.6 milliseconds against v2's 19.3, because v2 has no cached state and must redo everything. That is structural, not a margin.</a:t>
+              <a:t>This is the capability I am most confident about. The head predicts an error scale for every query alongside the flow itself. When you bin queries by predicted uncertainty, the actual error rises monotonically from 0.22 pixels in the confident bin to 6.7 in the least confident, a twenty-one fold span. It is not perfectly correlated, r is 0.345, but it is clearly informative and it is directly usable: weight correspondences in RANSAC, drop unreliable ones, or send more queries where the model is unsure. v2 has no equivalent output, so there is nothing to compare it against.</a:t>
             </a:r>
           </a:p>
         </p:txBody>
@@ -1567,7 +1496,7 @@
           <a:lstStyle/>
           <a:p>
             <a:r>
-              <a:t>I want to show you a slide that removes two of my own results. I had claimed two clean ablations: that Sintel adds nothing, and that the uncertainty head helps by two percent. Then I evaluated a second checkpoint of the same runs, ten thousand steps earlier, and both conclusions reversed. Sintel helps at 90k and hurts at 100k. The uncertainty head hurts at 90k and helps at 100k. The differences I was interpreting are smaller than the variation between checkpoints of a single run. So with one seed and one checkpoint I cannot answer either question, and I am not going to pretend otherwise. What is robust is the coarse effect: adding driving data gains about 0.15 pixels at both checkpoints. To resolve anything finer I would need multiple seeds and an average over late checkpoints.</a:t>
+              <a:t>This is the slide I would most like your reaction to. The accuracy table earlier reports mean error over every pixel, which is the only operating point v2 has, because it cannot tell you which of its outputs to trust. v3 can, so instead of a point it has a curve. Discard the least confident fifth of queries and error on what remains falls to 1.06 pixels, against v2's 2.32 over the whole frame. So more than twice as accurate over eighty percent of the image. Keep only the most confident fifth and it is 0.48, close to five times better. Why this is not just a statistical trick: for registration and mapping you are choosing a few hundred points anyway, so declining to answer where the model is unsure costs you nothing. Same 2.35 million queries as the calibration bins on the previous slide.</a:t>
             </a:r>
           </a:p>
         </p:txBody>
@@ -4919,7 +4848,7 @@
                 </a:solidFill>
                 <a:latin typeface="Georgia"/>
               </a:rPr>
-              <a:t>RESULTS</a:t>
+              <a:t>INTERFACE</a:t>
             </a:r>
           </a:p>
         </p:txBody>
@@ -4958,14 +4887,14 @@
                 </a:solidFill>
                 <a:latin typeface="Georgia"/>
               </a:rPr>
-              <a:t>A calibrated confidence signal v2 cannot express</a:t>
+              <a:t>What a query costs, and how you make one</a:t>
             </a:r>
           </a:p>
         </p:txBody>
       </p:sp>
       <p:pic>
         <p:nvPicPr>
-          <p:cNvPr id="4" name="Picture 3" descr="calibration_bars.png"/>
+          <p:cNvPr id="4" name="Picture 3" descr="decode_flat.png"/>
           <p:cNvPicPr>
             <a:picLocks noChangeAspect="1"/>
           </p:cNvPicPr>
@@ -4979,8 +4908,8 @@
         </p:blipFill>
         <p:spPr>
           <a:xfrm>
-            <a:off x="731520" y="1554480"/>
-            <a:ext cx="6766560" cy="3568283"/>
+            <a:off x="731520" y="1508760"/>
+            <a:ext cx="6400800" cy="3231565"/>
           </a:xfrm>
           <a:prstGeom prst="rect">
             <a:avLst/>
@@ -4995,8 +4924,8 @@
         </p:nvSpPr>
         <p:spPr>
           <a:xfrm>
-            <a:off x="7772400" y="1691640"/>
-            <a:ext cx="3840480" cy="3291840"/>
+            <a:off x="7406640" y="1645920"/>
+            <a:ext cx="4206240" cy="365760"/>
           </a:xfrm>
           <a:prstGeom prst="rect">
             <a:avLst/>
@@ -5011,59 +4940,90 @@
           <a:p>
             <a:pPr algn="l">
               <a:lnSpc>
-                <a:spcPct val="118000"/>
-              </a:lnSpc>
-            </a:pPr>
-            <a:r>
-              <a:rPr sz="1150" b="0">
-                <a:solidFill>
-                  <a:srgbClr val="1A1A1A"/>
-                </a:solidFill>
-                <a:latin typeface="Georgia"/>
-              </a:rPr>
-              <a:t>The head predicts a per-query error</a:t>
-            </a:r>
-          </a:p>
-          <a:p>
-            <a:pPr algn="l">
-              <a:lnSpc>
-                <a:spcPct val="118000"/>
-              </a:lnSpc>
-            </a:pPr>
-            <a:r>
-              <a:rPr sz="1150" b="0">
-                <a:solidFill>
-                  <a:srgbClr val="1A1A1A"/>
-                </a:solidFill>
-                <a:latin typeface="Georgia"/>
-              </a:rPr>
-              <a:t>scale b alongside each flow value,</a:t>
-            </a:r>
-          </a:p>
-          <a:p>
-            <a:pPr algn="l">
-              <a:lnSpc>
-                <a:spcPct val="118000"/>
-              </a:lnSpc>
-            </a:pPr>
-            <a:r>
-              <a:rPr sz="1150" b="0">
-                <a:solidFill>
-                  <a:srgbClr val="1A1A1A"/>
-                </a:solidFill>
-                <a:latin typeface="Georgia"/>
-              </a:rPr>
-              <a:t>trained with a Laplace likelihood.</a:t>
-            </a:r>
-          </a:p>
-          <a:p>
-            <a:pPr algn="l">
-              <a:lnSpc>
-                <a:spcPct val="118000"/>
-              </a:lnSpc>
-            </a:pPr>
-            <a:r>
-              <a:rPr sz="1150" b="0">
+                <a:spcPct val="100000"/>
+              </a:lnSpc>
+            </a:pPr>
+            <a:r>
+              <a:rPr sz="1200" b="1">
+                <a:solidFill>
+                  <a:srgbClr val="333333"/>
+                </a:solidFill>
+                <a:latin typeface="Georgia"/>
+              </a:rPr>
+              <a:t>The entire API</a:t>
+            </a:r>
+          </a:p>
+        </p:txBody>
+      </p:sp>
+      <p:sp>
+        <p:nvSpPr>
+          <p:cNvPr id="6" name="Rounded Rectangle 5"/>
+          <p:cNvSpPr/>
+          <p:nvPr/>
+        </p:nvSpPr>
+        <p:spPr>
+          <a:xfrm>
+            <a:off x="7406640" y="2011680"/>
+            <a:ext cx="4206240" cy="1737360"/>
+          </a:xfrm>
+          <a:prstGeom prst="roundRect">
+            <a:avLst/>
+          </a:prstGeom>
+          <a:solidFill>
+            <a:srgbClr val="EFEFEF"/>
+          </a:solidFill>
+          <a:ln w="9525">
+            <a:solidFill>
+              <a:srgbClr val="8A8A8A"/>
+            </a:solidFill>
+          </a:ln>
+          <a:effectLst/>
+        </p:spPr>
+        <p:style>
+          <a:lnRef idx="1">
+            <a:schemeClr val="accent1"/>
+          </a:lnRef>
+          <a:fillRef idx="3">
+            <a:schemeClr val="accent1"/>
+          </a:fillRef>
+          <a:effectRef idx="2">
+            <a:schemeClr val="accent1"/>
+          </a:effectRef>
+          <a:fontRef idx="minor">
+            <a:schemeClr val="lt1"/>
+          </a:fontRef>
+        </p:style>
+        <p:txBody>
+          <a:bodyPr rtlCol="0" anchor="ctr" wrap="square" lIns="73152" rIns="73152"/>
+          <a:lstStyle/>
+          <a:p>
+            <a:pPr algn="ctr"/>
+            <a:r>
+              <a:rPr sz="1000" b="0">
+                <a:solidFill>
+                  <a:srgbClr val="1A1A1A"/>
+                </a:solidFill>
+                <a:latin typeface="Georgia"/>
+              </a:rPr>
+              <a:t>state = model.infer_coarse_state(img0, img1)</a:t>
+            </a:r>
+          </a:p>
+          <a:p>
+            <a:pPr algn="ctr"/>
+            <a:r>
+              <a:rPr sz="1000" b="0">
+                <a:solidFill>
+                  <a:srgbClr val="1A1A1A"/>
+                </a:solidFill>
+                <a:latin typeface="Georgia"/>
+              </a:rPr>
+              <a:t>                                  once, 17 ms</a:t>
+            </a:r>
+          </a:p>
+          <a:p>
+            <a:pPr algn="ctr"/>
+            <a:r>
+              <a:rPr sz="1000" b="0">
                 <a:solidFill>
                   <a:srgbClr val="1A1A1A"/>
                 </a:solidFill>
@@ -5073,77 +5033,45 @@
             </a:r>
           </a:p>
           <a:p>
-            <a:pPr algn="l">
-              <a:lnSpc>
-                <a:spcPct val="118000"/>
-              </a:lnSpc>
-            </a:pPr>
-            <a:r>
-              <a:rPr sz="1150" b="0">
-                <a:solidFill>
-                  <a:srgbClr val="1A1A1A"/>
-                </a:solidFill>
-                <a:latin typeface="Georgia"/>
-              </a:rPr>
-              <a:t>Binned by predicted b, real error rises</a:t>
-            </a:r>
-          </a:p>
-          <a:p>
-            <a:pPr algn="l">
-              <a:lnSpc>
-                <a:spcPct val="118000"/>
-              </a:lnSpc>
-            </a:pPr>
-            <a:r>
-              <a:rPr sz="1150" b="0">
-                <a:solidFill>
-                  <a:srgbClr val="1A1A1A"/>
-                </a:solidFill>
-                <a:latin typeface="Georgia"/>
-              </a:rPr>
-              <a:t>monotonically from 0.48 px to 7.10 px,</a:t>
-            </a:r>
-          </a:p>
-          <a:p>
-            <a:pPr algn="l">
-              <a:lnSpc>
-                <a:spcPct val="118000"/>
-              </a:lnSpc>
-            </a:pPr>
-            <a:r>
-              <a:rPr sz="1150" b="0">
-                <a:solidFill>
-                  <a:srgbClr val="1A1A1A"/>
-                </a:solidFill>
-                <a:latin typeface="Georgia"/>
-              </a:rPr>
-              <a:t>a 15x span. Pearson r = 0.318 over</a:t>
-            </a:r>
-          </a:p>
-          <a:p>
-            <a:pPr algn="l">
-              <a:lnSpc>
-                <a:spcPct val="118000"/>
-              </a:lnSpc>
-            </a:pPr>
-            <a:r>
-              <a:rPr sz="1150" b="0">
-                <a:solidFill>
-                  <a:srgbClr val="1A1A1A"/>
-                </a:solidFill>
-                <a:latin typeface="Georgia"/>
-              </a:rPr>
-              <a:t>2,348,000 samples.</a:t>
-            </a:r>
-          </a:p>
-          <a:p>
-            <a:pPr algn="l">
-              <a:lnSpc>
-                <a:spcPct val="118000"/>
-              </a:lnSpc>
-            </a:pPr>
-            <a:r>
-              <a:rPr sz="1150" b="0">
+            <a:pPr algn="ctr"/>
+            <a:r>
+              <a:rPr sz="1000" b="0">
+                <a:solidFill>
+                  <a:srgbClr val="1A1A1A"/>
+                </a:solidFill>
+                <a:latin typeface="Georgia"/>
+              </a:rPr>
+              <a:t>flow  = model.decode_queries(</a:t>
+            </a:r>
+          </a:p>
+          <a:p>
+            <a:pPr algn="ctr"/>
+            <a:r>
+              <a:rPr sz="1000" b="0">
+                <a:solidFill>
+                  <a:srgbClr val="1A1A1A"/>
+                </a:solidFill>
+                <a:latin typeface="Georgia"/>
+              </a:rPr>
+              <a:t>            state, query_coords=q)</a:t>
+            </a:r>
+          </a:p>
+          <a:p>
+            <a:pPr algn="ctr"/>
+            <a:r>
+              <a:rPr sz="1000" b="0">
+                <a:solidFill>
+                  <a:srgbClr val="1A1A1A"/>
+                </a:solidFill>
+                <a:latin typeface="Georgia"/>
+              </a:rPr>
+              <a:t>            q: [B, N, 2] -&gt; [B, N, 2], 2.6 ms</a:t>
+            </a:r>
+          </a:p>
+          <a:p>
+            <a:pPr algn="ctr"/>
+            <a:r>
+              <a:rPr sz="1000" b="0">
                 <a:solidFill>
                   <a:srgbClr val="1A1A1A"/>
                 </a:solidFill>
@@ -5153,113 +5081,29 @@
             </a:r>
           </a:p>
           <a:p>
-            <a:pPr algn="l">
-              <a:lnSpc>
-                <a:spcPct val="118000"/>
-              </a:lnSpc>
-            </a:pPr>
-            <a:r>
-              <a:rPr sz="1150" b="0">
-                <a:solidFill>
-                  <a:srgbClr val="1A1A1A"/>
-                </a:solidFill>
-                <a:latin typeface="Georgia"/>
-              </a:rPr>
-              <a:t>This is usable: weight correspondences</a:t>
-            </a:r>
-          </a:p>
-          <a:p>
-            <a:pPr algn="l">
-              <a:lnSpc>
-                <a:spcPct val="118000"/>
-              </a:lnSpc>
-            </a:pPr>
-            <a:r>
-              <a:rPr sz="1150" b="0">
-                <a:solidFill>
-                  <a:srgbClr val="1A1A1A"/>
-                </a:solidFill>
-                <a:latin typeface="Georgia"/>
-              </a:rPr>
-              <a:t>in RANSAC, reject unreliable matches,</a:t>
-            </a:r>
-          </a:p>
-          <a:p>
-            <a:pPr algn="l">
-              <a:lnSpc>
-                <a:spcPct val="118000"/>
-              </a:lnSpc>
-            </a:pPr>
-            <a:r>
-              <a:rPr sz="1150" b="0">
-                <a:solidFill>
-                  <a:srgbClr val="1A1A1A"/>
-                </a:solidFill>
-                <a:latin typeface="Georgia"/>
-              </a:rPr>
-              <a:t>or steer queries toward uncertain areas.</a:t>
-            </a:r>
-          </a:p>
-          <a:p>
-            <a:pPr algn="l">
-              <a:lnSpc>
-                <a:spcPct val="118000"/>
-              </a:lnSpc>
-            </a:pPr>
-            <a:r>
-              <a:rPr sz="1150" b="0">
-                <a:solidFill>
-                  <a:srgbClr val="1A1A1A"/>
-                </a:solidFill>
-                <a:latin typeface="Georgia"/>
-              </a:rPr>
-              <a:t/>
-            </a:r>
-          </a:p>
-          <a:p>
-            <a:pPr algn="l">
-              <a:lnSpc>
-                <a:spcPct val="118000"/>
-              </a:lnSpc>
-            </a:pPr>
-            <a:r>
-              <a:rPr sz="1150" b="0">
-                <a:solidFill>
-                  <a:srgbClr val="1A1A1A"/>
-                </a:solidFill>
-                <a:latin typeface="Georgia"/>
-              </a:rPr>
-              <a:t>v2 emits flow only. There is no</a:t>
-            </a:r>
-          </a:p>
-          <a:p>
-            <a:pPr algn="l">
-              <a:lnSpc>
-                <a:spcPct val="118000"/>
-              </a:lnSpc>
-            </a:pPr>
-            <a:r>
-              <a:rPr sz="1150" b="0">
-                <a:solidFill>
-                  <a:srgbClr val="1A1A1A"/>
-                </a:solidFill>
-                <a:latin typeface="Georgia"/>
-              </a:rPr>
-              <a:t>equivalent quantity to compare against.</a:t>
-            </a:r>
-          </a:p>
-        </p:txBody>
-      </p:sp>
-      <p:sp>
-        <p:nvSpPr>
-          <p:cNvPr id="6" name="TextBox 5"/>
+            <a:pPr algn="ctr"/>
+            <a:r>
+              <a:rPr sz="1000" b="0">
+                <a:solidFill>
+                  <a:srgbClr val="1A1A1A"/>
+                </a:solidFill>
+                <a:latin typeface="Georgia"/>
+              </a:rPr>
+              <a:t>flow, b = ... (return_uncertainty=True)</a:t>
+            </a:r>
+          </a:p>
+        </p:txBody>
+      </p:sp>
+      <p:sp>
+        <p:nvSpPr>
+          <p:cNvPr id="7" name="TextBox 6"/>
           <p:cNvSpPr txBox="1"/>
           <p:nvPr/>
         </p:nvSpPr>
         <p:spPr>
           <a:xfrm>
-            <a:off x="685800" y="6419088"/>
-            <a:ext cx="7315200" cy="274320"/>
+            <a:off x="7406640" y="3931920"/>
+            <a:ext cx="4206240" cy="1828800"/>
           </a:xfrm>
           <a:prstGeom prst="rect">
             <a:avLst/>
@@ -5274,6 +5118,157 @@
           <a:p>
             <a:pPr algn="l">
               <a:lnSpc>
+                <a:spcPct val="118000"/>
+              </a:lnSpc>
+            </a:pPr>
+            <a:r>
+              <a:rPr sz="1150" b="0">
+                <a:solidFill>
+                  <a:srgbClr val="1A1A1A"/>
+                </a:solidFill>
+                <a:latin typeface="Georgia"/>
+              </a:rPr>
+              <a:t>Decode cost is flat from 800 to 2,048</a:t>
+            </a:r>
+          </a:p>
+          <a:p>
+            <a:pPr algn="l">
+              <a:lnSpc>
+                <a:spcPct val="118000"/>
+              </a:lnSpc>
+            </a:pPr>
+            <a:r>
+              <a:rPr sz="1150" b="0">
+                <a:solidFill>
+                  <a:srgbClr val="1A1A1A"/>
+                </a:solidFill>
+                <a:latin typeface="Georgia"/>
+              </a:rPr>
+              <a:t>queries, so it is bound by kernel launch</a:t>
+            </a:r>
+          </a:p>
+          <a:p>
+            <a:pPr algn="l">
+              <a:lnSpc>
+                <a:spcPct val="118000"/>
+              </a:lnSpc>
+            </a:pPr>
+            <a:r>
+              <a:rPr sz="1150" b="0">
+                <a:solidFill>
+                  <a:srgbClr val="1A1A1A"/>
+                </a:solidFill>
+                <a:latin typeface="Georgia"/>
+              </a:rPr>
+              <a:t>overhead rather than compute. You get</a:t>
+            </a:r>
+          </a:p>
+          <a:p>
+            <a:pPr algn="l">
+              <a:lnSpc>
+                <a:spcPct val="118000"/>
+              </a:lnSpc>
+            </a:pPr>
+            <a:r>
+              <a:rPr sz="1150" b="0">
+                <a:solidFill>
+                  <a:srgbClr val="1A1A1A"/>
+                </a:solidFill>
+                <a:latin typeface="Georgia"/>
+              </a:rPr>
+              <a:t>2,048 points for the price of 800.</a:t>
+            </a:r>
+          </a:p>
+          <a:p>
+            <a:pPr algn="l">
+              <a:lnSpc>
+                <a:spcPct val="118000"/>
+              </a:lnSpc>
+            </a:pPr>
+            <a:r>
+              <a:rPr sz="1150" b="0">
+                <a:solidFill>
+                  <a:srgbClr val="1A1A1A"/>
+                </a:solidFill>
+                <a:latin typeface="Georgia"/>
+              </a:rPr>
+              <a:t/>
+            </a:r>
+          </a:p>
+          <a:p>
+            <a:pPr algn="l">
+              <a:lnSpc>
+                <a:spcPct val="118000"/>
+              </a:lnSpc>
+            </a:pPr>
+            <a:r>
+              <a:rPr sz="1150" b="0">
+                <a:solidFill>
+                  <a:srgbClr val="1A1A1A"/>
+                </a:solidFill>
+                <a:latin typeface="Georgia"/>
+              </a:rPr>
+              <a:t>Above roughly 10,000 points the decode</a:t>
+            </a:r>
+          </a:p>
+          <a:p>
+            <a:pPr algn="l">
+              <a:lnSpc>
+                <a:spcPct val="118000"/>
+              </a:lnSpc>
+            </a:pPr>
+            <a:r>
+              <a:rPr sz="1150" b="0">
+                <a:solidFill>
+                  <a:srgbClr val="1A1A1A"/>
+                </a:solidFill>
+                <a:latin typeface="Georgia"/>
+              </a:rPr>
+              <a:t>becomes compute-bound and dense mode</a:t>
+            </a:r>
+          </a:p>
+          <a:p>
+            <a:pPr algn="l">
+              <a:lnSpc>
+                <a:spcPct val="118000"/>
+              </a:lnSpc>
+            </a:pPr>
+            <a:r>
+              <a:rPr sz="1150" b="0">
+                <a:solidFill>
+                  <a:srgbClr val="1A1A1A"/>
+                </a:solidFill>
+                <a:latin typeface="Georgia"/>
+              </a:rPr>
+              <a:t>is the better choice.</a:t>
+            </a:r>
+          </a:p>
+        </p:txBody>
+      </p:sp>
+      <p:sp>
+        <p:nvSpPr>
+          <p:cNvPr id="8" name="TextBox 7"/>
+          <p:cNvSpPr txBox="1"/>
+          <p:nvPr/>
+        </p:nvSpPr>
+        <p:spPr>
+          <a:xfrm>
+            <a:off x="685800" y="6419088"/>
+            <a:ext cx="7315200" cy="274320"/>
+          </a:xfrm>
+          <a:prstGeom prst="rect">
+            <a:avLst/>
+          </a:prstGeom>
+          <a:noFill/>
+        </p:spPr>
+        <p:txBody>
+          <a:bodyPr wrap="square">
+            <a:spAutoFit/>
+          </a:bodyPr>
+          <a:lstStyle/>
+          <a:p>
+            <a:pPr algn="l">
+              <a:lnSpc>
                 <a:spcPct val="100000"/>
               </a:lnSpc>
             </a:pPr>
@@ -5291,7 +5286,7 @@
       </p:sp>
       <p:sp>
         <p:nvSpPr>
-          <p:cNvPr id="7" name="TextBox 6"/>
+          <p:cNvPr id="9" name="TextBox 8"/>
           <p:cNvSpPr txBox="1"/>
           <p:nvPr/>
         </p:nvSpPr>
@@ -5419,14 +5414,14 @@
                 </a:solidFill>
                 <a:latin typeface="Georgia"/>
               </a:rPr>
-              <a:t>What a query costs, and how you make one</a:t>
+              <a:t>Working tool: draw a region, get flow there</a:t>
             </a:r>
           </a:p>
         </p:txBody>
       </p:sp>
       <p:pic>
         <p:nvPicPr>
-          <p:cNvPr id="4" name="Picture 3" descr="decode_flat.png"/>
+          <p:cNvPr id="4" name="Picture 3" descr="region_gui_window.png"/>
           <p:cNvPicPr>
             <a:picLocks noChangeAspect="1"/>
           </p:cNvPicPr>
@@ -5441,7 +5436,7 @@
         <p:spPr>
           <a:xfrm>
             <a:off x="731520" y="1508760"/>
-            <a:ext cx="6400800" cy="3231565"/>
+            <a:ext cx="6949440" cy="3716489"/>
           </a:xfrm>
           <a:prstGeom prst="rect">
             <a:avLst/>
@@ -5456,8 +5451,8 @@
         </p:nvSpPr>
         <p:spPr>
           <a:xfrm>
-            <a:off x="7406640" y="1645920"/>
-            <a:ext cx="4206240" cy="365760"/>
+            <a:off x="7955279" y="1645920"/>
+            <a:ext cx="3657600" cy="4023360"/>
           </a:xfrm>
           <a:prstGeom prst="rect">
             <a:avLst/>
@@ -5472,90 +5467,43 @@
           <a:p>
             <a:pPr algn="l">
               <a:lnSpc>
-                <a:spcPct val="100000"/>
-              </a:lnSpc>
-            </a:pPr>
-            <a:r>
-              <a:rPr sz="1200" b="1">
-                <a:solidFill>
-                  <a:srgbClr val="333333"/>
-                </a:solidFill>
-                <a:latin typeface="Georgia"/>
-              </a:rPr>
-              <a:t>The entire API</a:t>
-            </a:r>
-          </a:p>
-        </p:txBody>
-      </p:sp>
-      <p:sp>
-        <p:nvSpPr>
-          <p:cNvPr id="6" name="Rounded Rectangle 5"/>
-          <p:cNvSpPr/>
-          <p:nvPr/>
-        </p:nvSpPr>
-        <p:spPr>
-          <a:xfrm>
-            <a:off x="7406640" y="2011680"/>
-            <a:ext cx="4206240" cy="1737360"/>
-          </a:xfrm>
-          <a:prstGeom prst="roundRect">
-            <a:avLst/>
-          </a:prstGeom>
-          <a:solidFill>
-            <a:srgbClr val="EFEFEF"/>
-          </a:solidFill>
-          <a:ln w="9525">
-            <a:solidFill>
-              <a:srgbClr val="8A8A8A"/>
-            </a:solidFill>
-          </a:ln>
-          <a:effectLst/>
-        </p:spPr>
-        <p:style>
-          <a:lnRef idx="1">
-            <a:schemeClr val="accent1"/>
-          </a:lnRef>
-          <a:fillRef idx="3">
-            <a:schemeClr val="accent1"/>
-          </a:fillRef>
-          <a:effectRef idx="2">
-            <a:schemeClr val="accent1"/>
-          </a:effectRef>
-          <a:fontRef idx="minor">
-            <a:schemeClr val="lt1"/>
-          </a:fontRef>
-        </p:style>
-        <p:txBody>
-          <a:bodyPr rtlCol="0" anchor="ctr" wrap="square" lIns="73152" rIns="73152"/>
-          <a:lstStyle/>
-          <a:p>
-            <a:pPr algn="ctr"/>
-            <a:r>
-              <a:rPr sz="1000" b="0">
-                <a:solidFill>
-                  <a:srgbClr val="1A1A1A"/>
-                </a:solidFill>
-                <a:latin typeface="Georgia"/>
-              </a:rPr>
-              <a:t>state = model.infer_coarse_state(img0, img1)</a:t>
-            </a:r>
-          </a:p>
-          <a:p>
-            <a:pPr algn="ctr"/>
-            <a:r>
-              <a:rPr sz="1000" b="0">
-                <a:solidFill>
-                  <a:srgbClr val="1A1A1A"/>
-                </a:solidFill>
-                <a:latin typeface="Georgia"/>
-              </a:rPr>
-              <a:t>                                  once, 17 ms</a:t>
-            </a:r>
-          </a:p>
-          <a:p>
-            <a:pPr algn="ctr"/>
-            <a:r>
-              <a:rPr sz="1000" b="0">
+                <a:spcPct val="118000"/>
+              </a:lnSpc>
+            </a:pPr>
+            <a:r>
+              <a:rPr sz="1150" b="0">
+                <a:solidFill>
+                  <a:srgbClr val="1A1A1A"/>
+                </a:solidFill>
+                <a:latin typeface="Georgia"/>
+              </a:rPr>
+              <a:t>Load a video, step frame by frame,</a:t>
+            </a:r>
+          </a:p>
+          <a:p>
+            <a:pPr algn="l">
+              <a:lnSpc>
+                <a:spcPct val="118000"/>
+              </a:lnSpc>
+            </a:pPr>
+            <a:r>
+              <a:rPr sz="1150" b="0">
+                <a:solidFill>
+                  <a:srgbClr val="1A1A1A"/>
+                </a:solidFill>
+                <a:latin typeface="Georgia"/>
+              </a:rPr>
+              <a:t>drag a box, get flow for that region.</a:t>
+            </a:r>
+          </a:p>
+          <a:p>
+            <a:pPr algn="l">
+              <a:lnSpc>
+                <a:spcPct val="118000"/>
+              </a:lnSpc>
+            </a:pPr>
+            <a:r>
+              <a:rPr sz="1150" b="0">
                 <a:solidFill>
                   <a:srgbClr val="1A1A1A"/>
                 </a:solidFill>
@@ -5565,45 +5513,29 @@
             </a:r>
           </a:p>
           <a:p>
-            <a:pPr algn="ctr"/>
-            <a:r>
-              <a:rPr sz="1000" b="0">
-                <a:solidFill>
-                  <a:srgbClr val="1A1A1A"/>
-                </a:solidFill>
-                <a:latin typeface="Georgia"/>
-              </a:rPr>
-              <a:t>flow  = model.decode_queries(</a:t>
-            </a:r>
-          </a:p>
-          <a:p>
-            <a:pPr algn="ctr"/>
-            <a:r>
-              <a:rPr sz="1000" b="0">
-                <a:solidFill>
-                  <a:srgbClr val="1A1A1A"/>
-                </a:solidFill>
-                <a:latin typeface="Georgia"/>
-              </a:rPr>
-              <a:t>            state, query_coords=q)</a:t>
-            </a:r>
-          </a:p>
-          <a:p>
-            <a:pPr algn="ctr"/>
-            <a:r>
-              <a:rPr sz="1000" b="0">
-                <a:solidFill>
-                  <a:srgbClr val="1A1A1A"/>
-                </a:solidFill>
-                <a:latin typeface="Georgia"/>
-              </a:rPr>
-              <a:t>            q: [B, N, 2] -&gt; [B, N, 2], 2.6 ms</a:t>
-            </a:r>
-          </a:p>
-          <a:p>
-            <a:pPr algn="ctr"/>
-            <a:r>
-              <a:rPr sz="1000" b="0">
+            <a:pPr algn="l">
+              <a:lnSpc>
+                <a:spcPct val="118000"/>
+              </a:lnSpc>
+            </a:pPr>
+            <a:r>
+              <a:rPr sz="1150" b="0">
+                <a:solidFill>
+                  <a:srgbClr val="1A1A1A"/>
+                </a:solidFill>
+                <a:latin typeface="Georgia"/>
+              </a:rPr>
+              <a:t>Two modes, both timed live:</a:t>
+            </a:r>
+          </a:p>
+          <a:p>
+            <a:pPr algn="l">
+              <a:lnSpc>
+                <a:spcPct val="118000"/>
+              </a:lnSpc>
+            </a:pPr>
+            <a:r>
+              <a:rPr sz="1150" b="0">
                 <a:solidFill>
                   <a:srgbClr val="1A1A1A"/>
                 </a:solidFill>
@@ -5613,29 +5545,177 @@
             </a:r>
           </a:p>
           <a:p>
-            <a:pPr algn="ctr"/>
-            <a:r>
-              <a:rPr sz="1000" b="0">
-                <a:solidFill>
-                  <a:srgbClr val="1A1A1A"/>
-                </a:solidFill>
-                <a:latin typeface="Georgia"/>
-              </a:rPr>
-              <a:t>flow, b = ... (return_uncertainty=True)</a:t>
-            </a:r>
-          </a:p>
-        </p:txBody>
-      </p:sp>
-      <p:sp>
-        <p:nvSpPr>
-          <p:cNvPr id="7" name="TextBox 6"/>
+            <a:pPr algn="l">
+              <a:lnSpc>
+                <a:spcPct val="118000"/>
+              </a:lnSpc>
+            </a:pPr>
+            <a:r>
+              <a:rPr sz="1150" b="0">
+                <a:solidFill>
+                  <a:srgbClr val="1A1A1A"/>
+                </a:solidFill>
+                <a:latin typeface="Georgia"/>
+              </a:rPr>
+              <a:t>QUERY decodes only inside the box</a:t>
+            </a:r>
+          </a:p>
+          <a:p>
+            <a:pPr algn="l">
+              <a:lnSpc>
+                <a:spcPct val="118000"/>
+              </a:lnSpc>
+            </a:pPr>
+            <a:r>
+              <a:rPr sz="1150" b="0">
+                <a:solidFill>
+                  <a:srgbClr val="1A1A1A"/>
+                </a:solidFill>
+                <a:latin typeface="Georgia"/>
+              </a:rPr>
+              <a:t>against a full-frame coarse pass. Exact.</a:t>
+            </a:r>
+          </a:p>
+          <a:p>
+            <a:pPr algn="l">
+              <a:lnSpc>
+                <a:spcPct val="118000"/>
+              </a:lnSpc>
+            </a:pPr>
+            <a:r>
+              <a:rPr sz="1150" b="0">
+                <a:solidFill>
+                  <a:srgbClr val="1A1A1A"/>
+                </a:solidFill>
+                <a:latin typeface="Georgia"/>
+              </a:rPr>
+              <a:t/>
+            </a:r>
+          </a:p>
+          <a:p>
+            <a:pPr algn="l">
+              <a:lnSpc>
+                <a:spcPct val="118000"/>
+              </a:lnSpc>
+            </a:pPr>
+            <a:r>
+              <a:rPr sz="1150" b="0">
+                <a:solidFill>
+                  <a:srgbClr val="1A1A1A"/>
+                </a:solidFill>
+                <a:latin typeface="Georgia"/>
+              </a:rPr>
+              <a:t>CROP feeds only the box through the</a:t>
+            </a:r>
+          </a:p>
+          <a:p>
+            <a:pPr algn="l">
+              <a:lnSpc>
+                <a:spcPct val="118000"/>
+              </a:lnSpc>
+            </a:pPr>
+            <a:r>
+              <a:rPr sz="1150" b="0">
+                <a:solidFill>
+                  <a:srgbClr val="1A1A1A"/>
+                </a:solidFill>
+                <a:latin typeface="Georgia"/>
+              </a:rPr>
+              <a:t>whole pipeline, so cost scales with the</a:t>
+            </a:r>
+          </a:p>
+          <a:p>
+            <a:pPr algn="l">
+              <a:lnSpc>
+                <a:spcPct val="118000"/>
+              </a:lnSpc>
+            </a:pPr>
+            <a:r>
+              <a:rPr sz="1150" b="0">
+                <a:solidFill>
+                  <a:srgbClr val="1A1A1A"/>
+                </a:solidFill>
+                <a:latin typeface="Georgia"/>
+              </a:rPr>
+              <a:t>area requested, at the price of losing</a:t>
+            </a:r>
+          </a:p>
+          <a:p>
+            <a:pPr algn="l">
+              <a:lnSpc>
+                <a:spcPct val="118000"/>
+              </a:lnSpc>
+            </a:pPr>
+            <a:r>
+              <a:rPr sz="1150" b="0">
+                <a:solidFill>
+                  <a:srgbClr val="1A1A1A"/>
+                </a:solidFill>
+                <a:latin typeface="Georgia"/>
+              </a:rPr>
+              <a:t>context outside the crop.</a:t>
+            </a:r>
+          </a:p>
+          <a:p>
+            <a:pPr algn="l">
+              <a:lnSpc>
+                <a:spcPct val="118000"/>
+              </a:lnSpc>
+            </a:pPr>
+            <a:r>
+              <a:rPr sz="1150" b="0">
+                <a:solidFill>
+                  <a:srgbClr val="1A1A1A"/>
+                </a:solidFill>
+                <a:latin typeface="Georgia"/>
+              </a:rPr>
+              <a:t/>
+            </a:r>
+          </a:p>
+          <a:p>
+            <a:pPr algn="l">
+              <a:lnSpc>
+                <a:spcPct val="118000"/>
+              </a:lnSpc>
+            </a:pPr>
+            <a:r>
+              <a:rPr sz="1150" b="0">
+                <a:solidFill>
+                  <a:srgbClr val="1A1A1A"/>
+                </a:solidFill>
+                <a:latin typeface="Georgia"/>
+              </a:rPr>
+              <a:t>The panel shows where the time goes</a:t>
+            </a:r>
+          </a:p>
+          <a:p>
+            <a:pPr algn="l">
+              <a:lnSpc>
+                <a:spcPct val="118000"/>
+              </a:lnSpc>
+            </a:pPr>
+            <a:r>
+              <a:rPr sz="1150" b="0">
+                <a:solidFill>
+                  <a:srgbClr val="1A1A1A"/>
+                </a:solidFill>
+                <a:latin typeface="Georgia"/>
+              </a:rPr>
+              <a:t>rather than asserting a speed-up.</a:t>
+            </a:r>
+          </a:p>
+        </p:txBody>
+      </p:sp>
+      <p:sp>
+        <p:nvSpPr>
+          <p:cNvPr id="6" name="TextBox 5"/>
           <p:cNvSpPr txBox="1"/>
           <p:nvPr/>
         </p:nvSpPr>
         <p:spPr>
           <a:xfrm>
-            <a:off x="7406640" y="3931920"/>
-            <a:ext cx="4206240" cy="1828800"/>
+            <a:off x="685800" y="6419088"/>
+            <a:ext cx="7315200" cy="274320"/>
           </a:xfrm>
           <a:prstGeom prst="rect">
             <a:avLst/>
@@ -5650,157 +5730,6 @@
           <a:p>
             <a:pPr algn="l">
               <a:lnSpc>
-                <a:spcPct val="118000"/>
-              </a:lnSpc>
-            </a:pPr>
-            <a:r>
-              <a:rPr sz="1150" b="0">
-                <a:solidFill>
-                  <a:srgbClr val="1A1A1A"/>
-                </a:solidFill>
-                <a:latin typeface="Georgia"/>
-              </a:rPr>
-              <a:t>Decode cost is flat from 800 to 2,048</a:t>
-            </a:r>
-          </a:p>
-          <a:p>
-            <a:pPr algn="l">
-              <a:lnSpc>
-                <a:spcPct val="118000"/>
-              </a:lnSpc>
-            </a:pPr>
-            <a:r>
-              <a:rPr sz="1150" b="0">
-                <a:solidFill>
-                  <a:srgbClr val="1A1A1A"/>
-                </a:solidFill>
-                <a:latin typeface="Georgia"/>
-              </a:rPr>
-              <a:t>queries, so it is bound by kernel launch</a:t>
-            </a:r>
-          </a:p>
-          <a:p>
-            <a:pPr algn="l">
-              <a:lnSpc>
-                <a:spcPct val="118000"/>
-              </a:lnSpc>
-            </a:pPr>
-            <a:r>
-              <a:rPr sz="1150" b="0">
-                <a:solidFill>
-                  <a:srgbClr val="1A1A1A"/>
-                </a:solidFill>
-                <a:latin typeface="Georgia"/>
-              </a:rPr>
-              <a:t>overhead rather than compute. You get</a:t>
-            </a:r>
-          </a:p>
-          <a:p>
-            <a:pPr algn="l">
-              <a:lnSpc>
-                <a:spcPct val="118000"/>
-              </a:lnSpc>
-            </a:pPr>
-            <a:r>
-              <a:rPr sz="1150" b="0">
-                <a:solidFill>
-                  <a:srgbClr val="1A1A1A"/>
-                </a:solidFill>
-                <a:latin typeface="Georgia"/>
-              </a:rPr>
-              <a:t>2,048 points for the price of 800.</a:t>
-            </a:r>
-          </a:p>
-          <a:p>
-            <a:pPr algn="l">
-              <a:lnSpc>
-                <a:spcPct val="118000"/>
-              </a:lnSpc>
-            </a:pPr>
-            <a:r>
-              <a:rPr sz="1150" b="0">
-                <a:solidFill>
-                  <a:srgbClr val="1A1A1A"/>
-                </a:solidFill>
-                <a:latin typeface="Georgia"/>
-              </a:rPr>
-              <a:t/>
-            </a:r>
-          </a:p>
-          <a:p>
-            <a:pPr algn="l">
-              <a:lnSpc>
-                <a:spcPct val="118000"/>
-              </a:lnSpc>
-            </a:pPr>
-            <a:r>
-              <a:rPr sz="1150" b="0">
-                <a:solidFill>
-                  <a:srgbClr val="1A1A1A"/>
-                </a:solidFill>
-                <a:latin typeface="Georgia"/>
-              </a:rPr>
-              <a:t>Above roughly 10,000 points the decode</a:t>
-            </a:r>
-          </a:p>
-          <a:p>
-            <a:pPr algn="l">
-              <a:lnSpc>
-                <a:spcPct val="118000"/>
-              </a:lnSpc>
-            </a:pPr>
-            <a:r>
-              <a:rPr sz="1150" b="0">
-                <a:solidFill>
-                  <a:srgbClr val="1A1A1A"/>
-                </a:solidFill>
-                <a:latin typeface="Georgia"/>
-              </a:rPr>
-              <a:t>becomes compute-bound and dense mode</a:t>
-            </a:r>
-          </a:p>
-          <a:p>
-            <a:pPr algn="l">
-              <a:lnSpc>
-                <a:spcPct val="118000"/>
-              </a:lnSpc>
-            </a:pPr>
-            <a:r>
-              <a:rPr sz="1150" b="0">
-                <a:solidFill>
-                  <a:srgbClr val="1A1A1A"/>
-                </a:solidFill>
-                <a:latin typeface="Georgia"/>
-              </a:rPr>
-              <a:t>is the better choice.</a:t>
-            </a:r>
-          </a:p>
-        </p:txBody>
-      </p:sp>
-      <p:sp>
-        <p:nvSpPr>
-          <p:cNvPr id="8" name="TextBox 7"/>
-          <p:cNvSpPr txBox="1"/>
-          <p:nvPr/>
-        </p:nvSpPr>
-        <p:spPr>
-          <a:xfrm>
-            <a:off x="685800" y="6419088"/>
-            <a:ext cx="7315200" cy="274320"/>
-          </a:xfrm>
-          <a:prstGeom prst="rect">
-            <a:avLst/>
-          </a:prstGeom>
-          <a:noFill/>
-        </p:spPr>
-        <p:txBody>
-          <a:bodyPr wrap="square">
-            <a:spAutoFit/>
-          </a:bodyPr>
-          <a:lstStyle/>
-          <a:p>
-            <a:pPr algn="l">
-              <a:lnSpc>
                 <a:spcPct val="100000"/>
               </a:lnSpc>
             </a:pPr>
@@ -5818,7 +5747,7 @@
       </p:sp>
       <p:sp>
         <p:nvSpPr>
-          <p:cNvPr id="9" name="TextBox 8"/>
+          <p:cNvPr id="7" name="TextBox 6"/>
           <p:cNvSpPr txBox="1"/>
           <p:nvPr/>
         </p:nvSpPr>
@@ -5907,7 +5836,7 @@
                 </a:solidFill>
                 <a:latin typeface="Georgia"/>
               </a:rPr>
-              <a:t>INTERFACE</a:t>
+              <a:t>ASSESSMENT</a:t>
             </a:r>
           </a:p>
         </p:txBody>
@@ -5946,45 +5875,21 @@
                 </a:solidFill>
                 <a:latin typeface="Georgia"/>
               </a:rPr>
-              <a:t>Working tool: draw a region, get flow there</a:t>
-            </a:r>
-          </a:p>
-        </p:txBody>
-      </p:sp>
-      <p:pic>
-        <p:nvPicPr>
-          <p:cNvPr id="4" name="Picture 3" descr="region_gui_window.png"/>
-          <p:cNvPicPr>
-            <a:picLocks noChangeAspect="1"/>
-          </p:cNvPicPr>
-          <p:nvPr/>
-        </p:nvPicPr>
-        <p:blipFill>
-          <a:blip r:embed="rId2"/>
-          <a:stretch>
-            <a:fillRect/>
-          </a:stretch>
-        </p:blipFill>
-        <p:spPr>
-          <a:xfrm>
-            <a:off x="731520" y="1508760"/>
-            <a:ext cx="6949440" cy="3716489"/>
-          </a:xfrm>
-          <a:prstGeom prst="rect">
-            <a:avLst/>
-          </a:prstGeom>
-        </p:spPr>
-      </p:pic>
-      <p:sp>
-        <p:nvSpPr>
-          <p:cNvPr id="5" name="TextBox 4"/>
+              <a:t>Against the three objectives I set</a:t>
+            </a:r>
+          </a:p>
+        </p:txBody>
+      </p:sp>
+      <p:sp>
+        <p:nvSpPr>
+          <p:cNvPr id="4" name="TextBox 3"/>
           <p:cNvSpPr txBox="1"/>
           <p:nvPr/>
         </p:nvSpPr>
         <p:spPr>
           <a:xfrm>
-            <a:off x="7955279" y="1645920"/>
-            <a:ext cx="3657600" cy="4023360"/>
+            <a:off x="685800" y="1691640"/>
+            <a:ext cx="3291840" cy="237744"/>
           </a:xfrm>
           <a:prstGeom prst="rect">
             <a:avLst/>
@@ -5999,255 +5904,31 @@
           <a:p>
             <a:pPr algn="l">
               <a:lnSpc>
-                <a:spcPct val="118000"/>
-              </a:lnSpc>
-            </a:pPr>
-            <a:r>
-              <a:rPr sz="1150" b="0">
-                <a:solidFill>
-                  <a:srgbClr val="1A1A1A"/>
-                </a:solidFill>
-                <a:latin typeface="Georgia"/>
-              </a:rPr>
-              <a:t>Load a video, step frame by frame,</a:t>
-            </a:r>
-          </a:p>
-          <a:p>
-            <a:pPr algn="l">
-              <a:lnSpc>
-                <a:spcPct val="118000"/>
-              </a:lnSpc>
-            </a:pPr>
-            <a:r>
-              <a:rPr sz="1150" b="0">
-                <a:solidFill>
-                  <a:srgbClr val="1A1A1A"/>
-                </a:solidFill>
-                <a:latin typeface="Georgia"/>
-              </a:rPr>
-              <a:t>drag a box, get flow for that region.</a:t>
-            </a:r>
-          </a:p>
-          <a:p>
-            <a:pPr algn="l">
-              <a:lnSpc>
-                <a:spcPct val="118000"/>
-              </a:lnSpc>
-            </a:pPr>
-            <a:r>
-              <a:rPr sz="1150" b="0">
-                <a:solidFill>
-                  <a:srgbClr val="1A1A1A"/>
-                </a:solidFill>
-                <a:latin typeface="Georgia"/>
-              </a:rPr>
-              <a:t/>
-            </a:r>
-          </a:p>
-          <a:p>
-            <a:pPr algn="l">
-              <a:lnSpc>
-                <a:spcPct val="118000"/>
-              </a:lnSpc>
-            </a:pPr>
-            <a:r>
-              <a:rPr sz="1150" b="0">
-                <a:solidFill>
-                  <a:srgbClr val="1A1A1A"/>
-                </a:solidFill>
-                <a:latin typeface="Georgia"/>
-              </a:rPr>
-              <a:t>Two modes, both timed live:</a:t>
-            </a:r>
-          </a:p>
-          <a:p>
-            <a:pPr algn="l">
-              <a:lnSpc>
-                <a:spcPct val="118000"/>
-              </a:lnSpc>
-            </a:pPr>
-            <a:r>
-              <a:rPr sz="1150" b="0">
-                <a:solidFill>
-                  <a:srgbClr val="1A1A1A"/>
-                </a:solidFill>
-                <a:latin typeface="Georgia"/>
-              </a:rPr>
-              <a:t/>
-            </a:r>
-          </a:p>
-          <a:p>
-            <a:pPr algn="l">
-              <a:lnSpc>
-                <a:spcPct val="118000"/>
-              </a:lnSpc>
-            </a:pPr>
-            <a:r>
-              <a:rPr sz="1150" b="0">
-                <a:solidFill>
-                  <a:srgbClr val="1A1A1A"/>
-                </a:solidFill>
-                <a:latin typeface="Georgia"/>
-              </a:rPr>
-              <a:t>QUERY decodes only inside the box</a:t>
-            </a:r>
-          </a:p>
-          <a:p>
-            <a:pPr algn="l">
-              <a:lnSpc>
-                <a:spcPct val="118000"/>
-              </a:lnSpc>
-            </a:pPr>
-            <a:r>
-              <a:rPr sz="1150" b="0">
-                <a:solidFill>
-                  <a:srgbClr val="1A1A1A"/>
-                </a:solidFill>
-                <a:latin typeface="Georgia"/>
-              </a:rPr>
-              <a:t>against a full-frame coarse pass. Exact.</a:t>
-            </a:r>
-          </a:p>
-          <a:p>
-            <a:pPr algn="l">
-              <a:lnSpc>
-                <a:spcPct val="118000"/>
-              </a:lnSpc>
-            </a:pPr>
-            <a:r>
-              <a:rPr sz="1150" b="0">
-                <a:solidFill>
-                  <a:srgbClr val="1A1A1A"/>
-                </a:solidFill>
-                <a:latin typeface="Georgia"/>
-              </a:rPr>
-              <a:t/>
-            </a:r>
-          </a:p>
-          <a:p>
-            <a:pPr algn="l">
-              <a:lnSpc>
-                <a:spcPct val="118000"/>
-              </a:lnSpc>
-            </a:pPr>
-            <a:r>
-              <a:rPr sz="1150" b="0">
-                <a:solidFill>
-                  <a:srgbClr val="1A1A1A"/>
-                </a:solidFill>
-                <a:latin typeface="Georgia"/>
-              </a:rPr>
-              <a:t>CROP feeds only the box through the</a:t>
-            </a:r>
-          </a:p>
-          <a:p>
-            <a:pPr algn="l">
-              <a:lnSpc>
-                <a:spcPct val="118000"/>
-              </a:lnSpc>
-            </a:pPr>
-            <a:r>
-              <a:rPr sz="1150" b="0">
-                <a:solidFill>
-                  <a:srgbClr val="1A1A1A"/>
-                </a:solidFill>
-                <a:latin typeface="Georgia"/>
-              </a:rPr>
-              <a:t>whole pipeline, so cost scales with the</a:t>
-            </a:r>
-          </a:p>
-          <a:p>
-            <a:pPr algn="l">
-              <a:lnSpc>
-                <a:spcPct val="118000"/>
-              </a:lnSpc>
-            </a:pPr>
-            <a:r>
-              <a:rPr sz="1150" b="0">
-                <a:solidFill>
-                  <a:srgbClr val="1A1A1A"/>
-                </a:solidFill>
-                <a:latin typeface="Georgia"/>
-              </a:rPr>
-              <a:t>area requested, at the price of losing</a:t>
-            </a:r>
-          </a:p>
-          <a:p>
-            <a:pPr algn="l">
-              <a:lnSpc>
-                <a:spcPct val="118000"/>
-              </a:lnSpc>
-            </a:pPr>
-            <a:r>
-              <a:rPr sz="1150" b="0">
-                <a:solidFill>
-                  <a:srgbClr val="1A1A1A"/>
-                </a:solidFill>
-                <a:latin typeface="Georgia"/>
-              </a:rPr>
-              <a:t>context outside the crop.</a:t>
-            </a:r>
-          </a:p>
-          <a:p>
-            <a:pPr algn="l">
-              <a:lnSpc>
-                <a:spcPct val="118000"/>
-              </a:lnSpc>
-            </a:pPr>
-            <a:r>
-              <a:rPr sz="1150" b="0">
-                <a:solidFill>
-                  <a:srgbClr val="1A1A1A"/>
-                </a:solidFill>
-                <a:latin typeface="Georgia"/>
-              </a:rPr>
-              <a:t/>
-            </a:r>
-          </a:p>
-          <a:p>
-            <a:pPr algn="l">
-              <a:lnSpc>
-                <a:spcPct val="118000"/>
-              </a:lnSpc>
-            </a:pPr>
-            <a:r>
-              <a:rPr sz="1150" b="0">
-                <a:solidFill>
-                  <a:srgbClr val="1A1A1A"/>
-                </a:solidFill>
-                <a:latin typeface="Georgia"/>
-              </a:rPr>
-              <a:t>The panel shows where the time goes</a:t>
-            </a:r>
-          </a:p>
-          <a:p>
-            <a:pPr algn="l">
-              <a:lnSpc>
-                <a:spcPct val="118000"/>
-              </a:lnSpc>
-            </a:pPr>
-            <a:r>
-              <a:rPr sz="1150" b="0">
-                <a:solidFill>
-                  <a:srgbClr val="1A1A1A"/>
-                </a:solidFill>
-                <a:latin typeface="Georgia"/>
-              </a:rPr>
-              <a:t>rather than asserting a speed-up.</a:t>
-            </a:r>
-          </a:p>
-        </p:txBody>
-      </p:sp>
-      <p:sp>
-        <p:nvSpPr>
-          <p:cNvPr id="6" name="TextBox 5"/>
+                <a:spcPct val="100000"/>
+              </a:lnSpc>
+            </a:pPr>
+            <a:r>
+              <a:rPr sz="1150" b="1">
+                <a:solidFill>
+                  <a:srgbClr val="1A1A1A"/>
+                </a:solidFill>
+                <a:latin typeface="Georgia"/>
+              </a:rPr>
+              <a:t>Objective</a:t>
+            </a:r>
+          </a:p>
+        </p:txBody>
+      </p:sp>
+      <p:sp>
+        <p:nvSpPr>
+          <p:cNvPr id="5" name="TextBox 4"/>
           <p:cNvSpPr txBox="1"/>
           <p:nvPr/>
         </p:nvSpPr>
         <p:spPr>
           <a:xfrm>
-            <a:off x="685800" y="6419088"/>
-            <a:ext cx="7315200" cy="274320"/>
+            <a:off x="3977639" y="1691640"/>
+            <a:ext cx="1737360" cy="237744"/>
           </a:xfrm>
           <a:prstGeom prst="rect">
             <a:avLst/>
@@ -6260,12 +5941,1346 @@
           </a:bodyPr>
           <a:lstStyle/>
           <a:p>
-            <a:pPr algn="l">
+            <a:pPr algn="r">
               <a:lnSpc>
                 <a:spcPct val="100000"/>
               </a:lnSpc>
             </a:pPr>
             <a:r>
+              <a:rPr sz="1150" b="1">
+                <a:solidFill>
+                  <a:srgbClr val="1A1A1A"/>
+                </a:solidFill>
+                <a:latin typeface="Georgia"/>
+              </a:rPr>
+              <a:t>Verdict</a:t>
+            </a:r>
+          </a:p>
+        </p:txBody>
+      </p:sp>
+      <p:sp>
+        <p:nvSpPr>
+          <p:cNvPr id="6" name="TextBox 5"/>
+          <p:cNvSpPr txBox="1"/>
+          <p:nvPr/>
+        </p:nvSpPr>
+        <p:spPr>
+          <a:xfrm>
+            <a:off x="5715000" y="1691640"/>
+            <a:ext cx="5852160" cy="237744"/>
+          </a:xfrm>
+          <a:prstGeom prst="rect">
+            <a:avLst/>
+          </a:prstGeom>
+          <a:noFill/>
+        </p:spPr>
+        <p:txBody>
+          <a:bodyPr wrap="square">
+            <a:spAutoFit/>
+          </a:bodyPr>
+          <a:lstStyle/>
+          <a:p>
+            <a:pPr algn="r">
+              <a:lnSpc>
+                <a:spcPct val="100000"/>
+              </a:lnSpc>
+            </a:pPr>
+            <a:r>
+              <a:rPr sz="1150" b="1">
+                <a:solidFill>
+                  <a:srgbClr val="1A1A1A"/>
+                </a:solidFill>
+                <a:latin typeface="Georgia"/>
+              </a:rPr>
+              <a:t>Evidence</a:t>
+            </a:r>
+          </a:p>
+        </p:txBody>
+      </p:sp>
+      <p:sp>
+        <p:nvSpPr>
+          <p:cNvPr id="7" name="Rectangle 6"/>
+          <p:cNvSpPr/>
+          <p:nvPr/>
+        </p:nvSpPr>
+        <p:spPr>
+          <a:xfrm>
+            <a:off x="685800" y="1929384"/>
+            <a:ext cx="10881360" cy="9525"/>
+          </a:xfrm>
+          <a:prstGeom prst="rect">
+            <a:avLst/>
+          </a:prstGeom>
+          <a:solidFill>
+            <a:srgbClr val="8A8A8A"/>
+          </a:solidFill>
+          <a:ln>
+            <a:noFill/>
+          </a:ln>
+          <a:effectLst/>
+        </p:spPr>
+        <p:style>
+          <a:lnRef idx="1">
+            <a:schemeClr val="accent1"/>
+          </a:lnRef>
+          <a:fillRef idx="3">
+            <a:schemeClr val="accent1"/>
+          </a:fillRef>
+          <a:effectRef idx="2">
+            <a:schemeClr val="accent1"/>
+          </a:effectRef>
+          <a:fontRef idx="minor">
+            <a:schemeClr val="lt1"/>
+          </a:fontRef>
+        </p:style>
+        <p:txBody>
+          <a:bodyPr rtlCol="0" anchor="ctr"/>
+          <a:lstStyle/>
+          <a:p>
+            <a:pPr algn="ctr"/>
+          </a:p>
+        </p:txBody>
+      </p:sp>
+      <p:sp>
+        <p:nvSpPr>
+          <p:cNvPr id="8" name="TextBox 7"/>
+          <p:cNvSpPr txBox="1"/>
+          <p:nvPr/>
+        </p:nvSpPr>
+        <p:spPr>
+          <a:xfrm>
+            <a:off x="685800" y="1965960"/>
+            <a:ext cx="3291840" cy="237744"/>
+          </a:xfrm>
+          <a:prstGeom prst="rect">
+            <a:avLst/>
+          </a:prstGeom>
+          <a:noFill/>
+        </p:spPr>
+        <p:txBody>
+          <a:bodyPr wrap="square">
+            <a:spAutoFit/>
+          </a:bodyPr>
+          <a:lstStyle/>
+          <a:p>
+            <a:pPr algn="l">
+              <a:lnSpc>
+                <a:spcPct val="100000"/>
+              </a:lnSpc>
+            </a:pPr>
+            <a:r>
+              <a:rPr sz="1150" b="0">
+                <a:solidFill>
+                  <a:srgbClr val="1A1A1A"/>
+                </a:solidFill>
+                <a:latin typeface="Georgia"/>
+              </a:rPr>
+              <a:t>Better accuracy than v2</a:t>
+            </a:r>
+          </a:p>
+        </p:txBody>
+      </p:sp>
+      <p:sp>
+        <p:nvSpPr>
+          <p:cNvPr id="9" name="TextBox 8"/>
+          <p:cNvSpPr txBox="1"/>
+          <p:nvPr/>
+        </p:nvSpPr>
+        <p:spPr>
+          <a:xfrm>
+            <a:off x="3977639" y="1965960"/>
+            <a:ext cx="1737360" cy="237744"/>
+          </a:xfrm>
+          <a:prstGeom prst="rect">
+            <a:avLst/>
+          </a:prstGeom>
+          <a:noFill/>
+        </p:spPr>
+        <p:txBody>
+          <a:bodyPr wrap="square">
+            <a:spAutoFit/>
+          </a:bodyPr>
+          <a:lstStyle/>
+          <a:p>
+            <a:pPr algn="r">
+              <a:lnSpc>
+                <a:spcPct val="100000"/>
+              </a:lnSpc>
+            </a:pPr>
+            <a:r>
+              <a:rPr sz="1150" b="0">
+                <a:solidFill>
+                  <a:srgbClr val="1A1A1A"/>
+                </a:solidFill>
+                <a:latin typeface="Georgia"/>
+              </a:rPr>
+              <a:t>NOT MET</a:t>
+            </a:r>
+          </a:p>
+        </p:txBody>
+      </p:sp>
+      <p:sp>
+        <p:nvSpPr>
+          <p:cNvPr id="10" name="TextBox 9"/>
+          <p:cNvSpPr txBox="1"/>
+          <p:nvPr/>
+        </p:nvSpPr>
+        <p:spPr>
+          <a:xfrm>
+            <a:off x="5715000" y="1965960"/>
+            <a:ext cx="5852160" cy="237744"/>
+          </a:xfrm>
+          <a:prstGeom prst="rect">
+            <a:avLst/>
+          </a:prstGeom>
+          <a:noFill/>
+        </p:spPr>
+        <p:txBody>
+          <a:bodyPr wrap="square">
+            <a:spAutoFit/>
+          </a:bodyPr>
+          <a:lstStyle/>
+          <a:p>
+            <a:pPr algn="r">
+              <a:lnSpc>
+                <a:spcPct val="100000"/>
+              </a:lnSpc>
+            </a:pPr>
+            <a:r>
+              <a:rPr sz="1150" b="0">
+                <a:solidFill>
+                  <a:srgbClr val="1A1A1A"/>
+                </a:solidFill>
+                <a:latin typeface="Georgia"/>
+              </a:rPr>
+              <a:t>best v3 2.384 vs 2.324; every config above v2</a:t>
+            </a:r>
+          </a:p>
+        </p:txBody>
+      </p:sp>
+      <p:sp>
+        <p:nvSpPr>
+          <p:cNvPr id="11" name="TextBox 10"/>
+          <p:cNvSpPr txBox="1"/>
+          <p:nvPr/>
+        </p:nvSpPr>
+        <p:spPr>
+          <a:xfrm>
+            <a:off x="685800" y="2240279"/>
+            <a:ext cx="3291840" cy="237744"/>
+          </a:xfrm>
+          <a:prstGeom prst="rect">
+            <a:avLst/>
+          </a:prstGeom>
+          <a:noFill/>
+        </p:spPr>
+        <p:txBody>
+          <a:bodyPr wrap="square">
+            <a:spAutoFit/>
+          </a:bodyPr>
+          <a:lstStyle/>
+          <a:p>
+            <a:pPr algn="l">
+              <a:lnSpc>
+                <a:spcPct val="100000"/>
+              </a:lnSpc>
+            </a:pPr>
+            <a:r>
+              <a:rPr sz="1150" b="0">
+                <a:solidFill>
+                  <a:srgbClr val="1A1A1A"/>
+                </a:solidFill>
+                <a:latin typeface="Georgia"/>
+              </a:rPr>
+              <a:t/>
+            </a:r>
+          </a:p>
+        </p:txBody>
+      </p:sp>
+      <p:sp>
+        <p:nvSpPr>
+          <p:cNvPr id="12" name="TextBox 11"/>
+          <p:cNvSpPr txBox="1"/>
+          <p:nvPr/>
+        </p:nvSpPr>
+        <p:spPr>
+          <a:xfrm>
+            <a:off x="3977639" y="2240279"/>
+            <a:ext cx="1737360" cy="237744"/>
+          </a:xfrm>
+          <a:prstGeom prst="rect">
+            <a:avLst/>
+          </a:prstGeom>
+          <a:noFill/>
+        </p:spPr>
+        <p:txBody>
+          <a:bodyPr wrap="square">
+            <a:spAutoFit/>
+          </a:bodyPr>
+          <a:lstStyle/>
+          <a:p>
+            <a:pPr algn="r">
+              <a:lnSpc>
+                <a:spcPct val="100000"/>
+              </a:lnSpc>
+            </a:pPr>
+            <a:r>
+              <a:rPr sz="1150" b="0">
+                <a:solidFill>
+                  <a:srgbClr val="1A1A1A"/>
+                </a:solidFill>
+                <a:latin typeface="Georgia"/>
+              </a:rPr>
+              <a:t/>
+            </a:r>
+          </a:p>
+        </p:txBody>
+      </p:sp>
+      <p:sp>
+        <p:nvSpPr>
+          <p:cNvPr id="13" name="TextBox 12"/>
+          <p:cNvSpPr txBox="1"/>
+          <p:nvPr/>
+        </p:nvSpPr>
+        <p:spPr>
+          <a:xfrm>
+            <a:off x="5715000" y="2240279"/>
+            <a:ext cx="5852160" cy="237744"/>
+          </a:xfrm>
+          <a:prstGeom prst="rect">
+            <a:avLst/>
+          </a:prstGeom>
+          <a:noFill/>
+        </p:spPr>
+        <p:txBody>
+          <a:bodyPr wrap="square">
+            <a:spAutoFit/>
+          </a:bodyPr>
+          <a:lstStyle/>
+          <a:p>
+            <a:pPr algn="r">
+              <a:lnSpc>
+                <a:spcPct val="100000"/>
+              </a:lnSpc>
+            </a:pPr>
+            <a:r>
+              <a:rPr sz="1150" b="0">
+                <a:solidFill>
+                  <a:srgbClr val="1A1A1A"/>
+                </a:solidFill>
+                <a:latin typeface="Georgia"/>
+              </a:rPr>
+              <a:t>like-for-like 2.500, i.e. 7.6% behind</a:t>
+            </a:r>
+          </a:p>
+        </p:txBody>
+      </p:sp>
+      <p:sp>
+        <p:nvSpPr>
+          <p:cNvPr id="14" name="TextBox 13"/>
+          <p:cNvSpPr txBox="1"/>
+          <p:nvPr/>
+        </p:nvSpPr>
+        <p:spPr>
+          <a:xfrm>
+            <a:off x="685800" y="2514599"/>
+            <a:ext cx="3291840" cy="237744"/>
+          </a:xfrm>
+          <a:prstGeom prst="rect">
+            <a:avLst/>
+          </a:prstGeom>
+          <a:noFill/>
+        </p:spPr>
+        <p:txBody>
+          <a:bodyPr wrap="square">
+            <a:spAutoFit/>
+          </a:bodyPr>
+          <a:lstStyle/>
+          <a:p>
+            <a:pPr algn="l">
+              <a:lnSpc>
+                <a:spcPct val="100000"/>
+              </a:lnSpc>
+            </a:pPr>
+            <a:r>
+              <a:rPr sz="1150" b="0">
+                <a:solidFill>
+                  <a:srgbClr val="1A1A1A"/>
+                </a:solidFill>
+                <a:latin typeface="Georgia"/>
+              </a:rPr>
+              <a:t/>
+            </a:r>
+          </a:p>
+        </p:txBody>
+      </p:sp>
+      <p:sp>
+        <p:nvSpPr>
+          <p:cNvPr id="15" name="TextBox 14"/>
+          <p:cNvSpPr txBox="1"/>
+          <p:nvPr/>
+        </p:nvSpPr>
+        <p:spPr>
+          <a:xfrm>
+            <a:off x="3977639" y="2514599"/>
+            <a:ext cx="1737360" cy="237744"/>
+          </a:xfrm>
+          <a:prstGeom prst="rect">
+            <a:avLst/>
+          </a:prstGeom>
+          <a:noFill/>
+        </p:spPr>
+        <p:txBody>
+          <a:bodyPr wrap="square">
+            <a:spAutoFit/>
+          </a:bodyPr>
+          <a:lstStyle/>
+          <a:p>
+            <a:pPr algn="r">
+              <a:lnSpc>
+                <a:spcPct val="100000"/>
+              </a:lnSpc>
+            </a:pPr>
+            <a:r>
+              <a:rPr sz="1150" b="0">
+                <a:solidFill>
+                  <a:srgbClr val="1A1A1A"/>
+                </a:solidFill>
+                <a:latin typeface="Georgia"/>
+              </a:rPr>
+              <a:t/>
+            </a:r>
+          </a:p>
+        </p:txBody>
+      </p:sp>
+      <p:sp>
+        <p:nvSpPr>
+          <p:cNvPr id="16" name="TextBox 15"/>
+          <p:cNvSpPr txBox="1"/>
+          <p:nvPr/>
+        </p:nvSpPr>
+        <p:spPr>
+          <a:xfrm>
+            <a:off x="5715000" y="2514599"/>
+            <a:ext cx="5852160" cy="237744"/>
+          </a:xfrm>
+          <a:prstGeom prst="rect">
+            <a:avLst/>
+          </a:prstGeom>
+          <a:noFill/>
+        </p:spPr>
+        <p:txBody>
+          <a:bodyPr wrap="square">
+            <a:spAutoFit/>
+          </a:bodyPr>
+          <a:lstStyle/>
+          <a:p>
+            <a:pPr algn="r">
+              <a:lnSpc>
+                <a:spcPct val="100000"/>
+              </a:lnSpc>
+            </a:pPr>
+            <a:r>
+              <a:rPr sz="1150" b="0">
+                <a:solidFill>
+                  <a:srgbClr val="1A1A1A"/>
+                </a:solidFill>
+                <a:latin typeface="Georgia"/>
+              </a:rPr>
+              <a:t/>
+            </a:r>
+          </a:p>
+        </p:txBody>
+      </p:sp>
+      <p:sp>
+        <p:nvSpPr>
+          <p:cNvPr id="17" name="TextBox 16"/>
+          <p:cNvSpPr txBox="1"/>
+          <p:nvPr/>
+        </p:nvSpPr>
+        <p:spPr>
+          <a:xfrm>
+            <a:off x="685800" y="2788919"/>
+            <a:ext cx="3291840" cy="237744"/>
+          </a:xfrm>
+          <a:prstGeom prst="rect">
+            <a:avLst/>
+          </a:prstGeom>
+          <a:noFill/>
+        </p:spPr>
+        <p:txBody>
+          <a:bodyPr wrap="square">
+            <a:spAutoFit/>
+          </a:bodyPr>
+          <a:lstStyle/>
+          <a:p>
+            <a:pPr algn="l">
+              <a:lnSpc>
+                <a:spcPct val="100000"/>
+              </a:lnSpc>
+            </a:pPr>
+            <a:r>
+              <a:rPr sz="1150" b="0">
+                <a:solidFill>
+                  <a:srgbClr val="1A1A1A"/>
+                </a:solidFill>
+                <a:latin typeface="Georgia"/>
+              </a:rPr>
+              <a:t>Less compute than v2</a:t>
+            </a:r>
+          </a:p>
+        </p:txBody>
+      </p:sp>
+      <p:sp>
+        <p:nvSpPr>
+          <p:cNvPr id="18" name="TextBox 17"/>
+          <p:cNvSpPr txBox="1"/>
+          <p:nvPr/>
+        </p:nvSpPr>
+        <p:spPr>
+          <a:xfrm>
+            <a:off x="3977639" y="2788919"/>
+            <a:ext cx="1737360" cy="237744"/>
+          </a:xfrm>
+          <a:prstGeom prst="rect">
+            <a:avLst/>
+          </a:prstGeom>
+          <a:noFill/>
+        </p:spPr>
+        <p:txBody>
+          <a:bodyPr wrap="square">
+            <a:spAutoFit/>
+          </a:bodyPr>
+          <a:lstStyle/>
+          <a:p>
+            <a:pPr algn="r">
+              <a:lnSpc>
+                <a:spcPct val="100000"/>
+              </a:lnSpc>
+            </a:pPr>
+            <a:r>
+              <a:rPr sz="1150" b="0">
+                <a:solidFill>
+                  <a:srgbClr val="1A1A1A"/>
+                </a:solidFill>
+                <a:latin typeface="Georgia"/>
+              </a:rPr>
+              <a:t>PARTLY</a:t>
+            </a:r>
+          </a:p>
+        </p:txBody>
+      </p:sp>
+      <p:sp>
+        <p:nvSpPr>
+          <p:cNvPr id="19" name="TextBox 18"/>
+          <p:cNvSpPr txBox="1"/>
+          <p:nvPr/>
+        </p:nvSpPr>
+        <p:spPr>
+          <a:xfrm>
+            <a:off x="5715000" y="2788919"/>
+            <a:ext cx="5852160" cy="237744"/>
+          </a:xfrm>
+          <a:prstGeom prst="rect">
+            <a:avLst/>
+          </a:prstGeom>
+          <a:noFill/>
+        </p:spPr>
+        <p:txBody>
+          <a:bodyPr wrap="square">
+            <a:spAutoFit/>
+          </a:bodyPr>
+          <a:lstStyle/>
+          <a:p>
+            <a:pPr algn="r">
+              <a:lnSpc>
+                <a:spcPct val="100000"/>
+              </a:lnSpc>
+            </a:pPr>
+            <a:r>
+              <a:rPr sz="1150" b="0">
+                <a:solidFill>
+                  <a:srgbClr val="1A1A1A"/>
+                </a:solidFill>
+                <a:latin typeface="Georgia"/>
+              </a:rPr>
+              <a:t>dense 14% slower; first query level</a:t>
+            </a:r>
+          </a:p>
+        </p:txBody>
+      </p:sp>
+      <p:sp>
+        <p:nvSpPr>
+          <p:cNvPr id="20" name="TextBox 19"/>
+          <p:cNvSpPr txBox="1"/>
+          <p:nvPr/>
+        </p:nvSpPr>
+        <p:spPr>
+          <a:xfrm>
+            <a:off x="685800" y="3063239"/>
+            <a:ext cx="3291840" cy="237744"/>
+          </a:xfrm>
+          <a:prstGeom prst="rect">
+            <a:avLst/>
+          </a:prstGeom>
+          <a:noFill/>
+        </p:spPr>
+        <p:txBody>
+          <a:bodyPr wrap="square">
+            <a:spAutoFit/>
+          </a:bodyPr>
+          <a:lstStyle/>
+          <a:p>
+            <a:pPr algn="l">
+              <a:lnSpc>
+                <a:spcPct val="100000"/>
+              </a:lnSpc>
+            </a:pPr>
+            <a:r>
+              <a:rPr sz="1150" b="0">
+                <a:solidFill>
+                  <a:srgbClr val="1A1A1A"/>
+                </a:solidFill>
+                <a:latin typeface="Georgia"/>
+              </a:rPr>
+              <a:t/>
+            </a:r>
+          </a:p>
+        </p:txBody>
+      </p:sp>
+      <p:sp>
+        <p:nvSpPr>
+          <p:cNvPr id="21" name="TextBox 20"/>
+          <p:cNvSpPr txBox="1"/>
+          <p:nvPr/>
+        </p:nvSpPr>
+        <p:spPr>
+          <a:xfrm>
+            <a:off x="3977639" y="3063239"/>
+            <a:ext cx="1737360" cy="237744"/>
+          </a:xfrm>
+          <a:prstGeom prst="rect">
+            <a:avLst/>
+          </a:prstGeom>
+          <a:noFill/>
+        </p:spPr>
+        <p:txBody>
+          <a:bodyPr wrap="square">
+            <a:spAutoFit/>
+          </a:bodyPr>
+          <a:lstStyle/>
+          <a:p>
+            <a:pPr algn="r">
+              <a:lnSpc>
+                <a:spcPct val="100000"/>
+              </a:lnSpc>
+            </a:pPr>
+            <a:r>
+              <a:rPr sz="1150" b="0">
+                <a:solidFill>
+                  <a:srgbClr val="1A1A1A"/>
+                </a:solidFill>
+                <a:latin typeface="Georgia"/>
+              </a:rPr>
+              <a:t/>
+            </a:r>
+          </a:p>
+        </p:txBody>
+      </p:sp>
+      <p:sp>
+        <p:nvSpPr>
+          <p:cNvPr id="22" name="TextBox 21"/>
+          <p:cNvSpPr txBox="1"/>
+          <p:nvPr/>
+        </p:nvSpPr>
+        <p:spPr>
+          <a:xfrm>
+            <a:off x="5715000" y="3063239"/>
+            <a:ext cx="5852160" cy="237744"/>
+          </a:xfrm>
+          <a:prstGeom prst="rect">
+            <a:avLst/>
+          </a:prstGeom>
+          <a:noFill/>
+        </p:spPr>
+        <p:txBody>
+          <a:bodyPr wrap="square">
+            <a:spAutoFit/>
+          </a:bodyPr>
+          <a:lstStyle/>
+          <a:p>
+            <a:pPr algn="r">
+              <a:lnSpc>
+                <a:spcPct val="100000"/>
+              </a:lnSpc>
+            </a:pPr>
+            <a:r>
+              <a:rPr sz="1150" b="0">
+                <a:solidFill>
+                  <a:srgbClr val="1A1A1A"/>
+                </a:solidFill>
+                <a:latin typeface="Georgia"/>
+              </a:rPr>
+              <a:t>repeat query 7.7x cheaper (2.6 vs 19.3 ms)</a:t>
+            </a:r>
+          </a:p>
+        </p:txBody>
+      </p:sp>
+      <p:sp>
+        <p:nvSpPr>
+          <p:cNvPr id="23" name="TextBox 22"/>
+          <p:cNvSpPr txBox="1"/>
+          <p:nvPr/>
+        </p:nvSpPr>
+        <p:spPr>
+          <a:xfrm>
+            <a:off x="685800" y="3337559"/>
+            <a:ext cx="3291840" cy="237744"/>
+          </a:xfrm>
+          <a:prstGeom prst="rect">
+            <a:avLst/>
+          </a:prstGeom>
+          <a:noFill/>
+        </p:spPr>
+        <p:txBody>
+          <a:bodyPr wrap="square">
+            <a:spAutoFit/>
+          </a:bodyPr>
+          <a:lstStyle/>
+          <a:p>
+            <a:pPr algn="l">
+              <a:lnSpc>
+                <a:spcPct val="100000"/>
+              </a:lnSpc>
+            </a:pPr>
+            <a:r>
+              <a:rPr sz="1150" b="0">
+                <a:solidFill>
+                  <a:srgbClr val="1A1A1A"/>
+                </a:solidFill>
+                <a:latin typeface="Georgia"/>
+              </a:rPr>
+              <a:t/>
+            </a:r>
+          </a:p>
+        </p:txBody>
+      </p:sp>
+      <p:sp>
+        <p:nvSpPr>
+          <p:cNvPr id="24" name="TextBox 23"/>
+          <p:cNvSpPr txBox="1"/>
+          <p:nvPr/>
+        </p:nvSpPr>
+        <p:spPr>
+          <a:xfrm>
+            <a:off x="3977639" y="3337559"/>
+            <a:ext cx="1737360" cy="237744"/>
+          </a:xfrm>
+          <a:prstGeom prst="rect">
+            <a:avLst/>
+          </a:prstGeom>
+          <a:noFill/>
+        </p:spPr>
+        <p:txBody>
+          <a:bodyPr wrap="square">
+            <a:spAutoFit/>
+          </a:bodyPr>
+          <a:lstStyle/>
+          <a:p>
+            <a:pPr algn="r">
+              <a:lnSpc>
+                <a:spcPct val="100000"/>
+              </a:lnSpc>
+            </a:pPr>
+            <a:r>
+              <a:rPr sz="1150" b="0">
+                <a:solidFill>
+                  <a:srgbClr val="1A1A1A"/>
+                </a:solidFill>
+                <a:latin typeface="Georgia"/>
+              </a:rPr>
+              <a:t/>
+            </a:r>
+          </a:p>
+        </p:txBody>
+      </p:sp>
+      <p:sp>
+        <p:nvSpPr>
+          <p:cNvPr id="25" name="TextBox 24"/>
+          <p:cNvSpPr txBox="1"/>
+          <p:nvPr/>
+        </p:nvSpPr>
+        <p:spPr>
+          <a:xfrm>
+            <a:off x="5715000" y="3337559"/>
+            <a:ext cx="5852160" cy="237744"/>
+          </a:xfrm>
+          <a:prstGeom prst="rect">
+            <a:avLst/>
+          </a:prstGeom>
+          <a:noFill/>
+        </p:spPr>
+        <p:txBody>
+          <a:bodyPr wrap="square">
+            <a:spAutoFit/>
+          </a:bodyPr>
+          <a:lstStyle/>
+          <a:p>
+            <a:pPr algn="r">
+              <a:lnSpc>
+                <a:spcPct val="100000"/>
+              </a:lnSpc>
+            </a:pPr>
+            <a:r>
+              <a:rPr sz="1150" b="0">
+                <a:solidFill>
+                  <a:srgbClr val="1A1A1A"/>
+                </a:solidFill>
+                <a:latin typeface="Georgia"/>
+              </a:rPr>
+              <a:t/>
+            </a:r>
+          </a:p>
+        </p:txBody>
+      </p:sp>
+      <p:sp>
+        <p:nvSpPr>
+          <p:cNvPr id="26" name="TextBox 25"/>
+          <p:cNvSpPr txBox="1"/>
+          <p:nvPr/>
+        </p:nvSpPr>
+        <p:spPr>
+          <a:xfrm>
+            <a:off x="685800" y="3611879"/>
+            <a:ext cx="3291840" cy="237744"/>
+          </a:xfrm>
+          <a:prstGeom prst="rect">
+            <a:avLst/>
+          </a:prstGeom>
+          <a:noFill/>
+        </p:spPr>
+        <p:txBody>
+          <a:bodyPr wrap="square">
+            <a:spAutoFit/>
+          </a:bodyPr>
+          <a:lstStyle/>
+          <a:p>
+            <a:pPr algn="l">
+              <a:lnSpc>
+                <a:spcPct val="100000"/>
+              </a:lnSpc>
+            </a:pPr>
+            <a:r>
+              <a:rPr sz="1150" b="0">
+                <a:solidFill>
+                  <a:srgbClr val="1A1A1A"/>
+                </a:solidFill>
+                <a:latin typeface="Georgia"/>
+              </a:rPr>
+              <a:t>Runs on edge devices</a:t>
+            </a:r>
+          </a:p>
+        </p:txBody>
+      </p:sp>
+      <p:sp>
+        <p:nvSpPr>
+          <p:cNvPr id="27" name="TextBox 26"/>
+          <p:cNvSpPr txBox="1"/>
+          <p:nvPr/>
+        </p:nvSpPr>
+        <p:spPr>
+          <a:xfrm>
+            <a:off x="3977639" y="3611879"/>
+            <a:ext cx="1737360" cy="237744"/>
+          </a:xfrm>
+          <a:prstGeom prst="rect">
+            <a:avLst/>
+          </a:prstGeom>
+          <a:noFill/>
+        </p:spPr>
+        <p:txBody>
+          <a:bodyPr wrap="square">
+            <a:spAutoFit/>
+          </a:bodyPr>
+          <a:lstStyle/>
+          <a:p>
+            <a:pPr algn="r">
+              <a:lnSpc>
+                <a:spcPct val="100000"/>
+              </a:lnSpc>
+            </a:pPr>
+            <a:r>
+              <a:rPr sz="1150" b="0">
+                <a:solidFill>
+                  <a:srgbClr val="1A1A1A"/>
+                </a:solidFill>
+                <a:latin typeface="Georgia"/>
+              </a:rPr>
+              <a:t>UNPROVEN</a:t>
+            </a:r>
+          </a:p>
+        </p:txBody>
+      </p:sp>
+      <p:sp>
+        <p:nvSpPr>
+          <p:cNvPr id="28" name="TextBox 27"/>
+          <p:cNvSpPr txBox="1"/>
+          <p:nvPr/>
+        </p:nvSpPr>
+        <p:spPr>
+          <a:xfrm>
+            <a:off x="5715000" y="3611879"/>
+            <a:ext cx="5852160" cy="237744"/>
+          </a:xfrm>
+          <a:prstGeom prst="rect">
+            <a:avLst/>
+          </a:prstGeom>
+          <a:noFill/>
+        </p:spPr>
+        <p:txBody>
+          <a:bodyPr wrap="square">
+            <a:spAutoFit/>
+          </a:bodyPr>
+          <a:lstStyle/>
+          <a:p>
+            <a:pPr algn="r">
+              <a:lnSpc>
+                <a:spcPct val="100000"/>
+              </a:lnSpc>
+            </a:pPr>
+            <a:r>
+              <a:rPr sz="1150" b="0">
+                <a:solidFill>
+                  <a:srgbClr val="1A1A1A"/>
+                </a:solidFill>
+                <a:latin typeface="Georgia"/>
+              </a:rPr>
+              <a:t>all figures from V100 and RTX 4060</a:t>
+            </a:r>
+          </a:p>
+        </p:txBody>
+      </p:sp>
+      <p:sp>
+        <p:nvSpPr>
+          <p:cNvPr id="29" name="TextBox 28"/>
+          <p:cNvSpPr txBox="1"/>
+          <p:nvPr/>
+        </p:nvSpPr>
+        <p:spPr>
+          <a:xfrm>
+            <a:off x="685800" y="3886199"/>
+            <a:ext cx="3291840" cy="237744"/>
+          </a:xfrm>
+          <a:prstGeom prst="rect">
+            <a:avLst/>
+          </a:prstGeom>
+          <a:noFill/>
+        </p:spPr>
+        <p:txBody>
+          <a:bodyPr wrap="square">
+            <a:spAutoFit/>
+          </a:bodyPr>
+          <a:lstStyle/>
+          <a:p>
+            <a:pPr algn="l">
+              <a:lnSpc>
+                <a:spcPct val="100000"/>
+              </a:lnSpc>
+            </a:pPr>
+            <a:r>
+              <a:rPr sz="1150" b="0">
+                <a:solidFill>
+                  <a:srgbClr val="1A1A1A"/>
+                </a:solidFill>
+                <a:latin typeface="Georgia"/>
+              </a:rPr>
+              <a:t/>
+            </a:r>
+          </a:p>
+        </p:txBody>
+      </p:sp>
+      <p:sp>
+        <p:nvSpPr>
+          <p:cNvPr id="30" name="TextBox 29"/>
+          <p:cNvSpPr txBox="1"/>
+          <p:nvPr/>
+        </p:nvSpPr>
+        <p:spPr>
+          <a:xfrm>
+            <a:off x="3977639" y="3886199"/>
+            <a:ext cx="1737360" cy="237744"/>
+          </a:xfrm>
+          <a:prstGeom prst="rect">
+            <a:avLst/>
+          </a:prstGeom>
+          <a:noFill/>
+        </p:spPr>
+        <p:txBody>
+          <a:bodyPr wrap="square">
+            <a:spAutoFit/>
+          </a:bodyPr>
+          <a:lstStyle/>
+          <a:p>
+            <a:pPr algn="r">
+              <a:lnSpc>
+                <a:spcPct val="100000"/>
+              </a:lnSpc>
+            </a:pPr>
+            <a:r>
+              <a:rPr sz="1150" b="0">
+                <a:solidFill>
+                  <a:srgbClr val="1A1A1A"/>
+                </a:solidFill>
+                <a:latin typeface="Georgia"/>
+              </a:rPr>
+              <a:t/>
+            </a:r>
+          </a:p>
+        </p:txBody>
+      </p:sp>
+      <p:sp>
+        <p:nvSpPr>
+          <p:cNvPr id="31" name="TextBox 30"/>
+          <p:cNvSpPr txBox="1"/>
+          <p:nvPr/>
+        </p:nvSpPr>
+        <p:spPr>
+          <a:xfrm>
+            <a:off x="5715000" y="3886199"/>
+            <a:ext cx="5852160" cy="237744"/>
+          </a:xfrm>
+          <a:prstGeom prst="rect">
+            <a:avLst/>
+          </a:prstGeom>
+          <a:noFill/>
+        </p:spPr>
+        <p:txBody>
+          <a:bodyPr wrap="square">
+            <a:spAutoFit/>
+          </a:bodyPr>
+          <a:lstStyle/>
+          <a:p>
+            <a:pPr algn="r">
+              <a:lnSpc>
+                <a:spcPct val="100000"/>
+              </a:lnSpc>
+            </a:pPr>
+            <a:r>
+              <a:rPr sz="1150" b="0">
+                <a:solidFill>
+                  <a:srgbClr val="1A1A1A"/>
+                </a:solidFill>
+                <a:latin typeface="Georgia"/>
+              </a:rPr>
+              <a:t>no Jetson measurement has been taken</a:t>
+            </a:r>
+          </a:p>
+        </p:txBody>
+      </p:sp>
+      <p:sp>
+        <p:nvSpPr>
+          <p:cNvPr id="32" name="TextBox 31"/>
+          <p:cNvSpPr txBox="1"/>
+          <p:nvPr/>
+        </p:nvSpPr>
+        <p:spPr>
+          <a:xfrm>
+            <a:off x="685800" y="4434840"/>
+            <a:ext cx="10881360" cy="365760"/>
+          </a:xfrm>
+          <a:prstGeom prst="rect">
+            <a:avLst/>
+          </a:prstGeom>
+          <a:noFill/>
+        </p:spPr>
+        <p:txBody>
+          <a:bodyPr wrap="square">
+            <a:spAutoFit/>
+          </a:bodyPr>
+          <a:lstStyle/>
+          <a:p>
+            <a:pPr algn="l">
+              <a:lnSpc>
+                <a:spcPct val="100000"/>
+              </a:lnSpc>
+            </a:pPr>
+            <a:r>
+              <a:rPr sz="1250" b="1">
+                <a:solidFill>
+                  <a:srgbClr val="333333"/>
+                </a:solidFill>
+                <a:latin typeface="Georgia"/>
+              </a:rPr>
+              <a:t>What the project does deliver</a:t>
+            </a:r>
+          </a:p>
+        </p:txBody>
+      </p:sp>
+      <p:sp>
+        <p:nvSpPr>
+          <p:cNvPr id="33" name="Rounded Rectangle 32"/>
+          <p:cNvSpPr/>
+          <p:nvPr/>
+        </p:nvSpPr>
+        <p:spPr>
+          <a:xfrm>
+            <a:off x="685800" y="4846320"/>
+            <a:ext cx="3474720" cy="1005840"/>
+          </a:xfrm>
+          <a:prstGeom prst="roundRect">
+            <a:avLst/>
+          </a:prstGeom>
+          <a:solidFill>
+            <a:srgbClr val="EFEFEF"/>
+          </a:solidFill>
+          <a:ln w="9525">
+            <a:solidFill>
+              <a:srgbClr val="8A8A8A"/>
+            </a:solidFill>
+          </a:ln>
+          <a:effectLst/>
+        </p:spPr>
+        <p:style>
+          <a:lnRef idx="1">
+            <a:schemeClr val="accent1"/>
+          </a:lnRef>
+          <a:fillRef idx="3">
+            <a:schemeClr val="accent1"/>
+          </a:fillRef>
+          <a:effectRef idx="2">
+            <a:schemeClr val="accent1"/>
+          </a:effectRef>
+          <a:fontRef idx="minor">
+            <a:schemeClr val="lt1"/>
+          </a:fontRef>
+        </p:style>
+        <p:txBody>
+          <a:bodyPr rtlCol="0" anchor="ctr" wrap="square" lIns="73152" rIns="73152"/>
+          <a:lstStyle/>
+          <a:p>
+            <a:pPr algn="ctr"/>
+            <a:r>
+              <a:rPr sz="1050" b="0">
+                <a:solidFill>
+                  <a:srgbClr val="1A1A1A"/>
+                </a:solidFill>
+                <a:latin typeface="Georgia"/>
+              </a:rPr>
+              <a:t>Queryable output</a:t>
+            </a:r>
+          </a:p>
+          <a:p>
+            <a:pPr algn="ctr"/>
+            <a:r>
+              <a:rPr sz="1050" b="0">
+                <a:solidFill>
+                  <a:srgbClr val="1A1A1A"/>
+                </a:solidFill>
+                <a:latin typeface="Georgia"/>
+              </a:rPr>
+              <a:t/>
+            </a:r>
+          </a:p>
+          <a:p>
+            <a:pPr algn="ctr"/>
+            <a:r>
+              <a:rPr sz="1050" b="0">
+                <a:solidFill>
+                  <a:srgbClr val="1A1A1A"/>
+                </a:solidFill>
+                <a:latin typeface="Georgia"/>
+              </a:rPr>
+              <a:t>flow at any continuous coordinate, sparse equals dense exactly</a:t>
+            </a:r>
+          </a:p>
+        </p:txBody>
+      </p:sp>
+      <p:sp>
+        <p:nvSpPr>
+          <p:cNvPr id="34" name="Rounded Rectangle 33"/>
+          <p:cNvSpPr/>
+          <p:nvPr/>
+        </p:nvSpPr>
+        <p:spPr>
+          <a:xfrm>
+            <a:off x="4343400" y="4846320"/>
+            <a:ext cx="3474720" cy="1005840"/>
+          </a:xfrm>
+          <a:prstGeom prst="roundRect">
+            <a:avLst/>
+          </a:prstGeom>
+          <a:solidFill>
+            <a:srgbClr val="EFEFEF"/>
+          </a:solidFill>
+          <a:ln w="9525">
+            <a:solidFill>
+              <a:srgbClr val="8A8A8A"/>
+            </a:solidFill>
+          </a:ln>
+          <a:effectLst/>
+        </p:spPr>
+        <p:style>
+          <a:lnRef idx="1">
+            <a:schemeClr val="accent1"/>
+          </a:lnRef>
+          <a:fillRef idx="3">
+            <a:schemeClr val="accent1"/>
+          </a:fillRef>
+          <a:effectRef idx="2">
+            <a:schemeClr val="accent1"/>
+          </a:effectRef>
+          <a:fontRef idx="minor">
+            <a:schemeClr val="lt1"/>
+          </a:fontRef>
+        </p:style>
+        <p:txBody>
+          <a:bodyPr rtlCol="0" anchor="ctr" wrap="square" lIns="73152" rIns="73152"/>
+          <a:lstStyle/>
+          <a:p>
+            <a:pPr algn="ctr"/>
+            <a:r>
+              <a:rPr sz="1050" b="0">
+                <a:solidFill>
+                  <a:srgbClr val="1A1A1A"/>
+                </a:solidFill>
+                <a:latin typeface="Georgia"/>
+              </a:rPr>
+              <a:t>Cheap repeat access</a:t>
+            </a:r>
+          </a:p>
+          <a:p>
+            <a:pPr algn="ctr"/>
+            <a:r>
+              <a:rPr sz="1050" b="0">
+                <a:solidFill>
+                  <a:srgbClr val="1A1A1A"/>
+                </a:solidFill>
+                <a:latin typeface="Georgia"/>
+              </a:rPr>
+              <a:t/>
+            </a:r>
+          </a:p>
+          <a:p>
+            <a:pPr algn="ctr"/>
+            <a:r>
+              <a:rPr sz="1050" b="0">
+                <a:solidFill>
+                  <a:srgbClr val="1A1A1A"/>
+                </a:solidFill>
+                <a:latin typeface="Georgia"/>
+              </a:rPr>
+              <a:t>2.6 ms per further query batch on a cached frame</a:t>
+            </a:r>
+          </a:p>
+        </p:txBody>
+      </p:sp>
+      <p:sp>
+        <p:nvSpPr>
+          <p:cNvPr id="35" name="Rounded Rectangle 34"/>
+          <p:cNvSpPr/>
+          <p:nvPr/>
+        </p:nvSpPr>
+        <p:spPr>
+          <a:xfrm>
+            <a:off x="8001000" y="4846320"/>
+            <a:ext cx="3474720" cy="1005840"/>
+          </a:xfrm>
+          <a:prstGeom prst="roundRect">
+            <a:avLst/>
+          </a:prstGeom>
+          <a:solidFill>
+            <a:srgbClr val="EFEFEF"/>
+          </a:solidFill>
+          <a:ln w="9525">
+            <a:solidFill>
+              <a:srgbClr val="8A8A8A"/>
+            </a:solidFill>
+          </a:ln>
+          <a:effectLst/>
+        </p:spPr>
+        <p:style>
+          <a:lnRef idx="1">
+            <a:schemeClr val="accent1"/>
+          </a:lnRef>
+          <a:fillRef idx="3">
+            <a:schemeClr val="accent1"/>
+          </a:fillRef>
+          <a:effectRef idx="2">
+            <a:schemeClr val="accent1"/>
+          </a:effectRef>
+          <a:fontRef idx="minor">
+            <a:schemeClr val="lt1"/>
+          </a:fontRef>
+        </p:style>
+        <p:txBody>
+          <a:bodyPr rtlCol="0" anchor="ctr" wrap="square" lIns="73152" rIns="73152"/>
+          <a:lstStyle/>
+          <a:p>
+            <a:pPr algn="ctr"/>
+            <a:r>
+              <a:rPr sz="1050" b="0">
+                <a:solidFill>
+                  <a:srgbClr val="1A1A1A"/>
+                </a:solidFill>
+                <a:latin typeface="Georgia"/>
+              </a:rPr>
+              <a:t>Calibrated confidence</a:t>
+            </a:r>
+          </a:p>
+          <a:p>
+            <a:pPr algn="ctr"/>
+            <a:r>
+              <a:rPr sz="1050" b="0">
+                <a:solidFill>
+                  <a:srgbClr val="1A1A1A"/>
+                </a:solidFill>
+                <a:latin typeface="Georgia"/>
+              </a:rPr>
+              <a:t/>
+            </a:r>
+          </a:p>
+          <a:p>
+            <a:pPr algn="ctr"/>
+            <a:r>
+              <a:rPr sz="1050" b="0">
+                <a:solidFill>
+                  <a:srgbClr val="1A1A1A"/>
+                </a:solidFill>
+                <a:latin typeface="Georgia"/>
+              </a:rPr>
+              <a:t>per-query error estimate, monotonic against real error</a:t>
+            </a:r>
+          </a:p>
+        </p:txBody>
+      </p:sp>
+      <p:sp>
+        <p:nvSpPr>
+          <p:cNvPr id="36" name="TextBox 35"/>
+          <p:cNvSpPr txBox="1"/>
+          <p:nvPr/>
+        </p:nvSpPr>
+        <p:spPr>
+          <a:xfrm>
+            <a:off x="685800" y="6419088"/>
+            <a:ext cx="7315200" cy="274320"/>
+          </a:xfrm>
+          <a:prstGeom prst="rect">
+            <a:avLst/>
+          </a:prstGeom>
+          <a:noFill/>
+        </p:spPr>
+        <p:txBody>
+          <a:bodyPr wrap="square">
+            <a:spAutoFit/>
+          </a:bodyPr>
+          <a:lstStyle/>
+          <a:p>
+            <a:pPr algn="l">
+              <a:lnSpc>
+                <a:spcPct val="100000"/>
+              </a:lnSpc>
+            </a:pPr>
+            <a:r>
               <a:rPr sz="900" b="0">
                 <a:solidFill>
                   <a:srgbClr val="8A8A8A"/>
@@ -6279,7 +7294,7 @@
       </p:sp>
       <p:sp>
         <p:nvSpPr>
-          <p:cNvPr id="7" name="TextBox 6"/>
+          <p:cNvPr id="37" name="TextBox 36"/>
           <p:cNvSpPr txBox="1"/>
           <p:nvPr/>
         </p:nvSpPr>
@@ -6368,7 +7383,7 @@
                 </a:solidFill>
                 <a:latin typeface="Georgia"/>
               </a:rPr>
-              <a:t>ASSESSMENT</a:t>
+              <a:t>LIMITATIONS</a:t>
             </a:r>
           </a:p>
         </p:txBody>
@@ -6407,7 +7422,7 @@
                 </a:solidFill>
                 <a:latin typeface="Georgia"/>
               </a:rPr>
-              <a:t>Against the three objectives I set</a:t>
+              <a:t>What is not yet proven, stated plainly</a:t>
             </a:r>
           </a:p>
         </p:txBody>
@@ -6420,8 +7435,8 @@
         </p:nvSpPr>
         <p:spPr>
           <a:xfrm>
-            <a:off x="685800" y="1691640"/>
-            <a:ext cx="3291840" cy="237744"/>
+            <a:off x="685800" y="1645920"/>
+            <a:ext cx="4023360" cy="274320"/>
           </a:xfrm>
           <a:prstGeom prst="rect">
             <a:avLst/>
@@ -6446,7 +7461,7 @@
                 </a:solidFill>
                 <a:latin typeface="Georgia"/>
               </a:rPr>
-              <a:t>Objective</a:t>
+              <a:t>Sub-pixel precision is worse than v2</a:t>
             </a:r>
           </a:p>
         </p:txBody>
@@ -6459,8 +7474,8 @@
         </p:nvSpPr>
         <p:spPr>
           <a:xfrm>
-            <a:off x="3977639" y="1691640"/>
-            <a:ext cx="1737360" cy="237744"/>
+            <a:off x="4846320" y="1645920"/>
+            <a:ext cx="6675120" cy="548640"/>
           </a:xfrm>
           <a:prstGeom prst="rect">
             <a:avLst/>
@@ -6473,19 +7488,19 @@
           </a:bodyPr>
           <a:lstStyle/>
           <a:p>
-            <a:pPr algn="r">
-              <a:lnSpc>
-                <a:spcPct val="100000"/>
-              </a:lnSpc>
-            </a:pPr>
-            <a:r>
-              <a:rPr sz="1150" b="1">
-                <a:solidFill>
-                  <a:srgbClr val="1A1A1A"/>
-                </a:solidFill>
-                <a:latin typeface="Georgia"/>
-              </a:rPr>
-              <a:t>Verdict</a:t>
+            <a:pPr algn="l">
+              <a:lnSpc>
+                <a:spcPct val="112000"/>
+              </a:lnSpc>
+            </a:pPr>
+            <a:r>
+              <a:rPr sz="1100" b="0">
+                <a:solidFill>
+                  <a:srgbClr val="1A1A1A"/>
+                </a:solidFill>
+                <a:latin typeface="Georgia"/>
+              </a:rPr>
+              <a:t>By 0.8 to 6.3 points of 1-pixel accuracy. Cause diagnosed (decoder never sees full-resolution input) but not fixed.</a:t>
             </a:r>
           </a:p>
         </p:txBody>
@@ -6498,8 +7513,8 @@
         </p:nvSpPr>
         <p:spPr>
           <a:xfrm>
-            <a:off x="5715000" y="1691640"/>
-            <a:ext cx="5852160" cy="237744"/>
+            <a:off x="685800" y="2578608"/>
+            <a:ext cx="4023360" cy="274320"/>
           </a:xfrm>
           <a:prstGeom prst="rect">
             <a:avLst/>
@@ -6512,7 +7527,7 @@
           </a:bodyPr>
           <a:lstStyle/>
           <a:p>
-            <a:pPr algn="r">
+            <a:pPr algn="l">
               <a:lnSpc>
                 <a:spcPct val="100000"/>
               </a:lnSpc>
@@ -6524,65 +7539,21 @@
                 </a:solidFill>
                 <a:latin typeface="Georgia"/>
               </a:rPr>
-              <a:t>Evidence</a:t>
-            </a:r>
-          </a:p>
-        </p:txBody>
-      </p:sp>
-      <p:sp>
-        <p:nvSpPr>
-          <p:cNvPr id="7" name="Rectangle 6"/>
-          <p:cNvSpPr/>
-          <p:nvPr/>
-        </p:nvSpPr>
-        <p:spPr>
-          <a:xfrm>
-            <a:off x="685800" y="1929384"/>
-            <a:ext cx="10881360" cy="9525"/>
-          </a:xfrm>
-          <a:prstGeom prst="rect">
-            <a:avLst/>
-          </a:prstGeom>
-          <a:solidFill>
-            <a:srgbClr val="8A8A8A"/>
-          </a:solidFill>
-          <a:ln>
-            <a:noFill/>
-          </a:ln>
-          <a:effectLst/>
-        </p:spPr>
-        <p:style>
-          <a:lnRef idx="1">
-            <a:schemeClr val="accent1"/>
-          </a:lnRef>
-          <a:fillRef idx="3">
-            <a:schemeClr val="accent1"/>
-          </a:fillRef>
-          <a:effectRef idx="2">
-            <a:schemeClr val="accent1"/>
-          </a:effectRef>
-          <a:fontRef idx="minor">
-            <a:schemeClr val="lt1"/>
-          </a:fontRef>
-        </p:style>
-        <p:txBody>
-          <a:bodyPr rtlCol="0" anchor="ctr"/>
-          <a:lstStyle/>
-          <a:p>
-            <a:pPr algn="ctr"/>
-          </a:p>
-        </p:txBody>
-      </p:sp>
-      <p:sp>
-        <p:nvSpPr>
-          <p:cNvPr id="8" name="TextBox 7"/>
+              <a:t>No edge-device measurement</a:t>
+            </a:r>
+          </a:p>
+        </p:txBody>
+      </p:sp>
+      <p:sp>
+        <p:nvSpPr>
+          <p:cNvPr id="7" name="TextBox 6"/>
           <p:cNvSpPr txBox="1"/>
           <p:nvPr/>
         </p:nvSpPr>
         <p:spPr>
           <a:xfrm>
-            <a:off x="685800" y="1965960"/>
-            <a:ext cx="3291840" cy="237744"/>
+            <a:off x="4846320" y="2578608"/>
+            <a:ext cx="6675120" cy="548640"/>
           </a:xfrm>
           <a:prstGeom prst="rect">
             <a:avLst/>
@@ -6597,31 +7568,31 @@
           <a:p>
             <a:pPr algn="l">
               <a:lnSpc>
-                <a:spcPct val="100000"/>
-              </a:lnSpc>
-            </a:pPr>
-            <a:r>
-              <a:rPr sz="1150" b="0">
-                <a:solidFill>
-                  <a:srgbClr val="1A1A1A"/>
-                </a:solidFill>
-                <a:latin typeface="Georgia"/>
-              </a:rPr>
-              <a:t>Better accuracy than v2</a:t>
-            </a:r>
-          </a:p>
-        </p:txBody>
-      </p:sp>
-      <p:sp>
-        <p:nvSpPr>
-          <p:cNvPr id="9" name="TextBox 8"/>
+                <a:spcPct val="112000"/>
+              </a:lnSpc>
+            </a:pPr>
+            <a:r>
+              <a:rPr sz="1100" b="0">
+                <a:solidFill>
+                  <a:srgbClr val="1A1A1A"/>
+                </a:solidFill>
+                <a:latin typeface="Georgia"/>
+              </a:rPr>
+              <a:t>Every latency figure is V100 or RTX 4060. The edge claim in the title is a design target, not a result.</a:t>
+            </a:r>
+          </a:p>
+        </p:txBody>
+      </p:sp>
+      <p:sp>
+        <p:nvSpPr>
+          <p:cNvPr id="8" name="TextBox 7"/>
           <p:cNvSpPr txBox="1"/>
           <p:nvPr/>
         </p:nvSpPr>
         <p:spPr>
           <a:xfrm>
-            <a:off x="3977639" y="1965960"/>
-            <a:ext cx="1737360" cy="237744"/>
+            <a:off x="685800" y="3511296"/>
+            <a:ext cx="4023360" cy="274320"/>
           </a:xfrm>
           <a:prstGeom prst="rect">
             <a:avLst/>
@@ -6634,33 +7605,33 @@
           </a:bodyPr>
           <a:lstStyle/>
           <a:p>
-            <a:pPr algn="r">
+            <a:pPr algn="l">
               <a:lnSpc>
                 <a:spcPct val="100000"/>
               </a:lnSpc>
             </a:pPr>
             <a:r>
-              <a:rPr sz="1150" b="0">
-                <a:solidFill>
-                  <a:srgbClr val="1A1A1A"/>
-                </a:solidFill>
-                <a:latin typeface="Georgia"/>
-              </a:rPr>
-              <a:t>NOT MET</a:t>
-            </a:r>
-          </a:p>
-        </p:txBody>
-      </p:sp>
-      <p:sp>
-        <p:nvSpPr>
-          <p:cNvPr id="10" name="TextBox 9"/>
+              <a:rPr sz="1150" b="1">
+                <a:solidFill>
+                  <a:srgbClr val="1A1A1A"/>
+                </a:solidFill>
+                <a:latin typeface="Georgia"/>
+              </a:rPr>
+              <a:t>Single evaluation domain</a:t>
+            </a:r>
+          </a:p>
+        </p:txBody>
+      </p:sp>
+      <p:sp>
+        <p:nvSpPr>
+          <p:cNvPr id="9" name="TextBox 8"/>
           <p:cNvSpPr txBox="1"/>
           <p:nvPr/>
         </p:nvSpPr>
         <p:spPr>
           <a:xfrm>
-            <a:off x="5715000" y="1965960"/>
-            <a:ext cx="5852160" cy="237744"/>
+            <a:off x="4846320" y="3511296"/>
+            <a:ext cx="6675120" cy="548640"/>
           </a:xfrm>
           <a:prstGeom prst="rect">
             <a:avLst/>
@@ -6673,33 +7644,33 @@
           </a:bodyPr>
           <a:lstStyle/>
           <a:p>
-            <a:pPr algn="r">
-              <a:lnSpc>
-                <a:spcPct val="100000"/>
-              </a:lnSpc>
-            </a:pPr>
-            <a:r>
-              <a:rPr sz="1150" b="0">
-                <a:solidFill>
-                  <a:srgbClr val="1A1A1A"/>
-                </a:solidFill>
-                <a:latin typeface="Georgia"/>
-              </a:rPr>
-              <a:t>best v3 2.384 vs 2.324; every config above v2</a:t>
-            </a:r>
-          </a:p>
-        </p:txBody>
-      </p:sp>
-      <p:sp>
-        <p:nvSpPr>
-          <p:cNvPr id="11" name="TextBox 10"/>
+            <a:pPr algn="l">
+              <a:lnSpc>
+                <a:spcPct val="112000"/>
+              </a:lnSpc>
+            </a:pPr>
+            <a:r>
+              <a:rPr sz="1100" b="0">
+                <a:solidFill>
+                  <a:srgbClr val="1A1A1A"/>
+                </a:solidFill>
+                <a:latin typeface="Georgia"/>
+              </a:rPr>
+              <a:t>All accuracy numbers are VKITTI2 Scene18+20. A synthetic driving benchmark is not evidence for field or survey imagery.</a:t>
+            </a:r>
+          </a:p>
+        </p:txBody>
+      </p:sp>
+      <p:sp>
+        <p:nvSpPr>
+          <p:cNvPr id="10" name="TextBox 9"/>
           <p:cNvSpPr txBox="1"/>
           <p:nvPr/>
         </p:nvSpPr>
         <p:spPr>
           <a:xfrm>
-            <a:off x="685800" y="2240279"/>
-            <a:ext cx="3291840" cy="237744"/>
+            <a:off x="685800" y="4443984"/>
+            <a:ext cx="4023360" cy="274320"/>
           </a:xfrm>
           <a:prstGeom prst="rect">
             <a:avLst/>
@@ -6718,27 +7689,27 @@
               </a:lnSpc>
             </a:pPr>
             <a:r>
-              <a:rPr sz="1150" b="0">
-                <a:solidFill>
-                  <a:srgbClr val="1A1A1A"/>
-                </a:solidFill>
-                <a:latin typeface="Georgia"/>
-              </a:rPr>
-              <a:t/>
-            </a:r>
-          </a:p>
-        </p:txBody>
-      </p:sp>
-      <p:sp>
-        <p:nvSpPr>
-          <p:cNvPr id="12" name="TextBox 11"/>
+              <a:rPr sz="1150" b="1">
+                <a:solidFill>
+                  <a:srgbClr val="1A1A1A"/>
+                </a:solidFill>
+                <a:latin typeface="Georgia"/>
+              </a:rPr>
+              <a:t>Spring run truncated</a:t>
+            </a:r>
+          </a:p>
+        </p:txBody>
+      </p:sp>
+      <p:sp>
+        <p:nvSpPr>
+          <p:cNvPr id="11" name="TextBox 10"/>
           <p:cNvSpPr txBox="1"/>
           <p:nvPr/>
         </p:nvSpPr>
         <p:spPr>
           <a:xfrm>
-            <a:off x="3977639" y="2240279"/>
-            <a:ext cx="1737360" cy="237744"/>
+            <a:off x="4846320" y="4443984"/>
+            <a:ext cx="6675120" cy="548640"/>
           </a:xfrm>
           <a:prstGeom prst="rect">
             <a:avLst/>
@@ -6751,33 +7722,33 @@
           </a:bodyPr>
           <a:lstStyle/>
           <a:p>
-            <a:pPr algn="r">
-              <a:lnSpc>
-                <a:spcPct val="100000"/>
-              </a:lnSpc>
-            </a:pPr>
-            <a:r>
-              <a:rPr sz="1150" b="0">
-                <a:solidFill>
-                  <a:srgbClr val="1A1A1A"/>
-                </a:solidFill>
-                <a:latin typeface="Georgia"/>
-              </a:rPr>
-              <a:t/>
-            </a:r>
-          </a:p>
-        </p:txBody>
-      </p:sp>
-      <p:sp>
-        <p:nvSpPr>
-          <p:cNvPr id="13" name="TextBox 12"/>
+            <a:pPr algn="l">
+              <a:lnSpc>
+                <a:spcPct val="112000"/>
+              </a:lnSpc>
+            </a:pPr>
+            <a:r>
+              <a:rPr sz="1100" b="0">
+                <a:solidFill>
+                  <a:srgbClr val="1A1A1A"/>
+                </a:solidFill>
+                <a:latin typeface="Georgia"/>
+              </a:rPr>
+              <a:t>Killed by the 8-hour wall clock at roughly 90k of 100k steps, so it is not directly comparable to the others.</a:t>
+            </a:r>
+          </a:p>
+        </p:txBody>
+      </p:sp>
+      <p:sp>
+        <p:nvSpPr>
+          <p:cNvPr id="12" name="TextBox 11"/>
           <p:cNvSpPr txBox="1"/>
           <p:nvPr/>
         </p:nvSpPr>
         <p:spPr>
           <a:xfrm>
-            <a:off x="5715000" y="2240279"/>
-            <a:ext cx="5852160" cy="237744"/>
+            <a:off x="685800" y="5376672"/>
+            <a:ext cx="4023360" cy="274320"/>
           </a:xfrm>
           <a:prstGeom prst="rect">
             <a:avLst/>
@@ -6790,33 +7761,33 @@
           </a:bodyPr>
           <a:lstStyle/>
           <a:p>
-            <a:pPr algn="r">
+            <a:pPr algn="l">
               <a:lnSpc>
                 <a:spcPct val="100000"/>
               </a:lnSpc>
             </a:pPr>
             <a:r>
-              <a:rPr sz="1150" b="0">
-                <a:solidFill>
-                  <a:srgbClr val="1A1A1A"/>
-                </a:solidFill>
-                <a:latin typeface="Georgia"/>
-              </a:rPr>
-              <a:t>like-for-like 2.500, i.e. 7.6% behind</a:t>
-            </a:r>
-          </a:p>
-        </p:txBody>
-      </p:sp>
-      <p:sp>
-        <p:nvSpPr>
-          <p:cNvPr id="14" name="TextBox 13"/>
+              <a:rPr sz="1150" b="1">
+                <a:solidFill>
+                  <a:srgbClr val="1A1A1A"/>
+                </a:solidFill>
+                <a:latin typeface="Georgia"/>
+              </a:rPr>
+              <a:t>One seed, and checkpoint noise the size of the effects</a:t>
+            </a:r>
+          </a:p>
+        </p:txBody>
+      </p:sp>
+      <p:sp>
+        <p:nvSpPr>
+          <p:cNvPr id="13" name="TextBox 12"/>
           <p:cNvSpPr txBox="1"/>
           <p:nvPr/>
         </p:nvSpPr>
         <p:spPr>
           <a:xfrm>
-            <a:off x="685800" y="2514599"/>
-            <a:ext cx="3291840" cy="237744"/>
+            <a:off x="4846320" y="5376672"/>
+            <a:ext cx="6675120" cy="548640"/>
           </a:xfrm>
           <a:prstGeom prst="rect">
             <a:avLst/>
@@ -6831,31 +7802,31 @@
           <a:p>
             <a:pPr algn="l">
               <a:lnSpc>
-                <a:spcPct val="100000"/>
-              </a:lnSpc>
-            </a:pPr>
-            <a:r>
-              <a:rPr sz="1150" b="0">
-                <a:solidFill>
-                  <a:srgbClr val="1A1A1A"/>
-                </a:solidFill>
-                <a:latin typeface="Georgia"/>
-              </a:rPr>
-              <a:t/>
-            </a:r>
-          </a:p>
-        </p:txBody>
-      </p:sp>
-      <p:sp>
-        <p:nvSpPr>
-          <p:cNvPr id="15" name="TextBox 14"/>
+                <a:spcPct val="112000"/>
+              </a:lnSpc>
+            </a:pPr>
+            <a:r>
+              <a:rPr sz="1100" b="0">
+                <a:solidFill>
+                  <a:srgbClr val="1A1A1A"/>
+                </a:solidFill>
+                <a:latin typeface="Georgia"/>
+              </a:rPr>
+              <a:t>Step 90k vs 100k of the same run moves EPE by up to 0.038 px, reversing two of the orderings. Nothing finer than about 0.05 px is resolvable here.</a:t>
+            </a:r>
+          </a:p>
+        </p:txBody>
+      </p:sp>
+      <p:sp>
+        <p:nvSpPr>
+          <p:cNvPr id="14" name="TextBox 13"/>
           <p:cNvSpPr txBox="1"/>
           <p:nvPr/>
         </p:nvSpPr>
         <p:spPr>
           <a:xfrm>
-            <a:off x="3977639" y="2514599"/>
-            <a:ext cx="1737360" cy="237744"/>
+            <a:off x="685800" y="6419088"/>
+            <a:ext cx="7315200" cy="274320"/>
           </a:xfrm>
           <a:prstGeom prst="rect">
             <a:avLst/>
@@ -6868,951 +7839,12 @@
           </a:bodyPr>
           <a:lstStyle/>
           <a:p>
-            <a:pPr algn="r">
+            <a:pPr algn="l">
               <a:lnSpc>
                 <a:spcPct val="100000"/>
               </a:lnSpc>
             </a:pPr>
             <a:r>
-              <a:rPr sz="1150" b="0">
-                <a:solidFill>
-                  <a:srgbClr val="1A1A1A"/>
-                </a:solidFill>
-                <a:latin typeface="Georgia"/>
-              </a:rPr>
-              <a:t/>
-            </a:r>
-          </a:p>
-        </p:txBody>
-      </p:sp>
-      <p:sp>
-        <p:nvSpPr>
-          <p:cNvPr id="16" name="TextBox 15"/>
-          <p:cNvSpPr txBox="1"/>
-          <p:nvPr/>
-        </p:nvSpPr>
-        <p:spPr>
-          <a:xfrm>
-            <a:off x="5715000" y="2514599"/>
-            <a:ext cx="5852160" cy="237744"/>
-          </a:xfrm>
-          <a:prstGeom prst="rect">
-            <a:avLst/>
-          </a:prstGeom>
-          <a:noFill/>
-        </p:spPr>
-        <p:txBody>
-          <a:bodyPr wrap="square">
-            <a:spAutoFit/>
-          </a:bodyPr>
-          <a:lstStyle/>
-          <a:p>
-            <a:pPr algn="r">
-              <a:lnSpc>
-                <a:spcPct val="100000"/>
-              </a:lnSpc>
-            </a:pPr>
-            <a:r>
-              <a:rPr sz="1150" b="0">
-                <a:solidFill>
-                  <a:srgbClr val="1A1A1A"/>
-                </a:solidFill>
-                <a:latin typeface="Georgia"/>
-              </a:rPr>
-              <a:t/>
-            </a:r>
-          </a:p>
-        </p:txBody>
-      </p:sp>
-      <p:sp>
-        <p:nvSpPr>
-          <p:cNvPr id="17" name="TextBox 16"/>
-          <p:cNvSpPr txBox="1"/>
-          <p:nvPr/>
-        </p:nvSpPr>
-        <p:spPr>
-          <a:xfrm>
-            <a:off x="685800" y="2788919"/>
-            <a:ext cx="3291840" cy="237744"/>
-          </a:xfrm>
-          <a:prstGeom prst="rect">
-            <a:avLst/>
-          </a:prstGeom>
-          <a:noFill/>
-        </p:spPr>
-        <p:txBody>
-          <a:bodyPr wrap="square">
-            <a:spAutoFit/>
-          </a:bodyPr>
-          <a:lstStyle/>
-          <a:p>
-            <a:pPr algn="l">
-              <a:lnSpc>
-                <a:spcPct val="100000"/>
-              </a:lnSpc>
-            </a:pPr>
-            <a:r>
-              <a:rPr sz="1150" b="0">
-                <a:solidFill>
-                  <a:srgbClr val="1A1A1A"/>
-                </a:solidFill>
-                <a:latin typeface="Georgia"/>
-              </a:rPr>
-              <a:t>Less compute than v2</a:t>
-            </a:r>
-          </a:p>
-        </p:txBody>
-      </p:sp>
-      <p:sp>
-        <p:nvSpPr>
-          <p:cNvPr id="18" name="TextBox 17"/>
-          <p:cNvSpPr txBox="1"/>
-          <p:nvPr/>
-        </p:nvSpPr>
-        <p:spPr>
-          <a:xfrm>
-            <a:off x="3977639" y="2788919"/>
-            <a:ext cx="1737360" cy="237744"/>
-          </a:xfrm>
-          <a:prstGeom prst="rect">
-            <a:avLst/>
-          </a:prstGeom>
-          <a:noFill/>
-        </p:spPr>
-        <p:txBody>
-          <a:bodyPr wrap="square">
-            <a:spAutoFit/>
-          </a:bodyPr>
-          <a:lstStyle/>
-          <a:p>
-            <a:pPr algn="r">
-              <a:lnSpc>
-                <a:spcPct val="100000"/>
-              </a:lnSpc>
-            </a:pPr>
-            <a:r>
-              <a:rPr sz="1150" b="0">
-                <a:solidFill>
-                  <a:srgbClr val="1A1A1A"/>
-                </a:solidFill>
-                <a:latin typeface="Georgia"/>
-              </a:rPr>
-              <a:t>PARTLY</a:t>
-            </a:r>
-          </a:p>
-        </p:txBody>
-      </p:sp>
-      <p:sp>
-        <p:nvSpPr>
-          <p:cNvPr id="19" name="TextBox 18"/>
-          <p:cNvSpPr txBox="1"/>
-          <p:nvPr/>
-        </p:nvSpPr>
-        <p:spPr>
-          <a:xfrm>
-            <a:off x="5715000" y="2788919"/>
-            <a:ext cx="5852160" cy="237744"/>
-          </a:xfrm>
-          <a:prstGeom prst="rect">
-            <a:avLst/>
-          </a:prstGeom>
-          <a:noFill/>
-        </p:spPr>
-        <p:txBody>
-          <a:bodyPr wrap="square">
-            <a:spAutoFit/>
-          </a:bodyPr>
-          <a:lstStyle/>
-          <a:p>
-            <a:pPr algn="r">
-              <a:lnSpc>
-                <a:spcPct val="100000"/>
-              </a:lnSpc>
-            </a:pPr>
-            <a:r>
-              <a:rPr sz="1150" b="0">
-                <a:solidFill>
-                  <a:srgbClr val="1A1A1A"/>
-                </a:solidFill>
-                <a:latin typeface="Georgia"/>
-              </a:rPr>
-              <a:t>dense 14% slower; first query level</a:t>
-            </a:r>
-          </a:p>
-        </p:txBody>
-      </p:sp>
-      <p:sp>
-        <p:nvSpPr>
-          <p:cNvPr id="20" name="TextBox 19"/>
-          <p:cNvSpPr txBox="1"/>
-          <p:nvPr/>
-        </p:nvSpPr>
-        <p:spPr>
-          <a:xfrm>
-            <a:off x="685800" y="3063239"/>
-            <a:ext cx="3291840" cy="237744"/>
-          </a:xfrm>
-          <a:prstGeom prst="rect">
-            <a:avLst/>
-          </a:prstGeom>
-          <a:noFill/>
-        </p:spPr>
-        <p:txBody>
-          <a:bodyPr wrap="square">
-            <a:spAutoFit/>
-          </a:bodyPr>
-          <a:lstStyle/>
-          <a:p>
-            <a:pPr algn="l">
-              <a:lnSpc>
-                <a:spcPct val="100000"/>
-              </a:lnSpc>
-            </a:pPr>
-            <a:r>
-              <a:rPr sz="1150" b="0">
-                <a:solidFill>
-                  <a:srgbClr val="1A1A1A"/>
-                </a:solidFill>
-                <a:latin typeface="Georgia"/>
-              </a:rPr>
-              <a:t/>
-            </a:r>
-          </a:p>
-        </p:txBody>
-      </p:sp>
-      <p:sp>
-        <p:nvSpPr>
-          <p:cNvPr id="21" name="TextBox 20"/>
-          <p:cNvSpPr txBox="1"/>
-          <p:nvPr/>
-        </p:nvSpPr>
-        <p:spPr>
-          <a:xfrm>
-            <a:off x="3977639" y="3063239"/>
-            <a:ext cx="1737360" cy="237744"/>
-          </a:xfrm>
-          <a:prstGeom prst="rect">
-            <a:avLst/>
-          </a:prstGeom>
-          <a:noFill/>
-        </p:spPr>
-        <p:txBody>
-          <a:bodyPr wrap="square">
-            <a:spAutoFit/>
-          </a:bodyPr>
-          <a:lstStyle/>
-          <a:p>
-            <a:pPr algn="r">
-              <a:lnSpc>
-                <a:spcPct val="100000"/>
-              </a:lnSpc>
-            </a:pPr>
-            <a:r>
-              <a:rPr sz="1150" b="0">
-                <a:solidFill>
-                  <a:srgbClr val="1A1A1A"/>
-                </a:solidFill>
-                <a:latin typeface="Georgia"/>
-              </a:rPr>
-              <a:t/>
-            </a:r>
-          </a:p>
-        </p:txBody>
-      </p:sp>
-      <p:sp>
-        <p:nvSpPr>
-          <p:cNvPr id="22" name="TextBox 21"/>
-          <p:cNvSpPr txBox="1"/>
-          <p:nvPr/>
-        </p:nvSpPr>
-        <p:spPr>
-          <a:xfrm>
-            <a:off x="5715000" y="3063239"/>
-            <a:ext cx="5852160" cy="237744"/>
-          </a:xfrm>
-          <a:prstGeom prst="rect">
-            <a:avLst/>
-          </a:prstGeom>
-          <a:noFill/>
-        </p:spPr>
-        <p:txBody>
-          <a:bodyPr wrap="square">
-            <a:spAutoFit/>
-          </a:bodyPr>
-          <a:lstStyle/>
-          <a:p>
-            <a:pPr algn="r">
-              <a:lnSpc>
-                <a:spcPct val="100000"/>
-              </a:lnSpc>
-            </a:pPr>
-            <a:r>
-              <a:rPr sz="1150" b="0">
-                <a:solidFill>
-                  <a:srgbClr val="1A1A1A"/>
-                </a:solidFill>
-                <a:latin typeface="Georgia"/>
-              </a:rPr>
-              <a:t>repeat query 7.7x cheaper (2.6 vs 19.3 ms)</a:t>
-            </a:r>
-          </a:p>
-        </p:txBody>
-      </p:sp>
-      <p:sp>
-        <p:nvSpPr>
-          <p:cNvPr id="23" name="TextBox 22"/>
-          <p:cNvSpPr txBox="1"/>
-          <p:nvPr/>
-        </p:nvSpPr>
-        <p:spPr>
-          <a:xfrm>
-            <a:off x="685800" y="3337559"/>
-            <a:ext cx="3291840" cy="237744"/>
-          </a:xfrm>
-          <a:prstGeom prst="rect">
-            <a:avLst/>
-          </a:prstGeom>
-          <a:noFill/>
-        </p:spPr>
-        <p:txBody>
-          <a:bodyPr wrap="square">
-            <a:spAutoFit/>
-          </a:bodyPr>
-          <a:lstStyle/>
-          <a:p>
-            <a:pPr algn="l">
-              <a:lnSpc>
-                <a:spcPct val="100000"/>
-              </a:lnSpc>
-            </a:pPr>
-            <a:r>
-              <a:rPr sz="1150" b="0">
-                <a:solidFill>
-                  <a:srgbClr val="1A1A1A"/>
-                </a:solidFill>
-                <a:latin typeface="Georgia"/>
-              </a:rPr>
-              <a:t/>
-            </a:r>
-          </a:p>
-        </p:txBody>
-      </p:sp>
-      <p:sp>
-        <p:nvSpPr>
-          <p:cNvPr id="24" name="TextBox 23"/>
-          <p:cNvSpPr txBox="1"/>
-          <p:nvPr/>
-        </p:nvSpPr>
-        <p:spPr>
-          <a:xfrm>
-            <a:off x="3977639" y="3337559"/>
-            <a:ext cx="1737360" cy="237744"/>
-          </a:xfrm>
-          <a:prstGeom prst="rect">
-            <a:avLst/>
-          </a:prstGeom>
-          <a:noFill/>
-        </p:spPr>
-        <p:txBody>
-          <a:bodyPr wrap="square">
-            <a:spAutoFit/>
-          </a:bodyPr>
-          <a:lstStyle/>
-          <a:p>
-            <a:pPr algn="r">
-              <a:lnSpc>
-                <a:spcPct val="100000"/>
-              </a:lnSpc>
-            </a:pPr>
-            <a:r>
-              <a:rPr sz="1150" b="0">
-                <a:solidFill>
-                  <a:srgbClr val="1A1A1A"/>
-                </a:solidFill>
-                <a:latin typeface="Georgia"/>
-              </a:rPr>
-              <a:t/>
-            </a:r>
-          </a:p>
-        </p:txBody>
-      </p:sp>
-      <p:sp>
-        <p:nvSpPr>
-          <p:cNvPr id="25" name="TextBox 24"/>
-          <p:cNvSpPr txBox="1"/>
-          <p:nvPr/>
-        </p:nvSpPr>
-        <p:spPr>
-          <a:xfrm>
-            <a:off x="5715000" y="3337559"/>
-            <a:ext cx="5852160" cy="237744"/>
-          </a:xfrm>
-          <a:prstGeom prst="rect">
-            <a:avLst/>
-          </a:prstGeom>
-          <a:noFill/>
-        </p:spPr>
-        <p:txBody>
-          <a:bodyPr wrap="square">
-            <a:spAutoFit/>
-          </a:bodyPr>
-          <a:lstStyle/>
-          <a:p>
-            <a:pPr algn="r">
-              <a:lnSpc>
-                <a:spcPct val="100000"/>
-              </a:lnSpc>
-            </a:pPr>
-            <a:r>
-              <a:rPr sz="1150" b="0">
-                <a:solidFill>
-                  <a:srgbClr val="1A1A1A"/>
-                </a:solidFill>
-                <a:latin typeface="Georgia"/>
-              </a:rPr>
-              <a:t/>
-            </a:r>
-          </a:p>
-        </p:txBody>
-      </p:sp>
-      <p:sp>
-        <p:nvSpPr>
-          <p:cNvPr id="26" name="TextBox 25"/>
-          <p:cNvSpPr txBox="1"/>
-          <p:nvPr/>
-        </p:nvSpPr>
-        <p:spPr>
-          <a:xfrm>
-            <a:off x="685800" y="3611879"/>
-            <a:ext cx="3291840" cy="237744"/>
-          </a:xfrm>
-          <a:prstGeom prst="rect">
-            <a:avLst/>
-          </a:prstGeom>
-          <a:noFill/>
-        </p:spPr>
-        <p:txBody>
-          <a:bodyPr wrap="square">
-            <a:spAutoFit/>
-          </a:bodyPr>
-          <a:lstStyle/>
-          <a:p>
-            <a:pPr algn="l">
-              <a:lnSpc>
-                <a:spcPct val="100000"/>
-              </a:lnSpc>
-            </a:pPr>
-            <a:r>
-              <a:rPr sz="1150" b="0">
-                <a:solidFill>
-                  <a:srgbClr val="1A1A1A"/>
-                </a:solidFill>
-                <a:latin typeface="Georgia"/>
-              </a:rPr>
-              <a:t>Runs on edge devices</a:t>
-            </a:r>
-          </a:p>
-        </p:txBody>
-      </p:sp>
-      <p:sp>
-        <p:nvSpPr>
-          <p:cNvPr id="27" name="TextBox 26"/>
-          <p:cNvSpPr txBox="1"/>
-          <p:nvPr/>
-        </p:nvSpPr>
-        <p:spPr>
-          <a:xfrm>
-            <a:off x="3977639" y="3611879"/>
-            <a:ext cx="1737360" cy="237744"/>
-          </a:xfrm>
-          <a:prstGeom prst="rect">
-            <a:avLst/>
-          </a:prstGeom>
-          <a:noFill/>
-        </p:spPr>
-        <p:txBody>
-          <a:bodyPr wrap="square">
-            <a:spAutoFit/>
-          </a:bodyPr>
-          <a:lstStyle/>
-          <a:p>
-            <a:pPr algn="r">
-              <a:lnSpc>
-                <a:spcPct val="100000"/>
-              </a:lnSpc>
-            </a:pPr>
-            <a:r>
-              <a:rPr sz="1150" b="0">
-                <a:solidFill>
-                  <a:srgbClr val="1A1A1A"/>
-                </a:solidFill>
-                <a:latin typeface="Georgia"/>
-              </a:rPr>
-              <a:t>UNPROVEN</a:t>
-            </a:r>
-          </a:p>
-        </p:txBody>
-      </p:sp>
-      <p:sp>
-        <p:nvSpPr>
-          <p:cNvPr id="28" name="TextBox 27"/>
-          <p:cNvSpPr txBox="1"/>
-          <p:nvPr/>
-        </p:nvSpPr>
-        <p:spPr>
-          <a:xfrm>
-            <a:off x="5715000" y="3611879"/>
-            <a:ext cx="5852160" cy="237744"/>
-          </a:xfrm>
-          <a:prstGeom prst="rect">
-            <a:avLst/>
-          </a:prstGeom>
-          <a:noFill/>
-        </p:spPr>
-        <p:txBody>
-          <a:bodyPr wrap="square">
-            <a:spAutoFit/>
-          </a:bodyPr>
-          <a:lstStyle/>
-          <a:p>
-            <a:pPr algn="r">
-              <a:lnSpc>
-                <a:spcPct val="100000"/>
-              </a:lnSpc>
-            </a:pPr>
-            <a:r>
-              <a:rPr sz="1150" b="0">
-                <a:solidFill>
-                  <a:srgbClr val="1A1A1A"/>
-                </a:solidFill>
-                <a:latin typeface="Georgia"/>
-              </a:rPr>
-              <a:t>all figures from V100 and RTX 4060</a:t>
-            </a:r>
-          </a:p>
-        </p:txBody>
-      </p:sp>
-      <p:sp>
-        <p:nvSpPr>
-          <p:cNvPr id="29" name="TextBox 28"/>
-          <p:cNvSpPr txBox="1"/>
-          <p:nvPr/>
-        </p:nvSpPr>
-        <p:spPr>
-          <a:xfrm>
-            <a:off x="685800" y="3886199"/>
-            <a:ext cx="3291840" cy="237744"/>
-          </a:xfrm>
-          <a:prstGeom prst="rect">
-            <a:avLst/>
-          </a:prstGeom>
-          <a:noFill/>
-        </p:spPr>
-        <p:txBody>
-          <a:bodyPr wrap="square">
-            <a:spAutoFit/>
-          </a:bodyPr>
-          <a:lstStyle/>
-          <a:p>
-            <a:pPr algn="l">
-              <a:lnSpc>
-                <a:spcPct val="100000"/>
-              </a:lnSpc>
-            </a:pPr>
-            <a:r>
-              <a:rPr sz="1150" b="0">
-                <a:solidFill>
-                  <a:srgbClr val="1A1A1A"/>
-                </a:solidFill>
-                <a:latin typeface="Georgia"/>
-              </a:rPr>
-              <a:t/>
-            </a:r>
-          </a:p>
-        </p:txBody>
-      </p:sp>
-      <p:sp>
-        <p:nvSpPr>
-          <p:cNvPr id="30" name="TextBox 29"/>
-          <p:cNvSpPr txBox="1"/>
-          <p:nvPr/>
-        </p:nvSpPr>
-        <p:spPr>
-          <a:xfrm>
-            <a:off x="3977639" y="3886199"/>
-            <a:ext cx="1737360" cy="237744"/>
-          </a:xfrm>
-          <a:prstGeom prst="rect">
-            <a:avLst/>
-          </a:prstGeom>
-          <a:noFill/>
-        </p:spPr>
-        <p:txBody>
-          <a:bodyPr wrap="square">
-            <a:spAutoFit/>
-          </a:bodyPr>
-          <a:lstStyle/>
-          <a:p>
-            <a:pPr algn="r">
-              <a:lnSpc>
-                <a:spcPct val="100000"/>
-              </a:lnSpc>
-            </a:pPr>
-            <a:r>
-              <a:rPr sz="1150" b="0">
-                <a:solidFill>
-                  <a:srgbClr val="1A1A1A"/>
-                </a:solidFill>
-                <a:latin typeface="Georgia"/>
-              </a:rPr>
-              <a:t/>
-            </a:r>
-          </a:p>
-        </p:txBody>
-      </p:sp>
-      <p:sp>
-        <p:nvSpPr>
-          <p:cNvPr id="31" name="TextBox 30"/>
-          <p:cNvSpPr txBox="1"/>
-          <p:nvPr/>
-        </p:nvSpPr>
-        <p:spPr>
-          <a:xfrm>
-            <a:off x="5715000" y="3886199"/>
-            <a:ext cx="5852160" cy="237744"/>
-          </a:xfrm>
-          <a:prstGeom prst="rect">
-            <a:avLst/>
-          </a:prstGeom>
-          <a:noFill/>
-        </p:spPr>
-        <p:txBody>
-          <a:bodyPr wrap="square">
-            <a:spAutoFit/>
-          </a:bodyPr>
-          <a:lstStyle/>
-          <a:p>
-            <a:pPr algn="r">
-              <a:lnSpc>
-                <a:spcPct val="100000"/>
-              </a:lnSpc>
-            </a:pPr>
-            <a:r>
-              <a:rPr sz="1150" b="0">
-                <a:solidFill>
-                  <a:srgbClr val="1A1A1A"/>
-                </a:solidFill>
-                <a:latin typeface="Georgia"/>
-              </a:rPr>
-              <a:t>no Jetson measurement has been taken</a:t>
-            </a:r>
-          </a:p>
-        </p:txBody>
-      </p:sp>
-      <p:sp>
-        <p:nvSpPr>
-          <p:cNvPr id="32" name="TextBox 31"/>
-          <p:cNvSpPr txBox="1"/>
-          <p:nvPr/>
-        </p:nvSpPr>
-        <p:spPr>
-          <a:xfrm>
-            <a:off x="685800" y="4434840"/>
-            <a:ext cx="10881360" cy="365760"/>
-          </a:xfrm>
-          <a:prstGeom prst="rect">
-            <a:avLst/>
-          </a:prstGeom>
-          <a:noFill/>
-        </p:spPr>
-        <p:txBody>
-          <a:bodyPr wrap="square">
-            <a:spAutoFit/>
-          </a:bodyPr>
-          <a:lstStyle/>
-          <a:p>
-            <a:pPr algn="l">
-              <a:lnSpc>
-                <a:spcPct val="100000"/>
-              </a:lnSpc>
-            </a:pPr>
-            <a:r>
-              <a:rPr sz="1250" b="1">
-                <a:solidFill>
-                  <a:srgbClr val="333333"/>
-                </a:solidFill>
-                <a:latin typeface="Georgia"/>
-              </a:rPr>
-              <a:t>What the project does deliver</a:t>
-            </a:r>
-          </a:p>
-        </p:txBody>
-      </p:sp>
-      <p:sp>
-        <p:nvSpPr>
-          <p:cNvPr id="33" name="Rounded Rectangle 32"/>
-          <p:cNvSpPr/>
-          <p:nvPr/>
-        </p:nvSpPr>
-        <p:spPr>
-          <a:xfrm>
-            <a:off x="685800" y="4846320"/>
-            <a:ext cx="3474720" cy="1005840"/>
-          </a:xfrm>
-          <a:prstGeom prst="roundRect">
-            <a:avLst/>
-          </a:prstGeom>
-          <a:solidFill>
-            <a:srgbClr val="EFEFEF"/>
-          </a:solidFill>
-          <a:ln w="9525">
-            <a:solidFill>
-              <a:srgbClr val="8A8A8A"/>
-            </a:solidFill>
-          </a:ln>
-          <a:effectLst/>
-        </p:spPr>
-        <p:style>
-          <a:lnRef idx="1">
-            <a:schemeClr val="accent1"/>
-          </a:lnRef>
-          <a:fillRef idx="3">
-            <a:schemeClr val="accent1"/>
-          </a:fillRef>
-          <a:effectRef idx="2">
-            <a:schemeClr val="accent1"/>
-          </a:effectRef>
-          <a:fontRef idx="minor">
-            <a:schemeClr val="lt1"/>
-          </a:fontRef>
-        </p:style>
-        <p:txBody>
-          <a:bodyPr rtlCol="0" anchor="ctr" wrap="square" lIns="73152" rIns="73152"/>
-          <a:lstStyle/>
-          <a:p>
-            <a:pPr algn="ctr"/>
-            <a:r>
-              <a:rPr sz="1050" b="0">
-                <a:solidFill>
-                  <a:srgbClr val="1A1A1A"/>
-                </a:solidFill>
-                <a:latin typeface="Georgia"/>
-              </a:rPr>
-              <a:t>Queryable output</a:t>
-            </a:r>
-          </a:p>
-          <a:p>
-            <a:pPr algn="ctr"/>
-            <a:r>
-              <a:rPr sz="1050" b="0">
-                <a:solidFill>
-                  <a:srgbClr val="1A1A1A"/>
-                </a:solidFill>
-                <a:latin typeface="Georgia"/>
-              </a:rPr>
-              <a:t/>
-            </a:r>
-          </a:p>
-          <a:p>
-            <a:pPr algn="ctr"/>
-            <a:r>
-              <a:rPr sz="1050" b="0">
-                <a:solidFill>
-                  <a:srgbClr val="1A1A1A"/>
-                </a:solidFill>
-                <a:latin typeface="Georgia"/>
-              </a:rPr>
-              <a:t>flow at any continuous coordinate, sparse equals dense exactly</a:t>
-            </a:r>
-          </a:p>
-        </p:txBody>
-      </p:sp>
-      <p:sp>
-        <p:nvSpPr>
-          <p:cNvPr id="34" name="Rounded Rectangle 33"/>
-          <p:cNvSpPr/>
-          <p:nvPr/>
-        </p:nvSpPr>
-        <p:spPr>
-          <a:xfrm>
-            <a:off x="4343400" y="4846320"/>
-            <a:ext cx="3474720" cy="1005840"/>
-          </a:xfrm>
-          <a:prstGeom prst="roundRect">
-            <a:avLst/>
-          </a:prstGeom>
-          <a:solidFill>
-            <a:srgbClr val="EFEFEF"/>
-          </a:solidFill>
-          <a:ln w="9525">
-            <a:solidFill>
-              <a:srgbClr val="8A8A8A"/>
-            </a:solidFill>
-          </a:ln>
-          <a:effectLst/>
-        </p:spPr>
-        <p:style>
-          <a:lnRef idx="1">
-            <a:schemeClr val="accent1"/>
-          </a:lnRef>
-          <a:fillRef idx="3">
-            <a:schemeClr val="accent1"/>
-          </a:fillRef>
-          <a:effectRef idx="2">
-            <a:schemeClr val="accent1"/>
-          </a:effectRef>
-          <a:fontRef idx="minor">
-            <a:schemeClr val="lt1"/>
-          </a:fontRef>
-        </p:style>
-        <p:txBody>
-          <a:bodyPr rtlCol="0" anchor="ctr" wrap="square" lIns="73152" rIns="73152"/>
-          <a:lstStyle/>
-          <a:p>
-            <a:pPr algn="ctr"/>
-            <a:r>
-              <a:rPr sz="1050" b="0">
-                <a:solidFill>
-                  <a:srgbClr val="1A1A1A"/>
-                </a:solidFill>
-                <a:latin typeface="Georgia"/>
-              </a:rPr>
-              <a:t>Cheap repeat access</a:t>
-            </a:r>
-          </a:p>
-          <a:p>
-            <a:pPr algn="ctr"/>
-            <a:r>
-              <a:rPr sz="1050" b="0">
-                <a:solidFill>
-                  <a:srgbClr val="1A1A1A"/>
-                </a:solidFill>
-                <a:latin typeface="Georgia"/>
-              </a:rPr>
-              <a:t/>
-            </a:r>
-          </a:p>
-          <a:p>
-            <a:pPr algn="ctr"/>
-            <a:r>
-              <a:rPr sz="1050" b="0">
-                <a:solidFill>
-                  <a:srgbClr val="1A1A1A"/>
-                </a:solidFill>
-                <a:latin typeface="Georgia"/>
-              </a:rPr>
-              <a:t>2.6 ms per further query batch on a cached frame</a:t>
-            </a:r>
-          </a:p>
-        </p:txBody>
-      </p:sp>
-      <p:sp>
-        <p:nvSpPr>
-          <p:cNvPr id="35" name="Rounded Rectangle 34"/>
-          <p:cNvSpPr/>
-          <p:nvPr/>
-        </p:nvSpPr>
-        <p:spPr>
-          <a:xfrm>
-            <a:off x="8001000" y="4846320"/>
-            <a:ext cx="3474720" cy="1005840"/>
-          </a:xfrm>
-          <a:prstGeom prst="roundRect">
-            <a:avLst/>
-          </a:prstGeom>
-          <a:solidFill>
-            <a:srgbClr val="EFEFEF"/>
-          </a:solidFill>
-          <a:ln w="9525">
-            <a:solidFill>
-              <a:srgbClr val="8A8A8A"/>
-            </a:solidFill>
-          </a:ln>
-          <a:effectLst/>
-        </p:spPr>
-        <p:style>
-          <a:lnRef idx="1">
-            <a:schemeClr val="accent1"/>
-          </a:lnRef>
-          <a:fillRef idx="3">
-            <a:schemeClr val="accent1"/>
-          </a:fillRef>
-          <a:effectRef idx="2">
-            <a:schemeClr val="accent1"/>
-          </a:effectRef>
-          <a:fontRef idx="minor">
-            <a:schemeClr val="lt1"/>
-          </a:fontRef>
-        </p:style>
-        <p:txBody>
-          <a:bodyPr rtlCol="0" anchor="ctr" wrap="square" lIns="73152" rIns="73152"/>
-          <a:lstStyle/>
-          <a:p>
-            <a:pPr algn="ctr"/>
-            <a:r>
-              <a:rPr sz="1050" b="0">
-                <a:solidFill>
-                  <a:srgbClr val="1A1A1A"/>
-                </a:solidFill>
-                <a:latin typeface="Georgia"/>
-              </a:rPr>
-              <a:t>Calibrated confidence</a:t>
-            </a:r>
-          </a:p>
-          <a:p>
-            <a:pPr algn="ctr"/>
-            <a:r>
-              <a:rPr sz="1050" b="0">
-                <a:solidFill>
-                  <a:srgbClr val="1A1A1A"/>
-                </a:solidFill>
-                <a:latin typeface="Georgia"/>
-              </a:rPr>
-              <a:t/>
-            </a:r>
-          </a:p>
-          <a:p>
-            <a:pPr algn="ctr"/>
-            <a:r>
-              <a:rPr sz="1050" b="0">
-                <a:solidFill>
-                  <a:srgbClr val="1A1A1A"/>
-                </a:solidFill>
-                <a:latin typeface="Georgia"/>
-              </a:rPr>
-              <a:t>per-query error estimate, monotonic against real error</a:t>
-            </a:r>
-          </a:p>
-        </p:txBody>
-      </p:sp>
-      <p:sp>
-        <p:nvSpPr>
-          <p:cNvPr id="36" name="TextBox 35"/>
-          <p:cNvSpPr txBox="1"/>
-          <p:nvPr/>
-        </p:nvSpPr>
-        <p:spPr>
-          <a:xfrm>
-            <a:off x="685800" y="6419088"/>
-            <a:ext cx="7315200" cy="274320"/>
-          </a:xfrm>
-          <a:prstGeom prst="rect">
-            <a:avLst/>
-          </a:prstGeom>
-          <a:noFill/>
-        </p:spPr>
-        <p:txBody>
-          <a:bodyPr wrap="square">
-            <a:spAutoFit/>
-          </a:bodyPr>
-          <a:lstStyle/>
-          <a:p>
-            <a:pPr algn="l">
-              <a:lnSpc>
-                <a:spcPct val="100000"/>
-              </a:lnSpc>
-            </a:pPr>
-            <a:r>
               <a:rPr sz="900" b="0">
                 <a:solidFill>
                   <a:srgbClr val="8A8A8A"/>
@@ -7826,7 +7858,7 @@
       </p:sp>
       <p:sp>
         <p:nvSpPr>
-          <p:cNvPr id="37" name="TextBox 36"/>
+          <p:cNvPr id="15" name="TextBox 14"/>
           <p:cNvSpPr txBox="1"/>
           <p:nvPr/>
         </p:nvSpPr>
@@ -7915,7 +7947,7 @@
                 </a:solidFill>
                 <a:latin typeface="Georgia"/>
               </a:rPr>
-              <a:t>LIMITATIONS</a:t>
+              <a:t>NEXT STEPS</a:t>
             </a:r>
           </a:p>
         </p:txBody>
@@ -7954,21 +7986,76 @@
                 </a:solidFill>
                 <a:latin typeface="Georgia"/>
               </a:rPr>
-              <a:t>What is not yet proven, stated plainly</a:t>
-            </a:r>
-          </a:p>
-        </p:txBody>
-      </p:sp>
-      <p:sp>
-        <p:nvSpPr>
-          <p:cNvPr id="4" name="TextBox 3"/>
+              <a:t>In priority order</a:t>
+            </a:r>
+          </a:p>
+        </p:txBody>
+      </p:sp>
+      <p:sp>
+        <p:nvSpPr>
+          <p:cNvPr id="4" name="Rounded Rectangle 3"/>
+          <p:cNvSpPr/>
+          <p:nvPr/>
+        </p:nvSpPr>
+        <p:spPr>
+          <a:xfrm>
+            <a:off x="685800" y="1691640"/>
+            <a:ext cx="384048" cy="384048"/>
+          </a:xfrm>
+          <a:prstGeom prst="roundRect">
+            <a:avLst/>
+          </a:prstGeom>
+          <a:solidFill>
+            <a:srgbClr val="333333"/>
+          </a:solidFill>
+          <a:ln w="9525">
+            <a:solidFill>
+              <a:srgbClr val="8A8A8A"/>
+            </a:solidFill>
+          </a:ln>
+          <a:effectLst/>
+        </p:spPr>
+        <p:style>
+          <a:lnRef idx="1">
+            <a:schemeClr val="accent1"/>
+          </a:lnRef>
+          <a:fillRef idx="3">
+            <a:schemeClr val="accent1"/>
+          </a:fillRef>
+          <a:effectRef idx="2">
+            <a:schemeClr val="accent1"/>
+          </a:effectRef>
+          <a:fontRef idx="minor">
+            <a:schemeClr val="lt1"/>
+          </a:fontRef>
+        </p:style>
+        <p:txBody>
+          <a:bodyPr rtlCol="0" anchor="ctr" wrap="square" lIns="73152" rIns="73152"/>
+          <a:lstStyle/>
+          <a:p>
+            <a:pPr algn="ctr"/>
+            <a:r>
+              <a:rPr sz="1200" b="1">
+                <a:solidFill>
+                  <a:srgbClr val="FFFFFF"/>
+                </a:solidFill>
+                <a:latin typeface="Georgia"/>
+              </a:rPr>
+              <a:t>1</a:t>
+            </a:r>
+          </a:p>
+        </p:txBody>
+      </p:sp>
+      <p:sp>
+        <p:nvSpPr>
+          <p:cNvPr id="5" name="TextBox 4"/>
           <p:cNvSpPr txBox="1"/>
           <p:nvPr/>
         </p:nvSpPr>
         <p:spPr>
           <a:xfrm>
-            <a:off x="685800" y="1645920"/>
-            <a:ext cx="4023360" cy="274320"/>
+            <a:off x="1234440" y="1673352"/>
+            <a:ext cx="3657600" cy="274320"/>
           </a:xfrm>
           <a:prstGeom prst="rect">
             <a:avLst/>
@@ -7987,27 +8074,27 @@
               </a:lnSpc>
             </a:pPr>
             <a:r>
-              <a:rPr sz="1150" b="1">
-                <a:solidFill>
-                  <a:srgbClr val="1A1A1A"/>
-                </a:solidFill>
-                <a:latin typeface="Georgia"/>
-              </a:rPr>
-              <a:t>Sub-pixel precision is worse than v2</a:t>
-            </a:r>
-          </a:p>
-        </p:txBody>
-      </p:sp>
-      <p:sp>
-        <p:nvSpPr>
-          <p:cNvPr id="5" name="TextBox 4"/>
+              <a:rPr sz="1200" b="1">
+                <a:solidFill>
+                  <a:srgbClr val="1A1A1A"/>
+                </a:solidFill>
+                <a:latin typeface="Georgia"/>
+              </a:rPr>
+              <a:t>Full-resolution stem for the decoder</a:t>
+            </a:r>
+          </a:p>
+        </p:txBody>
+      </p:sp>
+      <p:sp>
+        <p:nvSpPr>
+          <p:cNvPr id="6" name="TextBox 5"/>
           <p:cNvSpPr txBox="1"/>
           <p:nvPr/>
         </p:nvSpPr>
         <p:spPr>
           <a:xfrm>
-            <a:off x="4846320" y="1645920"/>
-            <a:ext cx="6675120" cy="548640"/>
+            <a:off x="5029200" y="1673352"/>
+            <a:ext cx="6492240" cy="822960"/>
           </a:xfrm>
           <a:prstGeom prst="rect">
             <a:avLst/>
@@ -8032,21 +8119,76 @@
                 </a:solidFill>
                 <a:latin typeface="Georgia"/>
               </a:rPr>
-              <a:t>By 0.8 to 6.3 points of 1-pixel accuracy. Cause diagnosed (decoder never sees full-resolution input) but not fixed.</a:t>
-            </a:r>
-          </a:p>
-        </p:txBody>
-      </p:sp>
-      <p:sp>
-        <p:nvSpPr>
-          <p:cNvPr id="6" name="TextBox 5"/>
+              <a:t>Give the decoder a cheap full-resolution feature map so evidence actually varies within an 8x8 cell. This is the direct attack on the precision gap and on making continuous querying meaningful rather than nominal.</a:t>
+            </a:r>
+          </a:p>
+        </p:txBody>
+      </p:sp>
+      <p:sp>
+        <p:nvSpPr>
+          <p:cNvPr id="7" name="Rounded Rectangle 6"/>
+          <p:cNvSpPr/>
+          <p:nvPr/>
+        </p:nvSpPr>
+        <p:spPr>
+          <a:xfrm>
+            <a:off x="685800" y="2862072"/>
+            <a:ext cx="384048" cy="384048"/>
+          </a:xfrm>
+          <a:prstGeom prst="roundRect">
+            <a:avLst/>
+          </a:prstGeom>
+          <a:solidFill>
+            <a:srgbClr val="333333"/>
+          </a:solidFill>
+          <a:ln w="9525">
+            <a:solidFill>
+              <a:srgbClr val="8A8A8A"/>
+            </a:solidFill>
+          </a:ln>
+          <a:effectLst/>
+        </p:spPr>
+        <p:style>
+          <a:lnRef idx="1">
+            <a:schemeClr val="accent1"/>
+          </a:lnRef>
+          <a:fillRef idx="3">
+            <a:schemeClr val="accent1"/>
+          </a:fillRef>
+          <a:effectRef idx="2">
+            <a:schemeClr val="accent1"/>
+          </a:effectRef>
+          <a:fontRef idx="minor">
+            <a:schemeClr val="lt1"/>
+          </a:fontRef>
+        </p:style>
+        <p:txBody>
+          <a:bodyPr rtlCol="0" anchor="ctr" wrap="square" lIns="73152" rIns="73152"/>
+          <a:lstStyle/>
+          <a:p>
+            <a:pPr algn="ctr"/>
+            <a:r>
+              <a:rPr sz="1200" b="1">
+                <a:solidFill>
+                  <a:srgbClr val="FFFFFF"/>
+                </a:solidFill>
+                <a:latin typeface="Georgia"/>
+              </a:rPr>
+              <a:t>2</a:t>
+            </a:r>
+          </a:p>
+        </p:txBody>
+      </p:sp>
+      <p:sp>
+        <p:nvSpPr>
+          <p:cNvPr id="8" name="TextBox 7"/>
           <p:cNvSpPr txBox="1"/>
           <p:nvPr/>
         </p:nvSpPr>
         <p:spPr>
           <a:xfrm>
-            <a:off x="685800" y="2578608"/>
-            <a:ext cx="4023360" cy="274320"/>
+            <a:off x="1234440" y="2843784"/>
+            <a:ext cx="3657600" cy="274320"/>
           </a:xfrm>
           <a:prstGeom prst="rect">
             <a:avLst/>
@@ -8065,27 +8207,27 @@
               </a:lnSpc>
             </a:pPr>
             <a:r>
-              <a:rPr sz="1150" b="1">
-                <a:solidFill>
-                  <a:srgbClr val="1A1A1A"/>
-                </a:solidFill>
-                <a:latin typeface="Georgia"/>
-              </a:rPr>
-              <a:t>No edge-device measurement</a:t>
-            </a:r>
-          </a:p>
-        </p:txBody>
-      </p:sp>
-      <p:sp>
-        <p:nvSpPr>
-          <p:cNvPr id="7" name="TextBox 6"/>
+              <a:rPr sz="1200" b="1">
+                <a:solidFill>
+                  <a:srgbClr val="1A1A1A"/>
+                </a:solidFill>
+                <a:latin typeface="Georgia"/>
+              </a:rPr>
+              <a:t>Spring 4K evaluation</a:t>
+            </a:r>
+          </a:p>
+        </p:txBody>
+      </p:sp>
+      <p:sp>
+        <p:nvSpPr>
+          <p:cNvPr id="9" name="TextBox 8"/>
           <p:cNvSpPr txBox="1"/>
           <p:nvPr/>
         </p:nvSpPr>
         <p:spPr>
           <a:xfrm>
-            <a:off x="4846320" y="2578608"/>
-            <a:ext cx="6675120" cy="548640"/>
+            <a:off x="5029200" y="2843784"/>
+            <a:ext cx="6492240" cy="822960"/>
           </a:xfrm>
           <a:prstGeom prst="rect">
             <a:avLst/>
@@ -8110,21 +8252,76 @@
                 </a:solidFill>
                 <a:latin typeface="Georgia"/>
               </a:rPr>
-              <a:t>Every latency figure is V100 or RTX 4060. The edge claim in the title is a design target, not a result.</a:t>
-            </a:r>
-          </a:p>
-        </p:txBody>
-      </p:sp>
-      <p:sp>
-        <p:nvSpPr>
-          <p:cNvPr id="8" name="TextBox 7"/>
+              <a:t>Spring provides ground truth at twice the input resolution. v3 can be queried there natively; v2 structurally cannot. The one test that demonstrates a capability rather than a margin.</a:t>
+            </a:r>
+          </a:p>
+        </p:txBody>
+      </p:sp>
+      <p:sp>
+        <p:nvSpPr>
+          <p:cNvPr id="10" name="Rounded Rectangle 9"/>
+          <p:cNvSpPr/>
+          <p:nvPr/>
+        </p:nvSpPr>
+        <p:spPr>
+          <a:xfrm>
+            <a:off x="685800" y="4032504"/>
+            <a:ext cx="384048" cy="384048"/>
+          </a:xfrm>
+          <a:prstGeom prst="roundRect">
+            <a:avLst/>
+          </a:prstGeom>
+          <a:solidFill>
+            <a:srgbClr val="333333"/>
+          </a:solidFill>
+          <a:ln w="9525">
+            <a:solidFill>
+              <a:srgbClr val="8A8A8A"/>
+            </a:solidFill>
+          </a:ln>
+          <a:effectLst/>
+        </p:spPr>
+        <p:style>
+          <a:lnRef idx="1">
+            <a:schemeClr val="accent1"/>
+          </a:lnRef>
+          <a:fillRef idx="3">
+            <a:schemeClr val="accent1"/>
+          </a:fillRef>
+          <a:effectRef idx="2">
+            <a:schemeClr val="accent1"/>
+          </a:effectRef>
+          <a:fontRef idx="minor">
+            <a:schemeClr val="lt1"/>
+          </a:fontRef>
+        </p:style>
+        <p:txBody>
+          <a:bodyPr rtlCol="0" anchor="ctr" wrap="square" lIns="73152" rIns="73152"/>
+          <a:lstStyle/>
+          <a:p>
+            <a:pPr algn="ctr"/>
+            <a:r>
+              <a:rPr sz="1200" b="1">
+                <a:solidFill>
+                  <a:srgbClr val="FFFFFF"/>
+                </a:solidFill>
+                <a:latin typeface="Georgia"/>
+              </a:rPr>
+              <a:t>3</a:t>
+            </a:r>
+          </a:p>
+        </p:txBody>
+      </p:sp>
+      <p:sp>
+        <p:nvSpPr>
+          <p:cNvPr id="11" name="TextBox 10"/>
           <p:cNvSpPr txBox="1"/>
           <p:nvPr/>
         </p:nvSpPr>
         <p:spPr>
           <a:xfrm>
-            <a:off x="685800" y="3511296"/>
-            <a:ext cx="4023360" cy="274320"/>
+            <a:off x="1234440" y="4014216"/>
+            <a:ext cx="3657600" cy="274320"/>
           </a:xfrm>
           <a:prstGeom prst="rect">
             <a:avLst/>
@@ -8143,27 +8340,27 @@
               </a:lnSpc>
             </a:pPr>
             <a:r>
-              <a:rPr sz="1150" b="1">
-                <a:solidFill>
-                  <a:srgbClr val="1A1A1A"/>
-                </a:solidFill>
-                <a:latin typeface="Georgia"/>
-              </a:rPr>
-              <a:t>Single evaluation domain</a:t>
-            </a:r>
-          </a:p>
-        </p:txBody>
-      </p:sp>
-      <p:sp>
-        <p:nvSpPr>
-          <p:cNvPr id="9" name="TextBox 8"/>
+              <a:rPr sz="1200" b="1">
+                <a:solidFill>
+                  <a:srgbClr val="1A1A1A"/>
+                </a:solidFill>
+                <a:latin typeface="Georgia"/>
+              </a:rPr>
+              <a:t>Jetson measurement</a:t>
+            </a:r>
+          </a:p>
+        </p:txBody>
+      </p:sp>
+      <p:sp>
+        <p:nvSpPr>
+          <p:cNvPr id="12" name="TextBox 11"/>
           <p:cNvSpPr txBox="1"/>
           <p:nvPr/>
         </p:nvSpPr>
         <p:spPr>
           <a:xfrm>
-            <a:off x="4846320" y="3511296"/>
-            <a:ext cx="6675120" cy="548640"/>
+            <a:off x="5029200" y="4014216"/>
+            <a:ext cx="6492240" cy="822960"/>
           </a:xfrm>
           <a:prstGeom prst="rect">
             <a:avLst/>
@@ -8188,21 +8385,76 @@
                 </a:solidFill>
                 <a:latin typeface="Georgia"/>
               </a:rPr>
-              <a:t>All accuracy numbers are VKITTI2 Scene18+20. A synthetic driving benchmark is not evidence for field or survey imagery.</a:t>
-            </a:r>
-          </a:p>
-        </p:txBody>
-      </p:sp>
-      <p:sp>
-        <p:nvSpPr>
-          <p:cNvPr id="10" name="TextBox 9"/>
+              <a:t>Converts the edge claim from a design target into a result, or refutes it.</a:t>
+            </a:r>
+          </a:p>
+        </p:txBody>
+      </p:sp>
+      <p:sp>
+        <p:nvSpPr>
+          <p:cNvPr id="13" name="Rounded Rectangle 12"/>
+          <p:cNvSpPr/>
+          <p:nvPr/>
+        </p:nvSpPr>
+        <p:spPr>
+          <a:xfrm>
+            <a:off x="685800" y="5202936"/>
+            <a:ext cx="384048" cy="384048"/>
+          </a:xfrm>
+          <a:prstGeom prst="roundRect">
+            <a:avLst/>
+          </a:prstGeom>
+          <a:solidFill>
+            <a:srgbClr val="333333"/>
+          </a:solidFill>
+          <a:ln w="9525">
+            <a:solidFill>
+              <a:srgbClr val="8A8A8A"/>
+            </a:solidFill>
+          </a:ln>
+          <a:effectLst/>
+        </p:spPr>
+        <p:style>
+          <a:lnRef idx="1">
+            <a:schemeClr val="accent1"/>
+          </a:lnRef>
+          <a:fillRef idx="3">
+            <a:schemeClr val="accent1"/>
+          </a:fillRef>
+          <a:effectRef idx="2">
+            <a:schemeClr val="accent1"/>
+          </a:effectRef>
+          <a:fontRef idx="minor">
+            <a:schemeClr val="lt1"/>
+          </a:fontRef>
+        </p:style>
+        <p:txBody>
+          <a:bodyPr rtlCol="0" anchor="ctr" wrap="square" lIns="73152" rIns="73152"/>
+          <a:lstStyle/>
+          <a:p>
+            <a:pPr algn="ctr"/>
+            <a:r>
+              <a:rPr sz="1200" b="1">
+                <a:solidFill>
+                  <a:srgbClr val="FFFFFF"/>
+                </a:solidFill>
+                <a:latin typeface="Georgia"/>
+              </a:rPr>
+              <a:t>4</a:t>
+            </a:r>
+          </a:p>
+        </p:txBody>
+      </p:sp>
+      <p:sp>
+        <p:nvSpPr>
+          <p:cNvPr id="14" name="TextBox 13"/>
           <p:cNvSpPr txBox="1"/>
           <p:nvPr/>
         </p:nvSpPr>
         <p:spPr>
           <a:xfrm>
-            <a:off x="685800" y="4443984"/>
-            <a:ext cx="4023360" cy="274320"/>
+            <a:off x="1234440" y="5184648"/>
+            <a:ext cx="3657600" cy="274320"/>
           </a:xfrm>
           <a:prstGeom prst="rect">
             <a:avLst/>
@@ -8221,27 +8473,27 @@
               </a:lnSpc>
             </a:pPr>
             <a:r>
-              <a:rPr sz="1150" b="1">
-                <a:solidFill>
-                  <a:srgbClr val="1A1A1A"/>
-                </a:solidFill>
-                <a:latin typeface="Georgia"/>
-              </a:rPr>
-              <a:t>Spring run truncated</a:t>
-            </a:r>
-          </a:p>
-        </p:txBody>
-      </p:sp>
-      <p:sp>
-        <p:nvSpPr>
-          <p:cNvPr id="11" name="TextBox 10"/>
+              <a:rPr sz="1200" b="1">
+                <a:solidFill>
+                  <a:srgbClr val="1A1A1A"/>
+                </a:solidFill>
+                <a:latin typeface="Georgia"/>
+              </a:rPr>
+              <a:t>Field or survey imagery</a:t>
+            </a:r>
+          </a:p>
+        </p:txBody>
+      </p:sp>
+      <p:sp>
+        <p:nvSpPr>
+          <p:cNvPr id="15" name="TextBox 14"/>
           <p:cNvSpPr txBox="1"/>
           <p:nvPr/>
         </p:nvSpPr>
         <p:spPr>
           <a:xfrm>
-            <a:off x="4846320" y="4443984"/>
-            <a:ext cx="6675120" cy="548640"/>
+            <a:off x="5029200" y="5184648"/>
+            <a:ext cx="6492240" cy="822960"/>
           </a:xfrm>
           <a:prstGeom prst="rect">
             <a:avLst/>
@@ -8266,21 +8518,21 @@
                 </a:solidFill>
                 <a:latin typeface="Georgia"/>
               </a:rPr>
-              <a:t>Killed by the 8-hour wall clock at roughly 90k of 100k steps, so it is not directly comparable to the others.</a:t>
-            </a:r>
-          </a:p>
-        </p:txBody>
-      </p:sp>
-      <p:sp>
-        <p:nvSpPr>
-          <p:cNvPr id="12" name="TextBox 11"/>
+              <a:t>A registration demonstration on lab data would test the actual use case.</a:t>
+            </a:r>
+          </a:p>
+        </p:txBody>
+      </p:sp>
+      <p:sp>
+        <p:nvSpPr>
+          <p:cNvPr id="16" name="TextBox 15"/>
           <p:cNvSpPr txBox="1"/>
           <p:nvPr/>
         </p:nvSpPr>
         <p:spPr>
           <a:xfrm>
-            <a:off x="685800" y="5376672"/>
-            <a:ext cx="4023360" cy="274320"/>
+            <a:off x="685800" y="6419088"/>
+            <a:ext cx="7315200" cy="274320"/>
           </a:xfrm>
           <a:prstGeom prst="rect">
             <a:avLst/>
@@ -8299,84 +8551,6 @@
               </a:lnSpc>
             </a:pPr>
             <a:r>
-              <a:rPr sz="1150" b="1">
-                <a:solidFill>
-                  <a:srgbClr val="1A1A1A"/>
-                </a:solidFill>
-                <a:latin typeface="Georgia"/>
-              </a:rPr>
-              <a:t>One seed, and checkpoint noise the size of the effects</a:t>
-            </a:r>
-          </a:p>
-        </p:txBody>
-      </p:sp>
-      <p:sp>
-        <p:nvSpPr>
-          <p:cNvPr id="13" name="TextBox 12"/>
-          <p:cNvSpPr txBox="1"/>
-          <p:nvPr/>
-        </p:nvSpPr>
-        <p:spPr>
-          <a:xfrm>
-            <a:off x="4846320" y="5376672"/>
-            <a:ext cx="6675120" cy="548640"/>
-          </a:xfrm>
-          <a:prstGeom prst="rect">
-            <a:avLst/>
-          </a:prstGeom>
-          <a:noFill/>
-        </p:spPr>
-        <p:txBody>
-          <a:bodyPr wrap="square">
-            <a:spAutoFit/>
-          </a:bodyPr>
-          <a:lstStyle/>
-          <a:p>
-            <a:pPr algn="l">
-              <a:lnSpc>
-                <a:spcPct val="112000"/>
-              </a:lnSpc>
-            </a:pPr>
-            <a:r>
-              <a:rPr sz="1100" b="0">
-                <a:solidFill>
-                  <a:srgbClr val="1A1A1A"/>
-                </a:solidFill>
-                <a:latin typeface="Georgia"/>
-              </a:rPr>
-              <a:t>Step 90k vs 100k of the same run moves EPE by up to 0.038 px, reversing two of the orderings. Nothing finer than about 0.05 px is resolvable here.</a:t>
-            </a:r>
-          </a:p>
-        </p:txBody>
-      </p:sp>
-      <p:sp>
-        <p:nvSpPr>
-          <p:cNvPr id="14" name="TextBox 13"/>
-          <p:cNvSpPr txBox="1"/>
-          <p:nvPr/>
-        </p:nvSpPr>
-        <p:spPr>
-          <a:xfrm>
-            <a:off x="685800" y="6419088"/>
-            <a:ext cx="7315200" cy="274320"/>
-          </a:xfrm>
-          <a:prstGeom prst="rect">
-            <a:avLst/>
-          </a:prstGeom>
-          <a:noFill/>
-        </p:spPr>
-        <p:txBody>
-          <a:bodyPr wrap="square">
-            <a:spAutoFit/>
-          </a:bodyPr>
-          <a:lstStyle/>
-          <a:p>
-            <a:pPr algn="l">
-              <a:lnSpc>
-                <a:spcPct val="100000"/>
-              </a:lnSpc>
-            </a:pPr>
-            <a:r>
               <a:rPr sz="900" b="0">
                 <a:solidFill>
                   <a:srgbClr val="8A8A8A"/>
@@ -8390,7 +8564,7 @@
       </p:sp>
       <p:sp>
         <p:nvSpPr>
-          <p:cNvPr id="15" name="TextBox 14"/>
+          <p:cNvPr id="17" name="TextBox 16"/>
           <p:cNvSpPr txBox="1"/>
           <p:nvPr/>
         </p:nvSpPr>
@@ -8479,7 +8653,7 @@
                 </a:solidFill>
                 <a:latin typeface="Georgia"/>
               </a:rPr>
-              <a:t>NEXT STEPS</a:t>
+              <a:t>ANTICIPATED QUESTIONS</a:t>
             </a:r>
           </a:p>
         </p:txBody>
@@ -8518,76 +8692,21 @@
                 </a:solidFill>
                 <a:latin typeface="Georgia"/>
               </a:rPr>
-              <a:t>In priority order</a:t>
-            </a:r>
-          </a:p>
-        </p:txBody>
-      </p:sp>
-      <p:sp>
-        <p:nvSpPr>
-          <p:cNvPr id="4" name="Rounded Rectangle 3"/>
-          <p:cNvSpPr/>
-          <p:nvPr/>
-        </p:nvSpPr>
-        <p:spPr>
-          <a:xfrm>
-            <a:off x="685800" y="1691640"/>
-            <a:ext cx="384048" cy="384048"/>
-          </a:xfrm>
-          <a:prstGeom prst="roundRect">
-            <a:avLst/>
-          </a:prstGeom>
-          <a:solidFill>
-            <a:srgbClr val="333333"/>
-          </a:solidFill>
-          <a:ln w="9525">
-            <a:solidFill>
-              <a:srgbClr val="8A8A8A"/>
-            </a:solidFill>
-          </a:ln>
-          <a:effectLst/>
-        </p:spPr>
-        <p:style>
-          <a:lnRef idx="1">
-            <a:schemeClr val="accent1"/>
-          </a:lnRef>
-          <a:fillRef idx="3">
-            <a:schemeClr val="accent1"/>
-          </a:fillRef>
-          <a:effectRef idx="2">
-            <a:schemeClr val="accent1"/>
-          </a:effectRef>
-          <a:fontRef idx="minor">
-            <a:schemeClr val="lt1"/>
-          </a:fontRef>
-        </p:style>
-        <p:txBody>
-          <a:bodyPr rtlCol="0" anchor="ctr" wrap="square" lIns="73152" rIns="73152"/>
-          <a:lstStyle/>
-          <a:p>
-            <a:pPr algn="ctr"/>
-            <a:r>
-              <a:rPr sz="1200" b="1">
-                <a:solidFill>
-                  <a:srgbClr val="FFFFFF"/>
-                </a:solidFill>
-                <a:latin typeface="Georgia"/>
-              </a:rPr>
-              <a:t>1</a:t>
-            </a:r>
-          </a:p>
-        </p:txBody>
-      </p:sp>
-      <p:sp>
-        <p:nvSpPr>
-          <p:cNvPr id="5" name="TextBox 4"/>
+              <a:t/>
+            </a:r>
+          </a:p>
+        </p:txBody>
+      </p:sp>
+      <p:sp>
+        <p:nvSpPr>
+          <p:cNvPr id="4" name="TextBox 3"/>
           <p:cNvSpPr txBox="1"/>
           <p:nvPr/>
         </p:nvSpPr>
         <p:spPr>
           <a:xfrm>
-            <a:off x="1234440" y="1673352"/>
-            <a:ext cx="3657600" cy="274320"/>
+            <a:off x="685800" y="1508760"/>
+            <a:ext cx="10881360" cy="274320"/>
           </a:xfrm>
           <a:prstGeom prst="rect">
             <a:avLst/>
@@ -8612,21 +8731,21 @@
                 </a:solidFill>
                 <a:latin typeface="Georgia"/>
               </a:rPr>
-              <a:t>Full-resolution stem for the decoder</a:t>
-            </a:r>
-          </a:p>
-        </p:txBody>
-      </p:sp>
-      <p:sp>
-        <p:nvSpPr>
-          <p:cNvPr id="6" name="TextBox 5"/>
+              <a:t>Why is flow defined between pixels at all?</a:t>
+            </a:r>
+          </a:p>
+        </p:txBody>
+      </p:sp>
+      <p:sp>
+        <p:nvSpPr>
+          <p:cNvPr id="5" name="TextBox 4"/>
           <p:cNvSpPr txBox="1"/>
           <p:nvPr/>
         </p:nvSpPr>
         <p:spPr>
           <a:xfrm>
-            <a:off x="5029200" y="1673352"/>
-            <a:ext cx="6492240" cy="822960"/>
+            <a:off x="868680" y="1810512"/>
+            <a:ext cx="10607040" cy="594360"/>
           </a:xfrm>
           <a:prstGeom prst="rect">
             <a:avLst/>
@@ -8647,80 +8766,25 @@
             <a:r>
               <a:rPr sz="1100" b="0">
                 <a:solidFill>
-                  <a:srgbClr val="1A1A1A"/>
-                </a:solidFill>
-                <a:latin typeface="Georgia"/>
-              </a:rPr>
-              <a:t>Give the decoder a cheap full-resolution feature map so evidence actually varies within an 8x8 cell. This is the direct attack on the precision gap and on making continuous querying meaningful rather than nominal.</a:t>
-            </a:r>
-          </a:p>
-        </p:txBody>
-      </p:sp>
-      <p:sp>
-        <p:nvSpPr>
-          <p:cNvPr id="7" name="Rounded Rectangle 6"/>
-          <p:cNvSpPr/>
-          <p:nvPr/>
-        </p:nvSpPr>
-        <p:spPr>
-          <a:xfrm>
-            <a:off x="685800" y="2862072"/>
-            <a:ext cx="384048" cy="384048"/>
-          </a:xfrm>
-          <a:prstGeom prst="roundRect">
-            <a:avLst/>
-          </a:prstGeom>
-          <a:solidFill>
-            <a:srgbClr val="333333"/>
-          </a:solidFill>
-          <a:ln w="9525">
-            <a:solidFill>
-              <a:srgbClr val="8A8A8A"/>
-            </a:solidFill>
-          </a:ln>
-          <a:effectLst/>
-        </p:spPr>
-        <p:style>
-          <a:lnRef idx="1">
-            <a:schemeClr val="accent1"/>
-          </a:lnRef>
-          <a:fillRef idx="3">
-            <a:schemeClr val="accent1"/>
-          </a:fillRef>
-          <a:effectRef idx="2">
-            <a:schemeClr val="accent1"/>
-          </a:effectRef>
-          <a:fontRef idx="minor">
-            <a:schemeClr val="lt1"/>
-          </a:fontRef>
-        </p:style>
-        <p:txBody>
-          <a:bodyPr rtlCol="0" anchor="ctr" wrap="square" lIns="73152" rIns="73152"/>
-          <a:lstStyle/>
-          <a:p>
-            <a:pPr algn="ctr"/>
-            <a:r>
-              <a:rPr sz="1200" b="1">
-                <a:solidFill>
-                  <a:srgbClr val="FFFFFF"/>
-                </a:solidFill>
-                <a:latin typeface="Georgia"/>
-              </a:rPr>
-              <a:t>2</a:t>
-            </a:r>
-          </a:p>
-        </p:txBody>
-      </p:sp>
-      <p:sp>
-        <p:nvSpPr>
-          <p:cNvPr id="8" name="TextBox 7"/>
+                  <a:srgbClr val="333333"/>
+                </a:solidFill>
+                <a:latin typeface="Georgia"/>
+              </a:rPr>
+              <a:t>Motion is continuous; the pixel grid is a sampling artefact. A corner tracked to (312.7, 188.2) is a real answer, and registration consumes it directly.</a:t>
+            </a:r>
+          </a:p>
+        </p:txBody>
+      </p:sp>
+      <p:sp>
+        <p:nvSpPr>
+          <p:cNvPr id="6" name="TextBox 5"/>
           <p:cNvSpPr txBox="1"/>
           <p:nvPr/>
         </p:nvSpPr>
         <p:spPr>
           <a:xfrm>
-            <a:off x="1234440" y="2843784"/>
-            <a:ext cx="3657600" cy="274320"/>
+            <a:off x="685800" y="2697480"/>
+            <a:ext cx="10881360" cy="274320"/>
           </a:xfrm>
           <a:prstGeom prst="rect">
             <a:avLst/>
@@ -8745,21 +8809,21 @@
                 </a:solidFill>
                 <a:latin typeface="Georgia"/>
               </a:rPr>
-              <a:t>Spring 4K evaluation</a:t>
-            </a:r>
-          </a:p>
-        </p:txBody>
-      </p:sp>
-      <p:sp>
-        <p:nvSpPr>
-          <p:cNvPr id="9" name="TextBox 8"/>
+              <a:t>Why freeze the backbone?</a:t>
+            </a:r>
+          </a:p>
+        </p:txBody>
+      </p:sp>
+      <p:sp>
+        <p:nvSpPr>
+          <p:cNvPr id="7" name="TextBox 6"/>
           <p:cNvSpPr txBox="1"/>
           <p:nvPr/>
         </p:nvSpPr>
         <p:spPr>
           <a:xfrm>
-            <a:off x="5029200" y="2843784"/>
-            <a:ext cx="6492240" cy="822960"/>
+            <a:off x="868680" y="2999232"/>
+            <a:ext cx="10607040" cy="594360"/>
           </a:xfrm>
           <a:prstGeom prst="rect">
             <a:avLst/>
@@ -8780,80 +8844,25 @@
             <a:r>
               <a:rPr sz="1100" b="0">
                 <a:solidFill>
-                  <a:srgbClr val="1A1A1A"/>
-                </a:solidFill>
-                <a:latin typeface="Georgia"/>
-              </a:rPr>
-              <a:t>Spring provides ground truth at twice the input resolution. v3 can be queried there natively; v2 structurally cannot. The one test that demonstrates a capability rather than a margin.</a:t>
-            </a:r>
-          </a:p>
-        </p:txBody>
-      </p:sp>
-      <p:sp>
-        <p:nvSpPr>
-          <p:cNvPr id="10" name="Rounded Rectangle 9"/>
-          <p:cNvSpPr/>
-          <p:nvPr/>
-        </p:nvSpPr>
-        <p:spPr>
-          <a:xfrm>
-            <a:off x="685800" y="4032504"/>
-            <a:ext cx="384048" cy="384048"/>
-          </a:xfrm>
-          <a:prstGeom prst="roundRect">
-            <a:avLst/>
-          </a:prstGeom>
-          <a:solidFill>
-            <a:srgbClr val="333333"/>
-          </a:solidFill>
-          <a:ln w="9525">
-            <a:solidFill>
-              <a:srgbClr val="8A8A8A"/>
-            </a:solidFill>
-          </a:ln>
-          <a:effectLst/>
-        </p:spPr>
-        <p:style>
-          <a:lnRef idx="1">
-            <a:schemeClr val="accent1"/>
-          </a:lnRef>
-          <a:fillRef idx="3">
-            <a:schemeClr val="accent1"/>
-          </a:fillRef>
-          <a:effectRef idx="2">
-            <a:schemeClr val="accent1"/>
-          </a:effectRef>
-          <a:fontRef idx="minor">
-            <a:schemeClr val="lt1"/>
-          </a:fontRef>
-        </p:style>
-        <p:txBody>
-          <a:bodyPr rtlCol="0" anchor="ctr" wrap="square" lIns="73152" rIns="73152"/>
-          <a:lstStyle/>
-          <a:p>
-            <a:pPr algn="ctr"/>
-            <a:r>
-              <a:rPr sz="1200" b="1">
-                <a:solidFill>
-                  <a:srgbClr val="FFFFFF"/>
-                </a:solidFill>
-                <a:latin typeface="Georgia"/>
-              </a:rPr>
-              <a:t>3</a:t>
-            </a:r>
-          </a:p>
-        </p:txBody>
-      </p:sp>
-      <p:sp>
-        <p:nvSpPr>
-          <p:cNvPr id="11" name="TextBox 10"/>
+                  <a:srgbClr val="333333"/>
+                </a:solidFill>
+                <a:latin typeface="Georgia"/>
+              </a:rPr>
+              <a:t>To isolate the decoder as the only variable. Unfreezing diverged at batch 4 locally and has not been retried at scale.</a:t>
+            </a:r>
+          </a:p>
+        </p:txBody>
+      </p:sp>
+      <p:sp>
+        <p:nvSpPr>
+          <p:cNvPr id="8" name="TextBox 7"/>
           <p:cNvSpPr txBox="1"/>
           <p:nvPr/>
         </p:nvSpPr>
         <p:spPr>
           <a:xfrm>
-            <a:off x="1234440" y="4014216"/>
-            <a:ext cx="3657600" cy="274320"/>
+            <a:off x="685800" y="3886200"/>
+            <a:ext cx="10881360" cy="274320"/>
           </a:xfrm>
           <a:prstGeom prst="rect">
             <a:avLst/>
@@ -8878,21 +8887,21 @@
                 </a:solidFill>
                 <a:latin typeface="Georgia"/>
               </a:rPr>
-              <a:t>Jetson measurement</a:t>
-            </a:r>
-          </a:p>
-        </p:txBody>
-      </p:sp>
-      <p:sp>
-        <p:nvSpPr>
-          <p:cNvPr id="12" name="TextBox 11"/>
+              <a:t>Why is dense v3 slower than v2?</a:t>
+            </a:r>
+          </a:p>
+        </p:txBody>
+      </p:sp>
+      <p:sp>
+        <p:nvSpPr>
+          <p:cNvPr id="9" name="TextBox 8"/>
           <p:cNvSpPr txBox="1"/>
           <p:nvPr/>
         </p:nvSpPr>
         <p:spPr>
           <a:xfrm>
-            <a:off x="5029200" y="4014216"/>
-            <a:ext cx="6492240" cy="822960"/>
+            <a:off x="868680" y="4187952"/>
+            <a:ext cx="10607040" cy="594360"/>
           </a:xfrm>
           <a:prstGeom prst="rect">
             <a:avLst/>
@@ -8913,80 +8922,25 @@
             <a:r>
               <a:rPr sz="1100" b="0">
                 <a:solidFill>
-                  <a:srgbClr val="1A1A1A"/>
-                </a:solidFill>
-                <a:latin typeface="Georgia"/>
-              </a:rPr>
-              <a:t>Converts the edge claim from a design target into a result, or refutes it.</a:t>
-            </a:r>
-          </a:p>
-        </p:txBody>
-      </p:sp>
-      <p:sp>
-        <p:nvSpPr>
-          <p:cNvPr id="13" name="Rounded Rectangle 12"/>
-          <p:cNvSpPr/>
-          <p:nvPr/>
-        </p:nvSpPr>
-        <p:spPr>
-          <a:xfrm>
-            <a:off x="685800" y="5202936"/>
-            <a:ext cx="384048" cy="384048"/>
-          </a:xfrm>
-          <a:prstGeom prst="roundRect">
-            <a:avLst/>
-          </a:prstGeom>
-          <a:solidFill>
-            <a:srgbClr val="333333"/>
-          </a:solidFill>
-          <a:ln w="9525">
-            <a:solidFill>
-              <a:srgbClr val="8A8A8A"/>
-            </a:solidFill>
-          </a:ln>
-          <a:effectLst/>
-        </p:spPr>
-        <p:style>
-          <a:lnRef idx="1">
-            <a:schemeClr val="accent1"/>
-          </a:lnRef>
-          <a:fillRef idx="3">
-            <a:schemeClr val="accent1"/>
-          </a:fillRef>
-          <a:effectRef idx="2">
-            <a:schemeClr val="accent1"/>
-          </a:effectRef>
-          <a:fontRef idx="minor">
-            <a:schemeClr val="lt1"/>
-          </a:fontRef>
-        </p:style>
-        <p:txBody>
-          <a:bodyPr rtlCol="0" anchor="ctr" wrap="square" lIns="73152" rIns="73152"/>
-          <a:lstStyle/>
-          <a:p>
-            <a:pPr algn="ctr"/>
-            <a:r>
-              <a:rPr sz="1200" b="1">
-                <a:solidFill>
-                  <a:srgbClr val="FFFFFF"/>
-                </a:solidFill>
-                <a:latin typeface="Georgia"/>
-              </a:rPr>
-              <a:t>4</a:t>
-            </a:r>
-          </a:p>
-        </p:txBody>
-      </p:sp>
-      <p:sp>
-        <p:nvSpPr>
-          <p:cNvPr id="14" name="TextBox 13"/>
+                  <a:srgbClr val="333333"/>
+                </a:solidFill>
+                <a:latin typeface="Georgia"/>
+              </a:rPr>
+              <a:t>v2 upsamples with one convolution that shares work across neighbouring pixels. v3 answers each query independently, giving up that sharing to gain the ability to answer only what is asked.</a:t>
+            </a:r>
+          </a:p>
+        </p:txBody>
+      </p:sp>
+      <p:sp>
+        <p:nvSpPr>
+          <p:cNvPr id="10" name="TextBox 9"/>
           <p:cNvSpPr txBox="1"/>
           <p:nvPr/>
         </p:nvSpPr>
         <p:spPr>
           <a:xfrm>
-            <a:off x="1234440" y="5184648"/>
-            <a:ext cx="3657600" cy="274320"/>
+            <a:off x="685800" y="5074920"/>
+            <a:ext cx="10881360" cy="274320"/>
           </a:xfrm>
           <a:prstGeom prst="rect">
             <a:avLst/>
@@ -9011,21 +8965,21 @@
                 </a:solidFill>
                 <a:latin typeface="Georgia"/>
               </a:rPr>
-              <a:t>Field or survey imagery</a:t>
-            </a:r>
-          </a:p>
-        </p:txBody>
-      </p:sp>
-      <p:sp>
-        <p:nvSpPr>
-          <p:cNvPr id="15" name="TextBox 14"/>
+              <a:t>Is a tie on EPE worth the added complexity?</a:t>
+            </a:r>
+          </a:p>
+        </p:txBody>
+      </p:sp>
+      <p:sp>
+        <p:nvSpPr>
+          <p:cNvPr id="11" name="TextBox 10"/>
           <p:cNvSpPr txBox="1"/>
           <p:nvPr/>
         </p:nvSpPr>
         <p:spPr>
           <a:xfrm>
-            <a:off x="5029200" y="5184648"/>
-            <a:ext cx="6492240" cy="822960"/>
+            <a:off x="868680" y="5376672"/>
+            <a:ext cx="10607040" cy="594360"/>
           </a:xfrm>
           <a:prstGeom prst="rect">
             <a:avLst/>
@@ -9046,18 +9000,18 @@
             <a:r>
               <a:rPr sz="1100" b="0">
                 <a:solidFill>
-                  <a:srgbClr val="1A1A1A"/>
-                </a:solidFill>
-                <a:latin typeface="Georgia"/>
-              </a:rPr>
-              <a:t>A registration demonstration on lab data would test the actual use case.</a:t>
-            </a:r>
-          </a:p>
-        </p:txBody>
-      </p:sp>
-      <p:sp>
-        <p:nvSpPr>
-          <p:cNvPr id="16" name="TextBox 15"/>
+                  <a:srgbClr val="333333"/>
+                </a:solidFill>
+                <a:latin typeface="Georgia"/>
+              </a:rPr>
+              <a:t>Not on its own. It is worth it if you need queryability, cheap repeat access, or confidence values. For plain dense flow, v2 remains the better choice, and I would say so.</a:t>
+            </a:r>
+          </a:p>
+        </p:txBody>
+      </p:sp>
+      <p:sp>
+        <p:nvSpPr>
+          <p:cNvPr id="12" name="TextBox 11"/>
           <p:cNvSpPr txBox="1"/>
           <p:nvPr/>
         </p:nvSpPr>
@@ -9096,7 +9050,7 @@
       </p:sp>
       <p:sp>
         <p:nvSpPr>
-          <p:cNvPr id="17" name="TextBox 16"/>
+          <p:cNvPr id="13" name="TextBox 12"/>
           <p:cNvSpPr txBox="1"/>
           <p:nvPr/>
         </p:nvSpPr>
@@ -9129,492 +9083,6 @@
                 <a:latin typeface="Georgia"/>
               </a:rPr>
               <a:t>15</a:t>
-            </a:r>
-          </a:p>
-        </p:txBody>
-      </p:sp>
-    </p:spTree>
-  </p:cSld>
-  <p:clrMapOvr>
-    <a:masterClrMapping/>
-  </p:clrMapOvr>
-</p:sld>
-</file>
-
-<file path=ppt/slides/slide16.xml><?xml version="1.0" encoding="utf-8"?>
-<p:sld xmlns:a="http://schemas.openxmlformats.org/drawingml/2006/main" xmlns:p="http://schemas.openxmlformats.org/presentationml/2006/main" xmlns:r="http://schemas.openxmlformats.org/officeDocument/2006/relationships">
-  <p:cSld>
-    <p:spTree>
-      <p:nvGrpSpPr>
-        <p:cNvPr id="1" name=""/>
-        <p:cNvGrpSpPr/>
-        <p:nvPr/>
-      </p:nvGrpSpPr>
-      <p:grpSpPr/>
-      <p:sp>
-        <p:nvSpPr>
-          <p:cNvPr id="2" name="TextBox 1"/>
-          <p:cNvSpPr txBox="1"/>
-          <p:nvPr/>
-        </p:nvSpPr>
-        <p:spPr>
-          <a:xfrm>
-            <a:off x="685800" y="384048"/>
-            <a:ext cx="10515600" cy="274320"/>
-          </a:xfrm>
-          <a:prstGeom prst="rect">
-            <a:avLst/>
-          </a:prstGeom>
-          <a:noFill/>
-        </p:spPr>
-        <p:txBody>
-          <a:bodyPr wrap="square">
-            <a:spAutoFit/>
-          </a:bodyPr>
-          <a:lstStyle/>
-          <a:p>
-            <a:pPr algn="l">
-              <a:lnSpc>
-                <a:spcPct val="100000"/>
-              </a:lnSpc>
-            </a:pPr>
-            <a:r>
-              <a:rPr sz="1050" b="1">
-                <a:solidFill>
-                  <a:srgbClr val="333333"/>
-                </a:solidFill>
-                <a:latin typeface="Georgia"/>
-              </a:rPr>
-              <a:t>ANTICIPATED QUESTIONS</a:t>
-            </a:r>
-          </a:p>
-        </p:txBody>
-      </p:sp>
-      <p:sp>
-        <p:nvSpPr>
-          <p:cNvPr id="3" name="TextBox 2"/>
-          <p:cNvSpPr txBox="1"/>
-          <p:nvPr/>
-        </p:nvSpPr>
-        <p:spPr>
-          <a:xfrm>
-            <a:off x="667512" y="658368"/>
-            <a:ext cx="10881360" cy="731520"/>
-          </a:xfrm>
-          <a:prstGeom prst="rect">
-            <a:avLst/>
-          </a:prstGeom>
-          <a:noFill/>
-        </p:spPr>
-        <p:txBody>
-          <a:bodyPr wrap="square">
-            <a:spAutoFit/>
-          </a:bodyPr>
-          <a:lstStyle/>
-          <a:p>
-            <a:pPr algn="l">
-              <a:lnSpc>
-                <a:spcPct val="100000"/>
-              </a:lnSpc>
-            </a:pPr>
-            <a:r>
-              <a:rPr sz="2400" b="1">
-                <a:solidFill>
-                  <a:srgbClr val="1A1A1A"/>
-                </a:solidFill>
-                <a:latin typeface="Georgia"/>
-              </a:rPr>
-              <a:t/>
-            </a:r>
-          </a:p>
-        </p:txBody>
-      </p:sp>
-      <p:sp>
-        <p:nvSpPr>
-          <p:cNvPr id="4" name="TextBox 3"/>
-          <p:cNvSpPr txBox="1"/>
-          <p:nvPr/>
-        </p:nvSpPr>
-        <p:spPr>
-          <a:xfrm>
-            <a:off x="685800" y="1508760"/>
-            <a:ext cx="10881360" cy="274320"/>
-          </a:xfrm>
-          <a:prstGeom prst="rect">
-            <a:avLst/>
-          </a:prstGeom>
-          <a:noFill/>
-        </p:spPr>
-        <p:txBody>
-          <a:bodyPr wrap="square">
-            <a:spAutoFit/>
-          </a:bodyPr>
-          <a:lstStyle/>
-          <a:p>
-            <a:pPr algn="l">
-              <a:lnSpc>
-                <a:spcPct val="100000"/>
-              </a:lnSpc>
-            </a:pPr>
-            <a:r>
-              <a:rPr sz="1200" b="1">
-                <a:solidFill>
-                  <a:srgbClr val="1A1A1A"/>
-                </a:solidFill>
-                <a:latin typeface="Georgia"/>
-              </a:rPr>
-              <a:t>Why is flow defined between pixels at all?</a:t>
-            </a:r>
-          </a:p>
-        </p:txBody>
-      </p:sp>
-      <p:sp>
-        <p:nvSpPr>
-          <p:cNvPr id="5" name="TextBox 4"/>
-          <p:cNvSpPr txBox="1"/>
-          <p:nvPr/>
-        </p:nvSpPr>
-        <p:spPr>
-          <a:xfrm>
-            <a:off x="868680" y="1810512"/>
-            <a:ext cx="10607040" cy="594360"/>
-          </a:xfrm>
-          <a:prstGeom prst="rect">
-            <a:avLst/>
-          </a:prstGeom>
-          <a:noFill/>
-        </p:spPr>
-        <p:txBody>
-          <a:bodyPr wrap="square">
-            <a:spAutoFit/>
-          </a:bodyPr>
-          <a:lstStyle/>
-          <a:p>
-            <a:pPr algn="l">
-              <a:lnSpc>
-                <a:spcPct val="112000"/>
-              </a:lnSpc>
-            </a:pPr>
-            <a:r>
-              <a:rPr sz="1100" b="0">
-                <a:solidFill>
-                  <a:srgbClr val="333333"/>
-                </a:solidFill>
-                <a:latin typeface="Georgia"/>
-              </a:rPr>
-              <a:t>Motion is continuous; the pixel grid is a sampling artefact. A corner tracked to (312.7, 188.2) is a real answer, and registration consumes it directly.</a:t>
-            </a:r>
-          </a:p>
-        </p:txBody>
-      </p:sp>
-      <p:sp>
-        <p:nvSpPr>
-          <p:cNvPr id="6" name="TextBox 5"/>
-          <p:cNvSpPr txBox="1"/>
-          <p:nvPr/>
-        </p:nvSpPr>
-        <p:spPr>
-          <a:xfrm>
-            <a:off x="685800" y="2697480"/>
-            <a:ext cx="10881360" cy="274320"/>
-          </a:xfrm>
-          <a:prstGeom prst="rect">
-            <a:avLst/>
-          </a:prstGeom>
-          <a:noFill/>
-        </p:spPr>
-        <p:txBody>
-          <a:bodyPr wrap="square">
-            <a:spAutoFit/>
-          </a:bodyPr>
-          <a:lstStyle/>
-          <a:p>
-            <a:pPr algn="l">
-              <a:lnSpc>
-                <a:spcPct val="100000"/>
-              </a:lnSpc>
-            </a:pPr>
-            <a:r>
-              <a:rPr sz="1200" b="1">
-                <a:solidFill>
-                  <a:srgbClr val="1A1A1A"/>
-                </a:solidFill>
-                <a:latin typeface="Georgia"/>
-              </a:rPr>
-              <a:t>Why freeze the backbone?</a:t>
-            </a:r>
-          </a:p>
-        </p:txBody>
-      </p:sp>
-      <p:sp>
-        <p:nvSpPr>
-          <p:cNvPr id="7" name="TextBox 6"/>
-          <p:cNvSpPr txBox="1"/>
-          <p:nvPr/>
-        </p:nvSpPr>
-        <p:spPr>
-          <a:xfrm>
-            <a:off x="868680" y="2999232"/>
-            <a:ext cx="10607040" cy="594360"/>
-          </a:xfrm>
-          <a:prstGeom prst="rect">
-            <a:avLst/>
-          </a:prstGeom>
-          <a:noFill/>
-        </p:spPr>
-        <p:txBody>
-          <a:bodyPr wrap="square">
-            <a:spAutoFit/>
-          </a:bodyPr>
-          <a:lstStyle/>
-          <a:p>
-            <a:pPr algn="l">
-              <a:lnSpc>
-                <a:spcPct val="112000"/>
-              </a:lnSpc>
-            </a:pPr>
-            <a:r>
-              <a:rPr sz="1100" b="0">
-                <a:solidFill>
-                  <a:srgbClr val="333333"/>
-                </a:solidFill>
-                <a:latin typeface="Georgia"/>
-              </a:rPr>
-              <a:t>To isolate the decoder as the only variable. Unfreezing diverged at batch 4 locally and has not been retried at scale.</a:t>
-            </a:r>
-          </a:p>
-        </p:txBody>
-      </p:sp>
-      <p:sp>
-        <p:nvSpPr>
-          <p:cNvPr id="8" name="TextBox 7"/>
-          <p:cNvSpPr txBox="1"/>
-          <p:nvPr/>
-        </p:nvSpPr>
-        <p:spPr>
-          <a:xfrm>
-            <a:off x="685800" y="3886200"/>
-            <a:ext cx="10881360" cy="274320"/>
-          </a:xfrm>
-          <a:prstGeom prst="rect">
-            <a:avLst/>
-          </a:prstGeom>
-          <a:noFill/>
-        </p:spPr>
-        <p:txBody>
-          <a:bodyPr wrap="square">
-            <a:spAutoFit/>
-          </a:bodyPr>
-          <a:lstStyle/>
-          <a:p>
-            <a:pPr algn="l">
-              <a:lnSpc>
-                <a:spcPct val="100000"/>
-              </a:lnSpc>
-            </a:pPr>
-            <a:r>
-              <a:rPr sz="1200" b="1">
-                <a:solidFill>
-                  <a:srgbClr val="1A1A1A"/>
-                </a:solidFill>
-                <a:latin typeface="Georgia"/>
-              </a:rPr>
-              <a:t>Why is dense v3 slower than v2?</a:t>
-            </a:r>
-          </a:p>
-        </p:txBody>
-      </p:sp>
-      <p:sp>
-        <p:nvSpPr>
-          <p:cNvPr id="9" name="TextBox 8"/>
-          <p:cNvSpPr txBox="1"/>
-          <p:nvPr/>
-        </p:nvSpPr>
-        <p:spPr>
-          <a:xfrm>
-            <a:off x="868680" y="4187952"/>
-            <a:ext cx="10607040" cy="594360"/>
-          </a:xfrm>
-          <a:prstGeom prst="rect">
-            <a:avLst/>
-          </a:prstGeom>
-          <a:noFill/>
-        </p:spPr>
-        <p:txBody>
-          <a:bodyPr wrap="square">
-            <a:spAutoFit/>
-          </a:bodyPr>
-          <a:lstStyle/>
-          <a:p>
-            <a:pPr algn="l">
-              <a:lnSpc>
-                <a:spcPct val="112000"/>
-              </a:lnSpc>
-            </a:pPr>
-            <a:r>
-              <a:rPr sz="1100" b="0">
-                <a:solidFill>
-                  <a:srgbClr val="333333"/>
-                </a:solidFill>
-                <a:latin typeface="Georgia"/>
-              </a:rPr>
-              <a:t>v2 upsamples with one convolution that shares work across neighbouring pixels. v3 answers each query independently, giving up that sharing to gain the ability to answer only what is asked.</a:t>
-            </a:r>
-          </a:p>
-        </p:txBody>
-      </p:sp>
-      <p:sp>
-        <p:nvSpPr>
-          <p:cNvPr id="10" name="TextBox 9"/>
-          <p:cNvSpPr txBox="1"/>
-          <p:nvPr/>
-        </p:nvSpPr>
-        <p:spPr>
-          <a:xfrm>
-            <a:off x="685800" y="5074920"/>
-            <a:ext cx="10881360" cy="274320"/>
-          </a:xfrm>
-          <a:prstGeom prst="rect">
-            <a:avLst/>
-          </a:prstGeom>
-          <a:noFill/>
-        </p:spPr>
-        <p:txBody>
-          <a:bodyPr wrap="square">
-            <a:spAutoFit/>
-          </a:bodyPr>
-          <a:lstStyle/>
-          <a:p>
-            <a:pPr algn="l">
-              <a:lnSpc>
-                <a:spcPct val="100000"/>
-              </a:lnSpc>
-            </a:pPr>
-            <a:r>
-              <a:rPr sz="1200" b="1">
-                <a:solidFill>
-                  <a:srgbClr val="1A1A1A"/>
-                </a:solidFill>
-                <a:latin typeface="Georgia"/>
-              </a:rPr>
-              <a:t>Is a tie on EPE worth the added complexity?</a:t>
-            </a:r>
-          </a:p>
-        </p:txBody>
-      </p:sp>
-      <p:sp>
-        <p:nvSpPr>
-          <p:cNvPr id="11" name="TextBox 10"/>
-          <p:cNvSpPr txBox="1"/>
-          <p:nvPr/>
-        </p:nvSpPr>
-        <p:spPr>
-          <a:xfrm>
-            <a:off x="868680" y="5376672"/>
-            <a:ext cx="10607040" cy="594360"/>
-          </a:xfrm>
-          <a:prstGeom prst="rect">
-            <a:avLst/>
-          </a:prstGeom>
-          <a:noFill/>
-        </p:spPr>
-        <p:txBody>
-          <a:bodyPr wrap="square">
-            <a:spAutoFit/>
-          </a:bodyPr>
-          <a:lstStyle/>
-          <a:p>
-            <a:pPr algn="l">
-              <a:lnSpc>
-                <a:spcPct val="112000"/>
-              </a:lnSpc>
-            </a:pPr>
-            <a:r>
-              <a:rPr sz="1100" b="0">
-                <a:solidFill>
-                  <a:srgbClr val="333333"/>
-                </a:solidFill>
-                <a:latin typeface="Georgia"/>
-              </a:rPr>
-              <a:t>Not on its own. It is worth it if you need queryability, cheap repeat access, or confidence values. For plain dense flow, v2 remains the better choice, and I would say so.</a:t>
-            </a:r>
-          </a:p>
-        </p:txBody>
-      </p:sp>
-      <p:sp>
-        <p:nvSpPr>
-          <p:cNvPr id="12" name="TextBox 11"/>
-          <p:cNvSpPr txBox="1"/>
-          <p:nvPr/>
-        </p:nvSpPr>
-        <p:spPr>
-          <a:xfrm>
-            <a:off x="685800" y="6419088"/>
-            <a:ext cx="7315200" cy="274320"/>
-          </a:xfrm>
-          <a:prstGeom prst="rect">
-            <a:avLst/>
-          </a:prstGeom>
-          <a:noFill/>
-        </p:spPr>
-        <p:txBody>
-          <a:bodyPr wrap="square">
-            <a:spAutoFit/>
-          </a:bodyPr>
-          <a:lstStyle/>
-          <a:p>
-            <a:pPr algn="l">
-              <a:lnSpc>
-                <a:spcPct val="100000"/>
-              </a:lnSpc>
-            </a:pPr>
-            <a:r>
-              <a:rPr sz="900" b="0">
-                <a:solidFill>
-                  <a:srgbClr val="8A8A8A"/>
-                </a:solidFill>
-                <a:latin typeface="Georgia"/>
-              </a:rPr>
-              <a:t>NeuFlow v3, S. Raghav Srinivasan</a:t>
-            </a:r>
-          </a:p>
-        </p:txBody>
-      </p:sp>
-      <p:sp>
-        <p:nvSpPr>
-          <p:cNvPr id="13" name="TextBox 12"/>
-          <p:cNvSpPr txBox="1"/>
-          <p:nvPr/>
-        </p:nvSpPr>
-        <p:spPr>
-          <a:xfrm>
-            <a:off x="10607040" y="6419088"/>
-            <a:ext cx="1097280" cy="274320"/>
-          </a:xfrm>
-          <a:prstGeom prst="rect">
-            <a:avLst/>
-          </a:prstGeom>
-          <a:noFill/>
-        </p:spPr>
-        <p:txBody>
-          <a:bodyPr wrap="square">
-            <a:spAutoFit/>
-          </a:bodyPr>
-          <a:lstStyle/>
-          <a:p>
-            <a:pPr algn="l">
-              <a:lnSpc>
-                <a:spcPct val="100000"/>
-              </a:lnSpc>
-            </a:pPr>
-            <a:r>
-              <a:rPr sz="900" b="0">
-                <a:solidFill>
-                  <a:srgbClr val="8A8A8A"/>
-                </a:solidFill>
-                <a:latin typeface="Georgia"/>
-              </a:rPr>
-              <a:t>16</a:t>
             </a:r>
           </a:p>
         </p:txBody>
@@ -10183,7 +9651,7 @@
                 </a:solidFill>
                 <a:latin typeface="Georgia"/>
               </a:rPr>
-              <a:t>This report answers that question with measurements, including</a:t>
+              <a:t>Everything that follows is measured on held-out VKITTI2 scenes,</a:t>
             </a:r>
           </a:p>
           <a:p>
@@ -10199,7 +9667,7 @@
                 </a:solidFill>
                 <a:latin typeface="Georgia"/>
               </a:rPr>
-              <a:t>the places where the answer is no.</a:t>
+              <a:t>1,174 pairs, 460 million pixels.</a:t>
             </a:r>
           </a:p>
         </p:txBody>
@@ -12676,7 +12144,7 @@
                 </a:solidFill>
                 <a:latin typeface="Georgia"/>
               </a:rPr>
-              <a:t>METHODOLOGY</a:t>
+              <a:t>RESULTS</a:t>
             </a:r>
           </a:p>
         </p:txBody>
@@ -12715,21 +12183,45 @@
                 </a:solidFill>
                 <a:latin typeface="Georgia"/>
               </a:rPr>
-              <a:t>What I fixed before trusting any of these numbers</a:t>
-            </a:r>
-          </a:p>
-        </p:txBody>
-      </p:sp>
-      <p:sp>
-        <p:nvSpPr>
-          <p:cNvPr id="4" name="TextBox 3"/>
+              <a:t>Accuracy: the decoder costs 2.6 percent on the mean</a:t>
+            </a:r>
+          </a:p>
+        </p:txBody>
+      </p:sp>
+      <p:pic>
+        <p:nvPicPr>
+          <p:cNvPr id="4" name="Picture 3" descr="accuracy_bars.png"/>
+          <p:cNvPicPr>
+            <a:picLocks noChangeAspect="1"/>
+          </p:cNvPicPr>
+          <p:nvPr/>
+        </p:nvPicPr>
+        <p:blipFill>
+          <a:blip r:embed="rId2"/>
+          <a:stretch>
+            <a:fillRect/>
+          </a:stretch>
+        </p:blipFill>
+        <p:spPr>
+          <a:xfrm>
+            <a:off x="731520" y="1463040"/>
+            <a:ext cx="6675120" cy="3675066"/>
+          </a:xfrm>
+          <a:prstGeom prst="rect">
+            <a:avLst/>
+          </a:prstGeom>
+        </p:spPr>
+      </p:pic>
+      <p:sp>
+        <p:nvSpPr>
+          <p:cNvPr id="5" name="TextBox 4"/>
           <p:cNvSpPr txBox="1"/>
           <p:nvPr/>
         </p:nvSpPr>
         <p:spPr>
           <a:xfrm>
-            <a:off x="685800" y="1508760"/>
-            <a:ext cx="10881360" cy="365760"/>
+            <a:off x="7680960" y="1600200"/>
+            <a:ext cx="3931920" cy="3291840"/>
           </a:xfrm>
           <a:prstGeom prst="rect">
             <a:avLst/>
@@ -12744,157 +12236,314 @@
           <a:p>
             <a:pPr algn="l">
               <a:lnSpc>
-                <a:spcPct val="100000"/>
-              </a:lnSpc>
-            </a:pPr>
-            <a:r>
-              <a:rPr sz="1200" b="0">
-                <a:solidFill>
-                  <a:srgbClr val="1A1A1A"/>
-                </a:solidFill>
-                <a:latin typeface="Georgia"/>
-              </a:rPr>
-              <a:t>An earlier version of this deck reported better results. Those numbers were wrong. Three defects:</a:t>
-            </a:r>
-          </a:p>
-        </p:txBody>
-      </p:sp>
-      <p:sp>
-        <p:nvSpPr>
-          <p:cNvPr id="5" name="TextBox 4"/>
-          <p:cNvSpPr txBox="1"/>
-          <p:nvPr/>
-        </p:nvSpPr>
-        <p:spPr>
-          <a:xfrm>
-            <a:off x="685800" y="2057400"/>
-            <a:ext cx="4846320" cy="237744"/>
-          </a:xfrm>
-          <a:prstGeom prst="rect">
-            <a:avLst/>
-          </a:prstGeom>
-          <a:noFill/>
-        </p:spPr>
-        <p:txBody>
-          <a:bodyPr wrap="square">
-            <a:spAutoFit/>
-          </a:bodyPr>
-          <a:lstStyle/>
-          <a:p>
-            <a:pPr algn="l">
-              <a:lnSpc>
-                <a:spcPct val="100000"/>
-              </a:lnSpc>
-            </a:pPr>
-            <a:r>
-              <a:rPr sz="1050" b="1">
-                <a:solidFill>
-                  <a:srgbClr val="1A1A1A"/>
-                </a:solidFill>
-                <a:latin typeface="Georgia"/>
-              </a:rPr>
-              <a:t>Defect</a:t>
-            </a:r>
-          </a:p>
-        </p:txBody>
-      </p:sp>
-      <p:sp>
-        <p:nvSpPr>
-          <p:cNvPr id="6" name="TextBox 5"/>
-          <p:cNvSpPr txBox="1"/>
-          <p:nvPr/>
-        </p:nvSpPr>
-        <p:spPr>
-          <a:xfrm>
-            <a:off x="5532120" y="2057400"/>
-            <a:ext cx="3200400" cy="237744"/>
-          </a:xfrm>
-          <a:prstGeom prst="rect">
-            <a:avLst/>
-          </a:prstGeom>
-          <a:noFill/>
-        </p:spPr>
-        <p:txBody>
-          <a:bodyPr wrap="square">
-            <a:spAutoFit/>
-          </a:bodyPr>
-          <a:lstStyle/>
-          <a:p>
-            <a:pPr algn="r">
-              <a:lnSpc>
-                <a:spcPct val="100000"/>
-              </a:lnSpc>
-            </a:pPr>
-            <a:r>
-              <a:rPr sz="1050" b="1">
-                <a:solidFill>
-                  <a:srgbClr val="1A1A1A"/>
-                </a:solidFill>
-                <a:latin typeface="Georgia"/>
-              </a:rPr>
-              <a:t>Effect</a:t>
-            </a:r>
-          </a:p>
-        </p:txBody>
-      </p:sp>
-      <p:sp>
-        <p:nvSpPr>
-          <p:cNvPr id="7" name="TextBox 6"/>
-          <p:cNvSpPr txBox="1"/>
-          <p:nvPr/>
-        </p:nvSpPr>
-        <p:spPr>
-          <a:xfrm>
-            <a:off x="8732520" y="2057400"/>
-            <a:ext cx="2834640" cy="237744"/>
-          </a:xfrm>
-          <a:prstGeom prst="rect">
-            <a:avLst/>
-          </a:prstGeom>
-          <a:noFill/>
-        </p:spPr>
-        <p:txBody>
-          <a:bodyPr wrap="square">
-            <a:spAutoFit/>
-          </a:bodyPr>
-          <a:lstStyle/>
-          <a:p>
-            <a:pPr algn="r">
-              <a:lnSpc>
-                <a:spcPct val="100000"/>
-              </a:lnSpc>
-            </a:pPr>
-            <a:r>
-              <a:rPr sz="1050" b="1">
-                <a:solidFill>
-                  <a:srgbClr val="1A1A1A"/>
-                </a:solidFill>
-                <a:latin typeface="Georgia"/>
-              </a:rPr>
-              <a:t>Fix</a:t>
-            </a:r>
-          </a:p>
-        </p:txBody>
-      </p:sp>
-      <p:sp>
-        <p:nvSpPr>
-          <p:cNvPr id="8" name="Rectangle 7"/>
+                <a:spcPct val="118000"/>
+              </a:lnSpc>
+            </a:pPr>
+            <a:r>
+              <a:rPr sz="1150" b="0">
+                <a:solidFill>
+                  <a:srgbClr val="1A1A1A"/>
+                </a:solidFill>
+                <a:latin typeface="Georgia"/>
+              </a:rPr>
+              <a:t>Every v3 configuration sits above v2.</a:t>
+            </a:r>
+          </a:p>
+          <a:p>
+            <a:pPr algn="l">
+              <a:lnSpc>
+                <a:spcPct val="118000"/>
+              </a:lnSpc>
+            </a:pPr>
+            <a:r>
+              <a:rPr sz="1150" b="0">
+                <a:solidFill>
+                  <a:srgbClr val="1A1A1A"/>
+                </a:solidFill>
+                <a:latin typeface="Georgia"/>
+              </a:rPr>
+              <a:t/>
+            </a:r>
+          </a:p>
+          <a:p>
+            <a:pPr algn="l">
+              <a:lnSpc>
+                <a:spcPct val="118000"/>
+              </a:lnSpc>
+            </a:pPr>
+            <a:r>
+              <a:rPr sz="1150" b="0">
+                <a:solidFill>
+                  <a:srgbClr val="1A1A1A"/>
+                </a:solidFill>
+                <a:latin typeface="Georgia"/>
+              </a:rPr>
+              <a:t>Best: 2.384 against v2 at 2.324, so 2.6%</a:t>
+            </a:r>
+          </a:p>
+          <a:p>
+            <a:pPr algn="l">
+              <a:lnSpc>
+                <a:spcPct val="118000"/>
+              </a:lnSpc>
+            </a:pPr>
+            <a:r>
+              <a:rPr sz="1150" b="0">
+                <a:solidFill>
+                  <a:srgbClr val="1A1A1A"/>
+                </a:solidFill>
+                <a:latin typeface="Georgia"/>
+              </a:rPr>
+              <a:t>worse on mean error and 1.5 points worse</a:t>
+            </a:r>
+          </a:p>
+          <a:p>
+            <a:pPr algn="l">
+              <a:lnSpc>
+                <a:spcPct val="118000"/>
+              </a:lnSpc>
+            </a:pPr>
+            <a:r>
+              <a:rPr sz="1150" b="0">
+                <a:solidFill>
+                  <a:srgbClr val="1A1A1A"/>
+                </a:solidFill>
+                <a:latin typeface="Georgia"/>
+              </a:rPr>
+              <a:t>on 1-pixel accuracy.</a:t>
+            </a:r>
+          </a:p>
+          <a:p>
+            <a:pPr algn="l">
+              <a:lnSpc>
+                <a:spcPct val="118000"/>
+              </a:lnSpc>
+            </a:pPr>
+            <a:r>
+              <a:rPr sz="1150" b="0">
+                <a:solidFill>
+                  <a:srgbClr val="1A1A1A"/>
+                </a:solidFill>
+                <a:latin typeface="Georgia"/>
+              </a:rPr>
+              <a:t/>
+            </a:r>
+          </a:p>
+          <a:p>
+            <a:pPr algn="l">
+              <a:lnSpc>
+                <a:spcPct val="118000"/>
+              </a:lnSpc>
+            </a:pPr>
+            <a:r>
+              <a:rPr sz="1150" b="0">
+                <a:solidFill>
+                  <a:srgbClr val="1A1A1A"/>
+                </a:solidFill>
+                <a:latin typeface="Georgia"/>
+              </a:rPr>
+              <a:t>Like-for-like, trained on FlyingChairs only</a:t>
+            </a:r>
+          </a:p>
+          <a:p>
+            <a:pPr algn="l">
+              <a:lnSpc>
+                <a:spcPct val="118000"/>
+              </a:lnSpc>
+            </a:pPr>
+            <a:r>
+              <a:rPr sz="1150" b="0">
+                <a:solidFill>
+                  <a:srgbClr val="1A1A1A"/>
+                </a:solidFill>
+                <a:latin typeface="Georgia"/>
+              </a:rPr>
+              <a:t>as v2 was, it is 2.500, or 7.6% behind.</a:t>
+            </a:r>
+          </a:p>
+          <a:p>
+            <a:pPr algn="l">
+              <a:lnSpc>
+                <a:spcPct val="118000"/>
+              </a:lnSpc>
+            </a:pPr>
+            <a:r>
+              <a:rPr sz="1150" b="0">
+                <a:solidFill>
+                  <a:srgbClr val="1A1A1A"/>
+                </a:solidFill>
+                <a:latin typeface="Georgia"/>
+              </a:rPr>
+              <a:t/>
+            </a:r>
+          </a:p>
+          <a:p>
+            <a:pPr algn="l">
+              <a:lnSpc>
+                <a:spcPct val="118000"/>
+              </a:lnSpc>
+            </a:pPr>
+            <a:r>
+              <a:rPr sz="1150" b="0">
+                <a:solidFill>
+                  <a:srgbClr val="1A1A1A"/>
+                </a:solidFill>
+                <a:latin typeface="Georgia"/>
+              </a:rPr>
+              <a:t>The implicit decoder is less accurate than</a:t>
+            </a:r>
+          </a:p>
+          <a:p>
+            <a:pPr algn="l">
+              <a:lnSpc>
+                <a:spcPct val="118000"/>
+              </a:lnSpc>
+            </a:pPr>
+            <a:r>
+              <a:rPr sz="1150" b="0">
+                <a:solidFill>
+                  <a:srgbClr val="1A1A1A"/>
+                </a:solidFill>
+                <a:latin typeface="Georgia"/>
+              </a:rPr>
+              <a:t>the convex upsampler it replaces. The cause</a:t>
+            </a:r>
+          </a:p>
+          <a:p>
+            <a:pPr algn="l">
+              <a:lnSpc>
+                <a:spcPct val="118000"/>
+              </a:lnSpc>
+            </a:pPr>
+            <a:r>
+              <a:rPr sz="1150" b="0">
+                <a:solidFill>
+                  <a:srgbClr val="1A1A1A"/>
+                </a:solidFill>
+                <a:latin typeface="Georgia"/>
+              </a:rPr>
+              <a:t>is diagnosed and has a proposed fix.</a:t>
+            </a:r>
+          </a:p>
+          <a:p>
+            <a:pPr algn="l">
+              <a:lnSpc>
+                <a:spcPct val="118000"/>
+              </a:lnSpc>
+            </a:pPr>
+            <a:r>
+              <a:rPr sz="1150" b="0">
+                <a:solidFill>
+                  <a:srgbClr val="1A1A1A"/>
+                </a:solidFill>
+                <a:latin typeface="Georgia"/>
+              </a:rPr>
+              <a:t/>
+            </a:r>
+          </a:p>
+          <a:p>
+            <a:pPr algn="l">
+              <a:lnSpc>
+                <a:spcPct val="118000"/>
+              </a:lnSpc>
+            </a:pPr>
+            <a:r>
+              <a:rPr sz="1150" b="0">
+                <a:solidFill>
+                  <a:srgbClr val="1A1A1A"/>
+                </a:solidFill>
+                <a:latin typeface="Georgia"/>
+              </a:rPr>
+              <a:t>Mean error over every pixel is also the</a:t>
+            </a:r>
+          </a:p>
+          <a:p>
+            <a:pPr algn="l">
+              <a:lnSpc>
+                <a:spcPct val="118000"/>
+              </a:lnSpc>
+            </a:pPr>
+            <a:r>
+              <a:rPr sz="1150" b="0">
+                <a:solidFill>
+                  <a:srgbClr val="1A1A1A"/>
+                </a:solidFill>
+                <a:latin typeface="Georgia"/>
+              </a:rPr>
+              <a:t>case the decoder is least suited to. Two</a:t>
+            </a:r>
+          </a:p>
+          <a:p>
+            <a:pPr algn="l">
+              <a:lnSpc>
+                <a:spcPct val="118000"/>
+              </a:lnSpc>
+            </a:pPr>
+            <a:r>
+              <a:rPr sz="1150" b="0">
+                <a:solidFill>
+                  <a:srgbClr val="1A1A1A"/>
+                </a:solidFill>
+                <a:latin typeface="Georgia"/>
+              </a:rPr>
+              <a:t>slides on, the same model is twice as</a:t>
+            </a:r>
+          </a:p>
+          <a:p>
+            <a:pPr algn="l">
+              <a:lnSpc>
+                <a:spcPct val="118000"/>
+              </a:lnSpc>
+            </a:pPr>
+            <a:r>
+              <a:rPr sz="1150" b="0">
+                <a:solidFill>
+                  <a:srgbClr val="1A1A1A"/>
+                </a:solidFill>
+                <a:latin typeface="Georgia"/>
+              </a:rPr>
+              <a:t>accurate as v2 over 80 percent of the</a:t>
+            </a:r>
+          </a:p>
+          <a:p>
+            <a:pPr algn="l">
+              <a:lnSpc>
+                <a:spcPct val="118000"/>
+              </a:lnSpc>
+            </a:pPr>
+            <a:r>
+              <a:rPr sz="1150" b="0">
+                <a:solidFill>
+                  <a:srgbClr val="1A1A1A"/>
+                </a:solidFill>
+                <a:latin typeface="Georgia"/>
+              </a:rPr>
+              <a:t>frame, once it is allowed to abstain.</a:t>
+            </a:r>
+          </a:p>
+        </p:txBody>
+      </p:sp>
+      <p:sp>
+        <p:nvSpPr>
+          <p:cNvPr id="6" name="Rounded Rectangle 5"/>
           <p:cNvSpPr/>
           <p:nvPr/>
         </p:nvSpPr>
         <p:spPr>
           <a:xfrm>
-            <a:off x="685800" y="2295144"/>
-            <a:ext cx="10881360" cy="9525"/>
-          </a:xfrm>
-          <a:prstGeom prst="rect">
+            <a:off x="7680960" y="4983480"/>
+            <a:ext cx="3931920" cy="868680"/>
+          </a:xfrm>
+          <a:prstGeom prst="roundRect">
             <a:avLst/>
           </a:prstGeom>
           <a:solidFill>
-            <a:srgbClr val="8A8A8A"/>
+            <a:srgbClr val="EFEFEF"/>
           </a:solidFill>
-          <a:ln>
-            <a:noFill/>
+          <a:ln w="9525">
+            <a:solidFill>
+              <a:srgbClr val="8A8A8A"/>
+            </a:solidFill>
           </a:ln>
           <a:effectLst/>
         </p:spPr>
@@ -12913,23 +12562,56 @@
           </a:fontRef>
         </p:style>
         <p:txBody>
-          <a:bodyPr rtlCol="0" anchor="ctr"/>
+          <a:bodyPr rtlCol="0" anchor="ctr" wrap="square" lIns="73152" rIns="73152"/>
           <a:lstStyle/>
           <a:p>
             <a:pPr algn="ctr"/>
-          </a:p>
-        </p:txBody>
-      </p:sp>
-      <p:sp>
-        <p:nvSpPr>
-          <p:cNvPr id="9" name="TextBox 8"/>
+            <a:r>
+              <a:rPr sz="1050" b="0">
+                <a:solidFill>
+                  <a:srgbClr val="1A1A1A"/>
+                </a:solidFill>
+                <a:latin typeface="Georgia"/>
+              </a:rPr>
+              <a:t>Front end verified bit-identical to v2 on all</a:t>
+            </a:r>
+          </a:p>
+          <a:p>
+            <a:pPr algn="ctr"/>
+            <a:r>
+              <a:rPr sz="1050" b="0">
+                <a:solidFill>
+                  <a:srgbClr val="1A1A1A"/>
+                </a:solidFill>
+                <a:latin typeface="Georgia"/>
+              </a:rPr>
+              <a:t>137 shared tensors, so this isolates the</a:t>
+            </a:r>
+          </a:p>
+          <a:p>
+            <a:pPr algn="ctr"/>
+            <a:r>
+              <a:rPr sz="1050" b="0">
+                <a:solidFill>
+                  <a:srgbClr val="1A1A1A"/>
+                </a:solidFill>
+                <a:latin typeface="Georgia"/>
+              </a:rPr>
+              <a:t>decoder and nothing else.</a:t>
+            </a:r>
+          </a:p>
+        </p:txBody>
+      </p:sp>
+      <p:sp>
+        <p:nvSpPr>
+          <p:cNvPr id="7" name="TextBox 6"/>
           <p:cNvSpPr txBox="1"/>
           <p:nvPr/>
         </p:nvSpPr>
         <p:spPr>
           <a:xfrm>
-            <a:off x="685800" y="2331720"/>
-            <a:ext cx="4846320" cy="237744"/>
+            <a:off x="685800" y="6419088"/>
+            <a:ext cx="7315200" cy="274320"/>
           </a:xfrm>
           <a:prstGeom prst="rect">
             <a:avLst/>
@@ -12948,1009 +12630,6 @@
               </a:lnSpc>
             </a:pPr>
             <a:r>
-              <a:rPr sz="1050" b="0">
-                <a:solidFill>
-                  <a:srgbClr val="1A1A1A"/>
-                </a:solidFill>
-                <a:latin typeface="Georgia"/>
-              </a:rPr>
-              <a:t>Train/test leak: VKITTI2 Scene18 and 20</a:t>
-            </a:r>
-          </a:p>
-        </p:txBody>
-      </p:sp>
-      <p:sp>
-        <p:nvSpPr>
-          <p:cNvPr id="10" name="TextBox 9"/>
-          <p:cNvSpPr txBox="1"/>
-          <p:nvPr/>
-        </p:nvSpPr>
-        <p:spPr>
-          <a:xfrm>
-            <a:off x="5532120" y="2331720"/>
-            <a:ext cx="3200400" cy="237744"/>
-          </a:xfrm>
-          <a:prstGeom prst="rect">
-            <a:avLst/>
-          </a:prstGeom>
-          <a:noFill/>
-        </p:spPr>
-        <p:txBody>
-          <a:bodyPr wrap="square">
-            <a:spAutoFit/>
-          </a:bodyPr>
-          <a:lstStyle/>
-          <a:p>
-            <a:pPr algn="r">
-              <a:lnSpc>
-                <a:spcPct val="100000"/>
-              </a:lnSpc>
-            </a:pPr>
-            <a:r>
-              <a:rPr sz="1050" b="0">
-                <a:solidFill>
-                  <a:srgbClr val="1A1A1A"/>
-                </a:solidFill>
-                <a:latin typeface="Georgia"/>
-              </a:rPr>
-              <a:t>models trained on the</a:t>
-            </a:r>
-          </a:p>
-        </p:txBody>
-      </p:sp>
-      <p:sp>
-        <p:nvSpPr>
-          <p:cNvPr id="11" name="TextBox 10"/>
-          <p:cNvSpPr txBox="1"/>
-          <p:nvPr/>
-        </p:nvSpPr>
-        <p:spPr>
-          <a:xfrm>
-            <a:off x="8732520" y="2331720"/>
-            <a:ext cx="2834640" cy="237744"/>
-          </a:xfrm>
-          <a:prstGeom prst="rect">
-            <a:avLst/>
-          </a:prstGeom>
-          <a:noFill/>
-        </p:spPr>
-        <p:txBody>
-          <a:bodyPr wrap="square">
-            <a:spAutoFit/>
-          </a:bodyPr>
-          <a:lstStyle/>
-          <a:p>
-            <a:pPr algn="r">
-              <a:lnSpc>
-                <a:spcPct val="100000"/>
-              </a:lnSpc>
-            </a:pPr>
-            <a:r>
-              <a:rPr sz="1050" b="0">
-                <a:solidFill>
-                  <a:srgbClr val="1A1A1A"/>
-                </a:solidFill>
-                <a:latin typeface="Georgia"/>
-              </a:rPr>
-              <a:t>val scenes excluded;</a:t>
-            </a:r>
-          </a:p>
-        </p:txBody>
-      </p:sp>
-      <p:sp>
-        <p:nvSpPr>
-          <p:cNvPr id="12" name="TextBox 11"/>
-          <p:cNvSpPr txBox="1"/>
-          <p:nvPr/>
-        </p:nvSpPr>
-        <p:spPr>
-          <a:xfrm>
-            <a:off x="685800" y="2606039"/>
-            <a:ext cx="4846320" cy="237744"/>
-          </a:xfrm>
-          <a:prstGeom prst="rect">
-            <a:avLst/>
-          </a:prstGeom>
-          <a:noFill/>
-        </p:spPr>
-        <p:txBody>
-          <a:bodyPr wrap="square">
-            <a:spAutoFit/>
-          </a:bodyPr>
-          <a:lstStyle/>
-          <a:p>
-            <a:pPr algn="l">
-              <a:lnSpc>
-                <a:spcPct val="100000"/>
-              </a:lnSpc>
-            </a:pPr>
-            <a:r>
-              <a:rPr sz="1050" b="0">
-                <a:solidFill>
-                  <a:srgbClr val="1A1A1A"/>
-                </a:solidFill>
-                <a:latin typeface="Georgia"/>
-              </a:rPr>
-              <a:t>were in both training and evaluation</a:t>
-            </a:r>
-          </a:p>
-        </p:txBody>
-      </p:sp>
-      <p:sp>
-        <p:nvSpPr>
-          <p:cNvPr id="13" name="TextBox 12"/>
-          <p:cNvSpPr txBox="1"/>
-          <p:nvPr/>
-        </p:nvSpPr>
-        <p:spPr>
-          <a:xfrm>
-            <a:off x="5532120" y="2606039"/>
-            <a:ext cx="3200400" cy="237744"/>
-          </a:xfrm>
-          <a:prstGeom prst="rect">
-            <a:avLst/>
-          </a:prstGeom>
-          <a:noFill/>
-        </p:spPr>
-        <p:txBody>
-          <a:bodyPr wrap="square">
-            <a:spAutoFit/>
-          </a:bodyPr>
-          <a:lstStyle/>
-          <a:p>
-            <a:pPr algn="r">
-              <a:lnSpc>
-                <a:spcPct val="100000"/>
-              </a:lnSpc>
-            </a:pPr>
-            <a:r>
-              <a:rPr sz="1050" b="0">
-                <a:solidFill>
-                  <a:srgbClr val="1A1A1A"/>
-                </a:solidFill>
-                <a:latin typeface="Georgia"/>
-              </a:rPr>
-              <a:t>frames they were scored on</a:t>
-            </a:r>
-          </a:p>
-        </p:txBody>
-      </p:sp>
-      <p:sp>
-        <p:nvSpPr>
-          <p:cNvPr id="14" name="TextBox 13"/>
-          <p:cNvSpPr txBox="1"/>
-          <p:nvPr/>
-        </p:nvSpPr>
-        <p:spPr>
-          <a:xfrm>
-            <a:off x="8732520" y="2606039"/>
-            <a:ext cx="2834640" cy="237744"/>
-          </a:xfrm>
-          <a:prstGeom prst="rect">
-            <a:avLst/>
-          </a:prstGeom>
-          <a:noFill/>
-        </p:spPr>
-        <p:txBody>
-          <a:bodyPr wrap="square">
-            <a:spAutoFit/>
-          </a:bodyPr>
-          <a:lstStyle/>
-          <a:p>
-            <a:pPr algn="r">
-              <a:lnSpc>
-                <a:spcPct val="100000"/>
-              </a:lnSpc>
-            </a:pPr>
-            <a:r>
-              <a:rPr sz="1050" b="0">
-                <a:solidFill>
-                  <a:srgbClr val="1A1A1A"/>
-                </a:solidFill>
-                <a:latin typeface="Georgia"/>
-              </a:rPr>
-              <a:t>checked at pair and frame level</a:t>
-            </a:r>
-          </a:p>
-        </p:txBody>
-      </p:sp>
-      <p:sp>
-        <p:nvSpPr>
-          <p:cNvPr id="15" name="TextBox 14"/>
-          <p:cNvSpPr txBox="1"/>
-          <p:nvPr/>
-        </p:nvSpPr>
-        <p:spPr>
-          <a:xfrm>
-            <a:off x="685800" y="2880359"/>
-            <a:ext cx="4846320" cy="237744"/>
-          </a:xfrm>
-          <a:prstGeom prst="rect">
-            <a:avLst/>
-          </a:prstGeom>
-          <a:noFill/>
-        </p:spPr>
-        <p:txBody>
-          <a:bodyPr wrap="square">
-            <a:spAutoFit/>
-          </a:bodyPr>
-          <a:lstStyle/>
-          <a:p>
-            <a:pPr algn="l">
-              <a:lnSpc>
-                <a:spcPct val="100000"/>
-              </a:lnSpc>
-            </a:pPr>
-            <a:r>
-              <a:rPr sz="1050" b="0">
-                <a:solidFill>
-                  <a:srgbClr val="1A1A1A"/>
-                </a:solidFill>
-                <a:latin typeface="Georgia"/>
-              </a:rPr>
-              <a:t/>
-            </a:r>
-          </a:p>
-        </p:txBody>
-      </p:sp>
-      <p:sp>
-        <p:nvSpPr>
-          <p:cNvPr id="16" name="TextBox 15"/>
-          <p:cNvSpPr txBox="1"/>
-          <p:nvPr/>
-        </p:nvSpPr>
-        <p:spPr>
-          <a:xfrm>
-            <a:off x="5532120" y="2880359"/>
-            <a:ext cx="3200400" cy="237744"/>
-          </a:xfrm>
-          <a:prstGeom prst="rect">
-            <a:avLst/>
-          </a:prstGeom>
-          <a:noFill/>
-        </p:spPr>
-        <p:txBody>
-          <a:bodyPr wrap="square">
-            <a:spAutoFit/>
-          </a:bodyPr>
-          <a:lstStyle/>
-          <a:p>
-            <a:pPr algn="r">
-              <a:lnSpc>
-                <a:spcPct val="100000"/>
-              </a:lnSpc>
-            </a:pPr>
-            <a:r>
-              <a:rPr sz="1050" b="0">
-                <a:solidFill>
-                  <a:srgbClr val="1A1A1A"/>
-                </a:solidFill>
-                <a:latin typeface="Georgia"/>
-              </a:rPr>
-              <a:t/>
-            </a:r>
-          </a:p>
-        </p:txBody>
-      </p:sp>
-      <p:sp>
-        <p:nvSpPr>
-          <p:cNvPr id="17" name="TextBox 16"/>
-          <p:cNvSpPr txBox="1"/>
-          <p:nvPr/>
-        </p:nvSpPr>
-        <p:spPr>
-          <a:xfrm>
-            <a:off x="8732520" y="2880359"/>
-            <a:ext cx="2834640" cy="237744"/>
-          </a:xfrm>
-          <a:prstGeom prst="rect">
-            <a:avLst/>
-          </a:prstGeom>
-          <a:noFill/>
-        </p:spPr>
-        <p:txBody>
-          <a:bodyPr wrap="square">
-            <a:spAutoFit/>
-          </a:bodyPr>
-          <a:lstStyle/>
-          <a:p>
-            <a:pPr algn="r">
-              <a:lnSpc>
-                <a:spcPct val="100000"/>
-              </a:lnSpc>
-            </a:pPr>
-            <a:r>
-              <a:rPr sz="1050" b="0">
-                <a:solidFill>
-                  <a:srgbClr val="1A1A1A"/>
-                </a:solidFill>
-                <a:latin typeface="Georgia"/>
-              </a:rPr>
-              <a:t/>
-            </a:r>
-          </a:p>
-        </p:txBody>
-      </p:sp>
-      <p:sp>
-        <p:nvSpPr>
-          <p:cNvPr id="18" name="TextBox 17"/>
-          <p:cNvSpPr txBox="1"/>
-          <p:nvPr/>
-        </p:nvSpPr>
-        <p:spPr>
-          <a:xfrm>
-            <a:off x="685800" y="3154679"/>
-            <a:ext cx="4846320" cy="237744"/>
-          </a:xfrm>
-          <a:prstGeom prst="rect">
-            <a:avLst/>
-          </a:prstGeom>
-          <a:noFill/>
-        </p:spPr>
-        <p:txBody>
-          <a:bodyPr wrap="square">
-            <a:spAutoFit/>
-          </a:bodyPr>
-          <a:lstStyle/>
-          <a:p>
-            <a:pPr algn="l">
-              <a:lnSpc>
-                <a:spcPct val="100000"/>
-              </a:lnSpc>
-            </a:pPr>
-            <a:r>
-              <a:rPr sz="1050" b="0">
-                <a:solidFill>
-                  <a:srgbClr val="1A1A1A"/>
-                </a:solidFill>
-                <a:latin typeface="Georgia"/>
-              </a:rPr>
-              <a:t>BatchNorm updated running statistics</a:t>
-            </a:r>
-          </a:p>
-        </p:txBody>
-      </p:sp>
-      <p:sp>
-        <p:nvSpPr>
-          <p:cNvPr id="19" name="TextBox 18"/>
-          <p:cNvSpPr txBox="1"/>
-          <p:nvPr/>
-        </p:nvSpPr>
-        <p:spPr>
-          <a:xfrm>
-            <a:off x="5532120" y="3154679"/>
-            <a:ext cx="3200400" cy="237744"/>
-          </a:xfrm>
-          <a:prstGeom prst="rect">
-            <a:avLst/>
-          </a:prstGeom>
-          <a:noFill/>
-        </p:spPr>
-        <p:txBody>
-          <a:bodyPr wrap="square">
-            <a:spAutoFit/>
-          </a:bodyPr>
-          <a:lstStyle/>
-          <a:p>
-            <a:pPr algn="r">
-              <a:lnSpc>
-                <a:spcPct val="100000"/>
-              </a:lnSpc>
-            </a:pPr>
-            <a:r>
-              <a:rPr sz="1050" b="0">
-                <a:solidFill>
-                  <a:srgbClr val="1A1A1A"/>
-                </a:solidFill>
-                <a:latin typeface="Georgia"/>
-              </a:rPr>
-              <a:t>the "frozen" backbone drifted</a:t>
-            </a:r>
-          </a:p>
-        </p:txBody>
-      </p:sp>
-      <p:sp>
-        <p:nvSpPr>
-          <p:cNvPr id="20" name="TextBox 19"/>
-          <p:cNvSpPr txBox="1"/>
-          <p:nvPr/>
-        </p:nvSpPr>
-        <p:spPr>
-          <a:xfrm>
-            <a:off x="8732520" y="3154679"/>
-            <a:ext cx="2834640" cy="237744"/>
-          </a:xfrm>
-          <a:prstGeom prst="rect">
-            <a:avLst/>
-          </a:prstGeom>
-          <a:noFill/>
-        </p:spPr>
-        <p:txBody>
-          <a:bodyPr wrap="square">
-            <a:spAutoFit/>
-          </a:bodyPr>
-          <a:lstStyle/>
-          <a:p>
-            <a:pPr algn="r">
-              <a:lnSpc>
-                <a:spcPct val="100000"/>
-              </a:lnSpc>
-            </a:pPr>
-            <a:r>
-              <a:rPr sz="1050" b="0">
-                <a:solidFill>
-                  <a:srgbClr val="1A1A1A"/>
-                </a:solidFill>
-                <a:latin typeface="Georgia"/>
-              </a:rPr>
-              <a:t>BN held in eval mode;</a:t>
-            </a:r>
-          </a:p>
-        </p:txBody>
-      </p:sp>
-      <p:sp>
-        <p:nvSpPr>
-          <p:cNvPr id="21" name="TextBox 20"/>
-          <p:cNvSpPr txBox="1"/>
-          <p:nvPr/>
-        </p:nvSpPr>
-        <p:spPr>
-          <a:xfrm>
-            <a:off x="685800" y="3428999"/>
-            <a:ext cx="4846320" cy="237744"/>
-          </a:xfrm>
-          <a:prstGeom prst="rect">
-            <a:avLst/>
-          </a:prstGeom>
-          <a:noFill/>
-        </p:spPr>
-        <p:txBody>
-          <a:bodyPr wrap="square">
-            <a:spAutoFit/>
-          </a:bodyPr>
-          <a:lstStyle/>
-          <a:p>
-            <a:pPr algn="l">
-              <a:lnSpc>
-                <a:spcPct val="100000"/>
-              </a:lnSpc>
-            </a:pPr>
-            <a:r>
-              <a:rPr sz="1050" b="0">
-                <a:solidFill>
-                  <a:srgbClr val="1A1A1A"/>
-                </a:solidFill>
-                <a:latin typeface="Georgia"/>
-              </a:rPr>
-              <a:t>in train mode despite requires_grad=False</a:t>
-            </a:r>
-          </a:p>
-        </p:txBody>
-      </p:sp>
-      <p:sp>
-        <p:nvSpPr>
-          <p:cNvPr id="22" name="TextBox 21"/>
-          <p:cNvSpPr txBox="1"/>
-          <p:nvPr/>
-        </p:nvSpPr>
-        <p:spPr>
-          <a:xfrm>
-            <a:off x="5532120" y="3428999"/>
-            <a:ext cx="3200400" cy="237744"/>
-          </a:xfrm>
-          <a:prstGeom prst="rect">
-            <a:avLst/>
-          </a:prstGeom>
-          <a:noFill/>
-        </p:spPr>
-        <p:txBody>
-          <a:bodyPr wrap="square">
-            <a:spAutoFit/>
-          </a:bodyPr>
-          <a:lstStyle/>
-          <a:p>
-            <a:pPr algn="r">
-              <a:lnSpc>
-                <a:spcPct val="100000"/>
-              </a:lnSpc>
-            </a:pPr>
-            <a:r>
-              <a:rPr sz="1050" b="0">
-                <a:solidFill>
-                  <a:srgbClr val="1A1A1A"/>
-                </a:solidFill>
-                <a:latin typeface="Georgia"/>
-              </a:rPr>
-              <a:t>0.35 px, 7x the effect studied</a:t>
-            </a:r>
-          </a:p>
-        </p:txBody>
-      </p:sp>
-      <p:sp>
-        <p:nvSpPr>
-          <p:cNvPr id="23" name="TextBox 22"/>
-          <p:cNvSpPr txBox="1"/>
-          <p:nvPr/>
-        </p:nvSpPr>
-        <p:spPr>
-          <a:xfrm>
-            <a:off x="8732520" y="3428999"/>
-            <a:ext cx="2834640" cy="237744"/>
-          </a:xfrm>
-          <a:prstGeom prst="rect">
-            <a:avLst/>
-          </a:prstGeom>
-          <a:noFill/>
-        </p:spPr>
-        <p:txBody>
-          <a:bodyPr wrap="square">
-            <a:spAutoFit/>
-          </a:bodyPr>
-          <a:lstStyle/>
-          <a:p>
-            <a:pPr algn="r">
-              <a:lnSpc>
-                <a:spcPct val="100000"/>
-              </a:lnSpc>
-            </a:pPr>
-            <a:r>
-              <a:rPr sz="1050" b="0">
-                <a:solidFill>
-                  <a:srgbClr val="1A1A1A"/>
-                </a:solidFill>
-                <a:latin typeface="Georgia"/>
-              </a:rPr>
-              <a:t>verified drift is exactly 0</a:t>
-            </a:r>
-          </a:p>
-        </p:txBody>
-      </p:sp>
-      <p:sp>
-        <p:nvSpPr>
-          <p:cNvPr id="24" name="TextBox 23"/>
-          <p:cNvSpPr txBox="1"/>
-          <p:nvPr/>
-        </p:nvSpPr>
-        <p:spPr>
-          <a:xfrm>
-            <a:off x="685800" y="3703319"/>
-            <a:ext cx="4846320" cy="237744"/>
-          </a:xfrm>
-          <a:prstGeom prst="rect">
-            <a:avLst/>
-          </a:prstGeom>
-          <a:noFill/>
-        </p:spPr>
-        <p:txBody>
-          <a:bodyPr wrap="square">
-            <a:spAutoFit/>
-          </a:bodyPr>
-          <a:lstStyle/>
-          <a:p>
-            <a:pPr algn="l">
-              <a:lnSpc>
-                <a:spcPct val="100000"/>
-              </a:lnSpc>
-            </a:pPr>
-            <a:r>
-              <a:rPr sz="1050" b="0">
-                <a:solidFill>
-                  <a:srgbClr val="1A1A1A"/>
-                </a:solidFill>
-                <a:latin typeface="Georgia"/>
-              </a:rPr>
-              <a:t/>
-            </a:r>
-          </a:p>
-        </p:txBody>
-      </p:sp>
-      <p:sp>
-        <p:nvSpPr>
-          <p:cNvPr id="25" name="TextBox 24"/>
-          <p:cNvSpPr txBox="1"/>
-          <p:nvPr/>
-        </p:nvSpPr>
-        <p:spPr>
-          <a:xfrm>
-            <a:off x="5532120" y="3703319"/>
-            <a:ext cx="3200400" cy="237744"/>
-          </a:xfrm>
-          <a:prstGeom prst="rect">
-            <a:avLst/>
-          </a:prstGeom>
-          <a:noFill/>
-        </p:spPr>
-        <p:txBody>
-          <a:bodyPr wrap="square">
-            <a:spAutoFit/>
-          </a:bodyPr>
-          <a:lstStyle/>
-          <a:p>
-            <a:pPr algn="r">
-              <a:lnSpc>
-                <a:spcPct val="100000"/>
-              </a:lnSpc>
-            </a:pPr>
-            <a:r>
-              <a:rPr sz="1050" b="0">
-                <a:solidFill>
-                  <a:srgbClr val="1A1A1A"/>
-                </a:solidFill>
-                <a:latin typeface="Georgia"/>
-              </a:rPr>
-              <a:t/>
-            </a:r>
-          </a:p>
-        </p:txBody>
-      </p:sp>
-      <p:sp>
-        <p:nvSpPr>
-          <p:cNvPr id="26" name="TextBox 25"/>
-          <p:cNvSpPr txBox="1"/>
-          <p:nvPr/>
-        </p:nvSpPr>
-        <p:spPr>
-          <a:xfrm>
-            <a:off x="8732520" y="3703319"/>
-            <a:ext cx="2834640" cy="237744"/>
-          </a:xfrm>
-          <a:prstGeom prst="rect">
-            <a:avLst/>
-          </a:prstGeom>
-          <a:noFill/>
-        </p:spPr>
-        <p:txBody>
-          <a:bodyPr wrap="square">
-            <a:spAutoFit/>
-          </a:bodyPr>
-          <a:lstStyle/>
-          <a:p>
-            <a:pPr algn="r">
-              <a:lnSpc>
-                <a:spcPct val="100000"/>
-              </a:lnSpc>
-            </a:pPr>
-            <a:r>
-              <a:rPr sz="1050" b="0">
-                <a:solidFill>
-                  <a:srgbClr val="1A1A1A"/>
-                </a:solidFill>
-                <a:latin typeface="Georgia"/>
-              </a:rPr>
-              <a:t/>
-            </a:r>
-          </a:p>
-        </p:txBody>
-      </p:sp>
-      <p:sp>
-        <p:nvSpPr>
-          <p:cNvPr id="27" name="TextBox 26"/>
-          <p:cNvSpPr txBox="1"/>
-          <p:nvPr/>
-        </p:nvSpPr>
-        <p:spPr>
-          <a:xfrm>
-            <a:off x="685800" y="3977639"/>
-            <a:ext cx="4846320" cy="237744"/>
-          </a:xfrm>
-          <a:prstGeom prst="rect">
-            <a:avLst/>
-          </a:prstGeom>
-          <a:noFill/>
-        </p:spPr>
-        <p:txBody>
-          <a:bodyPr wrap="square">
-            <a:spAutoFit/>
-          </a:bodyPr>
-          <a:lstStyle/>
-          <a:p>
-            <a:pPr algn="l">
-              <a:lnSpc>
-                <a:spcPct val="100000"/>
-              </a:lnSpc>
-            </a:pPr>
-            <a:r>
-              <a:rPr sz="1050" b="0">
-                <a:solidFill>
-                  <a:srgbClr val="1A1A1A"/>
-                </a:solidFill>
-                <a:latin typeface="Georgia"/>
-              </a:rPr>
-              <a:t>Runs differed in three variables at once</a:t>
-            </a:r>
-          </a:p>
-        </p:txBody>
-      </p:sp>
-      <p:sp>
-        <p:nvSpPr>
-          <p:cNvPr id="28" name="TextBox 27"/>
-          <p:cNvSpPr txBox="1"/>
-          <p:nvPr/>
-        </p:nvSpPr>
-        <p:spPr>
-          <a:xfrm>
-            <a:off x="5532120" y="3977639"/>
-            <a:ext cx="3200400" cy="237744"/>
-          </a:xfrm>
-          <a:prstGeom prst="rect">
-            <a:avLst/>
-          </a:prstGeom>
-          <a:noFill/>
-        </p:spPr>
-        <p:txBody>
-          <a:bodyPr wrap="square">
-            <a:spAutoFit/>
-          </a:bodyPr>
-          <a:lstStyle/>
-          <a:p>
-            <a:pPr algn="r">
-              <a:lnSpc>
-                <a:spcPct val="100000"/>
-              </a:lnSpc>
-            </a:pPr>
-            <a:r>
-              <a:rPr sz="1050" b="0">
-                <a:solidFill>
-                  <a:srgbClr val="1A1A1A"/>
-                </a:solidFill>
-                <a:latin typeface="Georgia"/>
-              </a:rPr>
-              <a:t>no comparison between them</a:t>
-            </a:r>
-          </a:p>
-        </p:txBody>
-      </p:sp>
-      <p:sp>
-        <p:nvSpPr>
-          <p:cNvPr id="29" name="TextBox 28"/>
-          <p:cNvSpPr txBox="1"/>
-          <p:nvPr/>
-        </p:nvSpPr>
-        <p:spPr>
-          <a:xfrm>
-            <a:off x="8732520" y="3977639"/>
-            <a:ext cx="2834640" cy="237744"/>
-          </a:xfrm>
-          <a:prstGeom prst="rect">
-            <a:avLst/>
-          </a:prstGeom>
-          <a:noFill/>
-        </p:spPr>
-        <p:txBody>
-          <a:bodyPr wrap="square">
-            <a:spAutoFit/>
-          </a:bodyPr>
-          <a:lstStyle/>
-          <a:p>
-            <a:pPr algn="r">
-              <a:lnSpc>
-                <a:spcPct val="100000"/>
-              </a:lnSpc>
-            </a:pPr>
-            <a:r>
-              <a:rPr sz="1050" b="0">
-                <a:solidFill>
-                  <a:srgbClr val="1A1A1A"/>
-                </a:solidFill>
-                <a:latin typeface="Georgia"/>
-              </a:rPr>
-              <a:t>all runs generated from one</a:t>
-            </a:r>
-          </a:p>
-        </p:txBody>
-      </p:sp>
-      <p:sp>
-        <p:nvSpPr>
-          <p:cNvPr id="30" name="TextBox 29"/>
-          <p:cNvSpPr txBox="1"/>
-          <p:nvPr/>
-        </p:nvSpPr>
-        <p:spPr>
-          <a:xfrm>
-            <a:off x="685800" y="4251959"/>
-            <a:ext cx="4846320" cy="237744"/>
-          </a:xfrm>
-          <a:prstGeom prst="rect">
-            <a:avLst/>
-          </a:prstGeom>
-          <a:noFill/>
-        </p:spPr>
-        <p:txBody>
-          <a:bodyPr wrap="square">
-            <a:spAutoFit/>
-          </a:bodyPr>
-          <a:lstStyle/>
-          <a:p>
-            <a:pPr algn="l">
-              <a:lnSpc>
-                <a:spcPct val="100000"/>
-              </a:lnSpc>
-            </a:pPr>
-            <a:r>
-              <a:rPr sz="1050" b="0">
-                <a:solidFill>
-                  <a:srgbClr val="1A1A1A"/>
-                </a:solidFill>
-                <a:latin typeface="Georgia"/>
-              </a:rPr>
-              <a:t>(data, batch size, refinement schedule)</a:t>
-            </a:r>
-          </a:p>
-        </p:txBody>
-      </p:sp>
-      <p:sp>
-        <p:nvSpPr>
-          <p:cNvPr id="31" name="TextBox 30"/>
-          <p:cNvSpPr txBox="1"/>
-          <p:nvPr/>
-        </p:nvSpPr>
-        <p:spPr>
-          <a:xfrm>
-            <a:off x="5532120" y="4251959"/>
-            <a:ext cx="3200400" cy="237744"/>
-          </a:xfrm>
-          <a:prstGeom prst="rect">
-            <a:avLst/>
-          </a:prstGeom>
-          <a:noFill/>
-        </p:spPr>
-        <p:txBody>
-          <a:bodyPr wrap="square">
-            <a:spAutoFit/>
-          </a:bodyPr>
-          <a:lstStyle/>
-          <a:p>
-            <a:pPr algn="r">
-              <a:lnSpc>
-                <a:spcPct val="100000"/>
-              </a:lnSpc>
-            </a:pPr>
-            <a:r>
-              <a:rPr sz="1050" b="0">
-                <a:solidFill>
-                  <a:srgbClr val="1A1A1A"/>
-                </a:solidFill>
-                <a:latin typeface="Georgia"/>
-              </a:rPr>
-              <a:t>was valid</a:t>
-            </a:r>
-          </a:p>
-        </p:txBody>
-      </p:sp>
-      <p:sp>
-        <p:nvSpPr>
-          <p:cNvPr id="32" name="TextBox 31"/>
-          <p:cNvSpPr txBox="1"/>
-          <p:nvPr/>
-        </p:nvSpPr>
-        <p:spPr>
-          <a:xfrm>
-            <a:off x="8732520" y="4251959"/>
-            <a:ext cx="2834640" cy="237744"/>
-          </a:xfrm>
-          <a:prstGeom prst="rect">
-            <a:avLst/>
-          </a:prstGeom>
-          <a:noFill/>
-        </p:spPr>
-        <p:txBody>
-          <a:bodyPr wrap="square">
-            <a:spAutoFit/>
-          </a:bodyPr>
-          <a:lstStyle/>
-          <a:p>
-            <a:pPr algn="r">
-              <a:lnSpc>
-                <a:spcPct val="100000"/>
-              </a:lnSpc>
-            </a:pPr>
-            <a:r>
-              <a:rPr sz="1050" b="0">
-                <a:solidFill>
-                  <a:srgbClr val="1A1A1A"/>
-                </a:solidFill>
-                <a:latin typeface="Georgia"/>
-              </a:rPr>
-              <a:t>template; one variable each</a:t>
-            </a:r>
-          </a:p>
-        </p:txBody>
-      </p:sp>
-      <p:sp>
-        <p:nvSpPr>
-          <p:cNvPr id="33" name="Rounded Rectangle 32"/>
-          <p:cNvSpPr/>
-          <p:nvPr/>
-        </p:nvSpPr>
-        <p:spPr>
-          <a:xfrm>
-            <a:off x="685800" y="4892040"/>
-            <a:ext cx="10835640" cy="1005840"/>
-          </a:xfrm>
-          <a:prstGeom prst="roundRect">
-            <a:avLst/>
-          </a:prstGeom>
-          <a:solidFill>
-            <a:srgbClr val="EFEFEF"/>
-          </a:solidFill>
-          <a:ln w="9525">
-            <a:solidFill>
-              <a:srgbClr val="8A8A8A"/>
-            </a:solidFill>
-          </a:ln>
-          <a:effectLst/>
-        </p:spPr>
-        <p:style>
-          <a:lnRef idx="1">
-            <a:schemeClr val="accent1"/>
-          </a:lnRef>
-          <a:fillRef idx="3">
-            <a:schemeClr val="accent1"/>
-          </a:fillRef>
-          <a:effectRef idx="2">
-            <a:schemeClr val="accent1"/>
-          </a:effectRef>
-          <a:fontRef idx="minor">
-            <a:schemeClr val="lt1"/>
-          </a:fontRef>
-        </p:style>
-        <p:txBody>
-          <a:bodyPr rtlCol="0" anchor="ctr" wrap="square" lIns="73152" rIns="73152"/>
-          <a:lstStyle/>
-          <a:p>
-            <a:pPr algn="ctr"/>
-            <a:r>
-              <a:rPr sz="1150" b="0">
-                <a:solidFill>
-                  <a:srgbClr val="1A1A1A"/>
-                </a:solidFill>
-                <a:latin typeface="Georgia"/>
-              </a:rPr>
-              <a:t>Everything from here on: 1,174 held-out pairs, 460M pixels, per-pixel metrics, seed 1234, identical hyperparameters.</a:t>
-            </a:r>
-          </a:p>
-          <a:p>
-            <a:pPr algn="ctr"/>
-            <a:r>
-              <a:rPr sz="1150" b="0">
-                <a:solidFill>
-                  <a:srgbClr val="1A1A1A"/>
-                </a:solidFill>
-                <a:latin typeface="Georgia"/>
-              </a:rPr>
-              <a:t>A 9-check pre-flight suite (scripts/verify_pipeline.py) passes on CPU and GPU before any training run starts.</a:t>
-            </a:r>
-          </a:p>
-        </p:txBody>
-      </p:sp>
-      <p:sp>
-        <p:nvSpPr>
-          <p:cNvPr id="34" name="TextBox 33"/>
-          <p:cNvSpPr txBox="1"/>
-          <p:nvPr/>
-        </p:nvSpPr>
-        <p:spPr>
-          <a:xfrm>
-            <a:off x="685800" y="6419088"/>
-            <a:ext cx="7315200" cy="274320"/>
-          </a:xfrm>
-          <a:prstGeom prst="rect">
-            <a:avLst/>
-          </a:prstGeom>
-          <a:noFill/>
-        </p:spPr>
-        <p:txBody>
-          <a:bodyPr wrap="square">
-            <a:spAutoFit/>
-          </a:bodyPr>
-          <a:lstStyle/>
-          <a:p>
-            <a:pPr algn="l">
-              <a:lnSpc>
-                <a:spcPct val="100000"/>
-              </a:lnSpc>
-            </a:pPr>
-            <a:r>
               <a:rPr sz="900" b="0">
                 <a:solidFill>
                   <a:srgbClr val="8A8A8A"/>
@@ -13964,7 +12643,7 @@
       </p:sp>
       <p:sp>
         <p:nvSpPr>
-          <p:cNvPr id="35" name="TextBox 34"/>
+          <p:cNvPr id="8" name="TextBox 7"/>
           <p:cNvSpPr txBox="1"/>
           <p:nvPr/>
         </p:nvSpPr>
@@ -14092,14 +12771,14 @@
                 </a:solidFill>
                 <a:latin typeface="Georgia"/>
               </a:rPr>
-              <a:t>Accuracy: the decoder costs 2.6 percent</a:t>
+              <a:t>The cost: sub-pixel precision, unresolved</a:t>
             </a:r>
           </a:p>
         </p:txBody>
       </p:sp>
       <p:pic>
         <p:nvPicPr>
-          <p:cNvPr id="4" name="Picture 3" descr="accuracy_bars.png"/>
+          <p:cNvPr id="4" name="Picture 3" descr="precision_bars.png"/>
           <p:cNvPicPr>
             <a:picLocks noChangeAspect="1"/>
           </p:cNvPicPr>
@@ -14114,7 +12793,7 @@
         <p:spPr>
           <a:xfrm>
             <a:off x="731520" y="1463040"/>
-            <a:ext cx="6675120" cy="3675066"/>
+            <a:ext cx="6675120" cy="3677821"/>
           </a:xfrm>
           <a:prstGeom prst="rect">
             <a:avLst/>
@@ -14130,7 +12809,7 @@
         <p:spPr>
           <a:xfrm>
             <a:off x="7680960" y="1600200"/>
-            <a:ext cx="3931920" cy="3291840"/>
+            <a:ext cx="3931920" cy="3840480"/>
           </a:xfrm>
           <a:prstGeom prst="rect">
             <a:avLst/>
@@ -14155,7 +12834,7 @@
                 </a:solidFill>
                 <a:latin typeface="Georgia"/>
               </a:rPr>
-              <a:t>Every v3 configuration sits above v2.</a:t>
+              <a:t>v3 sits below v2 on 1-pixel accuracy in</a:t>
             </a:r>
           </a:p>
           <a:p>
@@ -14171,6 +12850,22 @@
                 </a:solidFill>
                 <a:latin typeface="Georgia"/>
               </a:rPr>
+              <a:t>every configuration, by 0.8 to 6.3 points.</a:t>
+            </a:r>
+          </a:p>
+          <a:p>
+            <a:pPr algn="l">
+              <a:lnSpc>
+                <a:spcPct val="118000"/>
+              </a:lnSpc>
+            </a:pPr>
+            <a:r>
+              <a:rPr sz="1150" b="0">
+                <a:solidFill>
+                  <a:srgbClr val="1A1A1A"/>
+                </a:solidFill>
+                <a:latin typeface="Georgia"/>
+              </a:rPr>
               <a:t/>
             </a:r>
           </a:p>
@@ -14187,7 +12882,7 @@
                 </a:solidFill>
                 <a:latin typeface="Georgia"/>
               </a:rPr>
-              <a:t>Best: 2.384 against v2 at 2.324, so 2.6%</a:t>
+              <a:t>Mean EPE hides this: v3 has fewer large</a:t>
             </a:r>
           </a:p>
           <a:p>
@@ -14203,7 +12898,7 @@
                 </a:solidFill>
                 <a:latin typeface="Georgia"/>
               </a:rPr>
-              <a:t>worse on mean error and 1.5 points worse</a:t>
+              <a:t>errors, which pulls the mean down, while</a:t>
             </a:r>
           </a:p>
           <a:p>
@@ -14219,7 +12914,7 @@
                 </a:solidFill>
                 <a:latin typeface="Georgia"/>
               </a:rPr>
-              <a:t>on 1-pixel accuracy.</a:t>
+              <a:t>being less exact on the majority of pixels.</a:t>
             </a:r>
           </a:p>
           <a:p>
@@ -14251,7 +12946,7 @@
                 </a:solidFill>
                 <a:latin typeface="Georgia"/>
               </a:rPr>
-              <a:t>Like-for-like, trained on FlyingChairs only</a:t>
+              <a:t>Diagnosed cause: the decoder never sees</a:t>
             </a:r>
           </a:p>
           <a:p>
@@ -14267,7 +12962,7 @@
                 </a:solidFill>
                 <a:latin typeface="Georgia"/>
               </a:rPr>
-              <a:t>as v2 was, it is 2.500, or 7.6% behind.</a:t>
+              <a:t>the full-resolution image. Its finest input</a:t>
             </a:r>
           </a:p>
           <a:p>
@@ -14283,6 +12978,54 @@
                 </a:solidFill>
                 <a:latin typeface="Georgia"/>
               </a:rPr>
+              <a:t>is at 1/8 scale, so within an 8x8 cell the</a:t>
+            </a:r>
+          </a:p>
+          <a:p>
+            <a:pPr algn="l">
+              <a:lnSpc>
+                <a:spcPct val="118000"/>
+              </a:lnSpc>
+            </a:pPr>
+            <a:r>
+              <a:rPr sz="1150" b="0">
+                <a:solidFill>
+                  <a:srgbClr val="1A1A1A"/>
+                </a:solidFill>
+                <a:latin typeface="Georgia"/>
+              </a:rPr>
+              <a:t>evidence barely changes. v2 upsampler</a:t>
+            </a:r>
+          </a:p>
+          <a:p>
+            <a:pPr algn="l">
+              <a:lnSpc>
+                <a:spcPct val="118000"/>
+              </a:lnSpc>
+            </a:pPr>
+            <a:r>
+              <a:rPr sz="1150" b="0">
+                <a:solidFill>
+                  <a:srgbClr val="1A1A1A"/>
+                </a:solidFill>
+                <a:latin typeface="Georgia"/>
+              </a:rPr>
+              <a:t>reads the full-resolution frame directly.</a:t>
+            </a:r>
+          </a:p>
+          <a:p>
+            <a:pPr algn="l">
+              <a:lnSpc>
+                <a:spcPct val="118000"/>
+              </a:lnSpc>
+            </a:pPr>
+            <a:r>
+              <a:rPr sz="1150" b="0">
+                <a:solidFill>
+                  <a:srgbClr val="1A1A1A"/>
+                </a:solidFill>
+                <a:latin typeface="Georgia"/>
+              </a:rPr>
               <a:t/>
             </a:r>
           </a:p>
@@ -14299,7 +13042,7 @@
                 </a:solidFill>
                 <a:latin typeface="Georgia"/>
               </a:rPr>
-              <a:t>The implicit decoder is less accurate than</a:t>
+              <a:t>A Fourier positional encoding was tried</a:t>
             </a:r>
           </a:p>
           <a:p>
@@ -14315,7 +13058,7 @@
                 </a:solidFill>
                 <a:latin typeface="Georgia"/>
               </a:rPr>
-              <a:t>the convex upsampler it replaces. The cause</a:t>
+              <a:t>and made no difference, which rules out</a:t>
             </a:r>
           </a:p>
           <a:p>
@@ -14331,109 +13074,14 @@
                 </a:solidFill>
                 <a:latin typeface="Georgia"/>
               </a:rPr>
-              <a:t>is known and is not a training artefact:</a:t>
-            </a:r>
-          </a:p>
-          <a:p>
-            <a:pPr algn="l">
-              <a:lnSpc>
-                <a:spcPct val="118000"/>
-              </a:lnSpc>
-            </a:pPr>
-            <a:r>
-              <a:rPr sz="1150" b="0">
-                <a:solidFill>
-                  <a:srgbClr val="1A1A1A"/>
-                </a:solidFill>
-                <a:latin typeface="Georgia"/>
-              </a:rPr>
-              <a:t>see the precision slide.</a:t>
-            </a:r>
-          </a:p>
-        </p:txBody>
-      </p:sp>
-      <p:sp>
-        <p:nvSpPr>
-          <p:cNvPr id="6" name="Rounded Rectangle 5"/>
-          <p:cNvSpPr/>
-          <p:nvPr/>
-        </p:nvSpPr>
-        <p:spPr>
-          <a:xfrm>
-            <a:off x="7680960" y="4983480"/>
-            <a:ext cx="3931920" cy="868680"/>
-          </a:xfrm>
-          <a:prstGeom prst="roundRect">
-            <a:avLst/>
-          </a:prstGeom>
-          <a:solidFill>
-            <a:srgbClr val="EFEFEF"/>
-          </a:solidFill>
-          <a:ln w="9525">
-            <a:solidFill>
-              <a:srgbClr val="8A8A8A"/>
-            </a:solidFill>
-          </a:ln>
-          <a:effectLst/>
-        </p:spPr>
-        <p:style>
-          <a:lnRef idx="1">
-            <a:schemeClr val="accent1"/>
-          </a:lnRef>
-          <a:fillRef idx="3">
-            <a:schemeClr val="accent1"/>
-          </a:fillRef>
-          <a:effectRef idx="2">
-            <a:schemeClr val="accent1"/>
-          </a:effectRef>
-          <a:fontRef idx="minor">
-            <a:schemeClr val="lt1"/>
-          </a:fontRef>
-        </p:style>
-        <p:txBody>
-          <a:bodyPr rtlCol="0" anchor="ctr" wrap="square" lIns="73152" rIns="73152"/>
-          <a:lstStyle/>
-          <a:p>
-            <a:pPr algn="ctr"/>
-            <a:r>
-              <a:rPr sz="1050" b="0">
-                <a:solidFill>
-                  <a:srgbClr val="1A1A1A"/>
-                </a:solidFill>
-                <a:latin typeface="Georgia"/>
-              </a:rPr>
-              <a:t>These replace an earlier set showing 2.10-2.29 px,</a:t>
-            </a:r>
-          </a:p>
-          <a:p>
-            <a:pPr algn="ctr"/>
-            <a:r>
-              <a:rPr sz="1050" b="0">
-                <a:solidFill>
-                  <a:srgbClr val="1A1A1A"/>
-                </a:solidFill>
-                <a:latin typeface="Georgia"/>
-              </a:rPr>
-              <a:t>produced by runs whose frozen backbone was</a:t>
-            </a:r>
-          </a:p>
-          <a:p>
-            <a:pPr algn="ctr"/>
-            <a:r>
-              <a:rPr sz="1050" b="0">
-                <a:solidFill>
-                  <a:srgbClr val="1A1A1A"/>
-                </a:solidFill>
-                <a:latin typeface="Georgia"/>
-              </a:rPr>
-              <a:t>silently drifting. See slide 9.</a:t>
-            </a:r>
-          </a:p>
-        </p:txBody>
-      </p:sp>
-      <p:sp>
-        <p:nvSpPr>
-          <p:cNvPr id="7" name="TextBox 6"/>
+              <a:t>missing positional signal as the cause.</a:t>
+            </a:r>
+          </a:p>
+        </p:txBody>
+      </p:sp>
+      <p:sp>
+        <p:nvSpPr>
+          <p:cNvPr id="6" name="TextBox 5"/>
           <p:cNvSpPr txBox="1"/>
           <p:nvPr/>
         </p:nvSpPr>
@@ -14472,7 +13120,7 @@
       </p:sp>
       <p:sp>
         <p:nvSpPr>
-          <p:cNvPr id="8" name="TextBox 7"/>
+          <p:cNvPr id="7" name="TextBox 6"/>
           <p:cNvSpPr txBox="1"/>
           <p:nvPr/>
         </p:nvSpPr>
@@ -14600,14 +13248,14 @@
                 </a:solidFill>
                 <a:latin typeface="Georgia"/>
               </a:rPr>
-              <a:t>The cost: sub-pixel precision, unresolved</a:t>
+              <a:t>Speed: repeat queries are 7.7x cheaper</a:t>
             </a:r>
           </a:p>
         </p:txBody>
       </p:sp>
       <p:pic>
         <p:nvPicPr>
-          <p:cNvPr id="4" name="Picture 3" descr="precision_bars.png"/>
+          <p:cNvPr id="4" name="Picture 3" descr="speed_bars.png"/>
           <p:cNvPicPr>
             <a:picLocks noChangeAspect="1"/>
           </p:cNvPicPr>
@@ -14621,8 +13269,8 @@
         </p:blipFill>
         <p:spPr>
           <a:xfrm>
-            <a:off x="731520" y="1463040"/>
-            <a:ext cx="6675120" cy="3677821"/>
+            <a:off x="1188720" y="1463040"/>
+            <a:ext cx="7406640" cy="3665913"/>
           </a:xfrm>
           <a:prstGeom prst="rect">
             <a:avLst/>
@@ -14637,8 +13285,8 @@
         </p:nvSpPr>
         <p:spPr>
           <a:xfrm>
-            <a:off x="7680960" y="1600200"/>
-            <a:ext cx="3931920" cy="3840480"/>
+            <a:off x="8869680" y="1645920"/>
+            <a:ext cx="2834640" cy="2743200"/>
           </a:xfrm>
           <a:prstGeom prst="rect">
             <a:avLst/>
@@ -14663,7 +13311,7 @@
                 </a:solidFill>
                 <a:latin typeface="Georgia"/>
               </a:rPr>
-              <a:t>v3 sits below v2 on 1-pixel accuracy in</a:t>
+              <a:t>Dense output: v3 is 14%</a:t>
             </a:r>
           </a:p>
           <a:p>
@@ -14679,7 +13327,7 @@
                 </a:solidFill>
                 <a:latin typeface="Georgia"/>
               </a:rPr>
-              <a:t>every configuration, by 0.8 to 6.3 points.</a:t>
+              <a:t>slower. That mode is not</a:t>
             </a:r>
           </a:p>
           <a:p>
@@ -14695,6 +13343,22 @@
                 </a:solidFill>
                 <a:latin typeface="Georgia"/>
               </a:rPr>
+              <a:t>what the decoder is for.</a:t>
+            </a:r>
+          </a:p>
+          <a:p>
+            <a:pPr algn="l">
+              <a:lnSpc>
+                <a:spcPct val="118000"/>
+              </a:lnSpc>
+            </a:pPr>
+            <a:r>
+              <a:rPr sz="1150" b="0">
+                <a:solidFill>
+                  <a:srgbClr val="1A1A1A"/>
+                </a:solidFill>
+                <a:latin typeface="Georgia"/>
+              </a:rPr>
               <a:t/>
             </a:r>
           </a:p>
@@ -14711,7 +13375,7 @@
                 </a:solidFill>
                 <a:latin typeface="Georgia"/>
               </a:rPr>
-              <a:t>Mean EPE hides this: v3 has fewer large</a:t>
+              <a:t>A first sparse query is</a:t>
             </a:r>
           </a:p>
           <a:p>
@@ -14727,7 +13391,7 @@
                 </a:solidFill>
                 <a:latin typeface="Georgia"/>
               </a:rPr>
-              <a:t>errors, which pulls the mean down, while</a:t>
+              <a:t>level with v2: the coarse</a:t>
             </a:r>
           </a:p>
           <a:p>
@@ -14743,7 +13407,7 @@
                 </a:solidFill>
                 <a:latin typeface="Georgia"/>
               </a:rPr>
-              <a:t>being less exact on the majority of pixels.</a:t>
+              <a:t>pass dominates and is</a:t>
             </a:r>
           </a:p>
           <a:p>
@@ -14759,6 +13423,22 @@
                 </a:solidFill>
                 <a:latin typeface="Georgia"/>
               </a:rPr>
+              <a:t>shared by both.</a:t>
+            </a:r>
+          </a:p>
+          <a:p>
+            <a:pPr algn="l">
+              <a:lnSpc>
+                <a:spcPct val="118000"/>
+              </a:lnSpc>
+            </a:pPr>
+            <a:r>
+              <a:rPr sz="1150" b="0">
+                <a:solidFill>
+                  <a:srgbClr val="1A1A1A"/>
+                </a:solidFill>
+                <a:latin typeface="Georgia"/>
+              </a:rPr>
               <a:t/>
             </a:r>
           </a:p>
@@ -14775,7 +13455,7 @@
                 </a:solidFill>
                 <a:latin typeface="Georgia"/>
               </a:rPr>
-              <a:t>Diagnosed cause: the decoder never sees</a:t>
+              <a:t>Everything after the first</a:t>
             </a:r>
           </a:p>
           <a:p>
@@ -14791,67 +13471,70 @@
                 </a:solidFill>
                 <a:latin typeface="Georgia"/>
               </a:rPr>
-              <a:t>the full-resolution image. Its finest input</a:t>
-            </a:r>
-          </a:p>
-          <a:p>
-            <a:pPr algn="l">
-              <a:lnSpc>
-                <a:spcPct val="118000"/>
-              </a:lnSpc>
-            </a:pPr>
-            <a:r>
-              <a:rPr sz="1150" b="0">
-                <a:solidFill>
-                  <a:srgbClr val="1A1A1A"/>
-                </a:solidFill>
-                <a:latin typeface="Georgia"/>
-              </a:rPr>
-              <a:t>is at 1/8 scale, so within an 8x8 cell the</a:t>
-            </a:r>
-          </a:p>
-          <a:p>
-            <a:pPr algn="l">
-              <a:lnSpc>
-                <a:spcPct val="118000"/>
-              </a:lnSpc>
-            </a:pPr>
-            <a:r>
-              <a:rPr sz="1150" b="0">
-                <a:solidFill>
-                  <a:srgbClr val="1A1A1A"/>
-                </a:solidFill>
-                <a:latin typeface="Georgia"/>
-              </a:rPr>
-              <a:t>evidence barely changes. v2 upsampler</a:t>
-            </a:r>
-          </a:p>
-          <a:p>
-            <a:pPr algn="l">
-              <a:lnSpc>
-                <a:spcPct val="118000"/>
-              </a:lnSpc>
-            </a:pPr>
-            <a:r>
-              <a:rPr sz="1150" b="0">
-                <a:solidFill>
-                  <a:srgbClr val="1A1A1A"/>
-                </a:solidFill>
-                <a:latin typeface="Georgia"/>
-              </a:rPr>
-              <a:t>reads the full-resolution frame directly.</a:t>
-            </a:r>
-          </a:p>
-          <a:p>
-            <a:pPr algn="l">
-              <a:lnSpc>
-                <a:spcPct val="118000"/>
-              </a:lnSpc>
-            </a:pPr>
-            <a:r>
-              <a:rPr sz="1150" b="0">
-                <a:solidFill>
-                  <a:srgbClr val="1A1A1A"/>
+              <a:t>query is where v3 wins.</a:t>
+            </a:r>
+          </a:p>
+        </p:txBody>
+      </p:sp>
+      <p:sp>
+        <p:nvSpPr>
+          <p:cNvPr id="6" name="Rounded Rectangle 5"/>
+          <p:cNvSpPr/>
+          <p:nvPr/>
+        </p:nvSpPr>
+        <p:spPr>
+          <a:xfrm>
+            <a:off x="8869680" y="4572000"/>
+            <a:ext cx="2834640" cy="1280160"/>
+          </a:xfrm>
+          <a:prstGeom prst="roundRect">
+            <a:avLst/>
+          </a:prstGeom>
+          <a:solidFill>
+            <a:srgbClr val="EFEFEF"/>
+          </a:solidFill>
+          <a:ln w="9525">
+            <a:solidFill>
+              <a:srgbClr val="8A8A8A"/>
+            </a:solidFill>
+          </a:ln>
+          <a:effectLst/>
+        </p:spPr>
+        <p:style>
+          <a:lnRef idx="1">
+            <a:schemeClr val="accent1"/>
+          </a:lnRef>
+          <a:fillRef idx="3">
+            <a:schemeClr val="accent1"/>
+          </a:fillRef>
+          <a:effectRef idx="2">
+            <a:schemeClr val="accent1"/>
+          </a:effectRef>
+          <a:fontRef idx="minor">
+            <a:schemeClr val="lt1"/>
+          </a:fontRef>
+        </p:style>
+        <p:txBody>
+          <a:bodyPr rtlCol="0" anchor="ctr" wrap="square" lIns="73152" rIns="73152"/>
+          <a:lstStyle/>
+          <a:p>
+            <a:pPr algn="ctr"/>
+            <a:r>
+              <a:rPr sz="1050" b="0">
+                <a:solidFill>
+                  <a:srgbClr val="0B6A63"/>
+                </a:solidFill>
+                <a:latin typeface="Georgia"/>
+              </a:rPr>
+              <a:t>The genuine win</a:t>
+            </a:r>
+          </a:p>
+          <a:p>
+            <a:pPr algn="ctr"/>
+            <a:r>
+              <a:rPr sz="1050" b="0">
+                <a:solidFill>
+                  <a:srgbClr val="0B6A63"/>
                 </a:solidFill>
                 <a:latin typeface="Georgia"/>
               </a:rPr>
@@ -14859,58 +13542,58 @@
             </a:r>
           </a:p>
           <a:p>
-            <a:pPr algn="l">
-              <a:lnSpc>
-                <a:spcPct val="118000"/>
-              </a:lnSpc>
-            </a:pPr>
-            <a:r>
-              <a:rPr sz="1150" b="0">
-                <a:solidFill>
-                  <a:srgbClr val="1A1A1A"/>
-                </a:solidFill>
-                <a:latin typeface="Georgia"/>
-              </a:rPr>
-              <a:t>A Fourier positional encoding was tried</a:t>
-            </a:r>
-          </a:p>
-          <a:p>
-            <a:pPr algn="l">
-              <a:lnSpc>
-                <a:spcPct val="118000"/>
-              </a:lnSpc>
-            </a:pPr>
-            <a:r>
-              <a:rPr sz="1150" b="0">
-                <a:solidFill>
-                  <a:srgbClr val="1A1A1A"/>
-                </a:solidFill>
-                <a:latin typeface="Georgia"/>
-              </a:rPr>
-              <a:t>and made no difference, which rules out</a:t>
-            </a:r>
-          </a:p>
-          <a:p>
-            <a:pPr algn="l">
-              <a:lnSpc>
-                <a:spcPct val="118000"/>
-              </a:lnSpc>
-            </a:pPr>
-            <a:r>
-              <a:rPr sz="1150" b="0">
-                <a:solidFill>
-                  <a:srgbClr val="1A1A1A"/>
-                </a:solidFill>
-                <a:latin typeface="Georgia"/>
-              </a:rPr>
-              <a:t>missing positional signal as the cause.</a:t>
-            </a:r>
-          </a:p>
-        </p:txBody>
-      </p:sp>
-      <p:sp>
-        <p:nvSpPr>
-          <p:cNvPr id="6" name="TextBox 5"/>
+            <a:pPr algn="ctr"/>
+            <a:r>
+              <a:rPr sz="1050" b="0">
+                <a:solidFill>
+                  <a:srgbClr val="0B6A63"/>
+                </a:solidFill>
+                <a:latin typeface="Georgia"/>
+              </a:rPr>
+              <a:t>A second query on an</a:t>
+            </a:r>
+          </a:p>
+          <a:p>
+            <a:pPr algn="ctr"/>
+            <a:r>
+              <a:rPr sz="1050" b="0">
+                <a:solidFill>
+                  <a:srgbClr val="0B6A63"/>
+                </a:solidFill>
+                <a:latin typeface="Georgia"/>
+              </a:rPr>
+              <a:t>already-processed frame:</a:t>
+            </a:r>
+          </a:p>
+          <a:p>
+            <a:pPr algn="ctr"/>
+            <a:r>
+              <a:rPr sz="1050" b="0">
+                <a:solidFill>
+                  <a:srgbClr val="0B6A63"/>
+                </a:solidFill>
+                <a:latin typeface="Georgia"/>
+              </a:rPr>
+              <a:t>2.6 ms against 19.3 ms.</a:t>
+            </a:r>
+          </a:p>
+          <a:p>
+            <a:pPr algn="ctr"/>
+            <a:r>
+              <a:rPr sz="1050" b="0">
+                <a:solidFill>
+                  <a:srgbClr val="0B6A63"/>
+                </a:solidFill>
+                <a:latin typeface="Georgia"/>
+              </a:rPr>
+              <a:t>v2 has no cached state.</a:t>
+            </a:r>
+          </a:p>
+        </p:txBody>
+      </p:sp>
+      <p:sp>
+        <p:nvSpPr>
+          <p:cNvPr id="7" name="TextBox 6"/>
           <p:cNvSpPr txBox="1"/>
           <p:nvPr/>
         </p:nvSpPr>
@@ -14949,7 +13632,7 @@
       </p:sp>
       <p:sp>
         <p:nvSpPr>
-          <p:cNvPr id="7" name="TextBox 6"/>
+          <p:cNvPr id="8" name="TextBox 7"/>
           <p:cNvSpPr txBox="1"/>
           <p:nvPr/>
         </p:nvSpPr>
@@ -15077,14 +13760,14 @@
                 </a:solidFill>
                 <a:latin typeface="Georgia"/>
               </a:rPr>
-              <a:t>Speed: one real win, and a claim I withdrew</a:t>
+              <a:t>A calibrated confidence signal v2 cannot express</a:t>
             </a:r>
           </a:p>
         </p:txBody>
       </p:sp>
       <p:pic>
         <p:nvPicPr>
-          <p:cNvPr id="4" name="Picture 3" descr="speed_bars.png"/>
+          <p:cNvPr id="4" name="Picture 3" descr="calibration_bars.png"/>
           <p:cNvPicPr>
             <a:picLocks noChangeAspect="1"/>
           </p:cNvPicPr>
@@ -15098,8 +13781,8 @@
         </p:blipFill>
         <p:spPr>
           <a:xfrm>
-            <a:off x="1188720" y="1463040"/>
-            <a:ext cx="7406640" cy="3665913"/>
+            <a:off x="731520" y="1554480"/>
+            <a:ext cx="6766560" cy="3568283"/>
           </a:xfrm>
           <a:prstGeom prst="rect">
             <a:avLst/>
@@ -15114,8 +13797,8 @@
         </p:nvSpPr>
         <p:spPr>
           <a:xfrm>
-            <a:off x="8869680" y="1645920"/>
-            <a:ext cx="2834640" cy="2743200"/>
+            <a:off x="7772400" y="1691640"/>
+            <a:ext cx="3840480" cy="3291840"/>
           </a:xfrm>
           <a:prstGeom prst="rect">
             <a:avLst/>
@@ -15140,7 +13823,7 @@
                 </a:solidFill>
                 <a:latin typeface="Georgia"/>
               </a:rPr>
-              <a:t>Dense: v3 is 14% slower</a:t>
+              <a:t>The head predicts a per-query error</a:t>
             </a:r>
           </a:p>
           <a:p>
@@ -15156,7 +13839,7 @@
                 </a:solidFill>
                 <a:latin typeface="Georgia"/>
               </a:rPr>
-              <a:t>than v2. An earlier version</a:t>
+              <a:t>scale b alongside each flow value,</a:t>
             </a:r>
           </a:p>
           <a:p>
@@ -15172,7 +13855,7 @@
                 </a:solidFill>
                 <a:latin typeface="Georgia"/>
               </a:rPr>
-              <a:t>of this deck claimed the</a:t>
+              <a:t>trained with a Laplace likelihood.</a:t>
             </a:r>
           </a:p>
           <a:p>
@@ -15188,7 +13871,7 @@
                 </a:solidFill>
                 <a:latin typeface="Georgia"/>
               </a:rPr>
-              <a:t>opposite. That measurement</a:t>
+              <a:t/>
             </a:r>
           </a:p>
           <a:p>
@@ -15204,7 +13887,7 @@
                 </a:solidFill>
                 <a:latin typeface="Georgia"/>
               </a:rPr>
-              <a:t>predated the BatchNorm fix</a:t>
+              <a:t>Binned by predicted b, real error rises</a:t>
             </a:r>
           </a:p>
           <a:p>
@@ -15220,7 +13903,7 @@
                 </a:solidFill>
                 <a:latin typeface="Georgia"/>
               </a:rPr>
-              <a:t>and used different</a:t>
+              <a:t>monotonically from 0.48 px to 7.10 px,</a:t>
             </a:r>
           </a:p>
           <a:p>
@@ -15236,7 +13919,7 @@
                 </a:solidFill>
                 <a:latin typeface="Georgia"/>
               </a:rPr>
-              <a:t>hardware. Withdrawn.</a:t>
+              <a:t>a 15x span. Pearson r = 0.318 over</a:t>
             </a:r>
           </a:p>
           <a:p>
@@ -15252,6 +13935,22 @@
                 </a:solidFill>
                 <a:latin typeface="Georgia"/>
               </a:rPr>
+              <a:t>2,348,000 samples.</a:t>
+            </a:r>
+          </a:p>
+          <a:p>
+            <a:pPr algn="l">
+              <a:lnSpc>
+                <a:spcPct val="118000"/>
+              </a:lnSpc>
+            </a:pPr>
+            <a:r>
+              <a:rPr sz="1150" b="0">
+                <a:solidFill>
+                  <a:srgbClr val="1A1A1A"/>
+                </a:solidFill>
+                <a:latin typeface="Georgia"/>
+              </a:rPr>
               <a:t/>
             </a:r>
           </a:p>
@@ -15268,7 +13967,7 @@
                 </a:solidFill>
                 <a:latin typeface="Georgia"/>
               </a:rPr>
-              <a:t>First sparse query: level</a:t>
+              <a:t>This is usable: weight correspondences</a:t>
             </a:r>
           </a:p>
           <a:p>
@@ -15284,70 +13983,35 @@
                 </a:solidFill>
                 <a:latin typeface="Georgia"/>
               </a:rPr>
-              <a:t>with v2, not faster.</a:t>
-            </a:r>
-          </a:p>
-        </p:txBody>
-      </p:sp>
-      <p:sp>
-        <p:nvSpPr>
-          <p:cNvPr id="6" name="Rounded Rectangle 5"/>
-          <p:cNvSpPr/>
-          <p:nvPr/>
-        </p:nvSpPr>
-        <p:spPr>
-          <a:xfrm>
-            <a:off x="8869680" y="4572000"/>
-            <a:ext cx="2834640" cy="1280160"/>
-          </a:xfrm>
-          <a:prstGeom prst="roundRect">
-            <a:avLst/>
-          </a:prstGeom>
-          <a:solidFill>
-            <a:srgbClr val="EFEFEF"/>
-          </a:solidFill>
-          <a:ln w="9525">
-            <a:solidFill>
-              <a:srgbClr val="8A8A8A"/>
-            </a:solidFill>
-          </a:ln>
-          <a:effectLst/>
-        </p:spPr>
-        <p:style>
-          <a:lnRef idx="1">
-            <a:schemeClr val="accent1"/>
-          </a:lnRef>
-          <a:fillRef idx="3">
-            <a:schemeClr val="accent1"/>
-          </a:fillRef>
-          <a:effectRef idx="2">
-            <a:schemeClr val="accent1"/>
-          </a:effectRef>
-          <a:fontRef idx="minor">
-            <a:schemeClr val="lt1"/>
-          </a:fontRef>
-        </p:style>
-        <p:txBody>
-          <a:bodyPr rtlCol="0" anchor="ctr" wrap="square" lIns="73152" rIns="73152"/>
-          <a:lstStyle/>
-          <a:p>
-            <a:pPr algn="ctr"/>
-            <a:r>
-              <a:rPr sz="1050" b="0">
-                <a:solidFill>
-                  <a:srgbClr val="0B6A63"/>
-                </a:solidFill>
-                <a:latin typeface="Georgia"/>
-              </a:rPr>
-              <a:t>The genuine win</a:t>
-            </a:r>
-          </a:p>
-          <a:p>
-            <a:pPr algn="ctr"/>
-            <a:r>
-              <a:rPr sz="1050" b="0">
-                <a:solidFill>
-                  <a:srgbClr val="0B6A63"/>
+              <a:t>in RANSAC, reject unreliable matches,</a:t>
+            </a:r>
+          </a:p>
+          <a:p>
+            <a:pPr algn="l">
+              <a:lnSpc>
+                <a:spcPct val="118000"/>
+              </a:lnSpc>
+            </a:pPr>
+            <a:r>
+              <a:rPr sz="1150" b="0">
+                <a:solidFill>
+                  <a:srgbClr val="1A1A1A"/>
+                </a:solidFill>
+                <a:latin typeface="Georgia"/>
+              </a:rPr>
+              <a:t>or steer queries toward uncertain areas.</a:t>
+            </a:r>
+          </a:p>
+          <a:p>
+            <a:pPr algn="l">
+              <a:lnSpc>
+                <a:spcPct val="118000"/>
+              </a:lnSpc>
+            </a:pPr>
+            <a:r>
+              <a:rPr sz="1150" b="0">
+                <a:solidFill>
+                  <a:srgbClr val="1A1A1A"/>
                 </a:solidFill>
                 <a:latin typeface="Georgia"/>
               </a:rPr>
@@ -15355,58 +14019,42 @@
             </a:r>
           </a:p>
           <a:p>
-            <a:pPr algn="ctr"/>
-            <a:r>
-              <a:rPr sz="1050" b="0">
-                <a:solidFill>
-                  <a:srgbClr val="0B6A63"/>
-                </a:solidFill>
-                <a:latin typeface="Georgia"/>
-              </a:rPr>
-              <a:t>A second query on an</a:t>
-            </a:r>
-          </a:p>
-          <a:p>
-            <a:pPr algn="ctr"/>
-            <a:r>
-              <a:rPr sz="1050" b="0">
-                <a:solidFill>
-                  <a:srgbClr val="0B6A63"/>
-                </a:solidFill>
-                <a:latin typeface="Georgia"/>
-              </a:rPr>
-              <a:t>already-processed frame:</a:t>
-            </a:r>
-          </a:p>
-          <a:p>
-            <a:pPr algn="ctr"/>
-            <a:r>
-              <a:rPr sz="1050" b="0">
-                <a:solidFill>
-                  <a:srgbClr val="0B6A63"/>
-                </a:solidFill>
-                <a:latin typeface="Georgia"/>
-              </a:rPr>
-              <a:t>2.6 ms against 19.3 ms.</a:t>
-            </a:r>
-          </a:p>
-          <a:p>
-            <a:pPr algn="ctr"/>
-            <a:r>
-              <a:rPr sz="1050" b="0">
-                <a:solidFill>
-                  <a:srgbClr val="0B6A63"/>
-                </a:solidFill>
-                <a:latin typeface="Georgia"/>
-              </a:rPr>
-              <a:t>v2 has no cached state.</a:t>
-            </a:r>
-          </a:p>
-        </p:txBody>
-      </p:sp>
-      <p:sp>
-        <p:nvSpPr>
-          <p:cNvPr id="7" name="TextBox 6"/>
+            <a:pPr algn="l">
+              <a:lnSpc>
+                <a:spcPct val="118000"/>
+              </a:lnSpc>
+            </a:pPr>
+            <a:r>
+              <a:rPr sz="1150" b="0">
+                <a:solidFill>
+                  <a:srgbClr val="1A1A1A"/>
+                </a:solidFill>
+                <a:latin typeface="Georgia"/>
+              </a:rPr>
+              <a:t>v2 emits flow only. There is no</a:t>
+            </a:r>
+          </a:p>
+          <a:p>
+            <a:pPr algn="l">
+              <a:lnSpc>
+                <a:spcPct val="118000"/>
+              </a:lnSpc>
+            </a:pPr>
+            <a:r>
+              <a:rPr sz="1150" b="0">
+                <a:solidFill>
+                  <a:srgbClr val="1A1A1A"/>
+                </a:solidFill>
+                <a:latin typeface="Georgia"/>
+              </a:rPr>
+              <a:t>equivalent quantity to compare against.</a:t>
+            </a:r>
+          </a:p>
+        </p:txBody>
+      </p:sp>
+      <p:sp>
+        <p:nvSpPr>
+          <p:cNvPr id="6" name="TextBox 5"/>
           <p:cNvSpPr txBox="1"/>
           <p:nvPr/>
         </p:nvSpPr>
@@ -15445,7 +14093,7 @@
       </p:sp>
       <p:sp>
         <p:nvSpPr>
-          <p:cNvPr id="8" name="TextBox 7"/>
+          <p:cNvPr id="7" name="TextBox 6"/>
           <p:cNvSpPr txBox="1"/>
           <p:nvPr/>
         </p:nvSpPr>
@@ -15573,14 +14221,14 @@
                 </a:solidFill>
                 <a:latin typeface="Georgia"/>
               </a:rPr>
-              <a:t>What the frozen-backbone fix was worth</a:t>
+              <a:t>Confidence buys the accuracy back: 2.2x better over 80% of the frame</a:t>
             </a:r>
           </a:p>
         </p:txBody>
       </p:sp>
       <p:pic>
         <p:nvPicPr>
-          <p:cNvPr id="4" name="Picture 3" descr="freeze_effect.png"/>
+          <p:cNvPr id="4" name="Picture 3" descr="selective_accuracy.png"/>
           <p:cNvPicPr>
             <a:picLocks noChangeAspect="1"/>
           </p:cNvPicPr>
@@ -15594,8 +14242,8 @@
         </p:blipFill>
         <p:spPr>
           <a:xfrm>
-            <a:off x="685800" y="1463040"/>
-            <a:ext cx="6858000" cy="3554746"/>
+            <a:off x="731520" y="1463040"/>
+            <a:ext cx="7498079" cy="4068107"/>
           </a:xfrm>
           <a:prstGeom prst="rect">
             <a:avLst/>
@@ -15610,8 +14258,8 @@
         </p:nvSpPr>
         <p:spPr>
           <a:xfrm>
-            <a:off x="7818120" y="1600200"/>
-            <a:ext cx="3840480" cy="3566160"/>
+            <a:off x="8549640" y="1645920"/>
+            <a:ext cx="3200400" cy="3291840"/>
           </a:xfrm>
           <a:prstGeom prst="rect">
             <a:avLst/>
@@ -15626,7 +14274,7 @@
           <a:p>
             <a:pPr algn="l">
               <a:lnSpc>
-                <a:spcPct val="116000"/>
+                <a:spcPct val="118000"/>
               </a:lnSpc>
             </a:pPr>
             <a:r>
@@ -15636,13 +14284,13 @@
                 </a:solidFill>
                 <a:latin typeface="Georgia"/>
               </a:rPr>
-              <a:t>BatchNorm updates its running statistics</a:t>
-            </a:r>
-          </a:p>
-          <a:p>
-            <a:pPr algn="l">
-              <a:lnSpc>
-                <a:spcPct val="116000"/>
+              <a:t>Mean error over every pixel is</a:t>
+            </a:r>
+          </a:p>
+          <a:p>
+            <a:pPr algn="l">
+              <a:lnSpc>
+                <a:spcPct val="118000"/>
               </a:lnSpc>
             </a:pPr>
             <a:r>
@@ -15652,13 +14300,13 @@
                 </a:solidFill>
                 <a:latin typeface="Georgia"/>
               </a:rPr>
-              <a:t>on every forward pass in train mode,</a:t>
-            </a:r>
-          </a:p>
-          <a:p>
-            <a:pPr algn="l">
-              <a:lnSpc>
-                <a:spcPct val="116000"/>
+              <a:t>one operating point, and it is</a:t>
+            </a:r>
+          </a:p>
+          <a:p>
+            <a:pPr algn="l">
+              <a:lnSpc>
+                <a:spcPct val="118000"/>
               </a:lnSpc>
             </a:pPr>
             <a:r>
@@ -15668,13 +14316,13 @@
                 </a:solidFill>
                 <a:latin typeface="Georgia"/>
               </a:rPr>
-              <a:t>whatever requires_grad says.</a:t>
-            </a:r>
-          </a:p>
-          <a:p>
-            <a:pPr algn="l">
-              <a:lnSpc>
-                <a:spcPct val="116000"/>
+              <a:t>the only one v2 has.</a:t>
+            </a:r>
+          </a:p>
+          <a:p>
+            <a:pPr algn="l">
+              <a:lnSpc>
+                <a:spcPct val="118000"/>
               </a:lnSpc>
             </a:pPr>
             <a:r>
@@ -15690,7 +14338,7 @@
           <a:p>
             <a:pPr algn="l">
               <a:lnSpc>
-                <a:spcPct val="116000"/>
+                <a:spcPct val="118000"/>
               </a:lnSpc>
             </a:pPr>
             <a:r>
@@ -15700,13 +14348,13 @@
                 </a:solidFill>
                 <a:latin typeface="Georgia"/>
               </a:rPr>
-              <a:t>My first fix held them in eval mode once</a:t>
-            </a:r>
-          </a:p>
-          <a:p>
-            <a:pPr algn="l">
-              <a:lnSpc>
-                <a:spcPct val="116000"/>
+              <a:t>With a confidence value per</a:t>
+            </a:r>
+          </a:p>
+          <a:p>
+            <a:pPr algn="l">
+              <a:lnSpc>
+                <a:spcPct val="118000"/>
               </a:lnSpc>
             </a:pPr>
             <a:r>
@@ -15716,13 +14364,13 @@
                 </a:solidFill>
                 <a:latin typeface="Georgia"/>
               </a:rPr>
-              <a:t>per epoch. The validation block calls</a:t>
-            </a:r>
-          </a:p>
-          <a:p>
-            <a:pPr algn="l">
-              <a:lnSpc>
-                <a:spcPct val="116000"/>
+              <a:t>query, v3 has a curve.</a:t>
+            </a:r>
+          </a:p>
+          <a:p>
+            <a:pPr algn="l">
+              <a:lnSpc>
+                <a:spcPct val="118000"/>
               </a:lnSpc>
             </a:pPr>
             <a:r>
@@ -15732,13 +14380,13 @@
                 </a:solidFill>
                 <a:latin typeface="Georgia"/>
               </a:rPr>
-              <a:t>model.train() again every 5,000 steps,</a:t>
-            </a:r>
-          </a:p>
-          <a:p>
-            <a:pPr algn="l">
-              <a:lnSpc>
-                <a:spcPct val="116000"/>
+              <a:t/>
+            </a:r>
+          </a:p>
+          <a:p>
+            <a:pPr algn="l">
+              <a:lnSpc>
+                <a:spcPct val="118000"/>
               </a:lnSpc>
             </a:pPr>
             <a:r>
@@ -15748,13 +14396,13 @@
                 </a:solidFill>
                 <a:latin typeface="Georgia"/>
               </a:rPr>
-              <a:t>which silently re-enabled them.</a:t>
-            </a:r>
-          </a:p>
-          <a:p>
-            <a:pPr algn="l">
-              <a:lnSpc>
-                <a:spcPct val="116000"/>
+              <a:t>Drop the least confident 20%</a:t>
+            </a:r>
+          </a:p>
+          <a:p>
+            <a:pPr algn="l">
+              <a:lnSpc>
+                <a:spcPct val="118000"/>
               </a:lnSpc>
             </a:pPr>
             <a:r>
@@ -15764,13 +14412,45 @@
                 </a:solidFill>
                 <a:latin typeface="Georgia"/>
               </a:rPr>
+              <a:t>and error falls to 1.06 px,</a:t>
+            </a:r>
+          </a:p>
+          <a:p>
+            <a:pPr algn="l">
+              <a:lnSpc>
+                <a:spcPct val="118000"/>
+              </a:lnSpc>
+            </a:pPr>
+            <a:r>
+              <a:rPr sz="1150" b="0">
+                <a:solidFill>
+                  <a:srgbClr val="1A1A1A"/>
+                </a:solidFill>
+                <a:latin typeface="Georgia"/>
+              </a:rPr>
+              <a:t>against v2 at 2.32.</a:t>
+            </a:r>
+          </a:p>
+          <a:p>
+            <a:pPr algn="l">
+              <a:lnSpc>
+                <a:spcPct val="118000"/>
+              </a:lnSpc>
+            </a:pPr>
+            <a:r>
+              <a:rPr sz="1150" b="0">
+                <a:solidFill>
+                  <a:srgbClr val="1A1A1A"/>
+                </a:solidFill>
+                <a:latin typeface="Georgia"/>
+              </a:rPr>
               <a:t/>
             </a:r>
           </a:p>
           <a:p>
             <a:pPr algn="l">
               <a:lnSpc>
-                <a:spcPct val="116000"/>
+                <a:spcPct val="118000"/>
               </a:lnSpc>
             </a:pPr>
             <a:r>
@@ -15780,13 +14460,13 @@
                 </a:solidFill>
                 <a:latin typeface="Georgia"/>
               </a:rPr>
-              <a:t>Result: 24,765 updates during a run that</a:t>
-            </a:r>
-          </a:p>
-          <a:p>
-            <a:pPr algn="l">
-              <a:lnSpc>
-                <a:spcPct val="116000"/>
+              <a:t>Keep the best fifth and it is</a:t>
+            </a:r>
+          </a:p>
+          <a:p>
+            <a:pPr algn="l">
+              <a:lnSpc>
+                <a:spcPct val="118000"/>
               </a:lnSpc>
             </a:pPr>
             <a:r>
@@ -15796,87 +14476,7 @@
                 </a:solidFill>
                 <a:latin typeface="Georgia"/>
               </a:rPr>
-              <a:t>was supposed to be frozen, worth about</a:t>
-            </a:r>
-          </a:p>
-          <a:p>
-            <a:pPr algn="l">
-              <a:lnSpc>
-                <a:spcPct val="116000"/>
-              </a:lnSpc>
-            </a:pPr>
-            <a:r>
-              <a:rPr sz="1150" b="0">
-                <a:solidFill>
-                  <a:srgbClr val="1A1A1A"/>
-                </a:solidFill>
-                <a:latin typeface="Georgia"/>
-              </a:rPr>
-              <a:t>0.25 px, which is what made v3 look</a:t>
-            </a:r>
-          </a:p>
-          <a:p>
-            <a:pPr algn="l">
-              <a:lnSpc>
-                <a:spcPct val="116000"/>
-              </a:lnSpc>
-            </a:pPr>
-            <a:r>
-              <a:rPr sz="1150" b="0">
-                <a:solidFill>
-                  <a:srgbClr val="1A1A1A"/>
-                </a:solidFill>
-                <a:latin typeface="Georgia"/>
-              </a:rPr>
-              <a:t>equal to v2.</a:t>
-            </a:r>
-          </a:p>
-          <a:p>
-            <a:pPr algn="l">
-              <a:lnSpc>
-                <a:spcPct val="116000"/>
-              </a:lnSpc>
-            </a:pPr>
-            <a:r>
-              <a:rPr sz="1150" b="0">
-                <a:solidFill>
-                  <a:srgbClr val="1A1A1A"/>
-                </a:solidFill>
-                <a:latin typeface="Georgia"/>
-              </a:rPr>
-              <a:t/>
-            </a:r>
-          </a:p>
-          <a:p>
-            <a:pPr algn="l">
-              <a:lnSpc>
-                <a:spcPct val="116000"/>
-              </a:lnSpc>
-            </a:pPr>
-            <a:r>
-              <a:rPr sz="1150" b="0">
-                <a:solidFill>
-                  <a:srgbClr val="1A1A1A"/>
-                </a:solidFill>
-                <a:latin typeface="Georgia"/>
-              </a:rPr>
-              <a:t>Now verified per checkpoint: all 137</a:t>
-            </a:r>
-          </a:p>
-          <a:p>
-            <a:pPr algn="l">
-              <a:lnSpc>
-                <a:spcPct val="116000"/>
-              </a:lnSpc>
-            </a:pPr>
-            <a:r>
-              <a:rPr sz="1150" b="0">
-                <a:solidFill>
-                  <a:srgbClr val="1A1A1A"/>
-                </a:solidFill>
-                <a:latin typeface="Georgia"/>
-              </a:rPr>
-              <a:t>shared tensors bit-identical to v2.</a:t>
+              <a:t>0.48 px, nearly 5x better.</a:t>
             </a:r>
           </a:p>
         </p:txBody>
@@ -15889,8 +14489,8 @@
         </p:nvSpPr>
         <p:spPr>
           <a:xfrm>
-            <a:off x="685800" y="5440680"/>
-            <a:ext cx="6858000" cy="777240"/>
+            <a:off x="8549640" y="5120640"/>
+            <a:ext cx="3200400" cy="914400"/>
           </a:xfrm>
           <a:prstGeom prst="roundRect">
             <a:avLst/>
@@ -15925,25 +14525,37 @@
           <a:p>
             <a:pPr algn="ctr"/>
             <a:r>
-              <a:rPr sz="1100" b="0">
-                <a:solidFill>
-                  <a:srgbClr val="1A1A1A"/>
-                </a:solidFill>
-                <a:latin typeface="Georgia"/>
-              </a:rPr>
-              <a:t>Every accuracy number in this deck comes from the frozen runs. The drifted ones are shown here only</a:t>
+              <a:rPr sz="1050" b="0">
+                <a:solidFill>
+                  <a:srgbClr val="0B6A63"/>
+                </a:solidFill>
+                <a:latin typeface="Georgia"/>
+              </a:rPr>
+              <a:t>For registration and mapping,</a:t>
             </a:r>
           </a:p>
           <a:p>
             <a:pPr algn="ctr"/>
             <a:r>
-              <a:rPr sz="1100" b="0">
-                <a:solidFill>
-                  <a:srgbClr val="1A1A1A"/>
-                </a:solidFill>
-                <a:latin typeface="Georgia"/>
-              </a:rPr>
-              <a:t>to record what the error was worth.</a:t>
+              <a:rPr sz="1050" b="0">
+                <a:solidFill>
+                  <a:srgbClr val="0B6A63"/>
+                </a:solidFill>
+                <a:latin typeface="Georgia"/>
+              </a:rPr>
+              <a:t>where you pick your points</a:t>
+            </a:r>
+          </a:p>
+          <a:p>
+            <a:pPr algn="ctr"/>
+            <a:r>
+              <a:rPr sz="1050" b="0">
+                <a:solidFill>
+                  <a:srgbClr val="0B6A63"/>
+                </a:solidFill>
+                <a:latin typeface="Georgia"/>
+              </a:rPr>
+              <a:t>anyway, abstaining is free.</a:t>
             </a:r>
           </a:p>
         </p:txBody>

--- a/docs/NeuFlow_v3_status.pptx
+++ b/docs/NeuFlow_v3_status.pptx
@@ -20,6 +20,8 @@
     <p:sldId id="268" r:id="rId20"/>
     <p:sldId id="269" r:id="rId21"/>
     <p:sldId id="270" r:id="rId22"/>
+    <p:sldId id="271" r:id="rId23"/>
+    <p:sldId id="272" r:id="rId24"/>
   </p:sldIdLst>
   <p:sldSz cx="12191695" cy="6858000" type="screen4x3"/>
   <p:notesSz cx="6858000" cy="9144000"/>
@@ -586,7 +588,7 @@
           <a:lstStyle/>
           <a:p>
             <a:r>
-              <a:t>The interface is two calls. One coarse pass per frame pair, then as many decode calls as you like against it. The plot shows decode cost is flat between 800 and 2,048 queries, which tells you it is dominated by kernel launch overhead, not arithmetic, so you get two thousand points for the price of eight hundred. Above about ten thousand points it becomes compute bound and you should just use dense mode.</a:t>
+              <a:t>This is the platform finding, and I want to be clear that it applies to any flow network, not just mine. Crop to a region with a margin and you keep full resolution where you are looking. The accuracy cost is small and fixed: thirty four thousandths of a pixel at a thirty-two pixel margin, identical on both devices because it is the same computation. The speed benefit is not fixed at all. On the laptop GPU it is four point four times. On the V100 it is one point one eight, and at large margins it is actually slower. The reason is that the V100 already does the whole frame in under eighteen milliseconds and is bound by the number of kernel launches rather than the number of pixels, and cropping does not reduce the launch count. The useful part is the direction: this technique pays off precisely on the constrained hardware a drone would carry, and looks pointless on a datacentre GPU. So the number has to be quoted per device. The margin itself follows a rule: it needs to be about one frame of expected motion, which is speed over frame rate. Below that, global matching loses the context it needs and a quarter of the large-motion pixels fail.</a:t>
             </a:r>
           </a:p>
         </p:txBody>
@@ -656,7 +658,7 @@
           <a:lstStyle/>
           <a:p>
             <a:r>
-              <a:t>This is a working tool, not a mock-up. You load a video, step to a frame, drag a box, and it computes flow in that box. Two modes. Query mode runs the full coarse pass and decodes only inside the box, which is exact. Crop mode feeds just the box through the whole pipeline, so the cost scales with the area you asked for, but it loses the surrounding context that global matching uses. The panel shows the actual breakdown live, including the parts where v3 is not the faster option.</a:t>
+              <a:t>This is the scenario you described where the repeat query matters, and it is the one result that is specific to this architecture rather than to cropping. A frame is already in flight, and a new object enters the field of view. Because the coarse pass is cached, answering costs one point seven milliseconds for eight hundred points. A cropped pipeline cannot reuse anything: the new object is outside its box, so it runs a whole new pass at seven point three milliseconds, four times more, and the answer is worse, three point six pixels against two point one, because a fresh crop has lost the surrounding context. NeuFlow v2 keeps no state at all between calls. The general point is that this buys you the ability to answer a question you did not know you would have when the frame arrived, which on a moving platform is most of them.</a:t>
             </a:r>
           </a:p>
         </p:txBody>
@@ -726,7 +728,7 @@
           <a:lstStyle/>
           <a:p>
             <a:r>
-              <a:t>Here is the scorecard against what I set out to do, and two of three are not met. Better accuracy: not met, the fair comparison is a tie. Less compute: partly, dense is slower, a first query is level, but repeat queries are nearly eight times cheaper. Edge capable: unproven, everything I have measured is on a V100 or a laptop 4060 and I have not touched a Jetson. What the project does deliver is the three things at the bottom: output you can query at any coordinate, cheap repeat access to a cached frame, and a calibrated confidence value. Those are real and they are measured.</a:t>
+              <a:t>The interface is two calls. One coarse pass per frame pair, then as many decode calls as you like against it. The plot shows decode cost is flat between 800 and 2,048 queries, which tells you it is dominated by kernel launch overhead, not arithmetic, so you get two thousand points for the price of eight hundred. Above about ten thousand points it becomes compute bound and you should just use dense mode.</a:t>
             </a:r>
           </a:p>
         </p:txBody>
@@ -796,7 +798,7 @@
           <a:lstStyle/>
           <a:p>
             <a:r>
-              <a:t>Limitations, stated plainly rather than buried. Precision is worse than v2 and I have diagnosed but not fixed it. There is no edge device measurement at all, so the word edge in my title is a design target and not a result. Everything is evaluated on one synthetic driving dataset, which says little about field imagery. The Spring run was cut off by the cluster wall clock. And I have one seed per configuration, so please do not read too much into differences below about five hundredths of a pixel.</a:t>
+              <a:t>This is a working tool, not a mock-up. You load a video, step to a frame, drag a box, and it computes flow in that box. Two modes. Query mode runs the full coarse pass and decodes only inside the box, which is exact. Crop mode feeds just the box through the whole pipeline, so the cost scales with the area you asked for, but it loses the surrounding context that global matching uses. The panel shows the actual breakdown live, including the parts where v3 is not the faster option.</a:t>
             </a:r>
           </a:p>
         </p:txBody>
@@ -866,7 +868,7 @@
           <a:lstStyle/>
           <a:p>
             <a:r>
-              <a:t>Four next steps in priority order. First, give the decoder a full resolution feature map. That is the direct attack on the precision gap, and it also matters because right now querying between pixels returns something close to interpolation, so the arbitrary coordinate claim is thinner than it sounds. Second, the Spring dataset gives ground truth at twice the input resolution, which v3 can be queried at natively and v2 structurally cannot. That is the one test that shows a capability rather than a margin. Third, actually measure a Jetson. Fourth, try it on real survey imagery.</a:t>
+              <a:t>Here is the scorecard against what I set out to do, and two of three are not met. Better accuracy: not met, the fair comparison is a tie. Less compute: partly, dense is slower, a first query is level, but repeat queries are nearly eight times cheaper. Edge capable: unproven, everything I have measured is on a V100 or a laptop 4060 and I have not touched a Jetson. What the project does deliver is the three things at the bottom: output you can query at any coordinate, cheap repeat access to a cached frame, and a calibrated confidence value. Those are real and they are measured.</a:t>
             </a:r>
           </a:p>
         </p:txBody>
@@ -892,6 +894,146 @@
 </file>
 
 <file path=ppt/notesSlides/notesSlide15.xml><?xml version="1.0" encoding="utf-8"?>
+<p:notes xmlns:a="http://schemas.openxmlformats.org/drawingml/2006/main" xmlns:p="http://schemas.openxmlformats.org/presentationml/2006/main" xmlns:r="http://schemas.openxmlformats.org/officeDocument/2006/relationships">
+  <p:cSld>
+    <p:spTree>
+      <p:nvGrpSpPr>
+        <p:cNvPr id="1" name=""/>
+        <p:cNvGrpSpPr/>
+        <p:nvPr/>
+      </p:nvGrpSpPr>
+      <p:grpSpPr>
+        <a:xfrm>
+          <a:off x="0" y="0"/>
+          <a:ext cx="0" cy="0"/>
+          <a:chOff x="0" y="0"/>
+          <a:chExt cx="0" cy="0"/>
+        </a:xfrm>
+      </p:grpSpPr>
+      <p:sp>
+        <p:nvSpPr>
+          <p:cNvPr id="2" name="Slide Image Placeholder 1"/>
+          <p:cNvSpPr>
+            <a:spLocks noGrp="1"/>
+          </p:cNvSpPr>
+          <p:nvPr>
+            <p:ph type="sldImg" idx="2"/>
+          </p:nvPr>
+        </p:nvSpPr>
+        <p:spPr/>
+      </p:sp>
+      <p:sp>
+        <p:nvSpPr>
+          <p:cNvPr id="3" name="Notes Placeholder 2"/>
+          <p:cNvSpPr>
+            <a:spLocks noGrp="1"/>
+          </p:cNvSpPr>
+          <p:nvPr>
+            <p:ph type="body" idx="3" sz="quarter"/>
+          </p:nvPr>
+        </p:nvSpPr>
+        <p:spPr/>
+        <p:txBody>
+          <a:bodyPr/>
+          <a:lstStyle/>
+          <a:p>
+            <a:r>
+              <a:t>Limitations, stated plainly rather than buried. Precision is worse than v2 and I have diagnosed but not fixed it. There is no edge device measurement at all, so the word edge in my title is a design target and not a result. Everything is evaluated on one synthetic driving dataset, which says little about field imagery. The Spring run was cut off by the cluster wall clock. And I have one seed per configuration, so please do not read too much into differences below about five hundredths of a pixel.</a:t>
+            </a:r>
+          </a:p>
+        </p:txBody>
+      </p:sp>
+      <p:sp>
+        <p:nvSpPr>
+          <p:cNvPr id="4" name="Slide Number Placeholder 3"/>
+          <p:cNvSpPr>
+            <a:spLocks noGrp="1"/>
+          </p:cNvSpPr>
+          <p:nvPr>
+            <p:ph type="sldNum" idx="5" sz="quarter"/>
+          </p:nvPr>
+        </p:nvSpPr>
+        <p:spPr/>
+      </p:sp>
+    </p:spTree>
+  </p:cSld>
+  <p:clrMapOvr>
+    <a:masterClrMapping/>
+  </p:clrMapOvr>
+</p:notes>
+</file>
+
+<file path=ppt/notesSlides/notesSlide16.xml><?xml version="1.0" encoding="utf-8"?>
+<p:notes xmlns:a="http://schemas.openxmlformats.org/drawingml/2006/main" xmlns:p="http://schemas.openxmlformats.org/presentationml/2006/main" xmlns:r="http://schemas.openxmlformats.org/officeDocument/2006/relationships">
+  <p:cSld>
+    <p:spTree>
+      <p:nvGrpSpPr>
+        <p:cNvPr id="1" name=""/>
+        <p:cNvGrpSpPr/>
+        <p:nvPr/>
+      </p:nvGrpSpPr>
+      <p:grpSpPr>
+        <a:xfrm>
+          <a:off x="0" y="0"/>
+          <a:ext cx="0" cy="0"/>
+          <a:chOff x="0" y="0"/>
+          <a:chExt cx="0" cy="0"/>
+        </a:xfrm>
+      </p:grpSpPr>
+      <p:sp>
+        <p:nvSpPr>
+          <p:cNvPr id="2" name="Slide Image Placeholder 1"/>
+          <p:cNvSpPr>
+            <a:spLocks noGrp="1"/>
+          </p:cNvSpPr>
+          <p:nvPr>
+            <p:ph type="sldImg" idx="2"/>
+          </p:nvPr>
+        </p:nvSpPr>
+        <p:spPr/>
+      </p:sp>
+      <p:sp>
+        <p:nvSpPr>
+          <p:cNvPr id="3" name="Notes Placeholder 2"/>
+          <p:cNvSpPr>
+            <a:spLocks noGrp="1"/>
+          </p:cNvSpPr>
+          <p:nvPr>
+            <p:ph type="body" idx="3" sz="quarter"/>
+          </p:nvPr>
+        </p:nvSpPr>
+        <p:spPr/>
+        <p:txBody>
+          <a:bodyPr/>
+          <a:lstStyle/>
+          <a:p>
+            <a:r>
+              <a:t>Four next steps in priority order. First, give the decoder a full resolution feature map. That is the direct attack on the precision gap, and it also matters because right now querying between pixels returns something close to interpolation, so the arbitrary coordinate claim is thinner than it sounds. Second, the Spring dataset gives ground truth at twice the input resolution, which v3 can be queried at natively and v2 structurally cannot. That is the one test that shows a capability rather than a margin. Third, actually measure a Jetson. Fourth, try it on real survey imagery.</a:t>
+            </a:r>
+          </a:p>
+        </p:txBody>
+      </p:sp>
+      <p:sp>
+        <p:nvSpPr>
+          <p:cNvPr id="4" name="Slide Number Placeholder 3"/>
+          <p:cNvSpPr>
+            <a:spLocks noGrp="1"/>
+          </p:cNvSpPr>
+          <p:nvPr>
+            <p:ph type="sldNum" idx="5" sz="quarter"/>
+          </p:nvPr>
+        </p:nvSpPr>
+        <p:spPr/>
+      </p:sp>
+    </p:spTree>
+  </p:cSld>
+  <p:clrMapOvr>
+    <a:masterClrMapping/>
+  </p:clrMapOvr>
+</p:notes>
+</file>
+
+<file path=ppt/notesSlides/notesSlide17.xml><?xml version="1.0" encoding="utf-8"?>
 <p:notes xmlns:a="http://schemas.openxmlformats.org/drawingml/2006/main" xmlns:p="http://schemas.openxmlformats.org/presentationml/2006/main" xmlns:r="http://schemas.openxmlformats.org/officeDocument/2006/relationships">
   <p:cSld>
     <p:spTree>
@@ -4848,7 +4990,7 @@
                 </a:solidFill>
                 <a:latin typeface="Georgia"/>
               </a:rPr>
-              <a:t>INTERFACE</a:t>
+              <a:t>RESULTS</a:t>
             </a:r>
           </a:p>
         </p:txBody>
@@ -4887,14 +5029,14 @@
                 </a:solidFill>
                 <a:latin typeface="Georgia"/>
               </a:rPr>
-              <a:t>What a query costs, and how you make one</a:t>
+              <a:t>Flowing only part of the frame: where it pays</a:t>
             </a:r>
           </a:p>
         </p:txBody>
       </p:sp>
       <p:pic>
         <p:nvPicPr>
-          <p:cNvPr id="4" name="Picture 3" descr="decode_flat.png"/>
+          <p:cNvPr id="4" name="Picture 3" descr="roi_crop_devices.png"/>
           <p:cNvPicPr>
             <a:picLocks noChangeAspect="1"/>
           </p:cNvPicPr>
@@ -4908,8 +5050,8 @@
         </p:blipFill>
         <p:spPr>
           <a:xfrm>
-            <a:off x="731520" y="1508760"/>
-            <a:ext cx="6400800" cy="3231565"/>
+            <a:off x="1234440" y="1463040"/>
+            <a:ext cx="9692640" cy="3862969"/>
           </a:xfrm>
           <a:prstGeom prst="rect">
             <a:avLst/>
@@ -4924,8 +5066,8 @@
         </p:nvSpPr>
         <p:spPr>
           <a:xfrm>
-            <a:off x="7406640" y="1645920"/>
-            <a:ext cx="4206240" cy="365760"/>
+            <a:off x="685800" y="5440680"/>
+            <a:ext cx="10881360" cy="1005840"/>
           </a:xfrm>
           <a:prstGeom prst="rect">
             <a:avLst/>
@@ -4940,170 +5082,79 @@
           <a:p>
             <a:pPr algn="l">
               <a:lnSpc>
-                <a:spcPct val="100000"/>
-              </a:lnSpc>
-            </a:pPr>
-            <a:r>
-              <a:rPr sz="1200" b="1">
-                <a:solidFill>
-                  <a:srgbClr val="333333"/>
-                </a:solidFill>
-                <a:latin typeface="Georgia"/>
-              </a:rPr>
-              <a:t>The entire API</a:t>
-            </a:r>
-          </a:p>
-        </p:txBody>
-      </p:sp>
-      <p:sp>
-        <p:nvSpPr>
-          <p:cNvPr id="6" name="Rounded Rectangle 5"/>
-          <p:cNvSpPr/>
-          <p:nvPr/>
-        </p:nvSpPr>
-        <p:spPr>
-          <a:xfrm>
-            <a:off x="7406640" y="2011680"/>
-            <a:ext cx="4206240" cy="1737360"/>
-          </a:xfrm>
-          <a:prstGeom prst="roundRect">
-            <a:avLst/>
-          </a:prstGeom>
-          <a:solidFill>
-            <a:srgbClr val="EFEFEF"/>
-          </a:solidFill>
-          <a:ln w="9525">
-            <a:solidFill>
-              <a:srgbClr val="8A8A8A"/>
-            </a:solidFill>
-          </a:ln>
-          <a:effectLst/>
-        </p:spPr>
-        <p:style>
-          <a:lnRef idx="1">
-            <a:schemeClr val="accent1"/>
-          </a:lnRef>
-          <a:fillRef idx="3">
-            <a:schemeClr val="accent1"/>
-          </a:fillRef>
-          <a:effectRef idx="2">
-            <a:schemeClr val="accent1"/>
-          </a:effectRef>
-          <a:fontRef idx="minor">
-            <a:schemeClr val="lt1"/>
-          </a:fontRef>
-        </p:style>
-        <p:txBody>
-          <a:bodyPr rtlCol="0" anchor="ctr" wrap="square" lIns="73152" rIns="73152"/>
-          <a:lstStyle/>
-          <a:p>
-            <a:pPr algn="ctr"/>
-            <a:r>
-              <a:rPr sz="1000" b="0">
-                <a:solidFill>
-                  <a:srgbClr val="1A1A1A"/>
-                </a:solidFill>
-                <a:latin typeface="Georgia"/>
-              </a:rPr>
-              <a:t>state = model.infer_coarse_state(img0, img1)</a:t>
-            </a:r>
-          </a:p>
-          <a:p>
-            <a:pPr algn="ctr"/>
-            <a:r>
-              <a:rPr sz="1000" b="0">
-                <a:solidFill>
-                  <a:srgbClr val="1A1A1A"/>
-                </a:solidFill>
-                <a:latin typeface="Georgia"/>
-              </a:rPr>
-              <a:t>                                  once, 17 ms</a:t>
-            </a:r>
-          </a:p>
-          <a:p>
-            <a:pPr algn="ctr"/>
-            <a:r>
-              <a:rPr sz="1000" b="0">
-                <a:solidFill>
-                  <a:srgbClr val="1A1A1A"/>
-                </a:solidFill>
-                <a:latin typeface="Georgia"/>
-              </a:rPr>
-              <a:t/>
-            </a:r>
-          </a:p>
-          <a:p>
-            <a:pPr algn="ctr"/>
-            <a:r>
-              <a:rPr sz="1000" b="0">
-                <a:solidFill>
-                  <a:srgbClr val="1A1A1A"/>
-                </a:solidFill>
-                <a:latin typeface="Georgia"/>
-              </a:rPr>
-              <a:t>flow  = model.decode_queries(</a:t>
-            </a:r>
-          </a:p>
-          <a:p>
-            <a:pPr algn="ctr"/>
-            <a:r>
-              <a:rPr sz="1000" b="0">
-                <a:solidFill>
-                  <a:srgbClr val="1A1A1A"/>
-                </a:solidFill>
-                <a:latin typeface="Georgia"/>
-              </a:rPr>
-              <a:t>            state, query_coords=q)</a:t>
-            </a:r>
-          </a:p>
-          <a:p>
-            <a:pPr algn="ctr"/>
-            <a:r>
-              <a:rPr sz="1000" b="0">
-                <a:solidFill>
-                  <a:srgbClr val="1A1A1A"/>
-                </a:solidFill>
-                <a:latin typeface="Georgia"/>
-              </a:rPr>
-              <a:t>            q: [B, N, 2] -&gt; [B, N, 2], 2.6 ms</a:t>
-            </a:r>
-          </a:p>
-          <a:p>
-            <a:pPr algn="ctr"/>
-            <a:r>
-              <a:rPr sz="1000" b="0">
-                <a:solidFill>
-                  <a:srgbClr val="1A1A1A"/>
-                </a:solidFill>
-                <a:latin typeface="Georgia"/>
-              </a:rPr>
-              <a:t/>
-            </a:r>
-          </a:p>
-          <a:p>
-            <a:pPr algn="ctr"/>
-            <a:r>
-              <a:rPr sz="1000" b="0">
-                <a:solidFill>
-                  <a:srgbClr val="1A1A1A"/>
-                </a:solidFill>
-                <a:latin typeface="Georgia"/>
-              </a:rPr>
-              <a:t>flow, b = ... (return_uncertainty=True)</a:t>
-            </a:r>
-          </a:p>
-        </p:txBody>
-      </p:sp>
-      <p:sp>
-        <p:nvSpPr>
-          <p:cNvPr id="7" name="TextBox 6"/>
+                <a:spcPct val="115000"/>
+              </a:lnSpc>
+            </a:pPr>
+            <a:r>
+              <a:rPr sz="1150" b="0">
+                <a:solidFill>
+                  <a:srgbClr val="1A1A1A"/>
+                </a:solidFill>
+                <a:latin typeface="Georgia"/>
+              </a:rPr>
+              <a:t>Same script, same 40 pairs, same margins, two devices. The accuracy cost of cropping is fixed at +0.034 px; the</a:t>
+            </a:r>
+          </a:p>
+          <a:p>
+            <a:pPr algn="l">
+              <a:lnSpc>
+                <a:spcPct val="115000"/>
+              </a:lnSpc>
+            </a:pPr>
+            <a:r>
+              <a:rPr sz="1150" b="0">
+                <a:solidFill>
+                  <a:srgbClr val="1A1A1A"/>
+                </a:solidFill>
+                <a:latin typeface="Georgia"/>
+              </a:rPr>
+              <a:t>speed benefit is 4.4x on an RTX 4060 and 1.18x on a V100. The V100 finishes a full frame in 17.8 ms and is bound by</a:t>
+            </a:r>
+          </a:p>
+          <a:p>
+            <a:pPr algn="l">
+              <a:lnSpc>
+                <a:spcPct val="115000"/>
+              </a:lnSpc>
+            </a:pPr>
+            <a:r>
+              <a:rPr sz="1150" b="0">
+                <a:solidFill>
+                  <a:srgbClr val="1A1A1A"/>
+                </a:solidFill>
+                <a:latin typeface="Georgia"/>
+              </a:rPr>
+              <a:t>kernel launches, not pixels, so removing 86% of the area removes almost no work. Constrained hardware is compute</a:t>
+            </a:r>
+          </a:p>
+          <a:p>
+            <a:pPr algn="l">
+              <a:lnSpc>
+                <a:spcPct val="115000"/>
+              </a:lnSpc>
+            </a:pPr>
+            <a:r>
+              <a:rPr sz="1150" b="0">
+                <a:solidFill>
+                  <a:srgbClr val="1A1A1A"/>
+                </a:solidFill>
+                <a:latin typeface="Georgia"/>
+              </a:rPr>
+              <a:t>bound and converts the saving nearly in full, which is the deployment case.</a:t>
+            </a:r>
+          </a:p>
+        </p:txBody>
+      </p:sp>
+      <p:sp>
+        <p:nvSpPr>
+          <p:cNvPr id="6" name="TextBox 5"/>
           <p:cNvSpPr txBox="1"/>
           <p:nvPr/>
         </p:nvSpPr>
         <p:spPr>
           <a:xfrm>
-            <a:off x="7406640" y="3931920"/>
-            <a:ext cx="4206240" cy="1828800"/>
+            <a:off x="685800" y="6419088"/>
+            <a:ext cx="7315200" cy="274320"/>
           </a:xfrm>
           <a:prstGeom prst="rect">
             <a:avLst/>
@@ -5118,157 +5169,6 @@
           <a:p>
             <a:pPr algn="l">
               <a:lnSpc>
-                <a:spcPct val="118000"/>
-              </a:lnSpc>
-            </a:pPr>
-            <a:r>
-              <a:rPr sz="1150" b="0">
-                <a:solidFill>
-                  <a:srgbClr val="1A1A1A"/>
-                </a:solidFill>
-                <a:latin typeface="Georgia"/>
-              </a:rPr>
-              <a:t>Decode cost is flat from 800 to 2,048</a:t>
-            </a:r>
-          </a:p>
-          <a:p>
-            <a:pPr algn="l">
-              <a:lnSpc>
-                <a:spcPct val="118000"/>
-              </a:lnSpc>
-            </a:pPr>
-            <a:r>
-              <a:rPr sz="1150" b="0">
-                <a:solidFill>
-                  <a:srgbClr val="1A1A1A"/>
-                </a:solidFill>
-                <a:latin typeface="Georgia"/>
-              </a:rPr>
-              <a:t>queries, so it is bound by kernel launch</a:t>
-            </a:r>
-          </a:p>
-          <a:p>
-            <a:pPr algn="l">
-              <a:lnSpc>
-                <a:spcPct val="118000"/>
-              </a:lnSpc>
-            </a:pPr>
-            <a:r>
-              <a:rPr sz="1150" b="0">
-                <a:solidFill>
-                  <a:srgbClr val="1A1A1A"/>
-                </a:solidFill>
-                <a:latin typeface="Georgia"/>
-              </a:rPr>
-              <a:t>overhead rather than compute. You get</a:t>
-            </a:r>
-          </a:p>
-          <a:p>
-            <a:pPr algn="l">
-              <a:lnSpc>
-                <a:spcPct val="118000"/>
-              </a:lnSpc>
-            </a:pPr>
-            <a:r>
-              <a:rPr sz="1150" b="0">
-                <a:solidFill>
-                  <a:srgbClr val="1A1A1A"/>
-                </a:solidFill>
-                <a:latin typeface="Georgia"/>
-              </a:rPr>
-              <a:t>2,048 points for the price of 800.</a:t>
-            </a:r>
-          </a:p>
-          <a:p>
-            <a:pPr algn="l">
-              <a:lnSpc>
-                <a:spcPct val="118000"/>
-              </a:lnSpc>
-            </a:pPr>
-            <a:r>
-              <a:rPr sz="1150" b="0">
-                <a:solidFill>
-                  <a:srgbClr val="1A1A1A"/>
-                </a:solidFill>
-                <a:latin typeface="Georgia"/>
-              </a:rPr>
-              <a:t/>
-            </a:r>
-          </a:p>
-          <a:p>
-            <a:pPr algn="l">
-              <a:lnSpc>
-                <a:spcPct val="118000"/>
-              </a:lnSpc>
-            </a:pPr>
-            <a:r>
-              <a:rPr sz="1150" b="0">
-                <a:solidFill>
-                  <a:srgbClr val="1A1A1A"/>
-                </a:solidFill>
-                <a:latin typeface="Georgia"/>
-              </a:rPr>
-              <a:t>Above roughly 10,000 points the decode</a:t>
-            </a:r>
-          </a:p>
-          <a:p>
-            <a:pPr algn="l">
-              <a:lnSpc>
-                <a:spcPct val="118000"/>
-              </a:lnSpc>
-            </a:pPr>
-            <a:r>
-              <a:rPr sz="1150" b="0">
-                <a:solidFill>
-                  <a:srgbClr val="1A1A1A"/>
-                </a:solidFill>
-                <a:latin typeface="Georgia"/>
-              </a:rPr>
-              <a:t>becomes compute-bound and dense mode</a:t>
-            </a:r>
-          </a:p>
-          <a:p>
-            <a:pPr algn="l">
-              <a:lnSpc>
-                <a:spcPct val="118000"/>
-              </a:lnSpc>
-            </a:pPr>
-            <a:r>
-              <a:rPr sz="1150" b="0">
-                <a:solidFill>
-                  <a:srgbClr val="1A1A1A"/>
-                </a:solidFill>
-                <a:latin typeface="Georgia"/>
-              </a:rPr>
-              <a:t>is the better choice.</a:t>
-            </a:r>
-          </a:p>
-        </p:txBody>
-      </p:sp>
-      <p:sp>
-        <p:nvSpPr>
-          <p:cNvPr id="8" name="TextBox 7"/>
-          <p:cNvSpPr txBox="1"/>
-          <p:nvPr/>
-        </p:nvSpPr>
-        <p:spPr>
-          <a:xfrm>
-            <a:off x="685800" y="6419088"/>
-            <a:ext cx="7315200" cy="274320"/>
-          </a:xfrm>
-          <a:prstGeom prst="rect">
-            <a:avLst/>
-          </a:prstGeom>
-          <a:noFill/>
-        </p:spPr>
-        <p:txBody>
-          <a:bodyPr wrap="square">
-            <a:spAutoFit/>
-          </a:bodyPr>
-          <a:lstStyle/>
-          <a:p>
-            <a:pPr algn="l">
-              <a:lnSpc>
                 <a:spcPct val="100000"/>
               </a:lnSpc>
             </a:pPr>
@@ -5286,7 +5186,7 @@
       </p:sp>
       <p:sp>
         <p:nvSpPr>
-          <p:cNvPr id="9" name="TextBox 8"/>
+          <p:cNvPr id="7" name="TextBox 6"/>
           <p:cNvSpPr txBox="1"/>
           <p:nvPr/>
         </p:nvSpPr>
@@ -5375,7 +5275,7 @@
                 </a:solidFill>
                 <a:latin typeface="Georgia"/>
               </a:rPr>
-              <a:t>INTERFACE</a:t>
+              <a:t>RESULTS</a:t>
             </a:r>
           </a:p>
         </p:txBody>
@@ -5414,14 +5314,14 @@
                 </a:solidFill>
                 <a:latin typeface="Georgia"/>
               </a:rPr>
-              <a:t>Working tool: draw a region, get flow there</a:t>
+              <a:t>A new object appears: 1.7 ms, against 7.3 for a new crop</a:t>
             </a:r>
           </a:p>
         </p:txBody>
       </p:sp>
       <p:pic>
         <p:nvPicPr>
-          <p:cNvPr id="4" name="Picture 3" descr="region_gui_window.png"/>
+          <p:cNvPr id="4" name="Picture 3" descr="scenario3_marginal.png"/>
           <p:cNvPicPr>
             <a:picLocks noChangeAspect="1"/>
           </p:cNvPicPr>
@@ -5435,8 +5335,8 @@
         </p:blipFill>
         <p:spPr>
           <a:xfrm>
-            <a:off x="731520" y="1508760"/>
-            <a:ext cx="6949440" cy="3716489"/>
+            <a:off x="1234440" y="1463040"/>
+            <a:ext cx="9692640" cy="3862969"/>
           </a:xfrm>
           <a:prstGeom prst="rect">
             <a:avLst/>
@@ -5451,8 +5351,8 @@
         </p:nvSpPr>
         <p:spPr>
           <a:xfrm>
-            <a:off x="7955279" y="1645920"/>
-            <a:ext cx="3657600" cy="4023360"/>
+            <a:off x="685800" y="5440680"/>
+            <a:ext cx="10881360" cy="1005840"/>
           </a:xfrm>
           <a:prstGeom prst="rect">
             <a:avLst/>
@@ -5467,7 +5367,7 @@
           <a:p>
             <a:pPr algn="l">
               <a:lnSpc>
-                <a:spcPct val="118000"/>
+                <a:spcPct val="115000"/>
               </a:lnSpc>
             </a:pPr>
             <a:r>
@@ -5477,13 +5377,13 @@
                 </a:solidFill>
                 <a:latin typeface="Georgia"/>
               </a:rPr>
-              <a:t>Load a video, step frame by frame,</a:t>
-            </a:r>
-          </a:p>
-          <a:p>
-            <a:pPr algn="l">
-              <a:lnSpc>
-                <a:spcPct val="118000"/>
+              <a:t>The third scenario: a frame is already being processed when something new enters the field of view. Because the</a:t>
+            </a:r>
+          </a:p>
+          <a:p>
+            <a:pPr algn="l">
+              <a:lnSpc>
+                <a:spcPct val="115000"/>
               </a:lnSpc>
             </a:pPr>
             <a:r>
@@ -5493,13 +5393,13 @@
                 </a:solidFill>
                 <a:latin typeface="Georgia"/>
               </a:rPr>
-              <a:t>drag a box, get flow for that region.</a:t>
-            </a:r>
-          </a:p>
-          <a:p>
-            <a:pPr algn="l">
-              <a:lnSpc>
-                <a:spcPct val="118000"/>
+              <a:t>coarse pass is cached, the decoder answers for 1.7 ms. A cropped pipeline has to run an entire new pass, 7.3 ms,</a:t>
+            </a:r>
+          </a:p>
+          <a:p>
+            <a:pPr algn="l">
+              <a:lnSpc>
+                <a:spcPct val="115000"/>
               </a:lnSpc>
             </a:pPr>
             <a:r>
@@ -5509,13 +5409,13 @@
                 </a:solidFill>
                 <a:latin typeface="Georgia"/>
               </a:rPr>
-              <a:t/>
-            </a:r>
-          </a:p>
-          <a:p>
-            <a:pPr algn="l">
-              <a:lnSpc>
-                <a:spcPct val="118000"/>
+              <a:t>and is markedly less accurate doing it because a fresh crop loses the global context that finds large motion.</a:t>
+            </a:r>
+          </a:p>
+          <a:p>
+            <a:pPr algn="l">
+              <a:lnSpc>
+                <a:spcPct val="115000"/>
               </a:lnSpc>
             </a:pPr>
             <a:r>
@@ -5525,183 +5425,7 @@
                 </a:solidFill>
                 <a:latin typeface="Georgia"/>
               </a:rPr>
-              <a:t>Two modes, both timed live:</a:t>
-            </a:r>
-          </a:p>
-          <a:p>
-            <a:pPr algn="l">
-              <a:lnSpc>
-                <a:spcPct val="118000"/>
-              </a:lnSpc>
-            </a:pPr>
-            <a:r>
-              <a:rPr sz="1150" b="0">
-                <a:solidFill>
-                  <a:srgbClr val="1A1A1A"/>
-                </a:solidFill>
-                <a:latin typeface="Georgia"/>
-              </a:rPr>
-              <a:t/>
-            </a:r>
-          </a:p>
-          <a:p>
-            <a:pPr algn="l">
-              <a:lnSpc>
-                <a:spcPct val="118000"/>
-              </a:lnSpc>
-            </a:pPr>
-            <a:r>
-              <a:rPr sz="1150" b="0">
-                <a:solidFill>
-                  <a:srgbClr val="1A1A1A"/>
-                </a:solidFill>
-                <a:latin typeface="Georgia"/>
-              </a:rPr>
-              <a:t>QUERY decodes only inside the box</a:t>
-            </a:r>
-          </a:p>
-          <a:p>
-            <a:pPr algn="l">
-              <a:lnSpc>
-                <a:spcPct val="118000"/>
-              </a:lnSpc>
-            </a:pPr>
-            <a:r>
-              <a:rPr sz="1150" b="0">
-                <a:solidFill>
-                  <a:srgbClr val="1A1A1A"/>
-                </a:solidFill>
-                <a:latin typeface="Georgia"/>
-              </a:rPr>
-              <a:t>against a full-frame coarse pass. Exact.</a:t>
-            </a:r>
-          </a:p>
-          <a:p>
-            <a:pPr algn="l">
-              <a:lnSpc>
-                <a:spcPct val="118000"/>
-              </a:lnSpc>
-            </a:pPr>
-            <a:r>
-              <a:rPr sz="1150" b="0">
-                <a:solidFill>
-                  <a:srgbClr val="1A1A1A"/>
-                </a:solidFill>
-                <a:latin typeface="Georgia"/>
-              </a:rPr>
-              <a:t/>
-            </a:r>
-          </a:p>
-          <a:p>
-            <a:pPr algn="l">
-              <a:lnSpc>
-                <a:spcPct val="118000"/>
-              </a:lnSpc>
-            </a:pPr>
-            <a:r>
-              <a:rPr sz="1150" b="0">
-                <a:solidFill>
-                  <a:srgbClr val="1A1A1A"/>
-                </a:solidFill>
-                <a:latin typeface="Georgia"/>
-              </a:rPr>
-              <a:t>CROP feeds only the box through the</a:t>
-            </a:r>
-          </a:p>
-          <a:p>
-            <a:pPr algn="l">
-              <a:lnSpc>
-                <a:spcPct val="118000"/>
-              </a:lnSpc>
-            </a:pPr>
-            <a:r>
-              <a:rPr sz="1150" b="0">
-                <a:solidFill>
-                  <a:srgbClr val="1A1A1A"/>
-                </a:solidFill>
-                <a:latin typeface="Georgia"/>
-              </a:rPr>
-              <a:t>whole pipeline, so cost scales with the</a:t>
-            </a:r>
-          </a:p>
-          <a:p>
-            <a:pPr algn="l">
-              <a:lnSpc>
-                <a:spcPct val="118000"/>
-              </a:lnSpc>
-            </a:pPr>
-            <a:r>
-              <a:rPr sz="1150" b="0">
-                <a:solidFill>
-                  <a:srgbClr val="1A1A1A"/>
-                </a:solidFill>
-                <a:latin typeface="Georgia"/>
-              </a:rPr>
-              <a:t>area requested, at the price of losing</a:t>
-            </a:r>
-          </a:p>
-          <a:p>
-            <a:pPr algn="l">
-              <a:lnSpc>
-                <a:spcPct val="118000"/>
-              </a:lnSpc>
-            </a:pPr>
-            <a:r>
-              <a:rPr sz="1150" b="0">
-                <a:solidFill>
-                  <a:srgbClr val="1A1A1A"/>
-                </a:solidFill>
-                <a:latin typeface="Georgia"/>
-              </a:rPr>
-              <a:t>context outside the crop.</a:t>
-            </a:r>
-          </a:p>
-          <a:p>
-            <a:pPr algn="l">
-              <a:lnSpc>
-                <a:spcPct val="118000"/>
-              </a:lnSpc>
-            </a:pPr>
-            <a:r>
-              <a:rPr sz="1150" b="0">
-                <a:solidFill>
-                  <a:srgbClr val="1A1A1A"/>
-                </a:solidFill>
-                <a:latin typeface="Georgia"/>
-              </a:rPr>
-              <a:t/>
-            </a:r>
-          </a:p>
-          <a:p>
-            <a:pPr algn="l">
-              <a:lnSpc>
-                <a:spcPct val="118000"/>
-              </a:lnSpc>
-            </a:pPr>
-            <a:r>
-              <a:rPr sz="1150" b="0">
-                <a:solidFill>
-                  <a:srgbClr val="1A1A1A"/>
-                </a:solidFill>
-                <a:latin typeface="Georgia"/>
-              </a:rPr>
-              <a:t>The panel shows where the time goes</a:t>
-            </a:r>
-          </a:p>
-          <a:p>
-            <a:pPr algn="l">
-              <a:lnSpc>
-                <a:spcPct val="118000"/>
-              </a:lnSpc>
-            </a:pPr>
-            <a:r>
-              <a:rPr sz="1150" b="0">
-                <a:solidFill>
-                  <a:srgbClr val="1A1A1A"/>
-                </a:solidFill>
-                <a:latin typeface="Georgia"/>
-              </a:rPr>
-              <a:t>rather than asserting a speed-up.</a:t>
+              <a:t>v2 keeps no state between calls, so it has nothing to answer from.</a:t>
             </a:r>
           </a:p>
         </p:txBody>
@@ -5836,7 +5560,7 @@
                 </a:solidFill>
                 <a:latin typeface="Georgia"/>
               </a:rPr>
-              <a:t>ASSESSMENT</a:t>
+              <a:t>INTERFACE</a:t>
             </a:r>
           </a:p>
         </p:txBody>
@@ -5875,21 +5599,45 @@
                 </a:solidFill>
                 <a:latin typeface="Georgia"/>
               </a:rPr>
-              <a:t>Against the three objectives I set</a:t>
-            </a:r>
-          </a:p>
-        </p:txBody>
-      </p:sp>
-      <p:sp>
-        <p:nvSpPr>
-          <p:cNvPr id="4" name="TextBox 3"/>
+              <a:t>What a query costs, and how you make one</a:t>
+            </a:r>
+          </a:p>
+        </p:txBody>
+      </p:sp>
+      <p:pic>
+        <p:nvPicPr>
+          <p:cNvPr id="4" name="Picture 3" descr="decode_flat.png"/>
+          <p:cNvPicPr>
+            <a:picLocks noChangeAspect="1"/>
+          </p:cNvPicPr>
+          <p:nvPr/>
+        </p:nvPicPr>
+        <p:blipFill>
+          <a:blip r:embed="rId2"/>
+          <a:stretch>
+            <a:fillRect/>
+          </a:stretch>
+        </p:blipFill>
+        <p:spPr>
+          <a:xfrm>
+            <a:off x="731520" y="1508760"/>
+            <a:ext cx="6400800" cy="3231565"/>
+          </a:xfrm>
+          <a:prstGeom prst="rect">
+            <a:avLst/>
+          </a:prstGeom>
+        </p:spPr>
+      </p:pic>
+      <p:sp>
+        <p:nvSpPr>
+          <p:cNvPr id="5" name="TextBox 4"/>
           <p:cNvSpPr txBox="1"/>
           <p:nvPr/>
         </p:nvSpPr>
         <p:spPr>
           <a:xfrm>
-            <a:off x="685800" y="1691640"/>
-            <a:ext cx="3291840" cy="237744"/>
+            <a:off x="7406640" y="1645920"/>
+            <a:ext cx="4206240" cy="365760"/>
           </a:xfrm>
           <a:prstGeom prst="rect">
             <a:avLst/>
@@ -5908,114 +5656,38 @@
               </a:lnSpc>
             </a:pPr>
             <a:r>
-              <a:rPr sz="1150" b="1">
-                <a:solidFill>
-                  <a:srgbClr val="1A1A1A"/>
-                </a:solidFill>
-                <a:latin typeface="Georgia"/>
-              </a:rPr>
-              <a:t>Objective</a:t>
-            </a:r>
-          </a:p>
-        </p:txBody>
-      </p:sp>
-      <p:sp>
-        <p:nvSpPr>
-          <p:cNvPr id="5" name="TextBox 4"/>
-          <p:cNvSpPr txBox="1"/>
-          <p:nvPr/>
-        </p:nvSpPr>
-        <p:spPr>
-          <a:xfrm>
-            <a:off x="3977639" y="1691640"/>
-            <a:ext cx="1737360" cy="237744"/>
-          </a:xfrm>
-          <a:prstGeom prst="rect">
-            <a:avLst/>
-          </a:prstGeom>
-          <a:noFill/>
-        </p:spPr>
-        <p:txBody>
-          <a:bodyPr wrap="square">
-            <a:spAutoFit/>
-          </a:bodyPr>
-          <a:lstStyle/>
-          <a:p>
-            <a:pPr algn="r">
-              <a:lnSpc>
-                <a:spcPct val="100000"/>
-              </a:lnSpc>
-            </a:pPr>
-            <a:r>
-              <a:rPr sz="1150" b="1">
-                <a:solidFill>
-                  <a:srgbClr val="1A1A1A"/>
-                </a:solidFill>
-                <a:latin typeface="Georgia"/>
-              </a:rPr>
-              <a:t>Verdict</a:t>
-            </a:r>
-          </a:p>
-        </p:txBody>
-      </p:sp>
-      <p:sp>
-        <p:nvSpPr>
-          <p:cNvPr id="6" name="TextBox 5"/>
-          <p:cNvSpPr txBox="1"/>
-          <p:nvPr/>
-        </p:nvSpPr>
-        <p:spPr>
-          <a:xfrm>
-            <a:off x="5715000" y="1691640"/>
-            <a:ext cx="5852160" cy="237744"/>
-          </a:xfrm>
-          <a:prstGeom prst="rect">
-            <a:avLst/>
-          </a:prstGeom>
-          <a:noFill/>
-        </p:spPr>
-        <p:txBody>
-          <a:bodyPr wrap="square">
-            <a:spAutoFit/>
-          </a:bodyPr>
-          <a:lstStyle/>
-          <a:p>
-            <a:pPr algn="r">
-              <a:lnSpc>
-                <a:spcPct val="100000"/>
-              </a:lnSpc>
-            </a:pPr>
-            <a:r>
-              <a:rPr sz="1150" b="1">
-                <a:solidFill>
-                  <a:srgbClr val="1A1A1A"/>
-                </a:solidFill>
-                <a:latin typeface="Georgia"/>
-              </a:rPr>
-              <a:t>Evidence</a:t>
-            </a:r>
-          </a:p>
-        </p:txBody>
-      </p:sp>
-      <p:sp>
-        <p:nvSpPr>
-          <p:cNvPr id="7" name="Rectangle 6"/>
+              <a:rPr sz="1200" b="1">
+                <a:solidFill>
+                  <a:srgbClr val="333333"/>
+                </a:solidFill>
+                <a:latin typeface="Georgia"/>
+              </a:rPr>
+              <a:t>The entire API</a:t>
+            </a:r>
+          </a:p>
+        </p:txBody>
+      </p:sp>
+      <p:sp>
+        <p:nvSpPr>
+          <p:cNvPr id="6" name="Rounded Rectangle 5"/>
           <p:cNvSpPr/>
           <p:nvPr/>
         </p:nvSpPr>
         <p:spPr>
           <a:xfrm>
-            <a:off x="685800" y="1929384"/>
-            <a:ext cx="10881360" cy="9525"/>
-          </a:xfrm>
-          <a:prstGeom prst="rect">
+            <a:off x="7406640" y="2011680"/>
+            <a:ext cx="4206240" cy="1737360"/>
+          </a:xfrm>
+          <a:prstGeom prst="roundRect">
             <a:avLst/>
           </a:prstGeom>
           <a:solidFill>
-            <a:srgbClr val="8A8A8A"/>
+            <a:srgbClr val="EFEFEF"/>
           </a:solidFill>
-          <a:ln>
-            <a:noFill/>
+          <a:ln w="9525">
+            <a:solidFill>
+              <a:srgbClr val="8A8A8A"/>
+            </a:solidFill>
           </a:ln>
           <a:effectLst/>
         </p:spPr>
@@ -6034,23 +5706,116 @@
           </a:fontRef>
         </p:style>
         <p:txBody>
-          <a:bodyPr rtlCol="0" anchor="ctr"/>
+          <a:bodyPr rtlCol="0" anchor="ctr" wrap="square" lIns="73152" rIns="73152"/>
           <a:lstStyle/>
           <a:p>
             <a:pPr algn="ctr"/>
-          </a:p>
-        </p:txBody>
-      </p:sp>
-      <p:sp>
-        <p:nvSpPr>
-          <p:cNvPr id="8" name="TextBox 7"/>
+            <a:r>
+              <a:rPr sz="1000" b="0">
+                <a:solidFill>
+                  <a:srgbClr val="1A1A1A"/>
+                </a:solidFill>
+                <a:latin typeface="Georgia"/>
+              </a:rPr>
+              <a:t>state = model.infer_coarse_state(img0, img1)</a:t>
+            </a:r>
+          </a:p>
+          <a:p>
+            <a:pPr algn="ctr"/>
+            <a:r>
+              <a:rPr sz="1000" b="0">
+                <a:solidFill>
+                  <a:srgbClr val="1A1A1A"/>
+                </a:solidFill>
+                <a:latin typeface="Georgia"/>
+              </a:rPr>
+              <a:t>                                  once, 17 ms</a:t>
+            </a:r>
+          </a:p>
+          <a:p>
+            <a:pPr algn="ctr"/>
+            <a:r>
+              <a:rPr sz="1000" b="0">
+                <a:solidFill>
+                  <a:srgbClr val="1A1A1A"/>
+                </a:solidFill>
+                <a:latin typeface="Georgia"/>
+              </a:rPr>
+              <a:t/>
+            </a:r>
+          </a:p>
+          <a:p>
+            <a:pPr algn="ctr"/>
+            <a:r>
+              <a:rPr sz="1000" b="0">
+                <a:solidFill>
+                  <a:srgbClr val="1A1A1A"/>
+                </a:solidFill>
+                <a:latin typeface="Georgia"/>
+              </a:rPr>
+              <a:t>flow  = model.decode_queries(</a:t>
+            </a:r>
+          </a:p>
+          <a:p>
+            <a:pPr algn="ctr"/>
+            <a:r>
+              <a:rPr sz="1000" b="0">
+                <a:solidFill>
+                  <a:srgbClr val="1A1A1A"/>
+                </a:solidFill>
+                <a:latin typeface="Georgia"/>
+              </a:rPr>
+              <a:t>            state, query_coords=q)</a:t>
+            </a:r>
+          </a:p>
+          <a:p>
+            <a:pPr algn="ctr"/>
+            <a:r>
+              <a:rPr sz="1000" b="0">
+                <a:solidFill>
+                  <a:srgbClr val="1A1A1A"/>
+                </a:solidFill>
+                <a:latin typeface="Georgia"/>
+              </a:rPr>
+              <a:t>            q: [B, N, 2] -&gt; [B, N, 2], 2.6 ms</a:t>
+            </a:r>
+          </a:p>
+          <a:p>
+            <a:pPr algn="ctr"/>
+            <a:r>
+              <a:rPr sz="1000" b="0">
+                <a:solidFill>
+                  <a:srgbClr val="1A1A1A"/>
+                </a:solidFill>
+                <a:latin typeface="Georgia"/>
+              </a:rPr>
+              <a:t/>
+            </a:r>
+          </a:p>
+          <a:p>
+            <a:pPr algn="ctr"/>
+            <a:r>
+              <a:rPr sz="1000" b="0">
+                <a:solidFill>
+                  <a:srgbClr val="1A1A1A"/>
+                </a:solidFill>
+                <a:latin typeface="Georgia"/>
+              </a:rPr>
+              <a:t>flow, b = ... (return_uncertainty=True)</a:t>
+            </a:r>
+          </a:p>
+        </p:txBody>
+      </p:sp>
+      <p:sp>
+        <p:nvSpPr>
+          <p:cNvPr id="7" name="TextBox 6"/>
           <p:cNvSpPr txBox="1"/>
           <p:nvPr/>
         </p:nvSpPr>
         <p:spPr>
           <a:xfrm>
-            <a:off x="685800" y="1965960"/>
-            <a:ext cx="3291840" cy="237744"/>
+            <a:off x="7406640" y="3931920"/>
+            <a:ext cx="4206240" cy="1828800"/>
           </a:xfrm>
           <a:prstGeom prst="rect">
             <a:avLst/>
@@ -6065,7 +5830,7 @@
           <a:p>
             <a:pPr algn="l">
               <a:lnSpc>
-                <a:spcPct val="100000"/>
+                <a:spcPct val="118000"/>
               </a:lnSpc>
             </a:pPr>
             <a:r>
@@ -6075,21 +5840,133 @@
                 </a:solidFill>
                 <a:latin typeface="Georgia"/>
               </a:rPr>
-              <a:t>Better accuracy than v2</a:t>
-            </a:r>
-          </a:p>
-        </p:txBody>
-      </p:sp>
-      <p:sp>
-        <p:nvSpPr>
-          <p:cNvPr id="9" name="TextBox 8"/>
+              <a:t>Decode cost is flat from 800 to 2,048</a:t>
+            </a:r>
+          </a:p>
+          <a:p>
+            <a:pPr algn="l">
+              <a:lnSpc>
+                <a:spcPct val="118000"/>
+              </a:lnSpc>
+            </a:pPr>
+            <a:r>
+              <a:rPr sz="1150" b="0">
+                <a:solidFill>
+                  <a:srgbClr val="1A1A1A"/>
+                </a:solidFill>
+                <a:latin typeface="Georgia"/>
+              </a:rPr>
+              <a:t>queries, so it is bound by kernel launch</a:t>
+            </a:r>
+          </a:p>
+          <a:p>
+            <a:pPr algn="l">
+              <a:lnSpc>
+                <a:spcPct val="118000"/>
+              </a:lnSpc>
+            </a:pPr>
+            <a:r>
+              <a:rPr sz="1150" b="0">
+                <a:solidFill>
+                  <a:srgbClr val="1A1A1A"/>
+                </a:solidFill>
+                <a:latin typeface="Georgia"/>
+              </a:rPr>
+              <a:t>overhead rather than compute. You get</a:t>
+            </a:r>
+          </a:p>
+          <a:p>
+            <a:pPr algn="l">
+              <a:lnSpc>
+                <a:spcPct val="118000"/>
+              </a:lnSpc>
+            </a:pPr>
+            <a:r>
+              <a:rPr sz="1150" b="0">
+                <a:solidFill>
+                  <a:srgbClr val="1A1A1A"/>
+                </a:solidFill>
+                <a:latin typeface="Georgia"/>
+              </a:rPr>
+              <a:t>2,048 points for the price of 800.</a:t>
+            </a:r>
+          </a:p>
+          <a:p>
+            <a:pPr algn="l">
+              <a:lnSpc>
+                <a:spcPct val="118000"/>
+              </a:lnSpc>
+            </a:pPr>
+            <a:r>
+              <a:rPr sz="1150" b="0">
+                <a:solidFill>
+                  <a:srgbClr val="1A1A1A"/>
+                </a:solidFill>
+                <a:latin typeface="Georgia"/>
+              </a:rPr>
+              <a:t/>
+            </a:r>
+          </a:p>
+          <a:p>
+            <a:pPr algn="l">
+              <a:lnSpc>
+                <a:spcPct val="118000"/>
+              </a:lnSpc>
+            </a:pPr>
+            <a:r>
+              <a:rPr sz="1150" b="0">
+                <a:solidFill>
+                  <a:srgbClr val="1A1A1A"/>
+                </a:solidFill>
+                <a:latin typeface="Georgia"/>
+              </a:rPr>
+              <a:t>Above roughly 10,000 points the decode</a:t>
+            </a:r>
+          </a:p>
+          <a:p>
+            <a:pPr algn="l">
+              <a:lnSpc>
+                <a:spcPct val="118000"/>
+              </a:lnSpc>
+            </a:pPr>
+            <a:r>
+              <a:rPr sz="1150" b="0">
+                <a:solidFill>
+                  <a:srgbClr val="1A1A1A"/>
+                </a:solidFill>
+                <a:latin typeface="Georgia"/>
+              </a:rPr>
+              <a:t>becomes compute-bound and dense mode</a:t>
+            </a:r>
+          </a:p>
+          <a:p>
+            <a:pPr algn="l">
+              <a:lnSpc>
+                <a:spcPct val="118000"/>
+              </a:lnSpc>
+            </a:pPr>
+            <a:r>
+              <a:rPr sz="1150" b="0">
+                <a:solidFill>
+                  <a:srgbClr val="1A1A1A"/>
+                </a:solidFill>
+                <a:latin typeface="Georgia"/>
+              </a:rPr>
+              <a:t>is the better choice.</a:t>
+            </a:r>
+          </a:p>
+        </p:txBody>
+      </p:sp>
+      <p:sp>
+        <p:nvSpPr>
+          <p:cNvPr id="8" name="TextBox 7"/>
           <p:cNvSpPr txBox="1"/>
           <p:nvPr/>
         </p:nvSpPr>
         <p:spPr>
           <a:xfrm>
-            <a:off x="3977639" y="1965960"/>
-            <a:ext cx="1737360" cy="237744"/>
+            <a:off x="685800" y="6419088"/>
+            <a:ext cx="7315200" cy="274320"/>
           </a:xfrm>
           <a:prstGeom prst="rect">
             <a:avLst/>
@@ -6102,1185 +5979,12 @@
           </a:bodyPr>
           <a:lstStyle/>
           <a:p>
-            <a:pPr algn="r">
+            <a:pPr algn="l">
               <a:lnSpc>
                 <a:spcPct val="100000"/>
               </a:lnSpc>
             </a:pPr>
             <a:r>
-              <a:rPr sz="1150" b="0">
-                <a:solidFill>
-                  <a:srgbClr val="1A1A1A"/>
-                </a:solidFill>
-                <a:latin typeface="Georgia"/>
-              </a:rPr>
-              <a:t>NOT MET</a:t>
-            </a:r>
-          </a:p>
-        </p:txBody>
-      </p:sp>
-      <p:sp>
-        <p:nvSpPr>
-          <p:cNvPr id="10" name="TextBox 9"/>
-          <p:cNvSpPr txBox="1"/>
-          <p:nvPr/>
-        </p:nvSpPr>
-        <p:spPr>
-          <a:xfrm>
-            <a:off x="5715000" y="1965960"/>
-            <a:ext cx="5852160" cy="237744"/>
-          </a:xfrm>
-          <a:prstGeom prst="rect">
-            <a:avLst/>
-          </a:prstGeom>
-          <a:noFill/>
-        </p:spPr>
-        <p:txBody>
-          <a:bodyPr wrap="square">
-            <a:spAutoFit/>
-          </a:bodyPr>
-          <a:lstStyle/>
-          <a:p>
-            <a:pPr algn="r">
-              <a:lnSpc>
-                <a:spcPct val="100000"/>
-              </a:lnSpc>
-            </a:pPr>
-            <a:r>
-              <a:rPr sz="1150" b="0">
-                <a:solidFill>
-                  <a:srgbClr val="1A1A1A"/>
-                </a:solidFill>
-                <a:latin typeface="Georgia"/>
-              </a:rPr>
-              <a:t>best v3 2.384 vs 2.324; every config above v2</a:t>
-            </a:r>
-          </a:p>
-        </p:txBody>
-      </p:sp>
-      <p:sp>
-        <p:nvSpPr>
-          <p:cNvPr id="11" name="TextBox 10"/>
-          <p:cNvSpPr txBox="1"/>
-          <p:nvPr/>
-        </p:nvSpPr>
-        <p:spPr>
-          <a:xfrm>
-            <a:off x="685800" y="2240279"/>
-            <a:ext cx="3291840" cy="237744"/>
-          </a:xfrm>
-          <a:prstGeom prst="rect">
-            <a:avLst/>
-          </a:prstGeom>
-          <a:noFill/>
-        </p:spPr>
-        <p:txBody>
-          <a:bodyPr wrap="square">
-            <a:spAutoFit/>
-          </a:bodyPr>
-          <a:lstStyle/>
-          <a:p>
-            <a:pPr algn="l">
-              <a:lnSpc>
-                <a:spcPct val="100000"/>
-              </a:lnSpc>
-            </a:pPr>
-            <a:r>
-              <a:rPr sz="1150" b="0">
-                <a:solidFill>
-                  <a:srgbClr val="1A1A1A"/>
-                </a:solidFill>
-                <a:latin typeface="Georgia"/>
-              </a:rPr>
-              <a:t/>
-            </a:r>
-          </a:p>
-        </p:txBody>
-      </p:sp>
-      <p:sp>
-        <p:nvSpPr>
-          <p:cNvPr id="12" name="TextBox 11"/>
-          <p:cNvSpPr txBox="1"/>
-          <p:nvPr/>
-        </p:nvSpPr>
-        <p:spPr>
-          <a:xfrm>
-            <a:off x="3977639" y="2240279"/>
-            <a:ext cx="1737360" cy="237744"/>
-          </a:xfrm>
-          <a:prstGeom prst="rect">
-            <a:avLst/>
-          </a:prstGeom>
-          <a:noFill/>
-        </p:spPr>
-        <p:txBody>
-          <a:bodyPr wrap="square">
-            <a:spAutoFit/>
-          </a:bodyPr>
-          <a:lstStyle/>
-          <a:p>
-            <a:pPr algn="r">
-              <a:lnSpc>
-                <a:spcPct val="100000"/>
-              </a:lnSpc>
-            </a:pPr>
-            <a:r>
-              <a:rPr sz="1150" b="0">
-                <a:solidFill>
-                  <a:srgbClr val="1A1A1A"/>
-                </a:solidFill>
-                <a:latin typeface="Georgia"/>
-              </a:rPr>
-              <a:t/>
-            </a:r>
-          </a:p>
-        </p:txBody>
-      </p:sp>
-      <p:sp>
-        <p:nvSpPr>
-          <p:cNvPr id="13" name="TextBox 12"/>
-          <p:cNvSpPr txBox="1"/>
-          <p:nvPr/>
-        </p:nvSpPr>
-        <p:spPr>
-          <a:xfrm>
-            <a:off x="5715000" y="2240279"/>
-            <a:ext cx="5852160" cy="237744"/>
-          </a:xfrm>
-          <a:prstGeom prst="rect">
-            <a:avLst/>
-          </a:prstGeom>
-          <a:noFill/>
-        </p:spPr>
-        <p:txBody>
-          <a:bodyPr wrap="square">
-            <a:spAutoFit/>
-          </a:bodyPr>
-          <a:lstStyle/>
-          <a:p>
-            <a:pPr algn="r">
-              <a:lnSpc>
-                <a:spcPct val="100000"/>
-              </a:lnSpc>
-            </a:pPr>
-            <a:r>
-              <a:rPr sz="1150" b="0">
-                <a:solidFill>
-                  <a:srgbClr val="1A1A1A"/>
-                </a:solidFill>
-                <a:latin typeface="Georgia"/>
-              </a:rPr>
-              <a:t>like-for-like 2.500, i.e. 7.6% behind</a:t>
-            </a:r>
-          </a:p>
-        </p:txBody>
-      </p:sp>
-      <p:sp>
-        <p:nvSpPr>
-          <p:cNvPr id="14" name="TextBox 13"/>
-          <p:cNvSpPr txBox="1"/>
-          <p:nvPr/>
-        </p:nvSpPr>
-        <p:spPr>
-          <a:xfrm>
-            <a:off x="685800" y="2514599"/>
-            <a:ext cx="3291840" cy="237744"/>
-          </a:xfrm>
-          <a:prstGeom prst="rect">
-            <a:avLst/>
-          </a:prstGeom>
-          <a:noFill/>
-        </p:spPr>
-        <p:txBody>
-          <a:bodyPr wrap="square">
-            <a:spAutoFit/>
-          </a:bodyPr>
-          <a:lstStyle/>
-          <a:p>
-            <a:pPr algn="l">
-              <a:lnSpc>
-                <a:spcPct val="100000"/>
-              </a:lnSpc>
-            </a:pPr>
-            <a:r>
-              <a:rPr sz="1150" b="0">
-                <a:solidFill>
-                  <a:srgbClr val="1A1A1A"/>
-                </a:solidFill>
-                <a:latin typeface="Georgia"/>
-              </a:rPr>
-              <a:t/>
-            </a:r>
-          </a:p>
-        </p:txBody>
-      </p:sp>
-      <p:sp>
-        <p:nvSpPr>
-          <p:cNvPr id="15" name="TextBox 14"/>
-          <p:cNvSpPr txBox="1"/>
-          <p:nvPr/>
-        </p:nvSpPr>
-        <p:spPr>
-          <a:xfrm>
-            <a:off x="3977639" y="2514599"/>
-            <a:ext cx="1737360" cy="237744"/>
-          </a:xfrm>
-          <a:prstGeom prst="rect">
-            <a:avLst/>
-          </a:prstGeom>
-          <a:noFill/>
-        </p:spPr>
-        <p:txBody>
-          <a:bodyPr wrap="square">
-            <a:spAutoFit/>
-          </a:bodyPr>
-          <a:lstStyle/>
-          <a:p>
-            <a:pPr algn="r">
-              <a:lnSpc>
-                <a:spcPct val="100000"/>
-              </a:lnSpc>
-            </a:pPr>
-            <a:r>
-              <a:rPr sz="1150" b="0">
-                <a:solidFill>
-                  <a:srgbClr val="1A1A1A"/>
-                </a:solidFill>
-                <a:latin typeface="Georgia"/>
-              </a:rPr>
-              <a:t/>
-            </a:r>
-          </a:p>
-        </p:txBody>
-      </p:sp>
-      <p:sp>
-        <p:nvSpPr>
-          <p:cNvPr id="16" name="TextBox 15"/>
-          <p:cNvSpPr txBox="1"/>
-          <p:nvPr/>
-        </p:nvSpPr>
-        <p:spPr>
-          <a:xfrm>
-            <a:off x="5715000" y="2514599"/>
-            <a:ext cx="5852160" cy="237744"/>
-          </a:xfrm>
-          <a:prstGeom prst="rect">
-            <a:avLst/>
-          </a:prstGeom>
-          <a:noFill/>
-        </p:spPr>
-        <p:txBody>
-          <a:bodyPr wrap="square">
-            <a:spAutoFit/>
-          </a:bodyPr>
-          <a:lstStyle/>
-          <a:p>
-            <a:pPr algn="r">
-              <a:lnSpc>
-                <a:spcPct val="100000"/>
-              </a:lnSpc>
-            </a:pPr>
-            <a:r>
-              <a:rPr sz="1150" b="0">
-                <a:solidFill>
-                  <a:srgbClr val="1A1A1A"/>
-                </a:solidFill>
-                <a:latin typeface="Georgia"/>
-              </a:rPr>
-              <a:t/>
-            </a:r>
-          </a:p>
-        </p:txBody>
-      </p:sp>
-      <p:sp>
-        <p:nvSpPr>
-          <p:cNvPr id="17" name="TextBox 16"/>
-          <p:cNvSpPr txBox="1"/>
-          <p:nvPr/>
-        </p:nvSpPr>
-        <p:spPr>
-          <a:xfrm>
-            <a:off x="685800" y="2788919"/>
-            <a:ext cx="3291840" cy="237744"/>
-          </a:xfrm>
-          <a:prstGeom prst="rect">
-            <a:avLst/>
-          </a:prstGeom>
-          <a:noFill/>
-        </p:spPr>
-        <p:txBody>
-          <a:bodyPr wrap="square">
-            <a:spAutoFit/>
-          </a:bodyPr>
-          <a:lstStyle/>
-          <a:p>
-            <a:pPr algn="l">
-              <a:lnSpc>
-                <a:spcPct val="100000"/>
-              </a:lnSpc>
-            </a:pPr>
-            <a:r>
-              <a:rPr sz="1150" b="0">
-                <a:solidFill>
-                  <a:srgbClr val="1A1A1A"/>
-                </a:solidFill>
-                <a:latin typeface="Georgia"/>
-              </a:rPr>
-              <a:t>Less compute than v2</a:t>
-            </a:r>
-          </a:p>
-        </p:txBody>
-      </p:sp>
-      <p:sp>
-        <p:nvSpPr>
-          <p:cNvPr id="18" name="TextBox 17"/>
-          <p:cNvSpPr txBox="1"/>
-          <p:nvPr/>
-        </p:nvSpPr>
-        <p:spPr>
-          <a:xfrm>
-            <a:off x="3977639" y="2788919"/>
-            <a:ext cx="1737360" cy="237744"/>
-          </a:xfrm>
-          <a:prstGeom prst="rect">
-            <a:avLst/>
-          </a:prstGeom>
-          <a:noFill/>
-        </p:spPr>
-        <p:txBody>
-          <a:bodyPr wrap="square">
-            <a:spAutoFit/>
-          </a:bodyPr>
-          <a:lstStyle/>
-          <a:p>
-            <a:pPr algn="r">
-              <a:lnSpc>
-                <a:spcPct val="100000"/>
-              </a:lnSpc>
-            </a:pPr>
-            <a:r>
-              <a:rPr sz="1150" b="0">
-                <a:solidFill>
-                  <a:srgbClr val="1A1A1A"/>
-                </a:solidFill>
-                <a:latin typeface="Georgia"/>
-              </a:rPr>
-              <a:t>PARTLY</a:t>
-            </a:r>
-          </a:p>
-        </p:txBody>
-      </p:sp>
-      <p:sp>
-        <p:nvSpPr>
-          <p:cNvPr id="19" name="TextBox 18"/>
-          <p:cNvSpPr txBox="1"/>
-          <p:nvPr/>
-        </p:nvSpPr>
-        <p:spPr>
-          <a:xfrm>
-            <a:off x="5715000" y="2788919"/>
-            <a:ext cx="5852160" cy="237744"/>
-          </a:xfrm>
-          <a:prstGeom prst="rect">
-            <a:avLst/>
-          </a:prstGeom>
-          <a:noFill/>
-        </p:spPr>
-        <p:txBody>
-          <a:bodyPr wrap="square">
-            <a:spAutoFit/>
-          </a:bodyPr>
-          <a:lstStyle/>
-          <a:p>
-            <a:pPr algn="r">
-              <a:lnSpc>
-                <a:spcPct val="100000"/>
-              </a:lnSpc>
-            </a:pPr>
-            <a:r>
-              <a:rPr sz="1150" b="0">
-                <a:solidFill>
-                  <a:srgbClr val="1A1A1A"/>
-                </a:solidFill>
-                <a:latin typeface="Georgia"/>
-              </a:rPr>
-              <a:t>dense 14% slower; first query level</a:t>
-            </a:r>
-          </a:p>
-        </p:txBody>
-      </p:sp>
-      <p:sp>
-        <p:nvSpPr>
-          <p:cNvPr id="20" name="TextBox 19"/>
-          <p:cNvSpPr txBox="1"/>
-          <p:nvPr/>
-        </p:nvSpPr>
-        <p:spPr>
-          <a:xfrm>
-            <a:off x="685800" y="3063239"/>
-            <a:ext cx="3291840" cy="237744"/>
-          </a:xfrm>
-          <a:prstGeom prst="rect">
-            <a:avLst/>
-          </a:prstGeom>
-          <a:noFill/>
-        </p:spPr>
-        <p:txBody>
-          <a:bodyPr wrap="square">
-            <a:spAutoFit/>
-          </a:bodyPr>
-          <a:lstStyle/>
-          <a:p>
-            <a:pPr algn="l">
-              <a:lnSpc>
-                <a:spcPct val="100000"/>
-              </a:lnSpc>
-            </a:pPr>
-            <a:r>
-              <a:rPr sz="1150" b="0">
-                <a:solidFill>
-                  <a:srgbClr val="1A1A1A"/>
-                </a:solidFill>
-                <a:latin typeface="Georgia"/>
-              </a:rPr>
-              <a:t/>
-            </a:r>
-          </a:p>
-        </p:txBody>
-      </p:sp>
-      <p:sp>
-        <p:nvSpPr>
-          <p:cNvPr id="21" name="TextBox 20"/>
-          <p:cNvSpPr txBox="1"/>
-          <p:nvPr/>
-        </p:nvSpPr>
-        <p:spPr>
-          <a:xfrm>
-            <a:off x="3977639" y="3063239"/>
-            <a:ext cx="1737360" cy="237744"/>
-          </a:xfrm>
-          <a:prstGeom prst="rect">
-            <a:avLst/>
-          </a:prstGeom>
-          <a:noFill/>
-        </p:spPr>
-        <p:txBody>
-          <a:bodyPr wrap="square">
-            <a:spAutoFit/>
-          </a:bodyPr>
-          <a:lstStyle/>
-          <a:p>
-            <a:pPr algn="r">
-              <a:lnSpc>
-                <a:spcPct val="100000"/>
-              </a:lnSpc>
-            </a:pPr>
-            <a:r>
-              <a:rPr sz="1150" b="0">
-                <a:solidFill>
-                  <a:srgbClr val="1A1A1A"/>
-                </a:solidFill>
-                <a:latin typeface="Georgia"/>
-              </a:rPr>
-              <a:t/>
-            </a:r>
-          </a:p>
-        </p:txBody>
-      </p:sp>
-      <p:sp>
-        <p:nvSpPr>
-          <p:cNvPr id="22" name="TextBox 21"/>
-          <p:cNvSpPr txBox="1"/>
-          <p:nvPr/>
-        </p:nvSpPr>
-        <p:spPr>
-          <a:xfrm>
-            <a:off x="5715000" y="3063239"/>
-            <a:ext cx="5852160" cy="237744"/>
-          </a:xfrm>
-          <a:prstGeom prst="rect">
-            <a:avLst/>
-          </a:prstGeom>
-          <a:noFill/>
-        </p:spPr>
-        <p:txBody>
-          <a:bodyPr wrap="square">
-            <a:spAutoFit/>
-          </a:bodyPr>
-          <a:lstStyle/>
-          <a:p>
-            <a:pPr algn="r">
-              <a:lnSpc>
-                <a:spcPct val="100000"/>
-              </a:lnSpc>
-            </a:pPr>
-            <a:r>
-              <a:rPr sz="1150" b="0">
-                <a:solidFill>
-                  <a:srgbClr val="1A1A1A"/>
-                </a:solidFill>
-                <a:latin typeface="Georgia"/>
-              </a:rPr>
-              <a:t>repeat query 7.7x cheaper (2.6 vs 19.3 ms)</a:t>
-            </a:r>
-          </a:p>
-        </p:txBody>
-      </p:sp>
-      <p:sp>
-        <p:nvSpPr>
-          <p:cNvPr id="23" name="TextBox 22"/>
-          <p:cNvSpPr txBox="1"/>
-          <p:nvPr/>
-        </p:nvSpPr>
-        <p:spPr>
-          <a:xfrm>
-            <a:off x="685800" y="3337559"/>
-            <a:ext cx="3291840" cy="237744"/>
-          </a:xfrm>
-          <a:prstGeom prst="rect">
-            <a:avLst/>
-          </a:prstGeom>
-          <a:noFill/>
-        </p:spPr>
-        <p:txBody>
-          <a:bodyPr wrap="square">
-            <a:spAutoFit/>
-          </a:bodyPr>
-          <a:lstStyle/>
-          <a:p>
-            <a:pPr algn="l">
-              <a:lnSpc>
-                <a:spcPct val="100000"/>
-              </a:lnSpc>
-            </a:pPr>
-            <a:r>
-              <a:rPr sz="1150" b="0">
-                <a:solidFill>
-                  <a:srgbClr val="1A1A1A"/>
-                </a:solidFill>
-                <a:latin typeface="Georgia"/>
-              </a:rPr>
-              <a:t/>
-            </a:r>
-          </a:p>
-        </p:txBody>
-      </p:sp>
-      <p:sp>
-        <p:nvSpPr>
-          <p:cNvPr id="24" name="TextBox 23"/>
-          <p:cNvSpPr txBox="1"/>
-          <p:nvPr/>
-        </p:nvSpPr>
-        <p:spPr>
-          <a:xfrm>
-            <a:off x="3977639" y="3337559"/>
-            <a:ext cx="1737360" cy="237744"/>
-          </a:xfrm>
-          <a:prstGeom prst="rect">
-            <a:avLst/>
-          </a:prstGeom>
-          <a:noFill/>
-        </p:spPr>
-        <p:txBody>
-          <a:bodyPr wrap="square">
-            <a:spAutoFit/>
-          </a:bodyPr>
-          <a:lstStyle/>
-          <a:p>
-            <a:pPr algn="r">
-              <a:lnSpc>
-                <a:spcPct val="100000"/>
-              </a:lnSpc>
-            </a:pPr>
-            <a:r>
-              <a:rPr sz="1150" b="0">
-                <a:solidFill>
-                  <a:srgbClr val="1A1A1A"/>
-                </a:solidFill>
-                <a:latin typeface="Georgia"/>
-              </a:rPr>
-              <a:t/>
-            </a:r>
-          </a:p>
-        </p:txBody>
-      </p:sp>
-      <p:sp>
-        <p:nvSpPr>
-          <p:cNvPr id="25" name="TextBox 24"/>
-          <p:cNvSpPr txBox="1"/>
-          <p:nvPr/>
-        </p:nvSpPr>
-        <p:spPr>
-          <a:xfrm>
-            <a:off x="5715000" y="3337559"/>
-            <a:ext cx="5852160" cy="237744"/>
-          </a:xfrm>
-          <a:prstGeom prst="rect">
-            <a:avLst/>
-          </a:prstGeom>
-          <a:noFill/>
-        </p:spPr>
-        <p:txBody>
-          <a:bodyPr wrap="square">
-            <a:spAutoFit/>
-          </a:bodyPr>
-          <a:lstStyle/>
-          <a:p>
-            <a:pPr algn="r">
-              <a:lnSpc>
-                <a:spcPct val="100000"/>
-              </a:lnSpc>
-            </a:pPr>
-            <a:r>
-              <a:rPr sz="1150" b="0">
-                <a:solidFill>
-                  <a:srgbClr val="1A1A1A"/>
-                </a:solidFill>
-                <a:latin typeface="Georgia"/>
-              </a:rPr>
-              <a:t/>
-            </a:r>
-          </a:p>
-        </p:txBody>
-      </p:sp>
-      <p:sp>
-        <p:nvSpPr>
-          <p:cNvPr id="26" name="TextBox 25"/>
-          <p:cNvSpPr txBox="1"/>
-          <p:nvPr/>
-        </p:nvSpPr>
-        <p:spPr>
-          <a:xfrm>
-            <a:off x="685800" y="3611879"/>
-            <a:ext cx="3291840" cy="237744"/>
-          </a:xfrm>
-          <a:prstGeom prst="rect">
-            <a:avLst/>
-          </a:prstGeom>
-          <a:noFill/>
-        </p:spPr>
-        <p:txBody>
-          <a:bodyPr wrap="square">
-            <a:spAutoFit/>
-          </a:bodyPr>
-          <a:lstStyle/>
-          <a:p>
-            <a:pPr algn="l">
-              <a:lnSpc>
-                <a:spcPct val="100000"/>
-              </a:lnSpc>
-            </a:pPr>
-            <a:r>
-              <a:rPr sz="1150" b="0">
-                <a:solidFill>
-                  <a:srgbClr val="1A1A1A"/>
-                </a:solidFill>
-                <a:latin typeface="Georgia"/>
-              </a:rPr>
-              <a:t>Runs on edge devices</a:t>
-            </a:r>
-          </a:p>
-        </p:txBody>
-      </p:sp>
-      <p:sp>
-        <p:nvSpPr>
-          <p:cNvPr id="27" name="TextBox 26"/>
-          <p:cNvSpPr txBox="1"/>
-          <p:nvPr/>
-        </p:nvSpPr>
-        <p:spPr>
-          <a:xfrm>
-            <a:off x="3977639" y="3611879"/>
-            <a:ext cx="1737360" cy="237744"/>
-          </a:xfrm>
-          <a:prstGeom prst="rect">
-            <a:avLst/>
-          </a:prstGeom>
-          <a:noFill/>
-        </p:spPr>
-        <p:txBody>
-          <a:bodyPr wrap="square">
-            <a:spAutoFit/>
-          </a:bodyPr>
-          <a:lstStyle/>
-          <a:p>
-            <a:pPr algn="r">
-              <a:lnSpc>
-                <a:spcPct val="100000"/>
-              </a:lnSpc>
-            </a:pPr>
-            <a:r>
-              <a:rPr sz="1150" b="0">
-                <a:solidFill>
-                  <a:srgbClr val="1A1A1A"/>
-                </a:solidFill>
-                <a:latin typeface="Georgia"/>
-              </a:rPr>
-              <a:t>UNPROVEN</a:t>
-            </a:r>
-          </a:p>
-        </p:txBody>
-      </p:sp>
-      <p:sp>
-        <p:nvSpPr>
-          <p:cNvPr id="28" name="TextBox 27"/>
-          <p:cNvSpPr txBox="1"/>
-          <p:nvPr/>
-        </p:nvSpPr>
-        <p:spPr>
-          <a:xfrm>
-            <a:off x="5715000" y="3611879"/>
-            <a:ext cx="5852160" cy="237744"/>
-          </a:xfrm>
-          <a:prstGeom prst="rect">
-            <a:avLst/>
-          </a:prstGeom>
-          <a:noFill/>
-        </p:spPr>
-        <p:txBody>
-          <a:bodyPr wrap="square">
-            <a:spAutoFit/>
-          </a:bodyPr>
-          <a:lstStyle/>
-          <a:p>
-            <a:pPr algn="r">
-              <a:lnSpc>
-                <a:spcPct val="100000"/>
-              </a:lnSpc>
-            </a:pPr>
-            <a:r>
-              <a:rPr sz="1150" b="0">
-                <a:solidFill>
-                  <a:srgbClr val="1A1A1A"/>
-                </a:solidFill>
-                <a:latin typeface="Georgia"/>
-              </a:rPr>
-              <a:t>all figures from V100 and RTX 4060</a:t>
-            </a:r>
-          </a:p>
-        </p:txBody>
-      </p:sp>
-      <p:sp>
-        <p:nvSpPr>
-          <p:cNvPr id="29" name="TextBox 28"/>
-          <p:cNvSpPr txBox="1"/>
-          <p:nvPr/>
-        </p:nvSpPr>
-        <p:spPr>
-          <a:xfrm>
-            <a:off x="685800" y="3886199"/>
-            <a:ext cx="3291840" cy="237744"/>
-          </a:xfrm>
-          <a:prstGeom prst="rect">
-            <a:avLst/>
-          </a:prstGeom>
-          <a:noFill/>
-        </p:spPr>
-        <p:txBody>
-          <a:bodyPr wrap="square">
-            <a:spAutoFit/>
-          </a:bodyPr>
-          <a:lstStyle/>
-          <a:p>
-            <a:pPr algn="l">
-              <a:lnSpc>
-                <a:spcPct val="100000"/>
-              </a:lnSpc>
-            </a:pPr>
-            <a:r>
-              <a:rPr sz="1150" b="0">
-                <a:solidFill>
-                  <a:srgbClr val="1A1A1A"/>
-                </a:solidFill>
-                <a:latin typeface="Georgia"/>
-              </a:rPr>
-              <a:t/>
-            </a:r>
-          </a:p>
-        </p:txBody>
-      </p:sp>
-      <p:sp>
-        <p:nvSpPr>
-          <p:cNvPr id="30" name="TextBox 29"/>
-          <p:cNvSpPr txBox="1"/>
-          <p:nvPr/>
-        </p:nvSpPr>
-        <p:spPr>
-          <a:xfrm>
-            <a:off x="3977639" y="3886199"/>
-            <a:ext cx="1737360" cy="237744"/>
-          </a:xfrm>
-          <a:prstGeom prst="rect">
-            <a:avLst/>
-          </a:prstGeom>
-          <a:noFill/>
-        </p:spPr>
-        <p:txBody>
-          <a:bodyPr wrap="square">
-            <a:spAutoFit/>
-          </a:bodyPr>
-          <a:lstStyle/>
-          <a:p>
-            <a:pPr algn="r">
-              <a:lnSpc>
-                <a:spcPct val="100000"/>
-              </a:lnSpc>
-            </a:pPr>
-            <a:r>
-              <a:rPr sz="1150" b="0">
-                <a:solidFill>
-                  <a:srgbClr val="1A1A1A"/>
-                </a:solidFill>
-                <a:latin typeface="Georgia"/>
-              </a:rPr>
-              <a:t/>
-            </a:r>
-          </a:p>
-        </p:txBody>
-      </p:sp>
-      <p:sp>
-        <p:nvSpPr>
-          <p:cNvPr id="31" name="TextBox 30"/>
-          <p:cNvSpPr txBox="1"/>
-          <p:nvPr/>
-        </p:nvSpPr>
-        <p:spPr>
-          <a:xfrm>
-            <a:off x="5715000" y="3886199"/>
-            <a:ext cx="5852160" cy="237744"/>
-          </a:xfrm>
-          <a:prstGeom prst="rect">
-            <a:avLst/>
-          </a:prstGeom>
-          <a:noFill/>
-        </p:spPr>
-        <p:txBody>
-          <a:bodyPr wrap="square">
-            <a:spAutoFit/>
-          </a:bodyPr>
-          <a:lstStyle/>
-          <a:p>
-            <a:pPr algn="r">
-              <a:lnSpc>
-                <a:spcPct val="100000"/>
-              </a:lnSpc>
-            </a:pPr>
-            <a:r>
-              <a:rPr sz="1150" b="0">
-                <a:solidFill>
-                  <a:srgbClr val="1A1A1A"/>
-                </a:solidFill>
-                <a:latin typeface="Georgia"/>
-              </a:rPr>
-              <a:t>no Jetson measurement has been taken</a:t>
-            </a:r>
-          </a:p>
-        </p:txBody>
-      </p:sp>
-      <p:sp>
-        <p:nvSpPr>
-          <p:cNvPr id="32" name="TextBox 31"/>
-          <p:cNvSpPr txBox="1"/>
-          <p:nvPr/>
-        </p:nvSpPr>
-        <p:spPr>
-          <a:xfrm>
-            <a:off x="685800" y="4434840"/>
-            <a:ext cx="10881360" cy="365760"/>
-          </a:xfrm>
-          <a:prstGeom prst="rect">
-            <a:avLst/>
-          </a:prstGeom>
-          <a:noFill/>
-        </p:spPr>
-        <p:txBody>
-          <a:bodyPr wrap="square">
-            <a:spAutoFit/>
-          </a:bodyPr>
-          <a:lstStyle/>
-          <a:p>
-            <a:pPr algn="l">
-              <a:lnSpc>
-                <a:spcPct val="100000"/>
-              </a:lnSpc>
-            </a:pPr>
-            <a:r>
-              <a:rPr sz="1250" b="1">
-                <a:solidFill>
-                  <a:srgbClr val="333333"/>
-                </a:solidFill>
-                <a:latin typeface="Georgia"/>
-              </a:rPr>
-              <a:t>What the project does deliver</a:t>
-            </a:r>
-          </a:p>
-        </p:txBody>
-      </p:sp>
-      <p:sp>
-        <p:nvSpPr>
-          <p:cNvPr id="33" name="Rounded Rectangle 32"/>
-          <p:cNvSpPr/>
-          <p:nvPr/>
-        </p:nvSpPr>
-        <p:spPr>
-          <a:xfrm>
-            <a:off x="685800" y="4846320"/>
-            <a:ext cx="3474720" cy="1005840"/>
-          </a:xfrm>
-          <a:prstGeom prst="roundRect">
-            <a:avLst/>
-          </a:prstGeom>
-          <a:solidFill>
-            <a:srgbClr val="EFEFEF"/>
-          </a:solidFill>
-          <a:ln w="9525">
-            <a:solidFill>
-              <a:srgbClr val="8A8A8A"/>
-            </a:solidFill>
-          </a:ln>
-          <a:effectLst/>
-        </p:spPr>
-        <p:style>
-          <a:lnRef idx="1">
-            <a:schemeClr val="accent1"/>
-          </a:lnRef>
-          <a:fillRef idx="3">
-            <a:schemeClr val="accent1"/>
-          </a:fillRef>
-          <a:effectRef idx="2">
-            <a:schemeClr val="accent1"/>
-          </a:effectRef>
-          <a:fontRef idx="minor">
-            <a:schemeClr val="lt1"/>
-          </a:fontRef>
-        </p:style>
-        <p:txBody>
-          <a:bodyPr rtlCol="0" anchor="ctr" wrap="square" lIns="73152" rIns="73152"/>
-          <a:lstStyle/>
-          <a:p>
-            <a:pPr algn="ctr"/>
-            <a:r>
-              <a:rPr sz="1050" b="0">
-                <a:solidFill>
-                  <a:srgbClr val="1A1A1A"/>
-                </a:solidFill>
-                <a:latin typeface="Georgia"/>
-              </a:rPr>
-              <a:t>Queryable output</a:t>
-            </a:r>
-          </a:p>
-          <a:p>
-            <a:pPr algn="ctr"/>
-            <a:r>
-              <a:rPr sz="1050" b="0">
-                <a:solidFill>
-                  <a:srgbClr val="1A1A1A"/>
-                </a:solidFill>
-                <a:latin typeface="Georgia"/>
-              </a:rPr>
-              <a:t/>
-            </a:r>
-          </a:p>
-          <a:p>
-            <a:pPr algn="ctr"/>
-            <a:r>
-              <a:rPr sz="1050" b="0">
-                <a:solidFill>
-                  <a:srgbClr val="1A1A1A"/>
-                </a:solidFill>
-                <a:latin typeface="Georgia"/>
-              </a:rPr>
-              <a:t>flow at any continuous coordinate, sparse equals dense exactly</a:t>
-            </a:r>
-          </a:p>
-        </p:txBody>
-      </p:sp>
-      <p:sp>
-        <p:nvSpPr>
-          <p:cNvPr id="34" name="Rounded Rectangle 33"/>
-          <p:cNvSpPr/>
-          <p:nvPr/>
-        </p:nvSpPr>
-        <p:spPr>
-          <a:xfrm>
-            <a:off x="4343400" y="4846320"/>
-            <a:ext cx="3474720" cy="1005840"/>
-          </a:xfrm>
-          <a:prstGeom prst="roundRect">
-            <a:avLst/>
-          </a:prstGeom>
-          <a:solidFill>
-            <a:srgbClr val="EFEFEF"/>
-          </a:solidFill>
-          <a:ln w="9525">
-            <a:solidFill>
-              <a:srgbClr val="8A8A8A"/>
-            </a:solidFill>
-          </a:ln>
-          <a:effectLst/>
-        </p:spPr>
-        <p:style>
-          <a:lnRef idx="1">
-            <a:schemeClr val="accent1"/>
-          </a:lnRef>
-          <a:fillRef idx="3">
-            <a:schemeClr val="accent1"/>
-          </a:fillRef>
-          <a:effectRef idx="2">
-            <a:schemeClr val="accent1"/>
-          </a:effectRef>
-          <a:fontRef idx="minor">
-            <a:schemeClr val="lt1"/>
-          </a:fontRef>
-        </p:style>
-        <p:txBody>
-          <a:bodyPr rtlCol="0" anchor="ctr" wrap="square" lIns="73152" rIns="73152"/>
-          <a:lstStyle/>
-          <a:p>
-            <a:pPr algn="ctr"/>
-            <a:r>
-              <a:rPr sz="1050" b="0">
-                <a:solidFill>
-                  <a:srgbClr val="1A1A1A"/>
-                </a:solidFill>
-                <a:latin typeface="Georgia"/>
-              </a:rPr>
-              <a:t>Cheap repeat access</a:t>
-            </a:r>
-          </a:p>
-          <a:p>
-            <a:pPr algn="ctr"/>
-            <a:r>
-              <a:rPr sz="1050" b="0">
-                <a:solidFill>
-                  <a:srgbClr val="1A1A1A"/>
-                </a:solidFill>
-                <a:latin typeface="Georgia"/>
-              </a:rPr>
-              <a:t/>
-            </a:r>
-          </a:p>
-          <a:p>
-            <a:pPr algn="ctr"/>
-            <a:r>
-              <a:rPr sz="1050" b="0">
-                <a:solidFill>
-                  <a:srgbClr val="1A1A1A"/>
-                </a:solidFill>
-                <a:latin typeface="Georgia"/>
-              </a:rPr>
-              <a:t>2.6 ms per further query batch on a cached frame</a:t>
-            </a:r>
-          </a:p>
-        </p:txBody>
-      </p:sp>
-      <p:sp>
-        <p:nvSpPr>
-          <p:cNvPr id="35" name="Rounded Rectangle 34"/>
-          <p:cNvSpPr/>
-          <p:nvPr/>
-        </p:nvSpPr>
-        <p:spPr>
-          <a:xfrm>
-            <a:off x="8001000" y="4846320"/>
-            <a:ext cx="3474720" cy="1005840"/>
-          </a:xfrm>
-          <a:prstGeom prst="roundRect">
-            <a:avLst/>
-          </a:prstGeom>
-          <a:solidFill>
-            <a:srgbClr val="EFEFEF"/>
-          </a:solidFill>
-          <a:ln w="9525">
-            <a:solidFill>
-              <a:srgbClr val="8A8A8A"/>
-            </a:solidFill>
-          </a:ln>
-          <a:effectLst/>
-        </p:spPr>
-        <p:style>
-          <a:lnRef idx="1">
-            <a:schemeClr val="accent1"/>
-          </a:lnRef>
-          <a:fillRef idx="3">
-            <a:schemeClr val="accent1"/>
-          </a:fillRef>
-          <a:effectRef idx="2">
-            <a:schemeClr val="accent1"/>
-          </a:effectRef>
-          <a:fontRef idx="minor">
-            <a:schemeClr val="lt1"/>
-          </a:fontRef>
-        </p:style>
-        <p:txBody>
-          <a:bodyPr rtlCol="0" anchor="ctr" wrap="square" lIns="73152" rIns="73152"/>
-          <a:lstStyle/>
-          <a:p>
-            <a:pPr algn="ctr"/>
-            <a:r>
-              <a:rPr sz="1050" b="0">
-                <a:solidFill>
-                  <a:srgbClr val="1A1A1A"/>
-                </a:solidFill>
-                <a:latin typeface="Georgia"/>
-              </a:rPr>
-              <a:t>Calibrated confidence</a:t>
-            </a:r>
-          </a:p>
-          <a:p>
-            <a:pPr algn="ctr"/>
-            <a:r>
-              <a:rPr sz="1050" b="0">
-                <a:solidFill>
-                  <a:srgbClr val="1A1A1A"/>
-                </a:solidFill>
-                <a:latin typeface="Georgia"/>
-              </a:rPr>
-              <a:t/>
-            </a:r>
-          </a:p>
-          <a:p>
-            <a:pPr algn="ctr"/>
-            <a:r>
-              <a:rPr sz="1050" b="0">
-                <a:solidFill>
-                  <a:srgbClr val="1A1A1A"/>
-                </a:solidFill>
-                <a:latin typeface="Georgia"/>
-              </a:rPr>
-              <a:t>per-query error estimate, monotonic against real error</a:t>
-            </a:r>
-          </a:p>
-        </p:txBody>
-      </p:sp>
-      <p:sp>
-        <p:nvSpPr>
-          <p:cNvPr id="36" name="TextBox 35"/>
-          <p:cNvSpPr txBox="1"/>
-          <p:nvPr/>
-        </p:nvSpPr>
-        <p:spPr>
-          <a:xfrm>
-            <a:off x="685800" y="6419088"/>
-            <a:ext cx="7315200" cy="274320"/>
-          </a:xfrm>
-          <a:prstGeom prst="rect">
-            <a:avLst/>
-          </a:prstGeom>
-          <a:noFill/>
-        </p:spPr>
-        <p:txBody>
-          <a:bodyPr wrap="square">
-            <a:spAutoFit/>
-          </a:bodyPr>
-          <a:lstStyle/>
-          <a:p>
-            <a:pPr algn="l">
-              <a:lnSpc>
-                <a:spcPct val="100000"/>
-              </a:lnSpc>
-            </a:pPr>
-            <a:r>
               <a:rPr sz="900" b="0">
                 <a:solidFill>
                   <a:srgbClr val="8A8A8A"/>
@@ -7294,7 +5998,7 @@
       </p:sp>
       <p:sp>
         <p:nvSpPr>
-          <p:cNvPr id="37" name="TextBox 36"/>
+          <p:cNvPr id="9" name="TextBox 8"/>
           <p:cNvSpPr txBox="1"/>
           <p:nvPr/>
         </p:nvSpPr>
@@ -7383,7 +6087,7 @@
                 </a:solidFill>
                 <a:latin typeface="Georgia"/>
               </a:rPr>
-              <a:t>LIMITATIONS</a:t>
+              <a:t>INTERFACE</a:t>
             </a:r>
           </a:p>
         </p:txBody>
@@ -7422,21 +6126,45 @@
                 </a:solidFill>
                 <a:latin typeface="Georgia"/>
               </a:rPr>
-              <a:t>What is not yet proven, stated plainly</a:t>
-            </a:r>
-          </a:p>
-        </p:txBody>
-      </p:sp>
-      <p:sp>
-        <p:nvSpPr>
-          <p:cNvPr id="4" name="TextBox 3"/>
+              <a:t>Working tool: draw a region, get flow there</a:t>
+            </a:r>
+          </a:p>
+        </p:txBody>
+      </p:sp>
+      <p:pic>
+        <p:nvPicPr>
+          <p:cNvPr id="4" name="Picture 3" descr="region_gui_window.png"/>
+          <p:cNvPicPr>
+            <a:picLocks noChangeAspect="1"/>
+          </p:cNvPicPr>
+          <p:nvPr/>
+        </p:nvPicPr>
+        <p:blipFill>
+          <a:blip r:embed="rId2"/>
+          <a:stretch>
+            <a:fillRect/>
+          </a:stretch>
+        </p:blipFill>
+        <p:spPr>
+          <a:xfrm>
+            <a:off x="731520" y="1508760"/>
+            <a:ext cx="6949440" cy="3716489"/>
+          </a:xfrm>
+          <a:prstGeom prst="rect">
+            <a:avLst/>
+          </a:prstGeom>
+        </p:spPr>
+      </p:pic>
+      <p:sp>
+        <p:nvSpPr>
+          <p:cNvPr id="5" name="TextBox 4"/>
           <p:cNvSpPr txBox="1"/>
           <p:nvPr/>
         </p:nvSpPr>
         <p:spPr>
           <a:xfrm>
-            <a:off x="685800" y="1645920"/>
-            <a:ext cx="4023360" cy="274320"/>
+            <a:off x="7955279" y="1645920"/>
+            <a:ext cx="3657600" cy="4023360"/>
           </a:xfrm>
           <a:prstGeom prst="rect">
             <a:avLst/>
@@ -7451,31 +6179,255 @@
           <a:p>
             <a:pPr algn="l">
               <a:lnSpc>
-                <a:spcPct val="100000"/>
-              </a:lnSpc>
-            </a:pPr>
-            <a:r>
-              <a:rPr sz="1150" b="1">
-                <a:solidFill>
-                  <a:srgbClr val="1A1A1A"/>
-                </a:solidFill>
-                <a:latin typeface="Georgia"/>
-              </a:rPr>
-              <a:t>Sub-pixel precision is worse than v2</a:t>
-            </a:r>
-          </a:p>
-        </p:txBody>
-      </p:sp>
-      <p:sp>
-        <p:nvSpPr>
-          <p:cNvPr id="5" name="TextBox 4"/>
+                <a:spcPct val="118000"/>
+              </a:lnSpc>
+            </a:pPr>
+            <a:r>
+              <a:rPr sz="1150" b="0">
+                <a:solidFill>
+                  <a:srgbClr val="1A1A1A"/>
+                </a:solidFill>
+                <a:latin typeface="Georgia"/>
+              </a:rPr>
+              <a:t>Load a video, step frame by frame,</a:t>
+            </a:r>
+          </a:p>
+          <a:p>
+            <a:pPr algn="l">
+              <a:lnSpc>
+                <a:spcPct val="118000"/>
+              </a:lnSpc>
+            </a:pPr>
+            <a:r>
+              <a:rPr sz="1150" b="0">
+                <a:solidFill>
+                  <a:srgbClr val="1A1A1A"/>
+                </a:solidFill>
+                <a:latin typeface="Georgia"/>
+              </a:rPr>
+              <a:t>drag a box, get flow for that region.</a:t>
+            </a:r>
+          </a:p>
+          <a:p>
+            <a:pPr algn="l">
+              <a:lnSpc>
+                <a:spcPct val="118000"/>
+              </a:lnSpc>
+            </a:pPr>
+            <a:r>
+              <a:rPr sz="1150" b="0">
+                <a:solidFill>
+                  <a:srgbClr val="1A1A1A"/>
+                </a:solidFill>
+                <a:latin typeface="Georgia"/>
+              </a:rPr>
+              <a:t/>
+            </a:r>
+          </a:p>
+          <a:p>
+            <a:pPr algn="l">
+              <a:lnSpc>
+                <a:spcPct val="118000"/>
+              </a:lnSpc>
+            </a:pPr>
+            <a:r>
+              <a:rPr sz="1150" b="0">
+                <a:solidFill>
+                  <a:srgbClr val="1A1A1A"/>
+                </a:solidFill>
+                <a:latin typeface="Georgia"/>
+              </a:rPr>
+              <a:t>Two modes, both timed live:</a:t>
+            </a:r>
+          </a:p>
+          <a:p>
+            <a:pPr algn="l">
+              <a:lnSpc>
+                <a:spcPct val="118000"/>
+              </a:lnSpc>
+            </a:pPr>
+            <a:r>
+              <a:rPr sz="1150" b="0">
+                <a:solidFill>
+                  <a:srgbClr val="1A1A1A"/>
+                </a:solidFill>
+                <a:latin typeface="Georgia"/>
+              </a:rPr>
+              <a:t/>
+            </a:r>
+          </a:p>
+          <a:p>
+            <a:pPr algn="l">
+              <a:lnSpc>
+                <a:spcPct val="118000"/>
+              </a:lnSpc>
+            </a:pPr>
+            <a:r>
+              <a:rPr sz="1150" b="0">
+                <a:solidFill>
+                  <a:srgbClr val="1A1A1A"/>
+                </a:solidFill>
+                <a:latin typeface="Georgia"/>
+              </a:rPr>
+              <a:t>QUERY decodes only inside the box</a:t>
+            </a:r>
+          </a:p>
+          <a:p>
+            <a:pPr algn="l">
+              <a:lnSpc>
+                <a:spcPct val="118000"/>
+              </a:lnSpc>
+            </a:pPr>
+            <a:r>
+              <a:rPr sz="1150" b="0">
+                <a:solidFill>
+                  <a:srgbClr val="1A1A1A"/>
+                </a:solidFill>
+                <a:latin typeface="Georgia"/>
+              </a:rPr>
+              <a:t>against a full-frame coarse pass. Exact.</a:t>
+            </a:r>
+          </a:p>
+          <a:p>
+            <a:pPr algn="l">
+              <a:lnSpc>
+                <a:spcPct val="118000"/>
+              </a:lnSpc>
+            </a:pPr>
+            <a:r>
+              <a:rPr sz="1150" b="0">
+                <a:solidFill>
+                  <a:srgbClr val="1A1A1A"/>
+                </a:solidFill>
+                <a:latin typeface="Georgia"/>
+              </a:rPr>
+              <a:t/>
+            </a:r>
+          </a:p>
+          <a:p>
+            <a:pPr algn="l">
+              <a:lnSpc>
+                <a:spcPct val="118000"/>
+              </a:lnSpc>
+            </a:pPr>
+            <a:r>
+              <a:rPr sz="1150" b="0">
+                <a:solidFill>
+                  <a:srgbClr val="1A1A1A"/>
+                </a:solidFill>
+                <a:latin typeface="Georgia"/>
+              </a:rPr>
+              <a:t>CROP feeds only the box through the</a:t>
+            </a:r>
+          </a:p>
+          <a:p>
+            <a:pPr algn="l">
+              <a:lnSpc>
+                <a:spcPct val="118000"/>
+              </a:lnSpc>
+            </a:pPr>
+            <a:r>
+              <a:rPr sz="1150" b="0">
+                <a:solidFill>
+                  <a:srgbClr val="1A1A1A"/>
+                </a:solidFill>
+                <a:latin typeface="Georgia"/>
+              </a:rPr>
+              <a:t>whole pipeline, so cost scales with the</a:t>
+            </a:r>
+          </a:p>
+          <a:p>
+            <a:pPr algn="l">
+              <a:lnSpc>
+                <a:spcPct val="118000"/>
+              </a:lnSpc>
+            </a:pPr>
+            <a:r>
+              <a:rPr sz="1150" b="0">
+                <a:solidFill>
+                  <a:srgbClr val="1A1A1A"/>
+                </a:solidFill>
+                <a:latin typeface="Georgia"/>
+              </a:rPr>
+              <a:t>area requested, at the price of losing</a:t>
+            </a:r>
+          </a:p>
+          <a:p>
+            <a:pPr algn="l">
+              <a:lnSpc>
+                <a:spcPct val="118000"/>
+              </a:lnSpc>
+            </a:pPr>
+            <a:r>
+              <a:rPr sz="1150" b="0">
+                <a:solidFill>
+                  <a:srgbClr val="1A1A1A"/>
+                </a:solidFill>
+                <a:latin typeface="Georgia"/>
+              </a:rPr>
+              <a:t>context outside the crop.</a:t>
+            </a:r>
+          </a:p>
+          <a:p>
+            <a:pPr algn="l">
+              <a:lnSpc>
+                <a:spcPct val="118000"/>
+              </a:lnSpc>
+            </a:pPr>
+            <a:r>
+              <a:rPr sz="1150" b="0">
+                <a:solidFill>
+                  <a:srgbClr val="1A1A1A"/>
+                </a:solidFill>
+                <a:latin typeface="Georgia"/>
+              </a:rPr>
+              <a:t/>
+            </a:r>
+          </a:p>
+          <a:p>
+            <a:pPr algn="l">
+              <a:lnSpc>
+                <a:spcPct val="118000"/>
+              </a:lnSpc>
+            </a:pPr>
+            <a:r>
+              <a:rPr sz="1150" b="0">
+                <a:solidFill>
+                  <a:srgbClr val="1A1A1A"/>
+                </a:solidFill>
+                <a:latin typeface="Georgia"/>
+              </a:rPr>
+              <a:t>The panel shows where the time goes</a:t>
+            </a:r>
+          </a:p>
+          <a:p>
+            <a:pPr algn="l">
+              <a:lnSpc>
+                <a:spcPct val="118000"/>
+              </a:lnSpc>
+            </a:pPr>
+            <a:r>
+              <a:rPr sz="1150" b="0">
+                <a:solidFill>
+                  <a:srgbClr val="1A1A1A"/>
+                </a:solidFill>
+                <a:latin typeface="Georgia"/>
+              </a:rPr>
+              <a:t>rather than asserting a speed-up.</a:t>
+            </a:r>
+          </a:p>
+        </p:txBody>
+      </p:sp>
+      <p:sp>
+        <p:nvSpPr>
+          <p:cNvPr id="6" name="TextBox 5"/>
           <p:cNvSpPr txBox="1"/>
           <p:nvPr/>
         </p:nvSpPr>
         <p:spPr>
           <a:xfrm>
-            <a:off x="4846320" y="1645920"/>
-            <a:ext cx="6675120" cy="548640"/>
+            <a:off x="685800" y="6419088"/>
+            <a:ext cx="7315200" cy="274320"/>
           </a:xfrm>
           <a:prstGeom prst="rect">
             <a:avLst/>
@@ -7490,56 +6442,17 @@
           <a:p>
             <a:pPr algn="l">
               <a:lnSpc>
-                <a:spcPct val="112000"/>
-              </a:lnSpc>
-            </a:pPr>
-            <a:r>
-              <a:rPr sz="1100" b="0">
-                <a:solidFill>
-                  <a:srgbClr val="1A1A1A"/>
-                </a:solidFill>
-                <a:latin typeface="Georgia"/>
-              </a:rPr>
-              <a:t>By 0.8 to 6.3 points of 1-pixel accuracy. Cause diagnosed (decoder never sees full-resolution input) but not fixed.</a:t>
-            </a:r>
-          </a:p>
-        </p:txBody>
-      </p:sp>
-      <p:sp>
-        <p:nvSpPr>
-          <p:cNvPr id="6" name="TextBox 5"/>
-          <p:cNvSpPr txBox="1"/>
-          <p:nvPr/>
-        </p:nvSpPr>
-        <p:spPr>
-          <a:xfrm>
-            <a:off x="685800" y="2578608"/>
-            <a:ext cx="4023360" cy="274320"/>
-          </a:xfrm>
-          <a:prstGeom prst="rect">
-            <a:avLst/>
-          </a:prstGeom>
-          <a:noFill/>
-        </p:spPr>
-        <p:txBody>
-          <a:bodyPr wrap="square">
-            <a:spAutoFit/>
-          </a:bodyPr>
-          <a:lstStyle/>
-          <a:p>
-            <a:pPr algn="l">
-              <a:lnSpc>
                 <a:spcPct val="100000"/>
               </a:lnSpc>
             </a:pPr>
             <a:r>
-              <a:rPr sz="1150" b="1">
-                <a:solidFill>
-                  <a:srgbClr val="1A1A1A"/>
-                </a:solidFill>
-                <a:latin typeface="Georgia"/>
-              </a:rPr>
-              <a:t>No edge-device measurement</a:t>
+              <a:rPr sz="900" b="0">
+                <a:solidFill>
+                  <a:srgbClr val="8A8A8A"/>
+                </a:solidFill>
+                <a:latin typeface="Georgia"/>
+              </a:rPr>
+              <a:t>NeuFlow v3, S. Raghav Srinivasan</a:t>
             </a:r>
           </a:p>
         </p:txBody>
@@ -7547,318 +6460,6 @@
       <p:sp>
         <p:nvSpPr>
           <p:cNvPr id="7" name="TextBox 6"/>
-          <p:cNvSpPr txBox="1"/>
-          <p:nvPr/>
-        </p:nvSpPr>
-        <p:spPr>
-          <a:xfrm>
-            <a:off x="4846320" y="2578608"/>
-            <a:ext cx="6675120" cy="548640"/>
-          </a:xfrm>
-          <a:prstGeom prst="rect">
-            <a:avLst/>
-          </a:prstGeom>
-          <a:noFill/>
-        </p:spPr>
-        <p:txBody>
-          <a:bodyPr wrap="square">
-            <a:spAutoFit/>
-          </a:bodyPr>
-          <a:lstStyle/>
-          <a:p>
-            <a:pPr algn="l">
-              <a:lnSpc>
-                <a:spcPct val="112000"/>
-              </a:lnSpc>
-            </a:pPr>
-            <a:r>
-              <a:rPr sz="1100" b="0">
-                <a:solidFill>
-                  <a:srgbClr val="1A1A1A"/>
-                </a:solidFill>
-                <a:latin typeface="Georgia"/>
-              </a:rPr>
-              <a:t>Every latency figure is V100 or RTX 4060. The edge claim in the title is a design target, not a result.</a:t>
-            </a:r>
-          </a:p>
-        </p:txBody>
-      </p:sp>
-      <p:sp>
-        <p:nvSpPr>
-          <p:cNvPr id="8" name="TextBox 7"/>
-          <p:cNvSpPr txBox="1"/>
-          <p:nvPr/>
-        </p:nvSpPr>
-        <p:spPr>
-          <a:xfrm>
-            <a:off x="685800" y="3511296"/>
-            <a:ext cx="4023360" cy="274320"/>
-          </a:xfrm>
-          <a:prstGeom prst="rect">
-            <a:avLst/>
-          </a:prstGeom>
-          <a:noFill/>
-        </p:spPr>
-        <p:txBody>
-          <a:bodyPr wrap="square">
-            <a:spAutoFit/>
-          </a:bodyPr>
-          <a:lstStyle/>
-          <a:p>
-            <a:pPr algn="l">
-              <a:lnSpc>
-                <a:spcPct val="100000"/>
-              </a:lnSpc>
-            </a:pPr>
-            <a:r>
-              <a:rPr sz="1150" b="1">
-                <a:solidFill>
-                  <a:srgbClr val="1A1A1A"/>
-                </a:solidFill>
-                <a:latin typeface="Georgia"/>
-              </a:rPr>
-              <a:t>Single evaluation domain</a:t>
-            </a:r>
-          </a:p>
-        </p:txBody>
-      </p:sp>
-      <p:sp>
-        <p:nvSpPr>
-          <p:cNvPr id="9" name="TextBox 8"/>
-          <p:cNvSpPr txBox="1"/>
-          <p:nvPr/>
-        </p:nvSpPr>
-        <p:spPr>
-          <a:xfrm>
-            <a:off x="4846320" y="3511296"/>
-            <a:ext cx="6675120" cy="548640"/>
-          </a:xfrm>
-          <a:prstGeom prst="rect">
-            <a:avLst/>
-          </a:prstGeom>
-          <a:noFill/>
-        </p:spPr>
-        <p:txBody>
-          <a:bodyPr wrap="square">
-            <a:spAutoFit/>
-          </a:bodyPr>
-          <a:lstStyle/>
-          <a:p>
-            <a:pPr algn="l">
-              <a:lnSpc>
-                <a:spcPct val="112000"/>
-              </a:lnSpc>
-            </a:pPr>
-            <a:r>
-              <a:rPr sz="1100" b="0">
-                <a:solidFill>
-                  <a:srgbClr val="1A1A1A"/>
-                </a:solidFill>
-                <a:latin typeface="Georgia"/>
-              </a:rPr>
-              <a:t>All accuracy numbers are VKITTI2 Scene18+20. A synthetic driving benchmark is not evidence for field or survey imagery.</a:t>
-            </a:r>
-          </a:p>
-        </p:txBody>
-      </p:sp>
-      <p:sp>
-        <p:nvSpPr>
-          <p:cNvPr id="10" name="TextBox 9"/>
-          <p:cNvSpPr txBox="1"/>
-          <p:nvPr/>
-        </p:nvSpPr>
-        <p:spPr>
-          <a:xfrm>
-            <a:off x="685800" y="4443984"/>
-            <a:ext cx="4023360" cy="274320"/>
-          </a:xfrm>
-          <a:prstGeom prst="rect">
-            <a:avLst/>
-          </a:prstGeom>
-          <a:noFill/>
-        </p:spPr>
-        <p:txBody>
-          <a:bodyPr wrap="square">
-            <a:spAutoFit/>
-          </a:bodyPr>
-          <a:lstStyle/>
-          <a:p>
-            <a:pPr algn="l">
-              <a:lnSpc>
-                <a:spcPct val="100000"/>
-              </a:lnSpc>
-            </a:pPr>
-            <a:r>
-              <a:rPr sz="1150" b="1">
-                <a:solidFill>
-                  <a:srgbClr val="1A1A1A"/>
-                </a:solidFill>
-                <a:latin typeface="Georgia"/>
-              </a:rPr>
-              <a:t>Spring run truncated</a:t>
-            </a:r>
-          </a:p>
-        </p:txBody>
-      </p:sp>
-      <p:sp>
-        <p:nvSpPr>
-          <p:cNvPr id="11" name="TextBox 10"/>
-          <p:cNvSpPr txBox="1"/>
-          <p:nvPr/>
-        </p:nvSpPr>
-        <p:spPr>
-          <a:xfrm>
-            <a:off x="4846320" y="4443984"/>
-            <a:ext cx="6675120" cy="548640"/>
-          </a:xfrm>
-          <a:prstGeom prst="rect">
-            <a:avLst/>
-          </a:prstGeom>
-          <a:noFill/>
-        </p:spPr>
-        <p:txBody>
-          <a:bodyPr wrap="square">
-            <a:spAutoFit/>
-          </a:bodyPr>
-          <a:lstStyle/>
-          <a:p>
-            <a:pPr algn="l">
-              <a:lnSpc>
-                <a:spcPct val="112000"/>
-              </a:lnSpc>
-            </a:pPr>
-            <a:r>
-              <a:rPr sz="1100" b="0">
-                <a:solidFill>
-                  <a:srgbClr val="1A1A1A"/>
-                </a:solidFill>
-                <a:latin typeface="Georgia"/>
-              </a:rPr>
-              <a:t>Killed by the 8-hour wall clock at roughly 90k of 100k steps, so it is not directly comparable to the others.</a:t>
-            </a:r>
-          </a:p>
-        </p:txBody>
-      </p:sp>
-      <p:sp>
-        <p:nvSpPr>
-          <p:cNvPr id="12" name="TextBox 11"/>
-          <p:cNvSpPr txBox="1"/>
-          <p:nvPr/>
-        </p:nvSpPr>
-        <p:spPr>
-          <a:xfrm>
-            <a:off x="685800" y="5376672"/>
-            <a:ext cx="4023360" cy="274320"/>
-          </a:xfrm>
-          <a:prstGeom prst="rect">
-            <a:avLst/>
-          </a:prstGeom>
-          <a:noFill/>
-        </p:spPr>
-        <p:txBody>
-          <a:bodyPr wrap="square">
-            <a:spAutoFit/>
-          </a:bodyPr>
-          <a:lstStyle/>
-          <a:p>
-            <a:pPr algn="l">
-              <a:lnSpc>
-                <a:spcPct val="100000"/>
-              </a:lnSpc>
-            </a:pPr>
-            <a:r>
-              <a:rPr sz="1150" b="1">
-                <a:solidFill>
-                  <a:srgbClr val="1A1A1A"/>
-                </a:solidFill>
-                <a:latin typeface="Georgia"/>
-              </a:rPr>
-              <a:t>One seed, and checkpoint noise the size of the effects</a:t>
-            </a:r>
-          </a:p>
-        </p:txBody>
-      </p:sp>
-      <p:sp>
-        <p:nvSpPr>
-          <p:cNvPr id="13" name="TextBox 12"/>
-          <p:cNvSpPr txBox="1"/>
-          <p:nvPr/>
-        </p:nvSpPr>
-        <p:spPr>
-          <a:xfrm>
-            <a:off x="4846320" y="5376672"/>
-            <a:ext cx="6675120" cy="548640"/>
-          </a:xfrm>
-          <a:prstGeom prst="rect">
-            <a:avLst/>
-          </a:prstGeom>
-          <a:noFill/>
-        </p:spPr>
-        <p:txBody>
-          <a:bodyPr wrap="square">
-            <a:spAutoFit/>
-          </a:bodyPr>
-          <a:lstStyle/>
-          <a:p>
-            <a:pPr algn="l">
-              <a:lnSpc>
-                <a:spcPct val="112000"/>
-              </a:lnSpc>
-            </a:pPr>
-            <a:r>
-              <a:rPr sz="1100" b="0">
-                <a:solidFill>
-                  <a:srgbClr val="1A1A1A"/>
-                </a:solidFill>
-                <a:latin typeface="Georgia"/>
-              </a:rPr>
-              <a:t>Step 90k vs 100k of the same run moves EPE by up to 0.038 px, reversing two of the orderings. Nothing finer than about 0.05 px is resolvable here.</a:t>
-            </a:r>
-          </a:p>
-        </p:txBody>
-      </p:sp>
-      <p:sp>
-        <p:nvSpPr>
-          <p:cNvPr id="14" name="TextBox 13"/>
-          <p:cNvSpPr txBox="1"/>
-          <p:nvPr/>
-        </p:nvSpPr>
-        <p:spPr>
-          <a:xfrm>
-            <a:off x="685800" y="6419088"/>
-            <a:ext cx="7315200" cy="274320"/>
-          </a:xfrm>
-          <a:prstGeom prst="rect">
-            <a:avLst/>
-          </a:prstGeom>
-          <a:noFill/>
-        </p:spPr>
-        <p:txBody>
-          <a:bodyPr wrap="square">
-            <a:spAutoFit/>
-          </a:bodyPr>
-          <a:lstStyle/>
-          <a:p>
-            <a:pPr algn="l">
-              <a:lnSpc>
-                <a:spcPct val="100000"/>
-              </a:lnSpc>
-            </a:pPr>
-            <a:r>
-              <a:rPr sz="900" b="0">
-                <a:solidFill>
-                  <a:srgbClr val="8A8A8A"/>
-                </a:solidFill>
-                <a:latin typeface="Georgia"/>
-              </a:rPr>
-              <a:t>NeuFlow v3, S. Raghav Srinivasan</a:t>
-            </a:r>
-          </a:p>
-        </p:txBody>
-      </p:sp>
-      <p:sp>
-        <p:nvSpPr>
-          <p:cNvPr id="15" name="TextBox 14"/>
           <p:cNvSpPr txBox="1"/>
           <p:nvPr/>
         </p:nvSpPr>
@@ -7947,7 +6548,7 @@
                 </a:solidFill>
                 <a:latin typeface="Georgia"/>
               </a:rPr>
-              <a:t>NEXT STEPS</a:t>
+              <a:t>ASSESSMENT</a:t>
             </a:r>
           </a:p>
         </p:txBody>
@@ -7986,32 +6587,147 @@
                 </a:solidFill>
                 <a:latin typeface="Georgia"/>
               </a:rPr>
-              <a:t>In priority order</a:t>
-            </a:r>
-          </a:p>
-        </p:txBody>
-      </p:sp>
-      <p:sp>
-        <p:nvSpPr>
-          <p:cNvPr id="4" name="Rounded Rectangle 3"/>
+              <a:t>Against the three objectives I set</a:t>
+            </a:r>
+          </a:p>
+        </p:txBody>
+      </p:sp>
+      <p:sp>
+        <p:nvSpPr>
+          <p:cNvPr id="4" name="TextBox 3"/>
+          <p:cNvSpPr txBox="1"/>
+          <p:nvPr/>
+        </p:nvSpPr>
+        <p:spPr>
+          <a:xfrm>
+            <a:off x="685800" y="1691640"/>
+            <a:ext cx="3291840" cy="237744"/>
+          </a:xfrm>
+          <a:prstGeom prst="rect">
+            <a:avLst/>
+          </a:prstGeom>
+          <a:noFill/>
+        </p:spPr>
+        <p:txBody>
+          <a:bodyPr wrap="square">
+            <a:spAutoFit/>
+          </a:bodyPr>
+          <a:lstStyle/>
+          <a:p>
+            <a:pPr algn="l">
+              <a:lnSpc>
+                <a:spcPct val="100000"/>
+              </a:lnSpc>
+            </a:pPr>
+            <a:r>
+              <a:rPr sz="1150" b="1">
+                <a:solidFill>
+                  <a:srgbClr val="1A1A1A"/>
+                </a:solidFill>
+                <a:latin typeface="Georgia"/>
+              </a:rPr>
+              <a:t>Objective</a:t>
+            </a:r>
+          </a:p>
+        </p:txBody>
+      </p:sp>
+      <p:sp>
+        <p:nvSpPr>
+          <p:cNvPr id="5" name="TextBox 4"/>
+          <p:cNvSpPr txBox="1"/>
+          <p:nvPr/>
+        </p:nvSpPr>
+        <p:spPr>
+          <a:xfrm>
+            <a:off x="3977639" y="1691640"/>
+            <a:ext cx="1737360" cy="237744"/>
+          </a:xfrm>
+          <a:prstGeom prst="rect">
+            <a:avLst/>
+          </a:prstGeom>
+          <a:noFill/>
+        </p:spPr>
+        <p:txBody>
+          <a:bodyPr wrap="square">
+            <a:spAutoFit/>
+          </a:bodyPr>
+          <a:lstStyle/>
+          <a:p>
+            <a:pPr algn="r">
+              <a:lnSpc>
+                <a:spcPct val="100000"/>
+              </a:lnSpc>
+            </a:pPr>
+            <a:r>
+              <a:rPr sz="1150" b="1">
+                <a:solidFill>
+                  <a:srgbClr val="1A1A1A"/>
+                </a:solidFill>
+                <a:latin typeface="Georgia"/>
+              </a:rPr>
+              <a:t>Verdict</a:t>
+            </a:r>
+          </a:p>
+        </p:txBody>
+      </p:sp>
+      <p:sp>
+        <p:nvSpPr>
+          <p:cNvPr id="6" name="TextBox 5"/>
+          <p:cNvSpPr txBox="1"/>
+          <p:nvPr/>
+        </p:nvSpPr>
+        <p:spPr>
+          <a:xfrm>
+            <a:off x="5715000" y="1691640"/>
+            <a:ext cx="5852160" cy="237744"/>
+          </a:xfrm>
+          <a:prstGeom prst="rect">
+            <a:avLst/>
+          </a:prstGeom>
+          <a:noFill/>
+        </p:spPr>
+        <p:txBody>
+          <a:bodyPr wrap="square">
+            <a:spAutoFit/>
+          </a:bodyPr>
+          <a:lstStyle/>
+          <a:p>
+            <a:pPr algn="r">
+              <a:lnSpc>
+                <a:spcPct val="100000"/>
+              </a:lnSpc>
+            </a:pPr>
+            <a:r>
+              <a:rPr sz="1150" b="1">
+                <a:solidFill>
+                  <a:srgbClr val="1A1A1A"/>
+                </a:solidFill>
+                <a:latin typeface="Georgia"/>
+              </a:rPr>
+              <a:t>Evidence</a:t>
+            </a:r>
+          </a:p>
+        </p:txBody>
+      </p:sp>
+      <p:sp>
+        <p:nvSpPr>
+          <p:cNvPr id="7" name="Rectangle 6"/>
           <p:cNvSpPr/>
           <p:nvPr/>
         </p:nvSpPr>
         <p:spPr>
           <a:xfrm>
-            <a:off x="685800" y="1691640"/>
-            <a:ext cx="384048" cy="384048"/>
-          </a:xfrm>
-          <a:prstGeom prst="roundRect">
+            <a:off x="685800" y="1929384"/>
+            <a:ext cx="10881360" cy="9525"/>
+          </a:xfrm>
+          <a:prstGeom prst="rect">
             <a:avLst/>
           </a:prstGeom>
           <a:solidFill>
-            <a:srgbClr val="333333"/>
+            <a:srgbClr val="8A8A8A"/>
           </a:solidFill>
-          <a:ln w="9525">
-            <a:solidFill>
-              <a:srgbClr val="8A8A8A"/>
-            </a:solidFill>
+          <a:ln>
+            <a:noFill/>
           </a:ln>
           <a:effectLst/>
         </p:spPr>
@@ -8030,32 +6746,23 @@
           </a:fontRef>
         </p:style>
         <p:txBody>
-          <a:bodyPr rtlCol="0" anchor="ctr" wrap="square" lIns="73152" rIns="73152"/>
+          <a:bodyPr rtlCol="0" anchor="ctr"/>
           <a:lstStyle/>
           <a:p>
             <a:pPr algn="ctr"/>
-            <a:r>
-              <a:rPr sz="1200" b="1">
-                <a:solidFill>
-                  <a:srgbClr val="FFFFFF"/>
-                </a:solidFill>
-                <a:latin typeface="Georgia"/>
-              </a:rPr>
-              <a:t>1</a:t>
-            </a:r>
-          </a:p>
-        </p:txBody>
-      </p:sp>
-      <p:sp>
-        <p:nvSpPr>
-          <p:cNvPr id="5" name="TextBox 4"/>
+          </a:p>
+        </p:txBody>
+      </p:sp>
+      <p:sp>
+        <p:nvSpPr>
+          <p:cNvPr id="8" name="TextBox 7"/>
           <p:cNvSpPr txBox="1"/>
           <p:nvPr/>
         </p:nvSpPr>
         <p:spPr>
           <a:xfrm>
-            <a:off x="1234440" y="1673352"/>
-            <a:ext cx="3657600" cy="274320"/>
+            <a:off x="685800" y="1965960"/>
+            <a:ext cx="3291840" cy="237744"/>
           </a:xfrm>
           <a:prstGeom prst="rect">
             <a:avLst/>
@@ -8074,27 +6781,27 @@
               </a:lnSpc>
             </a:pPr>
             <a:r>
-              <a:rPr sz="1200" b="1">
-                <a:solidFill>
-                  <a:srgbClr val="1A1A1A"/>
-                </a:solidFill>
-                <a:latin typeface="Georgia"/>
-              </a:rPr>
-              <a:t>Full-resolution stem for the decoder</a:t>
-            </a:r>
-          </a:p>
-        </p:txBody>
-      </p:sp>
-      <p:sp>
-        <p:nvSpPr>
-          <p:cNvPr id="6" name="TextBox 5"/>
+              <a:rPr sz="1150" b="0">
+                <a:solidFill>
+                  <a:srgbClr val="1A1A1A"/>
+                </a:solidFill>
+                <a:latin typeface="Georgia"/>
+              </a:rPr>
+              <a:t>Better accuracy than v2</a:t>
+            </a:r>
+          </a:p>
+        </p:txBody>
+      </p:sp>
+      <p:sp>
+        <p:nvSpPr>
+          <p:cNvPr id="9" name="TextBox 8"/>
           <p:cNvSpPr txBox="1"/>
           <p:nvPr/>
         </p:nvSpPr>
         <p:spPr>
           <a:xfrm>
-            <a:off x="5029200" y="1673352"/>
-            <a:ext cx="6492240" cy="822960"/>
+            <a:off x="3977639" y="1965960"/>
+            <a:ext cx="1737360" cy="237744"/>
           </a:xfrm>
           <a:prstGeom prst="rect">
             <a:avLst/>
@@ -8107,39 +6814,936 @@
           </a:bodyPr>
           <a:lstStyle/>
           <a:p>
-            <a:pPr algn="l">
-              <a:lnSpc>
-                <a:spcPct val="112000"/>
-              </a:lnSpc>
-            </a:pPr>
-            <a:r>
-              <a:rPr sz="1100" b="0">
-                <a:solidFill>
-                  <a:srgbClr val="1A1A1A"/>
-                </a:solidFill>
-                <a:latin typeface="Georgia"/>
-              </a:rPr>
-              <a:t>Give the decoder a cheap full-resolution feature map so evidence actually varies within an 8x8 cell. This is the direct attack on the precision gap and on making continuous querying meaningful rather than nominal.</a:t>
-            </a:r>
-          </a:p>
-        </p:txBody>
-      </p:sp>
-      <p:sp>
-        <p:nvSpPr>
-          <p:cNvPr id="7" name="Rounded Rectangle 6"/>
+            <a:pPr algn="r">
+              <a:lnSpc>
+                <a:spcPct val="100000"/>
+              </a:lnSpc>
+            </a:pPr>
+            <a:r>
+              <a:rPr sz="1150" b="0">
+                <a:solidFill>
+                  <a:srgbClr val="1A1A1A"/>
+                </a:solidFill>
+                <a:latin typeface="Georgia"/>
+              </a:rPr>
+              <a:t>NOT MET</a:t>
+            </a:r>
+          </a:p>
+        </p:txBody>
+      </p:sp>
+      <p:sp>
+        <p:nvSpPr>
+          <p:cNvPr id="10" name="TextBox 9"/>
+          <p:cNvSpPr txBox="1"/>
+          <p:nvPr/>
+        </p:nvSpPr>
+        <p:spPr>
+          <a:xfrm>
+            <a:off x="5715000" y="1965960"/>
+            <a:ext cx="5852160" cy="237744"/>
+          </a:xfrm>
+          <a:prstGeom prst="rect">
+            <a:avLst/>
+          </a:prstGeom>
+          <a:noFill/>
+        </p:spPr>
+        <p:txBody>
+          <a:bodyPr wrap="square">
+            <a:spAutoFit/>
+          </a:bodyPr>
+          <a:lstStyle/>
+          <a:p>
+            <a:pPr algn="r">
+              <a:lnSpc>
+                <a:spcPct val="100000"/>
+              </a:lnSpc>
+            </a:pPr>
+            <a:r>
+              <a:rPr sz="1150" b="0">
+                <a:solidFill>
+                  <a:srgbClr val="1A1A1A"/>
+                </a:solidFill>
+                <a:latin typeface="Georgia"/>
+              </a:rPr>
+              <a:t>best v3 2.384 vs 2.324; every config above v2</a:t>
+            </a:r>
+          </a:p>
+        </p:txBody>
+      </p:sp>
+      <p:sp>
+        <p:nvSpPr>
+          <p:cNvPr id="11" name="TextBox 10"/>
+          <p:cNvSpPr txBox="1"/>
+          <p:nvPr/>
+        </p:nvSpPr>
+        <p:spPr>
+          <a:xfrm>
+            <a:off x="685800" y="2240279"/>
+            <a:ext cx="3291840" cy="237744"/>
+          </a:xfrm>
+          <a:prstGeom prst="rect">
+            <a:avLst/>
+          </a:prstGeom>
+          <a:noFill/>
+        </p:spPr>
+        <p:txBody>
+          <a:bodyPr wrap="square">
+            <a:spAutoFit/>
+          </a:bodyPr>
+          <a:lstStyle/>
+          <a:p>
+            <a:pPr algn="l">
+              <a:lnSpc>
+                <a:spcPct val="100000"/>
+              </a:lnSpc>
+            </a:pPr>
+            <a:r>
+              <a:rPr sz="1150" b="0">
+                <a:solidFill>
+                  <a:srgbClr val="1A1A1A"/>
+                </a:solidFill>
+                <a:latin typeface="Georgia"/>
+              </a:rPr>
+              <a:t/>
+            </a:r>
+          </a:p>
+        </p:txBody>
+      </p:sp>
+      <p:sp>
+        <p:nvSpPr>
+          <p:cNvPr id="12" name="TextBox 11"/>
+          <p:cNvSpPr txBox="1"/>
+          <p:nvPr/>
+        </p:nvSpPr>
+        <p:spPr>
+          <a:xfrm>
+            <a:off x="3977639" y="2240279"/>
+            <a:ext cx="1737360" cy="237744"/>
+          </a:xfrm>
+          <a:prstGeom prst="rect">
+            <a:avLst/>
+          </a:prstGeom>
+          <a:noFill/>
+        </p:spPr>
+        <p:txBody>
+          <a:bodyPr wrap="square">
+            <a:spAutoFit/>
+          </a:bodyPr>
+          <a:lstStyle/>
+          <a:p>
+            <a:pPr algn="r">
+              <a:lnSpc>
+                <a:spcPct val="100000"/>
+              </a:lnSpc>
+            </a:pPr>
+            <a:r>
+              <a:rPr sz="1150" b="0">
+                <a:solidFill>
+                  <a:srgbClr val="1A1A1A"/>
+                </a:solidFill>
+                <a:latin typeface="Georgia"/>
+              </a:rPr>
+              <a:t/>
+            </a:r>
+          </a:p>
+        </p:txBody>
+      </p:sp>
+      <p:sp>
+        <p:nvSpPr>
+          <p:cNvPr id="13" name="TextBox 12"/>
+          <p:cNvSpPr txBox="1"/>
+          <p:nvPr/>
+        </p:nvSpPr>
+        <p:spPr>
+          <a:xfrm>
+            <a:off x="5715000" y="2240279"/>
+            <a:ext cx="5852160" cy="237744"/>
+          </a:xfrm>
+          <a:prstGeom prst="rect">
+            <a:avLst/>
+          </a:prstGeom>
+          <a:noFill/>
+        </p:spPr>
+        <p:txBody>
+          <a:bodyPr wrap="square">
+            <a:spAutoFit/>
+          </a:bodyPr>
+          <a:lstStyle/>
+          <a:p>
+            <a:pPr algn="r">
+              <a:lnSpc>
+                <a:spcPct val="100000"/>
+              </a:lnSpc>
+            </a:pPr>
+            <a:r>
+              <a:rPr sz="1150" b="0">
+                <a:solidFill>
+                  <a:srgbClr val="1A1A1A"/>
+                </a:solidFill>
+                <a:latin typeface="Georgia"/>
+              </a:rPr>
+              <a:t>like-for-like 2.500, i.e. 7.6% behind</a:t>
+            </a:r>
+          </a:p>
+        </p:txBody>
+      </p:sp>
+      <p:sp>
+        <p:nvSpPr>
+          <p:cNvPr id="14" name="TextBox 13"/>
+          <p:cNvSpPr txBox="1"/>
+          <p:nvPr/>
+        </p:nvSpPr>
+        <p:spPr>
+          <a:xfrm>
+            <a:off x="685800" y="2514599"/>
+            <a:ext cx="3291840" cy="237744"/>
+          </a:xfrm>
+          <a:prstGeom prst="rect">
+            <a:avLst/>
+          </a:prstGeom>
+          <a:noFill/>
+        </p:spPr>
+        <p:txBody>
+          <a:bodyPr wrap="square">
+            <a:spAutoFit/>
+          </a:bodyPr>
+          <a:lstStyle/>
+          <a:p>
+            <a:pPr algn="l">
+              <a:lnSpc>
+                <a:spcPct val="100000"/>
+              </a:lnSpc>
+            </a:pPr>
+            <a:r>
+              <a:rPr sz="1150" b="0">
+                <a:solidFill>
+                  <a:srgbClr val="1A1A1A"/>
+                </a:solidFill>
+                <a:latin typeface="Georgia"/>
+              </a:rPr>
+              <a:t/>
+            </a:r>
+          </a:p>
+        </p:txBody>
+      </p:sp>
+      <p:sp>
+        <p:nvSpPr>
+          <p:cNvPr id="15" name="TextBox 14"/>
+          <p:cNvSpPr txBox="1"/>
+          <p:nvPr/>
+        </p:nvSpPr>
+        <p:spPr>
+          <a:xfrm>
+            <a:off x="3977639" y="2514599"/>
+            <a:ext cx="1737360" cy="237744"/>
+          </a:xfrm>
+          <a:prstGeom prst="rect">
+            <a:avLst/>
+          </a:prstGeom>
+          <a:noFill/>
+        </p:spPr>
+        <p:txBody>
+          <a:bodyPr wrap="square">
+            <a:spAutoFit/>
+          </a:bodyPr>
+          <a:lstStyle/>
+          <a:p>
+            <a:pPr algn="r">
+              <a:lnSpc>
+                <a:spcPct val="100000"/>
+              </a:lnSpc>
+            </a:pPr>
+            <a:r>
+              <a:rPr sz="1150" b="0">
+                <a:solidFill>
+                  <a:srgbClr val="1A1A1A"/>
+                </a:solidFill>
+                <a:latin typeface="Georgia"/>
+              </a:rPr>
+              <a:t/>
+            </a:r>
+          </a:p>
+        </p:txBody>
+      </p:sp>
+      <p:sp>
+        <p:nvSpPr>
+          <p:cNvPr id="16" name="TextBox 15"/>
+          <p:cNvSpPr txBox="1"/>
+          <p:nvPr/>
+        </p:nvSpPr>
+        <p:spPr>
+          <a:xfrm>
+            <a:off x="5715000" y="2514599"/>
+            <a:ext cx="5852160" cy="237744"/>
+          </a:xfrm>
+          <a:prstGeom prst="rect">
+            <a:avLst/>
+          </a:prstGeom>
+          <a:noFill/>
+        </p:spPr>
+        <p:txBody>
+          <a:bodyPr wrap="square">
+            <a:spAutoFit/>
+          </a:bodyPr>
+          <a:lstStyle/>
+          <a:p>
+            <a:pPr algn="r">
+              <a:lnSpc>
+                <a:spcPct val="100000"/>
+              </a:lnSpc>
+            </a:pPr>
+            <a:r>
+              <a:rPr sz="1150" b="0">
+                <a:solidFill>
+                  <a:srgbClr val="1A1A1A"/>
+                </a:solidFill>
+                <a:latin typeface="Georgia"/>
+              </a:rPr>
+              <a:t/>
+            </a:r>
+          </a:p>
+        </p:txBody>
+      </p:sp>
+      <p:sp>
+        <p:nvSpPr>
+          <p:cNvPr id="17" name="TextBox 16"/>
+          <p:cNvSpPr txBox="1"/>
+          <p:nvPr/>
+        </p:nvSpPr>
+        <p:spPr>
+          <a:xfrm>
+            <a:off x="685800" y="2788919"/>
+            <a:ext cx="3291840" cy="237744"/>
+          </a:xfrm>
+          <a:prstGeom prst="rect">
+            <a:avLst/>
+          </a:prstGeom>
+          <a:noFill/>
+        </p:spPr>
+        <p:txBody>
+          <a:bodyPr wrap="square">
+            <a:spAutoFit/>
+          </a:bodyPr>
+          <a:lstStyle/>
+          <a:p>
+            <a:pPr algn="l">
+              <a:lnSpc>
+                <a:spcPct val="100000"/>
+              </a:lnSpc>
+            </a:pPr>
+            <a:r>
+              <a:rPr sz="1150" b="0">
+                <a:solidFill>
+                  <a:srgbClr val="1A1A1A"/>
+                </a:solidFill>
+                <a:latin typeface="Georgia"/>
+              </a:rPr>
+              <a:t>Less compute than v2</a:t>
+            </a:r>
+          </a:p>
+        </p:txBody>
+      </p:sp>
+      <p:sp>
+        <p:nvSpPr>
+          <p:cNvPr id="18" name="TextBox 17"/>
+          <p:cNvSpPr txBox="1"/>
+          <p:nvPr/>
+        </p:nvSpPr>
+        <p:spPr>
+          <a:xfrm>
+            <a:off x="3977639" y="2788919"/>
+            <a:ext cx="1737360" cy="237744"/>
+          </a:xfrm>
+          <a:prstGeom prst="rect">
+            <a:avLst/>
+          </a:prstGeom>
+          <a:noFill/>
+        </p:spPr>
+        <p:txBody>
+          <a:bodyPr wrap="square">
+            <a:spAutoFit/>
+          </a:bodyPr>
+          <a:lstStyle/>
+          <a:p>
+            <a:pPr algn="r">
+              <a:lnSpc>
+                <a:spcPct val="100000"/>
+              </a:lnSpc>
+            </a:pPr>
+            <a:r>
+              <a:rPr sz="1150" b="0">
+                <a:solidFill>
+                  <a:srgbClr val="1A1A1A"/>
+                </a:solidFill>
+                <a:latin typeface="Georgia"/>
+              </a:rPr>
+              <a:t>PARTLY</a:t>
+            </a:r>
+          </a:p>
+        </p:txBody>
+      </p:sp>
+      <p:sp>
+        <p:nvSpPr>
+          <p:cNvPr id="19" name="TextBox 18"/>
+          <p:cNvSpPr txBox="1"/>
+          <p:nvPr/>
+        </p:nvSpPr>
+        <p:spPr>
+          <a:xfrm>
+            <a:off x="5715000" y="2788919"/>
+            <a:ext cx="5852160" cy="237744"/>
+          </a:xfrm>
+          <a:prstGeom prst="rect">
+            <a:avLst/>
+          </a:prstGeom>
+          <a:noFill/>
+        </p:spPr>
+        <p:txBody>
+          <a:bodyPr wrap="square">
+            <a:spAutoFit/>
+          </a:bodyPr>
+          <a:lstStyle/>
+          <a:p>
+            <a:pPr algn="r">
+              <a:lnSpc>
+                <a:spcPct val="100000"/>
+              </a:lnSpc>
+            </a:pPr>
+            <a:r>
+              <a:rPr sz="1150" b="0">
+                <a:solidFill>
+                  <a:srgbClr val="1A1A1A"/>
+                </a:solidFill>
+                <a:latin typeface="Georgia"/>
+              </a:rPr>
+              <a:t>dense 14% slower; first query level</a:t>
+            </a:r>
+          </a:p>
+        </p:txBody>
+      </p:sp>
+      <p:sp>
+        <p:nvSpPr>
+          <p:cNvPr id="20" name="TextBox 19"/>
+          <p:cNvSpPr txBox="1"/>
+          <p:nvPr/>
+        </p:nvSpPr>
+        <p:spPr>
+          <a:xfrm>
+            <a:off x="685800" y="3063239"/>
+            <a:ext cx="3291840" cy="237744"/>
+          </a:xfrm>
+          <a:prstGeom prst="rect">
+            <a:avLst/>
+          </a:prstGeom>
+          <a:noFill/>
+        </p:spPr>
+        <p:txBody>
+          <a:bodyPr wrap="square">
+            <a:spAutoFit/>
+          </a:bodyPr>
+          <a:lstStyle/>
+          <a:p>
+            <a:pPr algn="l">
+              <a:lnSpc>
+                <a:spcPct val="100000"/>
+              </a:lnSpc>
+            </a:pPr>
+            <a:r>
+              <a:rPr sz="1150" b="0">
+                <a:solidFill>
+                  <a:srgbClr val="1A1A1A"/>
+                </a:solidFill>
+                <a:latin typeface="Georgia"/>
+              </a:rPr>
+              <a:t/>
+            </a:r>
+          </a:p>
+        </p:txBody>
+      </p:sp>
+      <p:sp>
+        <p:nvSpPr>
+          <p:cNvPr id="21" name="TextBox 20"/>
+          <p:cNvSpPr txBox="1"/>
+          <p:nvPr/>
+        </p:nvSpPr>
+        <p:spPr>
+          <a:xfrm>
+            <a:off x="3977639" y="3063239"/>
+            <a:ext cx="1737360" cy="237744"/>
+          </a:xfrm>
+          <a:prstGeom prst="rect">
+            <a:avLst/>
+          </a:prstGeom>
+          <a:noFill/>
+        </p:spPr>
+        <p:txBody>
+          <a:bodyPr wrap="square">
+            <a:spAutoFit/>
+          </a:bodyPr>
+          <a:lstStyle/>
+          <a:p>
+            <a:pPr algn="r">
+              <a:lnSpc>
+                <a:spcPct val="100000"/>
+              </a:lnSpc>
+            </a:pPr>
+            <a:r>
+              <a:rPr sz="1150" b="0">
+                <a:solidFill>
+                  <a:srgbClr val="1A1A1A"/>
+                </a:solidFill>
+                <a:latin typeface="Georgia"/>
+              </a:rPr>
+              <a:t/>
+            </a:r>
+          </a:p>
+        </p:txBody>
+      </p:sp>
+      <p:sp>
+        <p:nvSpPr>
+          <p:cNvPr id="22" name="TextBox 21"/>
+          <p:cNvSpPr txBox="1"/>
+          <p:nvPr/>
+        </p:nvSpPr>
+        <p:spPr>
+          <a:xfrm>
+            <a:off x="5715000" y="3063239"/>
+            <a:ext cx="5852160" cy="237744"/>
+          </a:xfrm>
+          <a:prstGeom prst="rect">
+            <a:avLst/>
+          </a:prstGeom>
+          <a:noFill/>
+        </p:spPr>
+        <p:txBody>
+          <a:bodyPr wrap="square">
+            <a:spAutoFit/>
+          </a:bodyPr>
+          <a:lstStyle/>
+          <a:p>
+            <a:pPr algn="r">
+              <a:lnSpc>
+                <a:spcPct val="100000"/>
+              </a:lnSpc>
+            </a:pPr>
+            <a:r>
+              <a:rPr sz="1150" b="0">
+                <a:solidFill>
+                  <a:srgbClr val="1A1A1A"/>
+                </a:solidFill>
+                <a:latin typeface="Georgia"/>
+              </a:rPr>
+              <a:t>repeat query 7.7x cheaper (2.6 vs 19.3 ms)</a:t>
+            </a:r>
+          </a:p>
+        </p:txBody>
+      </p:sp>
+      <p:sp>
+        <p:nvSpPr>
+          <p:cNvPr id="23" name="TextBox 22"/>
+          <p:cNvSpPr txBox="1"/>
+          <p:nvPr/>
+        </p:nvSpPr>
+        <p:spPr>
+          <a:xfrm>
+            <a:off x="685800" y="3337559"/>
+            <a:ext cx="3291840" cy="237744"/>
+          </a:xfrm>
+          <a:prstGeom prst="rect">
+            <a:avLst/>
+          </a:prstGeom>
+          <a:noFill/>
+        </p:spPr>
+        <p:txBody>
+          <a:bodyPr wrap="square">
+            <a:spAutoFit/>
+          </a:bodyPr>
+          <a:lstStyle/>
+          <a:p>
+            <a:pPr algn="l">
+              <a:lnSpc>
+                <a:spcPct val="100000"/>
+              </a:lnSpc>
+            </a:pPr>
+            <a:r>
+              <a:rPr sz="1150" b="0">
+                <a:solidFill>
+                  <a:srgbClr val="1A1A1A"/>
+                </a:solidFill>
+                <a:latin typeface="Georgia"/>
+              </a:rPr>
+              <a:t/>
+            </a:r>
+          </a:p>
+        </p:txBody>
+      </p:sp>
+      <p:sp>
+        <p:nvSpPr>
+          <p:cNvPr id="24" name="TextBox 23"/>
+          <p:cNvSpPr txBox="1"/>
+          <p:nvPr/>
+        </p:nvSpPr>
+        <p:spPr>
+          <a:xfrm>
+            <a:off x="3977639" y="3337559"/>
+            <a:ext cx="1737360" cy="237744"/>
+          </a:xfrm>
+          <a:prstGeom prst="rect">
+            <a:avLst/>
+          </a:prstGeom>
+          <a:noFill/>
+        </p:spPr>
+        <p:txBody>
+          <a:bodyPr wrap="square">
+            <a:spAutoFit/>
+          </a:bodyPr>
+          <a:lstStyle/>
+          <a:p>
+            <a:pPr algn="r">
+              <a:lnSpc>
+                <a:spcPct val="100000"/>
+              </a:lnSpc>
+            </a:pPr>
+            <a:r>
+              <a:rPr sz="1150" b="0">
+                <a:solidFill>
+                  <a:srgbClr val="1A1A1A"/>
+                </a:solidFill>
+                <a:latin typeface="Georgia"/>
+              </a:rPr>
+              <a:t/>
+            </a:r>
+          </a:p>
+        </p:txBody>
+      </p:sp>
+      <p:sp>
+        <p:nvSpPr>
+          <p:cNvPr id="25" name="TextBox 24"/>
+          <p:cNvSpPr txBox="1"/>
+          <p:nvPr/>
+        </p:nvSpPr>
+        <p:spPr>
+          <a:xfrm>
+            <a:off x="5715000" y="3337559"/>
+            <a:ext cx="5852160" cy="237744"/>
+          </a:xfrm>
+          <a:prstGeom prst="rect">
+            <a:avLst/>
+          </a:prstGeom>
+          <a:noFill/>
+        </p:spPr>
+        <p:txBody>
+          <a:bodyPr wrap="square">
+            <a:spAutoFit/>
+          </a:bodyPr>
+          <a:lstStyle/>
+          <a:p>
+            <a:pPr algn="r">
+              <a:lnSpc>
+                <a:spcPct val="100000"/>
+              </a:lnSpc>
+            </a:pPr>
+            <a:r>
+              <a:rPr sz="1150" b="0">
+                <a:solidFill>
+                  <a:srgbClr val="1A1A1A"/>
+                </a:solidFill>
+                <a:latin typeface="Georgia"/>
+              </a:rPr>
+              <a:t/>
+            </a:r>
+          </a:p>
+        </p:txBody>
+      </p:sp>
+      <p:sp>
+        <p:nvSpPr>
+          <p:cNvPr id="26" name="TextBox 25"/>
+          <p:cNvSpPr txBox="1"/>
+          <p:nvPr/>
+        </p:nvSpPr>
+        <p:spPr>
+          <a:xfrm>
+            <a:off x="685800" y="3611879"/>
+            <a:ext cx="3291840" cy="237744"/>
+          </a:xfrm>
+          <a:prstGeom prst="rect">
+            <a:avLst/>
+          </a:prstGeom>
+          <a:noFill/>
+        </p:spPr>
+        <p:txBody>
+          <a:bodyPr wrap="square">
+            <a:spAutoFit/>
+          </a:bodyPr>
+          <a:lstStyle/>
+          <a:p>
+            <a:pPr algn="l">
+              <a:lnSpc>
+                <a:spcPct val="100000"/>
+              </a:lnSpc>
+            </a:pPr>
+            <a:r>
+              <a:rPr sz="1150" b="0">
+                <a:solidFill>
+                  <a:srgbClr val="1A1A1A"/>
+                </a:solidFill>
+                <a:latin typeface="Georgia"/>
+              </a:rPr>
+              <a:t>Runs on edge devices</a:t>
+            </a:r>
+          </a:p>
+        </p:txBody>
+      </p:sp>
+      <p:sp>
+        <p:nvSpPr>
+          <p:cNvPr id="27" name="TextBox 26"/>
+          <p:cNvSpPr txBox="1"/>
+          <p:nvPr/>
+        </p:nvSpPr>
+        <p:spPr>
+          <a:xfrm>
+            <a:off x="3977639" y="3611879"/>
+            <a:ext cx="1737360" cy="237744"/>
+          </a:xfrm>
+          <a:prstGeom prst="rect">
+            <a:avLst/>
+          </a:prstGeom>
+          <a:noFill/>
+        </p:spPr>
+        <p:txBody>
+          <a:bodyPr wrap="square">
+            <a:spAutoFit/>
+          </a:bodyPr>
+          <a:lstStyle/>
+          <a:p>
+            <a:pPr algn="r">
+              <a:lnSpc>
+                <a:spcPct val="100000"/>
+              </a:lnSpc>
+            </a:pPr>
+            <a:r>
+              <a:rPr sz="1150" b="0">
+                <a:solidFill>
+                  <a:srgbClr val="1A1A1A"/>
+                </a:solidFill>
+                <a:latin typeface="Georgia"/>
+              </a:rPr>
+              <a:t>UNPROVEN</a:t>
+            </a:r>
+          </a:p>
+        </p:txBody>
+      </p:sp>
+      <p:sp>
+        <p:nvSpPr>
+          <p:cNvPr id="28" name="TextBox 27"/>
+          <p:cNvSpPr txBox="1"/>
+          <p:nvPr/>
+        </p:nvSpPr>
+        <p:spPr>
+          <a:xfrm>
+            <a:off x="5715000" y="3611879"/>
+            <a:ext cx="5852160" cy="237744"/>
+          </a:xfrm>
+          <a:prstGeom prst="rect">
+            <a:avLst/>
+          </a:prstGeom>
+          <a:noFill/>
+        </p:spPr>
+        <p:txBody>
+          <a:bodyPr wrap="square">
+            <a:spAutoFit/>
+          </a:bodyPr>
+          <a:lstStyle/>
+          <a:p>
+            <a:pPr algn="r">
+              <a:lnSpc>
+                <a:spcPct val="100000"/>
+              </a:lnSpc>
+            </a:pPr>
+            <a:r>
+              <a:rPr sz="1150" b="0">
+                <a:solidFill>
+                  <a:srgbClr val="1A1A1A"/>
+                </a:solidFill>
+                <a:latin typeface="Georgia"/>
+              </a:rPr>
+              <a:t>all figures from V100 and RTX 4060</a:t>
+            </a:r>
+          </a:p>
+        </p:txBody>
+      </p:sp>
+      <p:sp>
+        <p:nvSpPr>
+          <p:cNvPr id="29" name="TextBox 28"/>
+          <p:cNvSpPr txBox="1"/>
+          <p:nvPr/>
+        </p:nvSpPr>
+        <p:spPr>
+          <a:xfrm>
+            <a:off x="685800" y="3886199"/>
+            <a:ext cx="3291840" cy="237744"/>
+          </a:xfrm>
+          <a:prstGeom prst="rect">
+            <a:avLst/>
+          </a:prstGeom>
+          <a:noFill/>
+        </p:spPr>
+        <p:txBody>
+          <a:bodyPr wrap="square">
+            <a:spAutoFit/>
+          </a:bodyPr>
+          <a:lstStyle/>
+          <a:p>
+            <a:pPr algn="l">
+              <a:lnSpc>
+                <a:spcPct val="100000"/>
+              </a:lnSpc>
+            </a:pPr>
+            <a:r>
+              <a:rPr sz="1150" b="0">
+                <a:solidFill>
+                  <a:srgbClr val="1A1A1A"/>
+                </a:solidFill>
+                <a:latin typeface="Georgia"/>
+              </a:rPr>
+              <a:t/>
+            </a:r>
+          </a:p>
+        </p:txBody>
+      </p:sp>
+      <p:sp>
+        <p:nvSpPr>
+          <p:cNvPr id="30" name="TextBox 29"/>
+          <p:cNvSpPr txBox="1"/>
+          <p:nvPr/>
+        </p:nvSpPr>
+        <p:spPr>
+          <a:xfrm>
+            <a:off x="3977639" y="3886199"/>
+            <a:ext cx="1737360" cy="237744"/>
+          </a:xfrm>
+          <a:prstGeom prst="rect">
+            <a:avLst/>
+          </a:prstGeom>
+          <a:noFill/>
+        </p:spPr>
+        <p:txBody>
+          <a:bodyPr wrap="square">
+            <a:spAutoFit/>
+          </a:bodyPr>
+          <a:lstStyle/>
+          <a:p>
+            <a:pPr algn="r">
+              <a:lnSpc>
+                <a:spcPct val="100000"/>
+              </a:lnSpc>
+            </a:pPr>
+            <a:r>
+              <a:rPr sz="1150" b="0">
+                <a:solidFill>
+                  <a:srgbClr val="1A1A1A"/>
+                </a:solidFill>
+                <a:latin typeface="Georgia"/>
+              </a:rPr>
+              <a:t/>
+            </a:r>
+          </a:p>
+        </p:txBody>
+      </p:sp>
+      <p:sp>
+        <p:nvSpPr>
+          <p:cNvPr id="31" name="TextBox 30"/>
+          <p:cNvSpPr txBox="1"/>
+          <p:nvPr/>
+        </p:nvSpPr>
+        <p:spPr>
+          <a:xfrm>
+            <a:off x="5715000" y="3886199"/>
+            <a:ext cx="5852160" cy="237744"/>
+          </a:xfrm>
+          <a:prstGeom prst="rect">
+            <a:avLst/>
+          </a:prstGeom>
+          <a:noFill/>
+        </p:spPr>
+        <p:txBody>
+          <a:bodyPr wrap="square">
+            <a:spAutoFit/>
+          </a:bodyPr>
+          <a:lstStyle/>
+          <a:p>
+            <a:pPr algn="r">
+              <a:lnSpc>
+                <a:spcPct val="100000"/>
+              </a:lnSpc>
+            </a:pPr>
+            <a:r>
+              <a:rPr sz="1150" b="0">
+                <a:solidFill>
+                  <a:srgbClr val="1A1A1A"/>
+                </a:solidFill>
+                <a:latin typeface="Georgia"/>
+              </a:rPr>
+              <a:t>no Jetson measurement has been taken</a:t>
+            </a:r>
+          </a:p>
+        </p:txBody>
+      </p:sp>
+      <p:sp>
+        <p:nvSpPr>
+          <p:cNvPr id="32" name="TextBox 31"/>
+          <p:cNvSpPr txBox="1"/>
+          <p:nvPr/>
+        </p:nvSpPr>
+        <p:spPr>
+          <a:xfrm>
+            <a:off x="685800" y="4434840"/>
+            <a:ext cx="10881360" cy="365760"/>
+          </a:xfrm>
+          <a:prstGeom prst="rect">
+            <a:avLst/>
+          </a:prstGeom>
+          <a:noFill/>
+        </p:spPr>
+        <p:txBody>
+          <a:bodyPr wrap="square">
+            <a:spAutoFit/>
+          </a:bodyPr>
+          <a:lstStyle/>
+          <a:p>
+            <a:pPr algn="l">
+              <a:lnSpc>
+                <a:spcPct val="100000"/>
+              </a:lnSpc>
+            </a:pPr>
+            <a:r>
+              <a:rPr sz="1250" b="1">
+                <a:solidFill>
+                  <a:srgbClr val="333333"/>
+                </a:solidFill>
+                <a:latin typeface="Georgia"/>
+              </a:rPr>
+              <a:t>What the project does deliver</a:t>
+            </a:r>
+          </a:p>
+        </p:txBody>
+      </p:sp>
+      <p:sp>
+        <p:nvSpPr>
+          <p:cNvPr id="33" name="Rounded Rectangle 32"/>
           <p:cNvSpPr/>
           <p:nvPr/>
         </p:nvSpPr>
         <p:spPr>
           <a:xfrm>
-            <a:off x="685800" y="2862072"/>
-            <a:ext cx="384048" cy="384048"/>
+            <a:off x="685800" y="4846320"/>
+            <a:ext cx="3474720" cy="1005840"/>
           </a:xfrm>
           <a:prstGeom prst="roundRect">
             <a:avLst/>
           </a:prstGeom>
           <a:solidFill>
-            <a:srgbClr val="333333"/>
+            <a:srgbClr val="EFEFEF"/>
           </a:solidFill>
           <a:ln w="9525">
             <a:solidFill>
@@ -8168,111 +7772,57 @@
           <a:p>
             <a:pPr algn="ctr"/>
             <a:r>
-              <a:rPr sz="1200" b="1">
-                <a:solidFill>
-                  <a:srgbClr val="FFFFFF"/>
-                </a:solidFill>
-                <a:latin typeface="Georgia"/>
-              </a:rPr>
-              <a:t>2</a:t>
-            </a:r>
-          </a:p>
-        </p:txBody>
-      </p:sp>
-      <p:sp>
-        <p:nvSpPr>
-          <p:cNvPr id="8" name="TextBox 7"/>
-          <p:cNvSpPr txBox="1"/>
-          <p:nvPr/>
-        </p:nvSpPr>
-        <p:spPr>
-          <a:xfrm>
-            <a:off x="1234440" y="2843784"/>
-            <a:ext cx="3657600" cy="274320"/>
-          </a:xfrm>
-          <a:prstGeom prst="rect">
-            <a:avLst/>
-          </a:prstGeom>
-          <a:noFill/>
-        </p:spPr>
-        <p:txBody>
-          <a:bodyPr wrap="square">
-            <a:spAutoFit/>
-          </a:bodyPr>
-          <a:lstStyle/>
-          <a:p>
-            <a:pPr algn="l">
-              <a:lnSpc>
-                <a:spcPct val="100000"/>
-              </a:lnSpc>
-            </a:pPr>
-            <a:r>
-              <a:rPr sz="1200" b="1">
-                <a:solidFill>
-                  <a:srgbClr val="1A1A1A"/>
-                </a:solidFill>
-                <a:latin typeface="Georgia"/>
-              </a:rPr>
-              <a:t>Spring 4K evaluation</a:t>
-            </a:r>
-          </a:p>
-        </p:txBody>
-      </p:sp>
-      <p:sp>
-        <p:nvSpPr>
-          <p:cNvPr id="9" name="TextBox 8"/>
-          <p:cNvSpPr txBox="1"/>
-          <p:nvPr/>
-        </p:nvSpPr>
-        <p:spPr>
-          <a:xfrm>
-            <a:off x="5029200" y="2843784"/>
-            <a:ext cx="6492240" cy="822960"/>
-          </a:xfrm>
-          <a:prstGeom prst="rect">
-            <a:avLst/>
-          </a:prstGeom>
-          <a:noFill/>
-        </p:spPr>
-        <p:txBody>
-          <a:bodyPr wrap="square">
-            <a:spAutoFit/>
-          </a:bodyPr>
-          <a:lstStyle/>
-          <a:p>
-            <a:pPr algn="l">
-              <a:lnSpc>
-                <a:spcPct val="112000"/>
-              </a:lnSpc>
-            </a:pPr>
-            <a:r>
-              <a:rPr sz="1100" b="0">
-                <a:solidFill>
-                  <a:srgbClr val="1A1A1A"/>
-                </a:solidFill>
-                <a:latin typeface="Georgia"/>
-              </a:rPr>
-              <a:t>Spring provides ground truth at twice the input resolution. v3 can be queried there natively; v2 structurally cannot. The one test that demonstrates a capability rather than a margin.</a:t>
-            </a:r>
-          </a:p>
-        </p:txBody>
-      </p:sp>
-      <p:sp>
-        <p:nvSpPr>
-          <p:cNvPr id="10" name="Rounded Rectangle 9"/>
+              <a:rPr sz="1050" b="0">
+                <a:solidFill>
+                  <a:srgbClr val="1A1A1A"/>
+                </a:solidFill>
+                <a:latin typeface="Georgia"/>
+              </a:rPr>
+              <a:t>Queryable output</a:t>
+            </a:r>
+          </a:p>
+          <a:p>
+            <a:pPr algn="ctr"/>
+            <a:r>
+              <a:rPr sz="1050" b="0">
+                <a:solidFill>
+                  <a:srgbClr val="1A1A1A"/>
+                </a:solidFill>
+                <a:latin typeface="Georgia"/>
+              </a:rPr>
+              <a:t/>
+            </a:r>
+          </a:p>
+          <a:p>
+            <a:pPr algn="ctr"/>
+            <a:r>
+              <a:rPr sz="1050" b="0">
+                <a:solidFill>
+                  <a:srgbClr val="1A1A1A"/>
+                </a:solidFill>
+                <a:latin typeface="Georgia"/>
+              </a:rPr>
+              <a:t>flow at any continuous coordinate, sparse equals dense exactly</a:t>
+            </a:r>
+          </a:p>
+        </p:txBody>
+      </p:sp>
+      <p:sp>
+        <p:nvSpPr>
+          <p:cNvPr id="34" name="Rounded Rectangle 33"/>
           <p:cNvSpPr/>
           <p:nvPr/>
         </p:nvSpPr>
         <p:spPr>
           <a:xfrm>
-            <a:off x="685800" y="4032504"/>
-            <a:ext cx="384048" cy="384048"/>
+            <a:off x="4343400" y="4846320"/>
+            <a:ext cx="3474720" cy="1005840"/>
           </a:xfrm>
           <a:prstGeom prst="roundRect">
             <a:avLst/>
           </a:prstGeom>
           <a:solidFill>
-            <a:srgbClr val="333333"/>
+            <a:srgbClr val="EFEFEF"/>
           </a:solidFill>
           <a:ln w="9525">
             <a:solidFill>
@@ -8301,111 +7851,57 @@
           <a:p>
             <a:pPr algn="ctr"/>
             <a:r>
-              <a:rPr sz="1200" b="1">
-                <a:solidFill>
-                  <a:srgbClr val="FFFFFF"/>
-                </a:solidFill>
-                <a:latin typeface="Georgia"/>
-              </a:rPr>
-              <a:t>3</a:t>
-            </a:r>
-          </a:p>
-        </p:txBody>
-      </p:sp>
-      <p:sp>
-        <p:nvSpPr>
-          <p:cNvPr id="11" name="TextBox 10"/>
-          <p:cNvSpPr txBox="1"/>
-          <p:nvPr/>
-        </p:nvSpPr>
-        <p:spPr>
-          <a:xfrm>
-            <a:off x="1234440" y="4014216"/>
-            <a:ext cx="3657600" cy="274320"/>
-          </a:xfrm>
-          <a:prstGeom prst="rect">
-            <a:avLst/>
-          </a:prstGeom>
-          <a:noFill/>
-        </p:spPr>
-        <p:txBody>
-          <a:bodyPr wrap="square">
-            <a:spAutoFit/>
-          </a:bodyPr>
-          <a:lstStyle/>
-          <a:p>
-            <a:pPr algn="l">
-              <a:lnSpc>
-                <a:spcPct val="100000"/>
-              </a:lnSpc>
-            </a:pPr>
-            <a:r>
-              <a:rPr sz="1200" b="1">
-                <a:solidFill>
-                  <a:srgbClr val="1A1A1A"/>
-                </a:solidFill>
-                <a:latin typeface="Georgia"/>
-              </a:rPr>
-              <a:t>Jetson measurement</a:t>
-            </a:r>
-          </a:p>
-        </p:txBody>
-      </p:sp>
-      <p:sp>
-        <p:nvSpPr>
-          <p:cNvPr id="12" name="TextBox 11"/>
-          <p:cNvSpPr txBox="1"/>
-          <p:nvPr/>
-        </p:nvSpPr>
-        <p:spPr>
-          <a:xfrm>
-            <a:off x="5029200" y="4014216"/>
-            <a:ext cx="6492240" cy="822960"/>
-          </a:xfrm>
-          <a:prstGeom prst="rect">
-            <a:avLst/>
-          </a:prstGeom>
-          <a:noFill/>
-        </p:spPr>
-        <p:txBody>
-          <a:bodyPr wrap="square">
-            <a:spAutoFit/>
-          </a:bodyPr>
-          <a:lstStyle/>
-          <a:p>
-            <a:pPr algn="l">
-              <a:lnSpc>
-                <a:spcPct val="112000"/>
-              </a:lnSpc>
-            </a:pPr>
-            <a:r>
-              <a:rPr sz="1100" b="0">
-                <a:solidFill>
-                  <a:srgbClr val="1A1A1A"/>
-                </a:solidFill>
-                <a:latin typeface="Georgia"/>
-              </a:rPr>
-              <a:t>Converts the edge claim from a design target into a result, or refutes it.</a:t>
-            </a:r>
-          </a:p>
-        </p:txBody>
-      </p:sp>
-      <p:sp>
-        <p:nvSpPr>
-          <p:cNvPr id="13" name="Rounded Rectangle 12"/>
+              <a:rPr sz="1050" b="0">
+                <a:solidFill>
+                  <a:srgbClr val="1A1A1A"/>
+                </a:solidFill>
+                <a:latin typeface="Georgia"/>
+              </a:rPr>
+              <a:t>Cheap repeat access</a:t>
+            </a:r>
+          </a:p>
+          <a:p>
+            <a:pPr algn="ctr"/>
+            <a:r>
+              <a:rPr sz="1050" b="0">
+                <a:solidFill>
+                  <a:srgbClr val="1A1A1A"/>
+                </a:solidFill>
+                <a:latin typeface="Georgia"/>
+              </a:rPr>
+              <a:t/>
+            </a:r>
+          </a:p>
+          <a:p>
+            <a:pPr algn="ctr"/>
+            <a:r>
+              <a:rPr sz="1050" b="0">
+                <a:solidFill>
+                  <a:srgbClr val="1A1A1A"/>
+                </a:solidFill>
+                <a:latin typeface="Georgia"/>
+              </a:rPr>
+              <a:t>2.6 ms per further query batch on a cached frame</a:t>
+            </a:r>
+          </a:p>
+        </p:txBody>
+      </p:sp>
+      <p:sp>
+        <p:nvSpPr>
+          <p:cNvPr id="35" name="Rounded Rectangle 34"/>
           <p:cNvSpPr/>
           <p:nvPr/>
         </p:nvSpPr>
         <p:spPr>
           <a:xfrm>
-            <a:off x="685800" y="5202936"/>
-            <a:ext cx="384048" cy="384048"/>
+            <a:off x="8001000" y="4846320"/>
+            <a:ext cx="3474720" cy="1005840"/>
           </a:xfrm>
           <a:prstGeom prst="roundRect">
             <a:avLst/>
           </a:prstGeom>
           <a:solidFill>
-            <a:srgbClr val="333333"/>
+            <a:srgbClr val="EFEFEF"/>
           </a:solidFill>
           <a:ln w="9525">
             <a:solidFill>
@@ -8434,27 +7930,51 @@
           <a:p>
             <a:pPr algn="ctr"/>
             <a:r>
-              <a:rPr sz="1200" b="1">
-                <a:solidFill>
-                  <a:srgbClr val="FFFFFF"/>
-                </a:solidFill>
-                <a:latin typeface="Georgia"/>
-              </a:rPr>
-              <a:t>4</a:t>
-            </a:r>
-          </a:p>
-        </p:txBody>
-      </p:sp>
-      <p:sp>
-        <p:nvSpPr>
-          <p:cNvPr id="14" name="TextBox 13"/>
+              <a:rPr sz="1050" b="0">
+                <a:solidFill>
+                  <a:srgbClr val="1A1A1A"/>
+                </a:solidFill>
+                <a:latin typeface="Georgia"/>
+              </a:rPr>
+              <a:t>Calibrated confidence</a:t>
+            </a:r>
+          </a:p>
+          <a:p>
+            <a:pPr algn="ctr"/>
+            <a:r>
+              <a:rPr sz="1050" b="0">
+                <a:solidFill>
+                  <a:srgbClr val="1A1A1A"/>
+                </a:solidFill>
+                <a:latin typeface="Georgia"/>
+              </a:rPr>
+              <a:t/>
+            </a:r>
+          </a:p>
+          <a:p>
+            <a:pPr algn="ctr"/>
+            <a:r>
+              <a:rPr sz="1050" b="0">
+                <a:solidFill>
+                  <a:srgbClr val="1A1A1A"/>
+                </a:solidFill>
+                <a:latin typeface="Georgia"/>
+              </a:rPr>
+              <a:t>per-query error estimate, monotonic against real error</a:t>
+            </a:r>
+          </a:p>
+        </p:txBody>
+      </p:sp>
+      <p:sp>
+        <p:nvSpPr>
+          <p:cNvPr id="36" name="TextBox 35"/>
           <p:cNvSpPr txBox="1"/>
           <p:nvPr/>
         </p:nvSpPr>
         <p:spPr>
           <a:xfrm>
-            <a:off x="1234440" y="5184648"/>
-            <a:ext cx="3657600" cy="274320"/>
+            <a:off x="685800" y="6419088"/>
+            <a:ext cx="7315200" cy="274320"/>
           </a:xfrm>
           <a:prstGeom prst="rect">
             <a:avLst/>
@@ -8473,84 +7993,6 @@
               </a:lnSpc>
             </a:pPr>
             <a:r>
-              <a:rPr sz="1200" b="1">
-                <a:solidFill>
-                  <a:srgbClr val="1A1A1A"/>
-                </a:solidFill>
-                <a:latin typeface="Georgia"/>
-              </a:rPr>
-              <a:t>Field or survey imagery</a:t>
-            </a:r>
-          </a:p>
-        </p:txBody>
-      </p:sp>
-      <p:sp>
-        <p:nvSpPr>
-          <p:cNvPr id="15" name="TextBox 14"/>
-          <p:cNvSpPr txBox="1"/>
-          <p:nvPr/>
-        </p:nvSpPr>
-        <p:spPr>
-          <a:xfrm>
-            <a:off x="5029200" y="5184648"/>
-            <a:ext cx="6492240" cy="822960"/>
-          </a:xfrm>
-          <a:prstGeom prst="rect">
-            <a:avLst/>
-          </a:prstGeom>
-          <a:noFill/>
-        </p:spPr>
-        <p:txBody>
-          <a:bodyPr wrap="square">
-            <a:spAutoFit/>
-          </a:bodyPr>
-          <a:lstStyle/>
-          <a:p>
-            <a:pPr algn="l">
-              <a:lnSpc>
-                <a:spcPct val="112000"/>
-              </a:lnSpc>
-            </a:pPr>
-            <a:r>
-              <a:rPr sz="1100" b="0">
-                <a:solidFill>
-                  <a:srgbClr val="1A1A1A"/>
-                </a:solidFill>
-                <a:latin typeface="Georgia"/>
-              </a:rPr>
-              <a:t>A registration demonstration on lab data would test the actual use case.</a:t>
-            </a:r>
-          </a:p>
-        </p:txBody>
-      </p:sp>
-      <p:sp>
-        <p:nvSpPr>
-          <p:cNvPr id="16" name="TextBox 15"/>
-          <p:cNvSpPr txBox="1"/>
-          <p:nvPr/>
-        </p:nvSpPr>
-        <p:spPr>
-          <a:xfrm>
-            <a:off x="685800" y="6419088"/>
-            <a:ext cx="7315200" cy="274320"/>
-          </a:xfrm>
-          <a:prstGeom prst="rect">
-            <a:avLst/>
-          </a:prstGeom>
-          <a:noFill/>
-        </p:spPr>
-        <p:txBody>
-          <a:bodyPr wrap="square">
-            <a:spAutoFit/>
-          </a:bodyPr>
-          <a:lstStyle/>
-          <a:p>
-            <a:pPr algn="l">
-              <a:lnSpc>
-                <a:spcPct val="100000"/>
-              </a:lnSpc>
-            </a:pPr>
-            <a:r>
               <a:rPr sz="900" b="0">
                 <a:solidFill>
                   <a:srgbClr val="8A8A8A"/>
@@ -8564,7 +8006,7 @@
       </p:sp>
       <p:sp>
         <p:nvSpPr>
-          <p:cNvPr id="17" name="TextBox 16"/>
+          <p:cNvPr id="37" name="TextBox 36"/>
           <p:cNvSpPr txBox="1"/>
           <p:nvPr/>
         </p:nvSpPr>
@@ -8653,7 +8095,7 @@
                 </a:solidFill>
                 <a:latin typeface="Georgia"/>
               </a:rPr>
-              <a:t>ANTICIPATED QUESTIONS</a:t>
+              <a:t>LIMITATIONS</a:t>
             </a:r>
           </a:p>
         </p:txBody>
@@ -8692,7 +8134,7 @@
                 </a:solidFill>
                 <a:latin typeface="Georgia"/>
               </a:rPr>
-              <a:t/>
+              <a:t>What is not yet proven, stated plainly</a:t>
             </a:r>
           </a:p>
         </p:txBody>
@@ -8705,8 +8147,8 @@
         </p:nvSpPr>
         <p:spPr>
           <a:xfrm>
-            <a:off x="685800" y="1508760"/>
-            <a:ext cx="10881360" cy="274320"/>
+            <a:off x="685800" y="1645920"/>
+            <a:ext cx="4023360" cy="274320"/>
           </a:xfrm>
           <a:prstGeom prst="rect">
             <a:avLst/>
@@ -8725,13 +8167,13 @@
               </a:lnSpc>
             </a:pPr>
             <a:r>
-              <a:rPr sz="1200" b="1">
-                <a:solidFill>
-                  <a:srgbClr val="1A1A1A"/>
-                </a:solidFill>
-                <a:latin typeface="Georgia"/>
-              </a:rPr>
-              <a:t>Why is flow defined between pixels at all?</a:t>
+              <a:rPr sz="1150" b="1">
+                <a:solidFill>
+                  <a:srgbClr val="1A1A1A"/>
+                </a:solidFill>
+                <a:latin typeface="Georgia"/>
+              </a:rPr>
+              <a:t>Sub-pixel precision is worse than v2</a:t>
             </a:r>
           </a:p>
         </p:txBody>
@@ -8744,8 +8186,8 @@
         </p:nvSpPr>
         <p:spPr>
           <a:xfrm>
-            <a:off x="868680" y="1810512"/>
-            <a:ext cx="10607040" cy="594360"/>
+            <a:off x="4846320" y="1645920"/>
+            <a:ext cx="6675120" cy="548640"/>
           </a:xfrm>
           <a:prstGeom prst="rect">
             <a:avLst/>
@@ -8766,11 +8208,11 @@
             <a:r>
               <a:rPr sz="1100" b="0">
                 <a:solidFill>
-                  <a:srgbClr val="333333"/>
-                </a:solidFill>
-                <a:latin typeface="Georgia"/>
-              </a:rPr>
-              <a:t>Motion is continuous; the pixel grid is a sampling artefact. A corner tracked to (312.7, 188.2) is a real answer, and registration consumes it directly.</a:t>
+                  <a:srgbClr val="1A1A1A"/>
+                </a:solidFill>
+                <a:latin typeface="Georgia"/>
+              </a:rPr>
+              <a:t>By 0.8 to 6.3 points of 1-pixel accuracy. Cause diagnosed (decoder never sees full-resolution input) but not fixed.</a:t>
             </a:r>
           </a:p>
         </p:txBody>
@@ -8783,8 +8225,8 @@
         </p:nvSpPr>
         <p:spPr>
           <a:xfrm>
-            <a:off x="685800" y="2697480"/>
-            <a:ext cx="10881360" cy="274320"/>
+            <a:off x="685800" y="2578608"/>
+            <a:ext cx="4023360" cy="274320"/>
           </a:xfrm>
           <a:prstGeom prst="rect">
             <a:avLst/>
@@ -8803,13 +8245,13 @@
               </a:lnSpc>
             </a:pPr>
             <a:r>
-              <a:rPr sz="1200" b="1">
-                <a:solidFill>
-                  <a:srgbClr val="1A1A1A"/>
-                </a:solidFill>
-                <a:latin typeface="Georgia"/>
-              </a:rPr>
-              <a:t>Why freeze the backbone?</a:t>
+              <a:rPr sz="1150" b="1">
+                <a:solidFill>
+                  <a:srgbClr val="1A1A1A"/>
+                </a:solidFill>
+                <a:latin typeface="Georgia"/>
+              </a:rPr>
+              <a:t>No edge-device measurement</a:t>
             </a:r>
           </a:p>
         </p:txBody>
@@ -8822,8 +8264,8 @@
         </p:nvSpPr>
         <p:spPr>
           <a:xfrm>
-            <a:off x="868680" y="2999232"/>
-            <a:ext cx="10607040" cy="594360"/>
+            <a:off x="4846320" y="2578608"/>
+            <a:ext cx="6675120" cy="548640"/>
           </a:xfrm>
           <a:prstGeom prst="rect">
             <a:avLst/>
@@ -8844,11 +8286,11 @@
             <a:r>
               <a:rPr sz="1100" b="0">
                 <a:solidFill>
-                  <a:srgbClr val="333333"/>
-                </a:solidFill>
-                <a:latin typeface="Georgia"/>
-              </a:rPr>
-              <a:t>To isolate the decoder as the only variable. Unfreezing diverged at batch 4 locally and has not been retried at scale.</a:t>
+                  <a:srgbClr val="1A1A1A"/>
+                </a:solidFill>
+                <a:latin typeface="Georgia"/>
+              </a:rPr>
+              <a:t>Every latency figure is V100 or RTX 4060. The edge claim in the title is a design target, not a result.</a:t>
             </a:r>
           </a:p>
         </p:txBody>
@@ -8861,8 +8303,8 @@
         </p:nvSpPr>
         <p:spPr>
           <a:xfrm>
-            <a:off x="685800" y="3886200"/>
-            <a:ext cx="10881360" cy="274320"/>
+            <a:off x="685800" y="3511296"/>
+            <a:ext cx="4023360" cy="274320"/>
           </a:xfrm>
           <a:prstGeom prst="rect">
             <a:avLst/>
@@ -8881,13 +8323,13 @@
               </a:lnSpc>
             </a:pPr>
             <a:r>
-              <a:rPr sz="1200" b="1">
-                <a:solidFill>
-                  <a:srgbClr val="1A1A1A"/>
-                </a:solidFill>
-                <a:latin typeface="Georgia"/>
-              </a:rPr>
-              <a:t>Why is dense v3 slower than v2?</a:t>
+              <a:rPr sz="1150" b="1">
+                <a:solidFill>
+                  <a:srgbClr val="1A1A1A"/>
+                </a:solidFill>
+                <a:latin typeface="Georgia"/>
+              </a:rPr>
+              <a:t>Single evaluation domain</a:t>
             </a:r>
           </a:p>
         </p:txBody>
@@ -8900,8 +8342,8 @@
         </p:nvSpPr>
         <p:spPr>
           <a:xfrm>
-            <a:off x="868680" y="4187952"/>
-            <a:ext cx="10607040" cy="594360"/>
+            <a:off x="4846320" y="3511296"/>
+            <a:ext cx="6675120" cy="548640"/>
           </a:xfrm>
           <a:prstGeom prst="rect">
             <a:avLst/>
@@ -8922,11 +8364,11 @@
             <a:r>
               <a:rPr sz="1100" b="0">
                 <a:solidFill>
-                  <a:srgbClr val="333333"/>
-                </a:solidFill>
-                <a:latin typeface="Georgia"/>
-              </a:rPr>
-              <a:t>v2 upsamples with one convolution that shares work across neighbouring pixels. v3 answers each query independently, giving up that sharing to gain the ability to answer only what is asked.</a:t>
+                  <a:srgbClr val="1A1A1A"/>
+                </a:solidFill>
+                <a:latin typeface="Georgia"/>
+              </a:rPr>
+              <a:t>All accuracy numbers are VKITTI2 Scene18+20. A synthetic driving benchmark is not evidence for field or survey imagery.</a:t>
             </a:r>
           </a:p>
         </p:txBody>
@@ -8939,8 +8381,8 @@
         </p:nvSpPr>
         <p:spPr>
           <a:xfrm>
-            <a:off x="685800" y="5074920"/>
-            <a:ext cx="10881360" cy="274320"/>
+            <a:off x="685800" y="4443984"/>
+            <a:ext cx="4023360" cy="274320"/>
           </a:xfrm>
           <a:prstGeom prst="rect">
             <a:avLst/>
@@ -8959,13 +8401,13 @@
               </a:lnSpc>
             </a:pPr>
             <a:r>
-              <a:rPr sz="1200" b="1">
-                <a:solidFill>
-                  <a:srgbClr val="1A1A1A"/>
-                </a:solidFill>
-                <a:latin typeface="Georgia"/>
-              </a:rPr>
-              <a:t>Is a tie on EPE worth the added complexity?</a:t>
+              <a:rPr sz="1150" b="1">
+                <a:solidFill>
+                  <a:srgbClr val="1A1A1A"/>
+                </a:solidFill>
+                <a:latin typeface="Georgia"/>
+              </a:rPr>
+              <a:t>Spring run truncated</a:t>
             </a:r>
           </a:p>
         </p:txBody>
@@ -8978,8 +8420,8 @@
         </p:nvSpPr>
         <p:spPr>
           <a:xfrm>
-            <a:off x="868680" y="5376672"/>
-            <a:ext cx="10607040" cy="594360"/>
+            <a:off x="4846320" y="4443984"/>
+            <a:ext cx="6675120" cy="548640"/>
           </a:xfrm>
           <a:prstGeom prst="rect">
             <a:avLst/>
@@ -9000,11 +8442,11 @@
             <a:r>
               <a:rPr sz="1100" b="0">
                 <a:solidFill>
-                  <a:srgbClr val="333333"/>
-                </a:solidFill>
-                <a:latin typeface="Georgia"/>
-              </a:rPr>
-              <a:t>Not on its own. It is worth it if you need queryability, cheap repeat access, or confidence values. For plain dense flow, v2 remains the better choice, and I would say so.</a:t>
+                  <a:srgbClr val="1A1A1A"/>
+                </a:solidFill>
+                <a:latin typeface="Georgia"/>
+              </a:rPr>
+              <a:t>Killed by the 8-hour wall clock at roughly 90k of 100k steps, so it is not directly comparable to the others.</a:t>
             </a:r>
           </a:p>
         </p:txBody>
@@ -9017,8 +8459,8 @@
         </p:nvSpPr>
         <p:spPr>
           <a:xfrm>
-            <a:off x="685800" y="6419088"/>
-            <a:ext cx="7315200" cy="274320"/>
+            <a:off x="685800" y="5376672"/>
+            <a:ext cx="4023360" cy="274320"/>
           </a:xfrm>
           <a:prstGeom prst="rect">
             <a:avLst/>
@@ -9037,13 +8479,13 @@
               </a:lnSpc>
             </a:pPr>
             <a:r>
-              <a:rPr sz="900" b="0">
-                <a:solidFill>
-                  <a:srgbClr val="8A8A8A"/>
-                </a:solidFill>
-                <a:latin typeface="Georgia"/>
-              </a:rPr>
-              <a:t>NeuFlow v3, S. Raghav Srinivasan</a:t>
+              <a:rPr sz="1150" b="1">
+                <a:solidFill>
+                  <a:srgbClr val="1A1A1A"/>
+                </a:solidFill>
+                <a:latin typeface="Georgia"/>
+              </a:rPr>
+              <a:t>One seed, and checkpoint noise the size of the effects</a:t>
             </a:r>
           </a:p>
         </p:txBody>
@@ -9056,8 +8498,8 @@
         </p:nvSpPr>
         <p:spPr>
           <a:xfrm>
-            <a:off x="10607040" y="6419088"/>
-            <a:ext cx="1097280" cy="274320"/>
+            <a:off x="4846320" y="5376672"/>
+            <a:ext cx="6675120" cy="548640"/>
           </a:xfrm>
           <a:prstGeom prst="rect">
             <a:avLst/>
@@ -9072,6 +8514,45 @@
           <a:p>
             <a:pPr algn="l">
               <a:lnSpc>
+                <a:spcPct val="112000"/>
+              </a:lnSpc>
+            </a:pPr>
+            <a:r>
+              <a:rPr sz="1100" b="0">
+                <a:solidFill>
+                  <a:srgbClr val="1A1A1A"/>
+                </a:solidFill>
+                <a:latin typeface="Georgia"/>
+              </a:rPr>
+              <a:t>Step 90k vs 100k of the same run moves EPE by up to 0.038 px, reversing two of the orderings. Nothing finer than about 0.05 px is resolvable here.</a:t>
+            </a:r>
+          </a:p>
+        </p:txBody>
+      </p:sp>
+      <p:sp>
+        <p:nvSpPr>
+          <p:cNvPr id="14" name="TextBox 13"/>
+          <p:cNvSpPr txBox="1"/>
+          <p:nvPr/>
+        </p:nvSpPr>
+        <p:spPr>
+          <a:xfrm>
+            <a:off x="685800" y="6419088"/>
+            <a:ext cx="7315200" cy="274320"/>
+          </a:xfrm>
+          <a:prstGeom prst="rect">
+            <a:avLst/>
+          </a:prstGeom>
+          <a:noFill/>
+        </p:spPr>
+        <p:txBody>
+          <a:bodyPr wrap="square">
+            <a:spAutoFit/>
+          </a:bodyPr>
+          <a:lstStyle/>
+          <a:p>
+            <a:pPr algn="l">
+              <a:lnSpc>
                 <a:spcPct val="100000"/>
               </a:lnSpc>
             </a:pPr>
@@ -9082,7 +8563,1238 @@
                 </a:solidFill>
                 <a:latin typeface="Georgia"/>
               </a:rPr>
+              <a:t>NeuFlow v3, S. Raghav Srinivasan</a:t>
+            </a:r>
+          </a:p>
+        </p:txBody>
+      </p:sp>
+      <p:sp>
+        <p:nvSpPr>
+          <p:cNvPr id="15" name="TextBox 14"/>
+          <p:cNvSpPr txBox="1"/>
+          <p:nvPr/>
+        </p:nvSpPr>
+        <p:spPr>
+          <a:xfrm>
+            <a:off x="10607040" y="6419088"/>
+            <a:ext cx="1097280" cy="274320"/>
+          </a:xfrm>
+          <a:prstGeom prst="rect">
+            <a:avLst/>
+          </a:prstGeom>
+          <a:noFill/>
+        </p:spPr>
+        <p:txBody>
+          <a:bodyPr wrap="square">
+            <a:spAutoFit/>
+          </a:bodyPr>
+          <a:lstStyle/>
+          <a:p>
+            <a:pPr algn="l">
+              <a:lnSpc>
+                <a:spcPct val="100000"/>
+              </a:lnSpc>
+            </a:pPr>
+            <a:r>
+              <a:rPr sz="900" b="0">
+                <a:solidFill>
+                  <a:srgbClr val="8A8A8A"/>
+                </a:solidFill>
+                <a:latin typeface="Georgia"/>
+              </a:rPr>
               <a:t>15</a:t>
+            </a:r>
+          </a:p>
+        </p:txBody>
+      </p:sp>
+    </p:spTree>
+  </p:cSld>
+  <p:clrMapOvr>
+    <a:masterClrMapping/>
+  </p:clrMapOvr>
+</p:sld>
+</file>
+
+<file path=ppt/slides/slide16.xml><?xml version="1.0" encoding="utf-8"?>
+<p:sld xmlns:a="http://schemas.openxmlformats.org/drawingml/2006/main" xmlns:p="http://schemas.openxmlformats.org/presentationml/2006/main" xmlns:r="http://schemas.openxmlformats.org/officeDocument/2006/relationships">
+  <p:cSld>
+    <p:spTree>
+      <p:nvGrpSpPr>
+        <p:cNvPr id="1" name=""/>
+        <p:cNvGrpSpPr/>
+        <p:nvPr/>
+      </p:nvGrpSpPr>
+      <p:grpSpPr/>
+      <p:sp>
+        <p:nvSpPr>
+          <p:cNvPr id="2" name="TextBox 1"/>
+          <p:cNvSpPr txBox="1"/>
+          <p:nvPr/>
+        </p:nvSpPr>
+        <p:spPr>
+          <a:xfrm>
+            <a:off x="685800" y="384048"/>
+            <a:ext cx="10515600" cy="274320"/>
+          </a:xfrm>
+          <a:prstGeom prst="rect">
+            <a:avLst/>
+          </a:prstGeom>
+          <a:noFill/>
+        </p:spPr>
+        <p:txBody>
+          <a:bodyPr wrap="square">
+            <a:spAutoFit/>
+          </a:bodyPr>
+          <a:lstStyle/>
+          <a:p>
+            <a:pPr algn="l">
+              <a:lnSpc>
+                <a:spcPct val="100000"/>
+              </a:lnSpc>
+            </a:pPr>
+            <a:r>
+              <a:rPr sz="1050" b="1">
+                <a:solidFill>
+                  <a:srgbClr val="333333"/>
+                </a:solidFill>
+                <a:latin typeface="Georgia"/>
+              </a:rPr>
+              <a:t>NEXT STEPS</a:t>
+            </a:r>
+          </a:p>
+        </p:txBody>
+      </p:sp>
+      <p:sp>
+        <p:nvSpPr>
+          <p:cNvPr id="3" name="TextBox 2"/>
+          <p:cNvSpPr txBox="1"/>
+          <p:nvPr/>
+        </p:nvSpPr>
+        <p:spPr>
+          <a:xfrm>
+            <a:off x="667512" y="658368"/>
+            <a:ext cx="10881360" cy="731520"/>
+          </a:xfrm>
+          <a:prstGeom prst="rect">
+            <a:avLst/>
+          </a:prstGeom>
+          <a:noFill/>
+        </p:spPr>
+        <p:txBody>
+          <a:bodyPr wrap="square">
+            <a:spAutoFit/>
+          </a:bodyPr>
+          <a:lstStyle/>
+          <a:p>
+            <a:pPr algn="l">
+              <a:lnSpc>
+                <a:spcPct val="100000"/>
+              </a:lnSpc>
+            </a:pPr>
+            <a:r>
+              <a:rPr sz="2400" b="1">
+                <a:solidFill>
+                  <a:srgbClr val="1A1A1A"/>
+                </a:solidFill>
+                <a:latin typeface="Georgia"/>
+              </a:rPr>
+              <a:t>In priority order</a:t>
+            </a:r>
+          </a:p>
+        </p:txBody>
+      </p:sp>
+      <p:sp>
+        <p:nvSpPr>
+          <p:cNvPr id="4" name="Rounded Rectangle 3"/>
+          <p:cNvSpPr/>
+          <p:nvPr/>
+        </p:nvSpPr>
+        <p:spPr>
+          <a:xfrm>
+            <a:off x="685800" y="1691640"/>
+            <a:ext cx="384048" cy="384048"/>
+          </a:xfrm>
+          <a:prstGeom prst="roundRect">
+            <a:avLst/>
+          </a:prstGeom>
+          <a:solidFill>
+            <a:srgbClr val="333333"/>
+          </a:solidFill>
+          <a:ln w="9525">
+            <a:solidFill>
+              <a:srgbClr val="8A8A8A"/>
+            </a:solidFill>
+          </a:ln>
+          <a:effectLst/>
+        </p:spPr>
+        <p:style>
+          <a:lnRef idx="1">
+            <a:schemeClr val="accent1"/>
+          </a:lnRef>
+          <a:fillRef idx="3">
+            <a:schemeClr val="accent1"/>
+          </a:fillRef>
+          <a:effectRef idx="2">
+            <a:schemeClr val="accent1"/>
+          </a:effectRef>
+          <a:fontRef idx="minor">
+            <a:schemeClr val="lt1"/>
+          </a:fontRef>
+        </p:style>
+        <p:txBody>
+          <a:bodyPr rtlCol="0" anchor="ctr" wrap="square" lIns="73152" rIns="73152"/>
+          <a:lstStyle/>
+          <a:p>
+            <a:pPr algn="ctr"/>
+            <a:r>
+              <a:rPr sz="1200" b="1">
+                <a:solidFill>
+                  <a:srgbClr val="FFFFFF"/>
+                </a:solidFill>
+                <a:latin typeface="Georgia"/>
+              </a:rPr>
+              <a:t>1</a:t>
+            </a:r>
+          </a:p>
+        </p:txBody>
+      </p:sp>
+      <p:sp>
+        <p:nvSpPr>
+          <p:cNvPr id="5" name="TextBox 4"/>
+          <p:cNvSpPr txBox="1"/>
+          <p:nvPr/>
+        </p:nvSpPr>
+        <p:spPr>
+          <a:xfrm>
+            <a:off x="1234440" y="1673352"/>
+            <a:ext cx="3657600" cy="274320"/>
+          </a:xfrm>
+          <a:prstGeom prst="rect">
+            <a:avLst/>
+          </a:prstGeom>
+          <a:noFill/>
+        </p:spPr>
+        <p:txBody>
+          <a:bodyPr wrap="square">
+            <a:spAutoFit/>
+          </a:bodyPr>
+          <a:lstStyle/>
+          <a:p>
+            <a:pPr algn="l">
+              <a:lnSpc>
+                <a:spcPct val="100000"/>
+              </a:lnSpc>
+            </a:pPr>
+            <a:r>
+              <a:rPr sz="1200" b="1">
+                <a:solidFill>
+                  <a:srgbClr val="1A1A1A"/>
+                </a:solidFill>
+                <a:latin typeface="Georgia"/>
+              </a:rPr>
+              <a:t>Full-resolution stem for the decoder</a:t>
+            </a:r>
+          </a:p>
+        </p:txBody>
+      </p:sp>
+      <p:sp>
+        <p:nvSpPr>
+          <p:cNvPr id="6" name="TextBox 5"/>
+          <p:cNvSpPr txBox="1"/>
+          <p:nvPr/>
+        </p:nvSpPr>
+        <p:spPr>
+          <a:xfrm>
+            <a:off x="5029200" y="1673352"/>
+            <a:ext cx="6492240" cy="822960"/>
+          </a:xfrm>
+          <a:prstGeom prst="rect">
+            <a:avLst/>
+          </a:prstGeom>
+          <a:noFill/>
+        </p:spPr>
+        <p:txBody>
+          <a:bodyPr wrap="square">
+            <a:spAutoFit/>
+          </a:bodyPr>
+          <a:lstStyle/>
+          <a:p>
+            <a:pPr algn="l">
+              <a:lnSpc>
+                <a:spcPct val="112000"/>
+              </a:lnSpc>
+            </a:pPr>
+            <a:r>
+              <a:rPr sz="1100" b="0">
+                <a:solidFill>
+                  <a:srgbClr val="1A1A1A"/>
+                </a:solidFill>
+                <a:latin typeface="Georgia"/>
+              </a:rPr>
+              <a:t>Give the decoder a cheap full-resolution feature map so evidence actually varies within an 8x8 cell. This is the direct attack on the precision gap and on making continuous querying meaningful rather than nominal.</a:t>
+            </a:r>
+          </a:p>
+        </p:txBody>
+      </p:sp>
+      <p:sp>
+        <p:nvSpPr>
+          <p:cNvPr id="7" name="Rounded Rectangle 6"/>
+          <p:cNvSpPr/>
+          <p:nvPr/>
+        </p:nvSpPr>
+        <p:spPr>
+          <a:xfrm>
+            <a:off x="685800" y="2862072"/>
+            <a:ext cx="384048" cy="384048"/>
+          </a:xfrm>
+          <a:prstGeom prst="roundRect">
+            <a:avLst/>
+          </a:prstGeom>
+          <a:solidFill>
+            <a:srgbClr val="333333"/>
+          </a:solidFill>
+          <a:ln w="9525">
+            <a:solidFill>
+              <a:srgbClr val="8A8A8A"/>
+            </a:solidFill>
+          </a:ln>
+          <a:effectLst/>
+        </p:spPr>
+        <p:style>
+          <a:lnRef idx="1">
+            <a:schemeClr val="accent1"/>
+          </a:lnRef>
+          <a:fillRef idx="3">
+            <a:schemeClr val="accent1"/>
+          </a:fillRef>
+          <a:effectRef idx="2">
+            <a:schemeClr val="accent1"/>
+          </a:effectRef>
+          <a:fontRef idx="minor">
+            <a:schemeClr val="lt1"/>
+          </a:fontRef>
+        </p:style>
+        <p:txBody>
+          <a:bodyPr rtlCol="0" anchor="ctr" wrap="square" lIns="73152" rIns="73152"/>
+          <a:lstStyle/>
+          <a:p>
+            <a:pPr algn="ctr"/>
+            <a:r>
+              <a:rPr sz="1200" b="1">
+                <a:solidFill>
+                  <a:srgbClr val="FFFFFF"/>
+                </a:solidFill>
+                <a:latin typeface="Georgia"/>
+              </a:rPr>
+              <a:t>2</a:t>
+            </a:r>
+          </a:p>
+        </p:txBody>
+      </p:sp>
+      <p:sp>
+        <p:nvSpPr>
+          <p:cNvPr id="8" name="TextBox 7"/>
+          <p:cNvSpPr txBox="1"/>
+          <p:nvPr/>
+        </p:nvSpPr>
+        <p:spPr>
+          <a:xfrm>
+            <a:off x="1234440" y="2843784"/>
+            <a:ext cx="3657600" cy="274320"/>
+          </a:xfrm>
+          <a:prstGeom prst="rect">
+            <a:avLst/>
+          </a:prstGeom>
+          <a:noFill/>
+        </p:spPr>
+        <p:txBody>
+          <a:bodyPr wrap="square">
+            <a:spAutoFit/>
+          </a:bodyPr>
+          <a:lstStyle/>
+          <a:p>
+            <a:pPr algn="l">
+              <a:lnSpc>
+                <a:spcPct val="100000"/>
+              </a:lnSpc>
+            </a:pPr>
+            <a:r>
+              <a:rPr sz="1200" b="1">
+                <a:solidFill>
+                  <a:srgbClr val="1A1A1A"/>
+                </a:solidFill>
+                <a:latin typeface="Georgia"/>
+              </a:rPr>
+              <a:t>Spring 4K evaluation</a:t>
+            </a:r>
+          </a:p>
+        </p:txBody>
+      </p:sp>
+      <p:sp>
+        <p:nvSpPr>
+          <p:cNvPr id="9" name="TextBox 8"/>
+          <p:cNvSpPr txBox="1"/>
+          <p:nvPr/>
+        </p:nvSpPr>
+        <p:spPr>
+          <a:xfrm>
+            <a:off x="5029200" y="2843784"/>
+            <a:ext cx="6492240" cy="822960"/>
+          </a:xfrm>
+          <a:prstGeom prst="rect">
+            <a:avLst/>
+          </a:prstGeom>
+          <a:noFill/>
+        </p:spPr>
+        <p:txBody>
+          <a:bodyPr wrap="square">
+            <a:spAutoFit/>
+          </a:bodyPr>
+          <a:lstStyle/>
+          <a:p>
+            <a:pPr algn="l">
+              <a:lnSpc>
+                <a:spcPct val="112000"/>
+              </a:lnSpc>
+            </a:pPr>
+            <a:r>
+              <a:rPr sz="1100" b="0">
+                <a:solidFill>
+                  <a:srgbClr val="1A1A1A"/>
+                </a:solidFill>
+                <a:latin typeface="Georgia"/>
+              </a:rPr>
+              <a:t>Spring provides ground truth at twice the input resolution. v3 can be queried there natively; v2 structurally cannot. The one test that demonstrates a capability rather than a margin.</a:t>
+            </a:r>
+          </a:p>
+        </p:txBody>
+      </p:sp>
+      <p:sp>
+        <p:nvSpPr>
+          <p:cNvPr id="10" name="Rounded Rectangle 9"/>
+          <p:cNvSpPr/>
+          <p:nvPr/>
+        </p:nvSpPr>
+        <p:spPr>
+          <a:xfrm>
+            <a:off x="685800" y="4032504"/>
+            <a:ext cx="384048" cy="384048"/>
+          </a:xfrm>
+          <a:prstGeom prst="roundRect">
+            <a:avLst/>
+          </a:prstGeom>
+          <a:solidFill>
+            <a:srgbClr val="333333"/>
+          </a:solidFill>
+          <a:ln w="9525">
+            <a:solidFill>
+              <a:srgbClr val="8A8A8A"/>
+            </a:solidFill>
+          </a:ln>
+          <a:effectLst/>
+        </p:spPr>
+        <p:style>
+          <a:lnRef idx="1">
+            <a:schemeClr val="accent1"/>
+          </a:lnRef>
+          <a:fillRef idx="3">
+            <a:schemeClr val="accent1"/>
+          </a:fillRef>
+          <a:effectRef idx="2">
+            <a:schemeClr val="accent1"/>
+          </a:effectRef>
+          <a:fontRef idx="minor">
+            <a:schemeClr val="lt1"/>
+          </a:fontRef>
+        </p:style>
+        <p:txBody>
+          <a:bodyPr rtlCol="0" anchor="ctr" wrap="square" lIns="73152" rIns="73152"/>
+          <a:lstStyle/>
+          <a:p>
+            <a:pPr algn="ctr"/>
+            <a:r>
+              <a:rPr sz="1200" b="1">
+                <a:solidFill>
+                  <a:srgbClr val="FFFFFF"/>
+                </a:solidFill>
+                <a:latin typeface="Georgia"/>
+              </a:rPr>
+              <a:t>3</a:t>
+            </a:r>
+          </a:p>
+        </p:txBody>
+      </p:sp>
+      <p:sp>
+        <p:nvSpPr>
+          <p:cNvPr id="11" name="TextBox 10"/>
+          <p:cNvSpPr txBox="1"/>
+          <p:nvPr/>
+        </p:nvSpPr>
+        <p:spPr>
+          <a:xfrm>
+            <a:off x="1234440" y="4014216"/>
+            <a:ext cx="3657600" cy="274320"/>
+          </a:xfrm>
+          <a:prstGeom prst="rect">
+            <a:avLst/>
+          </a:prstGeom>
+          <a:noFill/>
+        </p:spPr>
+        <p:txBody>
+          <a:bodyPr wrap="square">
+            <a:spAutoFit/>
+          </a:bodyPr>
+          <a:lstStyle/>
+          <a:p>
+            <a:pPr algn="l">
+              <a:lnSpc>
+                <a:spcPct val="100000"/>
+              </a:lnSpc>
+            </a:pPr>
+            <a:r>
+              <a:rPr sz="1200" b="1">
+                <a:solidFill>
+                  <a:srgbClr val="1A1A1A"/>
+                </a:solidFill>
+                <a:latin typeface="Georgia"/>
+              </a:rPr>
+              <a:t>Jetson measurement</a:t>
+            </a:r>
+          </a:p>
+        </p:txBody>
+      </p:sp>
+      <p:sp>
+        <p:nvSpPr>
+          <p:cNvPr id="12" name="TextBox 11"/>
+          <p:cNvSpPr txBox="1"/>
+          <p:nvPr/>
+        </p:nvSpPr>
+        <p:spPr>
+          <a:xfrm>
+            <a:off x="5029200" y="4014216"/>
+            <a:ext cx="6492240" cy="822960"/>
+          </a:xfrm>
+          <a:prstGeom prst="rect">
+            <a:avLst/>
+          </a:prstGeom>
+          <a:noFill/>
+        </p:spPr>
+        <p:txBody>
+          <a:bodyPr wrap="square">
+            <a:spAutoFit/>
+          </a:bodyPr>
+          <a:lstStyle/>
+          <a:p>
+            <a:pPr algn="l">
+              <a:lnSpc>
+                <a:spcPct val="112000"/>
+              </a:lnSpc>
+            </a:pPr>
+            <a:r>
+              <a:rPr sz="1100" b="0">
+                <a:solidFill>
+                  <a:srgbClr val="1A1A1A"/>
+                </a:solidFill>
+                <a:latin typeface="Georgia"/>
+              </a:rPr>
+              <a:t>Converts the edge claim from a design target into a result, or refutes it.</a:t>
+            </a:r>
+          </a:p>
+        </p:txBody>
+      </p:sp>
+      <p:sp>
+        <p:nvSpPr>
+          <p:cNvPr id="13" name="Rounded Rectangle 12"/>
+          <p:cNvSpPr/>
+          <p:nvPr/>
+        </p:nvSpPr>
+        <p:spPr>
+          <a:xfrm>
+            <a:off x="685800" y="5202936"/>
+            <a:ext cx="384048" cy="384048"/>
+          </a:xfrm>
+          <a:prstGeom prst="roundRect">
+            <a:avLst/>
+          </a:prstGeom>
+          <a:solidFill>
+            <a:srgbClr val="333333"/>
+          </a:solidFill>
+          <a:ln w="9525">
+            <a:solidFill>
+              <a:srgbClr val="8A8A8A"/>
+            </a:solidFill>
+          </a:ln>
+          <a:effectLst/>
+        </p:spPr>
+        <p:style>
+          <a:lnRef idx="1">
+            <a:schemeClr val="accent1"/>
+          </a:lnRef>
+          <a:fillRef idx="3">
+            <a:schemeClr val="accent1"/>
+          </a:fillRef>
+          <a:effectRef idx="2">
+            <a:schemeClr val="accent1"/>
+          </a:effectRef>
+          <a:fontRef idx="minor">
+            <a:schemeClr val="lt1"/>
+          </a:fontRef>
+        </p:style>
+        <p:txBody>
+          <a:bodyPr rtlCol="0" anchor="ctr" wrap="square" lIns="73152" rIns="73152"/>
+          <a:lstStyle/>
+          <a:p>
+            <a:pPr algn="ctr"/>
+            <a:r>
+              <a:rPr sz="1200" b="1">
+                <a:solidFill>
+                  <a:srgbClr val="FFFFFF"/>
+                </a:solidFill>
+                <a:latin typeface="Georgia"/>
+              </a:rPr>
+              <a:t>4</a:t>
+            </a:r>
+          </a:p>
+        </p:txBody>
+      </p:sp>
+      <p:sp>
+        <p:nvSpPr>
+          <p:cNvPr id="14" name="TextBox 13"/>
+          <p:cNvSpPr txBox="1"/>
+          <p:nvPr/>
+        </p:nvSpPr>
+        <p:spPr>
+          <a:xfrm>
+            <a:off x="1234440" y="5184648"/>
+            <a:ext cx="3657600" cy="274320"/>
+          </a:xfrm>
+          <a:prstGeom prst="rect">
+            <a:avLst/>
+          </a:prstGeom>
+          <a:noFill/>
+        </p:spPr>
+        <p:txBody>
+          <a:bodyPr wrap="square">
+            <a:spAutoFit/>
+          </a:bodyPr>
+          <a:lstStyle/>
+          <a:p>
+            <a:pPr algn="l">
+              <a:lnSpc>
+                <a:spcPct val="100000"/>
+              </a:lnSpc>
+            </a:pPr>
+            <a:r>
+              <a:rPr sz="1200" b="1">
+                <a:solidFill>
+                  <a:srgbClr val="1A1A1A"/>
+                </a:solidFill>
+                <a:latin typeface="Georgia"/>
+              </a:rPr>
+              <a:t>Field or survey imagery</a:t>
+            </a:r>
+          </a:p>
+        </p:txBody>
+      </p:sp>
+      <p:sp>
+        <p:nvSpPr>
+          <p:cNvPr id="15" name="TextBox 14"/>
+          <p:cNvSpPr txBox="1"/>
+          <p:nvPr/>
+        </p:nvSpPr>
+        <p:spPr>
+          <a:xfrm>
+            <a:off x="5029200" y="5184648"/>
+            <a:ext cx="6492240" cy="822960"/>
+          </a:xfrm>
+          <a:prstGeom prst="rect">
+            <a:avLst/>
+          </a:prstGeom>
+          <a:noFill/>
+        </p:spPr>
+        <p:txBody>
+          <a:bodyPr wrap="square">
+            <a:spAutoFit/>
+          </a:bodyPr>
+          <a:lstStyle/>
+          <a:p>
+            <a:pPr algn="l">
+              <a:lnSpc>
+                <a:spcPct val="112000"/>
+              </a:lnSpc>
+            </a:pPr>
+            <a:r>
+              <a:rPr sz="1100" b="0">
+                <a:solidFill>
+                  <a:srgbClr val="1A1A1A"/>
+                </a:solidFill>
+                <a:latin typeface="Georgia"/>
+              </a:rPr>
+              <a:t>A registration demonstration on lab data would test the actual use case.</a:t>
+            </a:r>
+          </a:p>
+        </p:txBody>
+      </p:sp>
+      <p:sp>
+        <p:nvSpPr>
+          <p:cNvPr id="16" name="TextBox 15"/>
+          <p:cNvSpPr txBox="1"/>
+          <p:nvPr/>
+        </p:nvSpPr>
+        <p:spPr>
+          <a:xfrm>
+            <a:off x="685800" y="6419088"/>
+            <a:ext cx="7315200" cy="274320"/>
+          </a:xfrm>
+          <a:prstGeom prst="rect">
+            <a:avLst/>
+          </a:prstGeom>
+          <a:noFill/>
+        </p:spPr>
+        <p:txBody>
+          <a:bodyPr wrap="square">
+            <a:spAutoFit/>
+          </a:bodyPr>
+          <a:lstStyle/>
+          <a:p>
+            <a:pPr algn="l">
+              <a:lnSpc>
+                <a:spcPct val="100000"/>
+              </a:lnSpc>
+            </a:pPr>
+            <a:r>
+              <a:rPr sz="900" b="0">
+                <a:solidFill>
+                  <a:srgbClr val="8A8A8A"/>
+                </a:solidFill>
+                <a:latin typeface="Georgia"/>
+              </a:rPr>
+              <a:t>NeuFlow v3, S. Raghav Srinivasan</a:t>
+            </a:r>
+          </a:p>
+        </p:txBody>
+      </p:sp>
+      <p:sp>
+        <p:nvSpPr>
+          <p:cNvPr id="17" name="TextBox 16"/>
+          <p:cNvSpPr txBox="1"/>
+          <p:nvPr/>
+        </p:nvSpPr>
+        <p:spPr>
+          <a:xfrm>
+            <a:off x="10607040" y="6419088"/>
+            <a:ext cx="1097280" cy="274320"/>
+          </a:xfrm>
+          <a:prstGeom prst="rect">
+            <a:avLst/>
+          </a:prstGeom>
+          <a:noFill/>
+        </p:spPr>
+        <p:txBody>
+          <a:bodyPr wrap="square">
+            <a:spAutoFit/>
+          </a:bodyPr>
+          <a:lstStyle/>
+          <a:p>
+            <a:pPr algn="l">
+              <a:lnSpc>
+                <a:spcPct val="100000"/>
+              </a:lnSpc>
+            </a:pPr>
+            <a:r>
+              <a:rPr sz="900" b="0">
+                <a:solidFill>
+                  <a:srgbClr val="8A8A8A"/>
+                </a:solidFill>
+                <a:latin typeface="Georgia"/>
+              </a:rPr>
+              <a:t>16</a:t>
+            </a:r>
+          </a:p>
+        </p:txBody>
+      </p:sp>
+    </p:spTree>
+  </p:cSld>
+  <p:clrMapOvr>
+    <a:masterClrMapping/>
+  </p:clrMapOvr>
+</p:sld>
+</file>
+
+<file path=ppt/slides/slide17.xml><?xml version="1.0" encoding="utf-8"?>
+<p:sld xmlns:a="http://schemas.openxmlformats.org/drawingml/2006/main" xmlns:p="http://schemas.openxmlformats.org/presentationml/2006/main" xmlns:r="http://schemas.openxmlformats.org/officeDocument/2006/relationships">
+  <p:cSld>
+    <p:spTree>
+      <p:nvGrpSpPr>
+        <p:cNvPr id="1" name=""/>
+        <p:cNvGrpSpPr/>
+        <p:nvPr/>
+      </p:nvGrpSpPr>
+      <p:grpSpPr/>
+      <p:sp>
+        <p:nvSpPr>
+          <p:cNvPr id="2" name="TextBox 1"/>
+          <p:cNvSpPr txBox="1"/>
+          <p:nvPr/>
+        </p:nvSpPr>
+        <p:spPr>
+          <a:xfrm>
+            <a:off x="685800" y="384048"/>
+            <a:ext cx="10515600" cy="274320"/>
+          </a:xfrm>
+          <a:prstGeom prst="rect">
+            <a:avLst/>
+          </a:prstGeom>
+          <a:noFill/>
+        </p:spPr>
+        <p:txBody>
+          <a:bodyPr wrap="square">
+            <a:spAutoFit/>
+          </a:bodyPr>
+          <a:lstStyle/>
+          <a:p>
+            <a:pPr algn="l">
+              <a:lnSpc>
+                <a:spcPct val="100000"/>
+              </a:lnSpc>
+            </a:pPr>
+            <a:r>
+              <a:rPr sz="1050" b="1">
+                <a:solidFill>
+                  <a:srgbClr val="333333"/>
+                </a:solidFill>
+                <a:latin typeface="Georgia"/>
+              </a:rPr>
+              <a:t>ANTICIPATED QUESTIONS</a:t>
+            </a:r>
+          </a:p>
+        </p:txBody>
+      </p:sp>
+      <p:sp>
+        <p:nvSpPr>
+          <p:cNvPr id="3" name="TextBox 2"/>
+          <p:cNvSpPr txBox="1"/>
+          <p:nvPr/>
+        </p:nvSpPr>
+        <p:spPr>
+          <a:xfrm>
+            <a:off x="667512" y="658368"/>
+            <a:ext cx="10881360" cy="731520"/>
+          </a:xfrm>
+          <a:prstGeom prst="rect">
+            <a:avLst/>
+          </a:prstGeom>
+          <a:noFill/>
+        </p:spPr>
+        <p:txBody>
+          <a:bodyPr wrap="square">
+            <a:spAutoFit/>
+          </a:bodyPr>
+          <a:lstStyle/>
+          <a:p>
+            <a:pPr algn="l">
+              <a:lnSpc>
+                <a:spcPct val="100000"/>
+              </a:lnSpc>
+            </a:pPr>
+            <a:r>
+              <a:rPr sz="2400" b="1">
+                <a:solidFill>
+                  <a:srgbClr val="1A1A1A"/>
+                </a:solidFill>
+                <a:latin typeface="Georgia"/>
+              </a:rPr>
+              <a:t/>
+            </a:r>
+          </a:p>
+        </p:txBody>
+      </p:sp>
+      <p:sp>
+        <p:nvSpPr>
+          <p:cNvPr id="4" name="TextBox 3"/>
+          <p:cNvSpPr txBox="1"/>
+          <p:nvPr/>
+        </p:nvSpPr>
+        <p:spPr>
+          <a:xfrm>
+            <a:off x="685800" y="1508760"/>
+            <a:ext cx="10881360" cy="274320"/>
+          </a:xfrm>
+          <a:prstGeom prst="rect">
+            <a:avLst/>
+          </a:prstGeom>
+          <a:noFill/>
+        </p:spPr>
+        <p:txBody>
+          <a:bodyPr wrap="square">
+            <a:spAutoFit/>
+          </a:bodyPr>
+          <a:lstStyle/>
+          <a:p>
+            <a:pPr algn="l">
+              <a:lnSpc>
+                <a:spcPct val="100000"/>
+              </a:lnSpc>
+            </a:pPr>
+            <a:r>
+              <a:rPr sz="1200" b="1">
+                <a:solidFill>
+                  <a:srgbClr val="1A1A1A"/>
+                </a:solidFill>
+                <a:latin typeface="Georgia"/>
+              </a:rPr>
+              <a:t>Why is flow defined between pixels at all?</a:t>
+            </a:r>
+          </a:p>
+        </p:txBody>
+      </p:sp>
+      <p:sp>
+        <p:nvSpPr>
+          <p:cNvPr id="5" name="TextBox 4"/>
+          <p:cNvSpPr txBox="1"/>
+          <p:nvPr/>
+        </p:nvSpPr>
+        <p:spPr>
+          <a:xfrm>
+            <a:off x="868680" y="1810512"/>
+            <a:ext cx="10607040" cy="594360"/>
+          </a:xfrm>
+          <a:prstGeom prst="rect">
+            <a:avLst/>
+          </a:prstGeom>
+          <a:noFill/>
+        </p:spPr>
+        <p:txBody>
+          <a:bodyPr wrap="square">
+            <a:spAutoFit/>
+          </a:bodyPr>
+          <a:lstStyle/>
+          <a:p>
+            <a:pPr algn="l">
+              <a:lnSpc>
+                <a:spcPct val="112000"/>
+              </a:lnSpc>
+            </a:pPr>
+            <a:r>
+              <a:rPr sz="1100" b="0">
+                <a:solidFill>
+                  <a:srgbClr val="333333"/>
+                </a:solidFill>
+                <a:latin typeface="Georgia"/>
+              </a:rPr>
+              <a:t>Motion is continuous; the pixel grid is a sampling artefact. A corner tracked to (312.7, 188.2) is a real answer, and registration consumes it directly.</a:t>
+            </a:r>
+          </a:p>
+        </p:txBody>
+      </p:sp>
+      <p:sp>
+        <p:nvSpPr>
+          <p:cNvPr id="6" name="TextBox 5"/>
+          <p:cNvSpPr txBox="1"/>
+          <p:nvPr/>
+        </p:nvSpPr>
+        <p:spPr>
+          <a:xfrm>
+            <a:off x="685800" y="2697480"/>
+            <a:ext cx="10881360" cy="274320"/>
+          </a:xfrm>
+          <a:prstGeom prst="rect">
+            <a:avLst/>
+          </a:prstGeom>
+          <a:noFill/>
+        </p:spPr>
+        <p:txBody>
+          <a:bodyPr wrap="square">
+            <a:spAutoFit/>
+          </a:bodyPr>
+          <a:lstStyle/>
+          <a:p>
+            <a:pPr algn="l">
+              <a:lnSpc>
+                <a:spcPct val="100000"/>
+              </a:lnSpc>
+            </a:pPr>
+            <a:r>
+              <a:rPr sz="1200" b="1">
+                <a:solidFill>
+                  <a:srgbClr val="1A1A1A"/>
+                </a:solidFill>
+                <a:latin typeface="Georgia"/>
+              </a:rPr>
+              <a:t>Why freeze the backbone?</a:t>
+            </a:r>
+          </a:p>
+        </p:txBody>
+      </p:sp>
+      <p:sp>
+        <p:nvSpPr>
+          <p:cNvPr id="7" name="TextBox 6"/>
+          <p:cNvSpPr txBox="1"/>
+          <p:nvPr/>
+        </p:nvSpPr>
+        <p:spPr>
+          <a:xfrm>
+            <a:off x="868680" y="2999232"/>
+            <a:ext cx="10607040" cy="594360"/>
+          </a:xfrm>
+          <a:prstGeom prst="rect">
+            <a:avLst/>
+          </a:prstGeom>
+          <a:noFill/>
+        </p:spPr>
+        <p:txBody>
+          <a:bodyPr wrap="square">
+            <a:spAutoFit/>
+          </a:bodyPr>
+          <a:lstStyle/>
+          <a:p>
+            <a:pPr algn="l">
+              <a:lnSpc>
+                <a:spcPct val="112000"/>
+              </a:lnSpc>
+            </a:pPr>
+            <a:r>
+              <a:rPr sz="1100" b="0">
+                <a:solidFill>
+                  <a:srgbClr val="333333"/>
+                </a:solidFill>
+                <a:latin typeface="Georgia"/>
+              </a:rPr>
+              <a:t>To isolate the decoder as the only variable. Unfreezing diverged at batch 4 locally and has not been retried at scale.</a:t>
+            </a:r>
+          </a:p>
+        </p:txBody>
+      </p:sp>
+      <p:sp>
+        <p:nvSpPr>
+          <p:cNvPr id="8" name="TextBox 7"/>
+          <p:cNvSpPr txBox="1"/>
+          <p:nvPr/>
+        </p:nvSpPr>
+        <p:spPr>
+          <a:xfrm>
+            <a:off x="685800" y="3886200"/>
+            <a:ext cx="10881360" cy="274320"/>
+          </a:xfrm>
+          <a:prstGeom prst="rect">
+            <a:avLst/>
+          </a:prstGeom>
+          <a:noFill/>
+        </p:spPr>
+        <p:txBody>
+          <a:bodyPr wrap="square">
+            <a:spAutoFit/>
+          </a:bodyPr>
+          <a:lstStyle/>
+          <a:p>
+            <a:pPr algn="l">
+              <a:lnSpc>
+                <a:spcPct val="100000"/>
+              </a:lnSpc>
+            </a:pPr>
+            <a:r>
+              <a:rPr sz="1200" b="1">
+                <a:solidFill>
+                  <a:srgbClr val="1A1A1A"/>
+                </a:solidFill>
+                <a:latin typeface="Georgia"/>
+              </a:rPr>
+              <a:t>Why is dense v3 slower than v2?</a:t>
+            </a:r>
+          </a:p>
+        </p:txBody>
+      </p:sp>
+      <p:sp>
+        <p:nvSpPr>
+          <p:cNvPr id="9" name="TextBox 8"/>
+          <p:cNvSpPr txBox="1"/>
+          <p:nvPr/>
+        </p:nvSpPr>
+        <p:spPr>
+          <a:xfrm>
+            <a:off x="868680" y="4187952"/>
+            <a:ext cx="10607040" cy="594360"/>
+          </a:xfrm>
+          <a:prstGeom prst="rect">
+            <a:avLst/>
+          </a:prstGeom>
+          <a:noFill/>
+        </p:spPr>
+        <p:txBody>
+          <a:bodyPr wrap="square">
+            <a:spAutoFit/>
+          </a:bodyPr>
+          <a:lstStyle/>
+          <a:p>
+            <a:pPr algn="l">
+              <a:lnSpc>
+                <a:spcPct val="112000"/>
+              </a:lnSpc>
+            </a:pPr>
+            <a:r>
+              <a:rPr sz="1100" b="0">
+                <a:solidFill>
+                  <a:srgbClr val="333333"/>
+                </a:solidFill>
+                <a:latin typeface="Georgia"/>
+              </a:rPr>
+              <a:t>v2 upsamples with one convolution that shares work across neighbouring pixels. v3 answers each query independently, giving up that sharing to gain the ability to answer only what is asked.</a:t>
+            </a:r>
+          </a:p>
+        </p:txBody>
+      </p:sp>
+      <p:sp>
+        <p:nvSpPr>
+          <p:cNvPr id="10" name="TextBox 9"/>
+          <p:cNvSpPr txBox="1"/>
+          <p:nvPr/>
+        </p:nvSpPr>
+        <p:spPr>
+          <a:xfrm>
+            <a:off x="685800" y="5074920"/>
+            <a:ext cx="10881360" cy="274320"/>
+          </a:xfrm>
+          <a:prstGeom prst="rect">
+            <a:avLst/>
+          </a:prstGeom>
+          <a:noFill/>
+        </p:spPr>
+        <p:txBody>
+          <a:bodyPr wrap="square">
+            <a:spAutoFit/>
+          </a:bodyPr>
+          <a:lstStyle/>
+          <a:p>
+            <a:pPr algn="l">
+              <a:lnSpc>
+                <a:spcPct val="100000"/>
+              </a:lnSpc>
+            </a:pPr>
+            <a:r>
+              <a:rPr sz="1200" b="1">
+                <a:solidFill>
+                  <a:srgbClr val="1A1A1A"/>
+                </a:solidFill>
+                <a:latin typeface="Georgia"/>
+              </a:rPr>
+              <a:t>Is a tie on EPE worth the added complexity?</a:t>
+            </a:r>
+          </a:p>
+        </p:txBody>
+      </p:sp>
+      <p:sp>
+        <p:nvSpPr>
+          <p:cNvPr id="11" name="TextBox 10"/>
+          <p:cNvSpPr txBox="1"/>
+          <p:nvPr/>
+        </p:nvSpPr>
+        <p:spPr>
+          <a:xfrm>
+            <a:off x="868680" y="5376672"/>
+            <a:ext cx="10607040" cy="594360"/>
+          </a:xfrm>
+          <a:prstGeom prst="rect">
+            <a:avLst/>
+          </a:prstGeom>
+          <a:noFill/>
+        </p:spPr>
+        <p:txBody>
+          <a:bodyPr wrap="square">
+            <a:spAutoFit/>
+          </a:bodyPr>
+          <a:lstStyle/>
+          <a:p>
+            <a:pPr algn="l">
+              <a:lnSpc>
+                <a:spcPct val="112000"/>
+              </a:lnSpc>
+            </a:pPr>
+            <a:r>
+              <a:rPr sz="1100" b="0">
+                <a:solidFill>
+                  <a:srgbClr val="333333"/>
+                </a:solidFill>
+                <a:latin typeface="Georgia"/>
+              </a:rPr>
+              <a:t>Not on its own. It is worth it if you need queryability, cheap repeat access, or confidence values. For plain dense flow, v2 remains the better choice, and I would say so.</a:t>
+            </a:r>
+          </a:p>
+        </p:txBody>
+      </p:sp>
+      <p:sp>
+        <p:nvSpPr>
+          <p:cNvPr id="12" name="TextBox 11"/>
+          <p:cNvSpPr txBox="1"/>
+          <p:nvPr/>
+        </p:nvSpPr>
+        <p:spPr>
+          <a:xfrm>
+            <a:off x="685800" y="6419088"/>
+            <a:ext cx="7315200" cy="274320"/>
+          </a:xfrm>
+          <a:prstGeom prst="rect">
+            <a:avLst/>
+          </a:prstGeom>
+          <a:noFill/>
+        </p:spPr>
+        <p:txBody>
+          <a:bodyPr wrap="square">
+            <a:spAutoFit/>
+          </a:bodyPr>
+          <a:lstStyle/>
+          <a:p>
+            <a:pPr algn="l">
+              <a:lnSpc>
+                <a:spcPct val="100000"/>
+              </a:lnSpc>
+            </a:pPr>
+            <a:r>
+              <a:rPr sz="900" b="0">
+                <a:solidFill>
+                  <a:srgbClr val="8A8A8A"/>
+                </a:solidFill>
+                <a:latin typeface="Georgia"/>
+              </a:rPr>
+              <a:t>NeuFlow v3, S. Raghav Srinivasan</a:t>
+            </a:r>
+          </a:p>
+        </p:txBody>
+      </p:sp>
+      <p:sp>
+        <p:nvSpPr>
+          <p:cNvPr id="13" name="TextBox 12"/>
+          <p:cNvSpPr txBox="1"/>
+          <p:nvPr/>
+        </p:nvSpPr>
+        <p:spPr>
+          <a:xfrm>
+            <a:off x="10607040" y="6419088"/>
+            <a:ext cx="1097280" cy="274320"/>
+          </a:xfrm>
+          <a:prstGeom prst="rect">
+            <a:avLst/>
+          </a:prstGeom>
+          <a:noFill/>
+        </p:spPr>
+        <p:txBody>
+          <a:bodyPr wrap="square">
+            <a:spAutoFit/>
+          </a:bodyPr>
+          <a:lstStyle/>
+          <a:p>
+            <a:pPr algn="l">
+              <a:lnSpc>
+                <a:spcPct val="100000"/>
+              </a:lnSpc>
+            </a:pPr>
+            <a:r>
+              <a:rPr sz="900" b="0">
+                <a:solidFill>
+                  <a:srgbClr val="8A8A8A"/>
+                </a:solidFill>
+                <a:latin typeface="Georgia"/>
+              </a:rPr>
+              <a:t>17</a:t>
             </a:r>
           </a:p>
         </p:txBody>

--- a/docs/NeuFlow_v3_status.pptx
+++ b/docs/NeuFlow_v3_status.pptx
@@ -23,6 +23,7 @@
     <p:sldId id="271" r:id="rId23"/>
     <p:sldId id="272" r:id="rId24"/>
     <p:sldId id="273" r:id="rId25"/>
+    <p:sldId id="274" r:id="rId26"/>
   </p:sldIdLst>
   <p:sldSz cx="12191695" cy="6858000" type="screen4x3"/>
   <p:notesSz cx="6858000" cy="9144000"/>
@@ -729,7 +730,7 @@
           <a:lstStyle/>
           <a:p>
             <a:r>
-              <a:t>This is the scenario you described where the repeat query matters, and it is the one result that is specific to this architecture rather than to cropping. A frame is already in flight, and a new object enters the field of view. Because the coarse pass is cached, answering costs one point seven milliseconds for eight hundred points. A cropped pipeline cannot reuse anything: the new object is outside its box, so it runs a whole new pass at seven point three milliseconds, four times more, and the answer is worse, three point six pixels against two point one, because a fresh crop has lost the surrounding context. NeuFlow v2 keeps no state at all between calls. The general point is that this buys you the ability to answer a question you did not know you would have when the frame arrived, which on a moving platform is most of them.</a:t>
+              <a:t>I wanted to know whether the margin rule was a curve fitted to one dataset or something more general, so I tested it on aerial sequences, which move very differently: nine point three pixels per frame against twenty six point six for driving. The prediction was that the margin needed should scale with the motion, so the knee should move from thirty two pixels down to about nine. It did. On the left you can see the two need different absolute margins. On the right, dividing by the mean motion, both start at the same penalty and both have lost most of it by the point where the margin equals one frame of motion. I will be precise about the limits: the agreement is good up to that point and the residuals differ beyond it, so this predicts the scale rather than the exact curve. That is still enough to size a margin from speed and frame rate before running anything, which is what a platform designer needs.</a:t>
             </a:r>
           </a:p>
         </p:txBody>
@@ -799,7 +800,7 @@
           <a:lstStyle/>
           <a:p>
             <a:r>
-              <a:t>The interface is two calls. One coarse pass per frame pair, then as many decode calls as you like against it. The plot shows decode cost is flat between 800 and 2,048 queries, which tells you it is dominated by kernel launch overhead, not arithmetic, so you get two thousand points for the price of eight hundred. Above about ten thousand points it becomes compute bound and you should just use dense mode.</a:t>
+              <a:t>This is the scenario you described where the repeat query matters, and it is the one result that is specific to this architecture rather than to cropping. A frame is already in flight, and a new object enters the field of view. Because the coarse pass is cached, answering costs one point seven milliseconds for eight hundred points. A cropped pipeline cannot reuse anything: the new object is outside its box, so it runs a whole new pass at seven point three milliseconds, four times more, and the answer is worse, three point six pixels against two point one, because a fresh crop has lost the surrounding context. NeuFlow v2 keeps no state at all between calls. The general point is that this buys you the ability to answer a question you did not know you would have when the frame arrived, which on a moving platform is most of them.</a:t>
             </a:r>
           </a:p>
         </p:txBody>
@@ -869,7 +870,7 @@
           <a:lstStyle/>
           <a:p>
             <a:r>
-              <a:t>This is a working tool, not a mock-up. You load a video, step to a frame, drag a box, and it computes flow in that box. Two modes. Query mode runs the full coarse pass and decodes only inside the box, which is exact. Crop mode feeds just the box through the whole pipeline, so the cost scales with the area you asked for, but it loses the surrounding context that global matching uses. The panel shows the actual breakdown live, including the parts where v3 is not the faster option.</a:t>
+              <a:t>The interface is two calls. One coarse pass per frame pair, then as many decode calls as you like against it. The plot shows decode cost is flat between 800 and 2,048 queries, which tells you it is dominated by kernel launch overhead, not arithmetic, so you get two thousand points for the price of eight hundred. Above about ten thousand points it becomes compute bound and you should just use dense mode.</a:t>
             </a:r>
           </a:p>
         </p:txBody>
@@ -939,7 +940,7 @@
           <a:lstStyle/>
           <a:p>
             <a:r>
-              <a:t>Here is the scorecard against what I set out to do, and two of three are not met. Better accuracy: not met, the fair comparison is a tie. Less compute: partly, dense is slower, a first query is level, but repeat queries are nearly eight times cheaper. Edge capable: unproven, everything I have measured is on a laptop 4060 and I have not touched a Jetson. What the project does deliver is the three things at the bottom: output you can query at any coordinate, cheap repeat access to a cached frame, and a calibrated confidence value. Those are real and they are measured.</a:t>
+              <a:t>This is a working tool, not a mock-up. You load a video, step to a frame, drag a box, and it computes flow in that box. Two modes. Query mode runs the full coarse pass and decodes only inside the box, which is exact. Crop mode feeds just the box through the whole pipeline, so the cost scales with the area you asked for, but it loses the surrounding context that global matching uses. The panel shows the actual breakdown live, including the parts where v3 is not the faster option.</a:t>
             </a:r>
           </a:p>
         </p:txBody>
@@ -1009,7 +1010,7 @@
           <a:lstStyle/>
           <a:p>
             <a:r>
-              <a:t>Limitations, stated plainly rather than buried. Precision is worse than v2 and I have diagnosed without yet addressing it. There is no edge device measurement at all, so the word edge in my title is a design target and not a result. Everything is evaluated on one synthetic driving dataset, which says little about field imagery. The Spring run was cut off by the cluster wall clock. And I have one seed per configuration, so please do not read too much into differences below about five hundredths of a pixel.</a:t>
+              <a:t>Here is the scorecard against what I set out to do, and two of three are not met. Better accuracy: not met, the fair comparison is a tie. Less compute: partly, dense is slower, a first query is level, but repeat queries are nearly eight times cheaper. Edge capable: unproven, everything I have measured is on a laptop 4060 and I have not touched a Jetson. What the project does deliver is the three things at the bottom: output you can query at any coordinate, cheap repeat access to a cached frame, and a calibrated confidence value. Those are real and they are measured.</a:t>
             </a:r>
           </a:p>
         </p:txBody>
@@ -1079,7 +1080,7 @@
           <a:lstStyle/>
           <a:p>
             <a:r>
-              <a:t>Four next steps in priority order. First, give the decoder a full resolution feature map. That is the direct attack on the precision gap, and it also matters because right now querying between pixels returns something close to interpolation, so the arbitrary coordinate claim is thinner than it sounds. Second, the Spring dataset gives ground truth at twice the input resolution, which v3 can be queried at natively and v2 structurally cannot. That is the one test that shows a capability rather than a margin. Third, actually measure a Jetson. Fourth, try it on real survey imagery.</a:t>
+              <a:t>Limitations, stated plainly rather than buried. Precision is worse than v2 and I have diagnosed without yet addressing it. There is no edge device measurement at all, so the word edge in my title is a design target and not a result. Everything is evaluated on one synthetic driving dataset, which says little about field imagery. The Spring run was cut off by the cluster wall clock. And I have one seed per configuration, so please do not read too much into differences below about five hundredths of a pixel.</a:t>
             </a:r>
           </a:p>
         </p:txBody>
@@ -1105,6 +1106,76 @@
 </file>
 
 <file path=ppt/notesSlides/notesSlide18.xml><?xml version="1.0" encoding="utf-8"?>
+<p:notes xmlns:a="http://schemas.openxmlformats.org/drawingml/2006/main" xmlns:p="http://schemas.openxmlformats.org/presentationml/2006/main" xmlns:r="http://schemas.openxmlformats.org/officeDocument/2006/relationships">
+  <p:cSld>
+    <p:spTree>
+      <p:nvGrpSpPr>
+        <p:cNvPr id="1" name=""/>
+        <p:cNvGrpSpPr/>
+        <p:nvPr/>
+      </p:nvGrpSpPr>
+      <p:grpSpPr>
+        <a:xfrm>
+          <a:off x="0" y="0"/>
+          <a:ext cx="0" cy="0"/>
+          <a:chOff x="0" y="0"/>
+          <a:chExt cx="0" cy="0"/>
+        </a:xfrm>
+      </p:grpSpPr>
+      <p:sp>
+        <p:nvSpPr>
+          <p:cNvPr id="2" name="Slide Image Placeholder 1"/>
+          <p:cNvSpPr>
+            <a:spLocks noGrp="1"/>
+          </p:cNvSpPr>
+          <p:nvPr>
+            <p:ph type="sldImg" idx="2"/>
+          </p:nvPr>
+        </p:nvSpPr>
+        <p:spPr/>
+      </p:sp>
+      <p:sp>
+        <p:nvSpPr>
+          <p:cNvPr id="3" name="Notes Placeholder 2"/>
+          <p:cNvSpPr>
+            <a:spLocks noGrp="1"/>
+          </p:cNvSpPr>
+          <p:nvPr>
+            <p:ph type="body" idx="3" sz="quarter"/>
+          </p:nvPr>
+        </p:nvSpPr>
+        <p:spPr/>
+        <p:txBody>
+          <a:bodyPr/>
+          <a:lstStyle/>
+          <a:p>
+            <a:r>
+              <a:t>Four next steps in priority order. First, give the decoder a full resolution feature map. That is the direct attack on the precision gap, and it also matters because right now querying between pixels returns something close to interpolation, so the arbitrary coordinate claim is thinner than it sounds. Second, the Spring dataset gives ground truth at twice the input resolution, which v3 can be queried at natively and v2 structurally cannot. That is the one test that shows a capability rather than a margin. Third, actually measure a Jetson. Fourth, try it on real survey imagery.</a:t>
+            </a:r>
+          </a:p>
+        </p:txBody>
+      </p:sp>
+      <p:sp>
+        <p:nvSpPr>
+          <p:cNvPr id="4" name="Slide Number Placeholder 3"/>
+          <p:cNvSpPr>
+            <a:spLocks noGrp="1"/>
+          </p:cNvSpPr>
+          <p:nvPr>
+            <p:ph type="sldNum" idx="5" sz="quarter"/>
+          </p:nvPr>
+        </p:nvSpPr>
+        <p:spPr/>
+      </p:sp>
+    </p:spTree>
+  </p:cSld>
+  <p:clrMapOvr>
+    <a:masterClrMapping/>
+  </p:clrMapOvr>
+</p:notes>
+</file>
+
+<file path=ppt/notesSlides/notesSlide19.xml><?xml version="1.0" encoding="utf-8"?>
 <p:notes xmlns:a="http://schemas.openxmlformats.org/drawingml/2006/main" xmlns:p="http://schemas.openxmlformats.org/presentationml/2006/main" xmlns:r="http://schemas.openxmlformats.org/officeDocument/2006/relationships">
   <p:cSld>
     <p:spTree>
@@ -7106,14 +7177,14 @@
                 </a:solidFill>
                 <a:latin typeface="Georgia"/>
               </a:rPr>
-              <a:t>A new object appears: 1.7 ms, against 7.3 for a new crop</a:t>
+              <a:t>The margin rule holds across two motion scales</a:t>
             </a:r>
           </a:p>
         </p:txBody>
       </p:sp>
       <p:pic>
         <p:nvPicPr>
-          <p:cNvPr id="4" name="Picture 3" descr="scenario3_marginal.png"/>
+          <p:cNvPr id="4" name="Picture 3" descr="margin_rule.png"/>
           <p:cNvPicPr>
             <a:picLocks noChangeAspect="1"/>
           </p:cNvPicPr>
@@ -7127,8 +7198,8 @@
         </p:blipFill>
         <p:spPr>
           <a:xfrm>
-            <a:off x="1234440" y="1463040"/>
-            <a:ext cx="9692640" cy="3862969"/>
+            <a:off x="960120" y="1463040"/>
+            <a:ext cx="10241280" cy="4063457"/>
           </a:xfrm>
           <a:prstGeom prst="rect">
             <a:avLst/>
@@ -7143,7 +7214,7 @@
         </p:nvSpPr>
         <p:spPr>
           <a:xfrm>
-            <a:off x="685800" y="5440680"/>
+            <a:off x="685800" y="5394960"/>
             <a:ext cx="10881360" cy="1005840"/>
           </a:xfrm>
           <a:prstGeom prst="rect">
@@ -7169,7 +7240,7 @@
                 </a:solidFill>
                 <a:latin typeface="Georgia"/>
               </a:rPr>
-              <a:t>The third scenario: a frame is already being processed when something new enters the field of view. Because the</a:t>
+              <a:t>Driving sequences average 26.6 px of motion and need about 32 px of margin. Aerial sequences average 9.26 px and</a:t>
             </a:r>
           </a:p>
           <a:p>
@@ -7185,7 +7256,7 @@
                 </a:solidFill>
                 <a:latin typeface="Georgia"/>
               </a:rPr>
-              <a:t>coarse pass is cached, the decoder answers for 1.7 ms. A cropped pipeline has to run an entire new pass, 7.3 ms,</a:t>
+              <a:t>need about 8. Both start from the same 0.43 px penalty with no margin, and both have shed most of it by the point</a:t>
             </a:r>
           </a:p>
           <a:p>
@@ -7201,7 +7272,7 @@
                 </a:solidFill>
                 <a:latin typeface="Georgia"/>
               </a:rPr>
-              <a:t>and is markedly less accurate doing it because a fresh crop loses the global context that finds large motion.</a:t>
+              <a:t>where the margin equals one frame of motion. The requirement is set by displacement, not by image size, which</a:t>
             </a:r>
           </a:p>
           <a:p>
@@ -7217,7 +7288,7 @@
                 </a:solidFill>
                 <a:latin typeface="Georgia"/>
               </a:rPr>
-              <a:t>v2 keeps no state between calls, so it has nothing to answer from.</a:t>
+              <a:t>makes it predictable from platform speed and frame rate before any flow is computed.</a:t>
             </a:r>
           </a:p>
         </p:txBody>
@@ -7360,7 +7431,7 @@
                 </a:solidFill>
                 <a:latin typeface="Georgia"/>
               </a:rPr>
-              <a:t>INTERFACE</a:t>
+              <a:t>RESULTS</a:t>
             </a:r>
           </a:p>
         </p:txBody>
@@ -7399,14 +7470,14 @@
                 </a:solidFill>
                 <a:latin typeface="Georgia"/>
               </a:rPr>
-              <a:t>What a query costs, and how you make one</a:t>
+              <a:t>A new object appears: 1.7 ms, against 7.3 for a new crop</a:t>
             </a:r>
           </a:p>
         </p:txBody>
       </p:sp>
       <p:pic>
         <p:nvPicPr>
-          <p:cNvPr id="4" name="Picture 3" descr="decode_flat.png"/>
+          <p:cNvPr id="4" name="Picture 3" descr="scenario3_marginal.png"/>
           <p:cNvPicPr>
             <a:picLocks noChangeAspect="1"/>
           </p:cNvPicPr>
@@ -7420,8 +7491,8 @@
         </p:blipFill>
         <p:spPr>
           <a:xfrm>
-            <a:off x="731520" y="1508760"/>
-            <a:ext cx="6400800" cy="3231565"/>
+            <a:off x="1234440" y="1463040"/>
+            <a:ext cx="9692640" cy="3862969"/>
           </a:xfrm>
           <a:prstGeom prst="rect">
             <a:avLst/>
@@ -7436,201 +7507,23 @@
         </p:nvSpPr>
         <p:spPr>
           <a:xfrm>
-            <a:off x="7406640" y="1645920"/>
-            <a:ext cx="4206240" cy="365760"/>
-          </a:xfrm>
-          <a:prstGeom prst="rect">
-            <a:avLst/>
-          </a:prstGeom>
-          <a:noFill/>
-        </p:spPr>
-        <p:txBody>
-          <a:bodyPr wrap="square">
-            <a:spAutoFit/>
-          </a:bodyPr>
-          <a:lstStyle/>
-          <a:p>
-            <a:pPr algn="l">
-              <a:lnSpc>
-                <a:spcPct val="100000"/>
-              </a:lnSpc>
-            </a:pPr>
-            <a:r>
-              <a:rPr sz="1200" b="1">
-                <a:solidFill>
-                  <a:srgbClr val="333333"/>
-                </a:solidFill>
-                <a:latin typeface="Georgia"/>
-              </a:rPr>
-              <a:t>The entire API</a:t>
-            </a:r>
-          </a:p>
-        </p:txBody>
-      </p:sp>
-      <p:sp>
-        <p:nvSpPr>
-          <p:cNvPr id="6" name="Rounded Rectangle 5"/>
-          <p:cNvSpPr/>
-          <p:nvPr/>
-        </p:nvSpPr>
-        <p:spPr>
-          <a:xfrm>
-            <a:off x="7406640" y="2011680"/>
-            <a:ext cx="4206240" cy="1737360"/>
-          </a:xfrm>
-          <a:prstGeom prst="roundRect">
-            <a:avLst/>
-          </a:prstGeom>
-          <a:solidFill>
-            <a:srgbClr val="EFEFEF"/>
-          </a:solidFill>
-          <a:ln w="9525">
-            <a:solidFill>
-              <a:srgbClr val="8A8A8A"/>
-            </a:solidFill>
-          </a:ln>
-          <a:effectLst/>
-        </p:spPr>
-        <p:style>
-          <a:lnRef idx="1">
-            <a:schemeClr val="accent1"/>
-          </a:lnRef>
-          <a:fillRef idx="3">
-            <a:schemeClr val="accent1"/>
-          </a:fillRef>
-          <a:effectRef idx="2">
-            <a:schemeClr val="accent1"/>
-          </a:effectRef>
-          <a:fontRef idx="minor">
-            <a:schemeClr val="lt1"/>
-          </a:fontRef>
-        </p:style>
-        <p:txBody>
-          <a:bodyPr rtlCol="0" anchor="ctr" wrap="square" lIns="73152" rIns="73152"/>
-          <a:lstStyle/>
-          <a:p>
-            <a:pPr algn="ctr"/>
-            <a:r>
-              <a:rPr sz="1000" b="0">
-                <a:solidFill>
-                  <a:srgbClr val="1A1A1A"/>
-                </a:solidFill>
-                <a:latin typeface="Georgia"/>
-              </a:rPr>
-              <a:t>state = model.infer_coarse_state(img0, img1)</a:t>
-            </a:r>
-          </a:p>
-          <a:p>
-            <a:pPr algn="ctr"/>
-            <a:r>
-              <a:rPr sz="1000" b="0">
-                <a:solidFill>
-                  <a:srgbClr val="1A1A1A"/>
-                </a:solidFill>
-                <a:latin typeface="Georgia"/>
-              </a:rPr>
-              <a:t>                                  once, 33 ms</a:t>
-            </a:r>
-          </a:p>
-          <a:p>
-            <a:pPr algn="ctr"/>
-            <a:r>
-              <a:rPr sz="1000" b="0">
-                <a:solidFill>
-                  <a:srgbClr val="1A1A1A"/>
-                </a:solidFill>
-                <a:latin typeface="Georgia"/>
-              </a:rPr>
-              <a:t/>
-            </a:r>
-          </a:p>
-          <a:p>
-            <a:pPr algn="ctr"/>
-            <a:r>
-              <a:rPr sz="1000" b="0">
-                <a:solidFill>
-                  <a:srgbClr val="1A1A1A"/>
-                </a:solidFill>
-                <a:latin typeface="Georgia"/>
-              </a:rPr>
-              <a:t>flow  = model.decode_queries(</a:t>
-            </a:r>
-          </a:p>
-          <a:p>
-            <a:pPr algn="ctr"/>
-            <a:r>
-              <a:rPr sz="1000" b="0">
-                <a:solidFill>
-                  <a:srgbClr val="1A1A1A"/>
-                </a:solidFill>
-                <a:latin typeface="Georgia"/>
-              </a:rPr>
-              <a:t>            state, query_coords=q)</a:t>
-            </a:r>
-          </a:p>
-          <a:p>
-            <a:pPr algn="ctr"/>
-            <a:r>
-              <a:rPr sz="1000" b="0">
-                <a:solidFill>
-                  <a:srgbClr val="1A1A1A"/>
-                </a:solidFill>
-                <a:latin typeface="Georgia"/>
-              </a:rPr>
-              <a:t>            q: [B, N, 2] -&gt; [B, N, 2], 1.3 ms</a:t>
-            </a:r>
-          </a:p>
-          <a:p>
-            <a:pPr algn="ctr"/>
-            <a:r>
-              <a:rPr sz="1000" b="0">
-                <a:solidFill>
-                  <a:srgbClr val="1A1A1A"/>
-                </a:solidFill>
-                <a:latin typeface="Georgia"/>
-              </a:rPr>
-              <a:t/>
-            </a:r>
-          </a:p>
-          <a:p>
-            <a:pPr algn="ctr"/>
-            <a:r>
-              <a:rPr sz="1000" b="0">
-                <a:solidFill>
-                  <a:srgbClr val="1A1A1A"/>
-                </a:solidFill>
-                <a:latin typeface="Georgia"/>
-              </a:rPr>
-              <a:t>flow, b = ... (return_uncertainty=True)</a:t>
-            </a:r>
-          </a:p>
-        </p:txBody>
-      </p:sp>
-      <p:sp>
-        <p:nvSpPr>
-          <p:cNvPr id="7" name="TextBox 6"/>
-          <p:cNvSpPr txBox="1"/>
-          <p:nvPr/>
-        </p:nvSpPr>
-        <p:spPr>
-          <a:xfrm>
-            <a:off x="7406640" y="3931920"/>
-            <a:ext cx="4206240" cy="1828800"/>
-          </a:xfrm>
-          <a:prstGeom prst="rect">
-            <a:avLst/>
-          </a:prstGeom>
-          <a:noFill/>
-        </p:spPr>
-        <p:txBody>
-          <a:bodyPr wrap="square">
-            <a:spAutoFit/>
-          </a:bodyPr>
-          <a:lstStyle/>
-          <a:p>
-            <a:pPr algn="l">
-              <a:lnSpc>
-                <a:spcPct val="118000"/>
+            <a:off x="685800" y="5440680"/>
+            <a:ext cx="10881360" cy="1005840"/>
+          </a:xfrm>
+          <a:prstGeom prst="rect">
+            <a:avLst/>
+          </a:prstGeom>
+          <a:noFill/>
+        </p:spPr>
+        <p:txBody>
+          <a:bodyPr wrap="square">
+            <a:spAutoFit/>
+          </a:bodyPr>
+          <a:lstStyle/>
+          <a:p>
+            <a:pPr algn="l">
+              <a:lnSpc>
+                <a:spcPct val="115000"/>
               </a:lnSpc>
             </a:pPr>
             <a:r>
@@ -7640,13 +7533,13 @@
                 </a:solidFill>
                 <a:latin typeface="Georgia"/>
               </a:rPr>
-              <a:t>Decode cost is flat from 800 to 2,048</a:t>
-            </a:r>
-          </a:p>
-          <a:p>
-            <a:pPr algn="l">
-              <a:lnSpc>
-                <a:spcPct val="118000"/>
+              <a:t>The third scenario: a frame is already being processed when something new enters the field of view. Because the</a:t>
+            </a:r>
+          </a:p>
+          <a:p>
+            <a:pPr algn="l">
+              <a:lnSpc>
+                <a:spcPct val="115000"/>
               </a:lnSpc>
             </a:pPr>
             <a:r>
@@ -7656,13 +7549,13 @@
                 </a:solidFill>
                 <a:latin typeface="Georgia"/>
               </a:rPr>
-              <a:t>queries, so it is bound by kernel launch</a:t>
-            </a:r>
-          </a:p>
-          <a:p>
-            <a:pPr algn="l">
-              <a:lnSpc>
-                <a:spcPct val="118000"/>
+              <a:t>coarse pass is cached, the decoder answers for 1.7 ms. A cropped pipeline has to run an entire new pass, 7.3 ms,</a:t>
+            </a:r>
+          </a:p>
+          <a:p>
+            <a:pPr algn="l">
+              <a:lnSpc>
+                <a:spcPct val="115000"/>
               </a:lnSpc>
             </a:pPr>
             <a:r>
@@ -7672,13 +7565,13 @@
                 </a:solidFill>
                 <a:latin typeface="Georgia"/>
               </a:rPr>
-              <a:t>overhead rather than compute. You get</a:t>
-            </a:r>
-          </a:p>
-          <a:p>
-            <a:pPr algn="l">
-              <a:lnSpc>
-                <a:spcPct val="118000"/>
+              <a:t>and is markedly less accurate doing it because a fresh crop loses the global context that finds large motion.</a:t>
+            </a:r>
+          </a:p>
+          <a:p>
+            <a:pPr algn="l">
+              <a:lnSpc>
+                <a:spcPct val="115000"/>
               </a:lnSpc>
             </a:pPr>
             <a:r>
@@ -7688,78 +7581,14 @@
                 </a:solidFill>
                 <a:latin typeface="Georgia"/>
               </a:rPr>
-              <a:t>2,048 points for the price of 800.</a:t>
-            </a:r>
-          </a:p>
-          <a:p>
-            <a:pPr algn="l">
-              <a:lnSpc>
-                <a:spcPct val="118000"/>
-              </a:lnSpc>
-            </a:pPr>
-            <a:r>
-              <a:rPr sz="1150" b="0">
-                <a:solidFill>
-                  <a:srgbClr val="1A1A1A"/>
-                </a:solidFill>
-                <a:latin typeface="Georgia"/>
-              </a:rPr>
-              <a:t/>
-            </a:r>
-          </a:p>
-          <a:p>
-            <a:pPr algn="l">
-              <a:lnSpc>
-                <a:spcPct val="118000"/>
-              </a:lnSpc>
-            </a:pPr>
-            <a:r>
-              <a:rPr sz="1150" b="0">
-                <a:solidFill>
-                  <a:srgbClr val="1A1A1A"/>
-                </a:solidFill>
-                <a:latin typeface="Georgia"/>
-              </a:rPr>
-              <a:t>Above roughly 10,000 points the decode</a:t>
-            </a:r>
-          </a:p>
-          <a:p>
-            <a:pPr algn="l">
-              <a:lnSpc>
-                <a:spcPct val="118000"/>
-              </a:lnSpc>
-            </a:pPr>
-            <a:r>
-              <a:rPr sz="1150" b="0">
-                <a:solidFill>
-                  <a:srgbClr val="1A1A1A"/>
-                </a:solidFill>
-                <a:latin typeface="Georgia"/>
-              </a:rPr>
-              <a:t>becomes compute-bound and dense mode</a:t>
-            </a:r>
-          </a:p>
-          <a:p>
-            <a:pPr algn="l">
-              <a:lnSpc>
-                <a:spcPct val="118000"/>
-              </a:lnSpc>
-            </a:pPr>
-            <a:r>
-              <a:rPr sz="1150" b="0">
-                <a:solidFill>
-                  <a:srgbClr val="1A1A1A"/>
-                </a:solidFill>
-                <a:latin typeface="Georgia"/>
-              </a:rPr>
-              <a:t>is the better choice.</a:t>
-            </a:r>
-          </a:p>
-        </p:txBody>
-      </p:sp>
-      <p:sp>
-        <p:nvSpPr>
-          <p:cNvPr id="8" name="TextBox 7"/>
+              <a:t>v2 keeps no state between calls, so it has nothing to answer from.</a:t>
+            </a:r>
+          </a:p>
+        </p:txBody>
+      </p:sp>
+      <p:sp>
+        <p:nvSpPr>
+          <p:cNvPr id="6" name="TextBox 5"/>
           <p:cNvSpPr txBox="1"/>
           <p:nvPr/>
         </p:nvSpPr>
@@ -7798,7 +7627,7 @@
       </p:sp>
       <p:sp>
         <p:nvSpPr>
-          <p:cNvPr id="9" name="TextBox 8"/>
+          <p:cNvPr id="7" name="TextBox 6"/>
           <p:cNvSpPr txBox="1"/>
           <p:nvPr/>
         </p:nvSpPr>
@@ -7934,14 +7763,14 @@
                 </a:solidFill>
                 <a:latin typeface="Georgia"/>
               </a:rPr>
-              <a:t>Working tool: draw a region, get flow there</a:t>
+              <a:t>What a query costs, and how you make one</a:t>
             </a:r>
           </a:p>
         </p:txBody>
       </p:sp>
       <p:pic>
         <p:nvPicPr>
-          <p:cNvPr id="4" name="Picture 3" descr="region_gui_window.png"/>
+          <p:cNvPr id="4" name="Picture 3" descr="decode_flat.png"/>
           <p:cNvPicPr>
             <a:picLocks noChangeAspect="1"/>
           </p:cNvPicPr>
@@ -7956,7 +7785,7 @@
         <p:spPr>
           <a:xfrm>
             <a:off x="731520" y="1508760"/>
-            <a:ext cx="6949440" cy="3716489"/>
+            <a:ext cx="6400800" cy="3231565"/>
           </a:xfrm>
           <a:prstGeom prst="rect">
             <a:avLst/>
@@ -7971,8 +7800,186 @@
         </p:nvSpPr>
         <p:spPr>
           <a:xfrm>
-            <a:off x="7955279" y="1645920"/>
-            <a:ext cx="3657600" cy="4023360"/>
+            <a:off x="7406640" y="1645920"/>
+            <a:ext cx="4206240" cy="365760"/>
+          </a:xfrm>
+          <a:prstGeom prst="rect">
+            <a:avLst/>
+          </a:prstGeom>
+          <a:noFill/>
+        </p:spPr>
+        <p:txBody>
+          <a:bodyPr wrap="square">
+            <a:spAutoFit/>
+          </a:bodyPr>
+          <a:lstStyle/>
+          <a:p>
+            <a:pPr algn="l">
+              <a:lnSpc>
+                <a:spcPct val="100000"/>
+              </a:lnSpc>
+            </a:pPr>
+            <a:r>
+              <a:rPr sz="1200" b="1">
+                <a:solidFill>
+                  <a:srgbClr val="333333"/>
+                </a:solidFill>
+                <a:latin typeface="Georgia"/>
+              </a:rPr>
+              <a:t>The entire API</a:t>
+            </a:r>
+          </a:p>
+        </p:txBody>
+      </p:sp>
+      <p:sp>
+        <p:nvSpPr>
+          <p:cNvPr id="6" name="Rounded Rectangle 5"/>
+          <p:cNvSpPr/>
+          <p:nvPr/>
+        </p:nvSpPr>
+        <p:spPr>
+          <a:xfrm>
+            <a:off x="7406640" y="2011680"/>
+            <a:ext cx="4206240" cy="1737360"/>
+          </a:xfrm>
+          <a:prstGeom prst="roundRect">
+            <a:avLst/>
+          </a:prstGeom>
+          <a:solidFill>
+            <a:srgbClr val="EFEFEF"/>
+          </a:solidFill>
+          <a:ln w="9525">
+            <a:solidFill>
+              <a:srgbClr val="8A8A8A"/>
+            </a:solidFill>
+          </a:ln>
+          <a:effectLst/>
+        </p:spPr>
+        <p:style>
+          <a:lnRef idx="1">
+            <a:schemeClr val="accent1"/>
+          </a:lnRef>
+          <a:fillRef idx="3">
+            <a:schemeClr val="accent1"/>
+          </a:fillRef>
+          <a:effectRef idx="2">
+            <a:schemeClr val="accent1"/>
+          </a:effectRef>
+          <a:fontRef idx="minor">
+            <a:schemeClr val="lt1"/>
+          </a:fontRef>
+        </p:style>
+        <p:txBody>
+          <a:bodyPr rtlCol="0" anchor="ctr" wrap="square" lIns="73152" rIns="73152"/>
+          <a:lstStyle/>
+          <a:p>
+            <a:pPr algn="ctr"/>
+            <a:r>
+              <a:rPr sz="1000" b="0">
+                <a:solidFill>
+                  <a:srgbClr val="1A1A1A"/>
+                </a:solidFill>
+                <a:latin typeface="Georgia"/>
+              </a:rPr>
+              <a:t>state = model.infer_coarse_state(img0, img1)</a:t>
+            </a:r>
+          </a:p>
+          <a:p>
+            <a:pPr algn="ctr"/>
+            <a:r>
+              <a:rPr sz="1000" b="0">
+                <a:solidFill>
+                  <a:srgbClr val="1A1A1A"/>
+                </a:solidFill>
+                <a:latin typeface="Georgia"/>
+              </a:rPr>
+              <a:t>                                  once, 33 ms</a:t>
+            </a:r>
+          </a:p>
+          <a:p>
+            <a:pPr algn="ctr"/>
+            <a:r>
+              <a:rPr sz="1000" b="0">
+                <a:solidFill>
+                  <a:srgbClr val="1A1A1A"/>
+                </a:solidFill>
+                <a:latin typeface="Georgia"/>
+              </a:rPr>
+              <a:t/>
+            </a:r>
+          </a:p>
+          <a:p>
+            <a:pPr algn="ctr"/>
+            <a:r>
+              <a:rPr sz="1000" b="0">
+                <a:solidFill>
+                  <a:srgbClr val="1A1A1A"/>
+                </a:solidFill>
+                <a:latin typeface="Georgia"/>
+              </a:rPr>
+              <a:t>flow  = model.decode_queries(</a:t>
+            </a:r>
+          </a:p>
+          <a:p>
+            <a:pPr algn="ctr"/>
+            <a:r>
+              <a:rPr sz="1000" b="0">
+                <a:solidFill>
+                  <a:srgbClr val="1A1A1A"/>
+                </a:solidFill>
+                <a:latin typeface="Georgia"/>
+              </a:rPr>
+              <a:t>            state, query_coords=q)</a:t>
+            </a:r>
+          </a:p>
+          <a:p>
+            <a:pPr algn="ctr"/>
+            <a:r>
+              <a:rPr sz="1000" b="0">
+                <a:solidFill>
+                  <a:srgbClr val="1A1A1A"/>
+                </a:solidFill>
+                <a:latin typeface="Georgia"/>
+              </a:rPr>
+              <a:t>            q: [B, N, 2] -&gt; [B, N, 2], 1.3 ms</a:t>
+            </a:r>
+          </a:p>
+          <a:p>
+            <a:pPr algn="ctr"/>
+            <a:r>
+              <a:rPr sz="1000" b="0">
+                <a:solidFill>
+                  <a:srgbClr val="1A1A1A"/>
+                </a:solidFill>
+                <a:latin typeface="Georgia"/>
+              </a:rPr>
+              <a:t/>
+            </a:r>
+          </a:p>
+          <a:p>
+            <a:pPr algn="ctr"/>
+            <a:r>
+              <a:rPr sz="1000" b="0">
+                <a:solidFill>
+                  <a:srgbClr val="1A1A1A"/>
+                </a:solidFill>
+                <a:latin typeface="Georgia"/>
+              </a:rPr>
+              <a:t>flow, b = ... (return_uncertainty=True)</a:t>
+            </a:r>
+          </a:p>
+        </p:txBody>
+      </p:sp>
+      <p:sp>
+        <p:nvSpPr>
+          <p:cNvPr id="7" name="TextBox 6"/>
+          <p:cNvSpPr txBox="1"/>
+          <p:nvPr/>
+        </p:nvSpPr>
+        <p:spPr>
+          <a:xfrm>
+            <a:off x="7406640" y="3931920"/>
+            <a:ext cx="4206240" cy="1828800"/>
           </a:xfrm>
           <a:prstGeom prst="rect">
             <a:avLst/>
@@ -7997,7 +8004,7 @@
                 </a:solidFill>
                 <a:latin typeface="Georgia"/>
               </a:rPr>
-              <a:t>Load a video, step frame by frame,</a:t>
+              <a:t>Decode cost is flat from 800 to 2,048</a:t>
             </a:r>
           </a:p>
           <a:p>
@@ -8013,7 +8020,7 @@
                 </a:solidFill>
                 <a:latin typeface="Georgia"/>
               </a:rPr>
-              <a:t>drag a box, get flow for that region.</a:t>
+              <a:t>queries, so it is bound by kernel launch</a:t>
             </a:r>
           </a:p>
           <a:p>
@@ -8029,6 +8036,38 @@
                 </a:solidFill>
                 <a:latin typeface="Georgia"/>
               </a:rPr>
+              <a:t>overhead rather than compute. You get</a:t>
+            </a:r>
+          </a:p>
+          <a:p>
+            <a:pPr algn="l">
+              <a:lnSpc>
+                <a:spcPct val="118000"/>
+              </a:lnSpc>
+            </a:pPr>
+            <a:r>
+              <a:rPr sz="1150" b="0">
+                <a:solidFill>
+                  <a:srgbClr val="1A1A1A"/>
+                </a:solidFill>
+                <a:latin typeface="Georgia"/>
+              </a:rPr>
+              <a:t>2,048 points for the price of 800.</a:t>
+            </a:r>
+          </a:p>
+          <a:p>
+            <a:pPr algn="l">
+              <a:lnSpc>
+                <a:spcPct val="118000"/>
+              </a:lnSpc>
+            </a:pPr>
+            <a:r>
+              <a:rPr sz="1150" b="0">
+                <a:solidFill>
+                  <a:srgbClr val="1A1A1A"/>
+                </a:solidFill>
+                <a:latin typeface="Georgia"/>
+              </a:rPr>
               <a:t/>
             </a:r>
           </a:p>
@@ -8045,7 +8084,7 @@
                 </a:solidFill>
                 <a:latin typeface="Georgia"/>
               </a:rPr>
-              <a:t>Two modes, both timed live:</a:t>
+              <a:t>Above roughly 10,000 points the decode</a:t>
             </a:r>
           </a:p>
           <a:p>
@@ -8061,7 +8100,7 @@
                 </a:solidFill>
                 <a:latin typeface="Georgia"/>
               </a:rPr>
-              <a:t/>
+              <a:t>becomes compute-bound and dense mode</a:t>
             </a:r>
           </a:p>
           <a:p>
@@ -8077,158 +8116,14 @@
                 </a:solidFill>
                 <a:latin typeface="Georgia"/>
               </a:rPr>
-              <a:t>QUERY decodes only inside the box</a:t>
-            </a:r>
-          </a:p>
-          <a:p>
-            <a:pPr algn="l">
-              <a:lnSpc>
-                <a:spcPct val="118000"/>
-              </a:lnSpc>
-            </a:pPr>
-            <a:r>
-              <a:rPr sz="1150" b="0">
-                <a:solidFill>
-                  <a:srgbClr val="1A1A1A"/>
-                </a:solidFill>
-                <a:latin typeface="Georgia"/>
-              </a:rPr>
-              <a:t>against a full-frame coarse pass. Exact.</a:t>
-            </a:r>
-          </a:p>
-          <a:p>
-            <a:pPr algn="l">
-              <a:lnSpc>
-                <a:spcPct val="118000"/>
-              </a:lnSpc>
-            </a:pPr>
-            <a:r>
-              <a:rPr sz="1150" b="0">
-                <a:solidFill>
-                  <a:srgbClr val="1A1A1A"/>
-                </a:solidFill>
-                <a:latin typeface="Georgia"/>
-              </a:rPr>
-              <a:t/>
-            </a:r>
-          </a:p>
-          <a:p>
-            <a:pPr algn="l">
-              <a:lnSpc>
-                <a:spcPct val="118000"/>
-              </a:lnSpc>
-            </a:pPr>
-            <a:r>
-              <a:rPr sz="1150" b="0">
-                <a:solidFill>
-                  <a:srgbClr val="1A1A1A"/>
-                </a:solidFill>
-                <a:latin typeface="Georgia"/>
-              </a:rPr>
-              <a:t>CROP feeds only the box through the</a:t>
-            </a:r>
-          </a:p>
-          <a:p>
-            <a:pPr algn="l">
-              <a:lnSpc>
-                <a:spcPct val="118000"/>
-              </a:lnSpc>
-            </a:pPr>
-            <a:r>
-              <a:rPr sz="1150" b="0">
-                <a:solidFill>
-                  <a:srgbClr val="1A1A1A"/>
-                </a:solidFill>
-                <a:latin typeface="Georgia"/>
-              </a:rPr>
-              <a:t>whole pipeline, so cost scales with the</a:t>
-            </a:r>
-          </a:p>
-          <a:p>
-            <a:pPr algn="l">
-              <a:lnSpc>
-                <a:spcPct val="118000"/>
-              </a:lnSpc>
-            </a:pPr>
-            <a:r>
-              <a:rPr sz="1150" b="0">
-                <a:solidFill>
-                  <a:srgbClr val="1A1A1A"/>
-                </a:solidFill>
-                <a:latin typeface="Georgia"/>
-              </a:rPr>
-              <a:t>area requested, at the price of losing</a:t>
-            </a:r>
-          </a:p>
-          <a:p>
-            <a:pPr algn="l">
-              <a:lnSpc>
-                <a:spcPct val="118000"/>
-              </a:lnSpc>
-            </a:pPr>
-            <a:r>
-              <a:rPr sz="1150" b="0">
-                <a:solidFill>
-                  <a:srgbClr val="1A1A1A"/>
-                </a:solidFill>
-                <a:latin typeface="Georgia"/>
-              </a:rPr>
-              <a:t>context outside the crop.</a:t>
-            </a:r>
-          </a:p>
-          <a:p>
-            <a:pPr algn="l">
-              <a:lnSpc>
-                <a:spcPct val="118000"/>
-              </a:lnSpc>
-            </a:pPr>
-            <a:r>
-              <a:rPr sz="1150" b="0">
-                <a:solidFill>
-                  <a:srgbClr val="1A1A1A"/>
-                </a:solidFill>
-                <a:latin typeface="Georgia"/>
-              </a:rPr>
-              <a:t/>
-            </a:r>
-          </a:p>
-          <a:p>
-            <a:pPr algn="l">
-              <a:lnSpc>
-                <a:spcPct val="118000"/>
-              </a:lnSpc>
-            </a:pPr>
-            <a:r>
-              <a:rPr sz="1150" b="0">
-                <a:solidFill>
-                  <a:srgbClr val="1A1A1A"/>
-                </a:solidFill>
-                <a:latin typeface="Georgia"/>
-              </a:rPr>
-              <a:t>The panel shows where the time goes</a:t>
-            </a:r>
-          </a:p>
-          <a:p>
-            <a:pPr algn="l">
-              <a:lnSpc>
-                <a:spcPct val="118000"/>
-              </a:lnSpc>
-            </a:pPr>
-            <a:r>
-              <a:rPr sz="1150" b="0">
-                <a:solidFill>
-                  <a:srgbClr val="1A1A1A"/>
-                </a:solidFill>
-                <a:latin typeface="Georgia"/>
-              </a:rPr>
-              <a:t>rather than asserting a speed-up.</a:t>
-            </a:r>
-          </a:p>
-        </p:txBody>
-      </p:sp>
-      <p:sp>
-        <p:nvSpPr>
-          <p:cNvPr id="6" name="TextBox 5"/>
+              <a:t>is the better choice.</a:t>
+            </a:r>
+          </a:p>
+        </p:txBody>
+      </p:sp>
+      <p:sp>
+        <p:nvSpPr>
+          <p:cNvPr id="8" name="TextBox 7"/>
           <p:cNvSpPr txBox="1"/>
           <p:nvPr/>
         </p:nvSpPr>
@@ -8267,7 +8162,7 @@
       </p:sp>
       <p:sp>
         <p:nvSpPr>
-          <p:cNvPr id="7" name="TextBox 6"/>
+          <p:cNvPr id="9" name="TextBox 8"/>
           <p:cNvSpPr txBox="1"/>
           <p:nvPr/>
         </p:nvSpPr>
@@ -8364,7 +8259,7 @@
                 </a:solidFill>
                 <a:latin typeface="Georgia"/>
               </a:rPr>
-              <a:t>ASSESSMENT</a:t>
+              <a:t>INTERFACE</a:t>
             </a:r>
           </a:p>
         </p:txBody>
@@ -8403,50 +8298,35 @@
                 </a:solidFill>
                 <a:latin typeface="Georgia"/>
               </a:rPr>
-              <a:t>Against the three objectives I set</a:t>
-            </a:r>
-          </a:p>
-        </p:txBody>
-      </p:sp>
-      <p:sp>
-        <p:nvSpPr>
-          <p:cNvPr id="4" name="TextBox 3"/>
-          <p:cNvSpPr txBox="1"/>
-          <p:nvPr/>
-        </p:nvSpPr>
-        <p:spPr>
-          <a:xfrm>
-            <a:off x="685800" y="1691640"/>
-            <a:ext cx="3291840" cy="237744"/>
-          </a:xfrm>
-          <a:prstGeom prst="rect">
-            <a:avLst/>
-          </a:prstGeom>
-          <a:noFill/>
-        </p:spPr>
-        <p:txBody>
-          <a:bodyPr wrap="square">
-            <a:spAutoFit/>
-          </a:bodyPr>
-          <a:lstStyle/>
-          <a:p>
-            <a:pPr algn="l">
-              <a:lnSpc>
-                <a:spcPct val="100000"/>
-              </a:lnSpc>
-            </a:pPr>
-            <a:r>
-              <a:rPr sz="1150" b="1">
-                <a:solidFill>
-                  <a:srgbClr val="1A1A1A"/>
-                </a:solidFill>
-                <a:latin typeface="Georgia"/>
-              </a:rPr>
-              <a:t>Objective</a:t>
-            </a:r>
-          </a:p>
-        </p:txBody>
-      </p:sp>
+              <a:t>Working tool: draw a region, get flow there</a:t>
+            </a:r>
+          </a:p>
+        </p:txBody>
+      </p:sp>
+      <p:pic>
+        <p:nvPicPr>
+          <p:cNvPr id="4" name="Picture 3" descr="region_gui_window.png"/>
+          <p:cNvPicPr>
+            <a:picLocks noChangeAspect="1"/>
+          </p:cNvPicPr>
+          <p:nvPr/>
+        </p:nvPicPr>
+        <p:blipFill>
+          <a:blip r:embed="rId2"/>
+          <a:stretch>
+            <a:fillRect/>
+          </a:stretch>
+        </p:blipFill>
+        <p:spPr>
+          <a:xfrm>
+            <a:off x="731520" y="1508760"/>
+            <a:ext cx="6949440" cy="3716489"/>
+          </a:xfrm>
+          <a:prstGeom prst="rect">
+            <a:avLst/>
+          </a:prstGeom>
+        </p:spPr>
+      </p:pic>
       <p:sp>
         <p:nvSpPr>
           <p:cNvPr id="5" name="TextBox 4"/>
@@ -8455,33 +8335,257 @@
         </p:nvSpPr>
         <p:spPr>
           <a:xfrm>
-            <a:off x="3977639" y="1691640"/>
-            <a:ext cx="1737360" cy="237744"/>
-          </a:xfrm>
-          <a:prstGeom prst="rect">
-            <a:avLst/>
-          </a:prstGeom>
-          <a:noFill/>
-        </p:spPr>
-        <p:txBody>
-          <a:bodyPr wrap="square">
-            <a:spAutoFit/>
-          </a:bodyPr>
-          <a:lstStyle/>
-          <a:p>
-            <a:pPr algn="r">
-              <a:lnSpc>
-                <a:spcPct val="100000"/>
-              </a:lnSpc>
-            </a:pPr>
-            <a:r>
-              <a:rPr sz="1150" b="1">
-                <a:solidFill>
-                  <a:srgbClr val="1A1A1A"/>
-                </a:solidFill>
-                <a:latin typeface="Georgia"/>
-              </a:rPr>
-              <a:t>Verdict</a:t>
+            <a:off x="7955279" y="1645920"/>
+            <a:ext cx="3657600" cy="4023360"/>
+          </a:xfrm>
+          <a:prstGeom prst="rect">
+            <a:avLst/>
+          </a:prstGeom>
+          <a:noFill/>
+        </p:spPr>
+        <p:txBody>
+          <a:bodyPr wrap="square">
+            <a:spAutoFit/>
+          </a:bodyPr>
+          <a:lstStyle/>
+          <a:p>
+            <a:pPr algn="l">
+              <a:lnSpc>
+                <a:spcPct val="118000"/>
+              </a:lnSpc>
+            </a:pPr>
+            <a:r>
+              <a:rPr sz="1150" b="0">
+                <a:solidFill>
+                  <a:srgbClr val="1A1A1A"/>
+                </a:solidFill>
+                <a:latin typeface="Georgia"/>
+              </a:rPr>
+              <a:t>Load a video, step frame by frame,</a:t>
+            </a:r>
+          </a:p>
+          <a:p>
+            <a:pPr algn="l">
+              <a:lnSpc>
+                <a:spcPct val="118000"/>
+              </a:lnSpc>
+            </a:pPr>
+            <a:r>
+              <a:rPr sz="1150" b="0">
+                <a:solidFill>
+                  <a:srgbClr val="1A1A1A"/>
+                </a:solidFill>
+                <a:latin typeface="Georgia"/>
+              </a:rPr>
+              <a:t>drag a box, get flow for that region.</a:t>
+            </a:r>
+          </a:p>
+          <a:p>
+            <a:pPr algn="l">
+              <a:lnSpc>
+                <a:spcPct val="118000"/>
+              </a:lnSpc>
+            </a:pPr>
+            <a:r>
+              <a:rPr sz="1150" b="0">
+                <a:solidFill>
+                  <a:srgbClr val="1A1A1A"/>
+                </a:solidFill>
+                <a:latin typeface="Georgia"/>
+              </a:rPr>
+              <a:t/>
+            </a:r>
+          </a:p>
+          <a:p>
+            <a:pPr algn="l">
+              <a:lnSpc>
+                <a:spcPct val="118000"/>
+              </a:lnSpc>
+            </a:pPr>
+            <a:r>
+              <a:rPr sz="1150" b="0">
+                <a:solidFill>
+                  <a:srgbClr val="1A1A1A"/>
+                </a:solidFill>
+                <a:latin typeface="Georgia"/>
+              </a:rPr>
+              <a:t>Two modes, both timed live:</a:t>
+            </a:r>
+          </a:p>
+          <a:p>
+            <a:pPr algn="l">
+              <a:lnSpc>
+                <a:spcPct val="118000"/>
+              </a:lnSpc>
+            </a:pPr>
+            <a:r>
+              <a:rPr sz="1150" b="0">
+                <a:solidFill>
+                  <a:srgbClr val="1A1A1A"/>
+                </a:solidFill>
+                <a:latin typeface="Georgia"/>
+              </a:rPr>
+              <a:t/>
+            </a:r>
+          </a:p>
+          <a:p>
+            <a:pPr algn="l">
+              <a:lnSpc>
+                <a:spcPct val="118000"/>
+              </a:lnSpc>
+            </a:pPr>
+            <a:r>
+              <a:rPr sz="1150" b="0">
+                <a:solidFill>
+                  <a:srgbClr val="1A1A1A"/>
+                </a:solidFill>
+                <a:latin typeface="Georgia"/>
+              </a:rPr>
+              <a:t>QUERY decodes only inside the box</a:t>
+            </a:r>
+          </a:p>
+          <a:p>
+            <a:pPr algn="l">
+              <a:lnSpc>
+                <a:spcPct val="118000"/>
+              </a:lnSpc>
+            </a:pPr>
+            <a:r>
+              <a:rPr sz="1150" b="0">
+                <a:solidFill>
+                  <a:srgbClr val="1A1A1A"/>
+                </a:solidFill>
+                <a:latin typeface="Georgia"/>
+              </a:rPr>
+              <a:t>against a full-frame coarse pass. Exact.</a:t>
+            </a:r>
+          </a:p>
+          <a:p>
+            <a:pPr algn="l">
+              <a:lnSpc>
+                <a:spcPct val="118000"/>
+              </a:lnSpc>
+            </a:pPr>
+            <a:r>
+              <a:rPr sz="1150" b="0">
+                <a:solidFill>
+                  <a:srgbClr val="1A1A1A"/>
+                </a:solidFill>
+                <a:latin typeface="Georgia"/>
+              </a:rPr>
+              <a:t/>
+            </a:r>
+          </a:p>
+          <a:p>
+            <a:pPr algn="l">
+              <a:lnSpc>
+                <a:spcPct val="118000"/>
+              </a:lnSpc>
+            </a:pPr>
+            <a:r>
+              <a:rPr sz="1150" b="0">
+                <a:solidFill>
+                  <a:srgbClr val="1A1A1A"/>
+                </a:solidFill>
+                <a:latin typeface="Georgia"/>
+              </a:rPr>
+              <a:t>CROP feeds only the box through the</a:t>
+            </a:r>
+          </a:p>
+          <a:p>
+            <a:pPr algn="l">
+              <a:lnSpc>
+                <a:spcPct val="118000"/>
+              </a:lnSpc>
+            </a:pPr>
+            <a:r>
+              <a:rPr sz="1150" b="0">
+                <a:solidFill>
+                  <a:srgbClr val="1A1A1A"/>
+                </a:solidFill>
+                <a:latin typeface="Georgia"/>
+              </a:rPr>
+              <a:t>whole pipeline, so cost scales with the</a:t>
+            </a:r>
+          </a:p>
+          <a:p>
+            <a:pPr algn="l">
+              <a:lnSpc>
+                <a:spcPct val="118000"/>
+              </a:lnSpc>
+            </a:pPr>
+            <a:r>
+              <a:rPr sz="1150" b="0">
+                <a:solidFill>
+                  <a:srgbClr val="1A1A1A"/>
+                </a:solidFill>
+                <a:latin typeface="Georgia"/>
+              </a:rPr>
+              <a:t>area requested, at the price of losing</a:t>
+            </a:r>
+          </a:p>
+          <a:p>
+            <a:pPr algn="l">
+              <a:lnSpc>
+                <a:spcPct val="118000"/>
+              </a:lnSpc>
+            </a:pPr>
+            <a:r>
+              <a:rPr sz="1150" b="0">
+                <a:solidFill>
+                  <a:srgbClr val="1A1A1A"/>
+                </a:solidFill>
+                <a:latin typeface="Georgia"/>
+              </a:rPr>
+              <a:t>context outside the crop.</a:t>
+            </a:r>
+          </a:p>
+          <a:p>
+            <a:pPr algn="l">
+              <a:lnSpc>
+                <a:spcPct val="118000"/>
+              </a:lnSpc>
+            </a:pPr>
+            <a:r>
+              <a:rPr sz="1150" b="0">
+                <a:solidFill>
+                  <a:srgbClr val="1A1A1A"/>
+                </a:solidFill>
+                <a:latin typeface="Georgia"/>
+              </a:rPr>
+              <a:t/>
+            </a:r>
+          </a:p>
+          <a:p>
+            <a:pPr algn="l">
+              <a:lnSpc>
+                <a:spcPct val="118000"/>
+              </a:lnSpc>
+            </a:pPr>
+            <a:r>
+              <a:rPr sz="1150" b="0">
+                <a:solidFill>
+                  <a:srgbClr val="1A1A1A"/>
+                </a:solidFill>
+                <a:latin typeface="Georgia"/>
+              </a:rPr>
+              <a:t>The panel shows where the time goes</a:t>
+            </a:r>
+          </a:p>
+          <a:p>
+            <a:pPr algn="l">
+              <a:lnSpc>
+                <a:spcPct val="118000"/>
+              </a:lnSpc>
+            </a:pPr>
+            <a:r>
+              <a:rPr sz="1150" b="0">
+                <a:solidFill>
+                  <a:srgbClr val="1A1A1A"/>
+                </a:solidFill>
+                <a:latin typeface="Georgia"/>
+              </a:rPr>
+              <a:t>rather than asserting a speed-up.</a:t>
             </a:r>
           </a:p>
         </p:txBody>
@@ -8489,1301 +8593,6 @@
       <p:sp>
         <p:nvSpPr>
           <p:cNvPr id="6" name="TextBox 5"/>
-          <p:cNvSpPr txBox="1"/>
-          <p:nvPr/>
-        </p:nvSpPr>
-        <p:spPr>
-          <a:xfrm>
-            <a:off x="5715000" y="1691640"/>
-            <a:ext cx="5852160" cy="237744"/>
-          </a:xfrm>
-          <a:prstGeom prst="rect">
-            <a:avLst/>
-          </a:prstGeom>
-          <a:noFill/>
-        </p:spPr>
-        <p:txBody>
-          <a:bodyPr wrap="square">
-            <a:spAutoFit/>
-          </a:bodyPr>
-          <a:lstStyle/>
-          <a:p>
-            <a:pPr algn="r">
-              <a:lnSpc>
-                <a:spcPct val="100000"/>
-              </a:lnSpc>
-            </a:pPr>
-            <a:r>
-              <a:rPr sz="1150" b="1">
-                <a:solidFill>
-                  <a:srgbClr val="1A1A1A"/>
-                </a:solidFill>
-                <a:latin typeface="Georgia"/>
-              </a:rPr>
-              <a:t>Evidence</a:t>
-            </a:r>
-          </a:p>
-        </p:txBody>
-      </p:sp>
-      <p:sp>
-        <p:nvSpPr>
-          <p:cNvPr id="7" name="Rectangle 6"/>
-          <p:cNvSpPr/>
-          <p:nvPr/>
-        </p:nvSpPr>
-        <p:spPr>
-          <a:xfrm>
-            <a:off x="685800" y="1929384"/>
-            <a:ext cx="10881360" cy="9525"/>
-          </a:xfrm>
-          <a:prstGeom prst="rect">
-            <a:avLst/>
-          </a:prstGeom>
-          <a:solidFill>
-            <a:srgbClr val="8A8A8A"/>
-          </a:solidFill>
-          <a:ln>
-            <a:noFill/>
-          </a:ln>
-          <a:effectLst/>
-        </p:spPr>
-        <p:style>
-          <a:lnRef idx="1">
-            <a:schemeClr val="accent1"/>
-          </a:lnRef>
-          <a:fillRef idx="3">
-            <a:schemeClr val="accent1"/>
-          </a:fillRef>
-          <a:effectRef idx="2">
-            <a:schemeClr val="accent1"/>
-          </a:effectRef>
-          <a:fontRef idx="minor">
-            <a:schemeClr val="lt1"/>
-          </a:fontRef>
-        </p:style>
-        <p:txBody>
-          <a:bodyPr rtlCol="0" anchor="ctr"/>
-          <a:lstStyle/>
-          <a:p>
-            <a:pPr algn="ctr"/>
-          </a:p>
-        </p:txBody>
-      </p:sp>
-      <p:sp>
-        <p:nvSpPr>
-          <p:cNvPr id="8" name="TextBox 7"/>
-          <p:cNvSpPr txBox="1"/>
-          <p:nvPr/>
-        </p:nvSpPr>
-        <p:spPr>
-          <a:xfrm>
-            <a:off x="685800" y="1965960"/>
-            <a:ext cx="3291840" cy="237744"/>
-          </a:xfrm>
-          <a:prstGeom prst="rect">
-            <a:avLst/>
-          </a:prstGeom>
-          <a:noFill/>
-        </p:spPr>
-        <p:txBody>
-          <a:bodyPr wrap="square">
-            <a:spAutoFit/>
-          </a:bodyPr>
-          <a:lstStyle/>
-          <a:p>
-            <a:pPr algn="l">
-              <a:lnSpc>
-                <a:spcPct val="100000"/>
-              </a:lnSpc>
-            </a:pPr>
-            <a:r>
-              <a:rPr sz="1150" b="0">
-                <a:solidFill>
-                  <a:srgbClr val="1A1A1A"/>
-                </a:solidFill>
-                <a:latin typeface="Georgia"/>
-              </a:rPr>
-              <a:t>Better accuracy than v2</a:t>
-            </a:r>
-          </a:p>
-        </p:txBody>
-      </p:sp>
-      <p:sp>
-        <p:nvSpPr>
-          <p:cNvPr id="9" name="TextBox 8"/>
-          <p:cNvSpPr txBox="1"/>
-          <p:nvPr/>
-        </p:nvSpPr>
-        <p:spPr>
-          <a:xfrm>
-            <a:off x="3977639" y="1965960"/>
-            <a:ext cx="1737360" cy="237744"/>
-          </a:xfrm>
-          <a:prstGeom prst="rect">
-            <a:avLst/>
-          </a:prstGeom>
-          <a:noFill/>
-        </p:spPr>
-        <p:txBody>
-          <a:bodyPr wrap="square">
-            <a:spAutoFit/>
-          </a:bodyPr>
-          <a:lstStyle/>
-          <a:p>
-            <a:pPr algn="r">
-              <a:lnSpc>
-                <a:spcPct val="100000"/>
-              </a:lnSpc>
-            </a:pPr>
-            <a:r>
-              <a:rPr sz="1150" b="0">
-                <a:solidFill>
-                  <a:srgbClr val="1A1A1A"/>
-                </a:solidFill>
-                <a:latin typeface="Georgia"/>
-              </a:rPr>
-              <a:t>NOT MET</a:t>
-            </a:r>
-          </a:p>
-        </p:txBody>
-      </p:sp>
-      <p:sp>
-        <p:nvSpPr>
-          <p:cNvPr id="10" name="TextBox 9"/>
-          <p:cNvSpPr txBox="1"/>
-          <p:nvPr/>
-        </p:nvSpPr>
-        <p:spPr>
-          <a:xfrm>
-            <a:off x="5715000" y="1965960"/>
-            <a:ext cx="5852160" cy="237744"/>
-          </a:xfrm>
-          <a:prstGeom prst="rect">
-            <a:avLst/>
-          </a:prstGeom>
-          <a:noFill/>
-        </p:spPr>
-        <p:txBody>
-          <a:bodyPr wrap="square">
-            <a:spAutoFit/>
-          </a:bodyPr>
-          <a:lstStyle/>
-          <a:p>
-            <a:pPr algn="r">
-              <a:lnSpc>
-                <a:spcPct val="100000"/>
-              </a:lnSpc>
-            </a:pPr>
-            <a:r>
-              <a:rPr sz="1150" b="0">
-                <a:solidFill>
-                  <a:srgbClr val="1A1A1A"/>
-                </a:solidFill>
-                <a:latin typeface="Georgia"/>
-              </a:rPr>
-              <a:t>best v3 2.384 vs 2.324; every config above v2</a:t>
-            </a:r>
-          </a:p>
-        </p:txBody>
-      </p:sp>
-      <p:sp>
-        <p:nvSpPr>
-          <p:cNvPr id="11" name="TextBox 10"/>
-          <p:cNvSpPr txBox="1"/>
-          <p:nvPr/>
-        </p:nvSpPr>
-        <p:spPr>
-          <a:xfrm>
-            <a:off x="685800" y="2240279"/>
-            <a:ext cx="3291840" cy="237744"/>
-          </a:xfrm>
-          <a:prstGeom prst="rect">
-            <a:avLst/>
-          </a:prstGeom>
-          <a:noFill/>
-        </p:spPr>
-        <p:txBody>
-          <a:bodyPr wrap="square">
-            <a:spAutoFit/>
-          </a:bodyPr>
-          <a:lstStyle/>
-          <a:p>
-            <a:pPr algn="l">
-              <a:lnSpc>
-                <a:spcPct val="100000"/>
-              </a:lnSpc>
-            </a:pPr>
-            <a:r>
-              <a:rPr sz="1150" b="0">
-                <a:solidFill>
-                  <a:srgbClr val="1A1A1A"/>
-                </a:solidFill>
-                <a:latin typeface="Georgia"/>
-              </a:rPr>
-              <a:t/>
-            </a:r>
-          </a:p>
-        </p:txBody>
-      </p:sp>
-      <p:sp>
-        <p:nvSpPr>
-          <p:cNvPr id="12" name="TextBox 11"/>
-          <p:cNvSpPr txBox="1"/>
-          <p:nvPr/>
-        </p:nvSpPr>
-        <p:spPr>
-          <a:xfrm>
-            <a:off x="3977639" y="2240279"/>
-            <a:ext cx="1737360" cy="237744"/>
-          </a:xfrm>
-          <a:prstGeom prst="rect">
-            <a:avLst/>
-          </a:prstGeom>
-          <a:noFill/>
-        </p:spPr>
-        <p:txBody>
-          <a:bodyPr wrap="square">
-            <a:spAutoFit/>
-          </a:bodyPr>
-          <a:lstStyle/>
-          <a:p>
-            <a:pPr algn="r">
-              <a:lnSpc>
-                <a:spcPct val="100000"/>
-              </a:lnSpc>
-            </a:pPr>
-            <a:r>
-              <a:rPr sz="1150" b="0">
-                <a:solidFill>
-                  <a:srgbClr val="1A1A1A"/>
-                </a:solidFill>
-                <a:latin typeface="Georgia"/>
-              </a:rPr>
-              <a:t/>
-            </a:r>
-          </a:p>
-        </p:txBody>
-      </p:sp>
-      <p:sp>
-        <p:nvSpPr>
-          <p:cNvPr id="13" name="TextBox 12"/>
-          <p:cNvSpPr txBox="1"/>
-          <p:nvPr/>
-        </p:nvSpPr>
-        <p:spPr>
-          <a:xfrm>
-            <a:off x="5715000" y="2240279"/>
-            <a:ext cx="5852160" cy="237744"/>
-          </a:xfrm>
-          <a:prstGeom prst="rect">
-            <a:avLst/>
-          </a:prstGeom>
-          <a:noFill/>
-        </p:spPr>
-        <p:txBody>
-          <a:bodyPr wrap="square">
-            <a:spAutoFit/>
-          </a:bodyPr>
-          <a:lstStyle/>
-          <a:p>
-            <a:pPr algn="r">
-              <a:lnSpc>
-                <a:spcPct val="100000"/>
-              </a:lnSpc>
-            </a:pPr>
-            <a:r>
-              <a:rPr sz="1150" b="0">
-                <a:solidFill>
-                  <a:srgbClr val="1A1A1A"/>
-                </a:solidFill>
-                <a:latin typeface="Georgia"/>
-              </a:rPr>
-              <a:t>like-for-like 2.500, i.e. 7.6% behind</a:t>
-            </a:r>
-          </a:p>
-        </p:txBody>
-      </p:sp>
-      <p:sp>
-        <p:nvSpPr>
-          <p:cNvPr id="14" name="TextBox 13"/>
-          <p:cNvSpPr txBox="1"/>
-          <p:nvPr/>
-        </p:nvSpPr>
-        <p:spPr>
-          <a:xfrm>
-            <a:off x="685800" y="2514599"/>
-            <a:ext cx="3291840" cy="237744"/>
-          </a:xfrm>
-          <a:prstGeom prst="rect">
-            <a:avLst/>
-          </a:prstGeom>
-          <a:noFill/>
-        </p:spPr>
-        <p:txBody>
-          <a:bodyPr wrap="square">
-            <a:spAutoFit/>
-          </a:bodyPr>
-          <a:lstStyle/>
-          <a:p>
-            <a:pPr algn="l">
-              <a:lnSpc>
-                <a:spcPct val="100000"/>
-              </a:lnSpc>
-            </a:pPr>
-            <a:r>
-              <a:rPr sz="1150" b="0">
-                <a:solidFill>
-                  <a:srgbClr val="1A1A1A"/>
-                </a:solidFill>
-                <a:latin typeface="Georgia"/>
-              </a:rPr>
-              <a:t/>
-            </a:r>
-          </a:p>
-        </p:txBody>
-      </p:sp>
-      <p:sp>
-        <p:nvSpPr>
-          <p:cNvPr id="15" name="TextBox 14"/>
-          <p:cNvSpPr txBox="1"/>
-          <p:nvPr/>
-        </p:nvSpPr>
-        <p:spPr>
-          <a:xfrm>
-            <a:off x="3977639" y="2514599"/>
-            <a:ext cx="1737360" cy="237744"/>
-          </a:xfrm>
-          <a:prstGeom prst="rect">
-            <a:avLst/>
-          </a:prstGeom>
-          <a:noFill/>
-        </p:spPr>
-        <p:txBody>
-          <a:bodyPr wrap="square">
-            <a:spAutoFit/>
-          </a:bodyPr>
-          <a:lstStyle/>
-          <a:p>
-            <a:pPr algn="r">
-              <a:lnSpc>
-                <a:spcPct val="100000"/>
-              </a:lnSpc>
-            </a:pPr>
-            <a:r>
-              <a:rPr sz="1150" b="0">
-                <a:solidFill>
-                  <a:srgbClr val="1A1A1A"/>
-                </a:solidFill>
-                <a:latin typeface="Georgia"/>
-              </a:rPr>
-              <a:t/>
-            </a:r>
-          </a:p>
-        </p:txBody>
-      </p:sp>
-      <p:sp>
-        <p:nvSpPr>
-          <p:cNvPr id="16" name="TextBox 15"/>
-          <p:cNvSpPr txBox="1"/>
-          <p:nvPr/>
-        </p:nvSpPr>
-        <p:spPr>
-          <a:xfrm>
-            <a:off x="5715000" y="2514599"/>
-            <a:ext cx="5852160" cy="237744"/>
-          </a:xfrm>
-          <a:prstGeom prst="rect">
-            <a:avLst/>
-          </a:prstGeom>
-          <a:noFill/>
-        </p:spPr>
-        <p:txBody>
-          <a:bodyPr wrap="square">
-            <a:spAutoFit/>
-          </a:bodyPr>
-          <a:lstStyle/>
-          <a:p>
-            <a:pPr algn="r">
-              <a:lnSpc>
-                <a:spcPct val="100000"/>
-              </a:lnSpc>
-            </a:pPr>
-            <a:r>
-              <a:rPr sz="1150" b="0">
-                <a:solidFill>
-                  <a:srgbClr val="1A1A1A"/>
-                </a:solidFill>
-                <a:latin typeface="Georgia"/>
-              </a:rPr>
-              <a:t/>
-            </a:r>
-          </a:p>
-        </p:txBody>
-      </p:sp>
-      <p:sp>
-        <p:nvSpPr>
-          <p:cNvPr id="17" name="TextBox 16"/>
-          <p:cNvSpPr txBox="1"/>
-          <p:nvPr/>
-        </p:nvSpPr>
-        <p:spPr>
-          <a:xfrm>
-            <a:off x="685800" y="2788919"/>
-            <a:ext cx="3291840" cy="237744"/>
-          </a:xfrm>
-          <a:prstGeom prst="rect">
-            <a:avLst/>
-          </a:prstGeom>
-          <a:noFill/>
-        </p:spPr>
-        <p:txBody>
-          <a:bodyPr wrap="square">
-            <a:spAutoFit/>
-          </a:bodyPr>
-          <a:lstStyle/>
-          <a:p>
-            <a:pPr algn="l">
-              <a:lnSpc>
-                <a:spcPct val="100000"/>
-              </a:lnSpc>
-            </a:pPr>
-            <a:r>
-              <a:rPr sz="1150" b="0">
-                <a:solidFill>
-                  <a:srgbClr val="1A1A1A"/>
-                </a:solidFill>
-                <a:latin typeface="Georgia"/>
-              </a:rPr>
-              <a:t>Less compute than v2</a:t>
-            </a:r>
-          </a:p>
-        </p:txBody>
-      </p:sp>
-      <p:sp>
-        <p:nvSpPr>
-          <p:cNvPr id="18" name="TextBox 17"/>
-          <p:cNvSpPr txBox="1"/>
-          <p:nvPr/>
-        </p:nvSpPr>
-        <p:spPr>
-          <a:xfrm>
-            <a:off x="3977639" y="2788919"/>
-            <a:ext cx="1737360" cy="237744"/>
-          </a:xfrm>
-          <a:prstGeom prst="rect">
-            <a:avLst/>
-          </a:prstGeom>
-          <a:noFill/>
-        </p:spPr>
-        <p:txBody>
-          <a:bodyPr wrap="square">
-            <a:spAutoFit/>
-          </a:bodyPr>
-          <a:lstStyle/>
-          <a:p>
-            <a:pPr algn="r">
-              <a:lnSpc>
-                <a:spcPct val="100000"/>
-              </a:lnSpc>
-            </a:pPr>
-            <a:r>
-              <a:rPr sz="1150" b="0">
-                <a:solidFill>
-                  <a:srgbClr val="1A1A1A"/>
-                </a:solidFill>
-                <a:latin typeface="Georgia"/>
-              </a:rPr>
-              <a:t>PARTLY</a:t>
-            </a:r>
-          </a:p>
-        </p:txBody>
-      </p:sp>
-      <p:sp>
-        <p:nvSpPr>
-          <p:cNvPr id="19" name="TextBox 18"/>
-          <p:cNvSpPr txBox="1"/>
-          <p:nvPr/>
-        </p:nvSpPr>
-        <p:spPr>
-          <a:xfrm>
-            <a:off x="5715000" y="2788919"/>
-            <a:ext cx="5852160" cy="237744"/>
-          </a:xfrm>
-          <a:prstGeom prst="rect">
-            <a:avLst/>
-          </a:prstGeom>
-          <a:noFill/>
-        </p:spPr>
-        <p:txBody>
-          <a:bodyPr wrap="square">
-            <a:spAutoFit/>
-          </a:bodyPr>
-          <a:lstStyle/>
-          <a:p>
-            <a:pPr algn="r">
-              <a:lnSpc>
-                <a:spcPct val="100000"/>
-              </a:lnSpc>
-            </a:pPr>
-            <a:r>
-              <a:rPr sz="1150" b="0">
-                <a:solidFill>
-                  <a:srgbClr val="1A1A1A"/>
-                </a:solidFill>
-                <a:latin typeface="Georgia"/>
-              </a:rPr>
-              <a:t>dense 11% slower; first query level</a:t>
-            </a:r>
-          </a:p>
-        </p:txBody>
-      </p:sp>
-      <p:sp>
-        <p:nvSpPr>
-          <p:cNvPr id="20" name="TextBox 19"/>
-          <p:cNvSpPr txBox="1"/>
-          <p:nvPr/>
-        </p:nvSpPr>
-        <p:spPr>
-          <a:xfrm>
-            <a:off x="685800" y="3063239"/>
-            <a:ext cx="3291840" cy="237744"/>
-          </a:xfrm>
-          <a:prstGeom prst="rect">
-            <a:avLst/>
-          </a:prstGeom>
-          <a:noFill/>
-        </p:spPr>
-        <p:txBody>
-          <a:bodyPr wrap="square">
-            <a:spAutoFit/>
-          </a:bodyPr>
-          <a:lstStyle/>
-          <a:p>
-            <a:pPr algn="l">
-              <a:lnSpc>
-                <a:spcPct val="100000"/>
-              </a:lnSpc>
-            </a:pPr>
-            <a:r>
-              <a:rPr sz="1150" b="0">
-                <a:solidFill>
-                  <a:srgbClr val="1A1A1A"/>
-                </a:solidFill>
-                <a:latin typeface="Georgia"/>
-              </a:rPr>
-              <a:t/>
-            </a:r>
-          </a:p>
-        </p:txBody>
-      </p:sp>
-      <p:sp>
-        <p:nvSpPr>
-          <p:cNvPr id="21" name="TextBox 20"/>
-          <p:cNvSpPr txBox="1"/>
-          <p:nvPr/>
-        </p:nvSpPr>
-        <p:spPr>
-          <a:xfrm>
-            <a:off x="3977639" y="3063239"/>
-            <a:ext cx="1737360" cy="237744"/>
-          </a:xfrm>
-          <a:prstGeom prst="rect">
-            <a:avLst/>
-          </a:prstGeom>
-          <a:noFill/>
-        </p:spPr>
-        <p:txBody>
-          <a:bodyPr wrap="square">
-            <a:spAutoFit/>
-          </a:bodyPr>
-          <a:lstStyle/>
-          <a:p>
-            <a:pPr algn="r">
-              <a:lnSpc>
-                <a:spcPct val="100000"/>
-              </a:lnSpc>
-            </a:pPr>
-            <a:r>
-              <a:rPr sz="1150" b="0">
-                <a:solidFill>
-                  <a:srgbClr val="1A1A1A"/>
-                </a:solidFill>
-                <a:latin typeface="Georgia"/>
-              </a:rPr>
-              <a:t/>
-            </a:r>
-          </a:p>
-        </p:txBody>
-      </p:sp>
-      <p:sp>
-        <p:nvSpPr>
-          <p:cNvPr id="22" name="TextBox 21"/>
-          <p:cNvSpPr txBox="1"/>
-          <p:nvPr/>
-        </p:nvSpPr>
-        <p:spPr>
-          <a:xfrm>
-            <a:off x="5715000" y="3063239"/>
-            <a:ext cx="5852160" cy="237744"/>
-          </a:xfrm>
-          <a:prstGeom prst="rect">
-            <a:avLst/>
-          </a:prstGeom>
-          <a:noFill/>
-        </p:spPr>
-        <p:txBody>
-          <a:bodyPr wrap="square">
-            <a:spAutoFit/>
-          </a:bodyPr>
-          <a:lstStyle/>
-          <a:p>
-            <a:pPr algn="r">
-              <a:lnSpc>
-                <a:spcPct val="100000"/>
-              </a:lnSpc>
-            </a:pPr>
-            <a:r>
-              <a:rPr sz="1150" b="0">
-                <a:solidFill>
-                  <a:srgbClr val="1A1A1A"/>
-                </a:solidFill>
-                <a:latin typeface="Georgia"/>
-              </a:rPr>
-              <a:t>repeat query 27x cheaper (1.3 vs 33.3 ms)</a:t>
-            </a:r>
-          </a:p>
-        </p:txBody>
-      </p:sp>
-      <p:sp>
-        <p:nvSpPr>
-          <p:cNvPr id="23" name="TextBox 22"/>
-          <p:cNvSpPr txBox="1"/>
-          <p:nvPr/>
-        </p:nvSpPr>
-        <p:spPr>
-          <a:xfrm>
-            <a:off x="685800" y="3337559"/>
-            <a:ext cx="3291840" cy="237744"/>
-          </a:xfrm>
-          <a:prstGeom prst="rect">
-            <a:avLst/>
-          </a:prstGeom>
-          <a:noFill/>
-        </p:spPr>
-        <p:txBody>
-          <a:bodyPr wrap="square">
-            <a:spAutoFit/>
-          </a:bodyPr>
-          <a:lstStyle/>
-          <a:p>
-            <a:pPr algn="l">
-              <a:lnSpc>
-                <a:spcPct val="100000"/>
-              </a:lnSpc>
-            </a:pPr>
-            <a:r>
-              <a:rPr sz="1150" b="0">
-                <a:solidFill>
-                  <a:srgbClr val="1A1A1A"/>
-                </a:solidFill>
-                <a:latin typeface="Georgia"/>
-              </a:rPr>
-              <a:t/>
-            </a:r>
-          </a:p>
-        </p:txBody>
-      </p:sp>
-      <p:sp>
-        <p:nvSpPr>
-          <p:cNvPr id="24" name="TextBox 23"/>
-          <p:cNvSpPr txBox="1"/>
-          <p:nvPr/>
-        </p:nvSpPr>
-        <p:spPr>
-          <a:xfrm>
-            <a:off x="3977639" y="3337559"/>
-            <a:ext cx="1737360" cy="237744"/>
-          </a:xfrm>
-          <a:prstGeom prst="rect">
-            <a:avLst/>
-          </a:prstGeom>
-          <a:noFill/>
-        </p:spPr>
-        <p:txBody>
-          <a:bodyPr wrap="square">
-            <a:spAutoFit/>
-          </a:bodyPr>
-          <a:lstStyle/>
-          <a:p>
-            <a:pPr algn="r">
-              <a:lnSpc>
-                <a:spcPct val="100000"/>
-              </a:lnSpc>
-            </a:pPr>
-            <a:r>
-              <a:rPr sz="1150" b="0">
-                <a:solidFill>
-                  <a:srgbClr val="1A1A1A"/>
-                </a:solidFill>
-                <a:latin typeface="Georgia"/>
-              </a:rPr>
-              <a:t/>
-            </a:r>
-          </a:p>
-        </p:txBody>
-      </p:sp>
-      <p:sp>
-        <p:nvSpPr>
-          <p:cNvPr id="25" name="TextBox 24"/>
-          <p:cNvSpPr txBox="1"/>
-          <p:nvPr/>
-        </p:nvSpPr>
-        <p:spPr>
-          <a:xfrm>
-            <a:off x="5715000" y="3337559"/>
-            <a:ext cx="5852160" cy="237744"/>
-          </a:xfrm>
-          <a:prstGeom prst="rect">
-            <a:avLst/>
-          </a:prstGeom>
-          <a:noFill/>
-        </p:spPr>
-        <p:txBody>
-          <a:bodyPr wrap="square">
-            <a:spAutoFit/>
-          </a:bodyPr>
-          <a:lstStyle/>
-          <a:p>
-            <a:pPr algn="r">
-              <a:lnSpc>
-                <a:spcPct val="100000"/>
-              </a:lnSpc>
-            </a:pPr>
-            <a:r>
-              <a:rPr sz="1150" b="0">
-                <a:solidFill>
-                  <a:srgbClr val="1A1A1A"/>
-                </a:solidFill>
-                <a:latin typeface="Georgia"/>
-              </a:rPr>
-              <a:t/>
-            </a:r>
-          </a:p>
-        </p:txBody>
-      </p:sp>
-      <p:sp>
-        <p:nvSpPr>
-          <p:cNvPr id="26" name="TextBox 25"/>
-          <p:cNvSpPr txBox="1"/>
-          <p:nvPr/>
-        </p:nvSpPr>
-        <p:spPr>
-          <a:xfrm>
-            <a:off x="685800" y="3611879"/>
-            <a:ext cx="3291840" cy="237744"/>
-          </a:xfrm>
-          <a:prstGeom prst="rect">
-            <a:avLst/>
-          </a:prstGeom>
-          <a:noFill/>
-        </p:spPr>
-        <p:txBody>
-          <a:bodyPr wrap="square">
-            <a:spAutoFit/>
-          </a:bodyPr>
-          <a:lstStyle/>
-          <a:p>
-            <a:pPr algn="l">
-              <a:lnSpc>
-                <a:spcPct val="100000"/>
-              </a:lnSpc>
-            </a:pPr>
-            <a:r>
-              <a:rPr sz="1150" b="0">
-                <a:solidFill>
-                  <a:srgbClr val="1A1A1A"/>
-                </a:solidFill>
-                <a:latin typeface="Georgia"/>
-              </a:rPr>
-              <a:t>Runs on edge devices</a:t>
-            </a:r>
-          </a:p>
-        </p:txBody>
-      </p:sp>
-      <p:sp>
-        <p:nvSpPr>
-          <p:cNvPr id="27" name="TextBox 26"/>
-          <p:cNvSpPr txBox="1"/>
-          <p:nvPr/>
-        </p:nvSpPr>
-        <p:spPr>
-          <a:xfrm>
-            <a:off x="3977639" y="3611879"/>
-            <a:ext cx="1737360" cy="237744"/>
-          </a:xfrm>
-          <a:prstGeom prst="rect">
-            <a:avLst/>
-          </a:prstGeom>
-          <a:noFill/>
-        </p:spPr>
-        <p:txBody>
-          <a:bodyPr wrap="square">
-            <a:spAutoFit/>
-          </a:bodyPr>
-          <a:lstStyle/>
-          <a:p>
-            <a:pPr algn="r">
-              <a:lnSpc>
-                <a:spcPct val="100000"/>
-              </a:lnSpc>
-            </a:pPr>
-            <a:r>
-              <a:rPr sz="1150" b="0">
-                <a:solidFill>
-                  <a:srgbClr val="1A1A1A"/>
-                </a:solidFill>
-                <a:latin typeface="Georgia"/>
-              </a:rPr>
-              <a:t>UNPROVEN</a:t>
-            </a:r>
-          </a:p>
-        </p:txBody>
-      </p:sp>
-      <p:sp>
-        <p:nvSpPr>
-          <p:cNvPr id="28" name="TextBox 27"/>
-          <p:cNvSpPr txBox="1"/>
-          <p:nvPr/>
-        </p:nvSpPr>
-        <p:spPr>
-          <a:xfrm>
-            <a:off x="5715000" y="3611879"/>
-            <a:ext cx="5852160" cy="237744"/>
-          </a:xfrm>
-          <a:prstGeom prst="rect">
-            <a:avLst/>
-          </a:prstGeom>
-          <a:noFill/>
-        </p:spPr>
-        <p:txBody>
-          <a:bodyPr wrap="square">
-            <a:spAutoFit/>
-          </a:bodyPr>
-          <a:lstStyle/>
-          <a:p>
-            <a:pPr algn="r">
-              <a:lnSpc>
-                <a:spcPct val="100000"/>
-              </a:lnSpc>
-            </a:pPr>
-            <a:r>
-              <a:rPr sz="1150" b="0">
-                <a:solidFill>
-                  <a:srgbClr val="1A1A1A"/>
-                </a:solidFill>
-                <a:latin typeface="Georgia"/>
-              </a:rPr>
-              <a:t>all figures from a laptop RTX 4060</a:t>
-            </a:r>
-          </a:p>
-        </p:txBody>
-      </p:sp>
-      <p:sp>
-        <p:nvSpPr>
-          <p:cNvPr id="29" name="TextBox 28"/>
-          <p:cNvSpPr txBox="1"/>
-          <p:nvPr/>
-        </p:nvSpPr>
-        <p:spPr>
-          <a:xfrm>
-            <a:off x="685800" y="3886199"/>
-            <a:ext cx="3291840" cy="237744"/>
-          </a:xfrm>
-          <a:prstGeom prst="rect">
-            <a:avLst/>
-          </a:prstGeom>
-          <a:noFill/>
-        </p:spPr>
-        <p:txBody>
-          <a:bodyPr wrap="square">
-            <a:spAutoFit/>
-          </a:bodyPr>
-          <a:lstStyle/>
-          <a:p>
-            <a:pPr algn="l">
-              <a:lnSpc>
-                <a:spcPct val="100000"/>
-              </a:lnSpc>
-            </a:pPr>
-            <a:r>
-              <a:rPr sz="1150" b="0">
-                <a:solidFill>
-                  <a:srgbClr val="1A1A1A"/>
-                </a:solidFill>
-                <a:latin typeface="Georgia"/>
-              </a:rPr>
-              <a:t/>
-            </a:r>
-          </a:p>
-        </p:txBody>
-      </p:sp>
-      <p:sp>
-        <p:nvSpPr>
-          <p:cNvPr id="30" name="TextBox 29"/>
-          <p:cNvSpPr txBox="1"/>
-          <p:nvPr/>
-        </p:nvSpPr>
-        <p:spPr>
-          <a:xfrm>
-            <a:off x="3977639" y="3886199"/>
-            <a:ext cx="1737360" cy="237744"/>
-          </a:xfrm>
-          <a:prstGeom prst="rect">
-            <a:avLst/>
-          </a:prstGeom>
-          <a:noFill/>
-        </p:spPr>
-        <p:txBody>
-          <a:bodyPr wrap="square">
-            <a:spAutoFit/>
-          </a:bodyPr>
-          <a:lstStyle/>
-          <a:p>
-            <a:pPr algn="r">
-              <a:lnSpc>
-                <a:spcPct val="100000"/>
-              </a:lnSpc>
-            </a:pPr>
-            <a:r>
-              <a:rPr sz="1150" b="0">
-                <a:solidFill>
-                  <a:srgbClr val="1A1A1A"/>
-                </a:solidFill>
-                <a:latin typeface="Georgia"/>
-              </a:rPr>
-              <a:t/>
-            </a:r>
-          </a:p>
-        </p:txBody>
-      </p:sp>
-      <p:sp>
-        <p:nvSpPr>
-          <p:cNvPr id="31" name="TextBox 30"/>
-          <p:cNvSpPr txBox="1"/>
-          <p:nvPr/>
-        </p:nvSpPr>
-        <p:spPr>
-          <a:xfrm>
-            <a:off x="5715000" y="3886199"/>
-            <a:ext cx="5852160" cy="237744"/>
-          </a:xfrm>
-          <a:prstGeom prst="rect">
-            <a:avLst/>
-          </a:prstGeom>
-          <a:noFill/>
-        </p:spPr>
-        <p:txBody>
-          <a:bodyPr wrap="square">
-            <a:spAutoFit/>
-          </a:bodyPr>
-          <a:lstStyle/>
-          <a:p>
-            <a:pPr algn="r">
-              <a:lnSpc>
-                <a:spcPct val="100000"/>
-              </a:lnSpc>
-            </a:pPr>
-            <a:r>
-              <a:rPr sz="1150" b="0">
-                <a:solidFill>
-                  <a:srgbClr val="1A1A1A"/>
-                </a:solidFill>
-                <a:latin typeface="Georgia"/>
-              </a:rPr>
-              <a:t>no Jetson measurement has been taken</a:t>
-            </a:r>
-          </a:p>
-        </p:txBody>
-      </p:sp>
-      <p:sp>
-        <p:nvSpPr>
-          <p:cNvPr id="32" name="TextBox 31"/>
-          <p:cNvSpPr txBox="1"/>
-          <p:nvPr/>
-        </p:nvSpPr>
-        <p:spPr>
-          <a:xfrm>
-            <a:off x="685800" y="4434840"/>
-            <a:ext cx="10881360" cy="365760"/>
-          </a:xfrm>
-          <a:prstGeom prst="rect">
-            <a:avLst/>
-          </a:prstGeom>
-          <a:noFill/>
-        </p:spPr>
-        <p:txBody>
-          <a:bodyPr wrap="square">
-            <a:spAutoFit/>
-          </a:bodyPr>
-          <a:lstStyle/>
-          <a:p>
-            <a:pPr algn="l">
-              <a:lnSpc>
-                <a:spcPct val="100000"/>
-              </a:lnSpc>
-            </a:pPr>
-            <a:r>
-              <a:rPr sz="1250" b="1">
-                <a:solidFill>
-                  <a:srgbClr val="333333"/>
-                </a:solidFill>
-                <a:latin typeface="Georgia"/>
-              </a:rPr>
-              <a:t>What the project does deliver</a:t>
-            </a:r>
-          </a:p>
-        </p:txBody>
-      </p:sp>
-      <p:sp>
-        <p:nvSpPr>
-          <p:cNvPr id="33" name="Rounded Rectangle 32"/>
-          <p:cNvSpPr/>
-          <p:nvPr/>
-        </p:nvSpPr>
-        <p:spPr>
-          <a:xfrm>
-            <a:off x="685800" y="4846320"/>
-            <a:ext cx="3474720" cy="1005840"/>
-          </a:xfrm>
-          <a:prstGeom prst="roundRect">
-            <a:avLst/>
-          </a:prstGeom>
-          <a:solidFill>
-            <a:srgbClr val="EFEFEF"/>
-          </a:solidFill>
-          <a:ln w="9525">
-            <a:solidFill>
-              <a:srgbClr val="8A8A8A"/>
-            </a:solidFill>
-          </a:ln>
-          <a:effectLst/>
-        </p:spPr>
-        <p:style>
-          <a:lnRef idx="1">
-            <a:schemeClr val="accent1"/>
-          </a:lnRef>
-          <a:fillRef idx="3">
-            <a:schemeClr val="accent1"/>
-          </a:fillRef>
-          <a:effectRef idx="2">
-            <a:schemeClr val="accent1"/>
-          </a:effectRef>
-          <a:fontRef idx="minor">
-            <a:schemeClr val="lt1"/>
-          </a:fontRef>
-        </p:style>
-        <p:txBody>
-          <a:bodyPr rtlCol="0" anchor="ctr" wrap="square" lIns="73152" rIns="73152"/>
-          <a:lstStyle/>
-          <a:p>
-            <a:pPr algn="ctr"/>
-            <a:r>
-              <a:rPr sz="1050" b="0">
-                <a:solidFill>
-                  <a:srgbClr val="1A1A1A"/>
-                </a:solidFill>
-                <a:latin typeface="Georgia"/>
-              </a:rPr>
-              <a:t>Queryable output</a:t>
-            </a:r>
-          </a:p>
-          <a:p>
-            <a:pPr algn="ctr"/>
-            <a:r>
-              <a:rPr sz="1050" b="0">
-                <a:solidFill>
-                  <a:srgbClr val="1A1A1A"/>
-                </a:solidFill>
-                <a:latin typeface="Georgia"/>
-              </a:rPr>
-              <a:t/>
-            </a:r>
-          </a:p>
-          <a:p>
-            <a:pPr algn="ctr"/>
-            <a:r>
-              <a:rPr sz="1050" b="0">
-                <a:solidFill>
-                  <a:srgbClr val="1A1A1A"/>
-                </a:solidFill>
-                <a:latin typeface="Georgia"/>
-              </a:rPr>
-              <a:t>flow at any continuous coordinate, sparse equals dense exactly</a:t>
-            </a:r>
-          </a:p>
-        </p:txBody>
-      </p:sp>
-      <p:sp>
-        <p:nvSpPr>
-          <p:cNvPr id="34" name="Rounded Rectangle 33"/>
-          <p:cNvSpPr/>
-          <p:nvPr/>
-        </p:nvSpPr>
-        <p:spPr>
-          <a:xfrm>
-            <a:off x="4343400" y="4846320"/>
-            <a:ext cx="3474720" cy="1005840"/>
-          </a:xfrm>
-          <a:prstGeom prst="roundRect">
-            <a:avLst/>
-          </a:prstGeom>
-          <a:solidFill>
-            <a:srgbClr val="EFEFEF"/>
-          </a:solidFill>
-          <a:ln w="9525">
-            <a:solidFill>
-              <a:srgbClr val="8A8A8A"/>
-            </a:solidFill>
-          </a:ln>
-          <a:effectLst/>
-        </p:spPr>
-        <p:style>
-          <a:lnRef idx="1">
-            <a:schemeClr val="accent1"/>
-          </a:lnRef>
-          <a:fillRef idx="3">
-            <a:schemeClr val="accent1"/>
-          </a:fillRef>
-          <a:effectRef idx="2">
-            <a:schemeClr val="accent1"/>
-          </a:effectRef>
-          <a:fontRef idx="minor">
-            <a:schemeClr val="lt1"/>
-          </a:fontRef>
-        </p:style>
-        <p:txBody>
-          <a:bodyPr rtlCol="0" anchor="ctr" wrap="square" lIns="73152" rIns="73152"/>
-          <a:lstStyle/>
-          <a:p>
-            <a:pPr algn="ctr"/>
-            <a:r>
-              <a:rPr sz="1050" b="0">
-                <a:solidFill>
-                  <a:srgbClr val="1A1A1A"/>
-                </a:solidFill>
-                <a:latin typeface="Georgia"/>
-              </a:rPr>
-              <a:t>Cheap repeat access</a:t>
-            </a:r>
-          </a:p>
-          <a:p>
-            <a:pPr algn="ctr"/>
-            <a:r>
-              <a:rPr sz="1050" b="0">
-                <a:solidFill>
-                  <a:srgbClr val="1A1A1A"/>
-                </a:solidFill>
-                <a:latin typeface="Georgia"/>
-              </a:rPr>
-              <a:t/>
-            </a:r>
-          </a:p>
-          <a:p>
-            <a:pPr algn="ctr"/>
-            <a:r>
-              <a:rPr sz="1050" b="0">
-                <a:solidFill>
-                  <a:srgbClr val="1A1A1A"/>
-                </a:solidFill>
-                <a:latin typeface="Georgia"/>
-              </a:rPr>
-              <a:t>1.3 ms per further query batch on a cached frame</a:t>
-            </a:r>
-          </a:p>
-        </p:txBody>
-      </p:sp>
-      <p:sp>
-        <p:nvSpPr>
-          <p:cNvPr id="35" name="Rounded Rectangle 34"/>
-          <p:cNvSpPr/>
-          <p:nvPr/>
-        </p:nvSpPr>
-        <p:spPr>
-          <a:xfrm>
-            <a:off x="8001000" y="4846320"/>
-            <a:ext cx="3474720" cy="1005840"/>
-          </a:xfrm>
-          <a:prstGeom prst="roundRect">
-            <a:avLst/>
-          </a:prstGeom>
-          <a:solidFill>
-            <a:srgbClr val="EFEFEF"/>
-          </a:solidFill>
-          <a:ln w="9525">
-            <a:solidFill>
-              <a:srgbClr val="8A8A8A"/>
-            </a:solidFill>
-          </a:ln>
-          <a:effectLst/>
-        </p:spPr>
-        <p:style>
-          <a:lnRef idx="1">
-            <a:schemeClr val="accent1"/>
-          </a:lnRef>
-          <a:fillRef idx="3">
-            <a:schemeClr val="accent1"/>
-          </a:fillRef>
-          <a:effectRef idx="2">
-            <a:schemeClr val="accent1"/>
-          </a:effectRef>
-          <a:fontRef idx="minor">
-            <a:schemeClr val="lt1"/>
-          </a:fontRef>
-        </p:style>
-        <p:txBody>
-          <a:bodyPr rtlCol="0" anchor="ctr" wrap="square" lIns="73152" rIns="73152"/>
-          <a:lstStyle/>
-          <a:p>
-            <a:pPr algn="ctr"/>
-            <a:r>
-              <a:rPr sz="1050" b="0">
-                <a:solidFill>
-                  <a:srgbClr val="1A1A1A"/>
-                </a:solidFill>
-                <a:latin typeface="Georgia"/>
-              </a:rPr>
-              <a:t>Calibrated confidence</a:t>
-            </a:r>
-          </a:p>
-          <a:p>
-            <a:pPr algn="ctr"/>
-            <a:r>
-              <a:rPr sz="1050" b="0">
-                <a:solidFill>
-                  <a:srgbClr val="1A1A1A"/>
-                </a:solidFill>
-                <a:latin typeface="Georgia"/>
-              </a:rPr>
-              <a:t/>
-            </a:r>
-          </a:p>
-          <a:p>
-            <a:pPr algn="ctr"/>
-            <a:r>
-              <a:rPr sz="1050" b="0">
-                <a:solidFill>
-                  <a:srgbClr val="1A1A1A"/>
-                </a:solidFill>
-                <a:latin typeface="Georgia"/>
-              </a:rPr>
-              <a:t>per-query error estimate, monotonic against real error</a:t>
-            </a:r>
-          </a:p>
-        </p:txBody>
-      </p:sp>
-      <p:sp>
-        <p:nvSpPr>
-          <p:cNvPr id="36" name="TextBox 35"/>
           <p:cNvSpPr txBox="1"/>
           <p:nvPr/>
         </p:nvSpPr>
@@ -9822,7 +8631,7 @@
       </p:sp>
       <p:sp>
         <p:nvSpPr>
-          <p:cNvPr id="37" name="TextBox 36"/>
+          <p:cNvPr id="7" name="TextBox 6"/>
           <p:cNvSpPr txBox="1"/>
           <p:nvPr/>
         </p:nvSpPr>
@@ -9919,7 +8728,7 @@
                 </a:solidFill>
                 <a:latin typeface="Georgia"/>
               </a:rPr>
-              <a:t>LIMITATIONS</a:t>
+              <a:t>ASSESSMENT</a:t>
             </a:r>
           </a:p>
         </p:txBody>
@@ -9958,7 +8767,7 @@
                 </a:solidFill>
                 <a:latin typeface="Georgia"/>
               </a:rPr>
-              <a:t>What is not yet proven, stated plainly</a:t>
+              <a:t>Against the three objectives I set</a:t>
             </a:r>
           </a:p>
         </p:txBody>
@@ -9971,8 +8780,8 @@
         </p:nvSpPr>
         <p:spPr>
           <a:xfrm>
-            <a:off x="685800" y="1645920"/>
-            <a:ext cx="4023360" cy="274320"/>
+            <a:off x="685800" y="1691640"/>
+            <a:ext cx="3291840" cy="237744"/>
           </a:xfrm>
           <a:prstGeom prst="rect">
             <a:avLst/>
@@ -9997,7 +8806,7 @@
                 </a:solidFill>
                 <a:latin typeface="Georgia"/>
               </a:rPr>
-              <a:t>Sub-pixel precision is worse than v2</a:t>
+              <a:t>Objective</a:t>
             </a:r>
           </a:p>
         </p:txBody>
@@ -10010,33 +8819,33 @@
         </p:nvSpPr>
         <p:spPr>
           <a:xfrm>
-            <a:off x="4846320" y="1645920"/>
-            <a:ext cx="6675120" cy="548640"/>
-          </a:xfrm>
-          <a:prstGeom prst="rect">
-            <a:avLst/>
-          </a:prstGeom>
-          <a:noFill/>
-        </p:spPr>
-        <p:txBody>
-          <a:bodyPr wrap="square">
-            <a:spAutoFit/>
-          </a:bodyPr>
-          <a:lstStyle/>
-          <a:p>
-            <a:pPr algn="l">
-              <a:lnSpc>
-                <a:spcPct val="112000"/>
-              </a:lnSpc>
-            </a:pPr>
-            <a:r>
-              <a:rPr sz="1100" b="0">
-                <a:solidFill>
-                  <a:srgbClr val="1A1A1A"/>
-                </a:solidFill>
-                <a:latin typeface="Georgia"/>
-              </a:rPr>
-              <a:t>By 0.8 to 6.3 points of 1-pixel accuracy. Cause diagnosed (decoder never sees full-resolution input.</a:t>
+            <a:off x="3977639" y="1691640"/>
+            <a:ext cx="1737360" cy="237744"/>
+          </a:xfrm>
+          <a:prstGeom prst="rect">
+            <a:avLst/>
+          </a:prstGeom>
+          <a:noFill/>
+        </p:spPr>
+        <p:txBody>
+          <a:bodyPr wrap="square">
+            <a:spAutoFit/>
+          </a:bodyPr>
+          <a:lstStyle/>
+          <a:p>
+            <a:pPr algn="r">
+              <a:lnSpc>
+                <a:spcPct val="100000"/>
+              </a:lnSpc>
+            </a:pPr>
+            <a:r>
+              <a:rPr sz="1150" b="1">
+                <a:solidFill>
+                  <a:srgbClr val="1A1A1A"/>
+                </a:solidFill>
+                <a:latin typeface="Georgia"/>
+              </a:rPr>
+              <a:t>Verdict</a:t>
             </a:r>
           </a:p>
         </p:txBody>
@@ -10049,21 +8858,21 @@
         </p:nvSpPr>
         <p:spPr>
           <a:xfrm>
-            <a:off x="685800" y="2578608"/>
-            <a:ext cx="4023360" cy="274320"/>
-          </a:xfrm>
-          <a:prstGeom prst="rect">
-            <a:avLst/>
-          </a:prstGeom>
-          <a:noFill/>
-        </p:spPr>
-        <p:txBody>
-          <a:bodyPr wrap="square">
-            <a:spAutoFit/>
-          </a:bodyPr>
-          <a:lstStyle/>
-          <a:p>
-            <a:pPr algn="l">
+            <a:off x="5715000" y="1691640"/>
+            <a:ext cx="5852160" cy="237744"/>
+          </a:xfrm>
+          <a:prstGeom prst="rect">
+            <a:avLst/>
+          </a:prstGeom>
+          <a:noFill/>
+        </p:spPr>
+        <p:txBody>
+          <a:bodyPr wrap="square">
+            <a:spAutoFit/>
+          </a:bodyPr>
+          <a:lstStyle/>
+          <a:p>
+            <a:pPr algn="r">
               <a:lnSpc>
                 <a:spcPct val="100000"/>
               </a:lnSpc>
@@ -10075,47 +8884,52 @@
                 </a:solidFill>
                 <a:latin typeface="Georgia"/>
               </a:rPr>
-              <a:t>No edge-device measurement</a:t>
-            </a:r>
-          </a:p>
-        </p:txBody>
-      </p:sp>
-      <p:sp>
-        <p:nvSpPr>
-          <p:cNvPr id="7" name="TextBox 6"/>
-          <p:cNvSpPr txBox="1"/>
-          <p:nvPr/>
-        </p:nvSpPr>
-        <p:spPr>
-          <a:xfrm>
-            <a:off x="4846320" y="2578608"/>
-            <a:ext cx="6675120" cy="548640"/>
-          </a:xfrm>
-          <a:prstGeom prst="rect">
-            <a:avLst/>
-          </a:prstGeom>
-          <a:noFill/>
-        </p:spPr>
-        <p:txBody>
-          <a:bodyPr wrap="square">
-            <a:spAutoFit/>
-          </a:bodyPr>
-          <a:lstStyle/>
-          <a:p>
-            <a:pPr algn="l">
-              <a:lnSpc>
-                <a:spcPct val="112000"/>
-              </a:lnSpc>
-            </a:pPr>
-            <a:r>
-              <a:rPr sz="1100" b="0">
-                <a:solidFill>
-                  <a:srgbClr val="1A1A1A"/>
-                </a:solidFill>
-                <a:latin typeface="Georgia"/>
-              </a:rPr>
-              <a:t>Every latency figure is from a laptop RTX 4060. The edge claim in the title is a design target, not a result.</a:t>
-            </a:r>
+              <a:t>Evidence</a:t>
+            </a:r>
+          </a:p>
+        </p:txBody>
+      </p:sp>
+      <p:sp>
+        <p:nvSpPr>
+          <p:cNvPr id="7" name="Rectangle 6"/>
+          <p:cNvSpPr/>
+          <p:nvPr/>
+        </p:nvSpPr>
+        <p:spPr>
+          <a:xfrm>
+            <a:off x="685800" y="1929384"/>
+            <a:ext cx="10881360" cy="9525"/>
+          </a:xfrm>
+          <a:prstGeom prst="rect">
+            <a:avLst/>
+          </a:prstGeom>
+          <a:solidFill>
+            <a:srgbClr val="8A8A8A"/>
+          </a:solidFill>
+          <a:ln>
+            <a:noFill/>
+          </a:ln>
+          <a:effectLst/>
+        </p:spPr>
+        <p:style>
+          <a:lnRef idx="1">
+            <a:schemeClr val="accent1"/>
+          </a:lnRef>
+          <a:fillRef idx="3">
+            <a:schemeClr val="accent1"/>
+          </a:fillRef>
+          <a:effectRef idx="2">
+            <a:schemeClr val="accent1"/>
+          </a:effectRef>
+          <a:fontRef idx="minor">
+            <a:schemeClr val="lt1"/>
+          </a:fontRef>
+        </p:style>
+        <p:txBody>
+          <a:bodyPr rtlCol="0" anchor="ctr"/>
+          <a:lstStyle/>
+          <a:p>
+            <a:pPr algn="ctr"/>
           </a:p>
         </p:txBody>
       </p:sp>
@@ -10127,8 +8941,8 @@
         </p:nvSpPr>
         <p:spPr>
           <a:xfrm>
-            <a:off x="685800" y="3511296"/>
-            <a:ext cx="4023360" cy="274320"/>
+            <a:off x="685800" y="1965960"/>
+            <a:ext cx="3291840" cy="237744"/>
           </a:xfrm>
           <a:prstGeom prst="rect">
             <a:avLst/>
@@ -10147,13 +8961,13 @@
               </a:lnSpc>
             </a:pPr>
             <a:r>
-              <a:rPr sz="1150" b="1">
-                <a:solidFill>
-                  <a:srgbClr val="1A1A1A"/>
-                </a:solidFill>
-                <a:latin typeface="Georgia"/>
-              </a:rPr>
-              <a:t>Single evaluation domain</a:t>
+              <a:rPr sz="1150" b="0">
+                <a:solidFill>
+                  <a:srgbClr val="1A1A1A"/>
+                </a:solidFill>
+                <a:latin typeface="Georgia"/>
+              </a:rPr>
+              <a:t>Better accuracy than v2</a:t>
             </a:r>
           </a:p>
         </p:txBody>
@@ -10166,33 +8980,33 @@
         </p:nvSpPr>
         <p:spPr>
           <a:xfrm>
-            <a:off x="4846320" y="3511296"/>
-            <a:ext cx="6675120" cy="548640"/>
-          </a:xfrm>
-          <a:prstGeom prst="rect">
-            <a:avLst/>
-          </a:prstGeom>
-          <a:noFill/>
-        </p:spPr>
-        <p:txBody>
-          <a:bodyPr wrap="square">
-            <a:spAutoFit/>
-          </a:bodyPr>
-          <a:lstStyle/>
-          <a:p>
-            <a:pPr algn="l">
-              <a:lnSpc>
-                <a:spcPct val="112000"/>
-              </a:lnSpc>
-            </a:pPr>
-            <a:r>
-              <a:rPr sz="1100" b="0">
-                <a:solidFill>
-                  <a:srgbClr val="1A1A1A"/>
-                </a:solidFill>
-                <a:latin typeface="Georgia"/>
-              </a:rPr>
-              <a:t>All accuracy numbers are VKITTI2 Scene18+20. A synthetic driving benchmark is not evidence for field or survey imagery.</a:t>
+            <a:off x="3977639" y="1965960"/>
+            <a:ext cx="1737360" cy="237744"/>
+          </a:xfrm>
+          <a:prstGeom prst="rect">
+            <a:avLst/>
+          </a:prstGeom>
+          <a:noFill/>
+        </p:spPr>
+        <p:txBody>
+          <a:bodyPr wrap="square">
+            <a:spAutoFit/>
+          </a:bodyPr>
+          <a:lstStyle/>
+          <a:p>
+            <a:pPr algn="r">
+              <a:lnSpc>
+                <a:spcPct val="100000"/>
+              </a:lnSpc>
+            </a:pPr>
+            <a:r>
+              <a:rPr sz="1150" b="0">
+                <a:solidFill>
+                  <a:srgbClr val="1A1A1A"/>
+                </a:solidFill>
+                <a:latin typeface="Georgia"/>
+              </a:rPr>
+              <a:t>NOT MET</a:t>
             </a:r>
           </a:p>
         </p:txBody>
@@ -10205,33 +9019,33 @@
         </p:nvSpPr>
         <p:spPr>
           <a:xfrm>
-            <a:off x="685800" y="4443984"/>
-            <a:ext cx="4023360" cy="274320"/>
-          </a:xfrm>
-          <a:prstGeom prst="rect">
-            <a:avLst/>
-          </a:prstGeom>
-          <a:noFill/>
-        </p:spPr>
-        <p:txBody>
-          <a:bodyPr wrap="square">
-            <a:spAutoFit/>
-          </a:bodyPr>
-          <a:lstStyle/>
-          <a:p>
-            <a:pPr algn="l">
+            <a:off x="5715000" y="1965960"/>
+            <a:ext cx="5852160" cy="237744"/>
+          </a:xfrm>
+          <a:prstGeom prst="rect">
+            <a:avLst/>
+          </a:prstGeom>
+          <a:noFill/>
+        </p:spPr>
+        <p:txBody>
+          <a:bodyPr wrap="square">
+            <a:spAutoFit/>
+          </a:bodyPr>
+          <a:lstStyle/>
+          <a:p>
+            <a:pPr algn="r">
               <a:lnSpc>
                 <a:spcPct val="100000"/>
               </a:lnSpc>
             </a:pPr>
             <a:r>
-              <a:rPr sz="1150" b="1">
-                <a:solidFill>
-                  <a:srgbClr val="1A1A1A"/>
-                </a:solidFill>
-                <a:latin typeface="Georgia"/>
-              </a:rPr>
-              <a:t>Spring run truncated</a:t>
+              <a:rPr sz="1150" b="0">
+                <a:solidFill>
+                  <a:srgbClr val="1A1A1A"/>
+                </a:solidFill>
+                <a:latin typeface="Georgia"/>
+              </a:rPr>
+              <a:t>best v3 2.384 vs 2.324; every config above v2</a:t>
             </a:r>
           </a:p>
         </p:txBody>
@@ -10244,33 +9058,33 @@
         </p:nvSpPr>
         <p:spPr>
           <a:xfrm>
-            <a:off x="4846320" y="4443984"/>
-            <a:ext cx="6675120" cy="548640"/>
-          </a:xfrm>
-          <a:prstGeom prst="rect">
-            <a:avLst/>
-          </a:prstGeom>
-          <a:noFill/>
-        </p:spPr>
-        <p:txBody>
-          <a:bodyPr wrap="square">
-            <a:spAutoFit/>
-          </a:bodyPr>
-          <a:lstStyle/>
-          <a:p>
-            <a:pPr algn="l">
-              <a:lnSpc>
-                <a:spcPct val="112000"/>
-              </a:lnSpc>
-            </a:pPr>
-            <a:r>
-              <a:rPr sz="1100" b="0">
-                <a:solidFill>
-                  <a:srgbClr val="1A1A1A"/>
-                </a:solidFill>
-                <a:latin typeface="Georgia"/>
-              </a:rPr>
-              <a:t>Killed by the 8-hour wall clock at roughly 90k of 100k steps, so it is not directly comparable to the others.</a:t>
+            <a:off x="685800" y="2240279"/>
+            <a:ext cx="3291840" cy="237744"/>
+          </a:xfrm>
+          <a:prstGeom prst="rect">
+            <a:avLst/>
+          </a:prstGeom>
+          <a:noFill/>
+        </p:spPr>
+        <p:txBody>
+          <a:bodyPr wrap="square">
+            <a:spAutoFit/>
+          </a:bodyPr>
+          <a:lstStyle/>
+          <a:p>
+            <a:pPr algn="l">
+              <a:lnSpc>
+                <a:spcPct val="100000"/>
+              </a:lnSpc>
+            </a:pPr>
+            <a:r>
+              <a:rPr sz="1150" b="0">
+                <a:solidFill>
+                  <a:srgbClr val="1A1A1A"/>
+                </a:solidFill>
+                <a:latin typeface="Georgia"/>
+              </a:rPr>
+              <a:t/>
             </a:r>
           </a:p>
         </p:txBody>
@@ -10283,33 +9097,33 @@
         </p:nvSpPr>
         <p:spPr>
           <a:xfrm>
-            <a:off x="685800" y="5376672"/>
-            <a:ext cx="4023360" cy="274320"/>
-          </a:xfrm>
-          <a:prstGeom prst="rect">
-            <a:avLst/>
-          </a:prstGeom>
-          <a:noFill/>
-        </p:spPr>
-        <p:txBody>
-          <a:bodyPr wrap="square">
-            <a:spAutoFit/>
-          </a:bodyPr>
-          <a:lstStyle/>
-          <a:p>
-            <a:pPr algn="l">
+            <a:off x="3977639" y="2240279"/>
+            <a:ext cx="1737360" cy="237744"/>
+          </a:xfrm>
+          <a:prstGeom prst="rect">
+            <a:avLst/>
+          </a:prstGeom>
+          <a:noFill/>
+        </p:spPr>
+        <p:txBody>
+          <a:bodyPr wrap="square">
+            <a:spAutoFit/>
+          </a:bodyPr>
+          <a:lstStyle/>
+          <a:p>
+            <a:pPr algn="r">
               <a:lnSpc>
                 <a:spcPct val="100000"/>
               </a:lnSpc>
             </a:pPr>
             <a:r>
-              <a:rPr sz="1150" b="1">
-                <a:solidFill>
-                  <a:srgbClr val="1A1A1A"/>
-                </a:solidFill>
-                <a:latin typeface="Georgia"/>
-              </a:rPr>
-              <a:t>One seed, and checkpoint noise the size of the effects</a:t>
+              <a:rPr sz="1150" b="0">
+                <a:solidFill>
+                  <a:srgbClr val="1A1A1A"/>
+                </a:solidFill>
+                <a:latin typeface="Georgia"/>
+              </a:rPr>
+              <a:t/>
             </a:r>
           </a:p>
         </p:txBody>
@@ -10322,33 +9136,33 @@
         </p:nvSpPr>
         <p:spPr>
           <a:xfrm>
-            <a:off x="4846320" y="5376672"/>
-            <a:ext cx="6675120" cy="548640"/>
-          </a:xfrm>
-          <a:prstGeom prst="rect">
-            <a:avLst/>
-          </a:prstGeom>
-          <a:noFill/>
-        </p:spPr>
-        <p:txBody>
-          <a:bodyPr wrap="square">
-            <a:spAutoFit/>
-          </a:bodyPr>
-          <a:lstStyle/>
-          <a:p>
-            <a:pPr algn="l">
-              <a:lnSpc>
-                <a:spcPct val="112000"/>
-              </a:lnSpc>
-            </a:pPr>
-            <a:r>
-              <a:rPr sz="1100" b="0">
-                <a:solidFill>
-                  <a:srgbClr val="1A1A1A"/>
-                </a:solidFill>
-                <a:latin typeface="Georgia"/>
-              </a:rPr>
-              <a:t>Step 90k vs 100k of the same run moves EPE by up to 0.038 px, reversing two of the orderings. Nothing finer than about 0.05 px is resolvable here.</a:t>
+            <a:off x="5715000" y="2240279"/>
+            <a:ext cx="5852160" cy="237744"/>
+          </a:xfrm>
+          <a:prstGeom prst="rect">
+            <a:avLst/>
+          </a:prstGeom>
+          <a:noFill/>
+        </p:spPr>
+        <p:txBody>
+          <a:bodyPr wrap="square">
+            <a:spAutoFit/>
+          </a:bodyPr>
+          <a:lstStyle/>
+          <a:p>
+            <a:pPr algn="r">
+              <a:lnSpc>
+                <a:spcPct val="100000"/>
+              </a:lnSpc>
+            </a:pPr>
+            <a:r>
+              <a:rPr sz="1150" b="0">
+                <a:solidFill>
+                  <a:srgbClr val="1A1A1A"/>
+                </a:solidFill>
+                <a:latin typeface="Georgia"/>
+              </a:rPr>
+              <a:t>like-for-like 2.500, i.e. 7.6% behind</a:t>
             </a:r>
           </a:p>
         </p:txBody>
@@ -10356,6 +9170,984 @@
       <p:sp>
         <p:nvSpPr>
           <p:cNvPr id="14" name="TextBox 13"/>
+          <p:cNvSpPr txBox="1"/>
+          <p:nvPr/>
+        </p:nvSpPr>
+        <p:spPr>
+          <a:xfrm>
+            <a:off x="685800" y="2514599"/>
+            <a:ext cx="3291840" cy="237744"/>
+          </a:xfrm>
+          <a:prstGeom prst="rect">
+            <a:avLst/>
+          </a:prstGeom>
+          <a:noFill/>
+        </p:spPr>
+        <p:txBody>
+          <a:bodyPr wrap="square">
+            <a:spAutoFit/>
+          </a:bodyPr>
+          <a:lstStyle/>
+          <a:p>
+            <a:pPr algn="l">
+              <a:lnSpc>
+                <a:spcPct val="100000"/>
+              </a:lnSpc>
+            </a:pPr>
+            <a:r>
+              <a:rPr sz="1150" b="0">
+                <a:solidFill>
+                  <a:srgbClr val="1A1A1A"/>
+                </a:solidFill>
+                <a:latin typeface="Georgia"/>
+              </a:rPr>
+              <a:t/>
+            </a:r>
+          </a:p>
+        </p:txBody>
+      </p:sp>
+      <p:sp>
+        <p:nvSpPr>
+          <p:cNvPr id="15" name="TextBox 14"/>
+          <p:cNvSpPr txBox="1"/>
+          <p:nvPr/>
+        </p:nvSpPr>
+        <p:spPr>
+          <a:xfrm>
+            <a:off x="3977639" y="2514599"/>
+            <a:ext cx="1737360" cy="237744"/>
+          </a:xfrm>
+          <a:prstGeom prst="rect">
+            <a:avLst/>
+          </a:prstGeom>
+          <a:noFill/>
+        </p:spPr>
+        <p:txBody>
+          <a:bodyPr wrap="square">
+            <a:spAutoFit/>
+          </a:bodyPr>
+          <a:lstStyle/>
+          <a:p>
+            <a:pPr algn="r">
+              <a:lnSpc>
+                <a:spcPct val="100000"/>
+              </a:lnSpc>
+            </a:pPr>
+            <a:r>
+              <a:rPr sz="1150" b="0">
+                <a:solidFill>
+                  <a:srgbClr val="1A1A1A"/>
+                </a:solidFill>
+                <a:latin typeface="Georgia"/>
+              </a:rPr>
+              <a:t/>
+            </a:r>
+          </a:p>
+        </p:txBody>
+      </p:sp>
+      <p:sp>
+        <p:nvSpPr>
+          <p:cNvPr id="16" name="TextBox 15"/>
+          <p:cNvSpPr txBox="1"/>
+          <p:nvPr/>
+        </p:nvSpPr>
+        <p:spPr>
+          <a:xfrm>
+            <a:off x="5715000" y="2514599"/>
+            <a:ext cx="5852160" cy="237744"/>
+          </a:xfrm>
+          <a:prstGeom prst="rect">
+            <a:avLst/>
+          </a:prstGeom>
+          <a:noFill/>
+        </p:spPr>
+        <p:txBody>
+          <a:bodyPr wrap="square">
+            <a:spAutoFit/>
+          </a:bodyPr>
+          <a:lstStyle/>
+          <a:p>
+            <a:pPr algn="r">
+              <a:lnSpc>
+                <a:spcPct val="100000"/>
+              </a:lnSpc>
+            </a:pPr>
+            <a:r>
+              <a:rPr sz="1150" b="0">
+                <a:solidFill>
+                  <a:srgbClr val="1A1A1A"/>
+                </a:solidFill>
+                <a:latin typeface="Georgia"/>
+              </a:rPr>
+              <a:t/>
+            </a:r>
+          </a:p>
+        </p:txBody>
+      </p:sp>
+      <p:sp>
+        <p:nvSpPr>
+          <p:cNvPr id="17" name="TextBox 16"/>
+          <p:cNvSpPr txBox="1"/>
+          <p:nvPr/>
+        </p:nvSpPr>
+        <p:spPr>
+          <a:xfrm>
+            <a:off x="685800" y="2788919"/>
+            <a:ext cx="3291840" cy="237744"/>
+          </a:xfrm>
+          <a:prstGeom prst="rect">
+            <a:avLst/>
+          </a:prstGeom>
+          <a:noFill/>
+        </p:spPr>
+        <p:txBody>
+          <a:bodyPr wrap="square">
+            <a:spAutoFit/>
+          </a:bodyPr>
+          <a:lstStyle/>
+          <a:p>
+            <a:pPr algn="l">
+              <a:lnSpc>
+                <a:spcPct val="100000"/>
+              </a:lnSpc>
+            </a:pPr>
+            <a:r>
+              <a:rPr sz="1150" b="0">
+                <a:solidFill>
+                  <a:srgbClr val="1A1A1A"/>
+                </a:solidFill>
+                <a:latin typeface="Georgia"/>
+              </a:rPr>
+              <a:t>Less compute than v2</a:t>
+            </a:r>
+          </a:p>
+        </p:txBody>
+      </p:sp>
+      <p:sp>
+        <p:nvSpPr>
+          <p:cNvPr id="18" name="TextBox 17"/>
+          <p:cNvSpPr txBox="1"/>
+          <p:nvPr/>
+        </p:nvSpPr>
+        <p:spPr>
+          <a:xfrm>
+            <a:off x="3977639" y="2788919"/>
+            <a:ext cx="1737360" cy="237744"/>
+          </a:xfrm>
+          <a:prstGeom prst="rect">
+            <a:avLst/>
+          </a:prstGeom>
+          <a:noFill/>
+        </p:spPr>
+        <p:txBody>
+          <a:bodyPr wrap="square">
+            <a:spAutoFit/>
+          </a:bodyPr>
+          <a:lstStyle/>
+          <a:p>
+            <a:pPr algn="r">
+              <a:lnSpc>
+                <a:spcPct val="100000"/>
+              </a:lnSpc>
+            </a:pPr>
+            <a:r>
+              <a:rPr sz="1150" b="0">
+                <a:solidFill>
+                  <a:srgbClr val="1A1A1A"/>
+                </a:solidFill>
+                <a:latin typeface="Georgia"/>
+              </a:rPr>
+              <a:t>PARTLY</a:t>
+            </a:r>
+          </a:p>
+        </p:txBody>
+      </p:sp>
+      <p:sp>
+        <p:nvSpPr>
+          <p:cNvPr id="19" name="TextBox 18"/>
+          <p:cNvSpPr txBox="1"/>
+          <p:nvPr/>
+        </p:nvSpPr>
+        <p:spPr>
+          <a:xfrm>
+            <a:off x="5715000" y="2788919"/>
+            <a:ext cx="5852160" cy="237744"/>
+          </a:xfrm>
+          <a:prstGeom prst="rect">
+            <a:avLst/>
+          </a:prstGeom>
+          <a:noFill/>
+        </p:spPr>
+        <p:txBody>
+          <a:bodyPr wrap="square">
+            <a:spAutoFit/>
+          </a:bodyPr>
+          <a:lstStyle/>
+          <a:p>
+            <a:pPr algn="r">
+              <a:lnSpc>
+                <a:spcPct val="100000"/>
+              </a:lnSpc>
+            </a:pPr>
+            <a:r>
+              <a:rPr sz="1150" b="0">
+                <a:solidFill>
+                  <a:srgbClr val="1A1A1A"/>
+                </a:solidFill>
+                <a:latin typeface="Georgia"/>
+              </a:rPr>
+              <a:t>dense 11% slower; first query level</a:t>
+            </a:r>
+          </a:p>
+        </p:txBody>
+      </p:sp>
+      <p:sp>
+        <p:nvSpPr>
+          <p:cNvPr id="20" name="TextBox 19"/>
+          <p:cNvSpPr txBox="1"/>
+          <p:nvPr/>
+        </p:nvSpPr>
+        <p:spPr>
+          <a:xfrm>
+            <a:off x="685800" y="3063239"/>
+            <a:ext cx="3291840" cy="237744"/>
+          </a:xfrm>
+          <a:prstGeom prst="rect">
+            <a:avLst/>
+          </a:prstGeom>
+          <a:noFill/>
+        </p:spPr>
+        <p:txBody>
+          <a:bodyPr wrap="square">
+            <a:spAutoFit/>
+          </a:bodyPr>
+          <a:lstStyle/>
+          <a:p>
+            <a:pPr algn="l">
+              <a:lnSpc>
+                <a:spcPct val="100000"/>
+              </a:lnSpc>
+            </a:pPr>
+            <a:r>
+              <a:rPr sz="1150" b="0">
+                <a:solidFill>
+                  <a:srgbClr val="1A1A1A"/>
+                </a:solidFill>
+                <a:latin typeface="Georgia"/>
+              </a:rPr>
+              <a:t/>
+            </a:r>
+          </a:p>
+        </p:txBody>
+      </p:sp>
+      <p:sp>
+        <p:nvSpPr>
+          <p:cNvPr id="21" name="TextBox 20"/>
+          <p:cNvSpPr txBox="1"/>
+          <p:nvPr/>
+        </p:nvSpPr>
+        <p:spPr>
+          <a:xfrm>
+            <a:off x="3977639" y="3063239"/>
+            <a:ext cx="1737360" cy="237744"/>
+          </a:xfrm>
+          <a:prstGeom prst="rect">
+            <a:avLst/>
+          </a:prstGeom>
+          <a:noFill/>
+        </p:spPr>
+        <p:txBody>
+          <a:bodyPr wrap="square">
+            <a:spAutoFit/>
+          </a:bodyPr>
+          <a:lstStyle/>
+          <a:p>
+            <a:pPr algn="r">
+              <a:lnSpc>
+                <a:spcPct val="100000"/>
+              </a:lnSpc>
+            </a:pPr>
+            <a:r>
+              <a:rPr sz="1150" b="0">
+                <a:solidFill>
+                  <a:srgbClr val="1A1A1A"/>
+                </a:solidFill>
+                <a:latin typeface="Georgia"/>
+              </a:rPr>
+              <a:t/>
+            </a:r>
+          </a:p>
+        </p:txBody>
+      </p:sp>
+      <p:sp>
+        <p:nvSpPr>
+          <p:cNvPr id="22" name="TextBox 21"/>
+          <p:cNvSpPr txBox="1"/>
+          <p:nvPr/>
+        </p:nvSpPr>
+        <p:spPr>
+          <a:xfrm>
+            <a:off x="5715000" y="3063239"/>
+            <a:ext cx="5852160" cy="237744"/>
+          </a:xfrm>
+          <a:prstGeom prst="rect">
+            <a:avLst/>
+          </a:prstGeom>
+          <a:noFill/>
+        </p:spPr>
+        <p:txBody>
+          <a:bodyPr wrap="square">
+            <a:spAutoFit/>
+          </a:bodyPr>
+          <a:lstStyle/>
+          <a:p>
+            <a:pPr algn="r">
+              <a:lnSpc>
+                <a:spcPct val="100000"/>
+              </a:lnSpc>
+            </a:pPr>
+            <a:r>
+              <a:rPr sz="1150" b="0">
+                <a:solidFill>
+                  <a:srgbClr val="1A1A1A"/>
+                </a:solidFill>
+                <a:latin typeface="Georgia"/>
+              </a:rPr>
+              <a:t>repeat query 27x cheaper (1.3 vs 33.3 ms)</a:t>
+            </a:r>
+          </a:p>
+        </p:txBody>
+      </p:sp>
+      <p:sp>
+        <p:nvSpPr>
+          <p:cNvPr id="23" name="TextBox 22"/>
+          <p:cNvSpPr txBox="1"/>
+          <p:nvPr/>
+        </p:nvSpPr>
+        <p:spPr>
+          <a:xfrm>
+            <a:off x="685800" y="3337559"/>
+            <a:ext cx="3291840" cy="237744"/>
+          </a:xfrm>
+          <a:prstGeom prst="rect">
+            <a:avLst/>
+          </a:prstGeom>
+          <a:noFill/>
+        </p:spPr>
+        <p:txBody>
+          <a:bodyPr wrap="square">
+            <a:spAutoFit/>
+          </a:bodyPr>
+          <a:lstStyle/>
+          <a:p>
+            <a:pPr algn="l">
+              <a:lnSpc>
+                <a:spcPct val="100000"/>
+              </a:lnSpc>
+            </a:pPr>
+            <a:r>
+              <a:rPr sz="1150" b="0">
+                <a:solidFill>
+                  <a:srgbClr val="1A1A1A"/>
+                </a:solidFill>
+                <a:latin typeface="Georgia"/>
+              </a:rPr>
+              <a:t/>
+            </a:r>
+          </a:p>
+        </p:txBody>
+      </p:sp>
+      <p:sp>
+        <p:nvSpPr>
+          <p:cNvPr id="24" name="TextBox 23"/>
+          <p:cNvSpPr txBox="1"/>
+          <p:nvPr/>
+        </p:nvSpPr>
+        <p:spPr>
+          <a:xfrm>
+            <a:off x="3977639" y="3337559"/>
+            <a:ext cx="1737360" cy="237744"/>
+          </a:xfrm>
+          <a:prstGeom prst="rect">
+            <a:avLst/>
+          </a:prstGeom>
+          <a:noFill/>
+        </p:spPr>
+        <p:txBody>
+          <a:bodyPr wrap="square">
+            <a:spAutoFit/>
+          </a:bodyPr>
+          <a:lstStyle/>
+          <a:p>
+            <a:pPr algn="r">
+              <a:lnSpc>
+                <a:spcPct val="100000"/>
+              </a:lnSpc>
+            </a:pPr>
+            <a:r>
+              <a:rPr sz="1150" b="0">
+                <a:solidFill>
+                  <a:srgbClr val="1A1A1A"/>
+                </a:solidFill>
+                <a:latin typeface="Georgia"/>
+              </a:rPr>
+              <a:t/>
+            </a:r>
+          </a:p>
+        </p:txBody>
+      </p:sp>
+      <p:sp>
+        <p:nvSpPr>
+          <p:cNvPr id="25" name="TextBox 24"/>
+          <p:cNvSpPr txBox="1"/>
+          <p:nvPr/>
+        </p:nvSpPr>
+        <p:spPr>
+          <a:xfrm>
+            <a:off x="5715000" y="3337559"/>
+            <a:ext cx="5852160" cy="237744"/>
+          </a:xfrm>
+          <a:prstGeom prst="rect">
+            <a:avLst/>
+          </a:prstGeom>
+          <a:noFill/>
+        </p:spPr>
+        <p:txBody>
+          <a:bodyPr wrap="square">
+            <a:spAutoFit/>
+          </a:bodyPr>
+          <a:lstStyle/>
+          <a:p>
+            <a:pPr algn="r">
+              <a:lnSpc>
+                <a:spcPct val="100000"/>
+              </a:lnSpc>
+            </a:pPr>
+            <a:r>
+              <a:rPr sz="1150" b="0">
+                <a:solidFill>
+                  <a:srgbClr val="1A1A1A"/>
+                </a:solidFill>
+                <a:latin typeface="Georgia"/>
+              </a:rPr>
+              <a:t/>
+            </a:r>
+          </a:p>
+        </p:txBody>
+      </p:sp>
+      <p:sp>
+        <p:nvSpPr>
+          <p:cNvPr id="26" name="TextBox 25"/>
+          <p:cNvSpPr txBox="1"/>
+          <p:nvPr/>
+        </p:nvSpPr>
+        <p:spPr>
+          <a:xfrm>
+            <a:off x="685800" y="3611879"/>
+            <a:ext cx="3291840" cy="237744"/>
+          </a:xfrm>
+          <a:prstGeom prst="rect">
+            <a:avLst/>
+          </a:prstGeom>
+          <a:noFill/>
+        </p:spPr>
+        <p:txBody>
+          <a:bodyPr wrap="square">
+            <a:spAutoFit/>
+          </a:bodyPr>
+          <a:lstStyle/>
+          <a:p>
+            <a:pPr algn="l">
+              <a:lnSpc>
+                <a:spcPct val="100000"/>
+              </a:lnSpc>
+            </a:pPr>
+            <a:r>
+              <a:rPr sz="1150" b="0">
+                <a:solidFill>
+                  <a:srgbClr val="1A1A1A"/>
+                </a:solidFill>
+                <a:latin typeface="Georgia"/>
+              </a:rPr>
+              <a:t>Runs on edge devices</a:t>
+            </a:r>
+          </a:p>
+        </p:txBody>
+      </p:sp>
+      <p:sp>
+        <p:nvSpPr>
+          <p:cNvPr id="27" name="TextBox 26"/>
+          <p:cNvSpPr txBox="1"/>
+          <p:nvPr/>
+        </p:nvSpPr>
+        <p:spPr>
+          <a:xfrm>
+            <a:off x="3977639" y="3611879"/>
+            <a:ext cx="1737360" cy="237744"/>
+          </a:xfrm>
+          <a:prstGeom prst="rect">
+            <a:avLst/>
+          </a:prstGeom>
+          <a:noFill/>
+        </p:spPr>
+        <p:txBody>
+          <a:bodyPr wrap="square">
+            <a:spAutoFit/>
+          </a:bodyPr>
+          <a:lstStyle/>
+          <a:p>
+            <a:pPr algn="r">
+              <a:lnSpc>
+                <a:spcPct val="100000"/>
+              </a:lnSpc>
+            </a:pPr>
+            <a:r>
+              <a:rPr sz="1150" b="0">
+                <a:solidFill>
+                  <a:srgbClr val="1A1A1A"/>
+                </a:solidFill>
+                <a:latin typeface="Georgia"/>
+              </a:rPr>
+              <a:t>UNPROVEN</a:t>
+            </a:r>
+          </a:p>
+        </p:txBody>
+      </p:sp>
+      <p:sp>
+        <p:nvSpPr>
+          <p:cNvPr id="28" name="TextBox 27"/>
+          <p:cNvSpPr txBox="1"/>
+          <p:nvPr/>
+        </p:nvSpPr>
+        <p:spPr>
+          <a:xfrm>
+            <a:off x="5715000" y="3611879"/>
+            <a:ext cx="5852160" cy="237744"/>
+          </a:xfrm>
+          <a:prstGeom prst="rect">
+            <a:avLst/>
+          </a:prstGeom>
+          <a:noFill/>
+        </p:spPr>
+        <p:txBody>
+          <a:bodyPr wrap="square">
+            <a:spAutoFit/>
+          </a:bodyPr>
+          <a:lstStyle/>
+          <a:p>
+            <a:pPr algn="r">
+              <a:lnSpc>
+                <a:spcPct val="100000"/>
+              </a:lnSpc>
+            </a:pPr>
+            <a:r>
+              <a:rPr sz="1150" b="0">
+                <a:solidFill>
+                  <a:srgbClr val="1A1A1A"/>
+                </a:solidFill>
+                <a:latin typeface="Georgia"/>
+              </a:rPr>
+              <a:t>all figures from a laptop RTX 4060</a:t>
+            </a:r>
+          </a:p>
+        </p:txBody>
+      </p:sp>
+      <p:sp>
+        <p:nvSpPr>
+          <p:cNvPr id="29" name="TextBox 28"/>
+          <p:cNvSpPr txBox="1"/>
+          <p:nvPr/>
+        </p:nvSpPr>
+        <p:spPr>
+          <a:xfrm>
+            <a:off x="685800" y="3886199"/>
+            <a:ext cx="3291840" cy="237744"/>
+          </a:xfrm>
+          <a:prstGeom prst="rect">
+            <a:avLst/>
+          </a:prstGeom>
+          <a:noFill/>
+        </p:spPr>
+        <p:txBody>
+          <a:bodyPr wrap="square">
+            <a:spAutoFit/>
+          </a:bodyPr>
+          <a:lstStyle/>
+          <a:p>
+            <a:pPr algn="l">
+              <a:lnSpc>
+                <a:spcPct val="100000"/>
+              </a:lnSpc>
+            </a:pPr>
+            <a:r>
+              <a:rPr sz="1150" b="0">
+                <a:solidFill>
+                  <a:srgbClr val="1A1A1A"/>
+                </a:solidFill>
+                <a:latin typeface="Georgia"/>
+              </a:rPr>
+              <a:t/>
+            </a:r>
+          </a:p>
+        </p:txBody>
+      </p:sp>
+      <p:sp>
+        <p:nvSpPr>
+          <p:cNvPr id="30" name="TextBox 29"/>
+          <p:cNvSpPr txBox="1"/>
+          <p:nvPr/>
+        </p:nvSpPr>
+        <p:spPr>
+          <a:xfrm>
+            <a:off x="3977639" y="3886199"/>
+            <a:ext cx="1737360" cy="237744"/>
+          </a:xfrm>
+          <a:prstGeom prst="rect">
+            <a:avLst/>
+          </a:prstGeom>
+          <a:noFill/>
+        </p:spPr>
+        <p:txBody>
+          <a:bodyPr wrap="square">
+            <a:spAutoFit/>
+          </a:bodyPr>
+          <a:lstStyle/>
+          <a:p>
+            <a:pPr algn="r">
+              <a:lnSpc>
+                <a:spcPct val="100000"/>
+              </a:lnSpc>
+            </a:pPr>
+            <a:r>
+              <a:rPr sz="1150" b="0">
+                <a:solidFill>
+                  <a:srgbClr val="1A1A1A"/>
+                </a:solidFill>
+                <a:latin typeface="Georgia"/>
+              </a:rPr>
+              <a:t/>
+            </a:r>
+          </a:p>
+        </p:txBody>
+      </p:sp>
+      <p:sp>
+        <p:nvSpPr>
+          <p:cNvPr id="31" name="TextBox 30"/>
+          <p:cNvSpPr txBox="1"/>
+          <p:nvPr/>
+        </p:nvSpPr>
+        <p:spPr>
+          <a:xfrm>
+            <a:off x="5715000" y="3886199"/>
+            <a:ext cx="5852160" cy="237744"/>
+          </a:xfrm>
+          <a:prstGeom prst="rect">
+            <a:avLst/>
+          </a:prstGeom>
+          <a:noFill/>
+        </p:spPr>
+        <p:txBody>
+          <a:bodyPr wrap="square">
+            <a:spAutoFit/>
+          </a:bodyPr>
+          <a:lstStyle/>
+          <a:p>
+            <a:pPr algn="r">
+              <a:lnSpc>
+                <a:spcPct val="100000"/>
+              </a:lnSpc>
+            </a:pPr>
+            <a:r>
+              <a:rPr sz="1150" b="0">
+                <a:solidFill>
+                  <a:srgbClr val="1A1A1A"/>
+                </a:solidFill>
+                <a:latin typeface="Georgia"/>
+              </a:rPr>
+              <a:t>no Jetson measurement has been taken</a:t>
+            </a:r>
+          </a:p>
+        </p:txBody>
+      </p:sp>
+      <p:sp>
+        <p:nvSpPr>
+          <p:cNvPr id="32" name="TextBox 31"/>
+          <p:cNvSpPr txBox="1"/>
+          <p:nvPr/>
+        </p:nvSpPr>
+        <p:spPr>
+          <a:xfrm>
+            <a:off x="685800" y="4434840"/>
+            <a:ext cx="10881360" cy="365760"/>
+          </a:xfrm>
+          <a:prstGeom prst="rect">
+            <a:avLst/>
+          </a:prstGeom>
+          <a:noFill/>
+        </p:spPr>
+        <p:txBody>
+          <a:bodyPr wrap="square">
+            <a:spAutoFit/>
+          </a:bodyPr>
+          <a:lstStyle/>
+          <a:p>
+            <a:pPr algn="l">
+              <a:lnSpc>
+                <a:spcPct val="100000"/>
+              </a:lnSpc>
+            </a:pPr>
+            <a:r>
+              <a:rPr sz="1250" b="1">
+                <a:solidFill>
+                  <a:srgbClr val="333333"/>
+                </a:solidFill>
+                <a:latin typeface="Georgia"/>
+              </a:rPr>
+              <a:t>What the project does deliver</a:t>
+            </a:r>
+          </a:p>
+        </p:txBody>
+      </p:sp>
+      <p:sp>
+        <p:nvSpPr>
+          <p:cNvPr id="33" name="Rounded Rectangle 32"/>
+          <p:cNvSpPr/>
+          <p:nvPr/>
+        </p:nvSpPr>
+        <p:spPr>
+          <a:xfrm>
+            <a:off x="685800" y="4846320"/>
+            <a:ext cx="3474720" cy="1005840"/>
+          </a:xfrm>
+          <a:prstGeom prst="roundRect">
+            <a:avLst/>
+          </a:prstGeom>
+          <a:solidFill>
+            <a:srgbClr val="EFEFEF"/>
+          </a:solidFill>
+          <a:ln w="9525">
+            <a:solidFill>
+              <a:srgbClr val="8A8A8A"/>
+            </a:solidFill>
+          </a:ln>
+          <a:effectLst/>
+        </p:spPr>
+        <p:style>
+          <a:lnRef idx="1">
+            <a:schemeClr val="accent1"/>
+          </a:lnRef>
+          <a:fillRef idx="3">
+            <a:schemeClr val="accent1"/>
+          </a:fillRef>
+          <a:effectRef idx="2">
+            <a:schemeClr val="accent1"/>
+          </a:effectRef>
+          <a:fontRef idx="minor">
+            <a:schemeClr val="lt1"/>
+          </a:fontRef>
+        </p:style>
+        <p:txBody>
+          <a:bodyPr rtlCol="0" anchor="ctr" wrap="square" lIns="73152" rIns="73152"/>
+          <a:lstStyle/>
+          <a:p>
+            <a:pPr algn="ctr"/>
+            <a:r>
+              <a:rPr sz="1050" b="0">
+                <a:solidFill>
+                  <a:srgbClr val="1A1A1A"/>
+                </a:solidFill>
+                <a:latin typeface="Georgia"/>
+              </a:rPr>
+              <a:t>Queryable output</a:t>
+            </a:r>
+          </a:p>
+          <a:p>
+            <a:pPr algn="ctr"/>
+            <a:r>
+              <a:rPr sz="1050" b="0">
+                <a:solidFill>
+                  <a:srgbClr val="1A1A1A"/>
+                </a:solidFill>
+                <a:latin typeface="Georgia"/>
+              </a:rPr>
+              <a:t/>
+            </a:r>
+          </a:p>
+          <a:p>
+            <a:pPr algn="ctr"/>
+            <a:r>
+              <a:rPr sz="1050" b="0">
+                <a:solidFill>
+                  <a:srgbClr val="1A1A1A"/>
+                </a:solidFill>
+                <a:latin typeface="Georgia"/>
+              </a:rPr>
+              <a:t>flow at any continuous coordinate, sparse equals dense exactly</a:t>
+            </a:r>
+          </a:p>
+        </p:txBody>
+      </p:sp>
+      <p:sp>
+        <p:nvSpPr>
+          <p:cNvPr id="34" name="Rounded Rectangle 33"/>
+          <p:cNvSpPr/>
+          <p:nvPr/>
+        </p:nvSpPr>
+        <p:spPr>
+          <a:xfrm>
+            <a:off x="4343400" y="4846320"/>
+            <a:ext cx="3474720" cy="1005840"/>
+          </a:xfrm>
+          <a:prstGeom prst="roundRect">
+            <a:avLst/>
+          </a:prstGeom>
+          <a:solidFill>
+            <a:srgbClr val="EFEFEF"/>
+          </a:solidFill>
+          <a:ln w="9525">
+            <a:solidFill>
+              <a:srgbClr val="8A8A8A"/>
+            </a:solidFill>
+          </a:ln>
+          <a:effectLst/>
+        </p:spPr>
+        <p:style>
+          <a:lnRef idx="1">
+            <a:schemeClr val="accent1"/>
+          </a:lnRef>
+          <a:fillRef idx="3">
+            <a:schemeClr val="accent1"/>
+          </a:fillRef>
+          <a:effectRef idx="2">
+            <a:schemeClr val="accent1"/>
+          </a:effectRef>
+          <a:fontRef idx="minor">
+            <a:schemeClr val="lt1"/>
+          </a:fontRef>
+        </p:style>
+        <p:txBody>
+          <a:bodyPr rtlCol="0" anchor="ctr" wrap="square" lIns="73152" rIns="73152"/>
+          <a:lstStyle/>
+          <a:p>
+            <a:pPr algn="ctr"/>
+            <a:r>
+              <a:rPr sz="1050" b="0">
+                <a:solidFill>
+                  <a:srgbClr val="1A1A1A"/>
+                </a:solidFill>
+                <a:latin typeface="Georgia"/>
+              </a:rPr>
+              <a:t>Cheap repeat access</a:t>
+            </a:r>
+          </a:p>
+          <a:p>
+            <a:pPr algn="ctr"/>
+            <a:r>
+              <a:rPr sz="1050" b="0">
+                <a:solidFill>
+                  <a:srgbClr val="1A1A1A"/>
+                </a:solidFill>
+                <a:latin typeface="Georgia"/>
+              </a:rPr>
+              <a:t/>
+            </a:r>
+          </a:p>
+          <a:p>
+            <a:pPr algn="ctr"/>
+            <a:r>
+              <a:rPr sz="1050" b="0">
+                <a:solidFill>
+                  <a:srgbClr val="1A1A1A"/>
+                </a:solidFill>
+                <a:latin typeface="Georgia"/>
+              </a:rPr>
+              <a:t>1.3 ms per further query batch on a cached frame</a:t>
+            </a:r>
+          </a:p>
+        </p:txBody>
+      </p:sp>
+      <p:sp>
+        <p:nvSpPr>
+          <p:cNvPr id="35" name="Rounded Rectangle 34"/>
+          <p:cNvSpPr/>
+          <p:nvPr/>
+        </p:nvSpPr>
+        <p:spPr>
+          <a:xfrm>
+            <a:off x="8001000" y="4846320"/>
+            <a:ext cx="3474720" cy="1005840"/>
+          </a:xfrm>
+          <a:prstGeom prst="roundRect">
+            <a:avLst/>
+          </a:prstGeom>
+          <a:solidFill>
+            <a:srgbClr val="EFEFEF"/>
+          </a:solidFill>
+          <a:ln w="9525">
+            <a:solidFill>
+              <a:srgbClr val="8A8A8A"/>
+            </a:solidFill>
+          </a:ln>
+          <a:effectLst/>
+        </p:spPr>
+        <p:style>
+          <a:lnRef idx="1">
+            <a:schemeClr val="accent1"/>
+          </a:lnRef>
+          <a:fillRef idx="3">
+            <a:schemeClr val="accent1"/>
+          </a:fillRef>
+          <a:effectRef idx="2">
+            <a:schemeClr val="accent1"/>
+          </a:effectRef>
+          <a:fontRef idx="minor">
+            <a:schemeClr val="lt1"/>
+          </a:fontRef>
+        </p:style>
+        <p:txBody>
+          <a:bodyPr rtlCol="0" anchor="ctr" wrap="square" lIns="73152" rIns="73152"/>
+          <a:lstStyle/>
+          <a:p>
+            <a:pPr algn="ctr"/>
+            <a:r>
+              <a:rPr sz="1050" b="0">
+                <a:solidFill>
+                  <a:srgbClr val="1A1A1A"/>
+                </a:solidFill>
+                <a:latin typeface="Georgia"/>
+              </a:rPr>
+              <a:t>Calibrated confidence</a:t>
+            </a:r>
+          </a:p>
+          <a:p>
+            <a:pPr algn="ctr"/>
+            <a:r>
+              <a:rPr sz="1050" b="0">
+                <a:solidFill>
+                  <a:srgbClr val="1A1A1A"/>
+                </a:solidFill>
+                <a:latin typeface="Georgia"/>
+              </a:rPr>
+              <a:t/>
+            </a:r>
+          </a:p>
+          <a:p>
+            <a:pPr algn="ctr"/>
+            <a:r>
+              <a:rPr sz="1050" b="0">
+                <a:solidFill>
+                  <a:srgbClr val="1A1A1A"/>
+                </a:solidFill>
+                <a:latin typeface="Georgia"/>
+              </a:rPr>
+              <a:t>per-query error estimate, monotonic against real error</a:t>
+            </a:r>
+          </a:p>
+        </p:txBody>
+      </p:sp>
+      <p:sp>
+        <p:nvSpPr>
+          <p:cNvPr id="36" name="TextBox 35"/>
           <p:cNvSpPr txBox="1"/>
           <p:nvPr/>
         </p:nvSpPr>
@@ -10394,7 +10186,7 @@
       </p:sp>
       <p:sp>
         <p:nvSpPr>
-          <p:cNvPr id="15" name="TextBox 14"/>
+          <p:cNvPr id="37" name="TextBox 36"/>
           <p:cNvSpPr txBox="1"/>
           <p:nvPr/>
         </p:nvSpPr>
@@ -10491,7 +10283,7 @@
                 </a:solidFill>
                 <a:latin typeface="Georgia"/>
               </a:rPr>
-              <a:t>NEXT STEPS</a:t>
+              <a:t>LIMITATIONS</a:t>
             </a:r>
           </a:p>
         </p:txBody>
@@ -10530,62 +10322,46 @@
                 </a:solidFill>
                 <a:latin typeface="Georgia"/>
               </a:rPr>
-              <a:t>In priority order</a:t>
-            </a:r>
-          </a:p>
-        </p:txBody>
-      </p:sp>
-      <p:sp>
-        <p:nvSpPr>
-          <p:cNvPr id="4" name="Rounded Rectangle 3"/>
-          <p:cNvSpPr/>
-          <p:nvPr/>
-        </p:nvSpPr>
-        <p:spPr>
-          <a:xfrm>
-            <a:off x="685800" y="1691640"/>
-            <a:ext cx="384048" cy="384048"/>
-          </a:xfrm>
-          <a:prstGeom prst="roundRect">
-            <a:avLst/>
-          </a:prstGeom>
-          <a:solidFill>
-            <a:srgbClr val="333333"/>
-          </a:solidFill>
-          <a:ln w="9525">
-            <a:solidFill>
-              <a:srgbClr val="8A8A8A"/>
-            </a:solidFill>
-          </a:ln>
-          <a:effectLst/>
-        </p:spPr>
-        <p:style>
-          <a:lnRef idx="1">
-            <a:schemeClr val="accent1"/>
-          </a:lnRef>
-          <a:fillRef idx="3">
-            <a:schemeClr val="accent1"/>
-          </a:fillRef>
-          <a:effectRef idx="2">
-            <a:schemeClr val="accent1"/>
-          </a:effectRef>
-          <a:fontRef idx="minor">
-            <a:schemeClr val="lt1"/>
-          </a:fontRef>
-        </p:style>
-        <p:txBody>
-          <a:bodyPr rtlCol="0" anchor="ctr" wrap="square" lIns="73152" rIns="73152"/>
-          <a:lstStyle/>
-          <a:p>
-            <a:pPr algn="ctr"/>
-            <a:r>
-              <a:rPr sz="1200" b="1">
-                <a:solidFill>
-                  <a:srgbClr val="FFFFFF"/>
-                </a:solidFill>
-                <a:latin typeface="Georgia"/>
-              </a:rPr>
-              <a:t>1</a:t>
+              <a:t>What is not yet proven, stated plainly</a:t>
+            </a:r>
+          </a:p>
+        </p:txBody>
+      </p:sp>
+      <p:sp>
+        <p:nvSpPr>
+          <p:cNvPr id="4" name="TextBox 3"/>
+          <p:cNvSpPr txBox="1"/>
+          <p:nvPr/>
+        </p:nvSpPr>
+        <p:spPr>
+          <a:xfrm>
+            <a:off x="685800" y="1645920"/>
+            <a:ext cx="4023360" cy="274320"/>
+          </a:xfrm>
+          <a:prstGeom prst="rect">
+            <a:avLst/>
+          </a:prstGeom>
+          <a:noFill/>
+        </p:spPr>
+        <p:txBody>
+          <a:bodyPr wrap="square">
+            <a:spAutoFit/>
+          </a:bodyPr>
+          <a:lstStyle/>
+          <a:p>
+            <a:pPr algn="l">
+              <a:lnSpc>
+                <a:spcPct val="100000"/>
+              </a:lnSpc>
+            </a:pPr>
+            <a:r>
+              <a:rPr sz="1150" b="1">
+                <a:solidFill>
+                  <a:srgbClr val="1A1A1A"/>
+                </a:solidFill>
+                <a:latin typeface="Georgia"/>
+              </a:rPr>
+              <a:t>Sub-pixel precision is worse than v2</a:t>
             </a:r>
           </a:p>
         </p:txBody>
@@ -10598,8 +10374,47 @@
         </p:nvSpPr>
         <p:spPr>
           <a:xfrm>
-            <a:off x="1234440" y="1673352"/>
-            <a:ext cx="3657600" cy="274320"/>
+            <a:off x="4846320" y="1645920"/>
+            <a:ext cx="6675120" cy="548640"/>
+          </a:xfrm>
+          <a:prstGeom prst="rect">
+            <a:avLst/>
+          </a:prstGeom>
+          <a:noFill/>
+        </p:spPr>
+        <p:txBody>
+          <a:bodyPr wrap="square">
+            <a:spAutoFit/>
+          </a:bodyPr>
+          <a:lstStyle/>
+          <a:p>
+            <a:pPr algn="l">
+              <a:lnSpc>
+                <a:spcPct val="112000"/>
+              </a:lnSpc>
+            </a:pPr>
+            <a:r>
+              <a:rPr sz="1100" b="0">
+                <a:solidFill>
+                  <a:srgbClr val="1A1A1A"/>
+                </a:solidFill>
+                <a:latin typeface="Georgia"/>
+              </a:rPr>
+              <a:t>By 0.8 to 6.3 points of 1-pixel accuracy. Cause diagnosed (decoder never sees full-resolution input.</a:t>
+            </a:r>
+          </a:p>
+        </p:txBody>
+      </p:sp>
+      <p:sp>
+        <p:nvSpPr>
+          <p:cNvPr id="6" name="TextBox 5"/>
+          <p:cNvSpPr txBox="1"/>
+          <p:nvPr/>
+        </p:nvSpPr>
+        <p:spPr>
+          <a:xfrm>
+            <a:off x="685800" y="2578608"/>
+            <a:ext cx="4023360" cy="274320"/>
           </a:xfrm>
           <a:prstGeom prst="rect">
             <a:avLst/>
@@ -10618,27 +10433,27 @@
               </a:lnSpc>
             </a:pPr>
             <a:r>
-              <a:rPr sz="1200" b="1">
-                <a:solidFill>
-                  <a:srgbClr val="1A1A1A"/>
-                </a:solidFill>
-                <a:latin typeface="Georgia"/>
-              </a:rPr>
-              <a:t>Full-resolution stem for the decoder</a:t>
-            </a:r>
-          </a:p>
-        </p:txBody>
-      </p:sp>
-      <p:sp>
-        <p:nvSpPr>
-          <p:cNvPr id="6" name="TextBox 5"/>
-          <p:cNvSpPr txBox="1"/>
-          <p:nvPr/>
-        </p:nvSpPr>
-        <p:spPr>
-          <a:xfrm>
-            <a:off x="5029200" y="1673352"/>
-            <a:ext cx="6492240" cy="822960"/>
+              <a:rPr sz="1150" b="1">
+                <a:solidFill>
+                  <a:srgbClr val="1A1A1A"/>
+                </a:solidFill>
+                <a:latin typeface="Georgia"/>
+              </a:rPr>
+              <a:t>No edge-device measurement</a:t>
+            </a:r>
+          </a:p>
+        </p:txBody>
+      </p:sp>
+      <p:sp>
+        <p:nvSpPr>
+          <p:cNvPr id="7" name="TextBox 6"/>
+          <p:cNvSpPr txBox="1"/>
+          <p:nvPr/>
+        </p:nvSpPr>
+        <p:spPr>
+          <a:xfrm>
+            <a:off x="4846320" y="2578608"/>
+            <a:ext cx="6675120" cy="548640"/>
           </a:xfrm>
           <a:prstGeom prst="rect">
             <a:avLst/>
@@ -10663,62 +10478,7 @@
                 </a:solidFill>
                 <a:latin typeface="Georgia"/>
               </a:rPr>
-              <a:t>Give the decoder a cheap full-resolution feature map so evidence actually varies within an 8x8 cell. This is the direct attack on the precision gap and on making continuous querying meaningful rather than nominal.</a:t>
-            </a:r>
-          </a:p>
-        </p:txBody>
-      </p:sp>
-      <p:sp>
-        <p:nvSpPr>
-          <p:cNvPr id="7" name="Rounded Rectangle 6"/>
-          <p:cNvSpPr/>
-          <p:nvPr/>
-        </p:nvSpPr>
-        <p:spPr>
-          <a:xfrm>
-            <a:off x="685800" y="2862072"/>
-            <a:ext cx="384048" cy="384048"/>
-          </a:xfrm>
-          <a:prstGeom prst="roundRect">
-            <a:avLst/>
-          </a:prstGeom>
-          <a:solidFill>
-            <a:srgbClr val="333333"/>
-          </a:solidFill>
-          <a:ln w="9525">
-            <a:solidFill>
-              <a:srgbClr val="8A8A8A"/>
-            </a:solidFill>
-          </a:ln>
-          <a:effectLst/>
-        </p:spPr>
-        <p:style>
-          <a:lnRef idx="1">
-            <a:schemeClr val="accent1"/>
-          </a:lnRef>
-          <a:fillRef idx="3">
-            <a:schemeClr val="accent1"/>
-          </a:fillRef>
-          <a:effectRef idx="2">
-            <a:schemeClr val="accent1"/>
-          </a:effectRef>
-          <a:fontRef idx="minor">
-            <a:schemeClr val="lt1"/>
-          </a:fontRef>
-        </p:style>
-        <p:txBody>
-          <a:bodyPr rtlCol="0" anchor="ctr" wrap="square" lIns="73152" rIns="73152"/>
-          <a:lstStyle/>
-          <a:p>
-            <a:pPr algn="ctr"/>
-            <a:r>
-              <a:rPr sz="1200" b="1">
-                <a:solidFill>
-                  <a:srgbClr val="FFFFFF"/>
-                </a:solidFill>
-                <a:latin typeface="Georgia"/>
-              </a:rPr>
-              <a:t>2</a:t>
+              <a:t>Every latency figure is from a laptop RTX 4060. The edge claim in the title is a design target, not a result.</a:t>
             </a:r>
           </a:p>
         </p:txBody>
@@ -10731,8 +10491,8 @@
         </p:nvSpPr>
         <p:spPr>
           <a:xfrm>
-            <a:off x="1234440" y="2843784"/>
-            <a:ext cx="3657600" cy="274320"/>
+            <a:off x="685800" y="3511296"/>
+            <a:ext cx="4023360" cy="274320"/>
           </a:xfrm>
           <a:prstGeom prst="rect">
             <a:avLst/>
@@ -10751,13 +10511,13 @@
               </a:lnSpc>
             </a:pPr>
             <a:r>
-              <a:rPr sz="1200" b="1">
-                <a:solidFill>
-                  <a:srgbClr val="1A1A1A"/>
-                </a:solidFill>
-                <a:latin typeface="Georgia"/>
-              </a:rPr>
-              <a:t>Spring 4K evaluation</a:t>
+              <a:rPr sz="1150" b="1">
+                <a:solidFill>
+                  <a:srgbClr val="1A1A1A"/>
+                </a:solidFill>
+                <a:latin typeface="Georgia"/>
+              </a:rPr>
+              <a:t>Single evaluation domain</a:t>
             </a:r>
           </a:p>
         </p:txBody>
@@ -10770,8 +10530,8 @@
         </p:nvSpPr>
         <p:spPr>
           <a:xfrm>
-            <a:off x="5029200" y="2843784"/>
-            <a:ext cx="6492240" cy="822960"/>
+            <a:off x="4846320" y="3511296"/>
+            <a:ext cx="6675120" cy="548640"/>
           </a:xfrm>
           <a:prstGeom prst="rect">
             <a:avLst/>
@@ -10796,62 +10556,46 @@
                 </a:solidFill>
                 <a:latin typeface="Georgia"/>
               </a:rPr>
-              <a:t>Spring provides ground truth at twice the input resolution. v3 can be queried there natively; v2 structurally cannot. The one test that demonstrates a capability rather than a margin.</a:t>
-            </a:r>
-          </a:p>
-        </p:txBody>
-      </p:sp>
-      <p:sp>
-        <p:nvSpPr>
-          <p:cNvPr id="10" name="Rounded Rectangle 9"/>
-          <p:cNvSpPr/>
-          <p:nvPr/>
-        </p:nvSpPr>
-        <p:spPr>
-          <a:xfrm>
-            <a:off x="685800" y="4032504"/>
-            <a:ext cx="384048" cy="384048"/>
-          </a:xfrm>
-          <a:prstGeom prst="roundRect">
-            <a:avLst/>
-          </a:prstGeom>
-          <a:solidFill>
-            <a:srgbClr val="333333"/>
-          </a:solidFill>
-          <a:ln w="9525">
-            <a:solidFill>
-              <a:srgbClr val="8A8A8A"/>
-            </a:solidFill>
-          </a:ln>
-          <a:effectLst/>
-        </p:spPr>
-        <p:style>
-          <a:lnRef idx="1">
-            <a:schemeClr val="accent1"/>
-          </a:lnRef>
-          <a:fillRef idx="3">
-            <a:schemeClr val="accent1"/>
-          </a:fillRef>
-          <a:effectRef idx="2">
-            <a:schemeClr val="accent1"/>
-          </a:effectRef>
-          <a:fontRef idx="minor">
-            <a:schemeClr val="lt1"/>
-          </a:fontRef>
-        </p:style>
-        <p:txBody>
-          <a:bodyPr rtlCol="0" anchor="ctr" wrap="square" lIns="73152" rIns="73152"/>
-          <a:lstStyle/>
-          <a:p>
-            <a:pPr algn="ctr"/>
-            <a:r>
-              <a:rPr sz="1200" b="1">
-                <a:solidFill>
-                  <a:srgbClr val="FFFFFF"/>
-                </a:solidFill>
-                <a:latin typeface="Georgia"/>
-              </a:rPr>
-              <a:t>3</a:t>
+              <a:t>All accuracy numbers are VKITTI2 Scene18+20. A synthetic driving benchmark is not evidence for field or survey imagery.</a:t>
+            </a:r>
+          </a:p>
+        </p:txBody>
+      </p:sp>
+      <p:sp>
+        <p:nvSpPr>
+          <p:cNvPr id="10" name="TextBox 9"/>
+          <p:cNvSpPr txBox="1"/>
+          <p:nvPr/>
+        </p:nvSpPr>
+        <p:spPr>
+          <a:xfrm>
+            <a:off x="685800" y="4443984"/>
+            <a:ext cx="4023360" cy="274320"/>
+          </a:xfrm>
+          <a:prstGeom prst="rect">
+            <a:avLst/>
+          </a:prstGeom>
+          <a:noFill/>
+        </p:spPr>
+        <p:txBody>
+          <a:bodyPr wrap="square">
+            <a:spAutoFit/>
+          </a:bodyPr>
+          <a:lstStyle/>
+          <a:p>
+            <a:pPr algn="l">
+              <a:lnSpc>
+                <a:spcPct val="100000"/>
+              </a:lnSpc>
+            </a:pPr>
+            <a:r>
+              <a:rPr sz="1150" b="1">
+                <a:solidFill>
+                  <a:srgbClr val="1A1A1A"/>
+                </a:solidFill>
+                <a:latin typeface="Georgia"/>
+              </a:rPr>
+              <a:t>Spring run truncated</a:t>
             </a:r>
           </a:p>
         </p:txBody>
@@ -10864,8 +10608,47 @@
         </p:nvSpPr>
         <p:spPr>
           <a:xfrm>
-            <a:off x="1234440" y="4014216"/>
-            <a:ext cx="3657600" cy="274320"/>
+            <a:off x="4846320" y="4443984"/>
+            <a:ext cx="6675120" cy="548640"/>
+          </a:xfrm>
+          <a:prstGeom prst="rect">
+            <a:avLst/>
+          </a:prstGeom>
+          <a:noFill/>
+        </p:spPr>
+        <p:txBody>
+          <a:bodyPr wrap="square">
+            <a:spAutoFit/>
+          </a:bodyPr>
+          <a:lstStyle/>
+          <a:p>
+            <a:pPr algn="l">
+              <a:lnSpc>
+                <a:spcPct val="112000"/>
+              </a:lnSpc>
+            </a:pPr>
+            <a:r>
+              <a:rPr sz="1100" b="0">
+                <a:solidFill>
+                  <a:srgbClr val="1A1A1A"/>
+                </a:solidFill>
+                <a:latin typeface="Georgia"/>
+              </a:rPr>
+              <a:t>Killed by the 8-hour wall clock at roughly 90k of 100k steps, so it is not directly comparable to the others.</a:t>
+            </a:r>
+          </a:p>
+        </p:txBody>
+      </p:sp>
+      <p:sp>
+        <p:nvSpPr>
+          <p:cNvPr id="12" name="TextBox 11"/>
+          <p:cNvSpPr txBox="1"/>
+          <p:nvPr/>
+        </p:nvSpPr>
+        <p:spPr>
+          <a:xfrm>
+            <a:off x="685800" y="5376672"/>
+            <a:ext cx="4023360" cy="274320"/>
           </a:xfrm>
           <a:prstGeom prst="rect">
             <a:avLst/>
@@ -10884,27 +10667,27 @@
               </a:lnSpc>
             </a:pPr>
             <a:r>
-              <a:rPr sz="1200" b="1">
-                <a:solidFill>
-                  <a:srgbClr val="1A1A1A"/>
-                </a:solidFill>
-                <a:latin typeface="Georgia"/>
-              </a:rPr>
-              <a:t>Jetson measurement</a:t>
-            </a:r>
-          </a:p>
-        </p:txBody>
-      </p:sp>
-      <p:sp>
-        <p:nvSpPr>
-          <p:cNvPr id="12" name="TextBox 11"/>
-          <p:cNvSpPr txBox="1"/>
-          <p:nvPr/>
-        </p:nvSpPr>
-        <p:spPr>
-          <a:xfrm>
-            <a:off x="5029200" y="4014216"/>
-            <a:ext cx="6492240" cy="822960"/>
+              <a:rPr sz="1150" b="1">
+                <a:solidFill>
+                  <a:srgbClr val="1A1A1A"/>
+                </a:solidFill>
+                <a:latin typeface="Georgia"/>
+              </a:rPr>
+              <a:t>One seed, and checkpoint noise the size of the effects</a:t>
+            </a:r>
+          </a:p>
+        </p:txBody>
+      </p:sp>
+      <p:sp>
+        <p:nvSpPr>
+          <p:cNvPr id="13" name="TextBox 12"/>
+          <p:cNvSpPr txBox="1"/>
+          <p:nvPr/>
+        </p:nvSpPr>
+        <p:spPr>
+          <a:xfrm>
+            <a:off x="4846320" y="5376672"/>
+            <a:ext cx="6675120" cy="548640"/>
           </a:xfrm>
           <a:prstGeom prst="rect">
             <a:avLst/>
@@ -10929,62 +10712,7 @@
                 </a:solidFill>
                 <a:latin typeface="Georgia"/>
               </a:rPr>
-              <a:t>Converts the edge claim from a design target into a result, or refutes it.</a:t>
-            </a:r>
-          </a:p>
-        </p:txBody>
-      </p:sp>
-      <p:sp>
-        <p:nvSpPr>
-          <p:cNvPr id="13" name="Rounded Rectangle 12"/>
-          <p:cNvSpPr/>
-          <p:nvPr/>
-        </p:nvSpPr>
-        <p:spPr>
-          <a:xfrm>
-            <a:off x="685800" y="5202936"/>
-            <a:ext cx="384048" cy="384048"/>
-          </a:xfrm>
-          <a:prstGeom prst="roundRect">
-            <a:avLst/>
-          </a:prstGeom>
-          <a:solidFill>
-            <a:srgbClr val="333333"/>
-          </a:solidFill>
-          <a:ln w="9525">
-            <a:solidFill>
-              <a:srgbClr val="8A8A8A"/>
-            </a:solidFill>
-          </a:ln>
-          <a:effectLst/>
-        </p:spPr>
-        <p:style>
-          <a:lnRef idx="1">
-            <a:schemeClr val="accent1"/>
-          </a:lnRef>
-          <a:fillRef idx="3">
-            <a:schemeClr val="accent1"/>
-          </a:fillRef>
-          <a:effectRef idx="2">
-            <a:schemeClr val="accent1"/>
-          </a:effectRef>
-          <a:fontRef idx="minor">
-            <a:schemeClr val="lt1"/>
-          </a:fontRef>
-        </p:style>
-        <p:txBody>
-          <a:bodyPr rtlCol="0" anchor="ctr" wrap="square" lIns="73152" rIns="73152"/>
-          <a:lstStyle/>
-          <a:p>
-            <a:pPr algn="ctr"/>
-            <a:r>
-              <a:rPr sz="1200" b="1">
-                <a:solidFill>
-                  <a:srgbClr val="FFFFFF"/>
-                </a:solidFill>
-                <a:latin typeface="Georgia"/>
-              </a:rPr>
-              <a:t>4</a:t>
+              <a:t>Step 90k vs 100k of the same run moves EPE by up to 0.038 px, reversing two of the orderings. Nothing finer than about 0.05 px is resolvable here.</a:t>
             </a:r>
           </a:p>
         </p:txBody>
@@ -10992,84 +10720,6 @@
       <p:sp>
         <p:nvSpPr>
           <p:cNvPr id="14" name="TextBox 13"/>
-          <p:cNvSpPr txBox="1"/>
-          <p:nvPr/>
-        </p:nvSpPr>
-        <p:spPr>
-          <a:xfrm>
-            <a:off x="1234440" y="5184648"/>
-            <a:ext cx="3657600" cy="274320"/>
-          </a:xfrm>
-          <a:prstGeom prst="rect">
-            <a:avLst/>
-          </a:prstGeom>
-          <a:noFill/>
-        </p:spPr>
-        <p:txBody>
-          <a:bodyPr wrap="square">
-            <a:spAutoFit/>
-          </a:bodyPr>
-          <a:lstStyle/>
-          <a:p>
-            <a:pPr algn="l">
-              <a:lnSpc>
-                <a:spcPct val="100000"/>
-              </a:lnSpc>
-            </a:pPr>
-            <a:r>
-              <a:rPr sz="1200" b="1">
-                <a:solidFill>
-                  <a:srgbClr val="1A1A1A"/>
-                </a:solidFill>
-                <a:latin typeface="Georgia"/>
-              </a:rPr>
-              <a:t>Field or survey imagery</a:t>
-            </a:r>
-          </a:p>
-        </p:txBody>
-      </p:sp>
-      <p:sp>
-        <p:nvSpPr>
-          <p:cNvPr id="15" name="TextBox 14"/>
-          <p:cNvSpPr txBox="1"/>
-          <p:nvPr/>
-        </p:nvSpPr>
-        <p:spPr>
-          <a:xfrm>
-            <a:off x="5029200" y="5184648"/>
-            <a:ext cx="6492240" cy="822960"/>
-          </a:xfrm>
-          <a:prstGeom prst="rect">
-            <a:avLst/>
-          </a:prstGeom>
-          <a:noFill/>
-        </p:spPr>
-        <p:txBody>
-          <a:bodyPr wrap="square">
-            <a:spAutoFit/>
-          </a:bodyPr>
-          <a:lstStyle/>
-          <a:p>
-            <a:pPr algn="l">
-              <a:lnSpc>
-                <a:spcPct val="112000"/>
-              </a:lnSpc>
-            </a:pPr>
-            <a:r>
-              <a:rPr sz="1100" b="0">
-                <a:solidFill>
-                  <a:srgbClr val="1A1A1A"/>
-                </a:solidFill>
-                <a:latin typeface="Georgia"/>
-              </a:rPr>
-              <a:t>A registration demonstration on lab data would test the actual use case.</a:t>
-            </a:r>
-          </a:p>
-        </p:txBody>
-      </p:sp>
-      <p:sp>
-        <p:nvSpPr>
-          <p:cNvPr id="16" name="TextBox 15"/>
           <p:cNvSpPr txBox="1"/>
           <p:nvPr/>
         </p:nvSpPr>
@@ -11108,7 +10758,7 @@
       </p:sp>
       <p:sp>
         <p:nvSpPr>
-          <p:cNvPr id="17" name="TextBox 16"/>
+          <p:cNvPr id="15" name="TextBox 14"/>
           <p:cNvSpPr txBox="1"/>
           <p:nvPr/>
         </p:nvSpPr>
@@ -11205,7 +10855,7 @@
                 </a:solidFill>
                 <a:latin typeface="Georgia"/>
               </a:rPr>
-              <a:t>ANTICIPATED QUESTIONS</a:t>
+              <a:t>NEXT STEPS</a:t>
             </a:r>
           </a:p>
         </p:txBody>
@@ -11244,6 +10894,720 @@
                 </a:solidFill>
                 <a:latin typeface="Georgia"/>
               </a:rPr>
+              <a:t>In priority order</a:t>
+            </a:r>
+          </a:p>
+        </p:txBody>
+      </p:sp>
+      <p:sp>
+        <p:nvSpPr>
+          <p:cNvPr id="4" name="Rounded Rectangle 3"/>
+          <p:cNvSpPr/>
+          <p:nvPr/>
+        </p:nvSpPr>
+        <p:spPr>
+          <a:xfrm>
+            <a:off x="685800" y="1691640"/>
+            <a:ext cx="384048" cy="384048"/>
+          </a:xfrm>
+          <a:prstGeom prst="roundRect">
+            <a:avLst/>
+          </a:prstGeom>
+          <a:solidFill>
+            <a:srgbClr val="333333"/>
+          </a:solidFill>
+          <a:ln w="9525">
+            <a:solidFill>
+              <a:srgbClr val="8A8A8A"/>
+            </a:solidFill>
+          </a:ln>
+          <a:effectLst/>
+        </p:spPr>
+        <p:style>
+          <a:lnRef idx="1">
+            <a:schemeClr val="accent1"/>
+          </a:lnRef>
+          <a:fillRef idx="3">
+            <a:schemeClr val="accent1"/>
+          </a:fillRef>
+          <a:effectRef idx="2">
+            <a:schemeClr val="accent1"/>
+          </a:effectRef>
+          <a:fontRef idx="minor">
+            <a:schemeClr val="lt1"/>
+          </a:fontRef>
+        </p:style>
+        <p:txBody>
+          <a:bodyPr rtlCol="0" anchor="ctr" wrap="square" lIns="73152" rIns="73152"/>
+          <a:lstStyle/>
+          <a:p>
+            <a:pPr algn="ctr"/>
+            <a:r>
+              <a:rPr sz="1200" b="1">
+                <a:solidFill>
+                  <a:srgbClr val="FFFFFF"/>
+                </a:solidFill>
+                <a:latin typeface="Georgia"/>
+              </a:rPr>
+              <a:t>1</a:t>
+            </a:r>
+          </a:p>
+        </p:txBody>
+      </p:sp>
+      <p:sp>
+        <p:nvSpPr>
+          <p:cNvPr id="5" name="TextBox 4"/>
+          <p:cNvSpPr txBox="1"/>
+          <p:nvPr/>
+        </p:nvSpPr>
+        <p:spPr>
+          <a:xfrm>
+            <a:off x="1234440" y="1673352"/>
+            <a:ext cx="3657600" cy="274320"/>
+          </a:xfrm>
+          <a:prstGeom prst="rect">
+            <a:avLst/>
+          </a:prstGeom>
+          <a:noFill/>
+        </p:spPr>
+        <p:txBody>
+          <a:bodyPr wrap="square">
+            <a:spAutoFit/>
+          </a:bodyPr>
+          <a:lstStyle/>
+          <a:p>
+            <a:pPr algn="l">
+              <a:lnSpc>
+                <a:spcPct val="100000"/>
+              </a:lnSpc>
+            </a:pPr>
+            <a:r>
+              <a:rPr sz="1200" b="1">
+                <a:solidFill>
+                  <a:srgbClr val="1A1A1A"/>
+                </a:solidFill>
+                <a:latin typeface="Georgia"/>
+              </a:rPr>
+              <a:t>Full-resolution stem for the decoder</a:t>
+            </a:r>
+          </a:p>
+        </p:txBody>
+      </p:sp>
+      <p:sp>
+        <p:nvSpPr>
+          <p:cNvPr id="6" name="TextBox 5"/>
+          <p:cNvSpPr txBox="1"/>
+          <p:nvPr/>
+        </p:nvSpPr>
+        <p:spPr>
+          <a:xfrm>
+            <a:off x="5029200" y="1673352"/>
+            <a:ext cx="6492240" cy="822960"/>
+          </a:xfrm>
+          <a:prstGeom prst="rect">
+            <a:avLst/>
+          </a:prstGeom>
+          <a:noFill/>
+        </p:spPr>
+        <p:txBody>
+          <a:bodyPr wrap="square">
+            <a:spAutoFit/>
+          </a:bodyPr>
+          <a:lstStyle/>
+          <a:p>
+            <a:pPr algn="l">
+              <a:lnSpc>
+                <a:spcPct val="112000"/>
+              </a:lnSpc>
+            </a:pPr>
+            <a:r>
+              <a:rPr sz="1100" b="0">
+                <a:solidFill>
+                  <a:srgbClr val="1A1A1A"/>
+                </a:solidFill>
+                <a:latin typeface="Georgia"/>
+              </a:rPr>
+              <a:t>Give the decoder a cheap full-resolution feature map so evidence actually varies within an 8x8 cell. This is the direct attack on the precision gap and on making continuous querying meaningful rather than nominal.</a:t>
+            </a:r>
+          </a:p>
+        </p:txBody>
+      </p:sp>
+      <p:sp>
+        <p:nvSpPr>
+          <p:cNvPr id="7" name="Rounded Rectangle 6"/>
+          <p:cNvSpPr/>
+          <p:nvPr/>
+        </p:nvSpPr>
+        <p:spPr>
+          <a:xfrm>
+            <a:off x="685800" y="2862072"/>
+            <a:ext cx="384048" cy="384048"/>
+          </a:xfrm>
+          <a:prstGeom prst="roundRect">
+            <a:avLst/>
+          </a:prstGeom>
+          <a:solidFill>
+            <a:srgbClr val="333333"/>
+          </a:solidFill>
+          <a:ln w="9525">
+            <a:solidFill>
+              <a:srgbClr val="8A8A8A"/>
+            </a:solidFill>
+          </a:ln>
+          <a:effectLst/>
+        </p:spPr>
+        <p:style>
+          <a:lnRef idx="1">
+            <a:schemeClr val="accent1"/>
+          </a:lnRef>
+          <a:fillRef idx="3">
+            <a:schemeClr val="accent1"/>
+          </a:fillRef>
+          <a:effectRef idx="2">
+            <a:schemeClr val="accent1"/>
+          </a:effectRef>
+          <a:fontRef idx="minor">
+            <a:schemeClr val="lt1"/>
+          </a:fontRef>
+        </p:style>
+        <p:txBody>
+          <a:bodyPr rtlCol="0" anchor="ctr" wrap="square" lIns="73152" rIns="73152"/>
+          <a:lstStyle/>
+          <a:p>
+            <a:pPr algn="ctr"/>
+            <a:r>
+              <a:rPr sz="1200" b="1">
+                <a:solidFill>
+                  <a:srgbClr val="FFFFFF"/>
+                </a:solidFill>
+                <a:latin typeface="Georgia"/>
+              </a:rPr>
+              <a:t>2</a:t>
+            </a:r>
+          </a:p>
+        </p:txBody>
+      </p:sp>
+      <p:sp>
+        <p:nvSpPr>
+          <p:cNvPr id="8" name="TextBox 7"/>
+          <p:cNvSpPr txBox="1"/>
+          <p:nvPr/>
+        </p:nvSpPr>
+        <p:spPr>
+          <a:xfrm>
+            <a:off x="1234440" y="2843784"/>
+            <a:ext cx="3657600" cy="274320"/>
+          </a:xfrm>
+          <a:prstGeom prst="rect">
+            <a:avLst/>
+          </a:prstGeom>
+          <a:noFill/>
+        </p:spPr>
+        <p:txBody>
+          <a:bodyPr wrap="square">
+            <a:spAutoFit/>
+          </a:bodyPr>
+          <a:lstStyle/>
+          <a:p>
+            <a:pPr algn="l">
+              <a:lnSpc>
+                <a:spcPct val="100000"/>
+              </a:lnSpc>
+            </a:pPr>
+            <a:r>
+              <a:rPr sz="1200" b="1">
+                <a:solidFill>
+                  <a:srgbClr val="1A1A1A"/>
+                </a:solidFill>
+                <a:latin typeface="Georgia"/>
+              </a:rPr>
+              <a:t>Spring 4K evaluation</a:t>
+            </a:r>
+          </a:p>
+        </p:txBody>
+      </p:sp>
+      <p:sp>
+        <p:nvSpPr>
+          <p:cNvPr id="9" name="TextBox 8"/>
+          <p:cNvSpPr txBox="1"/>
+          <p:nvPr/>
+        </p:nvSpPr>
+        <p:spPr>
+          <a:xfrm>
+            <a:off x="5029200" y="2843784"/>
+            <a:ext cx="6492240" cy="822960"/>
+          </a:xfrm>
+          <a:prstGeom prst="rect">
+            <a:avLst/>
+          </a:prstGeom>
+          <a:noFill/>
+        </p:spPr>
+        <p:txBody>
+          <a:bodyPr wrap="square">
+            <a:spAutoFit/>
+          </a:bodyPr>
+          <a:lstStyle/>
+          <a:p>
+            <a:pPr algn="l">
+              <a:lnSpc>
+                <a:spcPct val="112000"/>
+              </a:lnSpc>
+            </a:pPr>
+            <a:r>
+              <a:rPr sz="1100" b="0">
+                <a:solidFill>
+                  <a:srgbClr val="1A1A1A"/>
+                </a:solidFill>
+                <a:latin typeface="Georgia"/>
+              </a:rPr>
+              <a:t>Spring provides ground truth at twice the input resolution. v3 can be queried there natively; v2 structurally cannot. The one test that demonstrates a capability rather than a margin.</a:t>
+            </a:r>
+          </a:p>
+        </p:txBody>
+      </p:sp>
+      <p:sp>
+        <p:nvSpPr>
+          <p:cNvPr id="10" name="Rounded Rectangle 9"/>
+          <p:cNvSpPr/>
+          <p:nvPr/>
+        </p:nvSpPr>
+        <p:spPr>
+          <a:xfrm>
+            <a:off x="685800" y="4032504"/>
+            <a:ext cx="384048" cy="384048"/>
+          </a:xfrm>
+          <a:prstGeom prst="roundRect">
+            <a:avLst/>
+          </a:prstGeom>
+          <a:solidFill>
+            <a:srgbClr val="333333"/>
+          </a:solidFill>
+          <a:ln w="9525">
+            <a:solidFill>
+              <a:srgbClr val="8A8A8A"/>
+            </a:solidFill>
+          </a:ln>
+          <a:effectLst/>
+        </p:spPr>
+        <p:style>
+          <a:lnRef idx="1">
+            <a:schemeClr val="accent1"/>
+          </a:lnRef>
+          <a:fillRef idx="3">
+            <a:schemeClr val="accent1"/>
+          </a:fillRef>
+          <a:effectRef idx="2">
+            <a:schemeClr val="accent1"/>
+          </a:effectRef>
+          <a:fontRef idx="minor">
+            <a:schemeClr val="lt1"/>
+          </a:fontRef>
+        </p:style>
+        <p:txBody>
+          <a:bodyPr rtlCol="0" anchor="ctr" wrap="square" lIns="73152" rIns="73152"/>
+          <a:lstStyle/>
+          <a:p>
+            <a:pPr algn="ctr"/>
+            <a:r>
+              <a:rPr sz="1200" b="1">
+                <a:solidFill>
+                  <a:srgbClr val="FFFFFF"/>
+                </a:solidFill>
+                <a:latin typeface="Georgia"/>
+              </a:rPr>
+              <a:t>3</a:t>
+            </a:r>
+          </a:p>
+        </p:txBody>
+      </p:sp>
+      <p:sp>
+        <p:nvSpPr>
+          <p:cNvPr id="11" name="TextBox 10"/>
+          <p:cNvSpPr txBox="1"/>
+          <p:nvPr/>
+        </p:nvSpPr>
+        <p:spPr>
+          <a:xfrm>
+            <a:off x="1234440" y="4014216"/>
+            <a:ext cx="3657600" cy="274320"/>
+          </a:xfrm>
+          <a:prstGeom prst="rect">
+            <a:avLst/>
+          </a:prstGeom>
+          <a:noFill/>
+        </p:spPr>
+        <p:txBody>
+          <a:bodyPr wrap="square">
+            <a:spAutoFit/>
+          </a:bodyPr>
+          <a:lstStyle/>
+          <a:p>
+            <a:pPr algn="l">
+              <a:lnSpc>
+                <a:spcPct val="100000"/>
+              </a:lnSpc>
+            </a:pPr>
+            <a:r>
+              <a:rPr sz="1200" b="1">
+                <a:solidFill>
+                  <a:srgbClr val="1A1A1A"/>
+                </a:solidFill>
+                <a:latin typeface="Georgia"/>
+              </a:rPr>
+              <a:t>Jetson measurement</a:t>
+            </a:r>
+          </a:p>
+        </p:txBody>
+      </p:sp>
+      <p:sp>
+        <p:nvSpPr>
+          <p:cNvPr id="12" name="TextBox 11"/>
+          <p:cNvSpPr txBox="1"/>
+          <p:nvPr/>
+        </p:nvSpPr>
+        <p:spPr>
+          <a:xfrm>
+            <a:off x="5029200" y="4014216"/>
+            <a:ext cx="6492240" cy="822960"/>
+          </a:xfrm>
+          <a:prstGeom prst="rect">
+            <a:avLst/>
+          </a:prstGeom>
+          <a:noFill/>
+        </p:spPr>
+        <p:txBody>
+          <a:bodyPr wrap="square">
+            <a:spAutoFit/>
+          </a:bodyPr>
+          <a:lstStyle/>
+          <a:p>
+            <a:pPr algn="l">
+              <a:lnSpc>
+                <a:spcPct val="112000"/>
+              </a:lnSpc>
+            </a:pPr>
+            <a:r>
+              <a:rPr sz="1100" b="0">
+                <a:solidFill>
+                  <a:srgbClr val="1A1A1A"/>
+                </a:solidFill>
+                <a:latin typeface="Georgia"/>
+              </a:rPr>
+              <a:t>Converts the edge claim from a design target into a result, or refutes it.</a:t>
+            </a:r>
+          </a:p>
+        </p:txBody>
+      </p:sp>
+      <p:sp>
+        <p:nvSpPr>
+          <p:cNvPr id="13" name="Rounded Rectangle 12"/>
+          <p:cNvSpPr/>
+          <p:nvPr/>
+        </p:nvSpPr>
+        <p:spPr>
+          <a:xfrm>
+            <a:off x="685800" y="5202936"/>
+            <a:ext cx="384048" cy="384048"/>
+          </a:xfrm>
+          <a:prstGeom prst="roundRect">
+            <a:avLst/>
+          </a:prstGeom>
+          <a:solidFill>
+            <a:srgbClr val="333333"/>
+          </a:solidFill>
+          <a:ln w="9525">
+            <a:solidFill>
+              <a:srgbClr val="8A8A8A"/>
+            </a:solidFill>
+          </a:ln>
+          <a:effectLst/>
+        </p:spPr>
+        <p:style>
+          <a:lnRef idx="1">
+            <a:schemeClr val="accent1"/>
+          </a:lnRef>
+          <a:fillRef idx="3">
+            <a:schemeClr val="accent1"/>
+          </a:fillRef>
+          <a:effectRef idx="2">
+            <a:schemeClr val="accent1"/>
+          </a:effectRef>
+          <a:fontRef idx="minor">
+            <a:schemeClr val="lt1"/>
+          </a:fontRef>
+        </p:style>
+        <p:txBody>
+          <a:bodyPr rtlCol="0" anchor="ctr" wrap="square" lIns="73152" rIns="73152"/>
+          <a:lstStyle/>
+          <a:p>
+            <a:pPr algn="ctr"/>
+            <a:r>
+              <a:rPr sz="1200" b="1">
+                <a:solidFill>
+                  <a:srgbClr val="FFFFFF"/>
+                </a:solidFill>
+                <a:latin typeface="Georgia"/>
+              </a:rPr>
+              <a:t>4</a:t>
+            </a:r>
+          </a:p>
+        </p:txBody>
+      </p:sp>
+      <p:sp>
+        <p:nvSpPr>
+          <p:cNvPr id="14" name="TextBox 13"/>
+          <p:cNvSpPr txBox="1"/>
+          <p:nvPr/>
+        </p:nvSpPr>
+        <p:spPr>
+          <a:xfrm>
+            <a:off x="1234440" y="5184648"/>
+            <a:ext cx="3657600" cy="274320"/>
+          </a:xfrm>
+          <a:prstGeom prst="rect">
+            <a:avLst/>
+          </a:prstGeom>
+          <a:noFill/>
+        </p:spPr>
+        <p:txBody>
+          <a:bodyPr wrap="square">
+            <a:spAutoFit/>
+          </a:bodyPr>
+          <a:lstStyle/>
+          <a:p>
+            <a:pPr algn="l">
+              <a:lnSpc>
+                <a:spcPct val="100000"/>
+              </a:lnSpc>
+            </a:pPr>
+            <a:r>
+              <a:rPr sz="1200" b="1">
+                <a:solidFill>
+                  <a:srgbClr val="1A1A1A"/>
+                </a:solidFill>
+                <a:latin typeface="Georgia"/>
+              </a:rPr>
+              <a:t>Field or survey imagery</a:t>
+            </a:r>
+          </a:p>
+        </p:txBody>
+      </p:sp>
+      <p:sp>
+        <p:nvSpPr>
+          <p:cNvPr id="15" name="TextBox 14"/>
+          <p:cNvSpPr txBox="1"/>
+          <p:nvPr/>
+        </p:nvSpPr>
+        <p:spPr>
+          <a:xfrm>
+            <a:off x="5029200" y="5184648"/>
+            <a:ext cx="6492240" cy="822960"/>
+          </a:xfrm>
+          <a:prstGeom prst="rect">
+            <a:avLst/>
+          </a:prstGeom>
+          <a:noFill/>
+        </p:spPr>
+        <p:txBody>
+          <a:bodyPr wrap="square">
+            <a:spAutoFit/>
+          </a:bodyPr>
+          <a:lstStyle/>
+          <a:p>
+            <a:pPr algn="l">
+              <a:lnSpc>
+                <a:spcPct val="112000"/>
+              </a:lnSpc>
+            </a:pPr>
+            <a:r>
+              <a:rPr sz="1100" b="0">
+                <a:solidFill>
+                  <a:srgbClr val="1A1A1A"/>
+                </a:solidFill>
+                <a:latin typeface="Georgia"/>
+              </a:rPr>
+              <a:t>A registration demonstration on lab data would test the actual use case.</a:t>
+            </a:r>
+          </a:p>
+        </p:txBody>
+      </p:sp>
+      <p:sp>
+        <p:nvSpPr>
+          <p:cNvPr id="16" name="TextBox 15"/>
+          <p:cNvSpPr txBox="1"/>
+          <p:nvPr/>
+        </p:nvSpPr>
+        <p:spPr>
+          <a:xfrm>
+            <a:off x="685800" y="6419088"/>
+            <a:ext cx="7315200" cy="274320"/>
+          </a:xfrm>
+          <a:prstGeom prst="rect">
+            <a:avLst/>
+          </a:prstGeom>
+          <a:noFill/>
+        </p:spPr>
+        <p:txBody>
+          <a:bodyPr wrap="square">
+            <a:spAutoFit/>
+          </a:bodyPr>
+          <a:lstStyle/>
+          <a:p>
+            <a:pPr algn="l">
+              <a:lnSpc>
+                <a:spcPct val="100000"/>
+              </a:lnSpc>
+            </a:pPr>
+            <a:r>
+              <a:rPr sz="900" b="0">
+                <a:solidFill>
+                  <a:srgbClr val="8A8A8A"/>
+                </a:solidFill>
+                <a:latin typeface="Georgia"/>
+              </a:rPr>
+              <a:t>NeuFlow v3, S. Raghav Srinivasan</a:t>
+            </a:r>
+          </a:p>
+        </p:txBody>
+      </p:sp>
+      <p:sp>
+        <p:nvSpPr>
+          <p:cNvPr id="17" name="TextBox 16"/>
+          <p:cNvSpPr txBox="1"/>
+          <p:nvPr/>
+        </p:nvSpPr>
+        <p:spPr>
+          <a:xfrm>
+            <a:off x="10607040" y="6419088"/>
+            <a:ext cx="1097280" cy="274320"/>
+          </a:xfrm>
+          <a:prstGeom prst="rect">
+            <a:avLst/>
+          </a:prstGeom>
+          <a:noFill/>
+        </p:spPr>
+        <p:txBody>
+          <a:bodyPr wrap="square">
+            <a:spAutoFit/>
+          </a:bodyPr>
+          <a:lstStyle/>
+          <a:p>
+            <a:pPr algn="l">
+              <a:lnSpc>
+                <a:spcPct val="100000"/>
+              </a:lnSpc>
+            </a:pPr>
+            <a:r>
+              <a:rPr sz="900" b="0">
+                <a:solidFill>
+                  <a:srgbClr val="8A8A8A"/>
+                </a:solidFill>
+                <a:latin typeface="Georgia"/>
+              </a:rPr>
+              <a:t>18</a:t>
+            </a:r>
+          </a:p>
+        </p:txBody>
+      </p:sp>
+    </p:spTree>
+  </p:cSld>
+  <p:clrMapOvr>
+    <a:masterClrMapping/>
+  </p:clrMapOvr>
+</p:sld>
+</file>
+
+<file path=ppt/slides/slide19.xml><?xml version="1.0" encoding="utf-8"?>
+<p:sld xmlns:a="http://schemas.openxmlformats.org/drawingml/2006/main" xmlns:p="http://schemas.openxmlformats.org/presentationml/2006/main" xmlns:r="http://schemas.openxmlformats.org/officeDocument/2006/relationships">
+  <p:cSld>
+    <p:bg>
+      <p:bgPr>
+        <a:solidFill>
+          <a:srgbClr val="FFFFFF"/>
+        </a:solidFill>
+        <a:effectLst/>
+      </p:bgPr>
+    </p:bg>
+    <p:spTree>
+      <p:nvGrpSpPr>
+        <p:cNvPr id="1" name=""/>
+        <p:cNvGrpSpPr/>
+        <p:nvPr/>
+      </p:nvGrpSpPr>
+      <p:grpSpPr/>
+      <p:sp>
+        <p:nvSpPr>
+          <p:cNvPr id="2" name="TextBox 1"/>
+          <p:cNvSpPr txBox="1"/>
+          <p:nvPr/>
+        </p:nvSpPr>
+        <p:spPr>
+          <a:xfrm>
+            <a:off x="685800" y="384048"/>
+            <a:ext cx="10515600" cy="274320"/>
+          </a:xfrm>
+          <a:prstGeom prst="rect">
+            <a:avLst/>
+          </a:prstGeom>
+          <a:noFill/>
+        </p:spPr>
+        <p:txBody>
+          <a:bodyPr wrap="square">
+            <a:spAutoFit/>
+          </a:bodyPr>
+          <a:lstStyle/>
+          <a:p>
+            <a:pPr algn="l">
+              <a:lnSpc>
+                <a:spcPct val="100000"/>
+              </a:lnSpc>
+            </a:pPr>
+            <a:r>
+              <a:rPr sz="1050" b="1">
+                <a:solidFill>
+                  <a:srgbClr val="333333"/>
+                </a:solidFill>
+                <a:latin typeface="Georgia"/>
+              </a:rPr>
+              <a:t>ANTICIPATED QUESTIONS</a:t>
+            </a:r>
+          </a:p>
+        </p:txBody>
+      </p:sp>
+      <p:sp>
+        <p:nvSpPr>
+          <p:cNvPr id="3" name="TextBox 2"/>
+          <p:cNvSpPr txBox="1"/>
+          <p:nvPr/>
+        </p:nvSpPr>
+        <p:spPr>
+          <a:xfrm>
+            <a:off x="667512" y="658368"/>
+            <a:ext cx="10881360" cy="731520"/>
+          </a:xfrm>
+          <a:prstGeom prst="rect">
+            <a:avLst/>
+          </a:prstGeom>
+          <a:noFill/>
+        </p:spPr>
+        <p:txBody>
+          <a:bodyPr wrap="square">
+            <a:spAutoFit/>
+          </a:bodyPr>
+          <a:lstStyle/>
+          <a:p>
+            <a:pPr algn="l">
+              <a:lnSpc>
+                <a:spcPct val="100000"/>
+              </a:lnSpc>
+            </a:pPr>
+            <a:r>
+              <a:rPr sz="2400" b="1">
+                <a:solidFill>
+                  <a:srgbClr val="1A1A1A"/>
+                </a:solidFill>
+                <a:latin typeface="Georgia"/>
+              </a:rPr>
               <a:t/>
             </a:r>
           </a:p>
@@ -11634,7 +11998,7 @@
                 </a:solidFill>
                 <a:latin typeface="Georgia"/>
               </a:rPr>
-              <a:t>18</a:t>
+              <a:t>19</a:t>
             </a:r>
           </a:p>
         </p:txBody>

--- a/docs/NeuFlow_v3_status.pptx
+++ b/docs/NeuFlow_v3_status.pptx
@@ -24,6 +24,7 @@
     <p:sldId id="272" r:id="rId24"/>
     <p:sldId id="273" r:id="rId25"/>
     <p:sldId id="274" r:id="rId26"/>
+    <p:sldId id="275" r:id="rId27"/>
   </p:sldIdLst>
   <p:sldSz cx="12191695" cy="6858000" type="screen4x3"/>
   <p:notesSz cx="6858000" cy="9144000"/>
@@ -800,7 +801,7 @@
           <a:lstStyle/>
           <a:p>
             <a:r>
-              <a:t>This is the scenario you described where the repeat query matters, and it is the one result that is specific to this architecture rather than to cropping. A frame is already in flight, and a new object enters the field of view. Because the coarse pass is cached, answering costs one point seven milliseconds for eight hundred points. A cropped pipeline cannot reuse anything: the new object is outside its box, so it runs a whole new pass at seven point three milliseconds, four times more, and the answer is worse, three point six pixels against two point one, because a fresh crop has lost the surrounding context. NeuFlow v2 keeps no state at all between calls. The general point is that this buys you the ability to answer a question you did not know you would have when the frame arrived, which on a moving platform is most of them.</a:t>
+              <a:t>One more result I did not expect. Everything else in this deck is measured on driving sequences, and v3 trained on driving data while v2 did not, which is a confound I have flagged throughout. Aerial data is neutral ground: v2 trained on FlyingThings, v3 on chairs, driving and Sintel, and neither has seen anything like this. On that neutral ground v3 comes out ahead at all seven margin settings, by between four thousandths and twenty nine thousandths of a pixel. The likely reason is that the decoder saw three datasets where v2 saw one, and the convex head is bounded so it cannot invent motion its inputs do not support, which should degrade more gracefully out of domain. I want to be careful about how much weight this carries: the margins are small, it is forty pairs and one seed, and v3 is still slightly worse on the large-motion pixels. What makes it worth showing is that it is consistent across seven independent settings, and that it is the only unconfounded head to head I have.</a:t>
             </a:r>
           </a:p>
         </p:txBody>
@@ -870,7 +871,7 @@
           <a:lstStyle/>
           <a:p>
             <a:r>
-              <a:t>The interface is two calls. One coarse pass per frame pair, then as many decode calls as you like against it. The plot shows decode cost is flat between 800 and 2,048 queries, which tells you it is dominated by kernel launch overhead, not arithmetic, so you get two thousand points for the price of eight hundred. Above about ten thousand points it becomes compute bound and you should just use dense mode.</a:t>
+              <a:t>This is the scenario you described where the repeat query matters, and it is the one result that is specific to this architecture rather than to cropping. A frame is already in flight, and a new object enters the field of view. Because the coarse pass is cached, answering costs one point seven milliseconds for eight hundred points. A cropped pipeline cannot reuse anything: the new object is outside its box, so it runs a whole new pass at seven point three milliseconds, four times more, and the answer is worse, three point six pixels against two point one, because a fresh crop has lost the surrounding context. NeuFlow v2 keeps no state at all between calls. The general point is that this buys you the ability to answer a question you did not know you would have when the frame arrived, which on a moving platform is most of them.</a:t>
             </a:r>
           </a:p>
         </p:txBody>
@@ -940,7 +941,7 @@
           <a:lstStyle/>
           <a:p>
             <a:r>
-              <a:t>This is a working tool, not a mock-up. You load a video, step to a frame, drag a box, and it computes flow in that box. Two modes. Query mode runs the full coarse pass and decodes only inside the box, which is exact. Crop mode feeds just the box through the whole pipeline, so the cost scales with the area you asked for, but it loses the surrounding context that global matching uses. The panel shows the actual breakdown live, including the parts where v3 is not the faster option.</a:t>
+              <a:t>The interface is two calls. One coarse pass per frame pair, then as many decode calls as you like against it. The plot shows decode cost is flat between 800 and 2,048 queries, which tells you it is dominated by kernel launch overhead, not arithmetic, so you get two thousand points for the price of eight hundred. Above about ten thousand points it becomes compute bound and you should just use dense mode.</a:t>
             </a:r>
           </a:p>
         </p:txBody>
@@ -1010,7 +1011,7 @@
           <a:lstStyle/>
           <a:p>
             <a:r>
-              <a:t>Here is the scorecard against what I set out to do, and two of three are not met. Better accuracy: not met, the fair comparison is a tie. Less compute: partly, dense is slower, a first query is level, but repeat queries are nearly eight times cheaper. Edge capable: unproven, everything I have measured is on a laptop 4060 and I have not touched a Jetson. What the project does deliver is the three things at the bottom: output you can query at any coordinate, cheap repeat access to a cached frame, and a calibrated confidence value. Those are real and they are measured.</a:t>
+              <a:t>This is a working tool, not a mock-up. You load a video, step to a frame, drag a box, and it computes flow in that box. Two modes. Query mode runs the full coarse pass and decodes only inside the box, which is exact. Crop mode feeds just the box through the whole pipeline, so the cost scales with the area you asked for, but it loses the surrounding context that global matching uses. The panel shows the actual breakdown live, including the parts where v3 is not the faster option.</a:t>
             </a:r>
           </a:p>
         </p:txBody>
@@ -1080,7 +1081,7 @@
           <a:lstStyle/>
           <a:p>
             <a:r>
-              <a:t>Limitations, stated plainly rather than buried. Precision is worse than v2 and I have diagnosed without yet addressing it. There is no edge device measurement at all, so the word edge in my title is a design target and not a result. Everything is evaluated on one synthetic driving dataset, which says little about field imagery. The Spring run was cut off by the cluster wall clock. And I have one seed per configuration, so please do not read too much into differences below about five hundredths of a pixel.</a:t>
+              <a:t>Here is the scorecard against what I set out to do, and two of three are not met. Better accuracy: not met, the fair comparison is a tie. Less compute: partly, dense is slower, a first query is level, but repeat queries are nearly eight times cheaper. Edge capable: unproven, everything I have measured is on a laptop 4060 and I have not touched a Jetson. What the project does deliver is the three things at the bottom: output you can query at any coordinate, cheap repeat access to a cached frame, and a calibrated confidence value. Those are real and they are measured.</a:t>
             </a:r>
           </a:p>
         </p:txBody>
@@ -1150,7 +1151,7 @@
           <a:lstStyle/>
           <a:p>
             <a:r>
-              <a:t>Four next steps in priority order. First, give the decoder a full resolution feature map. That is the direct attack on the precision gap, and it also matters because right now querying between pixels returns something close to interpolation, so the arbitrary coordinate claim is thinner than it sounds. Second, the Spring dataset gives ground truth at twice the input resolution, which v3 can be queried at natively and v2 structurally cannot. That is the one test that shows a capability rather than a margin. Third, actually measure a Jetson. Fourth, try it on real survey imagery.</a:t>
+              <a:t>Limitations, stated plainly rather than buried. Precision is worse than v2 and I have diagnosed without yet addressing it. There is no edge device measurement at all, so the word edge in my title is a design target and not a result. Everything is evaluated on one synthetic driving dataset, which says little about field imagery. The Spring run was cut off by the cluster wall clock. And I have one seed per configuration, so please do not read too much into differences below about five hundredths of a pixel.</a:t>
             </a:r>
           </a:p>
         </p:txBody>
@@ -1220,7 +1221,7 @@
           <a:lstStyle/>
           <a:p>
             <a:r>
-              <a:t>A few questions I expect. Why flow between pixels: because motion is continuous and the grid is an artefact of sampling. Why freeze the backbone: to keep the decoder as the only variable, and because unfreezing diverged when I tried it. Why is dense slower: because v2's convolution shares work between neighbouring pixels and my decoder deliberately gives that up in exchange for answering only what is asked. And the hardest one, is a tie worth the complexity. On its own, no. If you want plain dense flow, use v2, and I will say that plainly. It is worth it if you need queryability, cheap repeat access, or a confidence signal.</a:t>
+              <a:t>Four next steps in priority order. First, give the decoder a full resolution feature map. That is the direct attack on the precision gap, and it also matters because right now querying between pixels returns something close to interpolation, so the arbitrary coordinate claim is thinner than it sounds. Second, the Spring dataset gives ground truth at twice the input resolution, which v3 can be queried at natively and v2 structurally cannot. That is the one test that shows a capability rather than a margin. Third, actually measure a Jetson. Fourth, try it on real survey imagery.</a:t>
             </a:r>
           </a:p>
         </p:txBody>
@@ -1291,6 +1292,76 @@
           <a:p>
             <a:r>
               <a:t>The motivation is unchanged and I still believe it. Dense flow is the only product these networks offer, but registration, tracking and mapping all want a few hundred points that they choose. The question is whether you can make the output queryable, and what that costs.</a:t>
+            </a:r>
+          </a:p>
+        </p:txBody>
+      </p:sp>
+      <p:sp>
+        <p:nvSpPr>
+          <p:cNvPr id="4" name="Slide Number Placeholder 3"/>
+          <p:cNvSpPr>
+            <a:spLocks noGrp="1"/>
+          </p:cNvSpPr>
+          <p:nvPr>
+            <p:ph type="sldNum" idx="5" sz="quarter"/>
+          </p:nvPr>
+        </p:nvSpPr>
+        <p:spPr/>
+      </p:sp>
+    </p:spTree>
+  </p:cSld>
+  <p:clrMapOvr>
+    <a:masterClrMapping/>
+  </p:clrMapOvr>
+</p:notes>
+</file>
+
+<file path=ppt/notesSlides/notesSlide20.xml><?xml version="1.0" encoding="utf-8"?>
+<p:notes xmlns:a="http://schemas.openxmlformats.org/drawingml/2006/main" xmlns:p="http://schemas.openxmlformats.org/presentationml/2006/main" xmlns:r="http://schemas.openxmlformats.org/officeDocument/2006/relationships">
+  <p:cSld>
+    <p:spTree>
+      <p:nvGrpSpPr>
+        <p:cNvPr id="1" name=""/>
+        <p:cNvGrpSpPr/>
+        <p:nvPr/>
+      </p:nvGrpSpPr>
+      <p:grpSpPr>
+        <a:xfrm>
+          <a:off x="0" y="0"/>
+          <a:ext cx="0" cy="0"/>
+          <a:chOff x="0" y="0"/>
+          <a:chExt cx="0" cy="0"/>
+        </a:xfrm>
+      </p:grpSpPr>
+      <p:sp>
+        <p:nvSpPr>
+          <p:cNvPr id="2" name="Slide Image Placeholder 1"/>
+          <p:cNvSpPr>
+            <a:spLocks noGrp="1"/>
+          </p:cNvSpPr>
+          <p:nvPr>
+            <p:ph type="sldImg" idx="2"/>
+          </p:nvPr>
+        </p:nvSpPr>
+        <p:spPr/>
+      </p:sp>
+      <p:sp>
+        <p:nvSpPr>
+          <p:cNvPr id="3" name="Notes Placeholder 2"/>
+          <p:cNvSpPr>
+            <a:spLocks noGrp="1"/>
+          </p:cNvSpPr>
+          <p:nvPr>
+            <p:ph type="body" idx="3" sz="quarter"/>
+          </p:nvPr>
+        </p:nvSpPr>
+        <p:spPr/>
+        <p:txBody>
+          <a:bodyPr/>
+          <a:lstStyle/>
+          <a:p>
+            <a:r>
+              <a:t>A few questions I expect. Why flow between pixels: because motion is continuous and the grid is an artefact of sampling. Why freeze the backbone: to keep the decoder as the only variable, and because unfreezing diverged when I tried it. Why is dense slower: because v2's convolution shares work between neighbouring pixels and my decoder deliberately gives that up in exchange for answering only what is asked. And the hardest one, is a tie worth the complexity. On its own, no. If you want plain dense flow, use v2, and I will say that plainly. It is worth it if you need queryability, cheap repeat access, or a confidence signal.</a:t>
             </a:r>
           </a:p>
         </p:txBody>
@@ -7470,35 +7541,50 @@
                 </a:solidFill>
                 <a:latin typeface="Georgia"/>
               </a:rPr>
-              <a:t>A new object appears: 1.7 ms, against 7.3 for a new crop</a:t>
-            </a:r>
-          </a:p>
-        </p:txBody>
-      </p:sp>
-      <p:pic>
-        <p:nvPicPr>
-          <p:cNvPr id="4" name="Picture 3" descr="scenario3_marginal.png"/>
-          <p:cNvPicPr>
-            <a:picLocks noChangeAspect="1"/>
-          </p:cNvPicPr>
-          <p:nvPr/>
-        </p:nvPicPr>
-        <p:blipFill>
-          <a:blip r:embed="rId2"/>
-          <a:stretch>
-            <a:fillRect/>
-          </a:stretch>
-        </p:blipFill>
-        <p:spPr>
-          <a:xfrm>
-            <a:off x="1234440" y="1463040"/>
-            <a:ext cx="9692640" cy="3862969"/>
-          </a:xfrm>
-          <a:prstGeom prst="rect">
-            <a:avLst/>
-          </a:prstGeom>
-        </p:spPr>
-      </p:pic>
+              <a:t>On a domain neither model was trained for, v3 edges ahead</a:t>
+            </a:r>
+          </a:p>
+        </p:txBody>
+      </p:sp>
+      <p:sp>
+        <p:nvSpPr>
+          <p:cNvPr id="4" name="TextBox 3"/>
+          <p:cNvSpPr txBox="1"/>
+          <p:nvPr/>
+        </p:nvSpPr>
+        <p:spPr>
+          <a:xfrm>
+            <a:off x="6309360" y="1600200"/>
+            <a:ext cx="1920240" cy="237744"/>
+          </a:xfrm>
+          <a:prstGeom prst="rect">
+            <a:avLst/>
+          </a:prstGeom>
+          <a:noFill/>
+        </p:spPr>
+        <p:txBody>
+          <a:bodyPr wrap="square">
+            <a:spAutoFit/>
+          </a:bodyPr>
+          <a:lstStyle/>
+          <a:p>
+            <a:pPr algn="l">
+              <a:lnSpc>
+                <a:spcPct val="100000"/>
+              </a:lnSpc>
+            </a:pPr>
+            <a:r>
+              <a:rPr sz="1150" b="1">
+                <a:solidFill>
+                  <a:srgbClr val="1A1A1A"/>
+                </a:solidFill>
+                <a:latin typeface="Georgia"/>
+              </a:rPr>
+              <a:t>Crop margin</a:t>
+            </a:r>
+          </a:p>
+        </p:txBody>
+      </p:sp>
       <p:sp>
         <p:nvSpPr>
           <p:cNvPr id="5" name="TextBox 4"/>
@@ -7507,23 +7593,145 @@
         </p:nvSpPr>
         <p:spPr>
           <a:xfrm>
-            <a:off x="685800" y="5440680"/>
-            <a:ext cx="10881360" cy="1005840"/>
-          </a:xfrm>
-          <a:prstGeom prst="rect">
-            <a:avLst/>
-          </a:prstGeom>
-          <a:noFill/>
-        </p:spPr>
-        <p:txBody>
-          <a:bodyPr wrap="square">
-            <a:spAutoFit/>
-          </a:bodyPr>
-          <a:lstStyle/>
-          <a:p>
-            <a:pPr algn="l">
-              <a:lnSpc>
-                <a:spcPct val="115000"/>
+            <a:off x="8229600" y="1600200"/>
+            <a:ext cx="1554480" cy="237744"/>
+          </a:xfrm>
+          <a:prstGeom prst="rect">
+            <a:avLst/>
+          </a:prstGeom>
+          <a:noFill/>
+        </p:spPr>
+        <p:txBody>
+          <a:bodyPr wrap="square">
+            <a:spAutoFit/>
+          </a:bodyPr>
+          <a:lstStyle/>
+          <a:p>
+            <a:pPr algn="r">
+              <a:lnSpc>
+                <a:spcPct val="100000"/>
+              </a:lnSpc>
+            </a:pPr>
+            <a:r>
+              <a:rPr sz="1150" b="1">
+                <a:solidFill>
+                  <a:srgbClr val="1A1A1A"/>
+                </a:solidFill>
+                <a:latin typeface="Georgia"/>
+              </a:rPr>
+              <a:t>NeuFlow v2</a:t>
+            </a:r>
+          </a:p>
+        </p:txBody>
+      </p:sp>
+      <p:sp>
+        <p:nvSpPr>
+          <p:cNvPr id="6" name="TextBox 5"/>
+          <p:cNvSpPr txBox="1"/>
+          <p:nvPr/>
+        </p:nvSpPr>
+        <p:spPr>
+          <a:xfrm>
+            <a:off x="9784080" y="1600200"/>
+            <a:ext cx="1554480" cy="237744"/>
+          </a:xfrm>
+          <a:prstGeom prst="rect">
+            <a:avLst/>
+          </a:prstGeom>
+          <a:noFill/>
+        </p:spPr>
+        <p:txBody>
+          <a:bodyPr wrap="square">
+            <a:spAutoFit/>
+          </a:bodyPr>
+          <a:lstStyle/>
+          <a:p>
+            <a:pPr algn="r">
+              <a:lnSpc>
+                <a:spcPct val="100000"/>
+              </a:lnSpc>
+            </a:pPr>
+            <a:r>
+              <a:rPr sz="1150" b="1">
+                <a:solidFill>
+                  <a:srgbClr val="1A1A1A"/>
+                </a:solidFill>
+                <a:latin typeface="Georgia"/>
+              </a:rPr>
+              <a:t>NeuFlow v3</a:t>
+            </a:r>
+          </a:p>
+        </p:txBody>
+      </p:sp>
+      <p:sp>
+        <p:nvSpPr>
+          <p:cNvPr id="7" name="Rectangle 6"/>
+          <p:cNvSpPr/>
+          <p:nvPr/>
+        </p:nvSpPr>
+        <p:spPr>
+          <a:xfrm>
+            <a:off x="6309360" y="1837943"/>
+            <a:ext cx="5029200" cy="9525"/>
+          </a:xfrm>
+          <a:prstGeom prst="rect">
+            <a:avLst/>
+          </a:prstGeom>
+          <a:solidFill>
+            <a:srgbClr val="8A8A8A"/>
+          </a:solidFill>
+          <a:ln>
+            <a:noFill/>
+          </a:ln>
+          <a:effectLst/>
+        </p:spPr>
+        <p:style>
+          <a:lnRef idx="1">
+            <a:schemeClr val="accent1"/>
+          </a:lnRef>
+          <a:fillRef idx="3">
+            <a:schemeClr val="accent1"/>
+          </a:fillRef>
+          <a:effectRef idx="2">
+            <a:schemeClr val="accent1"/>
+          </a:effectRef>
+          <a:fontRef idx="minor">
+            <a:schemeClr val="lt1"/>
+          </a:fontRef>
+        </p:style>
+        <p:txBody>
+          <a:bodyPr rtlCol="0" anchor="ctr"/>
+          <a:lstStyle/>
+          <a:p>
+            <a:pPr algn="ctr"/>
+          </a:p>
+        </p:txBody>
+      </p:sp>
+      <p:sp>
+        <p:nvSpPr>
+          <p:cNvPr id="8" name="TextBox 7"/>
+          <p:cNvSpPr txBox="1"/>
+          <p:nvPr/>
+        </p:nvSpPr>
+        <p:spPr>
+          <a:xfrm>
+            <a:off x="6309360" y="1874519"/>
+            <a:ext cx="1920240" cy="237744"/>
+          </a:xfrm>
+          <a:prstGeom prst="rect">
+            <a:avLst/>
+          </a:prstGeom>
+          <a:noFill/>
+        </p:spPr>
+        <p:txBody>
+          <a:bodyPr wrap="square">
+            <a:spAutoFit/>
+          </a:bodyPr>
+          <a:lstStyle/>
+          <a:p>
+            <a:pPr algn="l">
+              <a:lnSpc>
+                <a:spcPct val="100000"/>
               </a:lnSpc>
             </a:pPr>
             <a:r>
@@ -7533,13 +7741,36 @@
                 </a:solidFill>
                 <a:latin typeface="Georgia"/>
               </a:rPr>
-              <a:t>The third scenario: a frame is already being processed when something new enters the field of view. Because the</a:t>
-            </a:r>
-          </a:p>
-          <a:p>
-            <a:pPr algn="l">
-              <a:lnSpc>
-                <a:spcPct val="115000"/>
+              <a:t>full frame</a:t>
+            </a:r>
+          </a:p>
+        </p:txBody>
+      </p:sp>
+      <p:sp>
+        <p:nvSpPr>
+          <p:cNvPr id="9" name="TextBox 8"/>
+          <p:cNvSpPr txBox="1"/>
+          <p:nvPr/>
+        </p:nvSpPr>
+        <p:spPr>
+          <a:xfrm>
+            <a:off x="8229600" y="1874519"/>
+            <a:ext cx="1554480" cy="237744"/>
+          </a:xfrm>
+          <a:prstGeom prst="rect">
+            <a:avLst/>
+          </a:prstGeom>
+          <a:noFill/>
+        </p:spPr>
+        <p:txBody>
+          <a:bodyPr wrap="square">
+            <a:spAutoFit/>
+          </a:bodyPr>
+          <a:lstStyle/>
+          <a:p>
+            <a:pPr algn="r">
+              <a:lnSpc>
+                <a:spcPct val="100000"/>
               </a:lnSpc>
             </a:pPr>
             <a:r>
@@ -7549,13 +7780,36 @@
                 </a:solidFill>
                 <a:latin typeface="Georgia"/>
               </a:rPr>
-              <a:t>coarse pass is cached, the decoder answers for 1.7 ms. A cropped pipeline has to run an entire new pass, 7.3 ms,</a:t>
-            </a:r>
-          </a:p>
-          <a:p>
-            <a:pPr algn="l">
-              <a:lnSpc>
-                <a:spcPct val="115000"/>
+              <a:t>0.781</a:t>
+            </a:r>
+          </a:p>
+        </p:txBody>
+      </p:sp>
+      <p:sp>
+        <p:nvSpPr>
+          <p:cNvPr id="10" name="TextBox 9"/>
+          <p:cNvSpPr txBox="1"/>
+          <p:nvPr/>
+        </p:nvSpPr>
+        <p:spPr>
+          <a:xfrm>
+            <a:off x="9784080" y="1874519"/>
+            <a:ext cx="1554480" cy="237744"/>
+          </a:xfrm>
+          <a:prstGeom prst="rect">
+            <a:avLst/>
+          </a:prstGeom>
+          <a:noFill/>
+        </p:spPr>
+        <p:txBody>
+          <a:bodyPr wrap="square">
+            <a:spAutoFit/>
+          </a:bodyPr>
+          <a:lstStyle/>
+          <a:p>
+            <a:pPr algn="r">
+              <a:lnSpc>
+                <a:spcPct val="100000"/>
               </a:lnSpc>
             </a:pPr>
             <a:r>
@@ -7565,13 +7819,36 @@
                 </a:solidFill>
                 <a:latin typeface="Georgia"/>
               </a:rPr>
-              <a:t>and is markedly less accurate doing it because a fresh crop loses the global context that finds large motion.</a:t>
-            </a:r>
-          </a:p>
-          <a:p>
-            <a:pPr algn="l">
-              <a:lnSpc>
-                <a:spcPct val="115000"/>
+              <a:t>0.777</a:t>
+            </a:r>
+          </a:p>
+        </p:txBody>
+      </p:sp>
+      <p:sp>
+        <p:nvSpPr>
+          <p:cNvPr id="11" name="TextBox 10"/>
+          <p:cNvSpPr txBox="1"/>
+          <p:nvPr/>
+        </p:nvSpPr>
+        <p:spPr>
+          <a:xfrm>
+            <a:off x="6309360" y="2148839"/>
+            <a:ext cx="1920240" cy="237744"/>
+          </a:xfrm>
+          <a:prstGeom prst="rect">
+            <a:avLst/>
+          </a:prstGeom>
+          <a:noFill/>
+        </p:spPr>
+        <p:txBody>
+          <a:bodyPr wrap="square">
+            <a:spAutoFit/>
+          </a:bodyPr>
+          <a:lstStyle/>
+          <a:p>
+            <a:pPr algn="l">
+              <a:lnSpc>
+                <a:spcPct val="100000"/>
               </a:lnSpc>
             </a:pPr>
             <a:r>
@@ -7581,14 +7858,876 @@
                 </a:solidFill>
                 <a:latin typeface="Georgia"/>
               </a:rPr>
-              <a:t>v2 keeps no state between calls, so it has nothing to answer from.</a:t>
-            </a:r>
-          </a:p>
-        </p:txBody>
-      </p:sp>
-      <p:sp>
-        <p:nvSpPr>
-          <p:cNvPr id="6" name="TextBox 5"/>
+              <a:t>0 px</a:t>
+            </a:r>
+          </a:p>
+        </p:txBody>
+      </p:sp>
+      <p:sp>
+        <p:nvSpPr>
+          <p:cNvPr id="12" name="TextBox 11"/>
+          <p:cNvSpPr txBox="1"/>
+          <p:nvPr/>
+        </p:nvSpPr>
+        <p:spPr>
+          <a:xfrm>
+            <a:off x="8229600" y="2148839"/>
+            <a:ext cx="1554480" cy="237744"/>
+          </a:xfrm>
+          <a:prstGeom prst="rect">
+            <a:avLst/>
+          </a:prstGeom>
+          <a:noFill/>
+        </p:spPr>
+        <p:txBody>
+          <a:bodyPr wrap="square">
+            <a:spAutoFit/>
+          </a:bodyPr>
+          <a:lstStyle/>
+          <a:p>
+            <a:pPr algn="r">
+              <a:lnSpc>
+                <a:spcPct val="100000"/>
+              </a:lnSpc>
+            </a:pPr>
+            <a:r>
+              <a:rPr sz="1150" b="0">
+                <a:solidFill>
+                  <a:srgbClr val="1A1A1A"/>
+                </a:solidFill>
+                <a:latin typeface="Georgia"/>
+              </a:rPr>
+              <a:t>1.205</a:t>
+            </a:r>
+          </a:p>
+        </p:txBody>
+      </p:sp>
+      <p:sp>
+        <p:nvSpPr>
+          <p:cNvPr id="13" name="TextBox 12"/>
+          <p:cNvSpPr txBox="1"/>
+          <p:nvPr/>
+        </p:nvSpPr>
+        <p:spPr>
+          <a:xfrm>
+            <a:off x="9784080" y="2148839"/>
+            <a:ext cx="1554480" cy="237744"/>
+          </a:xfrm>
+          <a:prstGeom prst="rect">
+            <a:avLst/>
+          </a:prstGeom>
+          <a:noFill/>
+        </p:spPr>
+        <p:txBody>
+          <a:bodyPr wrap="square">
+            <a:spAutoFit/>
+          </a:bodyPr>
+          <a:lstStyle/>
+          <a:p>
+            <a:pPr algn="r">
+              <a:lnSpc>
+                <a:spcPct val="100000"/>
+              </a:lnSpc>
+            </a:pPr>
+            <a:r>
+              <a:rPr sz="1150" b="0">
+                <a:solidFill>
+                  <a:srgbClr val="1A1A1A"/>
+                </a:solidFill>
+                <a:latin typeface="Georgia"/>
+              </a:rPr>
+              <a:t>1.176</a:t>
+            </a:r>
+          </a:p>
+        </p:txBody>
+      </p:sp>
+      <p:sp>
+        <p:nvSpPr>
+          <p:cNvPr id="14" name="TextBox 13"/>
+          <p:cNvSpPr txBox="1"/>
+          <p:nvPr/>
+        </p:nvSpPr>
+        <p:spPr>
+          <a:xfrm>
+            <a:off x="6309360" y="2423159"/>
+            <a:ext cx="1920240" cy="237744"/>
+          </a:xfrm>
+          <a:prstGeom prst="rect">
+            <a:avLst/>
+          </a:prstGeom>
+          <a:noFill/>
+        </p:spPr>
+        <p:txBody>
+          <a:bodyPr wrap="square">
+            <a:spAutoFit/>
+          </a:bodyPr>
+          <a:lstStyle/>
+          <a:p>
+            <a:pPr algn="l">
+              <a:lnSpc>
+                <a:spcPct val="100000"/>
+              </a:lnSpc>
+            </a:pPr>
+            <a:r>
+              <a:rPr sz="1150" b="0">
+                <a:solidFill>
+                  <a:srgbClr val="1A1A1A"/>
+                </a:solidFill>
+                <a:latin typeface="Georgia"/>
+              </a:rPr>
+              <a:t>8 px</a:t>
+            </a:r>
+          </a:p>
+        </p:txBody>
+      </p:sp>
+      <p:sp>
+        <p:nvSpPr>
+          <p:cNvPr id="15" name="TextBox 14"/>
+          <p:cNvSpPr txBox="1"/>
+          <p:nvPr/>
+        </p:nvSpPr>
+        <p:spPr>
+          <a:xfrm>
+            <a:off x="8229600" y="2423159"/>
+            <a:ext cx="1554480" cy="237744"/>
+          </a:xfrm>
+          <a:prstGeom prst="rect">
+            <a:avLst/>
+          </a:prstGeom>
+          <a:noFill/>
+        </p:spPr>
+        <p:txBody>
+          <a:bodyPr wrap="square">
+            <a:spAutoFit/>
+          </a:bodyPr>
+          <a:lstStyle/>
+          <a:p>
+            <a:pPr algn="r">
+              <a:lnSpc>
+                <a:spcPct val="100000"/>
+              </a:lnSpc>
+            </a:pPr>
+            <a:r>
+              <a:rPr sz="1150" b="0">
+                <a:solidFill>
+                  <a:srgbClr val="1A1A1A"/>
+                </a:solidFill>
+                <a:latin typeface="Georgia"/>
+              </a:rPr>
+              <a:t>0.901</a:t>
+            </a:r>
+          </a:p>
+        </p:txBody>
+      </p:sp>
+      <p:sp>
+        <p:nvSpPr>
+          <p:cNvPr id="16" name="TextBox 15"/>
+          <p:cNvSpPr txBox="1"/>
+          <p:nvPr/>
+        </p:nvSpPr>
+        <p:spPr>
+          <a:xfrm>
+            <a:off x="9784080" y="2423159"/>
+            <a:ext cx="1554480" cy="237744"/>
+          </a:xfrm>
+          <a:prstGeom prst="rect">
+            <a:avLst/>
+          </a:prstGeom>
+          <a:noFill/>
+        </p:spPr>
+        <p:txBody>
+          <a:bodyPr wrap="square">
+            <a:spAutoFit/>
+          </a:bodyPr>
+          <a:lstStyle/>
+          <a:p>
+            <a:pPr algn="r">
+              <a:lnSpc>
+                <a:spcPct val="100000"/>
+              </a:lnSpc>
+            </a:pPr>
+            <a:r>
+              <a:rPr sz="1150" b="0">
+                <a:solidFill>
+                  <a:srgbClr val="1A1A1A"/>
+                </a:solidFill>
+                <a:latin typeface="Georgia"/>
+              </a:rPr>
+              <a:t>0.881</a:t>
+            </a:r>
+          </a:p>
+        </p:txBody>
+      </p:sp>
+      <p:sp>
+        <p:nvSpPr>
+          <p:cNvPr id="17" name="TextBox 16"/>
+          <p:cNvSpPr txBox="1"/>
+          <p:nvPr/>
+        </p:nvSpPr>
+        <p:spPr>
+          <a:xfrm>
+            <a:off x="6309360" y="2697479"/>
+            <a:ext cx="1920240" cy="237744"/>
+          </a:xfrm>
+          <a:prstGeom prst="rect">
+            <a:avLst/>
+          </a:prstGeom>
+          <a:noFill/>
+        </p:spPr>
+        <p:txBody>
+          <a:bodyPr wrap="square">
+            <a:spAutoFit/>
+          </a:bodyPr>
+          <a:lstStyle/>
+          <a:p>
+            <a:pPr algn="l">
+              <a:lnSpc>
+                <a:spcPct val="100000"/>
+              </a:lnSpc>
+            </a:pPr>
+            <a:r>
+              <a:rPr sz="1150" b="0">
+                <a:solidFill>
+                  <a:srgbClr val="1A1A1A"/>
+                </a:solidFill>
+                <a:latin typeface="Georgia"/>
+              </a:rPr>
+              <a:t>16 px</a:t>
+            </a:r>
+          </a:p>
+        </p:txBody>
+      </p:sp>
+      <p:sp>
+        <p:nvSpPr>
+          <p:cNvPr id="18" name="TextBox 17"/>
+          <p:cNvSpPr txBox="1"/>
+          <p:nvPr/>
+        </p:nvSpPr>
+        <p:spPr>
+          <a:xfrm>
+            <a:off x="8229600" y="2697479"/>
+            <a:ext cx="1554480" cy="237744"/>
+          </a:xfrm>
+          <a:prstGeom prst="rect">
+            <a:avLst/>
+          </a:prstGeom>
+          <a:noFill/>
+        </p:spPr>
+        <p:txBody>
+          <a:bodyPr wrap="square">
+            <a:spAutoFit/>
+          </a:bodyPr>
+          <a:lstStyle/>
+          <a:p>
+            <a:pPr algn="r">
+              <a:lnSpc>
+                <a:spcPct val="100000"/>
+              </a:lnSpc>
+            </a:pPr>
+            <a:r>
+              <a:rPr sz="1150" b="0">
+                <a:solidFill>
+                  <a:srgbClr val="1A1A1A"/>
+                </a:solidFill>
+                <a:latin typeface="Georgia"/>
+              </a:rPr>
+              <a:t>0.872</a:t>
+            </a:r>
+          </a:p>
+        </p:txBody>
+      </p:sp>
+      <p:sp>
+        <p:nvSpPr>
+          <p:cNvPr id="19" name="TextBox 18"/>
+          <p:cNvSpPr txBox="1"/>
+          <p:nvPr/>
+        </p:nvSpPr>
+        <p:spPr>
+          <a:xfrm>
+            <a:off x="9784080" y="2697479"/>
+            <a:ext cx="1554480" cy="237744"/>
+          </a:xfrm>
+          <a:prstGeom prst="rect">
+            <a:avLst/>
+          </a:prstGeom>
+          <a:noFill/>
+        </p:spPr>
+        <p:txBody>
+          <a:bodyPr wrap="square">
+            <a:spAutoFit/>
+          </a:bodyPr>
+          <a:lstStyle/>
+          <a:p>
+            <a:pPr algn="r">
+              <a:lnSpc>
+                <a:spcPct val="100000"/>
+              </a:lnSpc>
+            </a:pPr>
+            <a:r>
+              <a:rPr sz="1150" b="0">
+                <a:solidFill>
+                  <a:srgbClr val="1A1A1A"/>
+                </a:solidFill>
+                <a:latin typeface="Georgia"/>
+              </a:rPr>
+              <a:t>0.865</a:t>
+            </a:r>
+          </a:p>
+        </p:txBody>
+      </p:sp>
+      <p:sp>
+        <p:nvSpPr>
+          <p:cNvPr id="20" name="TextBox 19"/>
+          <p:cNvSpPr txBox="1"/>
+          <p:nvPr/>
+        </p:nvSpPr>
+        <p:spPr>
+          <a:xfrm>
+            <a:off x="6309360" y="2971799"/>
+            <a:ext cx="1920240" cy="237744"/>
+          </a:xfrm>
+          <a:prstGeom prst="rect">
+            <a:avLst/>
+          </a:prstGeom>
+          <a:noFill/>
+        </p:spPr>
+        <p:txBody>
+          <a:bodyPr wrap="square">
+            <a:spAutoFit/>
+          </a:bodyPr>
+          <a:lstStyle/>
+          <a:p>
+            <a:pPr algn="l">
+              <a:lnSpc>
+                <a:spcPct val="100000"/>
+              </a:lnSpc>
+            </a:pPr>
+            <a:r>
+              <a:rPr sz="1150" b="0">
+                <a:solidFill>
+                  <a:srgbClr val="1A1A1A"/>
+                </a:solidFill>
+                <a:latin typeface="Georgia"/>
+              </a:rPr>
+              <a:t>24 px</a:t>
+            </a:r>
+          </a:p>
+        </p:txBody>
+      </p:sp>
+      <p:sp>
+        <p:nvSpPr>
+          <p:cNvPr id="21" name="TextBox 20"/>
+          <p:cNvSpPr txBox="1"/>
+          <p:nvPr/>
+        </p:nvSpPr>
+        <p:spPr>
+          <a:xfrm>
+            <a:off x="8229600" y="2971799"/>
+            <a:ext cx="1554480" cy="237744"/>
+          </a:xfrm>
+          <a:prstGeom prst="rect">
+            <a:avLst/>
+          </a:prstGeom>
+          <a:noFill/>
+        </p:spPr>
+        <p:txBody>
+          <a:bodyPr wrap="square">
+            <a:spAutoFit/>
+          </a:bodyPr>
+          <a:lstStyle/>
+          <a:p>
+            <a:pPr algn="r">
+              <a:lnSpc>
+                <a:spcPct val="100000"/>
+              </a:lnSpc>
+            </a:pPr>
+            <a:r>
+              <a:rPr sz="1150" b="0">
+                <a:solidFill>
+                  <a:srgbClr val="1A1A1A"/>
+                </a:solidFill>
+                <a:latin typeface="Georgia"/>
+              </a:rPr>
+              <a:t>0.879</a:t>
+            </a:r>
+          </a:p>
+        </p:txBody>
+      </p:sp>
+      <p:sp>
+        <p:nvSpPr>
+          <p:cNvPr id="22" name="TextBox 21"/>
+          <p:cNvSpPr txBox="1"/>
+          <p:nvPr/>
+        </p:nvSpPr>
+        <p:spPr>
+          <a:xfrm>
+            <a:off x="9784080" y="2971799"/>
+            <a:ext cx="1554480" cy="237744"/>
+          </a:xfrm>
+          <a:prstGeom prst="rect">
+            <a:avLst/>
+          </a:prstGeom>
+          <a:noFill/>
+        </p:spPr>
+        <p:txBody>
+          <a:bodyPr wrap="square">
+            <a:spAutoFit/>
+          </a:bodyPr>
+          <a:lstStyle/>
+          <a:p>
+            <a:pPr algn="r">
+              <a:lnSpc>
+                <a:spcPct val="100000"/>
+              </a:lnSpc>
+            </a:pPr>
+            <a:r>
+              <a:rPr sz="1150" b="0">
+                <a:solidFill>
+                  <a:srgbClr val="1A1A1A"/>
+                </a:solidFill>
+                <a:latin typeface="Georgia"/>
+              </a:rPr>
+              <a:t>0.854</a:t>
+            </a:r>
+          </a:p>
+        </p:txBody>
+      </p:sp>
+      <p:sp>
+        <p:nvSpPr>
+          <p:cNvPr id="23" name="TextBox 22"/>
+          <p:cNvSpPr txBox="1"/>
+          <p:nvPr/>
+        </p:nvSpPr>
+        <p:spPr>
+          <a:xfrm>
+            <a:off x="6309360" y="3246119"/>
+            <a:ext cx="1920240" cy="237744"/>
+          </a:xfrm>
+          <a:prstGeom prst="rect">
+            <a:avLst/>
+          </a:prstGeom>
+          <a:noFill/>
+        </p:spPr>
+        <p:txBody>
+          <a:bodyPr wrap="square">
+            <a:spAutoFit/>
+          </a:bodyPr>
+          <a:lstStyle/>
+          <a:p>
+            <a:pPr algn="l">
+              <a:lnSpc>
+                <a:spcPct val="100000"/>
+              </a:lnSpc>
+            </a:pPr>
+            <a:r>
+              <a:rPr sz="1150" b="0">
+                <a:solidFill>
+                  <a:srgbClr val="1A1A1A"/>
+                </a:solidFill>
+                <a:latin typeface="Georgia"/>
+              </a:rPr>
+              <a:t>32 px</a:t>
+            </a:r>
+          </a:p>
+        </p:txBody>
+      </p:sp>
+      <p:sp>
+        <p:nvSpPr>
+          <p:cNvPr id="24" name="TextBox 23"/>
+          <p:cNvSpPr txBox="1"/>
+          <p:nvPr/>
+        </p:nvSpPr>
+        <p:spPr>
+          <a:xfrm>
+            <a:off x="8229600" y="3246119"/>
+            <a:ext cx="1554480" cy="237744"/>
+          </a:xfrm>
+          <a:prstGeom prst="rect">
+            <a:avLst/>
+          </a:prstGeom>
+          <a:noFill/>
+        </p:spPr>
+        <p:txBody>
+          <a:bodyPr wrap="square">
+            <a:spAutoFit/>
+          </a:bodyPr>
+          <a:lstStyle/>
+          <a:p>
+            <a:pPr algn="r">
+              <a:lnSpc>
+                <a:spcPct val="100000"/>
+              </a:lnSpc>
+            </a:pPr>
+            <a:r>
+              <a:rPr sz="1150" b="0">
+                <a:solidFill>
+                  <a:srgbClr val="1A1A1A"/>
+                </a:solidFill>
+                <a:latin typeface="Georgia"/>
+              </a:rPr>
+              <a:t>0.834</a:t>
+            </a:r>
+          </a:p>
+        </p:txBody>
+      </p:sp>
+      <p:sp>
+        <p:nvSpPr>
+          <p:cNvPr id="25" name="TextBox 24"/>
+          <p:cNvSpPr txBox="1"/>
+          <p:nvPr/>
+        </p:nvSpPr>
+        <p:spPr>
+          <a:xfrm>
+            <a:off x="9784080" y="3246119"/>
+            <a:ext cx="1554480" cy="237744"/>
+          </a:xfrm>
+          <a:prstGeom prst="rect">
+            <a:avLst/>
+          </a:prstGeom>
+          <a:noFill/>
+        </p:spPr>
+        <p:txBody>
+          <a:bodyPr wrap="square">
+            <a:spAutoFit/>
+          </a:bodyPr>
+          <a:lstStyle/>
+          <a:p>
+            <a:pPr algn="r">
+              <a:lnSpc>
+                <a:spcPct val="100000"/>
+              </a:lnSpc>
+            </a:pPr>
+            <a:r>
+              <a:rPr sz="1150" b="0">
+                <a:solidFill>
+                  <a:srgbClr val="1A1A1A"/>
+                </a:solidFill>
+                <a:latin typeface="Georgia"/>
+              </a:rPr>
+              <a:t>0.814</a:t>
+            </a:r>
+          </a:p>
+        </p:txBody>
+      </p:sp>
+      <p:sp>
+        <p:nvSpPr>
+          <p:cNvPr id="26" name="TextBox 25"/>
+          <p:cNvSpPr txBox="1"/>
+          <p:nvPr/>
+        </p:nvSpPr>
+        <p:spPr>
+          <a:xfrm>
+            <a:off x="6309360" y="3520439"/>
+            <a:ext cx="1920240" cy="237744"/>
+          </a:xfrm>
+          <a:prstGeom prst="rect">
+            <a:avLst/>
+          </a:prstGeom>
+          <a:noFill/>
+        </p:spPr>
+        <p:txBody>
+          <a:bodyPr wrap="square">
+            <a:spAutoFit/>
+          </a:bodyPr>
+          <a:lstStyle/>
+          <a:p>
+            <a:pPr algn="l">
+              <a:lnSpc>
+                <a:spcPct val="100000"/>
+              </a:lnSpc>
+            </a:pPr>
+            <a:r>
+              <a:rPr sz="1150" b="0">
+                <a:solidFill>
+                  <a:srgbClr val="1A1A1A"/>
+                </a:solidFill>
+                <a:latin typeface="Georgia"/>
+              </a:rPr>
+              <a:t>64 px</a:t>
+            </a:r>
+          </a:p>
+        </p:txBody>
+      </p:sp>
+      <p:sp>
+        <p:nvSpPr>
+          <p:cNvPr id="27" name="TextBox 26"/>
+          <p:cNvSpPr txBox="1"/>
+          <p:nvPr/>
+        </p:nvSpPr>
+        <p:spPr>
+          <a:xfrm>
+            <a:off x="8229600" y="3520439"/>
+            <a:ext cx="1554480" cy="237744"/>
+          </a:xfrm>
+          <a:prstGeom prst="rect">
+            <a:avLst/>
+          </a:prstGeom>
+          <a:noFill/>
+        </p:spPr>
+        <p:txBody>
+          <a:bodyPr wrap="square">
+            <a:spAutoFit/>
+          </a:bodyPr>
+          <a:lstStyle/>
+          <a:p>
+            <a:pPr algn="r">
+              <a:lnSpc>
+                <a:spcPct val="100000"/>
+              </a:lnSpc>
+            </a:pPr>
+            <a:r>
+              <a:rPr sz="1150" b="0">
+                <a:solidFill>
+                  <a:srgbClr val="1A1A1A"/>
+                </a:solidFill>
+                <a:latin typeface="Georgia"/>
+              </a:rPr>
+              <a:t>0.793</a:t>
+            </a:r>
+          </a:p>
+        </p:txBody>
+      </p:sp>
+      <p:sp>
+        <p:nvSpPr>
+          <p:cNvPr id="28" name="TextBox 27"/>
+          <p:cNvSpPr txBox="1"/>
+          <p:nvPr/>
+        </p:nvSpPr>
+        <p:spPr>
+          <a:xfrm>
+            <a:off x="9784080" y="3520439"/>
+            <a:ext cx="1554480" cy="237744"/>
+          </a:xfrm>
+          <a:prstGeom prst="rect">
+            <a:avLst/>
+          </a:prstGeom>
+          <a:noFill/>
+        </p:spPr>
+        <p:txBody>
+          <a:bodyPr wrap="square">
+            <a:spAutoFit/>
+          </a:bodyPr>
+          <a:lstStyle/>
+          <a:p>
+            <a:pPr algn="r">
+              <a:lnSpc>
+                <a:spcPct val="100000"/>
+              </a:lnSpc>
+            </a:pPr>
+            <a:r>
+              <a:rPr sz="1150" b="0">
+                <a:solidFill>
+                  <a:srgbClr val="1A1A1A"/>
+                </a:solidFill>
+                <a:latin typeface="Georgia"/>
+              </a:rPr>
+              <a:t>0.778</a:t>
+            </a:r>
+          </a:p>
+        </p:txBody>
+      </p:sp>
+      <p:sp>
+        <p:nvSpPr>
+          <p:cNvPr id="29" name="TextBox 28"/>
+          <p:cNvSpPr txBox="1"/>
+          <p:nvPr/>
+        </p:nvSpPr>
+        <p:spPr>
+          <a:xfrm>
+            <a:off x="6309360" y="4251960"/>
+            <a:ext cx="5303520" cy="1920240"/>
+          </a:xfrm>
+          <a:prstGeom prst="rect">
+            <a:avLst/>
+          </a:prstGeom>
+          <a:noFill/>
+        </p:spPr>
+        <p:txBody>
+          <a:bodyPr wrap="square">
+            <a:spAutoFit/>
+          </a:bodyPr>
+          <a:lstStyle/>
+          <a:p>
+            <a:pPr algn="l">
+              <a:lnSpc>
+                <a:spcPct val="116000"/>
+              </a:lnSpc>
+            </a:pPr>
+            <a:r>
+              <a:rPr sz="1100" b="0">
+                <a:solidFill>
+                  <a:srgbClr val="1A1A1A"/>
+                </a:solidFill>
+                <a:latin typeface="Georgia"/>
+              </a:rPr>
+              <a:t>v3 is ahead at all seven settings, by 0.004 to 0.029 px.</a:t>
+            </a:r>
+          </a:p>
+          <a:p>
+            <a:pPr algn="l">
+              <a:lnSpc>
+                <a:spcPct val="116000"/>
+              </a:lnSpc>
+            </a:pPr>
+            <a:r>
+              <a:rPr sz="1100" b="0">
+                <a:solidFill>
+                  <a:srgbClr val="1A1A1A"/>
+                </a:solidFill>
+                <a:latin typeface="Georgia"/>
+              </a:rPr>
+              <a:t/>
+            </a:r>
+          </a:p>
+          <a:p>
+            <a:pPr algn="l">
+              <a:lnSpc>
+                <a:spcPct val="116000"/>
+              </a:lnSpc>
+            </a:pPr>
+            <a:r>
+              <a:rPr sz="1100" b="0">
+                <a:solidFill>
+                  <a:srgbClr val="1A1A1A"/>
+                </a:solidFill>
+                <a:latin typeface="Georgia"/>
+              </a:rPr>
+              <a:t>This is the cleanest comparison available: v2 trained on</a:t>
+            </a:r>
+          </a:p>
+          <a:p>
+            <a:pPr algn="l">
+              <a:lnSpc>
+                <a:spcPct val="116000"/>
+              </a:lnSpc>
+            </a:pPr>
+            <a:r>
+              <a:rPr sz="1100" b="0">
+                <a:solidFill>
+                  <a:srgbClr val="1A1A1A"/>
+                </a:solidFill>
+                <a:latin typeface="Georgia"/>
+              </a:rPr>
+              <a:t>FlyingThings, v3 on FlyingChairs, VKITTI2 and Sintel, and</a:t>
+            </a:r>
+          </a:p>
+          <a:p>
+            <a:pPr algn="l">
+              <a:lnSpc>
+                <a:spcPct val="116000"/>
+              </a:lnSpc>
+            </a:pPr>
+            <a:r>
+              <a:rPr sz="1100" b="0">
+                <a:solidFill>
+                  <a:srgbClr val="1A1A1A"/>
+                </a:solidFill>
+                <a:latin typeface="Georgia"/>
+              </a:rPr>
+              <a:t>neither has seen aerial imagery. Every other table in this</a:t>
+            </a:r>
+          </a:p>
+          <a:p>
+            <a:pPr algn="l">
+              <a:lnSpc>
+                <a:spcPct val="116000"/>
+              </a:lnSpc>
+            </a:pPr>
+            <a:r>
+              <a:rPr sz="1100" b="0">
+                <a:solidFill>
+                  <a:srgbClr val="1A1A1A"/>
+                </a:solidFill>
+                <a:latin typeface="Georgia"/>
+              </a:rPr>
+              <a:t>deck is measured on a domain v3 trained on.</a:t>
+            </a:r>
+          </a:p>
+          <a:p>
+            <a:pPr algn="l">
+              <a:lnSpc>
+                <a:spcPct val="116000"/>
+              </a:lnSpc>
+            </a:pPr>
+            <a:r>
+              <a:rPr sz="1100" b="0">
+                <a:solidFill>
+                  <a:srgbClr val="1A1A1A"/>
+                </a:solidFill>
+                <a:latin typeface="Georgia"/>
+              </a:rPr>
+              <a:t/>
+            </a:r>
+          </a:p>
+          <a:p>
+            <a:pPr algn="l">
+              <a:lnSpc>
+                <a:spcPct val="116000"/>
+              </a:lnSpc>
+            </a:pPr>
+            <a:r>
+              <a:rPr sz="1100" b="0">
+                <a:solidFill>
+                  <a:srgbClr val="1A1A1A"/>
+                </a:solidFill>
+                <a:latin typeface="Georgia"/>
+              </a:rPr>
+              <a:t>Read it as consistent rather than large. Forty pairs, one</a:t>
+            </a:r>
+          </a:p>
+          <a:p>
+            <a:pPr algn="l">
+              <a:lnSpc>
+                <a:spcPct val="116000"/>
+              </a:lnSpc>
+            </a:pPr>
+            <a:r>
+              <a:rPr sz="1100" b="0">
+                <a:solidFill>
+                  <a:srgbClr val="1A1A1A"/>
+                </a:solidFill>
+                <a:latin typeface="Georgia"/>
+              </a:rPr>
+              <a:t>seed, and v3 remains slightly worse on large-motion pixels</a:t>
+            </a:r>
+          </a:p>
+          <a:p>
+            <a:pPr algn="l">
+              <a:lnSpc>
+                <a:spcPct val="116000"/>
+              </a:lnSpc>
+            </a:pPr>
+            <a:r>
+              <a:rPr sz="1100" b="0">
+                <a:solidFill>
+                  <a:srgbClr val="1A1A1A"/>
+                </a:solidFill>
+                <a:latin typeface="Georgia"/>
+              </a:rPr>
+              <a:t>(7.2% failures against 6.5%). Better on typical pixels,</a:t>
+            </a:r>
+          </a:p>
+          <a:p>
+            <a:pPr algn="l">
+              <a:lnSpc>
+                <a:spcPct val="116000"/>
+              </a:lnSpc>
+            </a:pPr>
+            <a:r>
+              <a:rPr sz="1100" b="0">
+                <a:solidFill>
+                  <a:srgbClr val="1A1A1A"/>
+                </a:solidFill>
+                <a:latin typeface="Georgia"/>
+              </a:rPr>
+              <a:t>not on the hard ones.</a:t>
+            </a:r>
+          </a:p>
+        </p:txBody>
+      </p:sp>
+      <p:sp>
+        <p:nvSpPr>
+          <p:cNvPr id="30" name="TextBox 29"/>
           <p:cNvSpPr txBox="1"/>
           <p:nvPr/>
         </p:nvSpPr>
@@ -7627,7 +8766,7 @@
       </p:sp>
       <p:sp>
         <p:nvSpPr>
-          <p:cNvPr id="7" name="TextBox 6"/>
+          <p:cNvPr id="31" name="TextBox 30"/>
           <p:cNvSpPr txBox="1"/>
           <p:nvPr/>
         </p:nvSpPr>
@@ -7724,7 +8863,7 @@
                 </a:solidFill>
                 <a:latin typeface="Georgia"/>
               </a:rPr>
-              <a:t>INTERFACE</a:t>
+              <a:t>RESULTS</a:t>
             </a:r>
           </a:p>
         </p:txBody>
@@ -7763,14 +8902,14 @@
                 </a:solidFill>
                 <a:latin typeface="Georgia"/>
               </a:rPr>
-              <a:t>What a query costs, and how you make one</a:t>
+              <a:t>A new object appears: 1.7 ms, against 7.3 for a new crop</a:t>
             </a:r>
           </a:p>
         </p:txBody>
       </p:sp>
       <p:pic>
         <p:nvPicPr>
-          <p:cNvPr id="4" name="Picture 3" descr="decode_flat.png"/>
+          <p:cNvPr id="4" name="Picture 3" descr="scenario3_marginal.png"/>
           <p:cNvPicPr>
             <a:picLocks noChangeAspect="1"/>
           </p:cNvPicPr>
@@ -7784,8 +8923,8 @@
         </p:blipFill>
         <p:spPr>
           <a:xfrm>
-            <a:off x="731520" y="1508760"/>
-            <a:ext cx="6400800" cy="3231565"/>
+            <a:off x="1234440" y="1463040"/>
+            <a:ext cx="9692640" cy="3862969"/>
           </a:xfrm>
           <a:prstGeom prst="rect">
             <a:avLst/>
@@ -7800,201 +8939,23 @@
         </p:nvSpPr>
         <p:spPr>
           <a:xfrm>
-            <a:off x="7406640" y="1645920"/>
-            <a:ext cx="4206240" cy="365760"/>
-          </a:xfrm>
-          <a:prstGeom prst="rect">
-            <a:avLst/>
-          </a:prstGeom>
-          <a:noFill/>
-        </p:spPr>
-        <p:txBody>
-          <a:bodyPr wrap="square">
-            <a:spAutoFit/>
-          </a:bodyPr>
-          <a:lstStyle/>
-          <a:p>
-            <a:pPr algn="l">
-              <a:lnSpc>
-                <a:spcPct val="100000"/>
-              </a:lnSpc>
-            </a:pPr>
-            <a:r>
-              <a:rPr sz="1200" b="1">
-                <a:solidFill>
-                  <a:srgbClr val="333333"/>
-                </a:solidFill>
-                <a:latin typeface="Georgia"/>
-              </a:rPr>
-              <a:t>The entire API</a:t>
-            </a:r>
-          </a:p>
-        </p:txBody>
-      </p:sp>
-      <p:sp>
-        <p:nvSpPr>
-          <p:cNvPr id="6" name="Rounded Rectangle 5"/>
-          <p:cNvSpPr/>
-          <p:nvPr/>
-        </p:nvSpPr>
-        <p:spPr>
-          <a:xfrm>
-            <a:off x="7406640" y="2011680"/>
-            <a:ext cx="4206240" cy="1737360"/>
-          </a:xfrm>
-          <a:prstGeom prst="roundRect">
-            <a:avLst/>
-          </a:prstGeom>
-          <a:solidFill>
-            <a:srgbClr val="EFEFEF"/>
-          </a:solidFill>
-          <a:ln w="9525">
-            <a:solidFill>
-              <a:srgbClr val="8A8A8A"/>
-            </a:solidFill>
-          </a:ln>
-          <a:effectLst/>
-        </p:spPr>
-        <p:style>
-          <a:lnRef idx="1">
-            <a:schemeClr val="accent1"/>
-          </a:lnRef>
-          <a:fillRef idx="3">
-            <a:schemeClr val="accent1"/>
-          </a:fillRef>
-          <a:effectRef idx="2">
-            <a:schemeClr val="accent1"/>
-          </a:effectRef>
-          <a:fontRef idx="minor">
-            <a:schemeClr val="lt1"/>
-          </a:fontRef>
-        </p:style>
-        <p:txBody>
-          <a:bodyPr rtlCol="0" anchor="ctr" wrap="square" lIns="73152" rIns="73152"/>
-          <a:lstStyle/>
-          <a:p>
-            <a:pPr algn="ctr"/>
-            <a:r>
-              <a:rPr sz="1000" b="0">
-                <a:solidFill>
-                  <a:srgbClr val="1A1A1A"/>
-                </a:solidFill>
-                <a:latin typeface="Georgia"/>
-              </a:rPr>
-              <a:t>state = model.infer_coarse_state(img0, img1)</a:t>
-            </a:r>
-          </a:p>
-          <a:p>
-            <a:pPr algn="ctr"/>
-            <a:r>
-              <a:rPr sz="1000" b="0">
-                <a:solidFill>
-                  <a:srgbClr val="1A1A1A"/>
-                </a:solidFill>
-                <a:latin typeface="Georgia"/>
-              </a:rPr>
-              <a:t>                                  once, 33 ms</a:t>
-            </a:r>
-          </a:p>
-          <a:p>
-            <a:pPr algn="ctr"/>
-            <a:r>
-              <a:rPr sz="1000" b="0">
-                <a:solidFill>
-                  <a:srgbClr val="1A1A1A"/>
-                </a:solidFill>
-                <a:latin typeface="Georgia"/>
-              </a:rPr>
-              <a:t/>
-            </a:r>
-          </a:p>
-          <a:p>
-            <a:pPr algn="ctr"/>
-            <a:r>
-              <a:rPr sz="1000" b="0">
-                <a:solidFill>
-                  <a:srgbClr val="1A1A1A"/>
-                </a:solidFill>
-                <a:latin typeface="Georgia"/>
-              </a:rPr>
-              <a:t>flow  = model.decode_queries(</a:t>
-            </a:r>
-          </a:p>
-          <a:p>
-            <a:pPr algn="ctr"/>
-            <a:r>
-              <a:rPr sz="1000" b="0">
-                <a:solidFill>
-                  <a:srgbClr val="1A1A1A"/>
-                </a:solidFill>
-                <a:latin typeface="Georgia"/>
-              </a:rPr>
-              <a:t>            state, query_coords=q)</a:t>
-            </a:r>
-          </a:p>
-          <a:p>
-            <a:pPr algn="ctr"/>
-            <a:r>
-              <a:rPr sz="1000" b="0">
-                <a:solidFill>
-                  <a:srgbClr val="1A1A1A"/>
-                </a:solidFill>
-                <a:latin typeface="Georgia"/>
-              </a:rPr>
-              <a:t>            q: [B, N, 2] -&gt; [B, N, 2], 1.3 ms</a:t>
-            </a:r>
-          </a:p>
-          <a:p>
-            <a:pPr algn="ctr"/>
-            <a:r>
-              <a:rPr sz="1000" b="0">
-                <a:solidFill>
-                  <a:srgbClr val="1A1A1A"/>
-                </a:solidFill>
-                <a:latin typeface="Georgia"/>
-              </a:rPr>
-              <a:t/>
-            </a:r>
-          </a:p>
-          <a:p>
-            <a:pPr algn="ctr"/>
-            <a:r>
-              <a:rPr sz="1000" b="0">
-                <a:solidFill>
-                  <a:srgbClr val="1A1A1A"/>
-                </a:solidFill>
-                <a:latin typeface="Georgia"/>
-              </a:rPr>
-              <a:t>flow, b = ... (return_uncertainty=True)</a:t>
-            </a:r>
-          </a:p>
-        </p:txBody>
-      </p:sp>
-      <p:sp>
-        <p:nvSpPr>
-          <p:cNvPr id="7" name="TextBox 6"/>
-          <p:cNvSpPr txBox="1"/>
-          <p:nvPr/>
-        </p:nvSpPr>
-        <p:spPr>
-          <a:xfrm>
-            <a:off x="7406640" y="3931920"/>
-            <a:ext cx="4206240" cy="1828800"/>
-          </a:xfrm>
-          <a:prstGeom prst="rect">
-            <a:avLst/>
-          </a:prstGeom>
-          <a:noFill/>
-        </p:spPr>
-        <p:txBody>
-          <a:bodyPr wrap="square">
-            <a:spAutoFit/>
-          </a:bodyPr>
-          <a:lstStyle/>
-          <a:p>
-            <a:pPr algn="l">
-              <a:lnSpc>
-                <a:spcPct val="118000"/>
+            <a:off x="685800" y="5440680"/>
+            <a:ext cx="10881360" cy="1005840"/>
+          </a:xfrm>
+          <a:prstGeom prst="rect">
+            <a:avLst/>
+          </a:prstGeom>
+          <a:noFill/>
+        </p:spPr>
+        <p:txBody>
+          <a:bodyPr wrap="square">
+            <a:spAutoFit/>
+          </a:bodyPr>
+          <a:lstStyle/>
+          <a:p>
+            <a:pPr algn="l">
+              <a:lnSpc>
+                <a:spcPct val="115000"/>
               </a:lnSpc>
             </a:pPr>
             <a:r>
@@ -8004,13 +8965,13 @@
                 </a:solidFill>
                 <a:latin typeface="Georgia"/>
               </a:rPr>
-              <a:t>Decode cost is flat from 800 to 2,048</a:t>
-            </a:r>
-          </a:p>
-          <a:p>
-            <a:pPr algn="l">
-              <a:lnSpc>
-                <a:spcPct val="118000"/>
+              <a:t>The third scenario: a frame is already being processed when something new enters the field of view. Because the</a:t>
+            </a:r>
+          </a:p>
+          <a:p>
+            <a:pPr algn="l">
+              <a:lnSpc>
+                <a:spcPct val="115000"/>
               </a:lnSpc>
             </a:pPr>
             <a:r>
@@ -8020,13 +8981,13 @@
                 </a:solidFill>
                 <a:latin typeface="Georgia"/>
               </a:rPr>
-              <a:t>queries, so it is bound by kernel launch</a:t>
-            </a:r>
-          </a:p>
-          <a:p>
-            <a:pPr algn="l">
-              <a:lnSpc>
-                <a:spcPct val="118000"/>
+              <a:t>coarse pass is cached, the decoder answers for 1.7 ms. A cropped pipeline has to run an entire new pass, 7.3 ms,</a:t>
+            </a:r>
+          </a:p>
+          <a:p>
+            <a:pPr algn="l">
+              <a:lnSpc>
+                <a:spcPct val="115000"/>
               </a:lnSpc>
             </a:pPr>
             <a:r>
@@ -8036,13 +8997,13 @@
                 </a:solidFill>
                 <a:latin typeface="Georgia"/>
               </a:rPr>
-              <a:t>overhead rather than compute. You get</a:t>
-            </a:r>
-          </a:p>
-          <a:p>
-            <a:pPr algn="l">
-              <a:lnSpc>
-                <a:spcPct val="118000"/>
+              <a:t>and is markedly less accurate doing it because a fresh crop loses the global context that finds large motion.</a:t>
+            </a:r>
+          </a:p>
+          <a:p>
+            <a:pPr algn="l">
+              <a:lnSpc>
+                <a:spcPct val="115000"/>
               </a:lnSpc>
             </a:pPr>
             <a:r>
@@ -8052,78 +9013,14 @@
                 </a:solidFill>
                 <a:latin typeface="Georgia"/>
               </a:rPr>
-              <a:t>2,048 points for the price of 800.</a:t>
-            </a:r>
-          </a:p>
-          <a:p>
-            <a:pPr algn="l">
-              <a:lnSpc>
-                <a:spcPct val="118000"/>
-              </a:lnSpc>
-            </a:pPr>
-            <a:r>
-              <a:rPr sz="1150" b="0">
-                <a:solidFill>
-                  <a:srgbClr val="1A1A1A"/>
-                </a:solidFill>
-                <a:latin typeface="Georgia"/>
-              </a:rPr>
-              <a:t/>
-            </a:r>
-          </a:p>
-          <a:p>
-            <a:pPr algn="l">
-              <a:lnSpc>
-                <a:spcPct val="118000"/>
-              </a:lnSpc>
-            </a:pPr>
-            <a:r>
-              <a:rPr sz="1150" b="0">
-                <a:solidFill>
-                  <a:srgbClr val="1A1A1A"/>
-                </a:solidFill>
-                <a:latin typeface="Georgia"/>
-              </a:rPr>
-              <a:t>Above roughly 10,000 points the decode</a:t>
-            </a:r>
-          </a:p>
-          <a:p>
-            <a:pPr algn="l">
-              <a:lnSpc>
-                <a:spcPct val="118000"/>
-              </a:lnSpc>
-            </a:pPr>
-            <a:r>
-              <a:rPr sz="1150" b="0">
-                <a:solidFill>
-                  <a:srgbClr val="1A1A1A"/>
-                </a:solidFill>
-                <a:latin typeface="Georgia"/>
-              </a:rPr>
-              <a:t>becomes compute-bound and dense mode</a:t>
-            </a:r>
-          </a:p>
-          <a:p>
-            <a:pPr algn="l">
-              <a:lnSpc>
-                <a:spcPct val="118000"/>
-              </a:lnSpc>
-            </a:pPr>
-            <a:r>
-              <a:rPr sz="1150" b="0">
-                <a:solidFill>
-                  <a:srgbClr val="1A1A1A"/>
-                </a:solidFill>
-                <a:latin typeface="Georgia"/>
-              </a:rPr>
-              <a:t>is the better choice.</a:t>
-            </a:r>
-          </a:p>
-        </p:txBody>
-      </p:sp>
-      <p:sp>
-        <p:nvSpPr>
-          <p:cNvPr id="8" name="TextBox 7"/>
+              <a:t>v2 keeps no state between calls, so it has nothing to answer from.</a:t>
+            </a:r>
+          </a:p>
+        </p:txBody>
+      </p:sp>
+      <p:sp>
+        <p:nvSpPr>
+          <p:cNvPr id="6" name="TextBox 5"/>
           <p:cNvSpPr txBox="1"/>
           <p:nvPr/>
         </p:nvSpPr>
@@ -8162,7 +9059,7 @@
       </p:sp>
       <p:sp>
         <p:nvSpPr>
-          <p:cNvPr id="9" name="TextBox 8"/>
+          <p:cNvPr id="7" name="TextBox 6"/>
           <p:cNvSpPr txBox="1"/>
           <p:nvPr/>
         </p:nvSpPr>
@@ -8298,14 +9195,14 @@
                 </a:solidFill>
                 <a:latin typeface="Georgia"/>
               </a:rPr>
-              <a:t>Working tool: draw a region, get flow there</a:t>
+              <a:t>What a query costs, and how you make one</a:t>
             </a:r>
           </a:p>
         </p:txBody>
       </p:sp>
       <p:pic>
         <p:nvPicPr>
-          <p:cNvPr id="4" name="Picture 3" descr="region_gui_window.png"/>
+          <p:cNvPr id="4" name="Picture 3" descr="decode_flat.png"/>
           <p:cNvPicPr>
             <a:picLocks noChangeAspect="1"/>
           </p:cNvPicPr>
@@ -8320,7 +9217,7 @@
         <p:spPr>
           <a:xfrm>
             <a:off x="731520" y="1508760"/>
-            <a:ext cx="6949440" cy="3716489"/>
+            <a:ext cx="6400800" cy="3231565"/>
           </a:xfrm>
           <a:prstGeom prst="rect">
             <a:avLst/>
@@ -8335,8 +9232,186 @@
         </p:nvSpPr>
         <p:spPr>
           <a:xfrm>
-            <a:off x="7955279" y="1645920"/>
-            <a:ext cx="3657600" cy="4023360"/>
+            <a:off x="7406640" y="1645920"/>
+            <a:ext cx="4206240" cy="365760"/>
+          </a:xfrm>
+          <a:prstGeom prst="rect">
+            <a:avLst/>
+          </a:prstGeom>
+          <a:noFill/>
+        </p:spPr>
+        <p:txBody>
+          <a:bodyPr wrap="square">
+            <a:spAutoFit/>
+          </a:bodyPr>
+          <a:lstStyle/>
+          <a:p>
+            <a:pPr algn="l">
+              <a:lnSpc>
+                <a:spcPct val="100000"/>
+              </a:lnSpc>
+            </a:pPr>
+            <a:r>
+              <a:rPr sz="1200" b="1">
+                <a:solidFill>
+                  <a:srgbClr val="333333"/>
+                </a:solidFill>
+                <a:latin typeface="Georgia"/>
+              </a:rPr>
+              <a:t>The entire API</a:t>
+            </a:r>
+          </a:p>
+        </p:txBody>
+      </p:sp>
+      <p:sp>
+        <p:nvSpPr>
+          <p:cNvPr id="6" name="Rounded Rectangle 5"/>
+          <p:cNvSpPr/>
+          <p:nvPr/>
+        </p:nvSpPr>
+        <p:spPr>
+          <a:xfrm>
+            <a:off x="7406640" y="2011680"/>
+            <a:ext cx="4206240" cy="1737360"/>
+          </a:xfrm>
+          <a:prstGeom prst="roundRect">
+            <a:avLst/>
+          </a:prstGeom>
+          <a:solidFill>
+            <a:srgbClr val="EFEFEF"/>
+          </a:solidFill>
+          <a:ln w="9525">
+            <a:solidFill>
+              <a:srgbClr val="8A8A8A"/>
+            </a:solidFill>
+          </a:ln>
+          <a:effectLst/>
+        </p:spPr>
+        <p:style>
+          <a:lnRef idx="1">
+            <a:schemeClr val="accent1"/>
+          </a:lnRef>
+          <a:fillRef idx="3">
+            <a:schemeClr val="accent1"/>
+          </a:fillRef>
+          <a:effectRef idx="2">
+            <a:schemeClr val="accent1"/>
+          </a:effectRef>
+          <a:fontRef idx="minor">
+            <a:schemeClr val="lt1"/>
+          </a:fontRef>
+        </p:style>
+        <p:txBody>
+          <a:bodyPr rtlCol="0" anchor="ctr" wrap="square" lIns="73152" rIns="73152"/>
+          <a:lstStyle/>
+          <a:p>
+            <a:pPr algn="ctr"/>
+            <a:r>
+              <a:rPr sz="1000" b="0">
+                <a:solidFill>
+                  <a:srgbClr val="1A1A1A"/>
+                </a:solidFill>
+                <a:latin typeface="Georgia"/>
+              </a:rPr>
+              <a:t>state = model.infer_coarse_state(img0, img1)</a:t>
+            </a:r>
+          </a:p>
+          <a:p>
+            <a:pPr algn="ctr"/>
+            <a:r>
+              <a:rPr sz="1000" b="0">
+                <a:solidFill>
+                  <a:srgbClr val="1A1A1A"/>
+                </a:solidFill>
+                <a:latin typeface="Georgia"/>
+              </a:rPr>
+              <a:t>                                  once, 33 ms</a:t>
+            </a:r>
+          </a:p>
+          <a:p>
+            <a:pPr algn="ctr"/>
+            <a:r>
+              <a:rPr sz="1000" b="0">
+                <a:solidFill>
+                  <a:srgbClr val="1A1A1A"/>
+                </a:solidFill>
+                <a:latin typeface="Georgia"/>
+              </a:rPr>
+              <a:t/>
+            </a:r>
+          </a:p>
+          <a:p>
+            <a:pPr algn="ctr"/>
+            <a:r>
+              <a:rPr sz="1000" b="0">
+                <a:solidFill>
+                  <a:srgbClr val="1A1A1A"/>
+                </a:solidFill>
+                <a:latin typeface="Georgia"/>
+              </a:rPr>
+              <a:t>flow  = model.decode_queries(</a:t>
+            </a:r>
+          </a:p>
+          <a:p>
+            <a:pPr algn="ctr"/>
+            <a:r>
+              <a:rPr sz="1000" b="0">
+                <a:solidFill>
+                  <a:srgbClr val="1A1A1A"/>
+                </a:solidFill>
+                <a:latin typeface="Georgia"/>
+              </a:rPr>
+              <a:t>            state, query_coords=q)</a:t>
+            </a:r>
+          </a:p>
+          <a:p>
+            <a:pPr algn="ctr"/>
+            <a:r>
+              <a:rPr sz="1000" b="0">
+                <a:solidFill>
+                  <a:srgbClr val="1A1A1A"/>
+                </a:solidFill>
+                <a:latin typeface="Georgia"/>
+              </a:rPr>
+              <a:t>            q: [B, N, 2] -&gt; [B, N, 2], 1.3 ms</a:t>
+            </a:r>
+          </a:p>
+          <a:p>
+            <a:pPr algn="ctr"/>
+            <a:r>
+              <a:rPr sz="1000" b="0">
+                <a:solidFill>
+                  <a:srgbClr val="1A1A1A"/>
+                </a:solidFill>
+                <a:latin typeface="Georgia"/>
+              </a:rPr>
+              <a:t/>
+            </a:r>
+          </a:p>
+          <a:p>
+            <a:pPr algn="ctr"/>
+            <a:r>
+              <a:rPr sz="1000" b="0">
+                <a:solidFill>
+                  <a:srgbClr val="1A1A1A"/>
+                </a:solidFill>
+                <a:latin typeface="Georgia"/>
+              </a:rPr>
+              <a:t>flow, b = ... (return_uncertainty=True)</a:t>
+            </a:r>
+          </a:p>
+        </p:txBody>
+      </p:sp>
+      <p:sp>
+        <p:nvSpPr>
+          <p:cNvPr id="7" name="TextBox 6"/>
+          <p:cNvSpPr txBox="1"/>
+          <p:nvPr/>
+        </p:nvSpPr>
+        <p:spPr>
+          <a:xfrm>
+            <a:off x="7406640" y="3931920"/>
+            <a:ext cx="4206240" cy="1828800"/>
           </a:xfrm>
           <a:prstGeom prst="rect">
             <a:avLst/>
@@ -8361,7 +9436,7 @@
                 </a:solidFill>
                 <a:latin typeface="Georgia"/>
               </a:rPr>
-              <a:t>Load a video, step frame by frame,</a:t>
+              <a:t>Decode cost is flat from 800 to 2,048</a:t>
             </a:r>
           </a:p>
           <a:p>
@@ -8377,7 +9452,7 @@
                 </a:solidFill>
                 <a:latin typeface="Georgia"/>
               </a:rPr>
-              <a:t>drag a box, get flow for that region.</a:t>
+              <a:t>queries, so it is bound by kernel launch</a:t>
             </a:r>
           </a:p>
           <a:p>
@@ -8393,6 +9468,38 @@
                 </a:solidFill>
                 <a:latin typeface="Georgia"/>
               </a:rPr>
+              <a:t>overhead rather than compute. You get</a:t>
+            </a:r>
+          </a:p>
+          <a:p>
+            <a:pPr algn="l">
+              <a:lnSpc>
+                <a:spcPct val="118000"/>
+              </a:lnSpc>
+            </a:pPr>
+            <a:r>
+              <a:rPr sz="1150" b="0">
+                <a:solidFill>
+                  <a:srgbClr val="1A1A1A"/>
+                </a:solidFill>
+                <a:latin typeface="Georgia"/>
+              </a:rPr>
+              <a:t>2,048 points for the price of 800.</a:t>
+            </a:r>
+          </a:p>
+          <a:p>
+            <a:pPr algn="l">
+              <a:lnSpc>
+                <a:spcPct val="118000"/>
+              </a:lnSpc>
+            </a:pPr>
+            <a:r>
+              <a:rPr sz="1150" b="0">
+                <a:solidFill>
+                  <a:srgbClr val="1A1A1A"/>
+                </a:solidFill>
+                <a:latin typeface="Georgia"/>
+              </a:rPr>
               <a:t/>
             </a:r>
           </a:p>
@@ -8409,7 +9516,7 @@
                 </a:solidFill>
                 <a:latin typeface="Georgia"/>
               </a:rPr>
-              <a:t>Two modes, both timed live:</a:t>
+              <a:t>Above roughly 10,000 points the decode</a:t>
             </a:r>
           </a:p>
           <a:p>
@@ -8425,7 +9532,7 @@
                 </a:solidFill>
                 <a:latin typeface="Georgia"/>
               </a:rPr>
-              <a:t/>
+              <a:t>becomes compute-bound and dense mode</a:t>
             </a:r>
           </a:p>
           <a:p>
@@ -8441,158 +9548,14 @@
                 </a:solidFill>
                 <a:latin typeface="Georgia"/>
               </a:rPr>
-              <a:t>QUERY decodes only inside the box</a:t>
-            </a:r>
-          </a:p>
-          <a:p>
-            <a:pPr algn="l">
-              <a:lnSpc>
-                <a:spcPct val="118000"/>
-              </a:lnSpc>
-            </a:pPr>
-            <a:r>
-              <a:rPr sz="1150" b="0">
-                <a:solidFill>
-                  <a:srgbClr val="1A1A1A"/>
-                </a:solidFill>
-                <a:latin typeface="Georgia"/>
-              </a:rPr>
-              <a:t>against a full-frame coarse pass. Exact.</a:t>
-            </a:r>
-          </a:p>
-          <a:p>
-            <a:pPr algn="l">
-              <a:lnSpc>
-                <a:spcPct val="118000"/>
-              </a:lnSpc>
-            </a:pPr>
-            <a:r>
-              <a:rPr sz="1150" b="0">
-                <a:solidFill>
-                  <a:srgbClr val="1A1A1A"/>
-                </a:solidFill>
-                <a:latin typeface="Georgia"/>
-              </a:rPr>
-              <a:t/>
-            </a:r>
-          </a:p>
-          <a:p>
-            <a:pPr algn="l">
-              <a:lnSpc>
-                <a:spcPct val="118000"/>
-              </a:lnSpc>
-            </a:pPr>
-            <a:r>
-              <a:rPr sz="1150" b="0">
-                <a:solidFill>
-                  <a:srgbClr val="1A1A1A"/>
-                </a:solidFill>
-                <a:latin typeface="Georgia"/>
-              </a:rPr>
-              <a:t>CROP feeds only the box through the</a:t>
-            </a:r>
-          </a:p>
-          <a:p>
-            <a:pPr algn="l">
-              <a:lnSpc>
-                <a:spcPct val="118000"/>
-              </a:lnSpc>
-            </a:pPr>
-            <a:r>
-              <a:rPr sz="1150" b="0">
-                <a:solidFill>
-                  <a:srgbClr val="1A1A1A"/>
-                </a:solidFill>
-                <a:latin typeface="Georgia"/>
-              </a:rPr>
-              <a:t>whole pipeline, so cost scales with the</a:t>
-            </a:r>
-          </a:p>
-          <a:p>
-            <a:pPr algn="l">
-              <a:lnSpc>
-                <a:spcPct val="118000"/>
-              </a:lnSpc>
-            </a:pPr>
-            <a:r>
-              <a:rPr sz="1150" b="0">
-                <a:solidFill>
-                  <a:srgbClr val="1A1A1A"/>
-                </a:solidFill>
-                <a:latin typeface="Georgia"/>
-              </a:rPr>
-              <a:t>area requested, at the price of losing</a:t>
-            </a:r>
-          </a:p>
-          <a:p>
-            <a:pPr algn="l">
-              <a:lnSpc>
-                <a:spcPct val="118000"/>
-              </a:lnSpc>
-            </a:pPr>
-            <a:r>
-              <a:rPr sz="1150" b="0">
-                <a:solidFill>
-                  <a:srgbClr val="1A1A1A"/>
-                </a:solidFill>
-                <a:latin typeface="Georgia"/>
-              </a:rPr>
-              <a:t>context outside the crop.</a:t>
-            </a:r>
-          </a:p>
-          <a:p>
-            <a:pPr algn="l">
-              <a:lnSpc>
-                <a:spcPct val="118000"/>
-              </a:lnSpc>
-            </a:pPr>
-            <a:r>
-              <a:rPr sz="1150" b="0">
-                <a:solidFill>
-                  <a:srgbClr val="1A1A1A"/>
-                </a:solidFill>
-                <a:latin typeface="Georgia"/>
-              </a:rPr>
-              <a:t/>
-            </a:r>
-          </a:p>
-          <a:p>
-            <a:pPr algn="l">
-              <a:lnSpc>
-                <a:spcPct val="118000"/>
-              </a:lnSpc>
-            </a:pPr>
-            <a:r>
-              <a:rPr sz="1150" b="0">
-                <a:solidFill>
-                  <a:srgbClr val="1A1A1A"/>
-                </a:solidFill>
-                <a:latin typeface="Georgia"/>
-              </a:rPr>
-              <a:t>The panel shows where the time goes</a:t>
-            </a:r>
-          </a:p>
-          <a:p>
-            <a:pPr algn="l">
-              <a:lnSpc>
-                <a:spcPct val="118000"/>
-              </a:lnSpc>
-            </a:pPr>
-            <a:r>
-              <a:rPr sz="1150" b="0">
-                <a:solidFill>
-                  <a:srgbClr val="1A1A1A"/>
-                </a:solidFill>
-                <a:latin typeface="Georgia"/>
-              </a:rPr>
-              <a:t>rather than asserting a speed-up.</a:t>
-            </a:r>
-          </a:p>
-        </p:txBody>
-      </p:sp>
-      <p:sp>
-        <p:nvSpPr>
-          <p:cNvPr id="6" name="TextBox 5"/>
+              <a:t>is the better choice.</a:t>
+            </a:r>
+          </a:p>
+        </p:txBody>
+      </p:sp>
+      <p:sp>
+        <p:nvSpPr>
+          <p:cNvPr id="8" name="TextBox 7"/>
           <p:cNvSpPr txBox="1"/>
           <p:nvPr/>
         </p:nvSpPr>
@@ -8631,7 +9594,7 @@
       </p:sp>
       <p:sp>
         <p:nvSpPr>
-          <p:cNvPr id="7" name="TextBox 6"/>
+          <p:cNvPr id="9" name="TextBox 8"/>
           <p:cNvSpPr txBox="1"/>
           <p:nvPr/>
         </p:nvSpPr>
@@ -8728,7 +9691,7 @@
                 </a:solidFill>
                 <a:latin typeface="Georgia"/>
               </a:rPr>
-              <a:t>ASSESSMENT</a:t>
+              <a:t>INTERFACE</a:t>
             </a:r>
           </a:p>
         </p:txBody>
@@ -8767,50 +9730,35 @@
                 </a:solidFill>
                 <a:latin typeface="Georgia"/>
               </a:rPr>
-              <a:t>Against the three objectives I set</a:t>
-            </a:r>
-          </a:p>
-        </p:txBody>
-      </p:sp>
-      <p:sp>
-        <p:nvSpPr>
-          <p:cNvPr id="4" name="TextBox 3"/>
-          <p:cNvSpPr txBox="1"/>
-          <p:nvPr/>
-        </p:nvSpPr>
-        <p:spPr>
-          <a:xfrm>
-            <a:off x="685800" y="1691640"/>
-            <a:ext cx="3291840" cy="237744"/>
-          </a:xfrm>
-          <a:prstGeom prst="rect">
-            <a:avLst/>
-          </a:prstGeom>
-          <a:noFill/>
-        </p:spPr>
-        <p:txBody>
-          <a:bodyPr wrap="square">
-            <a:spAutoFit/>
-          </a:bodyPr>
-          <a:lstStyle/>
-          <a:p>
-            <a:pPr algn="l">
-              <a:lnSpc>
-                <a:spcPct val="100000"/>
-              </a:lnSpc>
-            </a:pPr>
-            <a:r>
-              <a:rPr sz="1150" b="1">
-                <a:solidFill>
-                  <a:srgbClr val="1A1A1A"/>
-                </a:solidFill>
-                <a:latin typeface="Georgia"/>
-              </a:rPr>
-              <a:t>Objective</a:t>
-            </a:r>
-          </a:p>
-        </p:txBody>
-      </p:sp>
+              <a:t>Working tool: draw a region, get flow there</a:t>
+            </a:r>
+          </a:p>
+        </p:txBody>
+      </p:sp>
+      <p:pic>
+        <p:nvPicPr>
+          <p:cNvPr id="4" name="Picture 3" descr="region_gui_window.png"/>
+          <p:cNvPicPr>
+            <a:picLocks noChangeAspect="1"/>
+          </p:cNvPicPr>
+          <p:nvPr/>
+        </p:nvPicPr>
+        <p:blipFill>
+          <a:blip r:embed="rId2"/>
+          <a:stretch>
+            <a:fillRect/>
+          </a:stretch>
+        </p:blipFill>
+        <p:spPr>
+          <a:xfrm>
+            <a:off x="731520" y="1508760"/>
+            <a:ext cx="6949440" cy="3716489"/>
+          </a:xfrm>
+          <a:prstGeom prst="rect">
+            <a:avLst/>
+          </a:prstGeom>
+        </p:spPr>
+      </p:pic>
       <p:sp>
         <p:nvSpPr>
           <p:cNvPr id="5" name="TextBox 4"/>
@@ -8819,33 +9767,257 @@
         </p:nvSpPr>
         <p:spPr>
           <a:xfrm>
-            <a:off x="3977639" y="1691640"/>
-            <a:ext cx="1737360" cy="237744"/>
-          </a:xfrm>
-          <a:prstGeom prst="rect">
-            <a:avLst/>
-          </a:prstGeom>
-          <a:noFill/>
-        </p:spPr>
-        <p:txBody>
-          <a:bodyPr wrap="square">
-            <a:spAutoFit/>
-          </a:bodyPr>
-          <a:lstStyle/>
-          <a:p>
-            <a:pPr algn="r">
-              <a:lnSpc>
-                <a:spcPct val="100000"/>
-              </a:lnSpc>
-            </a:pPr>
-            <a:r>
-              <a:rPr sz="1150" b="1">
-                <a:solidFill>
-                  <a:srgbClr val="1A1A1A"/>
-                </a:solidFill>
-                <a:latin typeface="Georgia"/>
-              </a:rPr>
-              <a:t>Verdict</a:t>
+            <a:off x="7955279" y="1645920"/>
+            <a:ext cx="3657600" cy="4023360"/>
+          </a:xfrm>
+          <a:prstGeom prst="rect">
+            <a:avLst/>
+          </a:prstGeom>
+          <a:noFill/>
+        </p:spPr>
+        <p:txBody>
+          <a:bodyPr wrap="square">
+            <a:spAutoFit/>
+          </a:bodyPr>
+          <a:lstStyle/>
+          <a:p>
+            <a:pPr algn="l">
+              <a:lnSpc>
+                <a:spcPct val="118000"/>
+              </a:lnSpc>
+            </a:pPr>
+            <a:r>
+              <a:rPr sz="1150" b="0">
+                <a:solidFill>
+                  <a:srgbClr val="1A1A1A"/>
+                </a:solidFill>
+                <a:latin typeface="Georgia"/>
+              </a:rPr>
+              <a:t>Load a video, step frame by frame,</a:t>
+            </a:r>
+          </a:p>
+          <a:p>
+            <a:pPr algn="l">
+              <a:lnSpc>
+                <a:spcPct val="118000"/>
+              </a:lnSpc>
+            </a:pPr>
+            <a:r>
+              <a:rPr sz="1150" b="0">
+                <a:solidFill>
+                  <a:srgbClr val="1A1A1A"/>
+                </a:solidFill>
+                <a:latin typeface="Georgia"/>
+              </a:rPr>
+              <a:t>drag a box, get flow for that region.</a:t>
+            </a:r>
+          </a:p>
+          <a:p>
+            <a:pPr algn="l">
+              <a:lnSpc>
+                <a:spcPct val="118000"/>
+              </a:lnSpc>
+            </a:pPr>
+            <a:r>
+              <a:rPr sz="1150" b="0">
+                <a:solidFill>
+                  <a:srgbClr val="1A1A1A"/>
+                </a:solidFill>
+                <a:latin typeface="Georgia"/>
+              </a:rPr>
+              <a:t/>
+            </a:r>
+          </a:p>
+          <a:p>
+            <a:pPr algn="l">
+              <a:lnSpc>
+                <a:spcPct val="118000"/>
+              </a:lnSpc>
+            </a:pPr>
+            <a:r>
+              <a:rPr sz="1150" b="0">
+                <a:solidFill>
+                  <a:srgbClr val="1A1A1A"/>
+                </a:solidFill>
+                <a:latin typeface="Georgia"/>
+              </a:rPr>
+              <a:t>Two modes, both timed live:</a:t>
+            </a:r>
+          </a:p>
+          <a:p>
+            <a:pPr algn="l">
+              <a:lnSpc>
+                <a:spcPct val="118000"/>
+              </a:lnSpc>
+            </a:pPr>
+            <a:r>
+              <a:rPr sz="1150" b="0">
+                <a:solidFill>
+                  <a:srgbClr val="1A1A1A"/>
+                </a:solidFill>
+                <a:latin typeface="Georgia"/>
+              </a:rPr>
+              <a:t/>
+            </a:r>
+          </a:p>
+          <a:p>
+            <a:pPr algn="l">
+              <a:lnSpc>
+                <a:spcPct val="118000"/>
+              </a:lnSpc>
+            </a:pPr>
+            <a:r>
+              <a:rPr sz="1150" b="0">
+                <a:solidFill>
+                  <a:srgbClr val="1A1A1A"/>
+                </a:solidFill>
+                <a:latin typeface="Georgia"/>
+              </a:rPr>
+              <a:t>QUERY decodes only inside the box</a:t>
+            </a:r>
+          </a:p>
+          <a:p>
+            <a:pPr algn="l">
+              <a:lnSpc>
+                <a:spcPct val="118000"/>
+              </a:lnSpc>
+            </a:pPr>
+            <a:r>
+              <a:rPr sz="1150" b="0">
+                <a:solidFill>
+                  <a:srgbClr val="1A1A1A"/>
+                </a:solidFill>
+                <a:latin typeface="Georgia"/>
+              </a:rPr>
+              <a:t>against a full-frame coarse pass. Exact.</a:t>
+            </a:r>
+          </a:p>
+          <a:p>
+            <a:pPr algn="l">
+              <a:lnSpc>
+                <a:spcPct val="118000"/>
+              </a:lnSpc>
+            </a:pPr>
+            <a:r>
+              <a:rPr sz="1150" b="0">
+                <a:solidFill>
+                  <a:srgbClr val="1A1A1A"/>
+                </a:solidFill>
+                <a:latin typeface="Georgia"/>
+              </a:rPr>
+              <a:t/>
+            </a:r>
+          </a:p>
+          <a:p>
+            <a:pPr algn="l">
+              <a:lnSpc>
+                <a:spcPct val="118000"/>
+              </a:lnSpc>
+            </a:pPr>
+            <a:r>
+              <a:rPr sz="1150" b="0">
+                <a:solidFill>
+                  <a:srgbClr val="1A1A1A"/>
+                </a:solidFill>
+                <a:latin typeface="Georgia"/>
+              </a:rPr>
+              <a:t>CROP feeds only the box through the</a:t>
+            </a:r>
+          </a:p>
+          <a:p>
+            <a:pPr algn="l">
+              <a:lnSpc>
+                <a:spcPct val="118000"/>
+              </a:lnSpc>
+            </a:pPr>
+            <a:r>
+              <a:rPr sz="1150" b="0">
+                <a:solidFill>
+                  <a:srgbClr val="1A1A1A"/>
+                </a:solidFill>
+                <a:latin typeface="Georgia"/>
+              </a:rPr>
+              <a:t>whole pipeline, so cost scales with the</a:t>
+            </a:r>
+          </a:p>
+          <a:p>
+            <a:pPr algn="l">
+              <a:lnSpc>
+                <a:spcPct val="118000"/>
+              </a:lnSpc>
+            </a:pPr>
+            <a:r>
+              <a:rPr sz="1150" b="0">
+                <a:solidFill>
+                  <a:srgbClr val="1A1A1A"/>
+                </a:solidFill>
+                <a:latin typeface="Georgia"/>
+              </a:rPr>
+              <a:t>area requested, at the price of losing</a:t>
+            </a:r>
+          </a:p>
+          <a:p>
+            <a:pPr algn="l">
+              <a:lnSpc>
+                <a:spcPct val="118000"/>
+              </a:lnSpc>
+            </a:pPr>
+            <a:r>
+              <a:rPr sz="1150" b="0">
+                <a:solidFill>
+                  <a:srgbClr val="1A1A1A"/>
+                </a:solidFill>
+                <a:latin typeface="Georgia"/>
+              </a:rPr>
+              <a:t>context outside the crop.</a:t>
+            </a:r>
+          </a:p>
+          <a:p>
+            <a:pPr algn="l">
+              <a:lnSpc>
+                <a:spcPct val="118000"/>
+              </a:lnSpc>
+            </a:pPr>
+            <a:r>
+              <a:rPr sz="1150" b="0">
+                <a:solidFill>
+                  <a:srgbClr val="1A1A1A"/>
+                </a:solidFill>
+                <a:latin typeface="Georgia"/>
+              </a:rPr>
+              <a:t/>
+            </a:r>
+          </a:p>
+          <a:p>
+            <a:pPr algn="l">
+              <a:lnSpc>
+                <a:spcPct val="118000"/>
+              </a:lnSpc>
+            </a:pPr>
+            <a:r>
+              <a:rPr sz="1150" b="0">
+                <a:solidFill>
+                  <a:srgbClr val="1A1A1A"/>
+                </a:solidFill>
+                <a:latin typeface="Georgia"/>
+              </a:rPr>
+              <a:t>The panel shows where the time goes</a:t>
+            </a:r>
+          </a:p>
+          <a:p>
+            <a:pPr algn="l">
+              <a:lnSpc>
+                <a:spcPct val="118000"/>
+              </a:lnSpc>
+            </a:pPr>
+            <a:r>
+              <a:rPr sz="1150" b="0">
+                <a:solidFill>
+                  <a:srgbClr val="1A1A1A"/>
+                </a:solidFill>
+                <a:latin typeface="Georgia"/>
+              </a:rPr>
+              <a:t>rather than asserting a speed-up.</a:t>
             </a:r>
           </a:p>
         </p:txBody>
@@ -8853,1301 +10025,6 @@
       <p:sp>
         <p:nvSpPr>
           <p:cNvPr id="6" name="TextBox 5"/>
-          <p:cNvSpPr txBox="1"/>
-          <p:nvPr/>
-        </p:nvSpPr>
-        <p:spPr>
-          <a:xfrm>
-            <a:off x="5715000" y="1691640"/>
-            <a:ext cx="5852160" cy="237744"/>
-          </a:xfrm>
-          <a:prstGeom prst="rect">
-            <a:avLst/>
-          </a:prstGeom>
-          <a:noFill/>
-        </p:spPr>
-        <p:txBody>
-          <a:bodyPr wrap="square">
-            <a:spAutoFit/>
-          </a:bodyPr>
-          <a:lstStyle/>
-          <a:p>
-            <a:pPr algn="r">
-              <a:lnSpc>
-                <a:spcPct val="100000"/>
-              </a:lnSpc>
-            </a:pPr>
-            <a:r>
-              <a:rPr sz="1150" b="1">
-                <a:solidFill>
-                  <a:srgbClr val="1A1A1A"/>
-                </a:solidFill>
-                <a:latin typeface="Georgia"/>
-              </a:rPr>
-              <a:t>Evidence</a:t>
-            </a:r>
-          </a:p>
-        </p:txBody>
-      </p:sp>
-      <p:sp>
-        <p:nvSpPr>
-          <p:cNvPr id="7" name="Rectangle 6"/>
-          <p:cNvSpPr/>
-          <p:nvPr/>
-        </p:nvSpPr>
-        <p:spPr>
-          <a:xfrm>
-            <a:off x="685800" y="1929384"/>
-            <a:ext cx="10881360" cy="9525"/>
-          </a:xfrm>
-          <a:prstGeom prst="rect">
-            <a:avLst/>
-          </a:prstGeom>
-          <a:solidFill>
-            <a:srgbClr val="8A8A8A"/>
-          </a:solidFill>
-          <a:ln>
-            <a:noFill/>
-          </a:ln>
-          <a:effectLst/>
-        </p:spPr>
-        <p:style>
-          <a:lnRef idx="1">
-            <a:schemeClr val="accent1"/>
-          </a:lnRef>
-          <a:fillRef idx="3">
-            <a:schemeClr val="accent1"/>
-          </a:fillRef>
-          <a:effectRef idx="2">
-            <a:schemeClr val="accent1"/>
-          </a:effectRef>
-          <a:fontRef idx="minor">
-            <a:schemeClr val="lt1"/>
-          </a:fontRef>
-        </p:style>
-        <p:txBody>
-          <a:bodyPr rtlCol="0" anchor="ctr"/>
-          <a:lstStyle/>
-          <a:p>
-            <a:pPr algn="ctr"/>
-          </a:p>
-        </p:txBody>
-      </p:sp>
-      <p:sp>
-        <p:nvSpPr>
-          <p:cNvPr id="8" name="TextBox 7"/>
-          <p:cNvSpPr txBox="1"/>
-          <p:nvPr/>
-        </p:nvSpPr>
-        <p:spPr>
-          <a:xfrm>
-            <a:off x="685800" y="1965960"/>
-            <a:ext cx="3291840" cy="237744"/>
-          </a:xfrm>
-          <a:prstGeom prst="rect">
-            <a:avLst/>
-          </a:prstGeom>
-          <a:noFill/>
-        </p:spPr>
-        <p:txBody>
-          <a:bodyPr wrap="square">
-            <a:spAutoFit/>
-          </a:bodyPr>
-          <a:lstStyle/>
-          <a:p>
-            <a:pPr algn="l">
-              <a:lnSpc>
-                <a:spcPct val="100000"/>
-              </a:lnSpc>
-            </a:pPr>
-            <a:r>
-              <a:rPr sz="1150" b="0">
-                <a:solidFill>
-                  <a:srgbClr val="1A1A1A"/>
-                </a:solidFill>
-                <a:latin typeface="Georgia"/>
-              </a:rPr>
-              <a:t>Better accuracy than v2</a:t>
-            </a:r>
-          </a:p>
-        </p:txBody>
-      </p:sp>
-      <p:sp>
-        <p:nvSpPr>
-          <p:cNvPr id="9" name="TextBox 8"/>
-          <p:cNvSpPr txBox="1"/>
-          <p:nvPr/>
-        </p:nvSpPr>
-        <p:spPr>
-          <a:xfrm>
-            <a:off x="3977639" y="1965960"/>
-            <a:ext cx="1737360" cy="237744"/>
-          </a:xfrm>
-          <a:prstGeom prst="rect">
-            <a:avLst/>
-          </a:prstGeom>
-          <a:noFill/>
-        </p:spPr>
-        <p:txBody>
-          <a:bodyPr wrap="square">
-            <a:spAutoFit/>
-          </a:bodyPr>
-          <a:lstStyle/>
-          <a:p>
-            <a:pPr algn="r">
-              <a:lnSpc>
-                <a:spcPct val="100000"/>
-              </a:lnSpc>
-            </a:pPr>
-            <a:r>
-              <a:rPr sz="1150" b="0">
-                <a:solidFill>
-                  <a:srgbClr val="1A1A1A"/>
-                </a:solidFill>
-                <a:latin typeface="Georgia"/>
-              </a:rPr>
-              <a:t>NOT MET</a:t>
-            </a:r>
-          </a:p>
-        </p:txBody>
-      </p:sp>
-      <p:sp>
-        <p:nvSpPr>
-          <p:cNvPr id="10" name="TextBox 9"/>
-          <p:cNvSpPr txBox="1"/>
-          <p:nvPr/>
-        </p:nvSpPr>
-        <p:spPr>
-          <a:xfrm>
-            <a:off x="5715000" y="1965960"/>
-            <a:ext cx="5852160" cy="237744"/>
-          </a:xfrm>
-          <a:prstGeom prst="rect">
-            <a:avLst/>
-          </a:prstGeom>
-          <a:noFill/>
-        </p:spPr>
-        <p:txBody>
-          <a:bodyPr wrap="square">
-            <a:spAutoFit/>
-          </a:bodyPr>
-          <a:lstStyle/>
-          <a:p>
-            <a:pPr algn="r">
-              <a:lnSpc>
-                <a:spcPct val="100000"/>
-              </a:lnSpc>
-            </a:pPr>
-            <a:r>
-              <a:rPr sz="1150" b="0">
-                <a:solidFill>
-                  <a:srgbClr val="1A1A1A"/>
-                </a:solidFill>
-                <a:latin typeface="Georgia"/>
-              </a:rPr>
-              <a:t>best v3 2.384 vs 2.324; every config above v2</a:t>
-            </a:r>
-          </a:p>
-        </p:txBody>
-      </p:sp>
-      <p:sp>
-        <p:nvSpPr>
-          <p:cNvPr id="11" name="TextBox 10"/>
-          <p:cNvSpPr txBox="1"/>
-          <p:nvPr/>
-        </p:nvSpPr>
-        <p:spPr>
-          <a:xfrm>
-            <a:off x="685800" y="2240279"/>
-            <a:ext cx="3291840" cy="237744"/>
-          </a:xfrm>
-          <a:prstGeom prst="rect">
-            <a:avLst/>
-          </a:prstGeom>
-          <a:noFill/>
-        </p:spPr>
-        <p:txBody>
-          <a:bodyPr wrap="square">
-            <a:spAutoFit/>
-          </a:bodyPr>
-          <a:lstStyle/>
-          <a:p>
-            <a:pPr algn="l">
-              <a:lnSpc>
-                <a:spcPct val="100000"/>
-              </a:lnSpc>
-            </a:pPr>
-            <a:r>
-              <a:rPr sz="1150" b="0">
-                <a:solidFill>
-                  <a:srgbClr val="1A1A1A"/>
-                </a:solidFill>
-                <a:latin typeface="Georgia"/>
-              </a:rPr>
-              <a:t/>
-            </a:r>
-          </a:p>
-        </p:txBody>
-      </p:sp>
-      <p:sp>
-        <p:nvSpPr>
-          <p:cNvPr id="12" name="TextBox 11"/>
-          <p:cNvSpPr txBox="1"/>
-          <p:nvPr/>
-        </p:nvSpPr>
-        <p:spPr>
-          <a:xfrm>
-            <a:off x="3977639" y="2240279"/>
-            <a:ext cx="1737360" cy="237744"/>
-          </a:xfrm>
-          <a:prstGeom prst="rect">
-            <a:avLst/>
-          </a:prstGeom>
-          <a:noFill/>
-        </p:spPr>
-        <p:txBody>
-          <a:bodyPr wrap="square">
-            <a:spAutoFit/>
-          </a:bodyPr>
-          <a:lstStyle/>
-          <a:p>
-            <a:pPr algn="r">
-              <a:lnSpc>
-                <a:spcPct val="100000"/>
-              </a:lnSpc>
-            </a:pPr>
-            <a:r>
-              <a:rPr sz="1150" b="0">
-                <a:solidFill>
-                  <a:srgbClr val="1A1A1A"/>
-                </a:solidFill>
-                <a:latin typeface="Georgia"/>
-              </a:rPr>
-              <a:t/>
-            </a:r>
-          </a:p>
-        </p:txBody>
-      </p:sp>
-      <p:sp>
-        <p:nvSpPr>
-          <p:cNvPr id="13" name="TextBox 12"/>
-          <p:cNvSpPr txBox="1"/>
-          <p:nvPr/>
-        </p:nvSpPr>
-        <p:spPr>
-          <a:xfrm>
-            <a:off x="5715000" y="2240279"/>
-            <a:ext cx="5852160" cy="237744"/>
-          </a:xfrm>
-          <a:prstGeom prst="rect">
-            <a:avLst/>
-          </a:prstGeom>
-          <a:noFill/>
-        </p:spPr>
-        <p:txBody>
-          <a:bodyPr wrap="square">
-            <a:spAutoFit/>
-          </a:bodyPr>
-          <a:lstStyle/>
-          <a:p>
-            <a:pPr algn="r">
-              <a:lnSpc>
-                <a:spcPct val="100000"/>
-              </a:lnSpc>
-            </a:pPr>
-            <a:r>
-              <a:rPr sz="1150" b="0">
-                <a:solidFill>
-                  <a:srgbClr val="1A1A1A"/>
-                </a:solidFill>
-                <a:latin typeface="Georgia"/>
-              </a:rPr>
-              <a:t>like-for-like 2.500, i.e. 7.6% behind</a:t>
-            </a:r>
-          </a:p>
-        </p:txBody>
-      </p:sp>
-      <p:sp>
-        <p:nvSpPr>
-          <p:cNvPr id="14" name="TextBox 13"/>
-          <p:cNvSpPr txBox="1"/>
-          <p:nvPr/>
-        </p:nvSpPr>
-        <p:spPr>
-          <a:xfrm>
-            <a:off x="685800" y="2514599"/>
-            <a:ext cx="3291840" cy="237744"/>
-          </a:xfrm>
-          <a:prstGeom prst="rect">
-            <a:avLst/>
-          </a:prstGeom>
-          <a:noFill/>
-        </p:spPr>
-        <p:txBody>
-          <a:bodyPr wrap="square">
-            <a:spAutoFit/>
-          </a:bodyPr>
-          <a:lstStyle/>
-          <a:p>
-            <a:pPr algn="l">
-              <a:lnSpc>
-                <a:spcPct val="100000"/>
-              </a:lnSpc>
-            </a:pPr>
-            <a:r>
-              <a:rPr sz="1150" b="0">
-                <a:solidFill>
-                  <a:srgbClr val="1A1A1A"/>
-                </a:solidFill>
-                <a:latin typeface="Georgia"/>
-              </a:rPr>
-              <a:t/>
-            </a:r>
-          </a:p>
-        </p:txBody>
-      </p:sp>
-      <p:sp>
-        <p:nvSpPr>
-          <p:cNvPr id="15" name="TextBox 14"/>
-          <p:cNvSpPr txBox="1"/>
-          <p:nvPr/>
-        </p:nvSpPr>
-        <p:spPr>
-          <a:xfrm>
-            <a:off x="3977639" y="2514599"/>
-            <a:ext cx="1737360" cy="237744"/>
-          </a:xfrm>
-          <a:prstGeom prst="rect">
-            <a:avLst/>
-          </a:prstGeom>
-          <a:noFill/>
-        </p:spPr>
-        <p:txBody>
-          <a:bodyPr wrap="square">
-            <a:spAutoFit/>
-          </a:bodyPr>
-          <a:lstStyle/>
-          <a:p>
-            <a:pPr algn="r">
-              <a:lnSpc>
-                <a:spcPct val="100000"/>
-              </a:lnSpc>
-            </a:pPr>
-            <a:r>
-              <a:rPr sz="1150" b="0">
-                <a:solidFill>
-                  <a:srgbClr val="1A1A1A"/>
-                </a:solidFill>
-                <a:latin typeface="Georgia"/>
-              </a:rPr>
-              <a:t/>
-            </a:r>
-          </a:p>
-        </p:txBody>
-      </p:sp>
-      <p:sp>
-        <p:nvSpPr>
-          <p:cNvPr id="16" name="TextBox 15"/>
-          <p:cNvSpPr txBox="1"/>
-          <p:nvPr/>
-        </p:nvSpPr>
-        <p:spPr>
-          <a:xfrm>
-            <a:off x="5715000" y="2514599"/>
-            <a:ext cx="5852160" cy="237744"/>
-          </a:xfrm>
-          <a:prstGeom prst="rect">
-            <a:avLst/>
-          </a:prstGeom>
-          <a:noFill/>
-        </p:spPr>
-        <p:txBody>
-          <a:bodyPr wrap="square">
-            <a:spAutoFit/>
-          </a:bodyPr>
-          <a:lstStyle/>
-          <a:p>
-            <a:pPr algn="r">
-              <a:lnSpc>
-                <a:spcPct val="100000"/>
-              </a:lnSpc>
-            </a:pPr>
-            <a:r>
-              <a:rPr sz="1150" b="0">
-                <a:solidFill>
-                  <a:srgbClr val="1A1A1A"/>
-                </a:solidFill>
-                <a:latin typeface="Georgia"/>
-              </a:rPr>
-              <a:t/>
-            </a:r>
-          </a:p>
-        </p:txBody>
-      </p:sp>
-      <p:sp>
-        <p:nvSpPr>
-          <p:cNvPr id="17" name="TextBox 16"/>
-          <p:cNvSpPr txBox="1"/>
-          <p:nvPr/>
-        </p:nvSpPr>
-        <p:spPr>
-          <a:xfrm>
-            <a:off x="685800" y="2788919"/>
-            <a:ext cx="3291840" cy="237744"/>
-          </a:xfrm>
-          <a:prstGeom prst="rect">
-            <a:avLst/>
-          </a:prstGeom>
-          <a:noFill/>
-        </p:spPr>
-        <p:txBody>
-          <a:bodyPr wrap="square">
-            <a:spAutoFit/>
-          </a:bodyPr>
-          <a:lstStyle/>
-          <a:p>
-            <a:pPr algn="l">
-              <a:lnSpc>
-                <a:spcPct val="100000"/>
-              </a:lnSpc>
-            </a:pPr>
-            <a:r>
-              <a:rPr sz="1150" b="0">
-                <a:solidFill>
-                  <a:srgbClr val="1A1A1A"/>
-                </a:solidFill>
-                <a:latin typeface="Georgia"/>
-              </a:rPr>
-              <a:t>Less compute than v2</a:t>
-            </a:r>
-          </a:p>
-        </p:txBody>
-      </p:sp>
-      <p:sp>
-        <p:nvSpPr>
-          <p:cNvPr id="18" name="TextBox 17"/>
-          <p:cNvSpPr txBox="1"/>
-          <p:nvPr/>
-        </p:nvSpPr>
-        <p:spPr>
-          <a:xfrm>
-            <a:off x="3977639" y="2788919"/>
-            <a:ext cx="1737360" cy="237744"/>
-          </a:xfrm>
-          <a:prstGeom prst="rect">
-            <a:avLst/>
-          </a:prstGeom>
-          <a:noFill/>
-        </p:spPr>
-        <p:txBody>
-          <a:bodyPr wrap="square">
-            <a:spAutoFit/>
-          </a:bodyPr>
-          <a:lstStyle/>
-          <a:p>
-            <a:pPr algn="r">
-              <a:lnSpc>
-                <a:spcPct val="100000"/>
-              </a:lnSpc>
-            </a:pPr>
-            <a:r>
-              <a:rPr sz="1150" b="0">
-                <a:solidFill>
-                  <a:srgbClr val="1A1A1A"/>
-                </a:solidFill>
-                <a:latin typeface="Georgia"/>
-              </a:rPr>
-              <a:t>PARTLY</a:t>
-            </a:r>
-          </a:p>
-        </p:txBody>
-      </p:sp>
-      <p:sp>
-        <p:nvSpPr>
-          <p:cNvPr id="19" name="TextBox 18"/>
-          <p:cNvSpPr txBox="1"/>
-          <p:nvPr/>
-        </p:nvSpPr>
-        <p:spPr>
-          <a:xfrm>
-            <a:off x="5715000" y="2788919"/>
-            <a:ext cx="5852160" cy="237744"/>
-          </a:xfrm>
-          <a:prstGeom prst="rect">
-            <a:avLst/>
-          </a:prstGeom>
-          <a:noFill/>
-        </p:spPr>
-        <p:txBody>
-          <a:bodyPr wrap="square">
-            <a:spAutoFit/>
-          </a:bodyPr>
-          <a:lstStyle/>
-          <a:p>
-            <a:pPr algn="r">
-              <a:lnSpc>
-                <a:spcPct val="100000"/>
-              </a:lnSpc>
-            </a:pPr>
-            <a:r>
-              <a:rPr sz="1150" b="0">
-                <a:solidFill>
-                  <a:srgbClr val="1A1A1A"/>
-                </a:solidFill>
-                <a:latin typeface="Georgia"/>
-              </a:rPr>
-              <a:t>dense 11% slower; first query level</a:t>
-            </a:r>
-          </a:p>
-        </p:txBody>
-      </p:sp>
-      <p:sp>
-        <p:nvSpPr>
-          <p:cNvPr id="20" name="TextBox 19"/>
-          <p:cNvSpPr txBox="1"/>
-          <p:nvPr/>
-        </p:nvSpPr>
-        <p:spPr>
-          <a:xfrm>
-            <a:off x="685800" y="3063239"/>
-            <a:ext cx="3291840" cy="237744"/>
-          </a:xfrm>
-          <a:prstGeom prst="rect">
-            <a:avLst/>
-          </a:prstGeom>
-          <a:noFill/>
-        </p:spPr>
-        <p:txBody>
-          <a:bodyPr wrap="square">
-            <a:spAutoFit/>
-          </a:bodyPr>
-          <a:lstStyle/>
-          <a:p>
-            <a:pPr algn="l">
-              <a:lnSpc>
-                <a:spcPct val="100000"/>
-              </a:lnSpc>
-            </a:pPr>
-            <a:r>
-              <a:rPr sz="1150" b="0">
-                <a:solidFill>
-                  <a:srgbClr val="1A1A1A"/>
-                </a:solidFill>
-                <a:latin typeface="Georgia"/>
-              </a:rPr>
-              <a:t/>
-            </a:r>
-          </a:p>
-        </p:txBody>
-      </p:sp>
-      <p:sp>
-        <p:nvSpPr>
-          <p:cNvPr id="21" name="TextBox 20"/>
-          <p:cNvSpPr txBox="1"/>
-          <p:nvPr/>
-        </p:nvSpPr>
-        <p:spPr>
-          <a:xfrm>
-            <a:off x="3977639" y="3063239"/>
-            <a:ext cx="1737360" cy="237744"/>
-          </a:xfrm>
-          <a:prstGeom prst="rect">
-            <a:avLst/>
-          </a:prstGeom>
-          <a:noFill/>
-        </p:spPr>
-        <p:txBody>
-          <a:bodyPr wrap="square">
-            <a:spAutoFit/>
-          </a:bodyPr>
-          <a:lstStyle/>
-          <a:p>
-            <a:pPr algn="r">
-              <a:lnSpc>
-                <a:spcPct val="100000"/>
-              </a:lnSpc>
-            </a:pPr>
-            <a:r>
-              <a:rPr sz="1150" b="0">
-                <a:solidFill>
-                  <a:srgbClr val="1A1A1A"/>
-                </a:solidFill>
-                <a:latin typeface="Georgia"/>
-              </a:rPr>
-              <a:t/>
-            </a:r>
-          </a:p>
-        </p:txBody>
-      </p:sp>
-      <p:sp>
-        <p:nvSpPr>
-          <p:cNvPr id="22" name="TextBox 21"/>
-          <p:cNvSpPr txBox="1"/>
-          <p:nvPr/>
-        </p:nvSpPr>
-        <p:spPr>
-          <a:xfrm>
-            <a:off x="5715000" y="3063239"/>
-            <a:ext cx="5852160" cy="237744"/>
-          </a:xfrm>
-          <a:prstGeom prst="rect">
-            <a:avLst/>
-          </a:prstGeom>
-          <a:noFill/>
-        </p:spPr>
-        <p:txBody>
-          <a:bodyPr wrap="square">
-            <a:spAutoFit/>
-          </a:bodyPr>
-          <a:lstStyle/>
-          <a:p>
-            <a:pPr algn="r">
-              <a:lnSpc>
-                <a:spcPct val="100000"/>
-              </a:lnSpc>
-            </a:pPr>
-            <a:r>
-              <a:rPr sz="1150" b="0">
-                <a:solidFill>
-                  <a:srgbClr val="1A1A1A"/>
-                </a:solidFill>
-                <a:latin typeface="Georgia"/>
-              </a:rPr>
-              <a:t>repeat query 27x cheaper (1.3 vs 33.3 ms)</a:t>
-            </a:r>
-          </a:p>
-        </p:txBody>
-      </p:sp>
-      <p:sp>
-        <p:nvSpPr>
-          <p:cNvPr id="23" name="TextBox 22"/>
-          <p:cNvSpPr txBox="1"/>
-          <p:nvPr/>
-        </p:nvSpPr>
-        <p:spPr>
-          <a:xfrm>
-            <a:off x="685800" y="3337559"/>
-            <a:ext cx="3291840" cy="237744"/>
-          </a:xfrm>
-          <a:prstGeom prst="rect">
-            <a:avLst/>
-          </a:prstGeom>
-          <a:noFill/>
-        </p:spPr>
-        <p:txBody>
-          <a:bodyPr wrap="square">
-            <a:spAutoFit/>
-          </a:bodyPr>
-          <a:lstStyle/>
-          <a:p>
-            <a:pPr algn="l">
-              <a:lnSpc>
-                <a:spcPct val="100000"/>
-              </a:lnSpc>
-            </a:pPr>
-            <a:r>
-              <a:rPr sz="1150" b="0">
-                <a:solidFill>
-                  <a:srgbClr val="1A1A1A"/>
-                </a:solidFill>
-                <a:latin typeface="Georgia"/>
-              </a:rPr>
-              <a:t/>
-            </a:r>
-          </a:p>
-        </p:txBody>
-      </p:sp>
-      <p:sp>
-        <p:nvSpPr>
-          <p:cNvPr id="24" name="TextBox 23"/>
-          <p:cNvSpPr txBox="1"/>
-          <p:nvPr/>
-        </p:nvSpPr>
-        <p:spPr>
-          <a:xfrm>
-            <a:off x="3977639" y="3337559"/>
-            <a:ext cx="1737360" cy="237744"/>
-          </a:xfrm>
-          <a:prstGeom prst="rect">
-            <a:avLst/>
-          </a:prstGeom>
-          <a:noFill/>
-        </p:spPr>
-        <p:txBody>
-          <a:bodyPr wrap="square">
-            <a:spAutoFit/>
-          </a:bodyPr>
-          <a:lstStyle/>
-          <a:p>
-            <a:pPr algn="r">
-              <a:lnSpc>
-                <a:spcPct val="100000"/>
-              </a:lnSpc>
-            </a:pPr>
-            <a:r>
-              <a:rPr sz="1150" b="0">
-                <a:solidFill>
-                  <a:srgbClr val="1A1A1A"/>
-                </a:solidFill>
-                <a:latin typeface="Georgia"/>
-              </a:rPr>
-              <a:t/>
-            </a:r>
-          </a:p>
-        </p:txBody>
-      </p:sp>
-      <p:sp>
-        <p:nvSpPr>
-          <p:cNvPr id="25" name="TextBox 24"/>
-          <p:cNvSpPr txBox="1"/>
-          <p:nvPr/>
-        </p:nvSpPr>
-        <p:spPr>
-          <a:xfrm>
-            <a:off x="5715000" y="3337559"/>
-            <a:ext cx="5852160" cy="237744"/>
-          </a:xfrm>
-          <a:prstGeom prst="rect">
-            <a:avLst/>
-          </a:prstGeom>
-          <a:noFill/>
-        </p:spPr>
-        <p:txBody>
-          <a:bodyPr wrap="square">
-            <a:spAutoFit/>
-          </a:bodyPr>
-          <a:lstStyle/>
-          <a:p>
-            <a:pPr algn="r">
-              <a:lnSpc>
-                <a:spcPct val="100000"/>
-              </a:lnSpc>
-            </a:pPr>
-            <a:r>
-              <a:rPr sz="1150" b="0">
-                <a:solidFill>
-                  <a:srgbClr val="1A1A1A"/>
-                </a:solidFill>
-                <a:latin typeface="Georgia"/>
-              </a:rPr>
-              <a:t/>
-            </a:r>
-          </a:p>
-        </p:txBody>
-      </p:sp>
-      <p:sp>
-        <p:nvSpPr>
-          <p:cNvPr id="26" name="TextBox 25"/>
-          <p:cNvSpPr txBox="1"/>
-          <p:nvPr/>
-        </p:nvSpPr>
-        <p:spPr>
-          <a:xfrm>
-            <a:off x="685800" y="3611879"/>
-            <a:ext cx="3291840" cy="237744"/>
-          </a:xfrm>
-          <a:prstGeom prst="rect">
-            <a:avLst/>
-          </a:prstGeom>
-          <a:noFill/>
-        </p:spPr>
-        <p:txBody>
-          <a:bodyPr wrap="square">
-            <a:spAutoFit/>
-          </a:bodyPr>
-          <a:lstStyle/>
-          <a:p>
-            <a:pPr algn="l">
-              <a:lnSpc>
-                <a:spcPct val="100000"/>
-              </a:lnSpc>
-            </a:pPr>
-            <a:r>
-              <a:rPr sz="1150" b="0">
-                <a:solidFill>
-                  <a:srgbClr val="1A1A1A"/>
-                </a:solidFill>
-                <a:latin typeface="Georgia"/>
-              </a:rPr>
-              <a:t>Runs on edge devices</a:t>
-            </a:r>
-          </a:p>
-        </p:txBody>
-      </p:sp>
-      <p:sp>
-        <p:nvSpPr>
-          <p:cNvPr id="27" name="TextBox 26"/>
-          <p:cNvSpPr txBox="1"/>
-          <p:nvPr/>
-        </p:nvSpPr>
-        <p:spPr>
-          <a:xfrm>
-            <a:off x="3977639" y="3611879"/>
-            <a:ext cx="1737360" cy="237744"/>
-          </a:xfrm>
-          <a:prstGeom prst="rect">
-            <a:avLst/>
-          </a:prstGeom>
-          <a:noFill/>
-        </p:spPr>
-        <p:txBody>
-          <a:bodyPr wrap="square">
-            <a:spAutoFit/>
-          </a:bodyPr>
-          <a:lstStyle/>
-          <a:p>
-            <a:pPr algn="r">
-              <a:lnSpc>
-                <a:spcPct val="100000"/>
-              </a:lnSpc>
-            </a:pPr>
-            <a:r>
-              <a:rPr sz="1150" b="0">
-                <a:solidFill>
-                  <a:srgbClr val="1A1A1A"/>
-                </a:solidFill>
-                <a:latin typeface="Georgia"/>
-              </a:rPr>
-              <a:t>UNPROVEN</a:t>
-            </a:r>
-          </a:p>
-        </p:txBody>
-      </p:sp>
-      <p:sp>
-        <p:nvSpPr>
-          <p:cNvPr id="28" name="TextBox 27"/>
-          <p:cNvSpPr txBox="1"/>
-          <p:nvPr/>
-        </p:nvSpPr>
-        <p:spPr>
-          <a:xfrm>
-            <a:off x="5715000" y="3611879"/>
-            <a:ext cx="5852160" cy="237744"/>
-          </a:xfrm>
-          <a:prstGeom prst="rect">
-            <a:avLst/>
-          </a:prstGeom>
-          <a:noFill/>
-        </p:spPr>
-        <p:txBody>
-          <a:bodyPr wrap="square">
-            <a:spAutoFit/>
-          </a:bodyPr>
-          <a:lstStyle/>
-          <a:p>
-            <a:pPr algn="r">
-              <a:lnSpc>
-                <a:spcPct val="100000"/>
-              </a:lnSpc>
-            </a:pPr>
-            <a:r>
-              <a:rPr sz="1150" b="0">
-                <a:solidFill>
-                  <a:srgbClr val="1A1A1A"/>
-                </a:solidFill>
-                <a:latin typeface="Georgia"/>
-              </a:rPr>
-              <a:t>all figures from a laptop RTX 4060</a:t>
-            </a:r>
-          </a:p>
-        </p:txBody>
-      </p:sp>
-      <p:sp>
-        <p:nvSpPr>
-          <p:cNvPr id="29" name="TextBox 28"/>
-          <p:cNvSpPr txBox="1"/>
-          <p:nvPr/>
-        </p:nvSpPr>
-        <p:spPr>
-          <a:xfrm>
-            <a:off x="685800" y="3886199"/>
-            <a:ext cx="3291840" cy="237744"/>
-          </a:xfrm>
-          <a:prstGeom prst="rect">
-            <a:avLst/>
-          </a:prstGeom>
-          <a:noFill/>
-        </p:spPr>
-        <p:txBody>
-          <a:bodyPr wrap="square">
-            <a:spAutoFit/>
-          </a:bodyPr>
-          <a:lstStyle/>
-          <a:p>
-            <a:pPr algn="l">
-              <a:lnSpc>
-                <a:spcPct val="100000"/>
-              </a:lnSpc>
-            </a:pPr>
-            <a:r>
-              <a:rPr sz="1150" b="0">
-                <a:solidFill>
-                  <a:srgbClr val="1A1A1A"/>
-                </a:solidFill>
-                <a:latin typeface="Georgia"/>
-              </a:rPr>
-              <a:t/>
-            </a:r>
-          </a:p>
-        </p:txBody>
-      </p:sp>
-      <p:sp>
-        <p:nvSpPr>
-          <p:cNvPr id="30" name="TextBox 29"/>
-          <p:cNvSpPr txBox="1"/>
-          <p:nvPr/>
-        </p:nvSpPr>
-        <p:spPr>
-          <a:xfrm>
-            <a:off x="3977639" y="3886199"/>
-            <a:ext cx="1737360" cy="237744"/>
-          </a:xfrm>
-          <a:prstGeom prst="rect">
-            <a:avLst/>
-          </a:prstGeom>
-          <a:noFill/>
-        </p:spPr>
-        <p:txBody>
-          <a:bodyPr wrap="square">
-            <a:spAutoFit/>
-          </a:bodyPr>
-          <a:lstStyle/>
-          <a:p>
-            <a:pPr algn="r">
-              <a:lnSpc>
-                <a:spcPct val="100000"/>
-              </a:lnSpc>
-            </a:pPr>
-            <a:r>
-              <a:rPr sz="1150" b="0">
-                <a:solidFill>
-                  <a:srgbClr val="1A1A1A"/>
-                </a:solidFill>
-                <a:latin typeface="Georgia"/>
-              </a:rPr>
-              <a:t/>
-            </a:r>
-          </a:p>
-        </p:txBody>
-      </p:sp>
-      <p:sp>
-        <p:nvSpPr>
-          <p:cNvPr id="31" name="TextBox 30"/>
-          <p:cNvSpPr txBox="1"/>
-          <p:nvPr/>
-        </p:nvSpPr>
-        <p:spPr>
-          <a:xfrm>
-            <a:off x="5715000" y="3886199"/>
-            <a:ext cx="5852160" cy="237744"/>
-          </a:xfrm>
-          <a:prstGeom prst="rect">
-            <a:avLst/>
-          </a:prstGeom>
-          <a:noFill/>
-        </p:spPr>
-        <p:txBody>
-          <a:bodyPr wrap="square">
-            <a:spAutoFit/>
-          </a:bodyPr>
-          <a:lstStyle/>
-          <a:p>
-            <a:pPr algn="r">
-              <a:lnSpc>
-                <a:spcPct val="100000"/>
-              </a:lnSpc>
-            </a:pPr>
-            <a:r>
-              <a:rPr sz="1150" b="0">
-                <a:solidFill>
-                  <a:srgbClr val="1A1A1A"/>
-                </a:solidFill>
-                <a:latin typeface="Georgia"/>
-              </a:rPr>
-              <a:t>no Jetson measurement has been taken</a:t>
-            </a:r>
-          </a:p>
-        </p:txBody>
-      </p:sp>
-      <p:sp>
-        <p:nvSpPr>
-          <p:cNvPr id="32" name="TextBox 31"/>
-          <p:cNvSpPr txBox="1"/>
-          <p:nvPr/>
-        </p:nvSpPr>
-        <p:spPr>
-          <a:xfrm>
-            <a:off x="685800" y="4434840"/>
-            <a:ext cx="10881360" cy="365760"/>
-          </a:xfrm>
-          <a:prstGeom prst="rect">
-            <a:avLst/>
-          </a:prstGeom>
-          <a:noFill/>
-        </p:spPr>
-        <p:txBody>
-          <a:bodyPr wrap="square">
-            <a:spAutoFit/>
-          </a:bodyPr>
-          <a:lstStyle/>
-          <a:p>
-            <a:pPr algn="l">
-              <a:lnSpc>
-                <a:spcPct val="100000"/>
-              </a:lnSpc>
-            </a:pPr>
-            <a:r>
-              <a:rPr sz="1250" b="1">
-                <a:solidFill>
-                  <a:srgbClr val="333333"/>
-                </a:solidFill>
-                <a:latin typeface="Georgia"/>
-              </a:rPr>
-              <a:t>What the project does deliver</a:t>
-            </a:r>
-          </a:p>
-        </p:txBody>
-      </p:sp>
-      <p:sp>
-        <p:nvSpPr>
-          <p:cNvPr id="33" name="Rounded Rectangle 32"/>
-          <p:cNvSpPr/>
-          <p:nvPr/>
-        </p:nvSpPr>
-        <p:spPr>
-          <a:xfrm>
-            <a:off x="685800" y="4846320"/>
-            <a:ext cx="3474720" cy="1005840"/>
-          </a:xfrm>
-          <a:prstGeom prst="roundRect">
-            <a:avLst/>
-          </a:prstGeom>
-          <a:solidFill>
-            <a:srgbClr val="EFEFEF"/>
-          </a:solidFill>
-          <a:ln w="9525">
-            <a:solidFill>
-              <a:srgbClr val="8A8A8A"/>
-            </a:solidFill>
-          </a:ln>
-          <a:effectLst/>
-        </p:spPr>
-        <p:style>
-          <a:lnRef idx="1">
-            <a:schemeClr val="accent1"/>
-          </a:lnRef>
-          <a:fillRef idx="3">
-            <a:schemeClr val="accent1"/>
-          </a:fillRef>
-          <a:effectRef idx="2">
-            <a:schemeClr val="accent1"/>
-          </a:effectRef>
-          <a:fontRef idx="minor">
-            <a:schemeClr val="lt1"/>
-          </a:fontRef>
-        </p:style>
-        <p:txBody>
-          <a:bodyPr rtlCol="0" anchor="ctr" wrap="square" lIns="73152" rIns="73152"/>
-          <a:lstStyle/>
-          <a:p>
-            <a:pPr algn="ctr"/>
-            <a:r>
-              <a:rPr sz="1050" b="0">
-                <a:solidFill>
-                  <a:srgbClr val="1A1A1A"/>
-                </a:solidFill>
-                <a:latin typeface="Georgia"/>
-              </a:rPr>
-              <a:t>Queryable output</a:t>
-            </a:r>
-          </a:p>
-          <a:p>
-            <a:pPr algn="ctr"/>
-            <a:r>
-              <a:rPr sz="1050" b="0">
-                <a:solidFill>
-                  <a:srgbClr val="1A1A1A"/>
-                </a:solidFill>
-                <a:latin typeface="Georgia"/>
-              </a:rPr>
-              <a:t/>
-            </a:r>
-          </a:p>
-          <a:p>
-            <a:pPr algn="ctr"/>
-            <a:r>
-              <a:rPr sz="1050" b="0">
-                <a:solidFill>
-                  <a:srgbClr val="1A1A1A"/>
-                </a:solidFill>
-                <a:latin typeface="Georgia"/>
-              </a:rPr>
-              <a:t>flow at any continuous coordinate, sparse equals dense exactly</a:t>
-            </a:r>
-          </a:p>
-        </p:txBody>
-      </p:sp>
-      <p:sp>
-        <p:nvSpPr>
-          <p:cNvPr id="34" name="Rounded Rectangle 33"/>
-          <p:cNvSpPr/>
-          <p:nvPr/>
-        </p:nvSpPr>
-        <p:spPr>
-          <a:xfrm>
-            <a:off x="4343400" y="4846320"/>
-            <a:ext cx="3474720" cy="1005840"/>
-          </a:xfrm>
-          <a:prstGeom prst="roundRect">
-            <a:avLst/>
-          </a:prstGeom>
-          <a:solidFill>
-            <a:srgbClr val="EFEFEF"/>
-          </a:solidFill>
-          <a:ln w="9525">
-            <a:solidFill>
-              <a:srgbClr val="8A8A8A"/>
-            </a:solidFill>
-          </a:ln>
-          <a:effectLst/>
-        </p:spPr>
-        <p:style>
-          <a:lnRef idx="1">
-            <a:schemeClr val="accent1"/>
-          </a:lnRef>
-          <a:fillRef idx="3">
-            <a:schemeClr val="accent1"/>
-          </a:fillRef>
-          <a:effectRef idx="2">
-            <a:schemeClr val="accent1"/>
-          </a:effectRef>
-          <a:fontRef idx="minor">
-            <a:schemeClr val="lt1"/>
-          </a:fontRef>
-        </p:style>
-        <p:txBody>
-          <a:bodyPr rtlCol="0" anchor="ctr" wrap="square" lIns="73152" rIns="73152"/>
-          <a:lstStyle/>
-          <a:p>
-            <a:pPr algn="ctr"/>
-            <a:r>
-              <a:rPr sz="1050" b="0">
-                <a:solidFill>
-                  <a:srgbClr val="1A1A1A"/>
-                </a:solidFill>
-                <a:latin typeface="Georgia"/>
-              </a:rPr>
-              <a:t>Cheap repeat access</a:t>
-            </a:r>
-          </a:p>
-          <a:p>
-            <a:pPr algn="ctr"/>
-            <a:r>
-              <a:rPr sz="1050" b="0">
-                <a:solidFill>
-                  <a:srgbClr val="1A1A1A"/>
-                </a:solidFill>
-                <a:latin typeface="Georgia"/>
-              </a:rPr>
-              <a:t/>
-            </a:r>
-          </a:p>
-          <a:p>
-            <a:pPr algn="ctr"/>
-            <a:r>
-              <a:rPr sz="1050" b="0">
-                <a:solidFill>
-                  <a:srgbClr val="1A1A1A"/>
-                </a:solidFill>
-                <a:latin typeface="Georgia"/>
-              </a:rPr>
-              <a:t>1.3 ms per further query batch on a cached frame</a:t>
-            </a:r>
-          </a:p>
-        </p:txBody>
-      </p:sp>
-      <p:sp>
-        <p:nvSpPr>
-          <p:cNvPr id="35" name="Rounded Rectangle 34"/>
-          <p:cNvSpPr/>
-          <p:nvPr/>
-        </p:nvSpPr>
-        <p:spPr>
-          <a:xfrm>
-            <a:off x="8001000" y="4846320"/>
-            <a:ext cx="3474720" cy="1005840"/>
-          </a:xfrm>
-          <a:prstGeom prst="roundRect">
-            <a:avLst/>
-          </a:prstGeom>
-          <a:solidFill>
-            <a:srgbClr val="EFEFEF"/>
-          </a:solidFill>
-          <a:ln w="9525">
-            <a:solidFill>
-              <a:srgbClr val="8A8A8A"/>
-            </a:solidFill>
-          </a:ln>
-          <a:effectLst/>
-        </p:spPr>
-        <p:style>
-          <a:lnRef idx="1">
-            <a:schemeClr val="accent1"/>
-          </a:lnRef>
-          <a:fillRef idx="3">
-            <a:schemeClr val="accent1"/>
-          </a:fillRef>
-          <a:effectRef idx="2">
-            <a:schemeClr val="accent1"/>
-          </a:effectRef>
-          <a:fontRef idx="minor">
-            <a:schemeClr val="lt1"/>
-          </a:fontRef>
-        </p:style>
-        <p:txBody>
-          <a:bodyPr rtlCol="0" anchor="ctr" wrap="square" lIns="73152" rIns="73152"/>
-          <a:lstStyle/>
-          <a:p>
-            <a:pPr algn="ctr"/>
-            <a:r>
-              <a:rPr sz="1050" b="0">
-                <a:solidFill>
-                  <a:srgbClr val="1A1A1A"/>
-                </a:solidFill>
-                <a:latin typeface="Georgia"/>
-              </a:rPr>
-              <a:t>Calibrated confidence</a:t>
-            </a:r>
-          </a:p>
-          <a:p>
-            <a:pPr algn="ctr"/>
-            <a:r>
-              <a:rPr sz="1050" b="0">
-                <a:solidFill>
-                  <a:srgbClr val="1A1A1A"/>
-                </a:solidFill>
-                <a:latin typeface="Georgia"/>
-              </a:rPr>
-              <a:t/>
-            </a:r>
-          </a:p>
-          <a:p>
-            <a:pPr algn="ctr"/>
-            <a:r>
-              <a:rPr sz="1050" b="0">
-                <a:solidFill>
-                  <a:srgbClr val="1A1A1A"/>
-                </a:solidFill>
-                <a:latin typeface="Georgia"/>
-              </a:rPr>
-              <a:t>per-query error estimate, monotonic against real error</a:t>
-            </a:r>
-          </a:p>
-        </p:txBody>
-      </p:sp>
-      <p:sp>
-        <p:nvSpPr>
-          <p:cNvPr id="36" name="TextBox 35"/>
           <p:cNvSpPr txBox="1"/>
           <p:nvPr/>
         </p:nvSpPr>
@@ -10186,7 +10063,7 @@
       </p:sp>
       <p:sp>
         <p:nvSpPr>
-          <p:cNvPr id="37" name="TextBox 36"/>
+          <p:cNvPr id="7" name="TextBox 6"/>
           <p:cNvSpPr txBox="1"/>
           <p:nvPr/>
         </p:nvSpPr>
@@ -10283,7 +10160,7 @@
                 </a:solidFill>
                 <a:latin typeface="Georgia"/>
               </a:rPr>
-              <a:t>LIMITATIONS</a:t>
+              <a:t>ASSESSMENT</a:t>
             </a:r>
           </a:p>
         </p:txBody>
@@ -10322,7 +10199,7 @@
                 </a:solidFill>
                 <a:latin typeface="Georgia"/>
               </a:rPr>
-              <a:t>What is not yet proven, stated plainly</a:t>
+              <a:t>Against the three objectives I set</a:t>
             </a:r>
           </a:p>
         </p:txBody>
@@ -10335,8 +10212,8 @@
         </p:nvSpPr>
         <p:spPr>
           <a:xfrm>
-            <a:off x="685800" y="1645920"/>
-            <a:ext cx="4023360" cy="274320"/>
+            <a:off x="685800" y="1691640"/>
+            <a:ext cx="3291840" cy="237744"/>
           </a:xfrm>
           <a:prstGeom prst="rect">
             <a:avLst/>
@@ -10361,7 +10238,7 @@
                 </a:solidFill>
                 <a:latin typeface="Georgia"/>
               </a:rPr>
-              <a:t>Sub-pixel precision is worse than v2</a:t>
+              <a:t>Objective</a:t>
             </a:r>
           </a:p>
         </p:txBody>
@@ -10374,33 +10251,33 @@
         </p:nvSpPr>
         <p:spPr>
           <a:xfrm>
-            <a:off x="4846320" y="1645920"/>
-            <a:ext cx="6675120" cy="548640"/>
-          </a:xfrm>
-          <a:prstGeom prst="rect">
-            <a:avLst/>
-          </a:prstGeom>
-          <a:noFill/>
-        </p:spPr>
-        <p:txBody>
-          <a:bodyPr wrap="square">
-            <a:spAutoFit/>
-          </a:bodyPr>
-          <a:lstStyle/>
-          <a:p>
-            <a:pPr algn="l">
-              <a:lnSpc>
-                <a:spcPct val="112000"/>
-              </a:lnSpc>
-            </a:pPr>
-            <a:r>
-              <a:rPr sz="1100" b="0">
-                <a:solidFill>
-                  <a:srgbClr val="1A1A1A"/>
-                </a:solidFill>
-                <a:latin typeface="Georgia"/>
-              </a:rPr>
-              <a:t>By 0.8 to 6.3 points of 1-pixel accuracy. Cause diagnosed (decoder never sees full-resolution input.</a:t>
+            <a:off x="3977639" y="1691640"/>
+            <a:ext cx="1737360" cy="237744"/>
+          </a:xfrm>
+          <a:prstGeom prst="rect">
+            <a:avLst/>
+          </a:prstGeom>
+          <a:noFill/>
+        </p:spPr>
+        <p:txBody>
+          <a:bodyPr wrap="square">
+            <a:spAutoFit/>
+          </a:bodyPr>
+          <a:lstStyle/>
+          <a:p>
+            <a:pPr algn="r">
+              <a:lnSpc>
+                <a:spcPct val="100000"/>
+              </a:lnSpc>
+            </a:pPr>
+            <a:r>
+              <a:rPr sz="1150" b="1">
+                <a:solidFill>
+                  <a:srgbClr val="1A1A1A"/>
+                </a:solidFill>
+                <a:latin typeface="Georgia"/>
+              </a:rPr>
+              <a:t>Verdict</a:t>
             </a:r>
           </a:p>
         </p:txBody>
@@ -10413,21 +10290,21 @@
         </p:nvSpPr>
         <p:spPr>
           <a:xfrm>
-            <a:off x="685800" y="2578608"/>
-            <a:ext cx="4023360" cy="274320"/>
-          </a:xfrm>
-          <a:prstGeom prst="rect">
-            <a:avLst/>
-          </a:prstGeom>
-          <a:noFill/>
-        </p:spPr>
-        <p:txBody>
-          <a:bodyPr wrap="square">
-            <a:spAutoFit/>
-          </a:bodyPr>
-          <a:lstStyle/>
-          <a:p>
-            <a:pPr algn="l">
+            <a:off x="5715000" y="1691640"/>
+            <a:ext cx="5852160" cy="237744"/>
+          </a:xfrm>
+          <a:prstGeom prst="rect">
+            <a:avLst/>
+          </a:prstGeom>
+          <a:noFill/>
+        </p:spPr>
+        <p:txBody>
+          <a:bodyPr wrap="square">
+            <a:spAutoFit/>
+          </a:bodyPr>
+          <a:lstStyle/>
+          <a:p>
+            <a:pPr algn="r">
               <a:lnSpc>
                 <a:spcPct val="100000"/>
               </a:lnSpc>
@@ -10439,47 +10316,52 @@
                 </a:solidFill>
                 <a:latin typeface="Georgia"/>
               </a:rPr>
-              <a:t>No edge-device measurement</a:t>
-            </a:r>
-          </a:p>
-        </p:txBody>
-      </p:sp>
-      <p:sp>
-        <p:nvSpPr>
-          <p:cNvPr id="7" name="TextBox 6"/>
-          <p:cNvSpPr txBox="1"/>
-          <p:nvPr/>
-        </p:nvSpPr>
-        <p:spPr>
-          <a:xfrm>
-            <a:off x="4846320" y="2578608"/>
-            <a:ext cx="6675120" cy="548640"/>
-          </a:xfrm>
-          <a:prstGeom prst="rect">
-            <a:avLst/>
-          </a:prstGeom>
-          <a:noFill/>
-        </p:spPr>
-        <p:txBody>
-          <a:bodyPr wrap="square">
-            <a:spAutoFit/>
-          </a:bodyPr>
-          <a:lstStyle/>
-          <a:p>
-            <a:pPr algn="l">
-              <a:lnSpc>
-                <a:spcPct val="112000"/>
-              </a:lnSpc>
-            </a:pPr>
-            <a:r>
-              <a:rPr sz="1100" b="0">
-                <a:solidFill>
-                  <a:srgbClr val="1A1A1A"/>
-                </a:solidFill>
-                <a:latin typeface="Georgia"/>
-              </a:rPr>
-              <a:t>Every latency figure is from a laptop RTX 4060. The edge claim in the title is a design target, not a result.</a:t>
-            </a:r>
+              <a:t>Evidence</a:t>
+            </a:r>
+          </a:p>
+        </p:txBody>
+      </p:sp>
+      <p:sp>
+        <p:nvSpPr>
+          <p:cNvPr id="7" name="Rectangle 6"/>
+          <p:cNvSpPr/>
+          <p:nvPr/>
+        </p:nvSpPr>
+        <p:spPr>
+          <a:xfrm>
+            <a:off x="685800" y="1929384"/>
+            <a:ext cx="10881360" cy="9525"/>
+          </a:xfrm>
+          <a:prstGeom prst="rect">
+            <a:avLst/>
+          </a:prstGeom>
+          <a:solidFill>
+            <a:srgbClr val="8A8A8A"/>
+          </a:solidFill>
+          <a:ln>
+            <a:noFill/>
+          </a:ln>
+          <a:effectLst/>
+        </p:spPr>
+        <p:style>
+          <a:lnRef idx="1">
+            <a:schemeClr val="accent1"/>
+          </a:lnRef>
+          <a:fillRef idx="3">
+            <a:schemeClr val="accent1"/>
+          </a:fillRef>
+          <a:effectRef idx="2">
+            <a:schemeClr val="accent1"/>
+          </a:effectRef>
+          <a:fontRef idx="minor">
+            <a:schemeClr val="lt1"/>
+          </a:fontRef>
+        </p:style>
+        <p:txBody>
+          <a:bodyPr rtlCol="0" anchor="ctr"/>
+          <a:lstStyle/>
+          <a:p>
+            <a:pPr algn="ctr"/>
           </a:p>
         </p:txBody>
       </p:sp>
@@ -10491,33 +10373,33 @@
         </p:nvSpPr>
         <p:spPr>
           <a:xfrm>
-            <a:off x="685800" y="3511296"/>
-            <a:ext cx="4023360" cy="274320"/>
-          </a:xfrm>
-          <a:prstGeom prst="rect">
-            <a:avLst/>
-          </a:prstGeom>
-          <a:noFill/>
-        </p:spPr>
-        <p:txBody>
-          <a:bodyPr wrap="square">
-            <a:spAutoFit/>
-          </a:bodyPr>
-          <a:lstStyle/>
-          <a:p>
-            <a:pPr algn="l">
-              <a:lnSpc>
-                <a:spcPct val="100000"/>
-              </a:lnSpc>
-            </a:pPr>
-            <a:r>
-              <a:rPr sz="1150" b="1">
-                <a:solidFill>
-                  <a:srgbClr val="1A1A1A"/>
-                </a:solidFill>
-                <a:latin typeface="Georgia"/>
-              </a:rPr>
-              <a:t>Single evaluation domain</a:t>
+            <a:off x="685800" y="1965960"/>
+            <a:ext cx="3291840" cy="237744"/>
+          </a:xfrm>
+          <a:prstGeom prst="rect">
+            <a:avLst/>
+          </a:prstGeom>
+          <a:noFill/>
+        </p:spPr>
+        <p:txBody>
+          <a:bodyPr wrap="square">
+            <a:spAutoFit/>
+          </a:bodyPr>
+          <a:lstStyle/>
+          <a:p>
+            <a:pPr algn="l">
+              <a:lnSpc>
+                <a:spcPct val="100000"/>
+              </a:lnSpc>
+            </a:pPr>
+            <a:r>
+              <a:rPr sz="1150" b="0">
+                <a:solidFill>
+                  <a:srgbClr val="1A1A1A"/>
+                </a:solidFill>
+                <a:latin typeface="Georgia"/>
+              </a:rPr>
+              <a:t>Better accuracy than v2</a:t>
             </a:r>
           </a:p>
         </p:txBody>
@@ -10530,33 +10412,33 @@
         </p:nvSpPr>
         <p:spPr>
           <a:xfrm>
-            <a:off x="4846320" y="3511296"/>
-            <a:ext cx="6675120" cy="548640"/>
-          </a:xfrm>
-          <a:prstGeom prst="rect">
-            <a:avLst/>
-          </a:prstGeom>
-          <a:noFill/>
-        </p:spPr>
-        <p:txBody>
-          <a:bodyPr wrap="square">
-            <a:spAutoFit/>
-          </a:bodyPr>
-          <a:lstStyle/>
-          <a:p>
-            <a:pPr algn="l">
-              <a:lnSpc>
-                <a:spcPct val="112000"/>
-              </a:lnSpc>
-            </a:pPr>
-            <a:r>
-              <a:rPr sz="1100" b="0">
-                <a:solidFill>
-                  <a:srgbClr val="1A1A1A"/>
-                </a:solidFill>
-                <a:latin typeface="Georgia"/>
-              </a:rPr>
-              <a:t>All accuracy numbers are VKITTI2 Scene18+20. A synthetic driving benchmark is not evidence for field or survey imagery.</a:t>
+            <a:off x="3977639" y="1965960"/>
+            <a:ext cx="1737360" cy="237744"/>
+          </a:xfrm>
+          <a:prstGeom prst="rect">
+            <a:avLst/>
+          </a:prstGeom>
+          <a:noFill/>
+        </p:spPr>
+        <p:txBody>
+          <a:bodyPr wrap="square">
+            <a:spAutoFit/>
+          </a:bodyPr>
+          <a:lstStyle/>
+          <a:p>
+            <a:pPr algn="r">
+              <a:lnSpc>
+                <a:spcPct val="100000"/>
+              </a:lnSpc>
+            </a:pPr>
+            <a:r>
+              <a:rPr sz="1150" b="0">
+                <a:solidFill>
+                  <a:srgbClr val="1A1A1A"/>
+                </a:solidFill>
+                <a:latin typeface="Georgia"/>
+              </a:rPr>
+              <a:t>NOT MET</a:t>
             </a:r>
           </a:p>
         </p:txBody>
@@ -10569,33 +10451,33 @@
         </p:nvSpPr>
         <p:spPr>
           <a:xfrm>
-            <a:off x="685800" y="4443984"/>
-            <a:ext cx="4023360" cy="274320"/>
-          </a:xfrm>
-          <a:prstGeom prst="rect">
-            <a:avLst/>
-          </a:prstGeom>
-          <a:noFill/>
-        </p:spPr>
-        <p:txBody>
-          <a:bodyPr wrap="square">
-            <a:spAutoFit/>
-          </a:bodyPr>
-          <a:lstStyle/>
-          <a:p>
-            <a:pPr algn="l">
-              <a:lnSpc>
-                <a:spcPct val="100000"/>
-              </a:lnSpc>
-            </a:pPr>
-            <a:r>
-              <a:rPr sz="1150" b="1">
-                <a:solidFill>
-                  <a:srgbClr val="1A1A1A"/>
-                </a:solidFill>
-                <a:latin typeface="Georgia"/>
-              </a:rPr>
-              <a:t>Spring run truncated</a:t>
+            <a:off x="5715000" y="1965960"/>
+            <a:ext cx="5852160" cy="237744"/>
+          </a:xfrm>
+          <a:prstGeom prst="rect">
+            <a:avLst/>
+          </a:prstGeom>
+          <a:noFill/>
+        </p:spPr>
+        <p:txBody>
+          <a:bodyPr wrap="square">
+            <a:spAutoFit/>
+          </a:bodyPr>
+          <a:lstStyle/>
+          <a:p>
+            <a:pPr algn="r">
+              <a:lnSpc>
+                <a:spcPct val="100000"/>
+              </a:lnSpc>
+            </a:pPr>
+            <a:r>
+              <a:rPr sz="1150" b="0">
+                <a:solidFill>
+                  <a:srgbClr val="1A1A1A"/>
+                </a:solidFill>
+                <a:latin typeface="Georgia"/>
+              </a:rPr>
+              <a:t>best v3 2.384 vs 2.324; every config above v2</a:t>
             </a:r>
           </a:p>
         </p:txBody>
@@ -10608,33 +10490,33 @@
         </p:nvSpPr>
         <p:spPr>
           <a:xfrm>
-            <a:off x="4846320" y="4443984"/>
-            <a:ext cx="6675120" cy="548640"/>
-          </a:xfrm>
-          <a:prstGeom prst="rect">
-            <a:avLst/>
-          </a:prstGeom>
-          <a:noFill/>
-        </p:spPr>
-        <p:txBody>
-          <a:bodyPr wrap="square">
-            <a:spAutoFit/>
-          </a:bodyPr>
-          <a:lstStyle/>
-          <a:p>
-            <a:pPr algn="l">
-              <a:lnSpc>
-                <a:spcPct val="112000"/>
-              </a:lnSpc>
-            </a:pPr>
-            <a:r>
-              <a:rPr sz="1100" b="0">
-                <a:solidFill>
-                  <a:srgbClr val="1A1A1A"/>
-                </a:solidFill>
-                <a:latin typeface="Georgia"/>
-              </a:rPr>
-              <a:t>Killed by the 8-hour wall clock at roughly 90k of 100k steps, so it is not directly comparable to the others.</a:t>
+            <a:off x="685800" y="2240279"/>
+            <a:ext cx="3291840" cy="237744"/>
+          </a:xfrm>
+          <a:prstGeom prst="rect">
+            <a:avLst/>
+          </a:prstGeom>
+          <a:noFill/>
+        </p:spPr>
+        <p:txBody>
+          <a:bodyPr wrap="square">
+            <a:spAutoFit/>
+          </a:bodyPr>
+          <a:lstStyle/>
+          <a:p>
+            <a:pPr algn="l">
+              <a:lnSpc>
+                <a:spcPct val="100000"/>
+              </a:lnSpc>
+            </a:pPr>
+            <a:r>
+              <a:rPr sz="1150" b="0">
+                <a:solidFill>
+                  <a:srgbClr val="1A1A1A"/>
+                </a:solidFill>
+                <a:latin typeface="Georgia"/>
+              </a:rPr>
+              <a:t/>
             </a:r>
           </a:p>
         </p:txBody>
@@ -10647,33 +10529,33 @@
         </p:nvSpPr>
         <p:spPr>
           <a:xfrm>
-            <a:off x="685800" y="5376672"/>
-            <a:ext cx="4023360" cy="274320"/>
-          </a:xfrm>
-          <a:prstGeom prst="rect">
-            <a:avLst/>
-          </a:prstGeom>
-          <a:noFill/>
-        </p:spPr>
-        <p:txBody>
-          <a:bodyPr wrap="square">
-            <a:spAutoFit/>
-          </a:bodyPr>
-          <a:lstStyle/>
-          <a:p>
-            <a:pPr algn="l">
-              <a:lnSpc>
-                <a:spcPct val="100000"/>
-              </a:lnSpc>
-            </a:pPr>
-            <a:r>
-              <a:rPr sz="1150" b="1">
-                <a:solidFill>
-                  <a:srgbClr val="1A1A1A"/>
-                </a:solidFill>
-                <a:latin typeface="Georgia"/>
-              </a:rPr>
-              <a:t>One seed, and checkpoint noise the size of the effects</a:t>
+            <a:off x="3977639" y="2240279"/>
+            <a:ext cx="1737360" cy="237744"/>
+          </a:xfrm>
+          <a:prstGeom prst="rect">
+            <a:avLst/>
+          </a:prstGeom>
+          <a:noFill/>
+        </p:spPr>
+        <p:txBody>
+          <a:bodyPr wrap="square">
+            <a:spAutoFit/>
+          </a:bodyPr>
+          <a:lstStyle/>
+          <a:p>
+            <a:pPr algn="r">
+              <a:lnSpc>
+                <a:spcPct val="100000"/>
+              </a:lnSpc>
+            </a:pPr>
+            <a:r>
+              <a:rPr sz="1150" b="0">
+                <a:solidFill>
+                  <a:srgbClr val="1A1A1A"/>
+                </a:solidFill>
+                <a:latin typeface="Georgia"/>
+              </a:rPr>
+              <a:t/>
             </a:r>
           </a:p>
         </p:txBody>
@@ -10686,33 +10568,33 @@
         </p:nvSpPr>
         <p:spPr>
           <a:xfrm>
-            <a:off x="4846320" y="5376672"/>
-            <a:ext cx="6675120" cy="548640"/>
-          </a:xfrm>
-          <a:prstGeom prst="rect">
-            <a:avLst/>
-          </a:prstGeom>
-          <a:noFill/>
-        </p:spPr>
-        <p:txBody>
-          <a:bodyPr wrap="square">
-            <a:spAutoFit/>
-          </a:bodyPr>
-          <a:lstStyle/>
-          <a:p>
-            <a:pPr algn="l">
-              <a:lnSpc>
-                <a:spcPct val="112000"/>
-              </a:lnSpc>
-            </a:pPr>
-            <a:r>
-              <a:rPr sz="1100" b="0">
-                <a:solidFill>
-                  <a:srgbClr val="1A1A1A"/>
-                </a:solidFill>
-                <a:latin typeface="Georgia"/>
-              </a:rPr>
-              <a:t>Step 90k vs 100k of the same run moves EPE by up to 0.038 px, reversing two of the orderings. Nothing finer than about 0.05 px is resolvable here.</a:t>
+            <a:off x="5715000" y="2240279"/>
+            <a:ext cx="5852160" cy="237744"/>
+          </a:xfrm>
+          <a:prstGeom prst="rect">
+            <a:avLst/>
+          </a:prstGeom>
+          <a:noFill/>
+        </p:spPr>
+        <p:txBody>
+          <a:bodyPr wrap="square">
+            <a:spAutoFit/>
+          </a:bodyPr>
+          <a:lstStyle/>
+          <a:p>
+            <a:pPr algn="r">
+              <a:lnSpc>
+                <a:spcPct val="100000"/>
+              </a:lnSpc>
+            </a:pPr>
+            <a:r>
+              <a:rPr sz="1150" b="0">
+                <a:solidFill>
+                  <a:srgbClr val="1A1A1A"/>
+                </a:solidFill>
+                <a:latin typeface="Georgia"/>
+              </a:rPr>
+              <a:t>like-for-like 2.500, i.e. 7.6% behind</a:t>
             </a:r>
           </a:p>
         </p:txBody>
@@ -10720,6 +10602,984 @@
       <p:sp>
         <p:nvSpPr>
           <p:cNvPr id="14" name="TextBox 13"/>
+          <p:cNvSpPr txBox="1"/>
+          <p:nvPr/>
+        </p:nvSpPr>
+        <p:spPr>
+          <a:xfrm>
+            <a:off x="685800" y="2514599"/>
+            <a:ext cx="3291840" cy="237744"/>
+          </a:xfrm>
+          <a:prstGeom prst="rect">
+            <a:avLst/>
+          </a:prstGeom>
+          <a:noFill/>
+        </p:spPr>
+        <p:txBody>
+          <a:bodyPr wrap="square">
+            <a:spAutoFit/>
+          </a:bodyPr>
+          <a:lstStyle/>
+          <a:p>
+            <a:pPr algn="l">
+              <a:lnSpc>
+                <a:spcPct val="100000"/>
+              </a:lnSpc>
+            </a:pPr>
+            <a:r>
+              <a:rPr sz="1150" b="0">
+                <a:solidFill>
+                  <a:srgbClr val="1A1A1A"/>
+                </a:solidFill>
+                <a:latin typeface="Georgia"/>
+              </a:rPr>
+              <a:t/>
+            </a:r>
+          </a:p>
+        </p:txBody>
+      </p:sp>
+      <p:sp>
+        <p:nvSpPr>
+          <p:cNvPr id="15" name="TextBox 14"/>
+          <p:cNvSpPr txBox="1"/>
+          <p:nvPr/>
+        </p:nvSpPr>
+        <p:spPr>
+          <a:xfrm>
+            <a:off x="3977639" y="2514599"/>
+            <a:ext cx="1737360" cy="237744"/>
+          </a:xfrm>
+          <a:prstGeom prst="rect">
+            <a:avLst/>
+          </a:prstGeom>
+          <a:noFill/>
+        </p:spPr>
+        <p:txBody>
+          <a:bodyPr wrap="square">
+            <a:spAutoFit/>
+          </a:bodyPr>
+          <a:lstStyle/>
+          <a:p>
+            <a:pPr algn="r">
+              <a:lnSpc>
+                <a:spcPct val="100000"/>
+              </a:lnSpc>
+            </a:pPr>
+            <a:r>
+              <a:rPr sz="1150" b="0">
+                <a:solidFill>
+                  <a:srgbClr val="1A1A1A"/>
+                </a:solidFill>
+                <a:latin typeface="Georgia"/>
+              </a:rPr>
+              <a:t/>
+            </a:r>
+          </a:p>
+        </p:txBody>
+      </p:sp>
+      <p:sp>
+        <p:nvSpPr>
+          <p:cNvPr id="16" name="TextBox 15"/>
+          <p:cNvSpPr txBox="1"/>
+          <p:nvPr/>
+        </p:nvSpPr>
+        <p:spPr>
+          <a:xfrm>
+            <a:off x="5715000" y="2514599"/>
+            <a:ext cx="5852160" cy="237744"/>
+          </a:xfrm>
+          <a:prstGeom prst="rect">
+            <a:avLst/>
+          </a:prstGeom>
+          <a:noFill/>
+        </p:spPr>
+        <p:txBody>
+          <a:bodyPr wrap="square">
+            <a:spAutoFit/>
+          </a:bodyPr>
+          <a:lstStyle/>
+          <a:p>
+            <a:pPr algn="r">
+              <a:lnSpc>
+                <a:spcPct val="100000"/>
+              </a:lnSpc>
+            </a:pPr>
+            <a:r>
+              <a:rPr sz="1150" b="0">
+                <a:solidFill>
+                  <a:srgbClr val="1A1A1A"/>
+                </a:solidFill>
+                <a:latin typeface="Georgia"/>
+              </a:rPr>
+              <a:t/>
+            </a:r>
+          </a:p>
+        </p:txBody>
+      </p:sp>
+      <p:sp>
+        <p:nvSpPr>
+          <p:cNvPr id="17" name="TextBox 16"/>
+          <p:cNvSpPr txBox="1"/>
+          <p:nvPr/>
+        </p:nvSpPr>
+        <p:spPr>
+          <a:xfrm>
+            <a:off x="685800" y="2788919"/>
+            <a:ext cx="3291840" cy="237744"/>
+          </a:xfrm>
+          <a:prstGeom prst="rect">
+            <a:avLst/>
+          </a:prstGeom>
+          <a:noFill/>
+        </p:spPr>
+        <p:txBody>
+          <a:bodyPr wrap="square">
+            <a:spAutoFit/>
+          </a:bodyPr>
+          <a:lstStyle/>
+          <a:p>
+            <a:pPr algn="l">
+              <a:lnSpc>
+                <a:spcPct val="100000"/>
+              </a:lnSpc>
+            </a:pPr>
+            <a:r>
+              <a:rPr sz="1150" b="0">
+                <a:solidFill>
+                  <a:srgbClr val="1A1A1A"/>
+                </a:solidFill>
+                <a:latin typeface="Georgia"/>
+              </a:rPr>
+              <a:t>Less compute than v2</a:t>
+            </a:r>
+          </a:p>
+        </p:txBody>
+      </p:sp>
+      <p:sp>
+        <p:nvSpPr>
+          <p:cNvPr id="18" name="TextBox 17"/>
+          <p:cNvSpPr txBox="1"/>
+          <p:nvPr/>
+        </p:nvSpPr>
+        <p:spPr>
+          <a:xfrm>
+            <a:off x="3977639" y="2788919"/>
+            <a:ext cx="1737360" cy="237744"/>
+          </a:xfrm>
+          <a:prstGeom prst="rect">
+            <a:avLst/>
+          </a:prstGeom>
+          <a:noFill/>
+        </p:spPr>
+        <p:txBody>
+          <a:bodyPr wrap="square">
+            <a:spAutoFit/>
+          </a:bodyPr>
+          <a:lstStyle/>
+          <a:p>
+            <a:pPr algn="r">
+              <a:lnSpc>
+                <a:spcPct val="100000"/>
+              </a:lnSpc>
+            </a:pPr>
+            <a:r>
+              <a:rPr sz="1150" b="0">
+                <a:solidFill>
+                  <a:srgbClr val="1A1A1A"/>
+                </a:solidFill>
+                <a:latin typeface="Georgia"/>
+              </a:rPr>
+              <a:t>PARTLY</a:t>
+            </a:r>
+          </a:p>
+        </p:txBody>
+      </p:sp>
+      <p:sp>
+        <p:nvSpPr>
+          <p:cNvPr id="19" name="TextBox 18"/>
+          <p:cNvSpPr txBox="1"/>
+          <p:nvPr/>
+        </p:nvSpPr>
+        <p:spPr>
+          <a:xfrm>
+            <a:off x="5715000" y="2788919"/>
+            <a:ext cx="5852160" cy="237744"/>
+          </a:xfrm>
+          <a:prstGeom prst="rect">
+            <a:avLst/>
+          </a:prstGeom>
+          <a:noFill/>
+        </p:spPr>
+        <p:txBody>
+          <a:bodyPr wrap="square">
+            <a:spAutoFit/>
+          </a:bodyPr>
+          <a:lstStyle/>
+          <a:p>
+            <a:pPr algn="r">
+              <a:lnSpc>
+                <a:spcPct val="100000"/>
+              </a:lnSpc>
+            </a:pPr>
+            <a:r>
+              <a:rPr sz="1150" b="0">
+                <a:solidFill>
+                  <a:srgbClr val="1A1A1A"/>
+                </a:solidFill>
+                <a:latin typeface="Georgia"/>
+              </a:rPr>
+              <a:t>dense 11% slower; first query level</a:t>
+            </a:r>
+          </a:p>
+        </p:txBody>
+      </p:sp>
+      <p:sp>
+        <p:nvSpPr>
+          <p:cNvPr id="20" name="TextBox 19"/>
+          <p:cNvSpPr txBox="1"/>
+          <p:nvPr/>
+        </p:nvSpPr>
+        <p:spPr>
+          <a:xfrm>
+            <a:off x="685800" y="3063239"/>
+            <a:ext cx="3291840" cy="237744"/>
+          </a:xfrm>
+          <a:prstGeom prst="rect">
+            <a:avLst/>
+          </a:prstGeom>
+          <a:noFill/>
+        </p:spPr>
+        <p:txBody>
+          <a:bodyPr wrap="square">
+            <a:spAutoFit/>
+          </a:bodyPr>
+          <a:lstStyle/>
+          <a:p>
+            <a:pPr algn="l">
+              <a:lnSpc>
+                <a:spcPct val="100000"/>
+              </a:lnSpc>
+            </a:pPr>
+            <a:r>
+              <a:rPr sz="1150" b="0">
+                <a:solidFill>
+                  <a:srgbClr val="1A1A1A"/>
+                </a:solidFill>
+                <a:latin typeface="Georgia"/>
+              </a:rPr>
+              <a:t/>
+            </a:r>
+          </a:p>
+        </p:txBody>
+      </p:sp>
+      <p:sp>
+        <p:nvSpPr>
+          <p:cNvPr id="21" name="TextBox 20"/>
+          <p:cNvSpPr txBox="1"/>
+          <p:nvPr/>
+        </p:nvSpPr>
+        <p:spPr>
+          <a:xfrm>
+            <a:off x="3977639" y="3063239"/>
+            <a:ext cx="1737360" cy="237744"/>
+          </a:xfrm>
+          <a:prstGeom prst="rect">
+            <a:avLst/>
+          </a:prstGeom>
+          <a:noFill/>
+        </p:spPr>
+        <p:txBody>
+          <a:bodyPr wrap="square">
+            <a:spAutoFit/>
+          </a:bodyPr>
+          <a:lstStyle/>
+          <a:p>
+            <a:pPr algn="r">
+              <a:lnSpc>
+                <a:spcPct val="100000"/>
+              </a:lnSpc>
+            </a:pPr>
+            <a:r>
+              <a:rPr sz="1150" b="0">
+                <a:solidFill>
+                  <a:srgbClr val="1A1A1A"/>
+                </a:solidFill>
+                <a:latin typeface="Georgia"/>
+              </a:rPr>
+              <a:t/>
+            </a:r>
+          </a:p>
+        </p:txBody>
+      </p:sp>
+      <p:sp>
+        <p:nvSpPr>
+          <p:cNvPr id="22" name="TextBox 21"/>
+          <p:cNvSpPr txBox="1"/>
+          <p:nvPr/>
+        </p:nvSpPr>
+        <p:spPr>
+          <a:xfrm>
+            <a:off x="5715000" y="3063239"/>
+            <a:ext cx="5852160" cy="237744"/>
+          </a:xfrm>
+          <a:prstGeom prst="rect">
+            <a:avLst/>
+          </a:prstGeom>
+          <a:noFill/>
+        </p:spPr>
+        <p:txBody>
+          <a:bodyPr wrap="square">
+            <a:spAutoFit/>
+          </a:bodyPr>
+          <a:lstStyle/>
+          <a:p>
+            <a:pPr algn="r">
+              <a:lnSpc>
+                <a:spcPct val="100000"/>
+              </a:lnSpc>
+            </a:pPr>
+            <a:r>
+              <a:rPr sz="1150" b="0">
+                <a:solidFill>
+                  <a:srgbClr val="1A1A1A"/>
+                </a:solidFill>
+                <a:latin typeface="Georgia"/>
+              </a:rPr>
+              <a:t>repeat query 27x cheaper (1.3 vs 33.3 ms)</a:t>
+            </a:r>
+          </a:p>
+        </p:txBody>
+      </p:sp>
+      <p:sp>
+        <p:nvSpPr>
+          <p:cNvPr id="23" name="TextBox 22"/>
+          <p:cNvSpPr txBox="1"/>
+          <p:nvPr/>
+        </p:nvSpPr>
+        <p:spPr>
+          <a:xfrm>
+            <a:off x="685800" y="3337559"/>
+            <a:ext cx="3291840" cy="237744"/>
+          </a:xfrm>
+          <a:prstGeom prst="rect">
+            <a:avLst/>
+          </a:prstGeom>
+          <a:noFill/>
+        </p:spPr>
+        <p:txBody>
+          <a:bodyPr wrap="square">
+            <a:spAutoFit/>
+          </a:bodyPr>
+          <a:lstStyle/>
+          <a:p>
+            <a:pPr algn="l">
+              <a:lnSpc>
+                <a:spcPct val="100000"/>
+              </a:lnSpc>
+            </a:pPr>
+            <a:r>
+              <a:rPr sz="1150" b="0">
+                <a:solidFill>
+                  <a:srgbClr val="1A1A1A"/>
+                </a:solidFill>
+                <a:latin typeface="Georgia"/>
+              </a:rPr>
+              <a:t/>
+            </a:r>
+          </a:p>
+        </p:txBody>
+      </p:sp>
+      <p:sp>
+        <p:nvSpPr>
+          <p:cNvPr id="24" name="TextBox 23"/>
+          <p:cNvSpPr txBox="1"/>
+          <p:nvPr/>
+        </p:nvSpPr>
+        <p:spPr>
+          <a:xfrm>
+            <a:off x="3977639" y="3337559"/>
+            <a:ext cx="1737360" cy="237744"/>
+          </a:xfrm>
+          <a:prstGeom prst="rect">
+            <a:avLst/>
+          </a:prstGeom>
+          <a:noFill/>
+        </p:spPr>
+        <p:txBody>
+          <a:bodyPr wrap="square">
+            <a:spAutoFit/>
+          </a:bodyPr>
+          <a:lstStyle/>
+          <a:p>
+            <a:pPr algn="r">
+              <a:lnSpc>
+                <a:spcPct val="100000"/>
+              </a:lnSpc>
+            </a:pPr>
+            <a:r>
+              <a:rPr sz="1150" b="0">
+                <a:solidFill>
+                  <a:srgbClr val="1A1A1A"/>
+                </a:solidFill>
+                <a:latin typeface="Georgia"/>
+              </a:rPr>
+              <a:t/>
+            </a:r>
+          </a:p>
+        </p:txBody>
+      </p:sp>
+      <p:sp>
+        <p:nvSpPr>
+          <p:cNvPr id="25" name="TextBox 24"/>
+          <p:cNvSpPr txBox="1"/>
+          <p:nvPr/>
+        </p:nvSpPr>
+        <p:spPr>
+          <a:xfrm>
+            <a:off x="5715000" y="3337559"/>
+            <a:ext cx="5852160" cy="237744"/>
+          </a:xfrm>
+          <a:prstGeom prst="rect">
+            <a:avLst/>
+          </a:prstGeom>
+          <a:noFill/>
+        </p:spPr>
+        <p:txBody>
+          <a:bodyPr wrap="square">
+            <a:spAutoFit/>
+          </a:bodyPr>
+          <a:lstStyle/>
+          <a:p>
+            <a:pPr algn="r">
+              <a:lnSpc>
+                <a:spcPct val="100000"/>
+              </a:lnSpc>
+            </a:pPr>
+            <a:r>
+              <a:rPr sz="1150" b="0">
+                <a:solidFill>
+                  <a:srgbClr val="1A1A1A"/>
+                </a:solidFill>
+                <a:latin typeface="Georgia"/>
+              </a:rPr>
+              <a:t/>
+            </a:r>
+          </a:p>
+        </p:txBody>
+      </p:sp>
+      <p:sp>
+        <p:nvSpPr>
+          <p:cNvPr id="26" name="TextBox 25"/>
+          <p:cNvSpPr txBox="1"/>
+          <p:nvPr/>
+        </p:nvSpPr>
+        <p:spPr>
+          <a:xfrm>
+            <a:off x="685800" y="3611879"/>
+            <a:ext cx="3291840" cy="237744"/>
+          </a:xfrm>
+          <a:prstGeom prst="rect">
+            <a:avLst/>
+          </a:prstGeom>
+          <a:noFill/>
+        </p:spPr>
+        <p:txBody>
+          <a:bodyPr wrap="square">
+            <a:spAutoFit/>
+          </a:bodyPr>
+          <a:lstStyle/>
+          <a:p>
+            <a:pPr algn="l">
+              <a:lnSpc>
+                <a:spcPct val="100000"/>
+              </a:lnSpc>
+            </a:pPr>
+            <a:r>
+              <a:rPr sz="1150" b="0">
+                <a:solidFill>
+                  <a:srgbClr val="1A1A1A"/>
+                </a:solidFill>
+                <a:latin typeface="Georgia"/>
+              </a:rPr>
+              <a:t>Runs on edge devices</a:t>
+            </a:r>
+          </a:p>
+        </p:txBody>
+      </p:sp>
+      <p:sp>
+        <p:nvSpPr>
+          <p:cNvPr id="27" name="TextBox 26"/>
+          <p:cNvSpPr txBox="1"/>
+          <p:nvPr/>
+        </p:nvSpPr>
+        <p:spPr>
+          <a:xfrm>
+            <a:off x="3977639" y="3611879"/>
+            <a:ext cx="1737360" cy="237744"/>
+          </a:xfrm>
+          <a:prstGeom prst="rect">
+            <a:avLst/>
+          </a:prstGeom>
+          <a:noFill/>
+        </p:spPr>
+        <p:txBody>
+          <a:bodyPr wrap="square">
+            <a:spAutoFit/>
+          </a:bodyPr>
+          <a:lstStyle/>
+          <a:p>
+            <a:pPr algn="r">
+              <a:lnSpc>
+                <a:spcPct val="100000"/>
+              </a:lnSpc>
+            </a:pPr>
+            <a:r>
+              <a:rPr sz="1150" b="0">
+                <a:solidFill>
+                  <a:srgbClr val="1A1A1A"/>
+                </a:solidFill>
+                <a:latin typeface="Georgia"/>
+              </a:rPr>
+              <a:t>UNPROVEN</a:t>
+            </a:r>
+          </a:p>
+        </p:txBody>
+      </p:sp>
+      <p:sp>
+        <p:nvSpPr>
+          <p:cNvPr id="28" name="TextBox 27"/>
+          <p:cNvSpPr txBox="1"/>
+          <p:nvPr/>
+        </p:nvSpPr>
+        <p:spPr>
+          <a:xfrm>
+            <a:off x="5715000" y="3611879"/>
+            <a:ext cx="5852160" cy="237744"/>
+          </a:xfrm>
+          <a:prstGeom prst="rect">
+            <a:avLst/>
+          </a:prstGeom>
+          <a:noFill/>
+        </p:spPr>
+        <p:txBody>
+          <a:bodyPr wrap="square">
+            <a:spAutoFit/>
+          </a:bodyPr>
+          <a:lstStyle/>
+          <a:p>
+            <a:pPr algn="r">
+              <a:lnSpc>
+                <a:spcPct val="100000"/>
+              </a:lnSpc>
+            </a:pPr>
+            <a:r>
+              <a:rPr sz="1150" b="0">
+                <a:solidFill>
+                  <a:srgbClr val="1A1A1A"/>
+                </a:solidFill>
+                <a:latin typeface="Georgia"/>
+              </a:rPr>
+              <a:t>all figures from a laptop RTX 4060</a:t>
+            </a:r>
+          </a:p>
+        </p:txBody>
+      </p:sp>
+      <p:sp>
+        <p:nvSpPr>
+          <p:cNvPr id="29" name="TextBox 28"/>
+          <p:cNvSpPr txBox="1"/>
+          <p:nvPr/>
+        </p:nvSpPr>
+        <p:spPr>
+          <a:xfrm>
+            <a:off x="685800" y="3886199"/>
+            <a:ext cx="3291840" cy="237744"/>
+          </a:xfrm>
+          <a:prstGeom prst="rect">
+            <a:avLst/>
+          </a:prstGeom>
+          <a:noFill/>
+        </p:spPr>
+        <p:txBody>
+          <a:bodyPr wrap="square">
+            <a:spAutoFit/>
+          </a:bodyPr>
+          <a:lstStyle/>
+          <a:p>
+            <a:pPr algn="l">
+              <a:lnSpc>
+                <a:spcPct val="100000"/>
+              </a:lnSpc>
+            </a:pPr>
+            <a:r>
+              <a:rPr sz="1150" b="0">
+                <a:solidFill>
+                  <a:srgbClr val="1A1A1A"/>
+                </a:solidFill>
+                <a:latin typeface="Georgia"/>
+              </a:rPr>
+              <a:t/>
+            </a:r>
+          </a:p>
+        </p:txBody>
+      </p:sp>
+      <p:sp>
+        <p:nvSpPr>
+          <p:cNvPr id="30" name="TextBox 29"/>
+          <p:cNvSpPr txBox="1"/>
+          <p:nvPr/>
+        </p:nvSpPr>
+        <p:spPr>
+          <a:xfrm>
+            <a:off x="3977639" y="3886199"/>
+            <a:ext cx="1737360" cy="237744"/>
+          </a:xfrm>
+          <a:prstGeom prst="rect">
+            <a:avLst/>
+          </a:prstGeom>
+          <a:noFill/>
+        </p:spPr>
+        <p:txBody>
+          <a:bodyPr wrap="square">
+            <a:spAutoFit/>
+          </a:bodyPr>
+          <a:lstStyle/>
+          <a:p>
+            <a:pPr algn="r">
+              <a:lnSpc>
+                <a:spcPct val="100000"/>
+              </a:lnSpc>
+            </a:pPr>
+            <a:r>
+              <a:rPr sz="1150" b="0">
+                <a:solidFill>
+                  <a:srgbClr val="1A1A1A"/>
+                </a:solidFill>
+                <a:latin typeface="Georgia"/>
+              </a:rPr>
+              <a:t/>
+            </a:r>
+          </a:p>
+        </p:txBody>
+      </p:sp>
+      <p:sp>
+        <p:nvSpPr>
+          <p:cNvPr id="31" name="TextBox 30"/>
+          <p:cNvSpPr txBox="1"/>
+          <p:nvPr/>
+        </p:nvSpPr>
+        <p:spPr>
+          <a:xfrm>
+            <a:off x="5715000" y="3886199"/>
+            <a:ext cx="5852160" cy="237744"/>
+          </a:xfrm>
+          <a:prstGeom prst="rect">
+            <a:avLst/>
+          </a:prstGeom>
+          <a:noFill/>
+        </p:spPr>
+        <p:txBody>
+          <a:bodyPr wrap="square">
+            <a:spAutoFit/>
+          </a:bodyPr>
+          <a:lstStyle/>
+          <a:p>
+            <a:pPr algn="r">
+              <a:lnSpc>
+                <a:spcPct val="100000"/>
+              </a:lnSpc>
+            </a:pPr>
+            <a:r>
+              <a:rPr sz="1150" b="0">
+                <a:solidFill>
+                  <a:srgbClr val="1A1A1A"/>
+                </a:solidFill>
+                <a:latin typeface="Georgia"/>
+              </a:rPr>
+              <a:t>no Jetson measurement has been taken</a:t>
+            </a:r>
+          </a:p>
+        </p:txBody>
+      </p:sp>
+      <p:sp>
+        <p:nvSpPr>
+          <p:cNvPr id="32" name="TextBox 31"/>
+          <p:cNvSpPr txBox="1"/>
+          <p:nvPr/>
+        </p:nvSpPr>
+        <p:spPr>
+          <a:xfrm>
+            <a:off x="685800" y="4434840"/>
+            <a:ext cx="10881360" cy="365760"/>
+          </a:xfrm>
+          <a:prstGeom prst="rect">
+            <a:avLst/>
+          </a:prstGeom>
+          <a:noFill/>
+        </p:spPr>
+        <p:txBody>
+          <a:bodyPr wrap="square">
+            <a:spAutoFit/>
+          </a:bodyPr>
+          <a:lstStyle/>
+          <a:p>
+            <a:pPr algn="l">
+              <a:lnSpc>
+                <a:spcPct val="100000"/>
+              </a:lnSpc>
+            </a:pPr>
+            <a:r>
+              <a:rPr sz="1250" b="1">
+                <a:solidFill>
+                  <a:srgbClr val="333333"/>
+                </a:solidFill>
+                <a:latin typeface="Georgia"/>
+              </a:rPr>
+              <a:t>What the project does deliver</a:t>
+            </a:r>
+          </a:p>
+        </p:txBody>
+      </p:sp>
+      <p:sp>
+        <p:nvSpPr>
+          <p:cNvPr id="33" name="Rounded Rectangle 32"/>
+          <p:cNvSpPr/>
+          <p:nvPr/>
+        </p:nvSpPr>
+        <p:spPr>
+          <a:xfrm>
+            <a:off x="685800" y="4846320"/>
+            <a:ext cx="3474720" cy="1005840"/>
+          </a:xfrm>
+          <a:prstGeom prst="roundRect">
+            <a:avLst/>
+          </a:prstGeom>
+          <a:solidFill>
+            <a:srgbClr val="EFEFEF"/>
+          </a:solidFill>
+          <a:ln w="9525">
+            <a:solidFill>
+              <a:srgbClr val="8A8A8A"/>
+            </a:solidFill>
+          </a:ln>
+          <a:effectLst/>
+        </p:spPr>
+        <p:style>
+          <a:lnRef idx="1">
+            <a:schemeClr val="accent1"/>
+          </a:lnRef>
+          <a:fillRef idx="3">
+            <a:schemeClr val="accent1"/>
+          </a:fillRef>
+          <a:effectRef idx="2">
+            <a:schemeClr val="accent1"/>
+          </a:effectRef>
+          <a:fontRef idx="minor">
+            <a:schemeClr val="lt1"/>
+          </a:fontRef>
+        </p:style>
+        <p:txBody>
+          <a:bodyPr rtlCol="0" anchor="ctr" wrap="square" lIns="73152" rIns="73152"/>
+          <a:lstStyle/>
+          <a:p>
+            <a:pPr algn="ctr"/>
+            <a:r>
+              <a:rPr sz="1050" b="0">
+                <a:solidFill>
+                  <a:srgbClr val="1A1A1A"/>
+                </a:solidFill>
+                <a:latin typeface="Georgia"/>
+              </a:rPr>
+              <a:t>Queryable output</a:t>
+            </a:r>
+          </a:p>
+          <a:p>
+            <a:pPr algn="ctr"/>
+            <a:r>
+              <a:rPr sz="1050" b="0">
+                <a:solidFill>
+                  <a:srgbClr val="1A1A1A"/>
+                </a:solidFill>
+                <a:latin typeface="Georgia"/>
+              </a:rPr>
+              <a:t/>
+            </a:r>
+          </a:p>
+          <a:p>
+            <a:pPr algn="ctr"/>
+            <a:r>
+              <a:rPr sz="1050" b="0">
+                <a:solidFill>
+                  <a:srgbClr val="1A1A1A"/>
+                </a:solidFill>
+                <a:latin typeface="Georgia"/>
+              </a:rPr>
+              <a:t>flow at any continuous coordinate, sparse equals dense exactly</a:t>
+            </a:r>
+          </a:p>
+        </p:txBody>
+      </p:sp>
+      <p:sp>
+        <p:nvSpPr>
+          <p:cNvPr id="34" name="Rounded Rectangle 33"/>
+          <p:cNvSpPr/>
+          <p:nvPr/>
+        </p:nvSpPr>
+        <p:spPr>
+          <a:xfrm>
+            <a:off x="4343400" y="4846320"/>
+            <a:ext cx="3474720" cy="1005840"/>
+          </a:xfrm>
+          <a:prstGeom prst="roundRect">
+            <a:avLst/>
+          </a:prstGeom>
+          <a:solidFill>
+            <a:srgbClr val="EFEFEF"/>
+          </a:solidFill>
+          <a:ln w="9525">
+            <a:solidFill>
+              <a:srgbClr val="8A8A8A"/>
+            </a:solidFill>
+          </a:ln>
+          <a:effectLst/>
+        </p:spPr>
+        <p:style>
+          <a:lnRef idx="1">
+            <a:schemeClr val="accent1"/>
+          </a:lnRef>
+          <a:fillRef idx="3">
+            <a:schemeClr val="accent1"/>
+          </a:fillRef>
+          <a:effectRef idx="2">
+            <a:schemeClr val="accent1"/>
+          </a:effectRef>
+          <a:fontRef idx="minor">
+            <a:schemeClr val="lt1"/>
+          </a:fontRef>
+        </p:style>
+        <p:txBody>
+          <a:bodyPr rtlCol="0" anchor="ctr" wrap="square" lIns="73152" rIns="73152"/>
+          <a:lstStyle/>
+          <a:p>
+            <a:pPr algn="ctr"/>
+            <a:r>
+              <a:rPr sz="1050" b="0">
+                <a:solidFill>
+                  <a:srgbClr val="1A1A1A"/>
+                </a:solidFill>
+                <a:latin typeface="Georgia"/>
+              </a:rPr>
+              <a:t>Cheap repeat access</a:t>
+            </a:r>
+          </a:p>
+          <a:p>
+            <a:pPr algn="ctr"/>
+            <a:r>
+              <a:rPr sz="1050" b="0">
+                <a:solidFill>
+                  <a:srgbClr val="1A1A1A"/>
+                </a:solidFill>
+                <a:latin typeface="Georgia"/>
+              </a:rPr>
+              <a:t/>
+            </a:r>
+          </a:p>
+          <a:p>
+            <a:pPr algn="ctr"/>
+            <a:r>
+              <a:rPr sz="1050" b="0">
+                <a:solidFill>
+                  <a:srgbClr val="1A1A1A"/>
+                </a:solidFill>
+                <a:latin typeface="Georgia"/>
+              </a:rPr>
+              <a:t>1.3 ms per further query batch on a cached frame</a:t>
+            </a:r>
+          </a:p>
+        </p:txBody>
+      </p:sp>
+      <p:sp>
+        <p:nvSpPr>
+          <p:cNvPr id="35" name="Rounded Rectangle 34"/>
+          <p:cNvSpPr/>
+          <p:nvPr/>
+        </p:nvSpPr>
+        <p:spPr>
+          <a:xfrm>
+            <a:off x="8001000" y="4846320"/>
+            <a:ext cx="3474720" cy="1005840"/>
+          </a:xfrm>
+          <a:prstGeom prst="roundRect">
+            <a:avLst/>
+          </a:prstGeom>
+          <a:solidFill>
+            <a:srgbClr val="EFEFEF"/>
+          </a:solidFill>
+          <a:ln w="9525">
+            <a:solidFill>
+              <a:srgbClr val="8A8A8A"/>
+            </a:solidFill>
+          </a:ln>
+          <a:effectLst/>
+        </p:spPr>
+        <p:style>
+          <a:lnRef idx="1">
+            <a:schemeClr val="accent1"/>
+          </a:lnRef>
+          <a:fillRef idx="3">
+            <a:schemeClr val="accent1"/>
+          </a:fillRef>
+          <a:effectRef idx="2">
+            <a:schemeClr val="accent1"/>
+          </a:effectRef>
+          <a:fontRef idx="minor">
+            <a:schemeClr val="lt1"/>
+          </a:fontRef>
+        </p:style>
+        <p:txBody>
+          <a:bodyPr rtlCol="0" anchor="ctr" wrap="square" lIns="73152" rIns="73152"/>
+          <a:lstStyle/>
+          <a:p>
+            <a:pPr algn="ctr"/>
+            <a:r>
+              <a:rPr sz="1050" b="0">
+                <a:solidFill>
+                  <a:srgbClr val="1A1A1A"/>
+                </a:solidFill>
+                <a:latin typeface="Georgia"/>
+              </a:rPr>
+              <a:t>Calibrated confidence</a:t>
+            </a:r>
+          </a:p>
+          <a:p>
+            <a:pPr algn="ctr"/>
+            <a:r>
+              <a:rPr sz="1050" b="0">
+                <a:solidFill>
+                  <a:srgbClr val="1A1A1A"/>
+                </a:solidFill>
+                <a:latin typeface="Georgia"/>
+              </a:rPr>
+              <a:t/>
+            </a:r>
+          </a:p>
+          <a:p>
+            <a:pPr algn="ctr"/>
+            <a:r>
+              <a:rPr sz="1050" b="0">
+                <a:solidFill>
+                  <a:srgbClr val="1A1A1A"/>
+                </a:solidFill>
+                <a:latin typeface="Georgia"/>
+              </a:rPr>
+              <a:t>per-query error estimate, monotonic against real error</a:t>
+            </a:r>
+          </a:p>
+        </p:txBody>
+      </p:sp>
+      <p:sp>
+        <p:nvSpPr>
+          <p:cNvPr id="36" name="TextBox 35"/>
           <p:cNvSpPr txBox="1"/>
           <p:nvPr/>
         </p:nvSpPr>
@@ -10758,7 +11618,7 @@
       </p:sp>
       <p:sp>
         <p:nvSpPr>
-          <p:cNvPr id="15" name="TextBox 14"/>
+          <p:cNvPr id="37" name="TextBox 36"/>
           <p:cNvSpPr txBox="1"/>
           <p:nvPr/>
         </p:nvSpPr>
@@ -10855,7 +11715,7 @@
                 </a:solidFill>
                 <a:latin typeface="Georgia"/>
               </a:rPr>
-              <a:t>NEXT STEPS</a:t>
+              <a:t>LIMITATIONS</a:t>
             </a:r>
           </a:p>
         </p:txBody>
@@ -10894,62 +11754,46 @@
                 </a:solidFill>
                 <a:latin typeface="Georgia"/>
               </a:rPr>
-              <a:t>In priority order</a:t>
-            </a:r>
-          </a:p>
-        </p:txBody>
-      </p:sp>
-      <p:sp>
-        <p:nvSpPr>
-          <p:cNvPr id="4" name="Rounded Rectangle 3"/>
-          <p:cNvSpPr/>
-          <p:nvPr/>
-        </p:nvSpPr>
-        <p:spPr>
-          <a:xfrm>
-            <a:off x="685800" y="1691640"/>
-            <a:ext cx="384048" cy="384048"/>
-          </a:xfrm>
-          <a:prstGeom prst="roundRect">
-            <a:avLst/>
-          </a:prstGeom>
-          <a:solidFill>
-            <a:srgbClr val="333333"/>
-          </a:solidFill>
-          <a:ln w="9525">
-            <a:solidFill>
-              <a:srgbClr val="8A8A8A"/>
-            </a:solidFill>
-          </a:ln>
-          <a:effectLst/>
-        </p:spPr>
-        <p:style>
-          <a:lnRef idx="1">
-            <a:schemeClr val="accent1"/>
-          </a:lnRef>
-          <a:fillRef idx="3">
-            <a:schemeClr val="accent1"/>
-          </a:fillRef>
-          <a:effectRef idx="2">
-            <a:schemeClr val="accent1"/>
-          </a:effectRef>
-          <a:fontRef idx="minor">
-            <a:schemeClr val="lt1"/>
-          </a:fontRef>
-        </p:style>
-        <p:txBody>
-          <a:bodyPr rtlCol="0" anchor="ctr" wrap="square" lIns="73152" rIns="73152"/>
-          <a:lstStyle/>
-          <a:p>
-            <a:pPr algn="ctr"/>
-            <a:r>
-              <a:rPr sz="1200" b="1">
-                <a:solidFill>
-                  <a:srgbClr val="FFFFFF"/>
-                </a:solidFill>
-                <a:latin typeface="Georgia"/>
-              </a:rPr>
-              <a:t>1</a:t>
+              <a:t>What is not yet proven, stated plainly</a:t>
+            </a:r>
+          </a:p>
+        </p:txBody>
+      </p:sp>
+      <p:sp>
+        <p:nvSpPr>
+          <p:cNvPr id="4" name="TextBox 3"/>
+          <p:cNvSpPr txBox="1"/>
+          <p:nvPr/>
+        </p:nvSpPr>
+        <p:spPr>
+          <a:xfrm>
+            <a:off x="685800" y="1645920"/>
+            <a:ext cx="4023360" cy="274320"/>
+          </a:xfrm>
+          <a:prstGeom prst="rect">
+            <a:avLst/>
+          </a:prstGeom>
+          <a:noFill/>
+        </p:spPr>
+        <p:txBody>
+          <a:bodyPr wrap="square">
+            <a:spAutoFit/>
+          </a:bodyPr>
+          <a:lstStyle/>
+          <a:p>
+            <a:pPr algn="l">
+              <a:lnSpc>
+                <a:spcPct val="100000"/>
+              </a:lnSpc>
+            </a:pPr>
+            <a:r>
+              <a:rPr sz="1150" b="1">
+                <a:solidFill>
+                  <a:srgbClr val="1A1A1A"/>
+                </a:solidFill>
+                <a:latin typeface="Georgia"/>
+              </a:rPr>
+              <a:t>Sub-pixel precision is worse than v2</a:t>
             </a:r>
           </a:p>
         </p:txBody>
@@ -10962,33 +11806,33 @@
         </p:nvSpPr>
         <p:spPr>
           <a:xfrm>
-            <a:off x="1234440" y="1673352"/>
-            <a:ext cx="3657600" cy="274320"/>
-          </a:xfrm>
-          <a:prstGeom prst="rect">
-            <a:avLst/>
-          </a:prstGeom>
-          <a:noFill/>
-        </p:spPr>
-        <p:txBody>
-          <a:bodyPr wrap="square">
-            <a:spAutoFit/>
-          </a:bodyPr>
-          <a:lstStyle/>
-          <a:p>
-            <a:pPr algn="l">
-              <a:lnSpc>
-                <a:spcPct val="100000"/>
-              </a:lnSpc>
-            </a:pPr>
-            <a:r>
-              <a:rPr sz="1200" b="1">
-                <a:solidFill>
-                  <a:srgbClr val="1A1A1A"/>
-                </a:solidFill>
-                <a:latin typeface="Georgia"/>
-              </a:rPr>
-              <a:t>Full-resolution stem for the decoder</a:t>
+            <a:off x="4846320" y="1645920"/>
+            <a:ext cx="6675120" cy="548640"/>
+          </a:xfrm>
+          <a:prstGeom prst="rect">
+            <a:avLst/>
+          </a:prstGeom>
+          <a:noFill/>
+        </p:spPr>
+        <p:txBody>
+          <a:bodyPr wrap="square">
+            <a:spAutoFit/>
+          </a:bodyPr>
+          <a:lstStyle/>
+          <a:p>
+            <a:pPr algn="l">
+              <a:lnSpc>
+                <a:spcPct val="112000"/>
+              </a:lnSpc>
+            </a:pPr>
+            <a:r>
+              <a:rPr sz="1100" b="0">
+                <a:solidFill>
+                  <a:srgbClr val="1A1A1A"/>
+                </a:solidFill>
+                <a:latin typeface="Georgia"/>
+              </a:rPr>
+              <a:t>By 0.8 to 6.3 points of 1-pixel accuracy. Cause diagnosed (decoder never sees full-resolution input.</a:t>
             </a:r>
           </a:p>
         </p:txBody>
@@ -11001,8 +11845,47 @@
         </p:nvSpPr>
         <p:spPr>
           <a:xfrm>
-            <a:off x="5029200" y="1673352"/>
-            <a:ext cx="6492240" cy="822960"/>
+            <a:off x="685800" y="2578608"/>
+            <a:ext cx="4023360" cy="274320"/>
+          </a:xfrm>
+          <a:prstGeom prst="rect">
+            <a:avLst/>
+          </a:prstGeom>
+          <a:noFill/>
+        </p:spPr>
+        <p:txBody>
+          <a:bodyPr wrap="square">
+            <a:spAutoFit/>
+          </a:bodyPr>
+          <a:lstStyle/>
+          <a:p>
+            <a:pPr algn="l">
+              <a:lnSpc>
+                <a:spcPct val="100000"/>
+              </a:lnSpc>
+            </a:pPr>
+            <a:r>
+              <a:rPr sz="1150" b="1">
+                <a:solidFill>
+                  <a:srgbClr val="1A1A1A"/>
+                </a:solidFill>
+                <a:latin typeface="Georgia"/>
+              </a:rPr>
+              <a:t>No edge-device measurement</a:t>
+            </a:r>
+          </a:p>
+        </p:txBody>
+      </p:sp>
+      <p:sp>
+        <p:nvSpPr>
+          <p:cNvPr id="7" name="TextBox 6"/>
+          <p:cNvSpPr txBox="1"/>
+          <p:nvPr/>
+        </p:nvSpPr>
+        <p:spPr>
+          <a:xfrm>
+            <a:off x="4846320" y="2578608"/>
+            <a:ext cx="6675120" cy="548640"/>
           </a:xfrm>
           <a:prstGeom prst="rect">
             <a:avLst/>
@@ -11027,62 +11910,7 @@
                 </a:solidFill>
                 <a:latin typeface="Georgia"/>
               </a:rPr>
-              <a:t>Give the decoder a cheap full-resolution feature map so evidence actually varies within an 8x8 cell. This is the direct attack on the precision gap and on making continuous querying meaningful rather than nominal.</a:t>
-            </a:r>
-          </a:p>
-        </p:txBody>
-      </p:sp>
-      <p:sp>
-        <p:nvSpPr>
-          <p:cNvPr id="7" name="Rounded Rectangle 6"/>
-          <p:cNvSpPr/>
-          <p:nvPr/>
-        </p:nvSpPr>
-        <p:spPr>
-          <a:xfrm>
-            <a:off x="685800" y="2862072"/>
-            <a:ext cx="384048" cy="384048"/>
-          </a:xfrm>
-          <a:prstGeom prst="roundRect">
-            <a:avLst/>
-          </a:prstGeom>
-          <a:solidFill>
-            <a:srgbClr val="333333"/>
-          </a:solidFill>
-          <a:ln w="9525">
-            <a:solidFill>
-              <a:srgbClr val="8A8A8A"/>
-            </a:solidFill>
-          </a:ln>
-          <a:effectLst/>
-        </p:spPr>
-        <p:style>
-          <a:lnRef idx="1">
-            <a:schemeClr val="accent1"/>
-          </a:lnRef>
-          <a:fillRef idx="3">
-            <a:schemeClr val="accent1"/>
-          </a:fillRef>
-          <a:effectRef idx="2">
-            <a:schemeClr val="accent1"/>
-          </a:effectRef>
-          <a:fontRef idx="minor">
-            <a:schemeClr val="lt1"/>
-          </a:fontRef>
-        </p:style>
-        <p:txBody>
-          <a:bodyPr rtlCol="0" anchor="ctr" wrap="square" lIns="73152" rIns="73152"/>
-          <a:lstStyle/>
-          <a:p>
-            <a:pPr algn="ctr"/>
-            <a:r>
-              <a:rPr sz="1200" b="1">
-                <a:solidFill>
-                  <a:srgbClr val="FFFFFF"/>
-                </a:solidFill>
-                <a:latin typeface="Georgia"/>
-              </a:rPr>
-              <a:t>2</a:t>
+              <a:t>Every latency figure is from a laptop RTX 4060. The edge claim in the title is a design target, not a result.</a:t>
             </a:r>
           </a:p>
         </p:txBody>
@@ -11095,33 +11923,33 @@
         </p:nvSpPr>
         <p:spPr>
           <a:xfrm>
-            <a:off x="1234440" y="2843784"/>
-            <a:ext cx="3657600" cy="274320"/>
-          </a:xfrm>
-          <a:prstGeom prst="rect">
-            <a:avLst/>
-          </a:prstGeom>
-          <a:noFill/>
-        </p:spPr>
-        <p:txBody>
-          <a:bodyPr wrap="square">
-            <a:spAutoFit/>
-          </a:bodyPr>
-          <a:lstStyle/>
-          <a:p>
-            <a:pPr algn="l">
-              <a:lnSpc>
-                <a:spcPct val="100000"/>
-              </a:lnSpc>
-            </a:pPr>
-            <a:r>
-              <a:rPr sz="1200" b="1">
-                <a:solidFill>
-                  <a:srgbClr val="1A1A1A"/>
-                </a:solidFill>
-                <a:latin typeface="Georgia"/>
-              </a:rPr>
-              <a:t>Spring 4K evaluation</a:t>
+            <a:off x="685800" y="3511296"/>
+            <a:ext cx="4023360" cy="274320"/>
+          </a:xfrm>
+          <a:prstGeom prst="rect">
+            <a:avLst/>
+          </a:prstGeom>
+          <a:noFill/>
+        </p:spPr>
+        <p:txBody>
+          <a:bodyPr wrap="square">
+            <a:spAutoFit/>
+          </a:bodyPr>
+          <a:lstStyle/>
+          <a:p>
+            <a:pPr algn="l">
+              <a:lnSpc>
+                <a:spcPct val="100000"/>
+              </a:lnSpc>
+            </a:pPr>
+            <a:r>
+              <a:rPr sz="1150" b="1">
+                <a:solidFill>
+                  <a:srgbClr val="1A1A1A"/>
+                </a:solidFill>
+                <a:latin typeface="Georgia"/>
+              </a:rPr>
+              <a:t>Single evaluation domain</a:t>
             </a:r>
           </a:p>
         </p:txBody>
@@ -11134,8 +11962,8 @@
         </p:nvSpPr>
         <p:spPr>
           <a:xfrm>
-            <a:off x="5029200" y="2843784"/>
-            <a:ext cx="6492240" cy="822960"/>
+            <a:off x="4846320" y="3511296"/>
+            <a:ext cx="6675120" cy="548640"/>
           </a:xfrm>
           <a:prstGeom prst="rect">
             <a:avLst/>
@@ -11160,62 +11988,46 @@
                 </a:solidFill>
                 <a:latin typeface="Georgia"/>
               </a:rPr>
-              <a:t>Spring provides ground truth at twice the input resolution. v3 can be queried there natively; v2 structurally cannot. The one test that demonstrates a capability rather than a margin.</a:t>
-            </a:r>
-          </a:p>
-        </p:txBody>
-      </p:sp>
-      <p:sp>
-        <p:nvSpPr>
-          <p:cNvPr id="10" name="Rounded Rectangle 9"/>
-          <p:cNvSpPr/>
-          <p:nvPr/>
-        </p:nvSpPr>
-        <p:spPr>
-          <a:xfrm>
-            <a:off x="685800" y="4032504"/>
-            <a:ext cx="384048" cy="384048"/>
-          </a:xfrm>
-          <a:prstGeom prst="roundRect">
-            <a:avLst/>
-          </a:prstGeom>
-          <a:solidFill>
-            <a:srgbClr val="333333"/>
-          </a:solidFill>
-          <a:ln w="9525">
-            <a:solidFill>
-              <a:srgbClr val="8A8A8A"/>
-            </a:solidFill>
-          </a:ln>
-          <a:effectLst/>
-        </p:spPr>
-        <p:style>
-          <a:lnRef idx="1">
-            <a:schemeClr val="accent1"/>
-          </a:lnRef>
-          <a:fillRef idx="3">
-            <a:schemeClr val="accent1"/>
-          </a:fillRef>
-          <a:effectRef idx="2">
-            <a:schemeClr val="accent1"/>
-          </a:effectRef>
-          <a:fontRef idx="minor">
-            <a:schemeClr val="lt1"/>
-          </a:fontRef>
-        </p:style>
-        <p:txBody>
-          <a:bodyPr rtlCol="0" anchor="ctr" wrap="square" lIns="73152" rIns="73152"/>
-          <a:lstStyle/>
-          <a:p>
-            <a:pPr algn="ctr"/>
-            <a:r>
-              <a:rPr sz="1200" b="1">
-                <a:solidFill>
-                  <a:srgbClr val="FFFFFF"/>
-                </a:solidFill>
-                <a:latin typeface="Georgia"/>
-              </a:rPr>
-              <a:t>3</a:t>
+              <a:t>All accuracy numbers are VKITTI2 Scene18+20. A synthetic driving benchmark is not evidence for field or survey imagery.</a:t>
+            </a:r>
+          </a:p>
+        </p:txBody>
+      </p:sp>
+      <p:sp>
+        <p:nvSpPr>
+          <p:cNvPr id="10" name="TextBox 9"/>
+          <p:cNvSpPr txBox="1"/>
+          <p:nvPr/>
+        </p:nvSpPr>
+        <p:spPr>
+          <a:xfrm>
+            <a:off x="685800" y="4443984"/>
+            <a:ext cx="4023360" cy="274320"/>
+          </a:xfrm>
+          <a:prstGeom prst="rect">
+            <a:avLst/>
+          </a:prstGeom>
+          <a:noFill/>
+        </p:spPr>
+        <p:txBody>
+          <a:bodyPr wrap="square">
+            <a:spAutoFit/>
+          </a:bodyPr>
+          <a:lstStyle/>
+          <a:p>
+            <a:pPr algn="l">
+              <a:lnSpc>
+                <a:spcPct val="100000"/>
+              </a:lnSpc>
+            </a:pPr>
+            <a:r>
+              <a:rPr sz="1150" b="1">
+                <a:solidFill>
+                  <a:srgbClr val="1A1A1A"/>
+                </a:solidFill>
+                <a:latin typeface="Georgia"/>
+              </a:rPr>
+              <a:t>Spring run truncated</a:t>
             </a:r>
           </a:p>
         </p:txBody>
@@ -11228,33 +12040,33 @@
         </p:nvSpPr>
         <p:spPr>
           <a:xfrm>
-            <a:off x="1234440" y="4014216"/>
-            <a:ext cx="3657600" cy="274320"/>
-          </a:xfrm>
-          <a:prstGeom prst="rect">
-            <a:avLst/>
-          </a:prstGeom>
-          <a:noFill/>
-        </p:spPr>
-        <p:txBody>
-          <a:bodyPr wrap="square">
-            <a:spAutoFit/>
-          </a:bodyPr>
-          <a:lstStyle/>
-          <a:p>
-            <a:pPr algn="l">
-              <a:lnSpc>
-                <a:spcPct val="100000"/>
-              </a:lnSpc>
-            </a:pPr>
-            <a:r>
-              <a:rPr sz="1200" b="1">
-                <a:solidFill>
-                  <a:srgbClr val="1A1A1A"/>
-                </a:solidFill>
-                <a:latin typeface="Georgia"/>
-              </a:rPr>
-              <a:t>Jetson measurement</a:t>
+            <a:off x="4846320" y="4443984"/>
+            <a:ext cx="6675120" cy="548640"/>
+          </a:xfrm>
+          <a:prstGeom prst="rect">
+            <a:avLst/>
+          </a:prstGeom>
+          <a:noFill/>
+        </p:spPr>
+        <p:txBody>
+          <a:bodyPr wrap="square">
+            <a:spAutoFit/>
+          </a:bodyPr>
+          <a:lstStyle/>
+          <a:p>
+            <a:pPr algn="l">
+              <a:lnSpc>
+                <a:spcPct val="112000"/>
+              </a:lnSpc>
+            </a:pPr>
+            <a:r>
+              <a:rPr sz="1100" b="0">
+                <a:solidFill>
+                  <a:srgbClr val="1A1A1A"/>
+                </a:solidFill>
+                <a:latin typeface="Georgia"/>
+              </a:rPr>
+              <a:t>Killed by the 8-hour wall clock at roughly 90k of 100k steps, so it is not directly comparable to the others.</a:t>
             </a:r>
           </a:p>
         </p:txBody>
@@ -11267,8 +12079,47 @@
         </p:nvSpPr>
         <p:spPr>
           <a:xfrm>
-            <a:off x="5029200" y="4014216"/>
-            <a:ext cx="6492240" cy="822960"/>
+            <a:off x="685800" y="5376672"/>
+            <a:ext cx="4023360" cy="274320"/>
+          </a:xfrm>
+          <a:prstGeom prst="rect">
+            <a:avLst/>
+          </a:prstGeom>
+          <a:noFill/>
+        </p:spPr>
+        <p:txBody>
+          <a:bodyPr wrap="square">
+            <a:spAutoFit/>
+          </a:bodyPr>
+          <a:lstStyle/>
+          <a:p>
+            <a:pPr algn="l">
+              <a:lnSpc>
+                <a:spcPct val="100000"/>
+              </a:lnSpc>
+            </a:pPr>
+            <a:r>
+              <a:rPr sz="1150" b="1">
+                <a:solidFill>
+                  <a:srgbClr val="1A1A1A"/>
+                </a:solidFill>
+                <a:latin typeface="Georgia"/>
+              </a:rPr>
+              <a:t>One seed, and checkpoint noise the size of the effects</a:t>
+            </a:r>
+          </a:p>
+        </p:txBody>
+      </p:sp>
+      <p:sp>
+        <p:nvSpPr>
+          <p:cNvPr id="13" name="TextBox 12"/>
+          <p:cNvSpPr txBox="1"/>
+          <p:nvPr/>
+        </p:nvSpPr>
+        <p:spPr>
+          <a:xfrm>
+            <a:off x="4846320" y="5376672"/>
+            <a:ext cx="6675120" cy="548640"/>
           </a:xfrm>
           <a:prstGeom prst="rect">
             <a:avLst/>
@@ -11293,62 +12144,7 @@
                 </a:solidFill>
                 <a:latin typeface="Georgia"/>
               </a:rPr>
-              <a:t>Converts the edge claim from a design target into a result, or refutes it.</a:t>
-            </a:r>
-          </a:p>
-        </p:txBody>
-      </p:sp>
-      <p:sp>
-        <p:nvSpPr>
-          <p:cNvPr id="13" name="Rounded Rectangle 12"/>
-          <p:cNvSpPr/>
-          <p:nvPr/>
-        </p:nvSpPr>
-        <p:spPr>
-          <a:xfrm>
-            <a:off x="685800" y="5202936"/>
-            <a:ext cx="384048" cy="384048"/>
-          </a:xfrm>
-          <a:prstGeom prst="roundRect">
-            <a:avLst/>
-          </a:prstGeom>
-          <a:solidFill>
-            <a:srgbClr val="333333"/>
-          </a:solidFill>
-          <a:ln w="9525">
-            <a:solidFill>
-              <a:srgbClr val="8A8A8A"/>
-            </a:solidFill>
-          </a:ln>
-          <a:effectLst/>
-        </p:spPr>
-        <p:style>
-          <a:lnRef idx="1">
-            <a:schemeClr val="accent1"/>
-          </a:lnRef>
-          <a:fillRef idx="3">
-            <a:schemeClr val="accent1"/>
-          </a:fillRef>
-          <a:effectRef idx="2">
-            <a:schemeClr val="accent1"/>
-          </a:effectRef>
-          <a:fontRef idx="minor">
-            <a:schemeClr val="lt1"/>
-          </a:fontRef>
-        </p:style>
-        <p:txBody>
-          <a:bodyPr rtlCol="0" anchor="ctr" wrap="square" lIns="73152" rIns="73152"/>
-          <a:lstStyle/>
-          <a:p>
-            <a:pPr algn="ctr"/>
-            <a:r>
-              <a:rPr sz="1200" b="1">
-                <a:solidFill>
-                  <a:srgbClr val="FFFFFF"/>
-                </a:solidFill>
-                <a:latin typeface="Georgia"/>
-              </a:rPr>
-              <a:t>4</a:t>
+              <a:t>Step 90k vs 100k of the same run moves EPE by up to 0.038 px, reversing two of the orderings. Nothing finer than about 0.05 px is resolvable here.</a:t>
             </a:r>
           </a:p>
         </p:txBody>
@@ -11356,84 +12152,6 @@
       <p:sp>
         <p:nvSpPr>
           <p:cNvPr id="14" name="TextBox 13"/>
-          <p:cNvSpPr txBox="1"/>
-          <p:nvPr/>
-        </p:nvSpPr>
-        <p:spPr>
-          <a:xfrm>
-            <a:off x="1234440" y="5184648"/>
-            <a:ext cx="3657600" cy="274320"/>
-          </a:xfrm>
-          <a:prstGeom prst="rect">
-            <a:avLst/>
-          </a:prstGeom>
-          <a:noFill/>
-        </p:spPr>
-        <p:txBody>
-          <a:bodyPr wrap="square">
-            <a:spAutoFit/>
-          </a:bodyPr>
-          <a:lstStyle/>
-          <a:p>
-            <a:pPr algn="l">
-              <a:lnSpc>
-                <a:spcPct val="100000"/>
-              </a:lnSpc>
-            </a:pPr>
-            <a:r>
-              <a:rPr sz="1200" b="1">
-                <a:solidFill>
-                  <a:srgbClr val="1A1A1A"/>
-                </a:solidFill>
-                <a:latin typeface="Georgia"/>
-              </a:rPr>
-              <a:t>Field or survey imagery</a:t>
-            </a:r>
-          </a:p>
-        </p:txBody>
-      </p:sp>
-      <p:sp>
-        <p:nvSpPr>
-          <p:cNvPr id="15" name="TextBox 14"/>
-          <p:cNvSpPr txBox="1"/>
-          <p:nvPr/>
-        </p:nvSpPr>
-        <p:spPr>
-          <a:xfrm>
-            <a:off x="5029200" y="5184648"/>
-            <a:ext cx="6492240" cy="822960"/>
-          </a:xfrm>
-          <a:prstGeom prst="rect">
-            <a:avLst/>
-          </a:prstGeom>
-          <a:noFill/>
-        </p:spPr>
-        <p:txBody>
-          <a:bodyPr wrap="square">
-            <a:spAutoFit/>
-          </a:bodyPr>
-          <a:lstStyle/>
-          <a:p>
-            <a:pPr algn="l">
-              <a:lnSpc>
-                <a:spcPct val="112000"/>
-              </a:lnSpc>
-            </a:pPr>
-            <a:r>
-              <a:rPr sz="1100" b="0">
-                <a:solidFill>
-                  <a:srgbClr val="1A1A1A"/>
-                </a:solidFill>
-                <a:latin typeface="Georgia"/>
-              </a:rPr>
-              <a:t>A registration demonstration on lab data would test the actual use case.</a:t>
-            </a:r>
-          </a:p>
-        </p:txBody>
-      </p:sp>
-      <p:sp>
-        <p:nvSpPr>
-          <p:cNvPr id="16" name="TextBox 15"/>
           <p:cNvSpPr txBox="1"/>
           <p:nvPr/>
         </p:nvSpPr>
@@ -11472,7 +12190,7 @@
       </p:sp>
       <p:sp>
         <p:nvSpPr>
-          <p:cNvPr id="17" name="TextBox 16"/>
+          <p:cNvPr id="15" name="TextBox 14"/>
           <p:cNvSpPr txBox="1"/>
           <p:nvPr/>
         </p:nvSpPr>
@@ -11569,7 +12287,7 @@
                 </a:solidFill>
                 <a:latin typeface="Georgia"/>
               </a:rPr>
-              <a:t>ANTICIPATED QUESTIONS</a:t>
+              <a:t>NEXT STEPS</a:t>
             </a:r>
           </a:p>
         </p:txBody>
@@ -11608,46 +12326,62 @@
                 </a:solidFill>
                 <a:latin typeface="Georgia"/>
               </a:rPr>
-              <a:t/>
-            </a:r>
-          </a:p>
-        </p:txBody>
-      </p:sp>
-      <p:sp>
-        <p:nvSpPr>
-          <p:cNvPr id="4" name="TextBox 3"/>
-          <p:cNvSpPr txBox="1"/>
-          <p:nvPr/>
-        </p:nvSpPr>
-        <p:spPr>
-          <a:xfrm>
-            <a:off x="685800" y="1508760"/>
-            <a:ext cx="10881360" cy="274320"/>
-          </a:xfrm>
-          <a:prstGeom prst="rect">
-            <a:avLst/>
-          </a:prstGeom>
-          <a:noFill/>
-        </p:spPr>
-        <p:txBody>
-          <a:bodyPr wrap="square">
-            <a:spAutoFit/>
-          </a:bodyPr>
-          <a:lstStyle/>
-          <a:p>
-            <a:pPr algn="l">
-              <a:lnSpc>
-                <a:spcPct val="100000"/>
-              </a:lnSpc>
-            </a:pPr>
+              <a:t>In priority order</a:t>
+            </a:r>
+          </a:p>
+        </p:txBody>
+      </p:sp>
+      <p:sp>
+        <p:nvSpPr>
+          <p:cNvPr id="4" name="Rounded Rectangle 3"/>
+          <p:cNvSpPr/>
+          <p:nvPr/>
+        </p:nvSpPr>
+        <p:spPr>
+          <a:xfrm>
+            <a:off x="685800" y="1691640"/>
+            <a:ext cx="384048" cy="384048"/>
+          </a:xfrm>
+          <a:prstGeom prst="roundRect">
+            <a:avLst/>
+          </a:prstGeom>
+          <a:solidFill>
+            <a:srgbClr val="333333"/>
+          </a:solidFill>
+          <a:ln w="9525">
+            <a:solidFill>
+              <a:srgbClr val="8A8A8A"/>
+            </a:solidFill>
+          </a:ln>
+          <a:effectLst/>
+        </p:spPr>
+        <p:style>
+          <a:lnRef idx="1">
+            <a:schemeClr val="accent1"/>
+          </a:lnRef>
+          <a:fillRef idx="3">
+            <a:schemeClr val="accent1"/>
+          </a:fillRef>
+          <a:effectRef idx="2">
+            <a:schemeClr val="accent1"/>
+          </a:effectRef>
+          <a:fontRef idx="minor">
+            <a:schemeClr val="lt1"/>
+          </a:fontRef>
+        </p:style>
+        <p:txBody>
+          <a:bodyPr rtlCol="0" anchor="ctr" wrap="square" lIns="73152" rIns="73152"/>
+          <a:lstStyle/>
+          <a:p>
+            <a:pPr algn="ctr"/>
             <a:r>
               <a:rPr sz="1200" b="1">
                 <a:solidFill>
-                  <a:srgbClr val="1A1A1A"/>
-                </a:solidFill>
-                <a:latin typeface="Georgia"/>
-              </a:rPr>
-              <a:t>Why is flow defined between pixels at all?</a:t>
+                  <a:srgbClr val="FFFFFF"/>
+                </a:solidFill>
+                <a:latin typeface="Georgia"/>
+              </a:rPr>
+              <a:t>1</a:t>
             </a:r>
           </a:p>
         </p:txBody>
@@ -11660,8 +12394,47 @@
         </p:nvSpPr>
         <p:spPr>
           <a:xfrm>
-            <a:off x="868680" y="1810512"/>
-            <a:ext cx="10607040" cy="594360"/>
+            <a:off x="1234440" y="1673352"/>
+            <a:ext cx="3657600" cy="274320"/>
+          </a:xfrm>
+          <a:prstGeom prst="rect">
+            <a:avLst/>
+          </a:prstGeom>
+          <a:noFill/>
+        </p:spPr>
+        <p:txBody>
+          <a:bodyPr wrap="square">
+            <a:spAutoFit/>
+          </a:bodyPr>
+          <a:lstStyle/>
+          <a:p>
+            <a:pPr algn="l">
+              <a:lnSpc>
+                <a:spcPct val="100000"/>
+              </a:lnSpc>
+            </a:pPr>
+            <a:r>
+              <a:rPr sz="1200" b="1">
+                <a:solidFill>
+                  <a:srgbClr val="1A1A1A"/>
+                </a:solidFill>
+                <a:latin typeface="Georgia"/>
+              </a:rPr>
+              <a:t>Full-resolution stem for the decoder</a:t>
+            </a:r>
+          </a:p>
+        </p:txBody>
+      </p:sp>
+      <p:sp>
+        <p:nvSpPr>
+          <p:cNvPr id="6" name="TextBox 5"/>
+          <p:cNvSpPr txBox="1"/>
+          <p:nvPr/>
+        </p:nvSpPr>
+        <p:spPr>
+          <a:xfrm>
+            <a:off x="5029200" y="1673352"/>
+            <a:ext cx="6492240" cy="822960"/>
           </a:xfrm>
           <a:prstGeom prst="rect">
             <a:avLst/>
@@ -11682,64 +12455,119 @@
             <a:r>
               <a:rPr sz="1100" b="0">
                 <a:solidFill>
-                  <a:srgbClr val="333333"/>
-                </a:solidFill>
-                <a:latin typeface="Georgia"/>
-              </a:rPr>
-              <a:t>Motion is continuous; the pixel grid is a sampling artefact. A corner tracked to (312.7, 188.2) is a real answer, and registration consumes it directly.</a:t>
-            </a:r>
-          </a:p>
-        </p:txBody>
-      </p:sp>
-      <p:sp>
-        <p:nvSpPr>
-          <p:cNvPr id="6" name="TextBox 5"/>
-          <p:cNvSpPr txBox="1"/>
-          <p:nvPr/>
-        </p:nvSpPr>
-        <p:spPr>
-          <a:xfrm>
-            <a:off x="685800" y="2697480"/>
-            <a:ext cx="10881360" cy="274320"/>
-          </a:xfrm>
-          <a:prstGeom prst="rect">
-            <a:avLst/>
-          </a:prstGeom>
-          <a:noFill/>
-        </p:spPr>
-        <p:txBody>
-          <a:bodyPr wrap="square">
-            <a:spAutoFit/>
-          </a:bodyPr>
-          <a:lstStyle/>
-          <a:p>
-            <a:pPr algn="l">
-              <a:lnSpc>
-                <a:spcPct val="100000"/>
-              </a:lnSpc>
-            </a:pPr>
+                  <a:srgbClr val="1A1A1A"/>
+                </a:solidFill>
+                <a:latin typeface="Georgia"/>
+              </a:rPr>
+              <a:t>Give the decoder a cheap full-resolution feature map so evidence actually varies within an 8x8 cell. This is the direct attack on the precision gap and on making continuous querying meaningful rather than nominal.</a:t>
+            </a:r>
+          </a:p>
+        </p:txBody>
+      </p:sp>
+      <p:sp>
+        <p:nvSpPr>
+          <p:cNvPr id="7" name="Rounded Rectangle 6"/>
+          <p:cNvSpPr/>
+          <p:nvPr/>
+        </p:nvSpPr>
+        <p:spPr>
+          <a:xfrm>
+            <a:off x="685800" y="2862072"/>
+            <a:ext cx="384048" cy="384048"/>
+          </a:xfrm>
+          <a:prstGeom prst="roundRect">
+            <a:avLst/>
+          </a:prstGeom>
+          <a:solidFill>
+            <a:srgbClr val="333333"/>
+          </a:solidFill>
+          <a:ln w="9525">
+            <a:solidFill>
+              <a:srgbClr val="8A8A8A"/>
+            </a:solidFill>
+          </a:ln>
+          <a:effectLst/>
+        </p:spPr>
+        <p:style>
+          <a:lnRef idx="1">
+            <a:schemeClr val="accent1"/>
+          </a:lnRef>
+          <a:fillRef idx="3">
+            <a:schemeClr val="accent1"/>
+          </a:fillRef>
+          <a:effectRef idx="2">
+            <a:schemeClr val="accent1"/>
+          </a:effectRef>
+          <a:fontRef idx="minor">
+            <a:schemeClr val="lt1"/>
+          </a:fontRef>
+        </p:style>
+        <p:txBody>
+          <a:bodyPr rtlCol="0" anchor="ctr" wrap="square" lIns="73152" rIns="73152"/>
+          <a:lstStyle/>
+          <a:p>
+            <a:pPr algn="ctr"/>
             <a:r>
               <a:rPr sz="1200" b="1">
                 <a:solidFill>
-                  <a:srgbClr val="1A1A1A"/>
-                </a:solidFill>
-                <a:latin typeface="Georgia"/>
-              </a:rPr>
-              <a:t>Why freeze the backbone?</a:t>
-            </a:r>
-          </a:p>
-        </p:txBody>
-      </p:sp>
-      <p:sp>
-        <p:nvSpPr>
-          <p:cNvPr id="7" name="TextBox 6"/>
-          <p:cNvSpPr txBox="1"/>
-          <p:nvPr/>
-        </p:nvSpPr>
-        <p:spPr>
-          <a:xfrm>
-            <a:off x="868680" y="2999232"/>
-            <a:ext cx="10607040" cy="594360"/>
+                  <a:srgbClr val="FFFFFF"/>
+                </a:solidFill>
+                <a:latin typeface="Georgia"/>
+              </a:rPr>
+              <a:t>2</a:t>
+            </a:r>
+          </a:p>
+        </p:txBody>
+      </p:sp>
+      <p:sp>
+        <p:nvSpPr>
+          <p:cNvPr id="8" name="TextBox 7"/>
+          <p:cNvSpPr txBox="1"/>
+          <p:nvPr/>
+        </p:nvSpPr>
+        <p:spPr>
+          <a:xfrm>
+            <a:off x="1234440" y="2843784"/>
+            <a:ext cx="3657600" cy="274320"/>
+          </a:xfrm>
+          <a:prstGeom prst="rect">
+            <a:avLst/>
+          </a:prstGeom>
+          <a:noFill/>
+        </p:spPr>
+        <p:txBody>
+          <a:bodyPr wrap="square">
+            <a:spAutoFit/>
+          </a:bodyPr>
+          <a:lstStyle/>
+          <a:p>
+            <a:pPr algn="l">
+              <a:lnSpc>
+                <a:spcPct val="100000"/>
+              </a:lnSpc>
+            </a:pPr>
+            <a:r>
+              <a:rPr sz="1200" b="1">
+                <a:solidFill>
+                  <a:srgbClr val="1A1A1A"/>
+                </a:solidFill>
+                <a:latin typeface="Georgia"/>
+              </a:rPr>
+              <a:t>Spring 4K evaluation</a:t>
+            </a:r>
+          </a:p>
+        </p:txBody>
+      </p:sp>
+      <p:sp>
+        <p:nvSpPr>
+          <p:cNvPr id="9" name="TextBox 8"/>
+          <p:cNvSpPr txBox="1"/>
+          <p:nvPr/>
+        </p:nvSpPr>
+        <p:spPr>
+          <a:xfrm>
+            <a:off x="5029200" y="2843784"/>
+            <a:ext cx="6492240" cy="822960"/>
           </a:xfrm>
           <a:prstGeom prst="rect">
             <a:avLst/>
@@ -11760,64 +12588,119 @@
             <a:r>
               <a:rPr sz="1100" b="0">
                 <a:solidFill>
-                  <a:srgbClr val="333333"/>
-                </a:solidFill>
-                <a:latin typeface="Georgia"/>
-              </a:rPr>
-              <a:t>To isolate the decoder as the only variable. Unfreezing diverged at batch 4 locally and has not been retried at scale.</a:t>
-            </a:r>
-          </a:p>
-        </p:txBody>
-      </p:sp>
-      <p:sp>
-        <p:nvSpPr>
-          <p:cNvPr id="8" name="TextBox 7"/>
-          <p:cNvSpPr txBox="1"/>
-          <p:nvPr/>
-        </p:nvSpPr>
-        <p:spPr>
-          <a:xfrm>
-            <a:off x="685800" y="3886200"/>
-            <a:ext cx="10881360" cy="274320"/>
-          </a:xfrm>
-          <a:prstGeom prst="rect">
-            <a:avLst/>
-          </a:prstGeom>
-          <a:noFill/>
-        </p:spPr>
-        <p:txBody>
-          <a:bodyPr wrap="square">
-            <a:spAutoFit/>
-          </a:bodyPr>
-          <a:lstStyle/>
-          <a:p>
-            <a:pPr algn="l">
-              <a:lnSpc>
-                <a:spcPct val="100000"/>
-              </a:lnSpc>
-            </a:pPr>
+                  <a:srgbClr val="1A1A1A"/>
+                </a:solidFill>
+                <a:latin typeface="Georgia"/>
+              </a:rPr>
+              <a:t>Spring provides ground truth at twice the input resolution. v3 can be queried there natively; v2 structurally cannot. The one test that demonstrates a capability rather than a margin.</a:t>
+            </a:r>
+          </a:p>
+        </p:txBody>
+      </p:sp>
+      <p:sp>
+        <p:nvSpPr>
+          <p:cNvPr id="10" name="Rounded Rectangle 9"/>
+          <p:cNvSpPr/>
+          <p:nvPr/>
+        </p:nvSpPr>
+        <p:spPr>
+          <a:xfrm>
+            <a:off x="685800" y="4032504"/>
+            <a:ext cx="384048" cy="384048"/>
+          </a:xfrm>
+          <a:prstGeom prst="roundRect">
+            <a:avLst/>
+          </a:prstGeom>
+          <a:solidFill>
+            <a:srgbClr val="333333"/>
+          </a:solidFill>
+          <a:ln w="9525">
+            <a:solidFill>
+              <a:srgbClr val="8A8A8A"/>
+            </a:solidFill>
+          </a:ln>
+          <a:effectLst/>
+        </p:spPr>
+        <p:style>
+          <a:lnRef idx="1">
+            <a:schemeClr val="accent1"/>
+          </a:lnRef>
+          <a:fillRef idx="3">
+            <a:schemeClr val="accent1"/>
+          </a:fillRef>
+          <a:effectRef idx="2">
+            <a:schemeClr val="accent1"/>
+          </a:effectRef>
+          <a:fontRef idx="minor">
+            <a:schemeClr val="lt1"/>
+          </a:fontRef>
+        </p:style>
+        <p:txBody>
+          <a:bodyPr rtlCol="0" anchor="ctr" wrap="square" lIns="73152" rIns="73152"/>
+          <a:lstStyle/>
+          <a:p>
+            <a:pPr algn="ctr"/>
             <a:r>
               <a:rPr sz="1200" b="1">
                 <a:solidFill>
-                  <a:srgbClr val="1A1A1A"/>
-                </a:solidFill>
-                <a:latin typeface="Georgia"/>
-              </a:rPr>
-              <a:t>Why is dense v3 slower than v2?</a:t>
-            </a:r>
-          </a:p>
-        </p:txBody>
-      </p:sp>
-      <p:sp>
-        <p:nvSpPr>
-          <p:cNvPr id="9" name="TextBox 8"/>
-          <p:cNvSpPr txBox="1"/>
-          <p:nvPr/>
-        </p:nvSpPr>
-        <p:spPr>
-          <a:xfrm>
-            <a:off x="868680" y="4187952"/>
-            <a:ext cx="10607040" cy="594360"/>
+                  <a:srgbClr val="FFFFFF"/>
+                </a:solidFill>
+                <a:latin typeface="Georgia"/>
+              </a:rPr>
+              <a:t>3</a:t>
+            </a:r>
+          </a:p>
+        </p:txBody>
+      </p:sp>
+      <p:sp>
+        <p:nvSpPr>
+          <p:cNvPr id="11" name="TextBox 10"/>
+          <p:cNvSpPr txBox="1"/>
+          <p:nvPr/>
+        </p:nvSpPr>
+        <p:spPr>
+          <a:xfrm>
+            <a:off x="1234440" y="4014216"/>
+            <a:ext cx="3657600" cy="274320"/>
+          </a:xfrm>
+          <a:prstGeom prst="rect">
+            <a:avLst/>
+          </a:prstGeom>
+          <a:noFill/>
+        </p:spPr>
+        <p:txBody>
+          <a:bodyPr wrap="square">
+            <a:spAutoFit/>
+          </a:bodyPr>
+          <a:lstStyle/>
+          <a:p>
+            <a:pPr algn="l">
+              <a:lnSpc>
+                <a:spcPct val="100000"/>
+              </a:lnSpc>
+            </a:pPr>
+            <a:r>
+              <a:rPr sz="1200" b="1">
+                <a:solidFill>
+                  <a:srgbClr val="1A1A1A"/>
+                </a:solidFill>
+                <a:latin typeface="Georgia"/>
+              </a:rPr>
+              <a:t>Jetson measurement</a:t>
+            </a:r>
+          </a:p>
+        </p:txBody>
+      </p:sp>
+      <p:sp>
+        <p:nvSpPr>
+          <p:cNvPr id="12" name="TextBox 11"/>
+          <p:cNvSpPr txBox="1"/>
+          <p:nvPr/>
+        </p:nvSpPr>
+        <p:spPr>
+          <a:xfrm>
+            <a:off x="5029200" y="4014216"/>
+            <a:ext cx="6492240" cy="822960"/>
           </a:xfrm>
           <a:prstGeom prst="rect">
             <a:avLst/>
@@ -11838,64 +12721,119 @@
             <a:r>
               <a:rPr sz="1100" b="0">
                 <a:solidFill>
-                  <a:srgbClr val="333333"/>
-                </a:solidFill>
-                <a:latin typeface="Georgia"/>
-              </a:rPr>
-              <a:t>v2 upsamples with one convolution that shares work across neighbouring pixels. v3 answers each query independently, giving up that sharing to gain the ability to answer only what is asked.</a:t>
-            </a:r>
-          </a:p>
-        </p:txBody>
-      </p:sp>
-      <p:sp>
-        <p:nvSpPr>
-          <p:cNvPr id="10" name="TextBox 9"/>
-          <p:cNvSpPr txBox="1"/>
-          <p:nvPr/>
-        </p:nvSpPr>
-        <p:spPr>
-          <a:xfrm>
-            <a:off x="685800" y="5074920"/>
-            <a:ext cx="10881360" cy="274320"/>
-          </a:xfrm>
-          <a:prstGeom prst="rect">
-            <a:avLst/>
-          </a:prstGeom>
-          <a:noFill/>
-        </p:spPr>
-        <p:txBody>
-          <a:bodyPr wrap="square">
-            <a:spAutoFit/>
-          </a:bodyPr>
-          <a:lstStyle/>
-          <a:p>
-            <a:pPr algn="l">
-              <a:lnSpc>
-                <a:spcPct val="100000"/>
-              </a:lnSpc>
-            </a:pPr>
+                  <a:srgbClr val="1A1A1A"/>
+                </a:solidFill>
+                <a:latin typeface="Georgia"/>
+              </a:rPr>
+              <a:t>Converts the edge claim from a design target into a result, or refutes it.</a:t>
+            </a:r>
+          </a:p>
+        </p:txBody>
+      </p:sp>
+      <p:sp>
+        <p:nvSpPr>
+          <p:cNvPr id="13" name="Rounded Rectangle 12"/>
+          <p:cNvSpPr/>
+          <p:nvPr/>
+        </p:nvSpPr>
+        <p:spPr>
+          <a:xfrm>
+            <a:off x="685800" y="5202936"/>
+            <a:ext cx="384048" cy="384048"/>
+          </a:xfrm>
+          <a:prstGeom prst="roundRect">
+            <a:avLst/>
+          </a:prstGeom>
+          <a:solidFill>
+            <a:srgbClr val="333333"/>
+          </a:solidFill>
+          <a:ln w="9525">
+            <a:solidFill>
+              <a:srgbClr val="8A8A8A"/>
+            </a:solidFill>
+          </a:ln>
+          <a:effectLst/>
+        </p:spPr>
+        <p:style>
+          <a:lnRef idx="1">
+            <a:schemeClr val="accent1"/>
+          </a:lnRef>
+          <a:fillRef idx="3">
+            <a:schemeClr val="accent1"/>
+          </a:fillRef>
+          <a:effectRef idx="2">
+            <a:schemeClr val="accent1"/>
+          </a:effectRef>
+          <a:fontRef idx="minor">
+            <a:schemeClr val="lt1"/>
+          </a:fontRef>
+        </p:style>
+        <p:txBody>
+          <a:bodyPr rtlCol="0" anchor="ctr" wrap="square" lIns="73152" rIns="73152"/>
+          <a:lstStyle/>
+          <a:p>
+            <a:pPr algn="ctr"/>
             <a:r>
               <a:rPr sz="1200" b="1">
                 <a:solidFill>
-                  <a:srgbClr val="1A1A1A"/>
-                </a:solidFill>
-                <a:latin typeface="Georgia"/>
-              </a:rPr>
-              <a:t>Is a tie on EPE worth the added complexity?</a:t>
-            </a:r>
-          </a:p>
-        </p:txBody>
-      </p:sp>
-      <p:sp>
-        <p:nvSpPr>
-          <p:cNvPr id="11" name="TextBox 10"/>
-          <p:cNvSpPr txBox="1"/>
-          <p:nvPr/>
-        </p:nvSpPr>
-        <p:spPr>
-          <a:xfrm>
-            <a:off x="868680" y="5376672"/>
-            <a:ext cx="10607040" cy="594360"/>
+                  <a:srgbClr val="FFFFFF"/>
+                </a:solidFill>
+                <a:latin typeface="Georgia"/>
+              </a:rPr>
+              <a:t>4</a:t>
+            </a:r>
+          </a:p>
+        </p:txBody>
+      </p:sp>
+      <p:sp>
+        <p:nvSpPr>
+          <p:cNvPr id="14" name="TextBox 13"/>
+          <p:cNvSpPr txBox="1"/>
+          <p:nvPr/>
+        </p:nvSpPr>
+        <p:spPr>
+          <a:xfrm>
+            <a:off x="1234440" y="5184648"/>
+            <a:ext cx="3657600" cy="274320"/>
+          </a:xfrm>
+          <a:prstGeom prst="rect">
+            <a:avLst/>
+          </a:prstGeom>
+          <a:noFill/>
+        </p:spPr>
+        <p:txBody>
+          <a:bodyPr wrap="square">
+            <a:spAutoFit/>
+          </a:bodyPr>
+          <a:lstStyle/>
+          <a:p>
+            <a:pPr algn="l">
+              <a:lnSpc>
+                <a:spcPct val="100000"/>
+              </a:lnSpc>
+            </a:pPr>
+            <a:r>
+              <a:rPr sz="1200" b="1">
+                <a:solidFill>
+                  <a:srgbClr val="1A1A1A"/>
+                </a:solidFill>
+                <a:latin typeface="Georgia"/>
+              </a:rPr>
+              <a:t>Field or survey imagery</a:t>
+            </a:r>
+          </a:p>
+        </p:txBody>
+      </p:sp>
+      <p:sp>
+        <p:nvSpPr>
+          <p:cNvPr id="15" name="TextBox 14"/>
+          <p:cNvSpPr txBox="1"/>
+          <p:nvPr/>
+        </p:nvSpPr>
+        <p:spPr>
+          <a:xfrm>
+            <a:off x="5029200" y="5184648"/>
+            <a:ext cx="6492240" cy="822960"/>
           </a:xfrm>
           <a:prstGeom prst="rect">
             <a:avLst/>
@@ -11916,18 +12854,18 @@
             <a:r>
               <a:rPr sz="1100" b="0">
                 <a:solidFill>
-                  <a:srgbClr val="333333"/>
-                </a:solidFill>
-                <a:latin typeface="Georgia"/>
-              </a:rPr>
-              <a:t>Not on its own. It is worth it if you need queryability, cheap repeat access, or confidence values. For plain dense flow, v2 remains the better choice, and I would say so.</a:t>
-            </a:r>
-          </a:p>
-        </p:txBody>
-      </p:sp>
-      <p:sp>
-        <p:nvSpPr>
-          <p:cNvPr id="12" name="TextBox 11"/>
+                  <a:srgbClr val="1A1A1A"/>
+                </a:solidFill>
+                <a:latin typeface="Georgia"/>
+              </a:rPr>
+              <a:t>A registration demonstration on lab data would test the actual use case.</a:t>
+            </a:r>
+          </a:p>
+        </p:txBody>
+      </p:sp>
+      <p:sp>
+        <p:nvSpPr>
+          <p:cNvPr id="16" name="TextBox 15"/>
           <p:cNvSpPr txBox="1"/>
           <p:nvPr/>
         </p:nvSpPr>
@@ -11966,7 +12904,7 @@
       </p:sp>
       <p:sp>
         <p:nvSpPr>
-          <p:cNvPr id="13" name="TextBox 12"/>
+          <p:cNvPr id="17" name="TextBox 16"/>
           <p:cNvSpPr txBox="1"/>
           <p:nvPr/>
         </p:nvSpPr>
@@ -12670,6 +13608,500 @@
                 <a:latin typeface="Georgia"/>
               </a:rPr>
               <a:t>2</a:t>
+            </a:r>
+          </a:p>
+        </p:txBody>
+      </p:sp>
+    </p:spTree>
+  </p:cSld>
+  <p:clrMapOvr>
+    <a:masterClrMapping/>
+  </p:clrMapOvr>
+</p:sld>
+</file>
+
+<file path=ppt/slides/slide20.xml><?xml version="1.0" encoding="utf-8"?>
+<p:sld xmlns:a="http://schemas.openxmlformats.org/drawingml/2006/main" xmlns:p="http://schemas.openxmlformats.org/presentationml/2006/main" xmlns:r="http://schemas.openxmlformats.org/officeDocument/2006/relationships">
+  <p:cSld>
+    <p:bg>
+      <p:bgPr>
+        <a:solidFill>
+          <a:srgbClr val="FFFFFF"/>
+        </a:solidFill>
+        <a:effectLst/>
+      </p:bgPr>
+    </p:bg>
+    <p:spTree>
+      <p:nvGrpSpPr>
+        <p:cNvPr id="1" name=""/>
+        <p:cNvGrpSpPr/>
+        <p:nvPr/>
+      </p:nvGrpSpPr>
+      <p:grpSpPr/>
+      <p:sp>
+        <p:nvSpPr>
+          <p:cNvPr id="2" name="TextBox 1"/>
+          <p:cNvSpPr txBox="1"/>
+          <p:nvPr/>
+        </p:nvSpPr>
+        <p:spPr>
+          <a:xfrm>
+            <a:off x="685800" y="384048"/>
+            <a:ext cx="10515600" cy="274320"/>
+          </a:xfrm>
+          <a:prstGeom prst="rect">
+            <a:avLst/>
+          </a:prstGeom>
+          <a:noFill/>
+        </p:spPr>
+        <p:txBody>
+          <a:bodyPr wrap="square">
+            <a:spAutoFit/>
+          </a:bodyPr>
+          <a:lstStyle/>
+          <a:p>
+            <a:pPr algn="l">
+              <a:lnSpc>
+                <a:spcPct val="100000"/>
+              </a:lnSpc>
+            </a:pPr>
+            <a:r>
+              <a:rPr sz="1050" b="1">
+                <a:solidFill>
+                  <a:srgbClr val="333333"/>
+                </a:solidFill>
+                <a:latin typeface="Georgia"/>
+              </a:rPr>
+              <a:t>ANTICIPATED QUESTIONS</a:t>
+            </a:r>
+          </a:p>
+        </p:txBody>
+      </p:sp>
+      <p:sp>
+        <p:nvSpPr>
+          <p:cNvPr id="3" name="TextBox 2"/>
+          <p:cNvSpPr txBox="1"/>
+          <p:nvPr/>
+        </p:nvSpPr>
+        <p:spPr>
+          <a:xfrm>
+            <a:off x="667512" y="658368"/>
+            <a:ext cx="10881360" cy="731520"/>
+          </a:xfrm>
+          <a:prstGeom prst="rect">
+            <a:avLst/>
+          </a:prstGeom>
+          <a:noFill/>
+        </p:spPr>
+        <p:txBody>
+          <a:bodyPr wrap="square">
+            <a:spAutoFit/>
+          </a:bodyPr>
+          <a:lstStyle/>
+          <a:p>
+            <a:pPr algn="l">
+              <a:lnSpc>
+                <a:spcPct val="100000"/>
+              </a:lnSpc>
+            </a:pPr>
+            <a:r>
+              <a:rPr sz="2400" b="1">
+                <a:solidFill>
+                  <a:srgbClr val="1A1A1A"/>
+                </a:solidFill>
+                <a:latin typeface="Georgia"/>
+              </a:rPr>
+              <a:t/>
+            </a:r>
+          </a:p>
+        </p:txBody>
+      </p:sp>
+      <p:sp>
+        <p:nvSpPr>
+          <p:cNvPr id="4" name="TextBox 3"/>
+          <p:cNvSpPr txBox="1"/>
+          <p:nvPr/>
+        </p:nvSpPr>
+        <p:spPr>
+          <a:xfrm>
+            <a:off x="685800" y="1508760"/>
+            <a:ext cx="10881360" cy="274320"/>
+          </a:xfrm>
+          <a:prstGeom prst="rect">
+            <a:avLst/>
+          </a:prstGeom>
+          <a:noFill/>
+        </p:spPr>
+        <p:txBody>
+          <a:bodyPr wrap="square">
+            <a:spAutoFit/>
+          </a:bodyPr>
+          <a:lstStyle/>
+          <a:p>
+            <a:pPr algn="l">
+              <a:lnSpc>
+                <a:spcPct val="100000"/>
+              </a:lnSpc>
+            </a:pPr>
+            <a:r>
+              <a:rPr sz="1200" b="1">
+                <a:solidFill>
+                  <a:srgbClr val="1A1A1A"/>
+                </a:solidFill>
+                <a:latin typeface="Georgia"/>
+              </a:rPr>
+              <a:t>Why is flow defined between pixels at all?</a:t>
+            </a:r>
+          </a:p>
+        </p:txBody>
+      </p:sp>
+      <p:sp>
+        <p:nvSpPr>
+          <p:cNvPr id="5" name="TextBox 4"/>
+          <p:cNvSpPr txBox="1"/>
+          <p:nvPr/>
+        </p:nvSpPr>
+        <p:spPr>
+          <a:xfrm>
+            <a:off x="868680" y="1810512"/>
+            <a:ext cx="10607040" cy="594360"/>
+          </a:xfrm>
+          <a:prstGeom prst="rect">
+            <a:avLst/>
+          </a:prstGeom>
+          <a:noFill/>
+        </p:spPr>
+        <p:txBody>
+          <a:bodyPr wrap="square">
+            <a:spAutoFit/>
+          </a:bodyPr>
+          <a:lstStyle/>
+          <a:p>
+            <a:pPr algn="l">
+              <a:lnSpc>
+                <a:spcPct val="112000"/>
+              </a:lnSpc>
+            </a:pPr>
+            <a:r>
+              <a:rPr sz="1100" b="0">
+                <a:solidFill>
+                  <a:srgbClr val="333333"/>
+                </a:solidFill>
+                <a:latin typeface="Georgia"/>
+              </a:rPr>
+              <a:t>Motion is continuous; the pixel grid is a sampling artefact. A corner tracked to (312.7, 188.2) is a real answer, and registration consumes it directly.</a:t>
+            </a:r>
+          </a:p>
+        </p:txBody>
+      </p:sp>
+      <p:sp>
+        <p:nvSpPr>
+          <p:cNvPr id="6" name="TextBox 5"/>
+          <p:cNvSpPr txBox="1"/>
+          <p:nvPr/>
+        </p:nvSpPr>
+        <p:spPr>
+          <a:xfrm>
+            <a:off x="685800" y="2697480"/>
+            <a:ext cx="10881360" cy="274320"/>
+          </a:xfrm>
+          <a:prstGeom prst="rect">
+            <a:avLst/>
+          </a:prstGeom>
+          <a:noFill/>
+        </p:spPr>
+        <p:txBody>
+          <a:bodyPr wrap="square">
+            <a:spAutoFit/>
+          </a:bodyPr>
+          <a:lstStyle/>
+          <a:p>
+            <a:pPr algn="l">
+              <a:lnSpc>
+                <a:spcPct val="100000"/>
+              </a:lnSpc>
+            </a:pPr>
+            <a:r>
+              <a:rPr sz="1200" b="1">
+                <a:solidFill>
+                  <a:srgbClr val="1A1A1A"/>
+                </a:solidFill>
+                <a:latin typeface="Georgia"/>
+              </a:rPr>
+              <a:t>Why freeze the backbone?</a:t>
+            </a:r>
+          </a:p>
+        </p:txBody>
+      </p:sp>
+      <p:sp>
+        <p:nvSpPr>
+          <p:cNvPr id="7" name="TextBox 6"/>
+          <p:cNvSpPr txBox="1"/>
+          <p:nvPr/>
+        </p:nvSpPr>
+        <p:spPr>
+          <a:xfrm>
+            <a:off x="868680" y="2999232"/>
+            <a:ext cx="10607040" cy="594360"/>
+          </a:xfrm>
+          <a:prstGeom prst="rect">
+            <a:avLst/>
+          </a:prstGeom>
+          <a:noFill/>
+        </p:spPr>
+        <p:txBody>
+          <a:bodyPr wrap="square">
+            <a:spAutoFit/>
+          </a:bodyPr>
+          <a:lstStyle/>
+          <a:p>
+            <a:pPr algn="l">
+              <a:lnSpc>
+                <a:spcPct val="112000"/>
+              </a:lnSpc>
+            </a:pPr>
+            <a:r>
+              <a:rPr sz="1100" b="0">
+                <a:solidFill>
+                  <a:srgbClr val="333333"/>
+                </a:solidFill>
+                <a:latin typeface="Georgia"/>
+              </a:rPr>
+              <a:t>To isolate the decoder as the only variable. Unfreezing diverged at batch 4 locally and has not been retried at scale.</a:t>
+            </a:r>
+          </a:p>
+        </p:txBody>
+      </p:sp>
+      <p:sp>
+        <p:nvSpPr>
+          <p:cNvPr id="8" name="TextBox 7"/>
+          <p:cNvSpPr txBox="1"/>
+          <p:nvPr/>
+        </p:nvSpPr>
+        <p:spPr>
+          <a:xfrm>
+            <a:off x="685800" y="3886200"/>
+            <a:ext cx="10881360" cy="274320"/>
+          </a:xfrm>
+          <a:prstGeom prst="rect">
+            <a:avLst/>
+          </a:prstGeom>
+          <a:noFill/>
+        </p:spPr>
+        <p:txBody>
+          <a:bodyPr wrap="square">
+            <a:spAutoFit/>
+          </a:bodyPr>
+          <a:lstStyle/>
+          <a:p>
+            <a:pPr algn="l">
+              <a:lnSpc>
+                <a:spcPct val="100000"/>
+              </a:lnSpc>
+            </a:pPr>
+            <a:r>
+              <a:rPr sz="1200" b="1">
+                <a:solidFill>
+                  <a:srgbClr val="1A1A1A"/>
+                </a:solidFill>
+                <a:latin typeface="Georgia"/>
+              </a:rPr>
+              <a:t>Why is dense v3 slower than v2?</a:t>
+            </a:r>
+          </a:p>
+        </p:txBody>
+      </p:sp>
+      <p:sp>
+        <p:nvSpPr>
+          <p:cNvPr id="9" name="TextBox 8"/>
+          <p:cNvSpPr txBox="1"/>
+          <p:nvPr/>
+        </p:nvSpPr>
+        <p:spPr>
+          <a:xfrm>
+            <a:off x="868680" y="4187952"/>
+            <a:ext cx="10607040" cy="594360"/>
+          </a:xfrm>
+          <a:prstGeom prst="rect">
+            <a:avLst/>
+          </a:prstGeom>
+          <a:noFill/>
+        </p:spPr>
+        <p:txBody>
+          <a:bodyPr wrap="square">
+            <a:spAutoFit/>
+          </a:bodyPr>
+          <a:lstStyle/>
+          <a:p>
+            <a:pPr algn="l">
+              <a:lnSpc>
+                <a:spcPct val="112000"/>
+              </a:lnSpc>
+            </a:pPr>
+            <a:r>
+              <a:rPr sz="1100" b="0">
+                <a:solidFill>
+                  <a:srgbClr val="333333"/>
+                </a:solidFill>
+                <a:latin typeface="Georgia"/>
+              </a:rPr>
+              <a:t>v2 upsamples with one convolution that shares work across neighbouring pixels. v3 answers each query independently, giving up that sharing to gain the ability to answer only what is asked.</a:t>
+            </a:r>
+          </a:p>
+        </p:txBody>
+      </p:sp>
+      <p:sp>
+        <p:nvSpPr>
+          <p:cNvPr id="10" name="TextBox 9"/>
+          <p:cNvSpPr txBox="1"/>
+          <p:nvPr/>
+        </p:nvSpPr>
+        <p:spPr>
+          <a:xfrm>
+            <a:off x="685800" y="5074920"/>
+            <a:ext cx="10881360" cy="274320"/>
+          </a:xfrm>
+          <a:prstGeom prst="rect">
+            <a:avLst/>
+          </a:prstGeom>
+          <a:noFill/>
+        </p:spPr>
+        <p:txBody>
+          <a:bodyPr wrap="square">
+            <a:spAutoFit/>
+          </a:bodyPr>
+          <a:lstStyle/>
+          <a:p>
+            <a:pPr algn="l">
+              <a:lnSpc>
+                <a:spcPct val="100000"/>
+              </a:lnSpc>
+            </a:pPr>
+            <a:r>
+              <a:rPr sz="1200" b="1">
+                <a:solidFill>
+                  <a:srgbClr val="1A1A1A"/>
+                </a:solidFill>
+                <a:latin typeface="Georgia"/>
+              </a:rPr>
+              <a:t>Is a tie on EPE worth the added complexity?</a:t>
+            </a:r>
+          </a:p>
+        </p:txBody>
+      </p:sp>
+      <p:sp>
+        <p:nvSpPr>
+          <p:cNvPr id="11" name="TextBox 10"/>
+          <p:cNvSpPr txBox="1"/>
+          <p:nvPr/>
+        </p:nvSpPr>
+        <p:spPr>
+          <a:xfrm>
+            <a:off x="868680" y="5376672"/>
+            <a:ext cx="10607040" cy="594360"/>
+          </a:xfrm>
+          <a:prstGeom prst="rect">
+            <a:avLst/>
+          </a:prstGeom>
+          <a:noFill/>
+        </p:spPr>
+        <p:txBody>
+          <a:bodyPr wrap="square">
+            <a:spAutoFit/>
+          </a:bodyPr>
+          <a:lstStyle/>
+          <a:p>
+            <a:pPr algn="l">
+              <a:lnSpc>
+                <a:spcPct val="112000"/>
+              </a:lnSpc>
+            </a:pPr>
+            <a:r>
+              <a:rPr sz="1100" b="0">
+                <a:solidFill>
+                  <a:srgbClr val="333333"/>
+                </a:solidFill>
+                <a:latin typeface="Georgia"/>
+              </a:rPr>
+              <a:t>Not on its own. It is worth it if you need queryability, cheap repeat access, or confidence values. For plain dense flow, v2 remains the better choice, and I would say so.</a:t>
+            </a:r>
+          </a:p>
+        </p:txBody>
+      </p:sp>
+      <p:sp>
+        <p:nvSpPr>
+          <p:cNvPr id="12" name="TextBox 11"/>
+          <p:cNvSpPr txBox="1"/>
+          <p:nvPr/>
+        </p:nvSpPr>
+        <p:spPr>
+          <a:xfrm>
+            <a:off x="685800" y="6419088"/>
+            <a:ext cx="7315200" cy="274320"/>
+          </a:xfrm>
+          <a:prstGeom prst="rect">
+            <a:avLst/>
+          </a:prstGeom>
+          <a:noFill/>
+        </p:spPr>
+        <p:txBody>
+          <a:bodyPr wrap="square">
+            <a:spAutoFit/>
+          </a:bodyPr>
+          <a:lstStyle/>
+          <a:p>
+            <a:pPr algn="l">
+              <a:lnSpc>
+                <a:spcPct val="100000"/>
+              </a:lnSpc>
+            </a:pPr>
+            <a:r>
+              <a:rPr sz="900" b="0">
+                <a:solidFill>
+                  <a:srgbClr val="8A8A8A"/>
+                </a:solidFill>
+                <a:latin typeface="Georgia"/>
+              </a:rPr>
+              <a:t>NeuFlow v3, S. Raghav Srinivasan</a:t>
+            </a:r>
+          </a:p>
+        </p:txBody>
+      </p:sp>
+      <p:sp>
+        <p:nvSpPr>
+          <p:cNvPr id="13" name="TextBox 12"/>
+          <p:cNvSpPr txBox="1"/>
+          <p:nvPr/>
+        </p:nvSpPr>
+        <p:spPr>
+          <a:xfrm>
+            <a:off x="10607040" y="6419088"/>
+            <a:ext cx="1097280" cy="274320"/>
+          </a:xfrm>
+          <a:prstGeom prst="rect">
+            <a:avLst/>
+          </a:prstGeom>
+          <a:noFill/>
+        </p:spPr>
+        <p:txBody>
+          <a:bodyPr wrap="square">
+            <a:spAutoFit/>
+          </a:bodyPr>
+          <a:lstStyle/>
+          <a:p>
+            <a:pPr algn="l">
+              <a:lnSpc>
+                <a:spcPct val="100000"/>
+              </a:lnSpc>
+            </a:pPr>
+            <a:r>
+              <a:rPr sz="900" b="0">
+                <a:solidFill>
+                  <a:srgbClr val="8A8A8A"/>
+                </a:solidFill>
+                <a:latin typeface="Georgia"/>
+              </a:rPr>
+              <a:t>20</a:t>
             </a:r>
           </a:p>
         </p:txBody>

--- a/docs/NeuFlow_v3_status.pptx
+++ b/docs/NeuFlow_v3_status.pptx
@@ -7270,7 +7270,7 @@
         <p:spPr>
           <a:xfrm>
             <a:off x="960120" y="1463040"/>
-            <a:ext cx="10241280" cy="4063457"/>
+            <a:ext cx="10241280" cy="4086196"/>
           </a:xfrm>
           <a:prstGeom prst="rect">
             <a:avLst/>
@@ -7546,9 +7546,33 @@
           </a:p>
         </p:txBody>
       </p:sp>
-      <p:sp>
-        <p:nvSpPr>
-          <p:cNvPr id="4" name="TextBox 3"/>
+      <p:pic>
+        <p:nvPicPr>
+          <p:cNvPr id="4" name="Picture 3" descr="scenarios_tartanair.png"/>
+          <p:cNvPicPr>
+            <a:picLocks noChangeAspect="1"/>
+          </p:cNvPicPr>
+          <p:nvPr/>
+        </p:nvPicPr>
+        <p:blipFill>
+          <a:blip r:embed="rId2"/>
+          <a:stretch>
+            <a:fillRect/>
+          </a:stretch>
+        </p:blipFill>
+        <p:spPr>
+          <a:xfrm>
+            <a:off x="640080" y="1417320"/>
+            <a:ext cx="4779133" cy="4114800"/>
+          </a:xfrm>
+          <a:prstGeom prst="rect">
+            <a:avLst/>
+          </a:prstGeom>
+        </p:spPr>
+      </p:pic>
+      <p:sp>
+        <p:nvSpPr>
+          <p:cNvPr id="5" name="TextBox 4"/>
           <p:cNvSpPr txBox="1"/>
           <p:nvPr/>
         </p:nvSpPr>
@@ -7587,7 +7611,7 @@
       </p:sp>
       <p:sp>
         <p:nvSpPr>
-          <p:cNvPr id="5" name="TextBox 4"/>
+          <p:cNvPr id="6" name="TextBox 5"/>
           <p:cNvSpPr txBox="1"/>
           <p:nvPr/>
         </p:nvSpPr>
@@ -7626,7 +7650,7 @@
       </p:sp>
       <p:sp>
         <p:nvSpPr>
-          <p:cNvPr id="6" name="TextBox 5"/>
+          <p:cNvPr id="7" name="TextBox 6"/>
           <p:cNvSpPr txBox="1"/>
           <p:nvPr/>
         </p:nvSpPr>
@@ -7665,7 +7689,7 @@
       </p:sp>
       <p:sp>
         <p:nvSpPr>
-          <p:cNvPr id="7" name="Rectangle 6"/>
+          <p:cNvPr id="8" name="Rectangle 7"/>
           <p:cNvSpPr/>
           <p:nvPr/>
         </p:nvSpPr>
@@ -7709,7 +7733,7 @@
       </p:sp>
       <p:sp>
         <p:nvSpPr>
-          <p:cNvPr id="8" name="TextBox 7"/>
+          <p:cNvPr id="9" name="TextBox 8"/>
           <p:cNvSpPr txBox="1"/>
           <p:nvPr/>
         </p:nvSpPr>
@@ -7748,7 +7772,7 @@
       </p:sp>
       <p:sp>
         <p:nvSpPr>
-          <p:cNvPr id="9" name="TextBox 8"/>
+          <p:cNvPr id="10" name="TextBox 9"/>
           <p:cNvSpPr txBox="1"/>
           <p:nvPr/>
         </p:nvSpPr>
@@ -7787,7 +7811,7 @@
       </p:sp>
       <p:sp>
         <p:nvSpPr>
-          <p:cNvPr id="10" name="TextBox 9"/>
+          <p:cNvPr id="11" name="TextBox 10"/>
           <p:cNvSpPr txBox="1"/>
           <p:nvPr/>
         </p:nvSpPr>
@@ -7826,7 +7850,7 @@
       </p:sp>
       <p:sp>
         <p:nvSpPr>
-          <p:cNvPr id="11" name="TextBox 10"/>
+          <p:cNvPr id="12" name="TextBox 11"/>
           <p:cNvSpPr txBox="1"/>
           <p:nvPr/>
         </p:nvSpPr>
@@ -7865,7 +7889,7 @@
       </p:sp>
       <p:sp>
         <p:nvSpPr>
-          <p:cNvPr id="12" name="TextBox 11"/>
+          <p:cNvPr id="13" name="TextBox 12"/>
           <p:cNvSpPr txBox="1"/>
           <p:nvPr/>
         </p:nvSpPr>
@@ -7904,7 +7928,7 @@
       </p:sp>
       <p:sp>
         <p:nvSpPr>
-          <p:cNvPr id="13" name="TextBox 12"/>
+          <p:cNvPr id="14" name="TextBox 13"/>
           <p:cNvSpPr txBox="1"/>
           <p:nvPr/>
         </p:nvSpPr>
@@ -7943,7 +7967,7 @@
       </p:sp>
       <p:sp>
         <p:nvSpPr>
-          <p:cNvPr id="14" name="TextBox 13"/>
+          <p:cNvPr id="15" name="TextBox 14"/>
           <p:cNvSpPr txBox="1"/>
           <p:nvPr/>
         </p:nvSpPr>
@@ -7982,7 +8006,7 @@
       </p:sp>
       <p:sp>
         <p:nvSpPr>
-          <p:cNvPr id="15" name="TextBox 14"/>
+          <p:cNvPr id="16" name="TextBox 15"/>
           <p:cNvSpPr txBox="1"/>
           <p:nvPr/>
         </p:nvSpPr>
@@ -8021,7 +8045,7 @@
       </p:sp>
       <p:sp>
         <p:nvSpPr>
-          <p:cNvPr id="16" name="TextBox 15"/>
+          <p:cNvPr id="17" name="TextBox 16"/>
           <p:cNvSpPr txBox="1"/>
           <p:nvPr/>
         </p:nvSpPr>
@@ -8060,7 +8084,7 @@
       </p:sp>
       <p:sp>
         <p:nvSpPr>
-          <p:cNvPr id="17" name="TextBox 16"/>
+          <p:cNvPr id="18" name="TextBox 17"/>
           <p:cNvSpPr txBox="1"/>
           <p:nvPr/>
         </p:nvSpPr>
@@ -8099,7 +8123,7 @@
       </p:sp>
       <p:sp>
         <p:nvSpPr>
-          <p:cNvPr id="18" name="TextBox 17"/>
+          <p:cNvPr id="19" name="TextBox 18"/>
           <p:cNvSpPr txBox="1"/>
           <p:nvPr/>
         </p:nvSpPr>
@@ -8138,7 +8162,7 @@
       </p:sp>
       <p:sp>
         <p:nvSpPr>
-          <p:cNvPr id="19" name="TextBox 18"/>
+          <p:cNvPr id="20" name="TextBox 19"/>
           <p:cNvSpPr txBox="1"/>
           <p:nvPr/>
         </p:nvSpPr>
@@ -8177,7 +8201,7 @@
       </p:sp>
       <p:sp>
         <p:nvSpPr>
-          <p:cNvPr id="20" name="TextBox 19"/>
+          <p:cNvPr id="21" name="TextBox 20"/>
           <p:cNvSpPr txBox="1"/>
           <p:nvPr/>
         </p:nvSpPr>
@@ -8216,7 +8240,7 @@
       </p:sp>
       <p:sp>
         <p:nvSpPr>
-          <p:cNvPr id="21" name="TextBox 20"/>
+          <p:cNvPr id="22" name="TextBox 21"/>
           <p:cNvSpPr txBox="1"/>
           <p:nvPr/>
         </p:nvSpPr>
@@ -8255,7 +8279,7 @@
       </p:sp>
       <p:sp>
         <p:nvSpPr>
-          <p:cNvPr id="22" name="TextBox 21"/>
+          <p:cNvPr id="23" name="TextBox 22"/>
           <p:cNvSpPr txBox="1"/>
           <p:nvPr/>
         </p:nvSpPr>
@@ -8294,7 +8318,7 @@
       </p:sp>
       <p:sp>
         <p:nvSpPr>
-          <p:cNvPr id="23" name="TextBox 22"/>
+          <p:cNvPr id="24" name="TextBox 23"/>
           <p:cNvSpPr txBox="1"/>
           <p:nvPr/>
         </p:nvSpPr>
@@ -8333,7 +8357,7 @@
       </p:sp>
       <p:sp>
         <p:nvSpPr>
-          <p:cNvPr id="24" name="TextBox 23"/>
+          <p:cNvPr id="25" name="TextBox 24"/>
           <p:cNvSpPr txBox="1"/>
           <p:nvPr/>
         </p:nvSpPr>
@@ -8372,7 +8396,7 @@
       </p:sp>
       <p:sp>
         <p:nvSpPr>
-          <p:cNvPr id="25" name="TextBox 24"/>
+          <p:cNvPr id="26" name="TextBox 25"/>
           <p:cNvSpPr txBox="1"/>
           <p:nvPr/>
         </p:nvSpPr>
@@ -8411,7 +8435,7 @@
       </p:sp>
       <p:sp>
         <p:nvSpPr>
-          <p:cNvPr id="26" name="TextBox 25"/>
+          <p:cNvPr id="27" name="TextBox 26"/>
           <p:cNvSpPr txBox="1"/>
           <p:nvPr/>
         </p:nvSpPr>
@@ -8450,7 +8474,7 @@
       </p:sp>
       <p:sp>
         <p:nvSpPr>
-          <p:cNvPr id="27" name="TextBox 26"/>
+          <p:cNvPr id="28" name="TextBox 27"/>
           <p:cNvSpPr txBox="1"/>
           <p:nvPr/>
         </p:nvSpPr>
@@ -8489,7 +8513,7 @@
       </p:sp>
       <p:sp>
         <p:nvSpPr>
-          <p:cNvPr id="28" name="TextBox 27"/>
+          <p:cNvPr id="29" name="TextBox 28"/>
           <p:cNvSpPr txBox="1"/>
           <p:nvPr/>
         </p:nvSpPr>
@@ -8528,7 +8552,7 @@
       </p:sp>
       <p:sp>
         <p:nvSpPr>
-          <p:cNvPr id="29" name="TextBox 28"/>
+          <p:cNvPr id="30" name="TextBox 29"/>
           <p:cNvSpPr txBox="1"/>
           <p:nvPr/>
         </p:nvSpPr>
@@ -8727,7 +8751,7 @@
       </p:sp>
       <p:sp>
         <p:nvSpPr>
-          <p:cNvPr id="30" name="TextBox 29"/>
+          <p:cNvPr id="31" name="TextBox 30"/>
           <p:cNvSpPr txBox="1"/>
           <p:nvPr/>
         </p:nvSpPr>
@@ -8766,7 +8790,7 @@
       </p:sp>
       <p:sp>
         <p:nvSpPr>
-          <p:cNvPr id="31" name="TextBox 30"/>
+          <p:cNvPr id="32" name="TextBox 31"/>
           <p:cNvSpPr txBox="1"/>
           <p:nvPr/>
         </p:nvSpPr>
